--- a/lecture/deck.pptx
+++ b/lecture/deck.pptx
@@ -4,22 +4,25 @@
   <p:sldMasterIdLst>
     <p:sldMasterId id="2147483648" r:id="rId1"/>
   </p:sldMasterIdLst>
+  <p:notesMasterIdLst>
+    <p:notesMasterId r:id="rId15"/>
+  </p:notesMasterIdLst>
   <p:sldIdLst>
-    <p:sldId id="256" r:id="rId7"/>
-    <p:sldId id="257" r:id="rId9"/>
-    <p:sldId id="258" r:id="rId10"/>
-    <p:sldId id="259" r:id="rId11"/>
-    <p:sldId id="260" r:id="rId12"/>
-    <p:sldId id="261" r:id="rId13"/>
-    <p:sldId id="262" r:id="rId14"/>
-    <p:sldId id="263" r:id="rId15"/>
-    <p:sldId id="264" r:id="rId16"/>
-    <p:sldId id="265" r:id="rId17"/>
-    <p:sldId id="266" r:id="rId18"/>
-    <p:sldId id="267" r:id="rId19"/>
-    <p:sldId id="268" r:id="rId20"/>
+    <p:sldId id="256" r:id="rId2"/>
+    <p:sldId id="257" r:id="rId3"/>
+    <p:sldId id="258" r:id="rId4"/>
+    <p:sldId id="259" r:id="rId5"/>
+    <p:sldId id="260" r:id="rId6"/>
+    <p:sldId id="261" r:id="rId7"/>
+    <p:sldId id="262" r:id="rId8"/>
+    <p:sldId id="263" r:id="rId9"/>
+    <p:sldId id="264" r:id="rId10"/>
+    <p:sldId id="265" r:id="rId11"/>
+    <p:sldId id="266" r:id="rId12"/>
+    <p:sldId id="267" r:id="rId13"/>
+    <p:sldId id="268" r:id="rId14"/>
   </p:sldIdLst>
-  <p:sldSz cx="12191695" cy="6858000" type="screen4x3"/>
+  <p:sldSz cx="12192000" cy="6858000"/>
   <p:notesSz cx="6858000" cy="9144000"/>
   <p:defaultTextStyle>
     <a:defPPr>
@@ -116,11 +119,27 @@
       </a:defRPr>
     </a:lvl9pPr>
   </p:defaultTextStyle>
+  <p:extLst>
+    <p:ext uri="{EFAFB233-063F-42B5-8137-9DF3F51BA10A}">
+      <p15:sldGuideLst xmlns:p15="http://schemas.microsoft.com/office/powerpoint/2012/main">
+        <p15:guide id="1" orient="horz" pos="2160">
+          <p15:clr>
+            <a:srgbClr val="A4A3A4"/>
+          </p15:clr>
+        </p15:guide>
+        <p15:guide id="2" pos="2880">
+          <p15:clr>
+            <a:srgbClr val="A4A3A4"/>
+          </p15:clr>
+        </p15:guide>
+      </p15:sldGuideLst>
+    </p:ext>
+  </p:extLst>
 </p:presentation>
 </file>
 
 <file path=ppt/notesMasters/notesMaster1.xml><?xml version="1.0" encoding="utf-8"?>
-<p:notesMaster xmlns:a="http://schemas.openxmlformats.org/drawingml/2006/main" xmlns:p="http://schemas.openxmlformats.org/presentationml/2006/main" xmlns:r="http://schemas.openxmlformats.org/officeDocument/2006/relationships">
+<p:notesMaster xmlns:a="http://schemas.openxmlformats.org/drawingml/2006/main" xmlns:r="http://schemas.openxmlformats.org/officeDocument/2006/relationships" xmlns:p="http://schemas.openxmlformats.org/presentationml/2006/main">
   <p:cSld>
     <p:bg>
       <p:bgRef idx="1001">
@@ -141,241 +160,16 @@
           <a:chExt cx="0" cy="0"/>
         </a:xfrm>
       </p:grpSpPr>
-      <p:sp>
-        <p:nvSpPr>
-          <p:cNvPr id="2" name="Header Placeholder 1"/>
-          <p:cNvSpPr>
-            <a:spLocks noGrp="1"/>
-          </p:cNvSpPr>
-          <p:nvPr>
-            <p:ph type="hdr" sz="quarter"/>
-          </p:nvPr>
-        </p:nvSpPr>
-        <p:spPr>
-          <a:xfrm>
-            <a:off x="0" y="0"/>
-            <a:ext cx="2971800" cy="457200"/>
-          </a:xfrm>
-          <a:prstGeom prst="rect">
-            <a:avLst/>
-          </a:prstGeom>
-        </p:spPr>
-        <p:txBody>
-          <a:bodyPr vert="horz" lIns="91440" tIns="45720" rIns="91440" bIns="45720" rtlCol="0"/>
-          <a:lstStyle>
-            <a:lvl1pPr algn="l">
-              <a:defRPr sz="1200"/>
-            </a:lvl1pPr>
-          </a:lstStyle>
-          <a:p>
-            <a:endParaRPr lang="en-US"/>
-          </a:p>
-        </p:txBody>
-      </p:sp>
-      <p:sp>
-        <p:nvSpPr>
-          <p:cNvPr id="3" name="Date Placeholder 2"/>
-          <p:cNvSpPr>
-            <a:spLocks noGrp="1"/>
-          </p:cNvSpPr>
-          <p:nvPr>
-            <p:ph type="dt" idx="1"/>
-          </p:nvPr>
-        </p:nvSpPr>
-        <p:spPr>
-          <a:xfrm>
-            <a:off x="3884613" y="0"/>
-            <a:ext cx="2971800" cy="457200"/>
-          </a:xfrm>
-          <a:prstGeom prst="rect">
-            <a:avLst/>
-          </a:prstGeom>
-        </p:spPr>
-        <p:txBody>
-          <a:bodyPr vert="horz" lIns="91440" tIns="45720" rIns="91440" bIns="45720" rtlCol="0"/>
-          <a:lstStyle>
-            <a:lvl1pPr algn="r">
-              <a:defRPr sz="1200"/>
-            </a:lvl1pPr>
-          </a:lstStyle>
-          <a:p>
-            <a:fld id="{0F89C1C7-3DCD-1040-A9CF-14679D8B5DDD}" type="datetimeFigureOut">
-              <a:rPr lang="en-US" smtClean="0"/>
-              <a:t>10/17/16</a:t>
-            </a:fld>
-            <a:endParaRPr lang="en-US"/>
-          </a:p>
-        </p:txBody>
-      </p:sp>
-      <p:sp>
-        <p:nvSpPr>
-          <p:cNvPr id="4" name="Slide Image Placeholder 3"/>
-          <p:cNvSpPr>
-            <a:spLocks noGrp="1" noRot="1" noChangeAspect="1"/>
-          </p:cNvSpPr>
-          <p:nvPr>
-            <p:ph type="sldImg" idx="2"/>
-          </p:nvPr>
-        </p:nvSpPr>
-        <p:spPr>
-          <a:xfrm>
-            <a:off x="1143000" y="685800"/>
-            <a:ext cx="4572000" cy="3429000"/>
-          </a:xfrm>
-          <a:prstGeom prst="rect">
-            <a:avLst/>
-          </a:prstGeom>
-          <a:noFill/>
-          <a:ln w="12700">
-            <a:solidFill>
-              <a:prstClr val="black"/>
-            </a:solidFill>
-          </a:ln>
-        </p:spPr>
-        <p:txBody>
-          <a:bodyPr vert="horz" lIns="91440" tIns="45720" rIns="91440" bIns="45720" rtlCol="0" anchor="ctr"/>
-          <a:lstStyle/>
-          <a:p>
-            <a:endParaRPr lang="en-US"/>
-          </a:p>
-        </p:txBody>
-      </p:sp>
-      <p:sp>
-        <p:nvSpPr>
-          <p:cNvPr id="5" name="Notes Placeholder 4"/>
-          <p:cNvSpPr>
-            <a:spLocks noGrp="1"/>
-          </p:cNvSpPr>
-          <p:nvPr>
-            <p:ph type="body" sz="quarter" idx="3"/>
-          </p:nvPr>
-        </p:nvSpPr>
-        <p:spPr>
-          <a:xfrm>
-            <a:off x="685800" y="4343400"/>
-            <a:ext cx="5486400" cy="4114800"/>
-          </a:xfrm>
-          <a:prstGeom prst="rect">
-            <a:avLst/>
-          </a:prstGeom>
-        </p:spPr>
-        <p:txBody>
-          <a:bodyPr vert="horz" lIns="91440" tIns="45720" rIns="91440" bIns="45720" rtlCol="0"/>
-          <a:lstStyle/>
-          <a:p>
-            <a:pPr lvl="0"/>
-            <a:r>
-              <a:rPr lang="en-US" smtClean="0"/>
-              <a:t>Click to edit Master text styles</a:t>
-            </a:r>
-          </a:p>
-          <a:p>
-            <a:pPr lvl="1"/>
-            <a:r>
-              <a:rPr lang="en-US" smtClean="0"/>
-              <a:t>Second level</a:t>
-            </a:r>
-          </a:p>
-          <a:p>
-            <a:pPr lvl="2"/>
-            <a:r>
-              <a:rPr lang="en-US" smtClean="0"/>
-              <a:t>Third level</a:t>
-            </a:r>
-          </a:p>
-          <a:p>
-            <a:pPr lvl="3"/>
-            <a:r>
-              <a:rPr lang="en-US" smtClean="0"/>
-              <a:t>Fourth level</a:t>
-            </a:r>
-          </a:p>
-          <a:p>
-            <a:pPr lvl="4"/>
-            <a:r>
-              <a:rPr lang="en-US" smtClean="0"/>
-              <a:t>Fifth level</a:t>
-            </a:r>
-            <a:endParaRPr lang="en-US"/>
-          </a:p>
-        </p:txBody>
-      </p:sp>
-      <p:sp>
-        <p:nvSpPr>
-          <p:cNvPr id="6" name="Footer Placeholder 5"/>
-          <p:cNvSpPr>
-            <a:spLocks noGrp="1"/>
-          </p:cNvSpPr>
-          <p:nvPr>
-            <p:ph type="ftr" sz="quarter" idx="4"/>
-          </p:nvPr>
-        </p:nvSpPr>
-        <p:spPr>
-          <a:xfrm>
-            <a:off x="0" y="8685213"/>
-            <a:ext cx="2971800" cy="457200"/>
-          </a:xfrm>
-          <a:prstGeom prst="rect">
-            <a:avLst/>
-          </a:prstGeom>
-        </p:spPr>
-        <p:txBody>
-          <a:bodyPr vert="horz" lIns="91440" tIns="45720" rIns="91440" bIns="45720" rtlCol="0" anchor="b"/>
-          <a:lstStyle>
-            <a:lvl1pPr algn="l">
-              <a:defRPr sz="1200"/>
-            </a:lvl1pPr>
-          </a:lstStyle>
-          <a:p>
-            <a:endParaRPr lang="en-US"/>
-          </a:p>
-        </p:txBody>
-      </p:sp>
-      <p:sp>
-        <p:nvSpPr>
-          <p:cNvPr id="7" name="Slide Number Placeholder 6"/>
-          <p:cNvSpPr>
-            <a:spLocks noGrp="1"/>
-          </p:cNvSpPr>
-          <p:nvPr>
-            <p:ph type="sldNum" sz="quarter" idx="5"/>
-          </p:nvPr>
-        </p:nvSpPr>
-        <p:spPr>
-          <a:xfrm>
-            <a:off x="3884613" y="8685213"/>
-            <a:ext cx="2971800" cy="457200"/>
-          </a:xfrm>
-          <a:prstGeom prst="rect">
-            <a:avLst/>
-          </a:prstGeom>
-        </p:spPr>
-        <p:txBody>
-          <a:bodyPr vert="horz" lIns="91440" tIns="45720" rIns="91440" bIns="45720" rtlCol="0" anchor="b"/>
-          <a:lstStyle>
-            <a:lvl1pPr algn="r">
-              <a:defRPr sz="1200"/>
-            </a:lvl1pPr>
-          </a:lstStyle>
-          <a:p>
-            <a:fld id="{BB5E49A5-4136-284D-997B-48E1D791AD67}" type="slidenum">
-              <a:rPr lang="en-US" smtClean="0"/>
-              <a:t>‹#›</a:t>
-            </a:fld>
-            <a:endParaRPr lang="en-US"/>
-          </a:p>
-        </p:txBody>
-      </p:sp>
     </p:spTree>
     <p:extLst>
       <p:ext uri="{BB962C8B-B14F-4D97-AF65-F5344CB8AC3E}">
-        <p14:creationId xmlns:p14="http://schemas.microsoft.com/office/powerpoint/2010/main" val="2623252185"/>
+        <p14:creationId xmlns:p14="http://schemas.microsoft.com/office/powerpoint/2010/main" val="3303949687"/>
       </p:ext>
     </p:extLst>
   </p:cSld>
   <p:clrMap bg1="lt1" tx1="dk1" bg2="lt2" tx2="dk2" accent1="accent1" accent2="accent2" accent3="accent3" accent4="accent4" accent5="accent5" accent6="accent6" hlink="hlink" folHlink="folHlink"/>
   <p:notesStyle>
-    <a:lvl1pPr marL="0" algn="l" defTabSz="457200" rtl="0" eaLnBrk="1" latinLnBrk="0" hangingPunct="1">
+    <a:lvl1pPr marL="0" algn="l" defTabSz="914400" rtl="0" eaLnBrk="1" latinLnBrk="0" hangingPunct="1">
       <a:defRPr sz="1200" kern="1200">
         <a:solidFill>
           <a:schemeClr val="tx1"/>
@@ -385,7 +179,7 @@
         <a:cs typeface="+mn-cs"/>
       </a:defRPr>
     </a:lvl1pPr>
-    <a:lvl2pPr marL="457200" algn="l" defTabSz="457200" rtl="0" eaLnBrk="1" latinLnBrk="0" hangingPunct="1">
+    <a:lvl2pPr marL="457200" algn="l" defTabSz="914400" rtl="0" eaLnBrk="1" latinLnBrk="0" hangingPunct="1">
       <a:defRPr sz="1200" kern="1200">
         <a:solidFill>
           <a:schemeClr val="tx1"/>
@@ -395,7 +189,7 @@
         <a:cs typeface="+mn-cs"/>
       </a:defRPr>
     </a:lvl2pPr>
-    <a:lvl3pPr marL="914400" algn="l" defTabSz="457200" rtl="0" eaLnBrk="1" latinLnBrk="0" hangingPunct="1">
+    <a:lvl3pPr marL="914400" algn="l" defTabSz="914400" rtl="0" eaLnBrk="1" latinLnBrk="0" hangingPunct="1">
       <a:defRPr sz="1200" kern="1200">
         <a:solidFill>
           <a:schemeClr val="tx1"/>
@@ -405,7 +199,7 @@
         <a:cs typeface="+mn-cs"/>
       </a:defRPr>
     </a:lvl3pPr>
-    <a:lvl4pPr marL="1371600" algn="l" defTabSz="457200" rtl="0" eaLnBrk="1" latinLnBrk="0" hangingPunct="1">
+    <a:lvl4pPr marL="1371600" algn="l" defTabSz="914400" rtl="0" eaLnBrk="1" latinLnBrk="0" hangingPunct="1">
       <a:defRPr sz="1200" kern="1200">
         <a:solidFill>
           <a:schemeClr val="tx1"/>
@@ -415,7 +209,7 @@
         <a:cs typeface="+mn-cs"/>
       </a:defRPr>
     </a:lvl4pPr>
-    <a:lvl5pPr marL="1828800" algn="l" defTabSz="457200" rtl="0" eaLnBrk="1" latinLnBrk="0" hangingPunct="1">
+    <a:lvl5pPr marL="1828800" algn="l" defTabSz="914400" rtl="0" eaLnBrk="1" latinLnBrk="0" hangingPunct="1">
       <a:defRPr sz="1200" kern="1200">
         <a:solidFill>
           <a:schemeClr val="tx1"/>
@@ -425,7 +219,7 @@
         <a:cs typeface="+mn-cs"/>
       </a:defRPr>
     </a:lvl5pPr>
-    <a:lvl6pPr marL="2286000" algn="l" defTabSz="457200" rtl="0" eaLnBrk="1" latinLnBrk="0" hangingPunct="1">
+    <a:lvl6pPr marL="2286000" algn="l" defTabSz="914400" rtl="0" eaLnBrk="1" latinLnBrk="0" hangingPunct="1">
       <a:defRPr sz="1200" kern="1200">
         <a:solidFill>
           <a:schemeClr val="tx1"/>
@@ -435,7 +229,7 @@
         <a:cs typeface="+mn-cs"/>
       </a:defRPr>
     </a:lvl6pPr>
-    <a:lvl7pPr marL="2743200" algn="l" defTabSz="457200" rtl="0" eaLnBrk="1" latinLnBrk="0" hangingPunct="1">
+    <a:lvl7pPr marL="2743200" algn="l" defTabSz="914400" rtl="0" eaLnBrk="1" latinLnBrk="0" hangingPunct="1">
       <a:defRPr sz="1200" kern="1200">
         <a:solidFill>
           <a:schemeClr val="tx1"/>
@@ -445,7 +239,7 @@
         <a:cs typeface="+mn-cs"/>
       </a:defRPr>
     </a:lvl7pPr>
-    <a:lvl8pPr marL="3200400" algn="l" defTabSz="457200" rtl="0" eaLnBrk="1" latinLnBrk="0" hangingPunct="1">
+    <a:lvl8pPr marL="3200400" algn="l" defTabSz="914400" rtl="0" eaLnBrk="1" latinLnBrk="0" hangingPunct="1">
       <a:defRPr sz="1200" kern="1200">
         <a:solidFill>
           <a:schemeClr val="tx1"/>
@@ -455,7 +249,7 @@
         <a:cs typeface="+mn-cs"/>
       </a:defRPr>
     </a:lvl8pPr>
-    <a:lvl9pPr marL="3657600" algn="l" defTabSz="457200" rtl="0" eaLnBrk="1" latinLnBrk="0" hangingPunct="1">
+    <a:lvl9pPr marL="3657600" algn="l" defTabSz="914400" rtl="0" eaLnBrk="1" latinLnBrk="0" hangingPunct="1">
       <a:defRPr sz="1200" kern="1200">
         <a:solidFill>
           <a:schemeClr val="tx1"/>
@@ -470,7 +264,7 @@
 </file>
 
 <file path=ppt/notesSlides/notesSlide1.xml><?xml version="1.0" encoding="utf-8"?>
-<p:notes xmlns:a="http://schemas.openxmlformats.org/drawingml/2006/main" xmlns:p="http://schemas.openxmlformats.org/presentationml/2006/main" xmlns:r="http://schemas.openxmlformats.org/officeDocument/2006/relationships">
+<p:notes xmlns:a="http://schemas.openxmlformats.org/drawingml/2006/main" xmlns:r="http://schemas.openxmlformats.org/officeDocument/2006/relationships" xmlns:p="http://schemas.openxmlformats.org/presentationml/2006/main">
   <p:cSld>
     <p:spTree>
       <p:nvGrpSpPr>
@@ -490,7 +284,7 @@
         <p:nvSpPr>
           <p:cNvPr id="2" name="Slide Image Placeholder 1"/>
           <p:cNvSpPr>
-            <a:spLocks noGrp="1"/>
+            <a:spLocks noGrp="1" noRot="1" noChangeAspect="1"/>
           </p:cNvSpPr>
           <p:nvPr>
             <p:ph type="sldImg" idx="2"/>
@@ -505,7 +299,7 @@
             <a:spLocks noGrp="1"/>
           </p:cNvSpPr>
           <p:nvPr>
-            <p:ph type="body" idx="3" sz="quarter"/>
+            <p:ph type="body" sz="quarter" idx="3"/>
           </p:nvPr>
         </p:nvSpPr>
         <p:spPr/>
@@ -526,7 +320,7 @@
             <a:spLocks noGrp="1"/>
           </p:cNvSpPr>
           <p:nvPr>
-            <p:ph type="sldNum" idx="5" sz="quarter"/>
+            <p:ph type="sldNum" sz="quarter" idx="5"/>
           </p:nvPr>
         </p:nvSpPr>
         <p:spPr/>
@@ -540,7 +334,7 @@
 </file>
 
 <file path=ppt/notesSlides/notesSlide10.xml><?xml version="1.0" encoding="utf-8"?>
-<p:notes xmlns:a="http://schemas.openxmlformats.org/drawingml/2006/main" xmlns:p="http://schemas.openxmlformats.org/presentationml/2006/main" xmlns:r="http://schemas.openxmlformats.org/officeDocument/2006/relationships">
+<p:notes xmlns:a="http://schemas.openxmlformats.org/drawingml/2006/main" xmlns:r="http://schemas.openxmlformats.org/officeDocument/2006/relationships" xmlns:p="http://schemas.openxmlformats.org/presentationml/2006/main">
   <p:cSld>
     <p:spTree>
       <p:nvGrpSpPr>
@@ -560,7 +354,7 @@
         <p:nvSpPr>
           <p:cNvPr id="2" name="Slide Image Placeholder 1"/>
           <p:cNvSpPr>
-            <a:spLocks noGrp="1"/>
+            <a:spLocks noGrp="1" noRot="1" noChangeAspect="1"/>
           </p:cNvSpPr>
           <p:nvPr>
             <p:ph type="sldImg" idx="2"/>
@@ -575,7 +369,7 @@
             <a:spLocks noGrp="1"/>
           </p:cNvSpPr>
           <p:nvPr>
-            <p:ph type="body" idx="3" sz="quarter"/>
+            <p:ph type="body" sz="quarter" idx="3"/>
           </p:nvPr>
         </p:nvSpPr>
         <p:spPr/>
@@ -596,7 +390,7 @@
             <a:spLocks noGrp="1"/>
           </p:cNvSpPr>
           <p:nvPr>
-            <p:ph type="sldNum" idx="5" sz="quarter"/>
+            <p:ph type="sldNum" sz="quarter" idx="5"/>
           </p:nvPr>
         </p:nvSpPr>
         <p:spPr/>
@@ -610,7 +404,7 @@
 </file>
 
 <file path=ppt/notesSlides/notesSlide11.xml><?xml version="1.0" encoding="utf-8"?>
-<p:notes xmlns:a="http://schemas.openxmlformats.org/drawingml/2006/main" xmlns:p="http://schemas.openxmlformats.org/presentationml/2006/main" xmlns:r="http://schemas.openxmlformats.org/officeDocument/2006/relationships">
+<p:notes xmlns:a="http://schemas.openxmlformats.org/drawingml/2006/main" xmlns:r="http://schemas.openxmlformats.org/officeDocument/2006/relationships" xmlns:p="http://schemas.openxmlformats.org/presentationml/2006/main">
   <p:cSld>
     <p:spTree>
       <p:nvGrpSpPr>
@@ -630,7 +424,7 @@
         <p:nvSpPr>
           <p:cNvPr id="2" name="Slide Image Placeholder 1"/>
           <p:cNvSpPr>
-            <a:spLocks noGrp="1"/>
+            <a:spLocks noGrp="1" noRot="1" noChangeAspect="1"/>
           </p:cNvSpPr>
           <p:nvPr>
             <p:ph type="sldImg" idx="2"/>
@@ -645,7 +439,7 @@
             <a:spLocks noGrp="1"/>
           </p:cNvSpPr>
           <p:nvPr>
-            <p:ph type="body" idx="3" sz="quarter"/>
+            <p:ph type="body" sz="quarter" idx="3"/>
           </p:nvPr>
         </p:nvSpPr>
         <p:spPr/>
@@ -666,7 +460,7 @@
             <a:spLocks noGrp="1"/>
           </p:cNvSpPr>
           <p:nvPr>
-            <p:ph type="sldNum" idx="5" sz="quarter"/>
+            <p:ph type="sldNum" sz="quarter" idx="5"/>
           </p:nvPr>
         </p:nvSpPr>
         <p:spPr/>
@@ -680,7 +474,7 @@
 </file>
 
 <file path=ppt/notesSlides/notesSlide12.xml><?xml version="1.0" encoding="utf-8"?>
-<p:notes xmlns:a="http://schemas.openxmlformats.org/drawingml/2006/main" xmlns:p="http://schemas.openxmlformats.org/presentationml/2006/main" xmlns:r="http://schemas.openxmlformats.org/officeDocument/2006/relationships">
+<p:notes xmlns:a="http://schemas.openxmlformats.org/drawingml/2006/main" xmlns:r="http://schemas.openxmlformats.org/officeDocument/2006/relationships" xmlns:p="http://schemas.openxmlformats.org/presentationml/2006/main">
   <p:cSld>
     <p:spTree>
       <p:nvGrpSpPr>
@@ -700,7 +494,7 @@
         <p:nvSpPr>
           <p:cNvPr id="2" name="Slide Image Placeholder 1"/>
           <p:cNvSpPr>
-            <a:spLocks noGrp="1"/>
+            <a:spLocks noGrp="1" noRot="1" noChangeAspect="1"/>
           </p:cNvSpPr>
           <p:nvPr>
             <p:ph type="sldImg" idx="2"/>
@@ -715,7 +509,7 @@
             <a:spLocks noGrp="1"/>
           </p:cNvSpPr>
           <p:nvPr>
-            <p:ph type="body" idx="3" sz="quarter"/>
+            <p:ph type="body" sz="quarter" idx="3"/>
           </p:nvPr>
         </p:nvSpPr>
         <p:spPr/>
@@ -736,7 +530,7 @@
             <a:spLocks noGrp="1"/>
           </p:cNvSpPr>
           <p:nvPr>
-            <p:ph type="sldNum" idx="5" sz="quarter"/>
+            <p:ph type="sldNum" sz="quarter" idx="5"/>
           </p:nvPr>
         </p:nvSpPr>
         <p:spPr/>
@@ -750,7 +544,7 @@
 </file>
 
 <file path=ppt/notesSlides/notesSlide13.xml><?xml version="1.0" encoding="utf-8"?>
-<p:notes xmlns:a="http://schemas.openxmlformats.org/drawingml/2006/main" xmlns:p="http://schemas.openxmlformats.org/presentationml/2006/main" xmlns:r="http://schemas.openxmlformats.org/officeDocument/2006/relationships">
+<p:notes xmlns:a="http://schemas.openxmlformats.org/drawingml/2006/main" xmlns:r="http://schemas.openxmlformats.org/officeDocument/2006/relationships" xmlns:p="http://schemas.openxmlformats.org/presentationml/2006/main">
   <p:cSld>
     <p:spTree>
       <p:nvGrpSpPr>
@@ -770,7 +564,7 @@
         <p:nvSpPr>
           <p:cNvPr id="2" name="Slide Image Placeholder 1"/>
           <p:cNvSpPr>
-            <a:spLocks noGrp="1"/>
+            <a:spLocks noGrp="1" noRot="1" noChangeAspect="1"/>
           </p:cNvSpPr>
           <p:nvPr>
             <p:ph type="sldImg" idx="2"/>
@@ -785,7 +579,7 @@
             <a:spLocks noGrp="1"/>
           </p:cNvSpPr>
           <p:nvPr>
-            <p:ph type="body" idx="3" sz="quarter"/>
+            <p:ph type="body" sz="quarter" idx="3"/>
           </p:nvPr>
         </p:nvSpPr>
         <p:spPr/>
@@ -806,7 +600,7 @@
             <a:spLocks noGrp="1"/>
           </p:cNvSpPr>
           <p:nvPr>
-            <p:ph type="sldNum" idx="5" sz="quarter"/>
+            <p:ph type="sldNum" sz="quarter" idx="5"/>
           </p:nvPr>
         </p:nvSpPr>
         <p:spPr/>
@@ -820,7 +614,7 @@
 </file>
 
 <file path=ppt/notesSlides/notesSlide2.xml><?xml version="1.0" encoding="utf-8"?>
-<p:notes xmlns:a="http://schemas.openxmlformats.org/drawingml/2006/main" xmlns:p="http://schemas.openxmlformats.org/presentationml/2006/main" xmlns:r="http://schemas.openxmlformats.org/officeDocument/2006/relationships">
+<p:notes xmlns:a="http://schemas.openxmlformats.org/drawingml/2006/main" xmlns:r="http://schemas.openxmlformats.org/officeDocument/2006/relationships" xmlns:p="http://schemas.openxmlformats.org/presentationml/2006/main">
   <p:cSld>
     <p:spTree>
       <p:nvGrpSpPr>
@@ -840,7 +634,7 @@
         <p:nvSpPr>
           <p:cNvPr id="2" name="Slide Image Placeholder 1"/>
           <p:cNvSpPr>
-            <a:spLocks noGrp="1"/>
+            <a:spLocks noGrp="1" noRot="1" noChangeAspect="1"/>
           </p:cNvSpPr>
           <p:nvPr>
             <p:ph type="sldImg" idx="2"/>
@@ -855,7 +649,7 @@
             <a:spLocks noGrp="1"/>
           </p:cNvSpPr>
           <p:nvPr>
-            <p:ph type="body" idx="3" sz="quarter"/>
+            <p:ph type="body" sz="quarter" idx="3"/>
           </p:nvPr>
         </p:nvSpPr>
         <p:spPr/>
@@ -876,7 +670,7 @@
             <a:spLocks noGrp="1"/>
           </p:cNvSpPr>
           <p:nvPr>
-            <p:ph type="sldNum" idx="5" sz="quarter"/>
+            <p:ph type="sldNum" sz="quarter" idx="5"/>
           </p:nvPr>
         </p:nvSpPr>
         <p:spPr/>
@@ -890,7 +684,7 @@
 </file>
 
 <file path=ppt/notesSlides/notesSlide3.xml><?xml version="1.0" encoding="utf-8"?>
-<p:notes xmlns:a="http://schemas.openxmlformats.org/drawingml/2006/main" xmlns:p="http://schemas.openxmlformats.org/presentationml/2006/main" xmlns:r="http://schemas.openxmlformats.org/officeDocument/2006/relationships">
+<p:notes xmlns:a="http://schemas.openxmlformats.org/drawingml/2006/main" xmlns:r="http://schemas.openxmlformats.org/officeDocument/2006/relationships" xmlns:p="http://schemas.openxmlformats.org/presentationml/2006/main">
   <p:cSld>
     <p:spTree>
       <p:nvGrpSpPr>
@@ -910,7 +704,7 @@
         <p:nvSpPr>
           <p:cNvPr id="2" name="Slide Image Placeholder 1"/>
           <p:cNvSpPr>
-            <a:spLocks noGrp="1"/>
+            <a:spLocks noGrp="1" noRot="1" noChangeAspect="1"/>
           </p:cNvSpPr>
           <p:nvPr>
             <p:ph type="sldImg" idx="2"/>
@@ -925,7 +719,7 @@
             <a:spLocks noGrp="1"/>
           </p:cNvSpPr>
           <p:nvPr>
-            <p:ph type="body" idx="3" sz="quarter"/>
+            <p:ph type="body" sz="quarter" idx="3"/>
           </p:nvPr>
         </p:nvSpPr>
         <p:spPr/>
@@ -946,7 +740,7 @@
             <a:spLocks noGrp="1"/>
           </p:cNvSpPr>
           <p:nvPr>
-            <p:ph type="sldNum" idx="5" sz="quarter"/>
+            <p:ph type="sldNum" sz="quarter" idx="5"/>
           </p:nvPr>
         </p:nvSpPr>
         <p:spPr/>
@@ -960,7 +754,7 @@
 </file>
 
 <file path=ppt/notesSlides/notesSlide4.xml><?xml version="1.0" encoding="utf-8"?>
-<p:notes xmlns:a="http://schemas.openxmlformats.org/drawingml/2006/main" xmlns:p="http://schemas.openxmlformats.org/presentationml/2006/main" xmlns:r="http://schemas.openxmlformats.org/officeDocument/2006/relationships">
+<p:notes xmlns:a="http://schemas.openxmlformats.org/drawingml/2006/main" xmlns:r="http://schemas.openxmlformats.org/officeDocument/2006/relationships" xmlns:p="http://schemas.openxmlformats.org/presentationml/2006/main">
   <p:cSld>
     <p:spTree>
       <p:nvGrpSpPr>
@@ -980,7 +774,7 @@
         <p:nvSpPr>
           <p:cNvPr id="2" name="Slide Image Placeholder 1"/>
           <p:cNvSpPr>
-            <a:spLocks noGrp="1"/>
+            <a:spLocks noGrp="1" noRot="1" noChangeAspect="1"/>
           </p:cNvSpPr>
           <p:nvPr>
             <p:ph type="sldImg" idx="2"/>
@@ -995,7 +789,7 @@
             <a:spLocks noGrp="1"/>
           </p:cNvSpPr>
           <p:nvPr>
-            <p:ph type="body" idx="3" sz="quarter"/>
+            <p:ph type="body" sz="quarter" idx="3"/>
           </p:nvPr>
         </p:nvSpPr>
         <p:spPr/>
@@ -1016,7 +810,7 @@
             <a:spLocks noGrp="1"/>
           </p:cNvSpPr>
           <p:nvPr>
-            <p:ph type="sldNum" idx="5" sz="quarter"/>
+            <p:ph type="sldNum" sz="quarter" idx="5"/>
           </p:nvPr>
         </p:nvSpPr>
         <p:spPr/>
@@ -1030,7 +824,7 @@
 </file>
 
 <file path=ppt/notesSlides/notesSlide5.xml><?xml version="1.0" encoding="utf-8"?>
-<p:notes xmlns:a="http://schemas.openxmlformats.org/drawingml/2006/main" xmlns:p="http://schemas.openxmlformats.org/presentationml/2006/main" xmlns:r="http://schemas.openxmlformats.org/officeDocument/2006/relationships">
+<p:notes xmlns:a="http://schemas.openxmlformats.org/drawingml/2006/main" xmlns:r="http://schemas.openxmlformats.org/officeDocument/2006/relationships" xmlns:p="http://schemas.openxmlformats.org/presentationml/2006/main">
   <p:cSld>
     <p:spTree>
       <p:nvGrpSpPr>
@@ -1050,7 +844,7 @@
         <p:nvSpPr>
           <p:cNvPr id="2" name="Slide Image Placeholder 1"/>
           <p:cNvSpPr>
-            <a:spLocks noGrp="1"/>
+            <a:spLocks noGrp="1" noRot="1" noChangeAspect="1"/>
           </p:cNvSpPr>
           <p:nvPr>
             <p:ph type="sldImg" idx="2"/>
@@ -1065,7 +859,7 @@
             <a:spLocks noGrp="1"/>
           </p:cNvSpPr>
           <p:nvPr>
-            <p:ph type="body" idx="3" sz="quarter"/>
+            <p:ph type="body" sz="quarter" idx="3"/>
           </p:nvPr>
         </p:nvSpPr>
         <p:spPr/>
@@ -1086,7 +880,7 @@
             <a:spLocks noGrp="1"/>
           </p:cNvSpPr>
           <p:nvPr>
-            <p:ph type="sldNum" idx="5" sz="quarter"/>
+            <p:ph type="sldNum" sz="quarter" idx="5"/>
           </p:nvPr>
         </p:nvSpPr>
         <p:spPr/>
@@ -1100,7 +894,7 @@
 </file>
 
 <file path=ppt/notesSlides/notesSlide6.xml><?xml version="1.0" encoding="utf-8"?>
-<p:notes xmlns:a="http://schemas.openxmlformats.org/drawingml/2006/main" xmlns:p="http://schemas.openxmlformats.org/presentationml/2006/main" xmlns:r="http://schemas.openxmlformats.org/officeDocument/2006/relationships">
+<p:notes xmlns:a="http://schemas.openxmlformats.org/drawingml/2006/main" xmlns:r="http://schemas.openxmlformats.org/officeDocument/2006/relationships" xmlns:p="http://schemas.openxmlformats.org/presentationml/2006/main">
   <p:cSld>
     <p:spTree>
       <p:nvGrpSpPr>
@@ -1120,7 +914,7 @@
         <p:nvSpPr>
           <p:cNvPr id="2" name="Slide Image Placeholder 1"/>
           <p:cNvSpPr>
-            <a:spLocks noGrp="1"/>
+            <a:spLocks noGrp="1" noRot="1" noChangeAspect="1"/>
           </p:cNvSpPr>
           <p:nvPr>
             <p:ph type="sldImg" idx="2"/>
@@ -1135,7 +929,7 @@
             <a:spLocks noGrp="1"/>
           </p:cNvSpPr>
           <p:nvPr>
-            <p:ph type="body" idx="3" sz="quarter"/>
+            <p:ph type="body" sz="quarter" idx="3"/>
           </p:nvPr>
         </p:nvSpPr>
         <p:spPr/>
@@ -1156,7 +950,7 @@
             <a:spLocks noGrp="1"/>
           </p:cNvSpPr>
           <p:nvPr>
-            <p:ph type="sldNum" idx="5" sz="quarter"/>
+            <p:ph type="sldNum" sz="quarter" idx="5"/>
           </p:nvPr>
         </p:nvSpPr>
         <p:spPr/>
@@ -1170,7 +964,7 @@
 </file>
 
 <file path=ppt/notesSlides/notesSlide7.xml><?xml version="1.0" encoding="utf-8"?>
-<p:notes xmlns:a="http://schemas.openxmlformats.org/drawingml/2006/main" xmlns:p="http://schemas.openxmlformats.org/presentationml/2006/main" xmlns:r="http://schemas.openxmlformats.org/officeDocument/2006/relationships">
+<p:notes xmlns:a="http://schemas.openxmlformats.org/drawingml/2006/main" xmlns:r="http://schemas.openxmlformats.org/officeDocument/2006/relationships" xmlns:p="http://schemas.openxmlformats.org/presentationml/2006/main">
   <p:cSld>
     <p:spTree>
       <p:nvGrpSpPr>
@@ -1190,7 +984,7 @@
         <p:nvSpPr>
           <p:cNvPr id="2" name="Slide Image Placeholder 1"/>
           <p:cNvSpPr>
-            <a:spLocks noGrp="1"/>
+            <a:spLocks noGrp="1" noRot="1" noChangeAspect="1"/>
           </p:cNvSpPr>
           <p:nvPr>
             <p:ph type="sldImg" idx="2"/>
@@ -1205,7 +999,7 @@
             <a:spLocks noGrp="1"/>
           </p:cNvSpPr>
           <p:nvPr>
-            <p:ph type="body" idx="3" sz="quarter"/>
+            <p:ph type="body" sz="quarter" idx="3"/>
           </p:nvPr>
         </p:nvSpPr>
         <p:spPr/>
@@ -1226,7 +1020,7 @@
             <a:spLocks noGrp="1"/>
           </p:cNvSpPr>
           <p:nvPr>
-            <p:ph type="sldNum" idx="5" sz="quarter"/>
+            <p:ph type="sldNum" sz="quarter" idx="5"/>
           </p:nvPr>
         </p:nvSpPr>
         <p:spPr/>
@@ -1240,7 +1034,7 @@
 </file>
 
 <file path=ppt/notesSlides/notesSlide8.xml><?xml version="1.0" encoding="utf-8"?>
-<p:notes xmlns:a="http://schemas.openxmlformats.org/drawingml/2006/main" xmlns:p="http://schemas.openxmlformats.org/presentationml/2006/main" xmlns:r="http://schemas.openxmlformats.org/officeDocument/2006/relationships">
+<p:notes xmlns:a="http://schemas.openxmlformats.org/drawingml/2006/main" xmlns:r="http://schemas.openxmlformats.org/officeDocument/2006/relationships" xmlns:p="http://schemas.openxmlformats.org/presentationml/2006/main">
   <p:cSld>
     <p:spTree>
       <p:nvGrpSpPr>
@@ -1260,7 +1054,7 @@
         <p:nvSpPr>
           <p:cNvPr id="2" name="Slide Image Placeholder 1"/>
           <p:cNvSpPr>
-            <a:spLocks noGrp="1"/>
+            <a:spLocks noGrp="1" noRot="1" noChangeAspect="1"/>
           </p:cNvSpPr>
           <p:nvPr>
             <p:ph type="sldImg" idx="2"/>
@@ -1275,7 +1069,7 @@
             <a:spLocks noGrp="1"/>
           </p:cNvSpPr>
           <p:nvPr>
-            <p:ph type="body" idx="3" sz="quarter"/>
+            <p:ph type="body" sz="quarter" idx="3"/>
           </p:nvPr>
         </p:nvSpPr>
         <p:spPr/>
@@ -1296,7 +1090,7 @@
             <a:spLocks noGrp="1"/>
           </p:cNvSpPr>
           <p:nvPr>
-            <p:ph type="sldNum" idx="5" sz="quarter"/>
+            <p:ph type="sldNum" sz="quarter" idx="5"/>
           </p:nvPr>
         </p:nvSpPr>
         <p:spPr/>
@@ -1310,7 +1104,7 @@
 </file>
 
 <file path=ppt/notesSlides/notesSlide9.xml><?xml version="1.0" encoding="utf-8"?>
-<p:notes xmlns:a="http://schemas.openxmlformats.org/drawingml/2006/main" xmlns:p="http://schemas.openxmlformats.org/presentationml/2006/main" xmlns:r="http://schemas.openxmlformats.org/officeDocument/2006/relationships">
+<p:notes xmlns:a="http://schemas.openxmlformats.org/drawingml/2006/main" xmlns:r="http://schemas.openxmlformats.org/officeDocument/2006/relationships" xmlns:p="http://schemas.openxmlformats.org/presentationml/2006/main">
   <p:cSld>
     <p:spTree>
       <p:nvGrpSpPr>
@@ -1330,7 +1124,7 @@
         <p:nvSpPr>
           <p:cNvPr id="2" name="Slide Image Placeholder 1"/>
           <p:cNvSpPr>
-            <a:spLocks noGrp="1"/>
+            <a:spLocks noGrp="1" noRot="1" noChangeAspect="1"/>
           </p:cNvSpPr>
           <p:nvPr>
             <p:ph type="sldImg" idx="2"/>
@@ -1345,7 +1139,7 @@
             <a:spLocks noGrp="1"/>
           </p:cNvSpPr>
           <p:nvPr>
-            <p:ph type="body" idx="3" sz="quarter"/>
+            <p:ph type="body" sz="quarter" idx="3"/>
           </p:nvPr>
         </p:nvSpPr>
         <p:spPr/>
@@ -1366,7 +1160,7 @@
             <a:spLocks noGrp="1"/>
           </p:cNvSpPr>
           <p:nvPr>
-            <p:ph type="sldNum" idx="5" sz="quarter"/>
+            <p:ph type="sldNum" sz="quarter" idx="5"/>
           </p:nvPr>
         </p:nvSpPr>
         <p:spPr/>
@@ -1417,10 +1211,9 @@
           <a:lstStyle/>
           <a:p>
             <a:r>
-              <a:rPr lang="en-US" smtClean="0"/>
+              <a:rPr lang="en-US"/>
               <a:t>Click to edit Master title style</a:t>
             </a:r>
-            <a:endParaRPr lang="en-US"/>
           </a:p>
         </p:txBody>
       </p:sp>
@@ -1536,10 +1329,9 @@
           </a:lstStyle>
           <a:p>
             <a:r>
-              <a:rPr lang="en-US" smtClean="0"/>
+              <a:rPr lang="en-US"/>
               <a:t>Click to edit Master subtitle style</a:t>
             </a:r>
-            <a:endParaRPr lang="en-US"/>
           </a:p>
         </p:txBody>
       </p:sp>
@@ -1560,7 +1352,7 @@
           <a:p>
             <a:fld id="{5BCAD085-E8A6-8845-BD4E-CB4CCA059FC4}" type="datetimeFigureOut">
               <a:rPr lang="en-US" smtClean="0"/>
-              <a:t>1/27/13</a:t>
+              <a:t>7/13/2026</a:t>
             </a:fld>
             <a:endParaRPr lang="en-US"/>
           </a:p>
@@ -1654,10 +1446,9 @@
           <a:lstStyle/>
           <a:p>
             <a:r>
-              <a:rPr lang="en-US" smtClean="0"/>
+              <a:rPr lang="en-US"/>
               <a:t>Click to edit Master title style</a:t>
             </a:r>
-            <a:endParaRPr lang="en-US"/>
           </a:p>
         </p:txBody>
       </p:sp>
@@ -1678,38 +1469,37 @@
           <a:p>
             <a:pPr lvl="0"/>
             <a:r>
-              <a:rPr lang="en-US" smtClean="0"/>
+              <a:rPr lang="en-US"/>
               <a:t>Click to edit Master text styles</a:t>
             </a:r>
           </a:p>
           <a:p>
             <a:pPr lvl="1"/>
             <a:r>
-              <a:rPr lang="en-US" smtClean="0"/>
+              <a:rPr lang="en-US"/>
               <a:t>Second level</a:t>
             </a:r>
           </a:p>
           <a:p>
             <a:pPr lvl="2"/>
             <a:r>
-              <a:rPr lang="en-US" smtClean="0"/>
+              <a:rPr lang="en-US"/>
               <a:t>Third level</a:t>
             </a:r>
           </a:p>
           <a:p>
             <a:pPr lvl="3"/>
             <a:r>
-              <a:rPr lang="en-US" smtClean="0"/>
+              <a:rPr lang="en-US"/>
               <a:t>Fourth level</a:t>
             </a:r>
           </a:p>
           <a:p>
             <a:pPr lvl="4"/>
             <a:r>
-              <a:rPr lang="en-US" smtClean="0"/>
+              <a:rPr lang="en-US"/>
               <a:t>Fifth level</a:t>
             </a:r>
-            <a:endParaRPr lang="en-US"/>
           </a:p>
         </p:txBody>
       </p:sp>
@@ -1730,7 +1520,7 @@
           <a:p>
             <a:fld id="{5BCAD085-E8A6-8845-BD4E-CB4CCA059FC4}" type="datetimeFigureOut">
               <a:rPr lang="en-US" smtClean="0"/>
-              <a:t>1/27/13</a:t>
+              <a:t>7/13/2026</a:t>
             </a:fld>
             <a:endParaRPr lang="en-US"/>
           </a:p>
@@ -1829,10 +1619,9 @@
           <a:lstStyle/>
           <a:p>
             <a:r>
-              <a:rPr lang="en-US" smtClean="0"/>
+              <a:rPr lang="en-US"/>
               <a:t>Click to edit Master title style</a:t>
             </a:r>
-            <a:endParaRPr lang="en-US"/>
           </a:p>
         </p:txBody>
       </p:sp>
@@ -1858,38 +1647,37 @@
           <a:p>
             <a:pPr lvl="0"/>
             <a:r>
-              <a:rPr lang="en-US" smtClean="0"/>
+              <a:rPr lang="en-US"/>
               <a:t>Click to edit Master text styles</a:t>
             </a:r>
           </a:p>
           <a:p>
             <a:pPr lvl="1"/>
             <a:r>
-              <a:rPr lang="en-US" smtClean="0"/>
+              <a:rPr lang="en-US"/>
               <a:t>Second level</a:t>
             </a:r>
           </a:p>
           <a:p>
             <a:pPr lvl="2"/>
             <a:r>
-              <a:rPr lang="en-US" smtClean="0"/>
+              <a:rPr lang="en-US"/>
               <a:t>Third level</a:t>
             </a:r>
           </a:p>
           <a:p>
             <a:pPr lvl="3"/>
             <a:r>
-              <a:rPr lang="en-US" smtClean="0"/>
+              <a:rPr lang="en-US"/>
               <a:t>Fourth level</a:t>
             </a:r>
           </a:p>
           <a:p>
             <a:pPr lvl="4"/>
             <a:r>
-              <a:rPr lang="en-US" smtClean="0"/>
+              <a:rPr lang="en-US"/>
               <a:t>Fifth level</a:t>
             </a:r>
-            <a:endParaRPr lang="en-US"/>
           </a:p>
         </p:txBody>
       </p:sp>
@@ -1910,7 +1698,7 @@
           <a:p>
             <a:fld id="{5BCAD085-E8A6-8845-BD4E-CB4CCA059FC4}" type="datetimeFigureOut">
               <a:rPr lang="en-US" smtClean="0"/>
-              <a:t>1/27/13</a:t>
+              <a:t>7/13/2026</a:t>
             </a:fld>
             <a:endParaRPr lang="en-US"/>
           </a:p>
@@ -2004,10 +1792,9 @@
           <a:lstStyle/>
           <a:p>
             <a:r>
-              <a:rPr lang="en-US" smtClean="0"/>
+              <a:rPr lang="en-US"/>
               <a:t>Click to edit Master title style</a:t>
             </a:r>
-            <a:endParaRPr lang="en-US"/>
           </a:p>
         </p:txBody>
       </p:sp>
@@ -2028,38 +1815,37 @@
           <a:p>
             <a:pPr lvl="0"/>
             <a:r>
-              <a:rPr lang="en-US" smtClean="0"/>
+              <a:rPr lang="en-US"/>
               <a:t>Click to edit Master text styles</a:t>
             </a:r>
           </a:p>
           <a:p>
             <a:pPr lvl="1"/>
             <a:r>
-              <a:rPr lang="en-US" smtClean="0"/>
+              <a:rPr lang="en-US"/>
               <a:t>Second level</a:t>
             </a:r>
           </a:p>
           <a:p>
             <a:pPr lvl="2"/>
             <a:r>
-              <a:rPr lang="en-US" smtClean="0"/>
+              <a:rPr lang="en-US"/>
               <a:t>Third level</a:t>
             </a:r>
           </a:p>
           <a:p>
             <a:pPr lvl="3"/>
             <a:r>
-              <a:rPr lang="en-US" smtClean="0"/>
+              <a:rPr lang="en-US"/>
               <a:t>Fourth level</a:t>
             </a:r>
           </a:p>
           <a:p>
             <a:pPr lvl="4"/>
             <a:r>
-              <a:rPr lang="en-US" smtClean="0"/>
+              <a:rPr lang="en-US"/>
               <a:t>Fifth level</a:t>
             </a:r>
-            <a:endParaRPr lang="en-US"/>
           </a:p>
         </p:txBody>
       </p:sp>
@@ -2080,7 +1866,7 @@
           <a:p>
             <a:fld id="{5BCAD085-E8A6-8845-BD4E-CB4CCA059FC4}" type="datetimeFigureOut">
               <a:rPr lang="en-US" smtClean="0"/>
-              <a:t>1/27/13</a:t>
+              <a:t>7/13/2026</a:t>
             </a:fld>
             <a:endParaRPr lang="en-US"/>
           </a:p>
@@ -2183,10 +1969,9 @@
           </a:lstStyle>
           <a:p>
             <a:r>
-              <a:rPr lang="en-US" smtClean="0"/>
+              <a:rPr lang="en-US"/>
               <a:t>Click to edit Master title style</a:t>
             </a:r>
-            <a:endParaRPr lang="en-US"/>
           </a:p>
         </p:txBody>
       </p:sp>
@@ -2303,7 +2088,7 @@
           <a:p>
             <a:pPr lvl="0"/>
             <a:r>
-              <a:rPr lang="en-US" smtClean="0"/>
+              <a:rPr lang="en-US"/>
               <a:t>Click to edit Master text styles</a:t>
             </a:r>
           </a:p>
@@ -2326,7 +2111,7 @@
           <a:p>
             <a:fld id="{5BCAD085-E8A6-8845-BD4E-CB4CCA059FC4}" type="datetimeFigureOut">
               <a:rPr lang="en-US" smtClean="0"/>
-              <a:t>1/27/13</a:t>
+              <a:t>7/13/2026</a:t>
             </a:fld>
             <a:endParaRPr lang="en-US"/>
           </a:p>
@@ -2420,10 +2205,9 @@
           <a:lstStyle/>
           <a:p>
             <a:r>
-              <a:rPr lang="en-US" smtClean="0"/>
+              <a:rPr lang="en-US"/>
               <a:t>Click to edit Master title style</a:t>
             </a:r>
-            <a:endParaRPr lang="en-US"/>
           </a:p>
         </p:txBody>
       </p:sp>
@@ -2477,38 +2261,37 @@
           <a:p>
             <a:pPr lvl="0"/>
             <a:r>
-              <a:rPr lang="en-US" smtClean="0"/>
+              <a:rPr lang="en-US"/>
               <a:t>Click to edit Master text styles</a:t>
             </a:r>
           </a:p>
           <a:p>
             <a:pPr lvl="1"/>
             <a:r>
-              <a:rPr lang="en-US" smtClean="0"/>
+              <a:rPr lang="en-US"/>
               <a:t>Second level</a:t>
             </a:r>
           </a:p>
           <a:p>
             <a:pPr lvl="2"/>
             <a:r>
-              <a:rPr lang="en-US" smtClean="0"/>
+              <a:rPr lang="en-US"/>
               <a:t>Third level</a:t>
             </a:r>
           </a:p>
           <a:p>
             <a:pPr lvl="3"/>
             <a:r>
-              <a:rPr lang="en-US" smtClean="0"/>
+              <a:rPr lang="en-US"/>
               <a:t>Fourth level</a:t>
             </a:r>
           </a:p>
           <a:p>
             <a:pPr lvl="4"/>
             <a:r>
-              <a:rPr lang="en-US" smtClean="0"/>
+              <a:rPr lang="en-US"/>
               <a:t>Fifth level</a:t>
             </a:r>
-            <a:endParaRPr lang="en-US"/>
           </a:p>
         </p:txBody>
       </p:sp>
@@ -2562,38 +2345,37 @@
           <a:p>
             <a:pPr lvl="0"/>
             <a:r>
-              <a:rPr lang="en-US" smtClean="0"/>
+              <a:rPr lang="en-US"/>
               <a:t>Click to edit Master text styles</a:t>
             </a:r>
           </a:p>
           <a:p>
             <a:pPr lvl="1"/>
             <a:r>
-              <a:rPr lang="en-US" smtClean="0"/>
+              <a:rPr lang="en-US"/>
               <a:t>Second level</a:t>
             </a:r>
           </a:p>
           <a:p>
             <a:pPr lvl="2"/>
             <a:r>
-              <a:rPr lang="en-US" smtClean="0"/>
+              <a:rPr lang="en-US"/>
               <a:t>Third level</a:t>
             </a:r>
           </a:p>
           <a:p>
             <a:pPr lvl="3"/>
             <a:r>
-              <a:rPr lang="en-US" smtClean="0"/>
+              <a:rPr lang="en-US"/>
               <a:t>Fourth level</a:t>
             </a:r>
           </a:p>
           <a:p>
             <a:pPr lvl="4"/>
             <a:r>
-              <a:rPr lang="en-US" smtClean="0"/>
+              <a:rPr lang="en-US"/>
               <a:t>Fifth level</a:t>
             </a:r>
-            <a:endParaRPr lang="en-US"/>
           </a:p>
         </p:txBody>
       </p:sp>
@@ -2614,7 +2396,7 @@
           <a:p>
             <a:fld id="{5BCAD085-E8A6-8845-BD4E-CB4CCA059FC4}" type="datetimeFigureOut">
               <a:rPr lang="en-US" smtClean="0"/>
-              <a:t>1/27/13</a:t>
+              <a:t>7/13/2026</a:t>
             </a:fld>
             <a:endParaRPr lang="en-US"/>
           </a:p>
@@ -2712,10 +2494,9 @@
           </a:lstStyle>
           <a:p>
             <a:r>
-              <a:rPr lang="en-US" smtClean="0"/>
+              <a:rPr lang="en-US"/>
               <a:t>Click to edit Master title style</a:t>
             </a:r>
-            <a:endParaRPr lang="en-US"/>
           </a:p>
         </p:txBody>
       </p:sp>
@@ -2778,7 +2559,7 @@
           <a:p>
             <a:pPr lvl="0"/>
             <a:r>
-              <a:rPr lang="en-US" smtClean="0"/>
+              <a:rPr lang="en-US"/>
               <a:t>Click to edit Master text styles</a:t>
             </a:r>
           </a:p>
@@ -2834,38 +2615,37 @@
           <a:p>
             <a:pPr lvl="0"/>
             <a:r>
-              <a:rPr lang="en-US" smtClean="0"/>
+              <a:rPr lang="en-US"/>
               <a:t>Click to edit Master text styles</a:t>
             </a:r>
           </a:p>
           <a:p>
             <a:pPr lvl="1"/>
             <a:r>
-              <a:rPr lang="en-US" smtClean="0"/>
+              <a:rPr lang="en-US"/>
               <a:t>Second level</a:t>
             </a:r>
           </a:p>
           <a:p>
             <a:pPr lvl="2"/>
             <a:r>
-              <a:rPr lang="en-US" smtClean="0"/>
+              <a:rPr lang="en-US"/>
               <a:t>Third level</a:t>
             </a:r>
           </a:p>
           <a:p>
             <a:pPr lvl="3"/>
             <a:r>
-              <a:rPr lang="en-US" smtClean="0"/>
+              <a:rPr lang="en-US"/>
               <a:t>Fourth level</a:t>
             </a:r>
           </a:p>
           <a:p>
             <a:pPr lvl="4"/>
             <a:r>
-              <a:rPr lang="en-US" smtClean="0"/>
+              <a:rPr lang="en-US"/>
               <a:t>Fifth level</a:t>
             </a:r>
-            <a:endParaRPr lang="en-US"/>
           </a:p>
         </p:txBody>
       </p:sp>
@@ -2928,7 +2708,7 @@
           <a:p>
             <a:pPr lvl="0"/>
             <a:r>
-              <a:rPr lang="en-US" smtClean="0"/>
+              <a:rPr lang="en-US"/>
               <a:t>Click to edit Master text styles</a:t>
             </a:r>
           </a:p>
@@ -2984,38 +2764,37 @@
           <a:p>
             <a:pPr lvl="0"/>
             <a:r>
-              <a:rPr lang="en-US" smtClean="0"/>
+              <a:rPr lang="en-US"/>
               <a:t>Click to edit Master text styles</a:t>
             </a:r>
           </a:p>
           <a:p>
             <a:pPr lvl="1"/>
             <a:r>
-              <a:rPr lang="en-US" smtClean="0"/>
+              <a:rPr lang="en-US"/>
               <a:t>Second level</a:t>
             </a:r>
           </a:p>
           <a:p>
             <a:pPr lvl="2"/>
             <a:r>
-              <a:rPr lang="en-US" smtClean="0"/>
+              <a:rPr lang="en-US"/>
               <a:t>Third level</a:t>
             </a:r>
           </a:p>
           <a:p>
             <a:pPr lvl="3"/>
             <a:r>
-              <a:rPr lang="en-US" smtClean="0"/>
+              <a:rPr lang="en-US"/>
               <a:t>Fourth level</a:t>
             </a:r>
           </a:p>
           <a:p>
             <a:pPr lvl="4"/>
             <a:r>
-              <a:rPr lang="en-US" smtClean="0"/>
+              <a:rPr lang="en-US"/>
               <a:t>Fifth level</a:t>
             </a:r>
-            <a:endParaRPr lang="en-US"/>
           </a:p>
         </p:txBody>
       </p:sp>
@@ -3036,7 +2815,7 @@
           <a:p>
             <a:fld id="{5BCAD085-E8A6-8845-BD4E-CB4CCA059FC4}" type="datetimeFigureOut">
               <a:rPr lang="en-US" smtClean="0"/>
-              <a:t>1/27/13</a:t>
+              <a:t>7/13/2026</a:t>
             </a:fld>
             <a:endParaRPr lang="en-US"/>
           </a:p>
@@ -3130,10 +2909,9 @@
           <a:lstStyle/>
           <a:p>
             <a:r>
-              <a:rPr lang="en-US" smtClean="0"/>
+              <a:rPr lang="en-US"/>
               <a:t>Click to edit Master title style</a:t>
             </a:r>
-            <a:endParaRPr lang="en-US"/>
           </a:p>
         </p:txBody>
       </p:sp>
@@ -3154,7 +2932,7 @@
           <a:p>
             <a:fld id="{5BCAD085-E8A6-8845-BD4E-CB4CCA059FC4}" type="datetimeFigureOut">
               <a:rPr lang="en-US" smtClean="0"/>
-              <a:t>1/27/13</a:t>
+              <a:t>7/13/2026</a:t>
             </a:fld>
             <a:endParaRPr lang="en-US"/>
           </a:p>
@@ -3249,7 +3027,7 @@
           <a:p>
             <a:fld id="{5BCAD085-E8A6-8845-BD4E-CB4CCA059FC4}" type="datetimeFigureOut">
               <a:rPr lang="en-US" smtClean="0"/>
-              <a:t>1/27/13</a:t>
+              <a:t>7/13/2026</a:t>
             </a:fld>
             <a:endParaRPr lang="en-US"/>
           </a:p>
@@ -3352,10 +3130,9 @@
           </a:lstStyle>
           <a:p>
             <a:r>
-              <a:rPr lang="en-US" smtClean="0"/>
+              <a:rPr lang="en-US"/>
               <a:t>Click to edit Master title style</a:t>
             </a:r>
-            <a:endParaRPr lang="en-US"/>
           </a:p>
         </p:txBody>
       </p:sp>
@@ -3409,38 +3186,37 @@
           <a:p>
             <a:pPr lvl="0"/>
             <a:r>
-              <a:rPr lang="en-US" smtClean="0"/>
+              <a:rPr lang="en-US"/>
               <a:t>Click to edit Master text styles</a:t>
             </a:r>
           </a:p>
           <a:p>
             <a:pPr lvl="1"/>
             <a:r>
-              <a:rPr lang="en-US" smtClean="0"/>
+              <a:rPr lang="en-US"/>
               <a:t>Second level</a:t>
             </a:r>
           </a:p>
           <a:p>
             <a:pPr lvl="2"/>
             <a:r>
-              <a:rPr lang="en-US" smtClean="0"/>
+              <a:rPr lang="en-US"/>
               <a:t>Third level</a:t>
             </a:r>
           </a:p>
           <a:p>
             <a:pPr lvl="3"/>
             <a:r>
-              <a:rPr lang="en-US" smtClean="0"/>
+              <a:rPr lang="en-US"/>
               <a:t>Fourth level</a:t>
             </a:r>
           </a:p>
           <a:p>
             <a:pPr lvl="4"/>
             <a:r>
-              <a:rPr lang="en-US" smtClean="0"/>
+              <a:rPr lang="en-US"/>
               <a:t>Fifth level</a:t>
             </a:r>
-            <a:endParaRPr lang="en-US"/>
           </a:p>
         </p:txBody>
       </p:sp>
@@ -3503,7 +3279,7 @@
           <a:p>
             <a:pPr lvl="0"/>
             <a:r>
-              <a:rPr lang="en-US" smtClean="0"/>
+              <a:rPr lang="en-US"/>
               <a:t>Click to edit Master text styles</a:t>
             </a:r>
           </a:p>
@@ -3526,7 +3302,7 @@
           <a:p>
             <a:fld id="{5BCAD085-E8A6-8845-BD4E-CB4CCA059FC4}" type="datetimeFigureOut">
               <a:rPr lang="en-US" smtClean="0"/>
-              <a:t>1/27/13</a:t>
+              <a:t>7/13/2026</a:t>
             </a:fld>
             <a:endParaRPr lang="en-US"/>
           </a:p>
@@ -3629,10 +3405,9 @@
           </a:lstStyle>
           <a:p>
             <a:r>
-              <a:rPr lang="en-US" smtClean="0"/>
+              <a:rPr lang="en-US"/>
               <a:t>Click to edit Master title style</a:t>
             </a:r>
-            <a:endParaRPr lang="en-US"/>
           </a:p>
         </p:txBody>
       </p:sp>
@@ -3756,7 +3531,7 @@
           <a:p>
             <a:pPr lvl="0"/>
             <a:r>
-              <a:rPr lang="en-US" smtClean="0"/>
+              <a:rPr lang="en-US"/>
               <a:t>Click to edit Master text styles</a:t>
             </a:r>
           </a:p>
@@ -3779,7 +3554,7 @@
           <a:p>
             <a:fld id="{5BCAD085-E8A6-8845-BD4E-CB4CCA059FC4}" type="datetimeFigureOut">
               <a:rPr lang="en-US" smtClean="0"/>
-              <a:t>1/27/13</a:t>
+              <a:t>7/13/2026</a:t>
             </a:fld>
             <a:endParaRPr lang="en-US"/>
           </a:p>
@@ -3888,10 +3663,9 @@
           <a:lstStyle/>
           <a:p>
             <a:r>
-              <a:rPr lang="en-US" smtClean="0"/>
+              <a:rPr lang="en-US"/>
               <a:t>Click to edit Master title style</a:t>
             </a:r>
-            <a:endParaRPr lang="en-US"/>
           </a:p>
         </p:txBody>
       </p:sp>
@@ -3922,38 +3696,37 @@
           <a:p>
             <a:pPr lvl="0"/>
             <a:r>
-              <a:rPr lang="en-US" smtClean="0"/>
+              <a:rPr lang="en-US"/>
               <a:t>Click to edit Master text styles</a:t>
             </a:r>
           </a:p>
           <a:p>
             <a:pPr lvl="1"/>
             <a:r>
-              <a:rPr lang="en-US" smtClean="0"/>
+              <a:rPr lang="en-US"/>
               <a:t>Second level</a:t>
             </a:r>
           </a:p>
           <a:p>
             <a:pPr lvl="2"/>
             <a:r>
-              <a:rPr lang="en-US" smtClean="0"/>
+              <a:rPr lang="en-US"/>
               <a:t>Third level</a:t>
             </a:r>
           </a:p>
           <a:p>
             <a:pPr lvl="3"/>
             <a:r>
-              <a:rPr lang="en-US" smtClean="0"/>
+              <a:rPr lang="en-US"/>
               <a:t>Fourth level</a:t>
             </a:r>
           </a:p>
           <a:p>
             <a:pPr lvl="4"/>
             <a:r>
-              <a:rPr lang="en-US" smtClean="0"/>
+              <a:rPr lang="en-US"/>
               <a:t>Fifth level</a:t>
             </a:r>
-            <a:endParaRPr lang="en-US"/>
           </a:p>
         </p:txBody>
       </p:sp>
@@ -3992,7 +3765,7 @@
           <a:p>
             <a:fld id="{5BCAD085-E8A6-8845-BD4E-CB4CCA059FC4}" type="datetimeFigureOut">
               <a:rPr lang="en-US" smtClean="0"/>
-              <a:t>1/27/13</a:t>
+              <a:t>7/13/2026</a:t>
             </a:fld>
             <a:endParaRPr lang="en-US"/>
           </a:p>
@@ -4351,7 +4124,7 @@
 </file>
 
 <file path=ppt/slides/slide1.xml><?xml version="1.0" encoding="utf-8"?>
-<p:sld xmlns:a="http://schemas.openxmlformats.org/drawingml/2006/main" xmlns:p="http://schemas.openxmlformats.org/presentationml/2006/main" xmlns:r="http://schemas.openxmlformats.org/officeDocument/2006/relationships">
+<p:sld xmlns:a="http://schemas.openxmlformats.org/drawingml/2006/main" xmlns:r="http://schemas.openxmlformats.org/officeDocument/2006/relationships" xmlns:p="http://schemas.openxmlformats.org/presentationml/2006/main">
   <p:cSld>
     <p:spTree>
       <p:nvGrpSpPr>
@@ -4359,7 +4132,14 @@
         <p:cNvGrpSpPr/>
         <p:nvPr/>
       </p:nvGrpSpPr>
-      <p:grpSpPr/>
+      <p:grpSpPr>
+        <a:xfrm>
+          <a:off x="0" y="0"/>
+          <a:ext cx="0" cy="0"/>
+          <a:chOff x="0" y="0"/>
+          <a:chExt cx="0" cy="0"/>
+        </a:xfrm>
+      </p:grpSpPr>
       <p:sp>
         <p:nvSpPr>
           <p:cNvPr id="2" name="Rectangle 1"/>
@@ -4400,6 +4180,7 @@
           <a:lstStyle/>
           <a:p>
             <a:pPr algn="ctr"/>
+            <a:endParaRPr/>
           </a:p>
         </p:txBody>
       </p:sp>
@@ -4443,6 +4224,7 @@
           <a:lstStyle/>
           <a:p>
             <a:pPr algn="ctr"/>
+            <a:endParaRPr/>
           </a:p>
         </p:txBody>
       </p:sp>
@@ -4463,7 +4245,7 @@
           <a:noFill/>
         </p:spPr>
         <p:txBody>
-          <a:bodyPr wrap="square" anchor="t" lIns="0" rIns="0" tIns="0" bIns="0">
+          <a:bodyPr wrap="square" lIns="0" tIns="0" rIns="0" bIns="0" anchor="t">
             <a:spAutoFit/>
           </a:bodyPr>
           <a:lstStyle/>
@@ -4498,7 +4280,7 @@
           <a:noFill/>
         </p:spPr>
         <p:txBody>
-          <a:bodyPr wrap="square" anchor="t" lIns="0" rIns="0" tIns="0" bIns="0">
+          <a:bodyPr wrap="square" lIns="0" tIns="0" rIns="0" bIns="0" anchor="t">
             <a:spAutoFit/>
           </a:bodyPr>
           <a:lstStyle/>
@@ -4560,6 +4342,7 @@
           <a:lstStyle/>
           <a:p>
             <a:pPr algn="ctr"/>
+            <a:endParaRPr/>
           </a:p>
         </p:txBody>
       </p:sp>
@@ -4580,7 +4363,7 @@
           <a:noFill/>
         </p:spPr>
         <p:txBody>
-          <a:bodyPr wrap="square" anchor="t" lIns="0" rIns="0" tIns="0" bIns="0">
+          <a:bodyPr wrap="square" lIns="0" tIns="0" rIns="0" bIns="0" anchor="t">
             <a:spAutoFit/>
           </a:bodyPr>
           <a:lstStyle/>
@@ -4619,7 +4402,7 @@
           <a:noFill/>
         </p:spPr>
         <p:txBody>
-          <a:bodyPr wrap="square" anchor="t" lIns="0" rIns="0" tIns="0" bIns="0">
+          <a:bodyPr wrap="square" lIns="0" tIns="0" rIns="0" bIns="0" anchor="t">
             <a:spAutoFit/>
           </a:bodyPr>
           <a:lstStyle/>
@@ -4654,7 +4437,7 @@
           <a:noFill/>
         </p:spPr>
         <p:txBody>
-          <a:bodyPr wrap="square" anchor="t" lIns="0" rIns="0" tIns="0" bIns="0">
+          <a:bodyPr wrap="square" lIns="0" tIns="0" rIns="0" bIns="0" anchor="t">
             <a:spAutoFit/>
           </a:bodyPr>
           <a:lstStyle/>
@@ -4716,6 +4499,7 @@
           <a:lstStyle/>
           <a:p>
             <a:pPr algn="ctr"/>
+            <a:endParaRPr/>
           </a:p>
         </p:txBody>
       </p:sp>
@@ -4736,7 +4520,7 @@
           <a:noFill/>
         </p:spPr>
         <p:txBody>
-          <a:bodyPr wrap="square" anchor="ctr" lIns="0" rIns="0" tIns="0" bIns="0">
+          <a:bodyPr wrap="square" lIns="0" tIns="0" rIns="0" bIns="0" anchor="ctr">
             <a:spAutoFit/>
           </a:bodyPr>
           <a:lstStyle/>
@@ -4779,7 +4563,7 @@
           <p:nvPr/>
         </p:nvPicPr>
         <p:blipFill>
-          <a:blip r:embed="rId2"/>
+          <a:blip r:embed="rId3"/>
           <a:stretch>
             <a:fillRect/>
           </a:stretch>
@@ -4834,6 +4618,7 @@
           <a:lstStyle/>
           <a:p>
             <a:pPr algn="ctr"/>
+            <a:endParaRPr/>
           </a:p>
         </p:txBody>
       </p:sp>
@@ -4877,6 +4662,7 @@
           <a:lstStyle/>
           <a:p>
             <a:pPr algn="ctr"/>
+            <a:endParaRPr/>
           </a:p>
         </p:txBody>
       </p:sp>
@@ -4897,7 +4683,7 @@
           <a:noFill/>
         </p:spPr>
         <p:txBody>
-          <a:bodyPr wrap="square" anchor="ctr" lIns="0" rIns="0" tIns="0" bIns="0">
+          <a:bodyPr wrap="square" lIns="0" tIns="0" rIns="0" bIns="0" anchor="ctr">
             <a:spAutoFit/>
           </a:bodyPr>
           <a:lstStyle/>
@@ -4971,7 +4757,7 @@
 </file>
 
 <file path=ppt/slides/slide10.xml><?xml version="1.0" encoding="utf-8"?>
-<p:sld xmlns:a="http://schemas.openxmlformats.org/drawingml/2006/main" xmlns:p="http://schemas.openxmlformats.org/presentationml/2006/main" xmlns:r="http://schemas.openxmlformats.org/officeDocument/2006/relationships">
+<p:sld xmlns:a="http://schemas.openxmlformats.org/drawingml/2006/main" xmlns:r="http://schemas.openxmlformats.org/officeDocument/2006/relationships" xmlns:p="http://schemas.openxmlformats.org/presentationml/2006/main">
   <p:cSld>
     <p:spTree>
       <p:nvGrpSpPr>
@@ -4979,7 +4765,14 @@
         <p:cNvGrpSpPr/>
         <p:nvPr/>
       </p:nvGrpSpPr>
-      <p:grpSpPr/>
+      <p:grpSpPr>
+        <a:xfrm>
+          <a:off x="0" y="0"/>
+          <a:ext cx="0" cy="0"/>
+          <a:chOff x="0" y="0"/>
+          <a:chExt cx="0" cy="0"/>
+        </a:xfrm>
+      </p:grpSpPr>
       <p:sp>
         <p:nvSpPr>
           <p:cNvPr id="2" name="Rectangle 1"/>
@@ -5020,6 +4813,7 @@
           <a:lstStyle/>
           <a:p>
             <a:pPr algn="ctr"/>
+            <a:endParaRPr/>
           </a:p>
         </p:txBody>
       </p:sp>
@@ -5063,6 +4857,7 @@
           <a:lstStyle/>
           <a:p>
             <a:pPr algn="ctr"/>
+            <a:endParaRPr/>
           </a:p>
         </p:txBody>
       </p:sp>
@@ -5083,7 +4878,7 @@
           <a:noFill/>
         </p:spPr>
         <p:txBody>
-          <a:bodyPr wrap="square" anchor="t" lIns="0" rIns="0" tIns="0" bIns="0">
+          <a:bodyPr wrap="square" lIns="0" tIns="0" rIns="0" bIns="0" anchor="t">
             <a:spAutoFit/>
           </a:bodyPr>
           <a:lstStyle/>
@@ -5118,7 +4913,7 @@
           <a:noFill/>
         </p:spPr>
         <p:txBody>
-          <a:bodyPr wrap="square" anchor="t" lIns="0" rIns="0" tIns="0" bIns="0">
+          <a:bodyPr wrap="square" lIns="0" tIns="0" rIns="0" bIns="0" anchor="t">
             <a:spAutoFit/>
           </a:bodyPr>
           <a:lstStyle/>
@@ -5180,6 +4975,7 @@
           <a:lstStyle/>
           <a:p>
             <a:pPr algn="ctr"/>
+            <a:endParaRPr/>
           </a:p>
         </p:txBody>
       </p:sp>
@@ -5223,6 +5019,7 @@
           <a:lstStyle/>
           <a:p>
             <a:pPr algn="ctr"/>
+            <a:endParaRPr/>
           </a:p>
         </p:txBody>
       </p:sp>
@@ -5266,6 +5063,7 @@
           <a:lstStyle/>
           <a:p>
             <a:pPr algn="ctr"/>
+            <a:endParaRPr/>
           </a:p>
         </p:txBody>
       </p:sp>
@@ -5286,7 +5084,7 @@
           <a:noFill/>
         </p:spPr>
         <p:txBody>
-          <a:bodyPr wrap="square" anchor="ctr" lIns="0" rIns="0" tIns="0" bIns="0">
+          <a:bodyPr wrap="square" lIns="0" tIns="0" rIns="0" bIns="0" anchor="ctr">
             <a:spAutoFit/>
           </a:bodyPr>
           <a:lstStyle/>
@@ -5344,7 +5142,7 @@
           </a:fontRef>
         </p:style>
         <p:txBody>
-          <a:bodyPr rtlCol="0" anchor="ctr" lIns="0" rIns="0" tIns="0" bIns="0"/>
+          <a:bodyPr lIns="0" tIns="0" rIns="0" bIns="0" rtlCol="0" anchor="ctr"/>
           <a:lstStyle/>
           <a:p>
             <a:pPr algn="ctr"/>
@@ -5400,7 +5198,7 @@
           </a:fontRef>
         </p:style>
         <p:txBody>
-          <a:bodyPr rtlCol="0" anchor="ctr" lIns="0" rIns="0" tIns="0" bIns="0"/>
+          <a:bodyPr lIns="0" tIns="0" rIns="0" bIns="0" rtlCol="0" anchor="ctr"/>
           <a:lstStyle/>
           <a:p>
             <a:pPr algn="ctr"/>
@@ -5491,7 +5289,7 @@
           </a:fontRef>
         </p:style>
         <p:txBody>
-          <a:bodyPr rtlCol="0" anchor="ctr" lIns="0" rIns="0" tIns="0" bIns="0"/>
+          <a:bodyPr lIns="0" tIns="0" rIns="0" bIns="0" rtlCol="0" anchor="ctr"/>
           <a:lstStyle/>
           <a:p>
             <a:pPr algn="ctr"/>
@@ -5547,7 +5345,7 @@
           </a:fontRef>
         </p:style>
         <p:txBody>
-          <a:bodyPr rtlCol="0" anchor="ctr" lIns="0" rIns="0" tIns="0" bIns="0"/>
+          <a:bodyPr lIns="0" tIns="0" rIns="0" bIns="0" rtlCol="0" anchor="ctr"/>
           <a:lstStyle/>
           <a:p>
             <a:pPr algn="ctr"/>
@@ -5603,7 +5401,7 @@
           </a:fontRef>
         </p:style>
         <p:txBody>
-          <a:bodyPr rtlCol="0" anchor="ctr" lIns="0" rIns="0" tIns="0" bIns="0"/>
+          <a:bodyPr lIns="0" tIns="0" rIns="0" bIns="0" rtlCol="0" anchor="ctr"/>
           <a:lstStyle/>
           <a:p>
             <a:pPr algn="ctr"/>
@@ -5657,7 +5455,7 @@
           </a:fontRef>
         </p:style>
         <p:txBody>
-          <a:bodyPr rtlCol="0" anchor="ctr" lIns="0" rIns="0" tIns="0" bIns="0"/>
+          <a:bodyPr lIns="0" tIns="0" rIns="0" bIns="0" rtlCol="0" anchor="ctr"/>
           <a:lstStyle/>
           <a:p>
             <a:pPr algn="ctr"/>
@@ -5713,6 +5511,7 @@
           <a:lstStyle/>
           <a:p>
             <a:pPr algn="ctr"/>
+            <a:endParaRPr/>
           </a:p>
         </p:txBody>
       </p:sp>
@@ -5791,7 +5590,7 @@
           </a:fontRef>
         </p:style>
         <p:txBody>
-          <a:bodyPr rtlCol="0" anchor="ctr" lIns="0" rIns="0" tIns="0" bIns="0"/>
+          <a:bodyPr lIns="0" tIns="0" rIns="0" bIns="0" rtlCol="0" anchor="ctr"/>
           <a:lstStyle/>
           <a:p>
             <a:pPr algn="ctr"/>
@@ -5851,6 +5650,7 @@
           <a:lstStyle/>
           <a:p>
             <a:pPr algn="ctr"/>
+            <a:endParaRPr/>
           </a:p>
         </p:txBody>
       </p:sp>
@@ -5871,7 +5671,7 @@
           <a:noFill/>
         </p:spPr>
         <p:txBody>
-          <a:bodyPr wrap="square" anchor="t" lIns="0" rIns="0" tIns="0" bIns="0">
+          <a:bodyPr wrap="square" lIns="0" tIns="0" rIns="0" bIns="0" anchor="t">
             <a:spAutoFit/>
           </a:bodyPr>
           <a:lstStyle/>
@@ -5906,7 +5706,7 @@
           <a:noFill/>
         </p:spPr>
         <p:txBody>
-          <a:bodyPr wrap="square" anchor="t" lIns="0" rIns="0" tIns="0" bIns="0">
+          <a:bodyPr wrap="square" lIns="0" tIns="0" rIns="0" bIns="0" anchor="t">
             <a:spAutoFit/>
           </a:bodyPr>
           <a:lstStyle/>
@@ -5984,6 +5784,7 @@
           <a:lstStyle/>
           <a:p>
             <a:pPr algn="ctr"/>
+            <a:endParaRPr/>
           </a:p>
         </p:txBody>
       </p:sp>
@@ -6004,7 +5805,7 @@
           <a:noFill/>
         </p:spPr>
         <p:txBody>
-          <a:bodyPr wrap="square" anchor="t" lIns="0" rIns="0" tIns="0" bIns="0">
+          <a:bodyPr wrap="square" lIns="0" tIns="0" rIns="0" bIns="0" anchor="t">
             <a:spAutoFit/>
           </a:bodyPr>
           <a:lstStyle/>
@@ -6039,7 +5840,7 @@
           <a:noFill/>
         </p:spPr>
         <p:txBody>
-          <a:bodyPr wrap="square" anchor="t" lIns="0" rIns="0" tIns="0" bIns="0">
+          <a:bodyPr wrap="square" lIns="0" tIns="0" rIns="0" bIns="0" anchor="t">
             <a:spAutoFit/>
           </a:bodyPr>
           <a:lstStyle/>
@@ -6090,7 +5891,7 @@
           <a:noFill/>
         </p:spPr>
         <p:txBody>
-          <a:bodyPr wrap="square" anchor="t" lIns="0" rIns="0" tIns="0" bIns="0">
+          <a:bodyPr wrap="square" lIns="0" tIns="0" rIns="0" bIns="0" anchor="t">
             <a:spAutoFit/>
           </a:bodyPr>
           <a:lstStyle/>
@@ -6152,6 +5953,7 @@
           <a:lstStyle/>
           <a:p>
             <a:pPr algn="ctr"/>
+            <a:endParaRPr/>
           </a:p>
         </p:txBody>
       </p:sp>
@@ -6172,7 +5974,7 @@
           <a:noFill/>
         </p:spPr>
         <p:txBody>
-          <a:bodyPr wrap="square" anchor="ctr" lIns="0" rIns="0" tIns="0" bIns="0">
+          <a:bodyPr wrap="square" lIns="0" tIns="0" rIns="0" bIns="0" anchor="ctr">
             <a:spAutoFit/>
           </a:bodyPr>
           <a:lstStyle/>
@@ -6234,6 +6036,7 @@
           <a:lstStyle/>
           <a:p>
             <a:pPr algn="ctr"/>
+            <a:endParaRPr/>
           </a:p>
         </p:txBody>
       </p:sp>
@@ -6281,6 +6084,7 @@
           <a:lstStyle/>
           <a:p>
             <a:pPr algn="ctr"/>
+            <a:endParaRPr/>
           </a:p>
         </p:txBody>
       </p:sp>
@@ -6301,7 +6105,7 @@
           <a:noFill/>
         </p:spPr>
         <p:txBody>
-          <a:bodyPr wrap="square" anchor="ctr" lIns="0" rIns="0" tIns="0" bIns="0">
+          <a:bodyPr wrap="square" lIns="0" tIns="0" rIns="0" bIns="0" anchor="ctr">
             <a:spAutoFit/>
           </a:bodyPr>
           <a:lstStyle/>
@@ -6363,6 +6167,7 @@
           <a:lstStyle/>
           <a:p>
             <a:pPr algn="ctr"/>
+            <a:endParaRPr/>
           </a:p>
         </p:txBody>
       </p:sp>
@@ -6410,6 +6215,7 @@
           <a:lstStyle/>
           <a:p>
             <a:pPr algn="ctr"/>
+            <a:endParaRPr/>
           </a:p>
         </p:txBody>
       </p:sp>
@@ -6430,7 +6236,7 @@
           <a:noFill/>
         </p:spPr>
         <p:txBody>
-          <a:bodyPr wrap="square" anchor="ctr" lIns="0" rIns="0" tIns="0" bIns="0">
+          <a:bodyPr wrap="square" lIns="0" tIns="0" rIns="0" bIns="0" anchor="ctr">
             <a:spAutoFit/>
           </a:bodyPr>
           <a:lstStyle/>
@@ -6469,7 +6275,7 @@
           <a:noFill/>
         </p:spPr>
         <p:txBody>
-          <a:bodyPr wrap="square" anchor="t" lIns="0" rIns="0" tIns="0" bIns="0">
+          <a:bodyPr wrap="square" lIns="0" tIns="0" rIns="0" bIns="0" anchor="t">
             <a:spAutoFit/>
           </a:bodyPr>
           <a:lstStyle/>
@@ -6496,7 +6302,7 @@
 </file>
 
 <file path=ppt/slides/slide11.xml><?xml version="1.0" encoding="utf-8"?>
-<p:sld xmlns:a="http://schemas.openxmlformats.org/drawingml/2006/main" xmlns:p="http://schemas.openxmlformats.org/presentationml/2006/main" xmlns:r="http://schemas.openxmlformats.org/officeDocument/2006/relationships">
+<p:sld xmlns:a="http://schemas.openxmlformats.org/drawingml/2006/main" xmlns:r="http://schemas.openxmlformats.org/officeDocument/2006/relationships" xmlns:p="http://schemas.openxmlformats.org/presentationml/2006/main">
   <p:cSld>
     <p:spTree>
       <p:nvGrpSpPr>
@@ -6504,7 +6310,14 @@
         <p:cNvGrpSpPr/>
         <p:nvPr/>
       </p:nvGrpSpPr>
-      <p:grpSpPr/>
+      <p:grpSpPr>
+        <a:xfrm>
+          <a:off x="0" y="0"/>
+          <a:ext cx="0" cy="0"/>
+          <a:chOff x="0" y="0"/>
+          <a:chExt cx="0" cy="0"/>
+        </a:xfrm>
+      </p:grpSpPr>
       <p:sp>
         <p:nvSpPr>
           <p:cNvPr id="2" name="Rectangle 1"/>
@@ -6545,6 +6358,7 @@
           <a:lstStyle/>
           <a:p>
             <a:pPr algn="ctr"/>
+            <a:endParaRPr/>
           </a:p>
         </p:txBody>
       </p:sp>
@@ -6588,6 +6402,7 @@
           <a:lstStyle/>
           <a:p>
             <a:pPr algn="ctr"/>
+            <a:endParaRPr/>
           </a:p>
         </p:txBody>
       </p:sp>
@@ -6608,7 +6423,7 @@
           <a:noFill/>
         </p:spPr>
         <p:txBody>
-          <a:bodyPr wrap="square" anchor="t" lIns="0" rIns="0" tIns="0" bIns="0">
+          <a:bodyPr wrap="square" lIns="0" tIns="0" rIns="0" bIns="0" anchor="t">
             <a:spAutoFit/>
           </a:bodyPr>
           <a:lstStyle/>
@@ -6643,7 +6458,7 @@
           <a:noFill/>
         </p:spPr>
         <p:txBody>
-          <a:bodyPr wrap="square" anchor="t" lIns="0" rIns="0" tIns="0" bIns="0">
+          <a:bodyPr wrap="square" lIns="0" tIns="0" rIns="0" bIns="0" anchor="t">
             <a:spAutoFit/>
           </a:bodyPr>
           <a:lstStyle/>
@@ -6705,6 +6520,7 @@
           <a:lstStyle/>
           <a:p>
             <a:pPr algn="ctr"/>
+            <a:endParaRPr/>
           </a:p>
         </p:txBody>
       </p:sp>
@@ -6748,6 +6564,7 @@
           <a:lstStyle/>
           <a:p>
             <a:pPr algn="ctr"/>
+            <a:endParaRPr/>
           </a:p>
         </p:txBody>
       </p:sp>
@@ -6791,6 +6608,7 @@
           <a:lstStyle/>
           <a:p>
             <a:pPr algn="ctr"/>
+            <a:endParaRPr/>
           </a:p>
         </p:txBody>
       </p:sp>
@@ -6811,7 +6629,7 @@
           <a:noFill/>
         </p:spPr>
         <p:txBody>
-          <a:bodyPr wrap="square" anchor="ctr" lIns="0" rIns="0" tIns="0" bIns="0">
+          <a:bodyPr wrap="square" lIns="0" tIns="0" rIns="0" bIns="0" anchor="ctr">
             <a:spAutoFit/>
           </a:bodyPr>
           <a:lstStyle/>
@@ -6846,7 +6664,7 @@
           <a:noFill/>
         </p:spPr>
         <p:txBody>
-          <a:bodyPr wrap="square" anchor="t" lIns="0" rIns="0" tIns="0" bIns="0">
+          <a:bodyPr wrap="square" lIns="0" tIns="0" rIns="0" bIns="0" anchor="t">
             <a:spAutoFit/>
           </a:bodyPr>
           <a:lstStyle/>
@@ -6908,6 +6726,7 @@
           <a:lstStyle/>
           <a:p>
             <a:pPr algn="ctr"/>
+            <a:endParaRPr/>
           </a:p>
         </p:txBody>
       </p:sp>
@@ -6928,7 +6747,7 @@
           <a:noFill/>
         </p:spPr>
         <p:txBody>
-          <a:bodyPr wrap="square" anchor="ctr" lIns="0" rIns="0" tIns="0" bIns="0">
+          <a:bodyPr wrap="square" lIns="0" tIns="0" rIns="0" bIns="0" anchor="ctr">
             <a:spAutoFit/>
           </a:bodyPr>
           <a:lstStyle/>
@@ -6990,6 +6809,7 @@
           <a:lstStyle/>
           <a:p>
             <a:pPr algn="ctr"/>
+            <a:endParaRPr/>
           </a:p>
         </p:txBody>
       </p:sp>
@@ -7037,6 +6857,7 @@
           <a:lstStyle/>
           <a:p>
             <a:pPr algn="ctr"/>
+            <a:endParaRPr/>
           </a:p>
         </p:txBody>
       </p:sp>
@@ -7057,7 +6878,7 @@
           <a:noFill/>
         </p:spPr>
         <p:txBody>
-          <a:bodyPr wrap="square" anchor="ctr" lIns="0" rIns="0" tIns="0" bIns="0">
+          <a:bodyPr wrap="square" lIns="0" tIns="0" rIns="0" bIns="0" anchor="ctr">
             <a:spAutoFit/>
           </a:bodyPr>
           <a:lstStyle/>
@@ -7119,6 +6940,7 @@
           <a:lstStyle/>
           <a:p>
             <a:pPr algn="ctr"/>
+            <a:endParaRPr/>
           </a:p>
         </p:txBody>
       </p:sp>
@@ -7166,6 +6988,7 @@
           <a:lstStyle/>
           <a:p>
             <a:pPr algn="ctr"/>
+            <a:endParaRPr/>
           </a:p>
         </p:txBody>
       </p:sp>
@@ -7186,7 +7009,7 @@
           <a:noFill/>
         </p:spPr>
         <p:txBody>
-          <a:bodyPr wrap="square" anchor="ctr" lIns="0" rIns="0" tIns="0" bIns="0">
+          <a:bodyPr wrap="square" lIns="0" tIns="0" rIns="0" bIns="0" anchor="ctr">
             <a:spAutoFit/>
           </a:bodyPr>
           <a:lstStyle/>
@@ -7248,6 +7071,7 @@
           <a:lstStyle/>
           <a:p>
             <a:pPr algn="ctr"/>
+            <a:endParaRPr/>
           </a:p>
         </p:txBody>
       </p:sp>
@@ -7295,6 +7119,7 @@
           <a:lstStyle/>
           <a:p>
             <a:pPr algn="ctr"/>
+            <a:endParaRPr/>
           </a:p>
         </p:txBody>
       </p:sp>
@@ -7315,7 +7140,7 @@
           <a:noFill/>
         </p:spPr>
         <p:txBody>
-          <a:bodyPr wrap="square" anchor="ctr" lIns="0" rIns="0" tIns="0" bIns="0">
+          <a:bodyPr wrap="square" lIns="0" tIns="0" rIns="0" bIns="0" anchor="ctr">
             <a:spAutoFit/>
           </a:bodyPr>
           <a:lstStyle/>
@@ -7377,6 +7202,7 @@
           <a:lstStyle/>
           <a:p>
             <a:pPr algn="ctr"/>
+            <a:endParaRPr/>
           </a:p>
         </p:txBody>
       </p:sp>
@@ -7424,6 +7250,7 @@
           <a:lstStyle/>
           <a:p>
             <a:pPr algn="ctr"/>
+            <a:endParaRPr/>
           </a:p>
         </p:txBody>
       </p:sp>
@@ -7444,7 +7271,7 @@
           <a:noFill/>
         </p:spPr>
         <p:txBody>
-          <a:bodyPr wrap="square" anchor="ctr" lIns="0" rIns="0" tIns="0" bIns="0">
+          <a:bodyPr wrap="square" lIns="0" tIns="0" rIns="0" bIns="0" anchor="ctr">
             <a:spAutoFit/>
           </a:bodyPr>
           <a:lstStyle/>
@@ -7483,7 +7310,7 @@
           <a:noFill/>
         </p:spPr>
         <p:txBody>
-          <a:bodyPr wrap="square" anchor="t" lIns="0" rIns="0" tIns="0" bIns="0">
+          <a:bodyPr wrap="square" lIns="0" tIns="0" rIns="0" bIns="0" anchor="t">
             <a:spAutoFit/>
           </a:bodyPr>
           <a:lstStyle/>
@@ -7545,6 +7372,7 @@
           <a:lstStyle/>
           <a:p>
             <a:pPr algn="ctr"/>
+            <a:endParaRPr/>
           </a:p>
         </p:txBody>
       </p:sp>
@@ -7565,7 +7393,7 @@
           <a:noFill/>
         </p:spPr>
         <p:txBody>
-          <a:bodyPr wrap="square" anchor="ctr" lIns="0" rIns="0" tIns="0" bIns="0">
+          <a:bodyPr wrap="square" lIns="0" tIns="0" rIns="0" bIns="0" anchor="ctr">
             <a:spAutoFit/>
           </a:bodyPr>
           <a:lstStyle/>
@@ -7627,6 +7455,7 @@
           <a:lstStyle/>
           <a:p>
             <a:pPr algn="ctr"/>
+            <a:endParaRPr/>
           </a:p>
         </p:txBody>
       </p:sp>
@@ -7674,6 +7503,7 @@
           <a:lstStyle/>
           <a:p>
             <a:pPr algn="ctr"/>
+            <a:endParaRPr/>
           </a:p>
         </p:txBody>
       </p:sp>
@@ -7694,7 +7524,7 @@
           <a:noFill/>
         </p:spPr>
         <p:txBody>
-          <a:bodyPr wrap="square" anchor="ctr" lIns="0" rIns="0" tIns="0" bIns="0">
+          <a:bodyPr wrap="square" lIns="0" tIns="0" rIns="0" bIns="0" anchor="ctr">
             <a:spAutoFit/>
           </a:bodyPr>
           <a:lstStyle/>
@@ -7756,6 +7586,7 @@
           <a:lstStyle/>
           <a:p>
             <a:pPr algn="ctr"/>
+            <a:endParaRPr/>
           </a:p>
         </p:txBody>
       </p:sp>
@@ -7803,6 +7634,7 @@
           <a:lstStyle/>
           <a:p>
             <a:pPr algn="ctr"/>
+            <a:endParaRPr/>
           </a:p>
         </p:txBody>
       </p:sp>
@@ -7823,7 +7655,7 @@
           <a:noFill/>
         </p:spPr>
         <p:txBody>
-          <a:bodyPr wrap="square" anchor="ctr" lIns="0" rIns="0" tIns="0" bIns="0">
+          <a:bodyPr wrap="square" lIns="0" tIns="0" rIns="0" bIns="0" anchor="ctr">
             <a:spAutoFit/>
           </a:bodyPr>
           <a:lstStyle/>
@@ -7885,6 +7717,7 @@
           <a:lstStyle/>
           <a:p>
             <a:pPr algn="ctr"/>
+            <a:endParaRPr/>
           </a:p>
         </p:txBody>
       </p:sp>
@@ -7932,6 +7765,7 @@
           <a:lstStyle/>
           <a:p>
             <a:pPr algn="ctr"/>
+            <a:endParaRPr/>
           </a:p>
         </p:txBody>
       </p:sp>
@@ -7952,7 +7786,7 @@
           <a:noFill/>
         </p:spPr>
         <p:txBody>
-          <a:bodyPr wrap="square" anchor="ctr" lIns="0" rIns="0" tIns="0" bIns="0">
+          <a:bodyPr wrap="square" lIns="0" tIns="0" rIns="0" bIns="0" anchor="ctr">
             <a:spAutoFit/>
           </a:bodyPr>
           <a:lstStyle/>
@@ -8014,6 +7848,7 @@
           <a:lstStyle/>
           <a:p>
             <a:pPr algn="ctr"/>
+            <a:endParaRPr/>
           </a:p>
         </p:txBody>
       </p:sp>
@@ -8061,6 +7896,7 @@
           <a:lstStyle/>
           <a:p>
             <a:pPr algn="ctr"/>
+            <a:endParaRPr/>
           </a:p>
         </p:txBody>
       </p:sp>
@@ -8081,7 +7917,7 @@
           <a:noFill/>
         </p:spPr>
         <p:txBody>
-          <a:bodyPr wrap="square" anchor="ctr" lIns="0" rIns="0" tIns="0" bIns="0">
+          <a:bodyPr wrap="square" lIns="0" tIns="0" rIns="0" bIns="0" anchor="ctr">
             <a:spAutoFit/>
           </a:bodyPr>
           <a:lstStyle/>
@@ -8143,6 +7979,7 @@
           <a:lstStyle/>
           <a:p>
             <a:pPr algn="ctr"/>
+            <a:endParaRPr/>
           </a:p>
         </p:txBody>
       </p:sp>
@@ -8190,6 +8027,7 @@
           <a:lstStyle/>
           <a:p>
             <a:pPr algn="ctr"/>
+            <a:endParaRPr/>
           </a:p>
         </p:txBody>
       </p:sp>
@@ -8210,7 +8048,7 @@
           <a:noFill/>
         </p:spPr>
         <p:txBody>
-          <a:bodyPr wrap="square" anchor="ctr" lIns="0" rIns="0" tIns="0" bIns="0">
+          <a:bodyPr wrap="square" lIns="0" tIns="0" rIns="0" bIns="0" anchor="ctr">
             <a:spAutoFit/>
           </a:bodyPr>
           <a:lstStyle/>
@@ -8272,6 +8110,7 @@
           <a:lstStyle/>
           <a:p>
             <a:pPr algn="ctr"/>
+            <a:endParaRPr/>
           </a:p>
         </p:txBody>
       </p:sp>
@@ -8319,6 +8158,7 @@
           <a:lstStyle/>
           <a:p>
             <a:pPr algn="ctr"/>
+            <a:endParaRPr/>
           </a:p>
         </p:txBody>
       </p:sp>
@@ -8339,7 +8179,7 @@
           <a:noFill/>
         </p:spPr>
         <p:txBody>
-          <a:bodyPr wrap="square" anchor="ctr" lIns="0" rIns="0" tIns="0" bIns="0">
+          <a:bodyPr wrap="square" lIns="0" tIns="0" rIns="0" bIns="0" anchor="ctr">
             <a:spAutoFit/>
           </a:bodyPr>
           <a:lstStyle/>
@@ -8471,6 +8311,7 @@
           <a:lstStyle/>
           <a:p>
             <a:pPr algn="ctr"/>
+            <a:endParaRPr/>
           </a:p>
         </p:txBody>
       </p:sp>
@@ -8491,7 +8332,7 @@
           <a:noFill/>
         </p:spPr>
         <p:txBody>
-          <a:bodyPr wrap="square" anchor="t" lIns="0" rIns="0" tIns="0" bIns="0">
+          <a:bodyPr wrap="square" lIns="0" tIns="0" rIns="0" bIns="0" anchor="t">
             <a:spAutoFit/>
           </a:bodyPr>
           <a:lstStyle/>
@@ -8549,6 +8390,7 @@
           <a:lstStyle/>
           <a:p>
             <a:pPr algn="ctr"/>
+            <a:endParaRPr/>
           </a:p>
         </p:txBody>
       </p:sp>
@@ -8569,7 +8411,7 @@
           <a:noFill/>
         </p:spPr>
         <p:txBody>
-          <a:bodyPr wrap="square" anchor="t" lIns="0" rIns="0" tIns="0" bIns="0">
+          <a:bodyPr wrap="square" lIns="0" tIns="0" rIns="0" bIns="0" anchor="t">
             <a:spAutoFit/>
           </a:bodyPr>
           <a:lstStyle/>
@@ -8627,6 +8469,7 @@
           <a:lstStyle/>
           <a:p>
             <a:pPr algn="ctr"/>
+            <a:endParaRPr/>
           </a:p>
         </p:txBody>
       </p:sp>
@@ -8647,7 +8490,7 @@
           <a:noFill/>
         </p:spPr>
         <p:txBody>
-          <a:bodyPr wrap="square" anchor="t" lIns="0" rIns="0" tIns="0" bIns="0">
+          <a:bodyPr wrap="square" lIns="0" tIns="0" rIns="0" bIns="0" anchor="t">
             <a:spAutoFit/>
           </a:bodyPr>
           <a:lstStyle/>
@@ -8682,7 +8525,7 @@
           <a:noFill/>
         </p:spPr>
         <p:txBody>
-          <a:bodyPr wrap="square" anchor="t" lIns="0" rIns="0" tIns="0" bIns="0">
+          <a:bodyPr wrap="square" lIns="0" tIns="0" rIns="0" bIns="0" anchor="t">
             <a:spAutoFit/>
           </a:bodyPr>
           <a:lstStyle/>
@@ -8709,7 +8552,7 @@
 </file>
 
 <file path=ppt/slides/slide12.xml><?xml version="1.0" encoding="utf-8"?>
-<p:sld xmlns:a="http://schemas.openxmlformats.org/drawingml/2006/main" xmlns:p="http://schemas.openxmlformats.org/presentationml/2006/main" xmlns:r="http://schemas.openxmlformats.org/officeDocument/2006/relationships">
+<p:sld xmlns:a="http://schemas.openxmlformats.org/drawingml/2006/main" xmlns:r="http://schemas.openxmlformats.org/officeDocument/2006/relationships" xmlns:p="http://schemas.openxmlformats.org/presentationml/2006/main">
   <p:cSld>
     <p:spTree>
       <p:nvGrpSpPr>
@@ -8717,7 +8560,14 @@
         <p:cNvGrpSpPr/>
         <p:nvPr/>
       </p:nvGrpSpPr>
-      <p:grpSpPr/>
+      <p:grpSpPr>
+        <a:xfrm>
+          <a:off x="0" y="0"/>
+          <a:ext cx="0" cy="0"/>
+          <a:chOff x="0" y="0"/>
+          <a:chExt cx="0" cy="0"/>
+        </a:xfrm>
+      </p:grpSpPr>
       <p:sp>
         <p:nvSpPr>
           <p:cNvPr id="2" name="Rectangle 1"/>
@@ -8758,6 +8608,7 @@
           <a:lstStyle/>
           <a:p>
             <a:pPr algn="ctr"/>
+            <a:endParaRPr/>
           </a:p>
         </p:txBody>
       </p:sp>
@@ -8801,6 +8652,7 @@
           <a:lstStyle/>
           <a:p>
             <a:pPr algn="ctr"/>
+            <a:endParaRPr/>
           </a:p>
         </p:txBody>
       </p:sp>
@@ -8821,7 +8673,7 @@
           <a:noFill/>
         </p:spPr>
         <p:txBody>
-          <a:bodyPr wrap="square" anchor="t" lIns="0" rIns="0" tIns="0" bIns="0">
+          <a:bodyPr wrap="square" lIns="0" tIns="0" rIns="0" bIns="0" anchor="t">
             <a:spAutoFit/>
           </a:bodyPr>
           <a:lstStyle/>
@@ -8856,7 +8708,7 @@
           <a:noFill/>
         </p:spPr>
         <p:txBody>
-          <a:bodyPr wrap="square" anchor="t" lIns="0" rIns="0" tIns="0" bIns="0">
+          <a:bodyPr wrap="square" lIns="0" tIns="0" rIns="0" bIns="0" anchor="t">
             <a:spAutoFit/>
           </a:bodyPr>
           <a:lstStyle/>
@@ -8918,6 +8770,7 @@
           <a:lstStyle/>
           <a:p>
             <a:pPr algn="ctr"/>
+            <a:endParaRPr/>
           </a:p>
         </p:txBody>
       </p:sp>
@@ -8961,6 +8814,7 @@
           <a:lstStyle/>
           <a:p>
             <a:pPr algn="ctr"/>
+            <a:endParaRPr/>
           </a:p>
         </p:txBody>
       </p:sp>
@@ -9004,6 +8858,7 @@
           <a:lstStyle/>
           <a:p>
             <a:pPr algn="ctr"/>
+            <a:endParaRPr/>
           </a:p>
         </p:txBody>
       </p:sp>
@@ -9024,7 +8879,7 @@
           <a:noFill/>
         </p:spPr>
         <p:txBody>
-          <a:bodyPr wrap="square" anchor="ctr" lIns="0" rIns="0" tIns="0" bIns="0">
+          <a:bodyPr wrap="square" lIns="0" tIns="0" rIns="0" bIns="0" anchor="ctr">
             <a:spAutoFit/>
           </a:bodyPr>
           <a:lstStyle/>
@@ -9059,7 +8914,7 @@
           <a:noFill/>
         </p:spPr>
         <p:txBody>
-          <a:bodyPr wrap="square" anchor="t" lIns="0" rIns="0" tIns="0" bIns="0">
+          <a:bodyPr wrap="square" lIns="0" tIns="0" rIns="0" bIns="0" anchor="t">
             <a:spAutoFit/>
           </a:bodyPr>
           <a:lstStyle/>
@@ -9121,6 +8976,7 @@
           <a:lstStyle/>
           <a:p>
             <a:pPr algn="ctr"/>
+            <a:endParaRPr/>
           </a:p>
         </p:txBody>
       </p:sp>
@@ -9141,7 +8997,7 @@
           <a:noFill/>
         </p:spPr>
         <p:txBody>
-          <a:bodyPr wrap="square" anchor="t" lIns="0" rIns="0" tIns="0" bIns="0">
+          <a:bodyPr wrap="square" lIns="0" tIns="0" rIns="0" bIns="0" anchor="t">
             <a:spAutoFit/>
           </a:bodyPr>
           <a:lstStyle/>
@@ -9176,7 +9032,7 @@
           <a:noFill/>
         </p:spPr>
         <p:txBody>
-          <a:bodyPr wrap="square" anchor="t" lIns="0" rIns="0" tIns="0" bIns="0">
+          <a:bodyPr wrap="square" lIns="0" tIns="0" rIns="0" bIns="0" anchor="t">
             <a:spAutoFit/>
           </a:bodyPr>
           <a:lstStyle/>
@@ -9242,6 +9098,7 @@
           <a:lstStyle/>
           <a:p>
             <a:pPr algn="ctr"/>
+            <a:endParaRPr/>
           </a:p>
         </p:txBody>
       </p:sp>
@@ -9262,7 +9119,7 @@
           <a:noFill/>
         </p:spPr>
         <p:txBody>
-          <a:bodyPr wrap="square" anchor="t" lIns="0" rIns="0" tIns="0" bIns="0">
+          <a:bodyPr wrap="square" lIns="0" tIns="0" rIns="0" bIns="0" anchor="t">
             <a:spAutoFit/>
           </a:bodyPr>
           <a:lstStyle/>
@@ -9297,7 +9154,7 @@
           <a:noFill/>
         </p:spPr>
         <p:txBody>
-          <a:bodyPr wrap="square" anchor="t" lIns="0" rIns="0" tIns="0" bIns="0">
+          <a:bodyPr wrap="square" lIns="0" tIns="0" rIns="0" bIns="0" anchor="t">
             <a:spAutoFit/>
           </a:bodyPr>
           <a:lstStyle/>
@@ -9363,6 +9220,7 @@
           <a:lstStyle/>
           <a:p>
             <a:pPr algn="ctr"/>
+            <a:endParaRPr/>
           </a:p>
         </p:txBody>
       </p:sp>
@@ -9383,7 +9241,7 @@
           <a:noFill/>
         </p:spPr>
         <p:txBody>
-          <a:bodyPr wrap="square" anchor="t" lIns="0" rIns="0" tIns="0" bIns="0">
+          <a:bodyPr wrap="square" lIns="0" tIns="0" rIns="0" bIns="0" anchor="t">
             <a:spAutoFit/>
           </a:bodyPr>
           <a:lstStyle/>
@@ -9418,7 +9276,7 @@
           <a:noFill/>
         </p:spPr>
         <p:txBody>
-          <a:bodyPr wrap="square" anchor="t" lIns="0" rIns="0" tIns="0" bIns="0">
+          <a:bodyPr wrap="square" lIns="0" tIns="0" rIns="0" bIns="0" anchor="t">
             <a:spAutoFit/>
           </a:bodyPr>
           <a:lstStyle/>
@@ -9484,6 +9342,7 @@
           <a:lstStyle/>
           <a:p>
             <a:pPr algn="ctr"/>
+            <a:endParaRPr/>
           </a:p>
         </p:txBody>
       </p:sp>
@@ -9504,7 +9363,7 @@
           <a:noFill/>
         </p:spPr>
         <p:txBody>
-          <a:bodyPr wrap="square" anchor="t" lIns="0" rIns="0" tIns="0" bIns="0">
+          <a:bodyPr wrap="square" lIns="0" tIns="0" rIns="0" bIns="0" anchor="t">
             <a:spAutoFit/>
           </a:bodyPr>
           <a:lstStyle/>
@@ -9539,7 +9398,7 @@
           <a:noFill/>
         </p:spPr>
         <p:txBody>
-          <a:bodyPr wrap="square" anchor="t" lIns="0" rIns="0" tIns="0" bIns="0">
+          <a:bodyPr wrap="square" lIns="0" tIns="0" rIns="0" bIns="0" anchor="t">
             <a:spAutoFit/>
           </a:bodyPr>
           <a:lstStyle/>
@@ -9605,6 +9464,7 @@
           <a:lstStyle/>
           <a:p>
             <a:pPr algn="ctr"/>
+            <a:endParaRPr/>
           </a:p>
         </p:txBody>
       </p:sp>
@@ -9625,7 +9485,7 @@
           <a:noFill/>
         </p:spPr>
         <p:txBody>
-          <a:bodyPr wrap="square" anchor="t" lIns="0" rIns="0" tIns="0" bIns="0">
+          <a:bodyPr wrap="square" lIns="0" tIns="0" rIns="0" bIns="0" anchor="t">
             <a:spAutoFit/>
           </a:bodyPr>
           <a:lstStyle/>
@@ -9660,7 +9520,7 @@
           <a:noFill/>
         </p:spPr>
         <p:txBody>
-          <a:bodyPr wrap="square" anchor="t" lIns="0" rIns="0" tIns="0" bIns="0">
+          <a:bodyPr wrap="square" lIns="0" tIns="0" rIns="0" bIns="0" anchor="t">
             <a:spAutoFit/>
           </a:bodyPr>
           <a:lstStyle/>
@@ -9726,6 +9586,7 @@
           <a:lstStyle/>
           <a:p>
             <a:pPr algn="ctr"/>
+            <a:endParaRPr/>
           </a:p>
         </p:txBody>
       </p:sp>
@@ -9746,7 +9607,7 @@
           <a:noFill/>
         </p:spPr>
         <p:txBody>
-          <a:bodyPr wrap="square" anchor="t" lIns="0" rIns="0" tIns="0" bIns="0">
+          <a:bodyPr wrap="square" lIns="0" tIns="0" rIns="0" bIns="0" anchor="t">
             <a:spAutoFit/>
           </a:bodyPr>
           <a:lstStyle/>
@@ -9781,7 +9642,7 @@
           <a:noFill/>
         </p:spPr>
         <p:txBody>
-          <a:bodyPr wrap="square" anchor="t" lIns="0" rIns="0" tIns="0" bIns="0">
+          <a:bodyPr wrap="square" lIns="0" tIns="0" rIns="0" bIns="0" anchor="t">
             <a:spAutoFit/>
           </a:bodyPr>
           <a:lstStyle/>
@@ -9820,7 +9681,7 @@
           <a:noFill/>
         </p:spPr>
         <p:txBody>
-          <a:bodyPr wrap="square" anchor="t" lIns="0" rIns="0" tIns="0" bIns="0">
+          <a:bodyPr wrap="square" lIns="0" tIns="0" rIns="0" bIns="0" anchor="t">
             <a:spAutoFit/>
           </a:bodyPr>
           <a:lstStyle/>
@@ -9847,7 +9708,7 @@
 </file>
 
 <file path=ppt/slides/slide13.xml><?xml version="1.0" encoding="utf-8"?>
-<p:sld xmlns:a="http://schemas.openxmlformats.org/drawingml/2006/main" xmlns:p="http://schemas.openxmlformats.org/presentationml/2006/main" xmlns:r="http://schemas.openxmlformats.org/officeDocument/2006/relationships">
+<p:sld xmlns:a="http://schemas.openxmlformats.org/drawingml/2006/main" xmlns:r="http://schemas.openxmlformats.org/officeDocument/2006/relationships" xmlns:p="http://schemas.openxmlformats.org/presentationml/2006/main">
   <p:cSld>
     <p:spTree>
       <p:nvGrpSpPr>
@@ -9855,7 +9716,14 @@
         <p:cNvGrpSpPr/>
         <p:nvPr/>
       </p:nvGrpSpPr>
-      <p:grpSpPr/>
+      <p:grpSpPr>
+        <a:xfrm>
+          <a:off x="0" y="0"/>
+          <a:ext cx="0" cy="0"/>
+          <a:chOff x="0" y="0"/>
+          <a:chExt cx="0" cy="0"/>
+        </a:xfrm>
+      </p:grpSpPr>
       <p:sp>
         <p:nvSpPr>
           <p:cNvPr id="2" name="Rectangle 1"/>
@@ -9896,6 +9764,7 @@
           <a:lstStyle/>
           <a:p>
             <a:pPr algn="ctr"/>
+            <a:endParaRPr/>
           </a:p>
         </p:txBody>
       </p:sp>
@@ -9939,6 +9808,7 @@
           <a:lstStyle/>
           <a:p>
             <a:pPr algn="ctr"/>
+            <a:endParaRPr/>
           </a:p>
         </p:txBody>
       </p:sp>
@@ -9959,7 +9829,7 @@
           <a:noFill/>
         </p:spPr>
         <p:txBody>
-          <a:bodyPr wrap="square" anchor="t" lIns="0" rIns="0" tIns="0" bIns="0">
+          <a:bodyPr wrap="square" lIns="0" tIns="0" rIns="0" bIns="0" anchor="t">
             <a:spAutoFit/>
           </a:bodyPr>
           <a:lstStyle/>
@@ -9994,7 +9864,7 @@
           <a:noFill/>
         </p:spPr>
         <p:txBody>
-          <a:bodyPr wrap="square" anchor="t" lIns="0" rIns="0" tIns="0" bIns="0">
+          <a:bodyPr wrap="square" lIns="0" tIns="0" rIns="0" bIns="0" anchor="t">
             <a:spAutoFit/>
           </a:bodyPr>
           <a:lstStyle/>
@@ -10056,6 +9926,7 @@
           <a:lstStyle/>
           <a:p>
             <a:pPr algn="ctr"/>
+            <a:endParaRPr/>
           </a:p>
         </p:txBody>
       </p:sp>
@@ -10099,6 +9970,7 @@
           <a:lstStyle/>
           <a:p>
             <a:pPr algn="ctr"/>
+            <a:endParaRPr/>
           </a:p>
         </p:txBody>
       </p:sp>
@@ -10142,6 +10014,7 @@
           <a:lstStyle/>
           <a:p>
             <a:pPr algn="ctr"/>
+            <a:endParaRPr/>
           </a:p>
         </p:txBody>
       </p:sp>
@@ -10162,7 +10035,7 @@
           <a:noFill/>
         </p:spPr>
         <p:txBody>
-          <a:bodyPr wrap="square" anchor="ctr" lIns="0" rIns="0" tIns="0" bIns="0">
+          <a:bodyPr wrap="square" lIns="0" tIns="0" rIns="0" bIns="0" anchor="ctr">
             <a:spAutoFit/>
           </a:bodyPr>
           <a:lstStyle/>
@@ -10197,7 +10070,7 @@
           <a:noFill/>
         </p:spPr>
         <p:txBody>
-          <a:bodyPr wrap="square" anchor="t" lIns="0" rIns="0" tIns="0" bIns="0">
+          <a:bodyPr wrap="square" lIns="0" tIns="0" rIns="0" bIns="0" anchor="t">
             <a:spAutoFit/>
           </a:bodyPr>
           <a:lstStyle/>
@@ -10259,6 +10132,7 @@
           <a:lstStyle/>
           <a:p>
             <a:pPr algn="ctr"/>
+            <a:endParaRPr/>
           </a:p>
         </p:txBody>
       </p:sp>
@@ -10279,7 +10153,7 @@
           <a:noFill/>
         </p:spPr>
         <p:txBody>
-          <a:bodyPr wrap="square" anchor="t" lIns="0" rIns="0" tIns="0" bIns="0">
+          <a:bodyPr wrap="square" lIns="0" tIns="0" rIns="0" bIns="0" anchor="t">
             <a:spAutoFit/>
           </a:bodyPr>
           <a:lstStyle/>
@@ -10314,7 +10188,7 @@
           <a:noFill/>
         </p:spPr>
         <p:txBody>
-          <a:bodyPr wrap="square" anchor="t" lIns="0" rIns="0" tIns="0" bIns="0">
+          <a:bodyPr wrap="square" lIns="0" tIns="0" rIns="0" bIns="0" anchor="t">
             <a:spAutoFit/>
           </a:bodyPr>
           <a:lstStyle/>
@@ -10380,6 +10254,7 @@
           <a:lstStyle/>
           <a:p>
             <a:pPr algn="ctr"/>
+            <a:endParaRPr/>
           </a:p>
         </p:txBody>
       </p:sp>
@@ -10400,7 +10275,7 @@
           <a:noFill/>
         </p:spPr>
         <p:txBody>
-          <a:bodyPr wrap="square" anchor="t" lIns="0" rIns="0" tIns="0" bIns="0">
+          <a:bodyPr wrap="square" lIns="0" tIns="0" rIns="0" bIns="0" anchor="t">
             <a:spAutoFit/>
           </a:bodyPr>
           <a:lstStyle/>
@@ -10435,7 +10310,7 @@
           <a:noFill/>
         </p:spPr>
         <p:txBody>
-          <a:bodyPr wrap="square" anchor="t" lIns="0" rIns="0" tIns="0" bIns="0">
+          <a:bodyPr wrap="square" lIns="0" tIns="0" rIns="0" bIns="0" anchor="t">
             <a:spAutoFit/>
           </a:bodyPr>
           <a:lstStyle/>
@@ -10501,6 +10376,7 @@
           <a:lstStyle/>
           <a:p>
             <a:pPr algn="ctr"/>
+            <a:endParaRPr/>
           </a:p>
         </p:txBody>
       </p:sp>
@@ -10521,7 +10397,7 @@
           <a:noFill/>
         </p:spPr>
         <p:txBody>
-          <a:bodyPr wrap="square" anchor="t" lIns="0" rIns="0" tIns="0" bIns="0">
+          <a:bodyPr wrap="square" lIns="0" tIns="0" rIns="0" bIns="0" anchor="t">
             <a:spAutoFit/>
           </a:bodyPr>
           <a:lstStyle/>
@@ -10556,7 +10432,7 @@
           <a:noFill/>
         </p:spPr>
         <p:txBody>
-          <a:bodyPr wrap="square" anchor="t" lIns="0" rIns="0" tIns="0" bIns="0">
+          <a:bodyPr wrap="square" lIns="0" tIns="0" rIns="0" bIns="0" anchor="t">
             <a:spAutoFit/>
           </a:bodyPr>
           <a:lstStyle/>
@@ -10595,7 +10471,7 @@
           <a:noFill/>
         </p:spPr>
         <p:txBody>
-          <a:bodyPr wrap="square" anchor="t" lIns="0" rIns="0" tIns="0" bIns="0">
+          <a:bodyPr wrap="square" lIns="0" tIns="0" rIns="0" bIns="0" anchor="t">
             <a:spAutoFit/>
           </a:bodyPr>
           <a:lstStyle/>
@@ -10630,7 +10506,7 @@
           <a:noFill/>
         </p:spPr>
         <p:txBody>
-          <a:bodyPr wrap="square" anchor="t" lIns="0" rIns="0" tIns="0" bIns="0">
+          <a:bodyPr wrap="square" lIns="0" tIns="0" rIns="0" bIns="0" anchor="t">
             <a:spAutoFit/>
           </a:bodyPr>
           <a:lstStyle/>
@@ -10657,7 +10533,7 @@
 </file>
 
 <file path=ppt/slides/slide2.xml><?xml version="1.0" encoding="utf-8"?>
-<p:sld xmlns:a="http://schemas.openxmlformats.org/drawingml/2006/main" xmlns:p="http://schemas.openxmlformats.org/presentationml/2006/main" xmlns:r="http://schemas.openxmlformats.org/officeDocument/2006/relationships">
+<p:sld xmlns:a="http://schemas.openxmlformats.org/drawingml/2006/main" xmlns:r="http://schemas.openxmlformats.org/officeDocument/2006/relationships" xmlns:p="http://schemas.openxmlformats.org/presentationml/2006/main">
   <p:cSld>
     <p:spTree>
       <p:nvGrpSpPr>
@@ -10665,7 +10541,14 @@
         <p:cNvGrpSpPr/>
         <p:nvPr/>
       </p:nvGrpSpPr>
-      <p:grpSpPr/>
+      <p:grpSpPr>
+        <a:xfrm>
+          <a:off x="0" y="0"/>
+          <a:ext cx="0" cy="0"/>
+          <a:chOff x="0" y="0"/>
+          <a:chExt cx="0" cy="0"/>
+        </a:xfrm>
+      </p:grpSpPr>
       <p:sp>
         <p:nvSpPr>
           <p:cNvPr id="2" name="Rectangle 1"/>
@@ -10706,6 +10589,7 @@
           <a:lstStyle/>
           <a:p>
             <a:pPr algn="ctr"/>
+            <a:endParaRPr/>
           </a:p>
         </p:txBody>
       </p:sp>
@@ -10749,6 +10633,7 @@
           <a:lstStyle/>
           <a:p>
             <a:pPr algn="ctr"/>
+            <a:endParaRPr/>
           </a:p>
         </p:txBody>
       </p:sp>
@@ -10769,7 +10654,7 @@
           <a:noFill/>
         </p:spPr>
         <p:txBody>
-          <a:bodyPr wrap="square" anchor="t" lIns="0" rIns="0" tIns="0" bIns="0">
+          <a:bodyPr wrap="square" lIns="0" tIns="0" rIns="0" bIns="0" anchor="t">
             <a:spAutoFit/>
           </a:bodyPr>
           <a:lstStyle/>
@@ -10804,7 +10689,7 @@
           <a:noFill/>
         </p:spPr>
         <p:txBody>
-          <a:bodyPr wrap="square" anchor="t" lIns="0" rIns="0" tIns="0" bIns="0">
+          <a:bodyPr wrap="square" lIns="0" tIns="0" rIns="0" bIns="0" anchor="t">
             <a:spAutoFit/>
           </a:bodyPr>
           <a:lstStyle/>
@@ -10866,6 +10751,7 @@
           <a:lstStyle/>
           <a:p>
             <a:pPr algn="ctr"/>
+            <a:endParaRPr/>
           </a:p>
         </p:txBody>
       </p:sp>
@@ -10909,6 +10795,7 @@
           <a:lstStyle/>
           <a:p>
             <a:pPr algn="ctr"/>
+            <a:endParaRPr/>
           </a:p>
         </p:txBody>
       </p:sp>
@@ -10952,6 +10839,7 @@
           <a:lstStyle/>
           <a:p>
             <a:pPr algn="ctr"/>
+            <a:endParaRPr/>
           </a:p>
         </p:txBody>
       </p:sp>
@@ -10972,7 +10860,7 @@
           <a:noFill/>
         </p:spPr>
         <p:txBody>
-          <a:bodyPr wrap="square" anchor="ctr" lIns="0" rIns="0" tIns="0" bIns="0">
+          <a:bodyPr wrap="square" lIns="0" tIns="0" rIns="0" bIns="0" anchor="ctr">
             <a:spAutoFit/>
           </a:bodyPr>
           <a:lstStyle/>
@@ -11034,6 +10922,7 @@
           <a:lstStyle/>
           <a:p>
             <a:pPr algn="ctr"/>
+            <a:endParaRPr/>
           </a:p>
         </p:txBody>
       </p:sp>
@@ -11054,7 +10943,7 @@
           <a:noFill/>
         </p:spPr>
         <p:txBody>
-          <a:bodyPr wrap="square" anchor="ctr" lIns="0" rIns="0" tIns="0" bIns="0">
+          <a:bodyPr wrap="square" lIns="0" tIns="0" rIns="0" bIns="0" anchor="ctr">
             <a:spAutoFit/>
           </a:bodyPr>
           <a:lstStyle/>
@@ -11089,7 +10978,7 @@
           <a:noFill/>
         </p:spPr>
         <p:txBody>
-          <a:bodyPr wrap="square" anchor="t" lIns="0" rIns="0" tIns="0" bIns="0">
+          <a:bodyPr wrap="square" lIns="0" tIns="0" rIns="0" bIns="0" anchor="t">
             <a:spAutoFit/>
           </a:bodyPr>
           <a:lstStyle/>
@@ -11151,6 +11040,7 @@
           <a:lstStyle/>
           <a:p>
             <a:pPr algn="ctr"/>
+            <a:endParaRPr/>
           </a:p>
         </p:txBody>
       </p:sp>
@@ -11171,7 +11061,7 @@
           <a:noFill/>
         </p:spPr>
         <p:txBody>
-          <a:bodyPr wrap="square" anchor="t" lIns="0" rIns="0" tIns="0" bIns="0">
+          <a:bodyPr wrap="square" lIns="0" tIns="0" rIns="0" bIns="0" anchor="t">
             <a:spAutoFit/>
           </a:bodyPr>
           <a:lstStyle/>
@@ -11206,7 +11096,7 @@
           <a:noFill/>
         </p:spPr>
         <p:txBody>
-          <a:bodyPr wrap="square" anchor="t" lIns="0" rIns="0" tIns="0" bIns="0">
+          <a:bodyPr wrap="square" lIns="0" tIns="0" rIns="0" bIns="0" anchor="t">
             <a:spAutoFit/>
           </a:bodyPr>
           <a:lstStyle/>
@@ -11264,6 +11154,7 @@
           <a:lstStyle/>
           <a:p>
             <a:pPr algn="ctr"/>
+            <a:endParaRPr/>
           </a:p>
         </p:txBody>
       </p:sp>
@@ -11307,6 +11198,7 @@
           <a:lstStyle/>
           <a:p>
             <a:pPr algn="ctr"/>
+            <a:endParaRPr/>
           </a:p>
         </p:txBody>
       </p:sp>
@@ -11350,6 +11242,7 @@
           <a:lstStyle/>
           <a:p>
             <a:pPr algn="ctr"/>
+            <a:endParaRPr/>
           </a:p>
         </p:txBody>
       </p:sp>
@@ -11393,6 +11286,7 @@
           <a:lstStyle/>
           <a:p>
             <a:pPr algn="ctr"/>
+            <a:endParaRPr/>
           </a:p>
         </p:txBody>
       </p:sp>
@@ -11413,7 +11307,7 @@
           <a:noFill/>
         </p:spPr>
         <p:txBody>
-          <a:bodyPr wrap="square" anchor="t" lIns="0" rIns="0" tIns="0" bIns="0">
+          <a:bodyPr wrap="square" lIns="0" tIns="0" rIns="0" bIns="0" anchor="t">
             <a:spAutoFit/>
           </a:bodyPr>
           <a:lstStyle/>
@@ -11471,6 +11365,7 @@
           <a:lstStyle/>
           <a:p>
             <a:pPr algn="ctr"/>
+            <a:endParaRPr/>
           </a:p>
         </p:txBody>
       </p:sp>
@@ -11518,6 +11413,7 @@
           <a:lstStyle/>
           <a:p>
             <a:pPr algn="ctr"/>
+            <a:endParaRPr/>
           </a:p>
         </p:txBody>
       </p:sp>
@@ -11538,7 +11434,7 @@
           <a:noFill/>
         </p:spPr>
         <p:txBody>
-          <a:bodyPr wrap="square" anchor="t" lIns="0" rIns="0" tIns="0" bIns="0">
+          <a:bodyPr wrap="square" lIns="0" tIns="0" rIns="0" bIns="0" anchor="t">
             <a:spAutoFit/>
           </a:bodyPr>
           <a:lstStyle/>
@@ -11573,7 +11469,7 @@
           <a:noFill/>
         </p:spPr>
         <p:txBody>
-          <a:bodyPr wrap="square" anchor="t" lIns="0" rIns="0" tIns="0" bIns="0">
+          <a:bodyPr wrap="square" lIns="0" tIns="0" rIns="0" bIns="0" anchor="t">
             <a:spAutoFit/>
           </a:bodyPr>
           <a:lstStyle/>
@@ -11612,7 +11508,7 @@
           <a:noFill/>
         </p:spPr>
         <p:txBody>
-          <a:bodyPr wrap="square" anchor="t" lIns="0" rIns="0" tIns="0" bIns="0">
+          <a:bodyPr wrap="square" lIns="0" tIns="0" rIns="0" bIns="0" anchor="t">
             <a:spAutoFit/>
           </a:bodyPr>
           <a:lstStyle/>
@@ -11711,7 +11607,7 @@
           <a:noFill/>
         </p:spPr>
         <p:txBody>
-          <a:bodyPr wrap="square" anchor="t" lIns="0" rIns="0" tIns="0" bIns="0">
+          <a:bodyPr wrap="square" lIns="0" tIns="0" rIns="0" bIns="0" anchor="t">
             <a:spAutoFit/>
           </a:bodyPr>
           <a:lstStyle/>
@@ -11738,7 +11634,7 @@
 </file>
 
 <file path=ppt/slides/slide3.xml><?xml version="1.0" encoding="utf-8"?>
-<p:sld xmlns:a="http://schemas.openxmlformats.org/drawingml/2006/main" xmlns:p="http://schemas.openxmlformats.org/presentationml/2006/main" xmlns:r="http://schemas.openxmlformats.org/officeDocument/2006/relationships">
+<p:sld xmlns:a="http://schemas.openxmlformats.org/drawingml/2006/main" xmlns:r="http://schemas.openxmlformats.org/officeDocument/2006/relationships" xmlns:p="http://schemas.openxmlformats.org/presentationml/2006/main">
   <p:cSld>
     <p:spTree>
       <p:nvGrpSpPr>
@@ -11746,7 +11642,14 @@
         <p:cNvGrpSpPr/>
         <p:nvPr/>
       </p:nvGrpSpPr>
-      <p:grpSpPr/>
+      <p:grpSpPr>
+        <a:xfrm>
+          <a:off x="0" y="0"/>
+          <a:ext cx="0" cy="0"/>
+          <a:chOff x="0" y="0"/>
+          <a:chExt cx="0" cy="0"/>
+        </a:xfrm>
+      </p:grpSpPr>
       <p:sp>
         <p:nvSpPr>
           <p:cNvPr id="2" name="Rectangle 1"/>
@@ -11787,6 +11690,7 @@
           <a:lstStyle/>
           <a:p>
             <a:pPr algn="ctr"/>
+            <a:endParaRPr/>
           </a:p>
         </p:txBody>
       </p:sp>
@@ -11830,6 +11734,7 @@
           <a:lstStyle/>
           <a:p>
             <a:pPr algn="ctr"/>
+            <a:endParaRPr/>
           </a:p>
         </p:txBody>
       </p:sp>
@@ -11850,7 +11755,7 @@
           <a:noFill/>
         </p:spPr>
         <p:txBody>
-          <a:bodyPr wrap="square" anchor="t" lIns="0" rIns="0" tIns="0" bIns="0">
+          <a:bodyPr wrap="square" lIns="0" tIns="0" rIns="0" bIns="0" anchor="t">
             <a:spAutoFit/>
           </a:bodyPr>
           <a:lstStyle/>
@@ -11885,7 +11790,7 @@
           <a:noFill/>
         </p:spPr>
         <p:txBody>
-          <a:bodyPr wrap="square" anchor="t" lIns="0" rIns="0" tIns="0" bIns="0">
+          <a:bodyPr wrap="square" lIns="0" tIns="0" rIns="0" bIns="0" anchor="t">
             <a:spAutoFit/>
           </a:bodyPr>
           <a:lstStyle/>
@@ -11947,6 +11852,7 @@
           <a:lstStyle/>
           <a:p>
             <a:pPr algn="ctr"/>
+            <a:endParaRPr/>
           </a:p>
         </p:txBody>
       </p:sp>
@@ -11990,6 +11896,7 @@
           <a:lstStyle/>
           <a:p>
             <a:pPr algn="ctr"/>
+            <a:endParaRPr/>
           </a:p>
         </p:txBody>
       </p:sp>
@@ -12033,6 +11940,7 @@
           <a:lstStyle/>
           <a:p>
             <a:pPr algn="ctr"/>
+            <a:endParaRPr/>
           </a:p>
         </p:txBody>
       </p:sp>
@@ -12053,7 +11961,7 @@
           <a:noFill/>
         </p:spPr>
         <p:txBody>
-          <a:bodyPr wrap="square" anchor="ctr" lIns="0" rIns="0" tIns="0" bIns="0">
+          <a:bodyPr wrap="square" lIns="0" tIns="0" rIns="0" bIns="0" anchor="ctr">
             <a:spAutoFit/>
           </a:bodyPr>
           <a:lstStyle/>
@@ -12113,6 +12021,7 @@
           <a:lstStyle/>
           <a:p>
             <a:pPr algn="ctr"/>
+            <a:endParaRPr/>
           </a:p>
         </p:txBody>
       </p:sp>
@@ -12133,7 +12042,7 @@
           <a:noFill/>
         </p:spPr>
         <p:txBody>
-          <a:bodyPr wrap="square" anchor="ctr" lIns="0" rIns="0" tIns="0" bIns="0">
+          <a:bodyPr wrap="square" lIns="0" tIns="0" rIns="0" bIns="0" anchor="ctr">
             <a:spAutoFit/>
           </a:bodyPr>
           <a:lstStyle/>
@@ -12168,7 +12077,7 @@
           <a:noFill/>
         </p:spPr>
         <p:txBody>
-          <a:bodyPr wrap="square" anchor="t" lIns="0" rIns="0" tIns="0" bIns="0">
+          <a:bodyPr wrap="square" lIns="0" tIns="0" rIns="0" bIns="0" anchor="t">
             <a:spAutoFit/>
           </a:bodyPr>
           <a:lstStyle/>
@@ -12228,6 +12137,7 @@
           <a:lstStyle/>
           <a:p>
             <a:pPr algn="ctr"/>
+            <a:endParaRPr/>
           </a:p>
         </p:txBody>
       </p:sp>
@@ -12248,7 +12158,7 @@
           <a:noFill/>
         </p:spPr>
         <p:txBody>
-          <a:bodyPr wrap="square" anchor="ctr" lIns="0" rIns="0" tIns="0" bIns="0">
+          <a:bodyPr wrap="square" lIns="0" tIns="0" rIns="0" bIns="0" anchor="ctr">
             <a:spAutoFit/>
           </a:bodyPr>
           <a:lstStyle/>
@@ -12283,7 +12193,7 @@
           <a:noFill/>
         </p:spPr>
         <p:txBody>
-          <a:bodyPr wrap="square" anchor="t" lIns="0" rIns="0" tIns="0" bIns="0">
+          <a:bodyPr wrap="square" lIns="0" tIns="0" rIns="0" bIns="0" anchor="t">
             <a:spAutoFit/>
           </a:bodyPr>
           <a:lstStyle/>
@@ -12318,7 +12228,7 @@
           <a:noFill/>
         </p:spPr>
         <p:txBody>
-          <a:bodyPr wrap="square" anchor="ctr" lIns="0" rIns="0" tIns="0" bIns="0">
+          <a:bodyPr wrap="square" lIns="0" tIns="0" rIns="0" bIns="0" anchor="ctr">
             <a:spAutoFit/>
           </a:bodyPr>
           <a:lstStyle/>
@@ -12372,7 +12282,7 @@
           </a:fontRef>
         </p:style>
         <p:txBody>
-          <a:bodyPr rtlCol="0" anchor="ctr" lIns="0" rIns="0" tIns="0" bIns="0"/>
+          <a:bodyPr lIns="0" tIns="0" rIns="0" bIns="0" rtlCol="0" anchor="ctr"/>
           <a:lstStyle/>
           <a:p>
             <a:pPr algn="ctr"/>
@@ -12405,7 +12315,7 @@
           <a:noFill/>
         </p:spPr>
         <p:txBody>
-          <a:bodyPr wrap="square" anchor="ctr" lIns="0" rIns="0" tIns="0" bIns="0">
+          <a:bodyPr wrap="square" lIns="0" tIns="0" rIns="0" bIns="0" anchor="ctr">
             <a:spAutoFit/>
           </a:bodyPr>
           <a:lstStyle/>
@@ -12459,7 +12369,7 @@
           </a:fontRef>
         </p:style>
         <p:txBody>
-          <a:bodyPr rtlCol="0" anchor="ctr" lIns="0" rIns="0" tIns="0" bIns="0"/>
+          <a:bodyPr lIns="0" tIns="0" rIns="0" bIns="0" rtlCol="0" anchor="ctr"/>
           <a:lstStyle/>
           <a:p>
             <a:pPr algn="ctr"/>
@@ -12492,7 +12402,7 @@
           <a:noFill/>
         </p:spPr>
         <p:txBody>
-          <a:bodyPr wrap="square" anchor="ctr" lIns="0" rIns="0" tIns="0" bIns="0">
+          <a:bodyPr wrap="square" lIns="0" tIns="0" rIns="0" bIns="0" anchor="ctr">
             <a:spAutoFit/>
           </a:bodyPr>
           <a:lstStyle/>
@@ -12546,7 +12456,7 @@
           </a:fontRef>
         </p:style>
         <p:txBody>
-          <a:bodyPr rtlCol="0" anchor="ctr" lIns="0" rIns="0" tIns="0" bIns="0"/>
+          <a:bodyPr lIns="0" tIns="0" rIns="0" bIns="0" rtlCol="0" anchor="ctr"/>
           <a:lstStyle/>
           <a:p>
             <a:pPr algn="ctr"/>
@@ -12579,7 +12489,7 @@
           <a:noFill/>
         </p:spPr>
         <p:txBody>
-          <a:bodyPr wrap="square" anchor="ctr" lIns="0" rIns="0" tIns="0" bIns="0">
+          <a:bodyPr wrap="square" lIns="0" tIns="0" rIns="0" bIns="0" anchor="ctr">
             <a:spAutoFit/>
           </a:bodyPr>
           <a:lstStyle/>
@@ -12633,7 +12543,7 @@
           </a:fontRef>
         </p:style>
         <p:txBody>
-          <a:bodyPr rtlCol="0" anchor="ctr" lIns="0" rIns="0" tIns="0" bIns="0"/>
+          <a:bodyPr lIns="0" tIns="0" rIns="0" bIns="0" rtlCol="0" anchor="ctr"/>
           <a:lstStyle/>
           <a:p>
             <a:pPr algn="ctr"/>
@@ -12666,7 +12576,7 @@
           <a:noFill/>
         </p:spPr>
         <p:txBody>
-          <a:bodyPr wrap="square" anchor="ctr" lIns="0" rIns="0" tIns="0" bIns="0">
+          <a:bodyPr wrap="square" lIns="0" tIns="0" rIns="0" bIns="0" anchor="ctr">
             <a:spAutoFit/>
           </a:bodyPr>
           <a:lstStyle/>
@@ -12701,7 +12611,7 @@
           <a:noFill/>
         </p:spPr>
         <p:txBody>
-          <a:bodyPr wrap="square" anchor="t" lIns="0" rIns="0" tIns="0" bIns="0">
+          <a:bodyPr wrap="square" lIns="0" tIns="0" rIns="0" bIns="0" anchor="t">
             <a:spAutoFit/>
           </a:bodyPr>
           <a:lstStyle/>
@@ -12728,7 +12638,7 @@
 </file>
 
 <file path=ppt/slides/slide4.xml><?xml version="1.0" encoding="utf-8"?>
-<p:sld xmlns:a="http://schemas.openxmlformats.org/drawingml/2006/main" xmlns:p="http://schemas.openxmlformats.org/presentationml/2006/main" xmlns:r="http://schemas.openxmlformats.org/officeDocument/2006/relationships">
+<p:sld xmlns:a="http://schemas.openxmlformats.org/drawingml/2006/main" xmlns:r="http://schemas.openxmlformats.org/officeDocument/2006/relationships" xmlns:p="http://schemas.openxmlformats.org/presentationml/2006/main">
   <p:cSld>
     <p:spTree>
       <p:nvGrpSpPr>
@@ -12736,7 +12646,14 @@
         <p:cNvGrpSpPr/>
         <p:nvPr/>
       </p:nvGrpSpPr>
-      <p:grpSpPr/>
+      <p:grpSpPr>
+        <a:xfrm>
+          <a:off x="0" y="0"/>
+          <a:ext cx="0" cy="0"/>
+          <a:chOff x="0" y="0"/>
+          <a:chExt cx="0" cy="0"/>
+        </a:xfrm>
+      </p:grpSpPr>
       <p:sp>
         <p:nvSpPr>
           <p:cNvPr id="2" name="Rectangle 1"/>
@@ -12777,6 +12694,7 @@
           <a:lstStyle/>
           <a:p>
             <a:pPr algn="ctr"/>
+            <a:endParaRPr/>
           </a:p>
         </p:txBody>
       </p:sp>
@@ -12820,6 +12738,7 @@
           <a:lstStyle/>
           <a:p>
             <a:pPr algn="ctr"/>
+            <a:endParaRPr/>
           </a:p>
         </p:txBody>
       </p:sp>
@@ -12840,7 +12759,7 @@
           <a:noFill/>
         </p:spPr>
         <p:txBody>
-          <a:bodyPr wrap="square" anchor="t" lIns="0" rIns="0" tIns="0" bIns="0">
+          <a:bodyPr wrap="square" lIns="0" tIns="0" rIns="0" bIns="0" anchor="t">
             <a:spAutoFit/>
           </a:bodyPr>
           <a:lstStyle/>
@@ -12875,7 +12794,7 @@
           <a:noFill/>
         </p:spPr>
         <p:txBody>
-          <a:bodyPr wrap="square" anchor="t" lIns="0" rIns="0" tIns="0" bIns="0">
+          <a:bodyPr wrap="square" lIns="0" tIns="0" rIns="0" bIns="0" anchor="t">
             <a:spAutoFit/>
           </a:bodyPr>
           <a:lstStyle/>
@@ -12937,6 +12856,7 @@
           <a:lstStyle/>
           <a:p>
             <a:pPr algn="ctr"/>
+            <a:endParaRPr/>
           </a:p>
         </p:txBody>
       </p:sp>
@@ -12980,6 +12900,7 @@
           <a:lstStyle/>
           <a:p>
             <a:pPr algn="ctr"/>
+            <a:endParaRPr/>
           </a:p>
         </p:txBody>
       </p:sp>
@@ -13023,6 +12944,7 @@
           <a:lstStyle/>
           <a:p>
             <a:pPr algn="ctr"/>
+            <a:endParaRPr/>
           </a:p>
         </p:txBody>
       </p:sp>
@@ -13043,7 +12965,7 @@
           <a:noFill/>
         </p:spPr>
         <p:txBody>
-          <a:bodyPr wrap="square" anchor="ctr" lIns="0" rIns="0" tIns="0" bIns="0">
+          <a:bodyPr wrap="square" lIns="0" tIns="0" rIns="0" bIns="0" anchor="ctr">
             <a:spAutoFit/>
           </a:bodyPr>
           <a:lstStyle/>
@@ -13078,7 +13000,7 @@
           <a:noFill/>
         </p:spPr>
         <p:txBody>
-          <a:bodyPr wrap="square" anchor="t" lIns="0" rIns="0" tIns="0" bIns="0">
+          <a:bodyPr wrap="square" lIns="0" tIns="0" rIns="0" bIns="0" anchor="t">
             <a:spAutoFit/>
           </a:bodyPr>
           <a:lstStyle/>
@@ -13140,6 +13062,7 @@
           <a:lstStyle/>
           <a:p>
             <a:pPr algn="ctr"/>
+            <a:endParaRPr/>
           </a:p>
         </p:txBody>
       </p:sp>
@@ -13160,7 +13083,7 @@
           <a:noFill/>
         </p:spPr>
         <p:txBody>
-          <a:bodyPr wrap="square" anchor="ctr" lIns="0" rIns="0" tIns="0" bIns="0">
+          <a:bodyPr wrap="square" lIns="0" tIns="0" rIns="0" bIns="0" anchor="ctr">
             <a:spAutoFit/>
           </a:bodyPr>
           <a:lstStyle/>
@@ -13218,6 +13141,7 @@
           <a:lstStyle/>
           <a:p>
             <a:pPr algn="ctr"/>
+            <a:endParaRPr/>
           </a:p>
         </p:txBody>
       </p:sp>
@@ -13265,6 +13189,7 @@
           <a:lstStyle/>
           <a:p>
             <a:pPr algn="ctr"/>
+            <a:endParaRPr/>
           </a:p>
         </p:txBody>
       </p:sp>
@@ -13285,7 +13210,7 @@
           <a:noFill/>
         </p:spPr>
         <p:txBody>
-          <a:bodyPr wrap="square" anchor="ctr" lIns="0" rIns="0" tIns="0" bIns="0">
+          <a:bodyPr wrap="square" lIns="0" tIns="0" rIns="0" bIns="0" anchor="ctr">
             <a:spAutoFit/>
           </a:bodyPr>
           <a:lstStyle/>
@@ -13360,7 +13285,7 @@
           <a:noFill/>
         </p:spPr>
         <p:txBody>
-          <a:bodyPr wrap="square" anchor="t" lIns="0" rIns="0" tIns="0" bIns="0">
+          <a:bodyPr wrap="square" lIns="0" tIns="0" rIns="0" bIns="0" anchor="t">
             <a:spAutoFit/>
           </a:bodyPr>
           <a:lstStyle/>
@@ -13422,6 +13347,7 @@
           <a:lstStyle/>
           <a:p>
             <a:pPr algn="ctr"/>
+            <a:endParaRPr/>
           </a:p>
         </p:txBody>
       </p:sp>
@@ -13442,7 +13368,7 @@
           <a:noFill/>
         </p:spPr>
         <p:txBody>
-          <a:bodyPr wrap="square" anchor="ctr" lIns="0" rIns="0" tIns="0" bIns="0">
+          <a:bodyPr wrap="square" lIns="0" tIns="0" rIns="0" bIns="0" anchor="ctr">
             <a:spAutoFit/>
           </a:bodyPr>
           <a:lstStyle/>
@@ -13505,6 +13431,7 @@
           <a:lstStyle/>
           <a:p>
             <a:pPr algn="ctr"/>
+            <a:endParaRPr/>
           </a:p>
         </p:txBody>
       </p:sp>
@@ -13552,6 +13479,7 @@
           <a:lstStyle/>
           <a:p>
             <a:pPr algn="ctr"/>
+            <a:endParaRPr/>
           </a:p>
         </p:txBody>
       </p:sp>
@@ -13572,7 +13500,7 @@
           <a:noFill/>
         </p:spPr>
         <p:txBody>
-          <a:bodyPr wrap="square" anchor="ctr" lIns="0" rIns="0" tIns="0" bIns="0">
+          <a:bodyPr wrap="square" lIns="0" tIns="0" rIns="0" bIns="0" anchor="ctr">
             <a:spAutoFit/>
           </a:bodyPr>
           <a:lstStyle/>
@@ -13635,6 +13563,7 @@
           <a:lstStyle/>
           <a:p>
             <a:pPr algn="ctr"/>
+            <a:endParaRPr/>
           </a:p>
         </p:txBody>
       </p:sp>
@@ -13682,6 +13611,7 @@
           <a:lstStyle/>
           <a:p>
             <a:pPr algn="ctr"/>
+            <a:endParaRPr/>
           </a:p>
         </p:txBody>
       </p:sp>
@@ -13702,7 +13632,7 @@
           <a:noFill/>
         </p:spPr>
         <p:txBody>
-          <a:bodyPr wrap="square" anchor="ctr" lIns="0" rIns="0" tIns="0" bIns="0">
+          <a:bodyPr wrap="square" lIns="0" tIns="0" rIns="0" bIns="0" anchor="ctr">
             <a:spAutoFit/>
           </a:bodyPr>
           <a:lstStyle/>
@@ -13765,6 +13695,7 @@
           <a:lstStyle/>
           <a:p>
             <a:pPr algn="ctr"/>
+            <a:endParaRPr/>
           </a:p>
         </p:txBody>
       </p:sp>
@@ -13812,6 +13743,7 @@
           <a:lstStyle/>
           <a:p>
             <a:pPr algn="ctr"/>
+            <a:endParaRPr/>
           </a:p>
         </p:txBody>
       </p:sp>
@@ -13832,7 +13764,7 @@
           <a:noFill/>
         </p:spPr>
         <p:txBody>
-          <a:bodyPr wrap="square" anchor="ctr" lIns="0" rIns="0" tIns="0" bIns="0">
+          <a:bodyPr wrap="square" lIns="0" tIns="0" rIns="0" bIns="0" anchor="ctr">
             <a:spAutoFit/>
           </a:bodyPr>
           <a:lstStyle/>
@@ -13895,6 +13827,7 @@
           <a:lstStyle/>
           <a:p>
             <a:pPr algn="ctr"/>
+            <a:endParaRPr/>
           </a:p>
         </p:txBody>
       </p:sp>
@@ -13942,6 +13875,7 @@
           <a:lstStyle/>
           <a:p>
             <a:pPr algn="ctr"/>
+            <a:endParaRPr/>
           </a:p>
         </p:txBody>
       </p:sp>
@@ -13962,7 +13896,7 @@
           <a:noFill/>
         </p:spPr>
         <p:txBody>
-          <a:bodyPr wrap="square" anchor="ctr" lIns="0" rIns="0" tIns="0" bIns="0">
+          <a:bodyPr wrap="square" lIns="0" tIns="0" rIns="0" bIns="0" anchor="ctr">
             <a:spAutoFit/>
           </a:bodyPr>
           <a:lstStyle/>
@@ -14028,6 +13962,7 @@
           <a:lstStyle/>
           <a:p>
             <a:pPr algn="ctr"/>
+            <a:endParaRPr/>
           </a:p>
         </p:txBody>
       </p:sp>
@@ -14048,7 +13983,7 @@
           <a:noFill/>
         </p:spPr>
         <p:txBody>
-          <a:bodyPr wrap="square" anchor="t" lIns="0" rIns="0" tIns="0" bIns="0">
+          <a:bodyPr wrap="square" lIns="0" tIns="0" rIns="0" bIns="0" anchor="t">
             <a:spAutoFit/>
           </a:bodyPr>
           <a:lstStyle/>
@@ -14083,7 +14018,7 @@
           <a:noFill/>
         </p:spPr>
         <p:txBody>
-          <a:bodyPr wrap="square" anchor="t" lIns="0" rIns="0" tIns="0" bIns="0">
+          <a:bodyPr wrap="square" lIns="0" tIns="0" rIns="0" bIns="0" anchor="t">
             <a:spAutoFit/>
           </a:bodyPr>
           <a:lstStyle/>
@@ -14149,6 +14084,7 @@
           <a:lstStyle/>
           <a:p>
             <a:pPr algn="ctr"/>
+            <a:endParaRPr/>
           </a:p>
         </p:txBody>
       </p:sp>
@@ -14169,7 +14105,7 @@
           <a:noFill/>
         </p:spPr>
         <p:txBody>
-          <a:bodyPr wrap="square" anchor="t" lIns="0" rIns="0" tIns="0" bIns="0">
+          <a:bodyPr wrap="square" lIns="0" tIns="0" rIns="0" bIns="0" anchor="t">
             <a:spAutoFit/>
           </a:bodyPr>
           <a:lstStyle/>
@@ -14204,7 +14140,7 @@
           <a:noFill/>
         </p:spPr>
         <p:txBody>
-          <a:bodyPr wrap="square" anchor="t" lIns="0" rIns="0" tIns="0" bIns="0">
+          <a:bodyPr wrap="square" lIns="0" tIns="0" rIns="0" bIns="0" anchor="t">
             <a:spAutoFit/>
           </a:bodyPr>
           <a:lstStyle/>
@@ -14270,6 +14206,7 @@
           <a:lstStyle/>
           <a:p>
             <a:pPr algn="ctr"/>
+            <a:endParaRPr/>
           </a:p>
         </p:txBody>
       </p:sp>
@@ -14290,7 +14227,7 @@
           <a:noFill/>
         </p:spPr>
         <p:txBody>
-          <a:bodyPr wrap="square" anchor="t" lIns="0" rIns="0" tIns="0" bIns="0">
+          <a:bodyPr wrap="square" lIns="0" tIns="0" rIns="0" bIns="0" anchor="t">
             <a:spAutoFit/>
           </a:bodyPr>
           <a:lstStyle/>
@@ -14325,7 +14262,7 @@
           <a:noFill/>
         </p:spPr>
         <p:txBody>
-          <a:bodyPr wrap="square" anchor="t" lIns="0" rIns="0" tIns="0" bIns="0">
+          <a:bodyPr wrap="square" lIns="0" tIns="0" rIns="0" bIns="0" anchor="t">
             <a:spAutoFit/>
           </a:bodyPr>
           <a:lstStyle/>
@@ -14356,7 +14293,7 @@
 </file>
 
 <file path=ppt/slides/slide5.xml><?xml version="1.0" encoding="utf-8"?>
-<p:sld xmlns:a="http://schemas.openxmlformats.org/drawingml/2006/main" xmlns:p="http://schemas.openxmlformats.org/presentationml/2006/main" xmlns:r="http://schemas.openxmlformats.org/officeDocument/2006/relationships">
+<p:sld xmlns:a="http://schemas.openxmlformats.org/drawingml/2006/main" xmlns:r="http://schemas.openxmlformats.org/officeDocument/2006/relationships" xmlns:p="http://schemas.openxmlformats.org/presentationml/2006/main">
   <p:cSld>
     <p:spTree>
       <p:nvGrpSpPr>
@@ -14364,7 +14301,14 @@
         <p:cNvGrpSpPr/>
         <p:nvPr/>
       </p:nvGrpSpPr>
-      <p:grpSpPr/>
+      <p:grpSpPr>
+        <a:xfrm>
+          <a:off x="0" y="0"/>
+          <a:ext cx="0" cy="0"/>
+          <a:chOff x="0" y="0"/>
+          <a:chExt cx="0" cy="0"/>
+        </a:xfrm>
+      </p:grpSpPr>
       <p:sp>
         <p:nvSpPr>
           <p:cNvPr id="2" name="Rectangle 1"/>
@@ -14405,6 +14349,7 @@
           <a:lstStyle/>
           <a:p>
             <a:pPr algn="ctr"/>
+            <a:endParaRPr/>
           </a:p>
         </p:txBody>
       </p:sp>
@@ -14448,6 +14393,7 @@
           <a:lstStyle/>
           <a:p>
             <a:pPr algn="ctr"/>
+            <a:endParaRPr/>
           </a:p>
         </p:txBody>
       </p:sp>
@@ -14468,7 +14414,7 @@
           <a:noFill/>
         </p:spPr>
         <p:txBody>
-          <a:bodyPr wrap="square" anchor="t" lIns="0" rIns="0" tIns="0" bIns="0">
+          <a:bodyPr wrap="square" lIns="0" tIns="0" rIns="0" bIns="0" anchor="t">
             <a:spAutoFit/>
           </a:bodyPr>
           <a:lstStyle/>
@@ -14503,7 +14449,7 @@
           <a:noFill/>
         </p:spPr>
         <p:txBody>
-          <a:bodyPr wrap="square" anchor="t" lIns="0" rIns="0" tIns="0" bIns="0">
+          <a:bodyPr wrap="square" lIns="0" tIns="0" rIns="0" bIns="0" anchor="t">
             <a:spAutoFit/>
           </a:bodyPr>
           <a:lstStyle/>
@@ -14565,6 +14511,7 @@
           <a:lstStyle/>
           <a:p>
             <a:pPr algn="ctr"/>
+            <a:endParaRPr/>
           </a:p>
         </p:txBody>
       </p:sp>
@@ -14608,6 +14555,7 @@
           <a:lstStyle/>
           <a:p>
             <a:pPr algn="ctr"/>
+            <a:endParaRPr/>
           </a:p>
         </p:txBody>
       </p:sp>
@@ -14651,6 +14599,7 @@
           <a:lstStyle/>
           <a:p>
             <a:pPr algn="ctr"/>
+            <a:endParaRPr/>
           </a:p>
         </p:txBody>
       </p:sp>
@@ -14671,7 +14620,7 @@
           <a:noFill/>
         </p:spPr>
         <p:txBody>
-          <a:bodyPr wrap="square" anchor="ctr" lIns="0" rIns="0" tIns="0" bIns="0">
+          <a:bodyPr wrap="square" lIns="0" tIns="0" rIns="0" bIns="0" anchor="ctr">
             <a:spAutoFit/>
           </a:bodyPr>
           <a:lstStyle/>
@@ -14729,7 +14678,7 @@
           </a:fontRef>
         </p:style>
         <p:txBody>
-          <a:bodyPr rtlCol="0" anchor="ctr" lIns="0" rIns="0" tIns="0" bIns="0"/>
+          <a:bodyPr lIns="0" tIns="0" rIns="0" bIns="0" rtlCol="0" anchor="ctr"/>
           <a:lstStyle/>
           <a:p>
             <a:pPr algn="ctr"/>
@@ -14785,7 +14734,7 @@
           </a:fontRef>
         </p:style>
         <p:txBody>
-          <a:bodyPr rtlCol="0" anchor="ctr" lIns="0" rIns="0" tIns="0" bIns="0"/>
+          <a:bodyPr lIns="0" tIns="0" rIns="0" bIns="0" rtlCol="0" anchor="ctr"/>
           <a:lstStyle/>
           <a:p>
             <a:pPr algn="ctr"/>
@@ -14876,7 +14825,7 @@
           </a:fontRef>
         </p:style>
         <p:txBody>
-          <a:bodyPr rtlCol="0" anchor="ctr" lIns="0" rIns="0" tIns="0" bIns="0"/>
+          <a:bodyPr lIns="0" tIns="0" rIns="0" bIns="0" rtlCol="0" anchor="ctr"/>
           <a:lstStyle/>
           <a:p>
             <a:pPr algn="ctr"/>
@@ -14930,7 +14879,7 @@
           </a:fontRef>
         </p:style>
         <p:txBody>
-          <a:bodyPr rtlCol="0" anchor="ctr" lIns="0" rIns="0" tIns="0" bIns="0"/>
+          <a:bodyPr lIns="0" tIns="0" rIns="0" bIns="0" rtlCol="0" anchor="ctr"/>
           <a:lstStyle/>
           <a:p>
             <a:pPr algn="ctr"/>
@@ -14986,6 +14935,7 @@
           <a:lstStyle/>
           <a:p>
             <a:pPr algn="ctr"/>
+            <a:endParaRPr/>
           </a:p>
         </p:txBody>
       </p:sp>
@@ -15064,7 +15014,7 @@
           </a:fontRef>
         </p:style>
         <p:txBody>
-          <a:bodyPr rtlCol="0" anchor="ctr" lIns="0" rIns="0" tIns="0" bIns="0"/>
+          <a:bodyPr lIns="0" tIns="0" rIns="0" bIns="0" rtlCol="0" anchor="ctr"/>
           <a:lstStyle/>
           <a:p>
             <a:pPr algn="ctr"/>
@@ -15120,7 +15070,7 @@
           </a:fontRef>
         </p:style>
         <p:txBody>
-          <a:bodyPr rtlCol="0" anchor="ctr" lIns="0" rIns="0" tIns="0" bIns="0"/>
+          <a:bodyPr lIns="0" tIns="0" rIns="0" bIns="0" rtlCol="0" anchor="ctr"/>
           <a:lstStyle/>
           <a:p>
             <a:pPr algn="ctr"/>
@@ -15176,7 +15126,7 @@
           </a:fontRef>
         </p:style>
         <p:txBody>
-          <a:bodyPr rtlCol="0" anchor="ctr" lIns="0" rIns="0" tIns="0" bIns="0"/>
+          <a:bodyPr lIns="0" tIns="0" rIns="0" bIns="0" rtlCol="0" anchor="ctr"/>
           <a:lstStyle/>
           <a:p>
             <a:pPr algn="ctr"/>
@@ -15209,7 +15159,7 @@
           <a:noFill/>
         </p:spPr>
         <p:txBody>
-          <a:bodyPr wrap="square" anchor="t" lIns="0" rIns="0" tIns="0" bIns="0">
+          <a:bodyPr wrap="square" lIns="0" tIns="0" rIns="0" bIns="0" anchor="t">
             <a:spAutoFit/>
           </a:bodyPr>
           <a:lstStyle/>
@@ -15271,6 +15221,7 @@
           <a:lstStyle/>
           <a:p>
             <a:pPr algn="ctr"/>
+            <a:endParaRPr/>
           </a:p>
         </p:txBody>
       </p:sp>
@@ -15291,7 +15242,7 @@
           <a:noFill/>
         </p:spPr>
         <p:txBody>
-          <a:bodyPr wrap="square" anchor="ctr" lIns="0" rIns="0" tIns="0" bIns="0">
+          <a:bodyPr wrap="square" lIns="0" tIns="0" rIns="0" bIns="0" anchor="ctr">
             <a:spAutoFit/>
           </a:bodyPr>
           <a:lstStyle/>
@@ -15353,6 +15304,7 @@
           <a:lstStyle/>
           <a:p>
             <a:pPr algn="ctr"/>
+            <a:endParaRPr/>
           </a:p>
         </p:txBody>
       </p:sp>
@@ -15373,7 +15325,7 @@
           <a:noFill/>
         </p:spPr>
         <p:txBody>
-          <a:bodyPr wrap="square" anchor="ctr" lIns="0" rIns="0" tIns="0" bIns="0">
+          <a:bodyPr wrap="square" lIns="0" tIns="0" rIns="0" bIns="0" anchor="ctr">
             <a:spAutoFit/>
           </a:bodyPr>
           <a:lstStyle/>
@@ -15433,6 +15385,7 @@
           <a:lstStyle/>
           <a:p>
             <a:pPr algn="ctr"/>
+            <a:endParaRPr/>
           </a:p>
         </p:txBody>
       </p:sp>
@@ -15453,7 +15406,7 @@
           <a:noFill/>
         </p:spPr>
         <p:txBody>
-          <a:bodyPr wrap="square" anchor="ctr" lIns="0" rIns="0" tIns="0" bIns="0">
+          <a:bodyPr wrap="square" lIns="0" tIns="0" rIns="0" bIns="0" anchor="ctr">
             <a:spAutoFit/>
           </a:bodyPr>
           <a:lstStyle/>
@@ -15515,6 +15468,7 @@
           <a:lstStyle/>
           <a:p>
             <a:pPr algn="ctr"/>
+            <a:endParaRPr/>
           </a:p>
         </p:txBody>
       </p:sp>
@@ -15535,7 +15489,7 @@
           <a:noFill/>
         </p:spPr>
         <p:txBody>
-          <a:bodyPr wrap="square" anchor="ctr" lIns="0" rIns="0" tIns="0" bIns="0">
+          <a:bodyPr wrap="square" lIns="0" tIns="0" rIns="0" bIns="0" anchor="ctr">
             <a:spAutoFit/>
           </a:bodyPr>
           <a:lstStyle/>
@@ -15595,6 +15549,7 @@
           <a:lstStyle/>
           <a:p>
             <a:pPr algn="ctr"/>
+            <a:endParaRPr/>
           </a:p>
         </p:txBody>
       </p:sp>
@@ -15615,7 +15570,7 @@
           <a:noFill/>
         </p:spPr>
         <p:txBody>
-          <a:bodyPr wrap="square" anchor="ctr" lIns="0" rIns="0" tIns="0" bIns="0">
+          <a:bodyPr wrap="square" lIns="0" tIns="0" rIns="0" bIns="0" anchor="ctr">
             <a:spAutoFit/>
           </a:bodyPr>
           <a:lstStyle/>
@@ -15677,6 +15632,7 @@
           <a:lstStyle/>
           <a:p>
             <a:pPr algn="ctr"/>
+            <a:endParaRPr/>
           </a:p>
         </p:txBody>
       </p:sp>
@@ -15697,7 +15653,7 @@
           <a:noFill/>
         </p:spPr>
         <p:txBody>
-          <a:bodyPr wrap="square" anchor="ctr" lIns="0" rIns="0" tIns="0" bIns="0">
+          <a:bodyPr wrap="square" lIns="0" tIns="0" rIns="0" bIns="0" anchor="ctr">
             <a:spAutoFit/>
           </a:bodyPr>
           <a:lstStyle/>
@@ -15757,6 +15713,7 @@
           <a:lstStyle/>
           <a:p>
             <a:pPr algn="ctr"/>
+            <a:endParaRPr/>
           </a:p>
         </p:txBody>
       </p:sp>
@@ -15777,7 +15734,7 @@
           <a:noFill/>
         </p:spPr>
         <p:txBody>
-          <a:bodyPr wrap="square" anchor="ctr" lIns="0" rIns="0" tIns="0" bIns="0">
+          <a:bodyPr wrap="square" lIns="0" tIns="0" rIns="0" bIns="0" anchor="ctr">
             <a:spAutoFit/>
           </a:bodyPr>
           <a:lstStyle/>
@@ -15812,7 +15769,7 @@
           <a:noFill/>
         </p:spPr>
         <p:txBody>
-          <a:bodyPr wrap="square" anchor="t" lIns="0" rIns="0" tIns="0" bIns="0">
+          <a:bodyPr wrap="square" lIns="0" tIns="0" rIns="0" bIns="0" anchor="t">
             <a:spAutoFit/>
           </a:bodyPr>
           <a:lstStyle/>
@@ -15895,7 +15852,7 @@
           <a:noFill/>
         </p:spPr>
         <p:txBody>
-          <a:bodyPr wrap="square" anchor="t" lIns="0" rIns="0" tIns="0" bIns="0">
+          <a:bodyPr wrap="square" lIns="0" tIns="0" rIns="0" bIns="0" anchor="t">
             <a:spAutoFit/>
           </a:bodyPr>
           <a:lstStyle/>
@@ -15922,7 +15879,7 @@
 </file>
 
 <file path=ppt/slides/slide6.xml><?xml version="1.0" encoding="utf-8"?>
-<p:sld xmlns:a="http://schemas.openxmlformats.org/drawingml/2006/main" xmlns:p="http://schemas.openxmlformats.org/presentationml/2006/main" xmlns:r="http://schemas.openxmlformats.org/officeDocument/2006/relationships">
+<p:sld xmlns:a="http://schemas.openxmlformats.org/drawingml/2006/main" xmlns:r="http://schemas.openxmlformats.org/officeDocument/2006/relationships" xmlns:p="http://schemas.openxmlformats.org/presentationml/2006/main">
   <p:cSld>
     <p:spTree>
       <p:nvGrpSpPr>
@@ -15930,7 +15887,14 @@
         <p:cNvGrpSpPr/>
         <p:nvPr/>
       </p:nvGrpSpPr>
-      <p:grpSpPr/>
+      <p:grpSpPr>
+        <a:xfrm>
+          <a:off x="0" y="0"/>
+          <a:ext cx="0" cy="0"/>
+          <a:chOff x="0" y="0"/>
+          <a:chExt cx="0" cy="0"/>
+        </a:xfrm>
+      </p:grpSpPr>
       <p:sp>
         <p:nvSpPr>
           <p:cNvPr id="2" name="Rectangle 1"/>
@@ -15971,6 +15935,7 @@
           <a:lstStyle/>
           <a:p>
             <a:pPr algn="ctr"/>
+            <a:endParaRPr/>
           </a:p>
         </p:txBody>
       </p:sp>
@@ -16014,6 +15979,7 @@
           <a:lstStyle/>
           <a:p>
             <a:pPr algn="ctr"/>
+            <a:endParaRPr/>
           </a:p>
         </p:txBody>
       </p:sp>
@@ -16034,7 +16000,7 @@
           <a:noFill/>
         </p:spPr>
         <p:txBody>
-          <a:bodyPr wrap="square" anchor="t" lIns="0" rIns="0" tIns="0" bIns="0">
+          <a:bodyPr wrap="square" lIns="0" tIns="0" rIns="0" bIns="0" anchor="t">
             <a:spAutoFit/>
           </a:bodyPr>
           <a:lstStyle/>
@@ -16069,7 +16035,7 @@
           <a:noFill/>
         </p:spPr>
         <p:txBody>
-          <a:bodyPr wrap="square" anchor="t" lIns="0" rIns="0" tIns="0" bIns="0">
+          <a:bodyPr wrap="square" lIns="0" tIns="0" rIns="0" bIns="0" anchor="t">
             <a:spAutoFit/>
           </a:bodyPr>
           <a:lstStyle/>
@@ -16131,6 +16097,7 @@
           <a:lstStyle/>
           <a:p>
             <a:pPr algn="ctr"/>
+            <a:endParaRPr/>
           </a:p>
         </p:txBody>
       </p:sp>
@@ -16174,6 +16141,7 @@
           <a:lstStyle/>
           <a:p>
             <a:pPr algn="ctr"/>
+            <a:endParaRPr/>
           </a:p>
         </p:txBody>
       </p:sp>
@@ -16217,6 +16185,7 @@
           <a:lstStyle/>
           <a:p>
             <a:pPr algn="ctr"/>
+            <a:endParaRPr/>
           </a:p>
         </p:txBody>
       </p:sp>
@@ -16237,7 +16206,7 @@
           <a:noFill/>
         </p:spPr>
         <p:txBody>
-          <a:bodyPr wrap="square" anchor="ctr" lIns="0" rIns="0" tIns="0" bIns="0">
+          <a:bodyPr wrap="square" lIns="0" tIns="0" rIns="0" bIns="0" anchor="ctr">
             <a:spAutoFit/>
           </a:bodyPr>
           <a:lstStyle/>
@@ -16295,7 +16264,7 @@
           </a:fontRef>
         </p:style>
         <p:txBody>
-          <a:bodyPr rtlCol="0" anchor="ctr" lIns="0" rIns="0" tIns="0" bIns="0"/>
+          <a:bodyPr lIns="0" tIns="0" rIns="0" bIns="0" rtlCol="0" anchor="ctr"/>
           <a:lstStyle/>
           <a:p>
             <a:pPr algn="ctr"/>
@@ -16351,7 +16320,7 @@
           </a:fontRef>
         </p:style>
         <p:txBody>
-          <a:bodyPr rtlCol="0" anchor="ctr" lIns="0" rIns="0" tIns="0" bIns="0"/>
+          <a:bodyPr lIns="0" tIns="0" rIns="0" bIns="0" rtlCol="0" anchor="ctr"/>
           <a:lstStyle/>
           <a:p>
             <a:pPr algn="ctr"/>
@@ -16442,7 +16411,7 @@
           </a:fontRef>
         </p:style>
         <p:txBody>
-          <a:bodyPr rtlCol="0" anchor="ctr" lIns="0" rIns="0" tIns="0" bIns="0"/>
+          <a:bodyPr lIns="0" tIns="0" rIns="0" bIns="0" rtlCol="0" anchor="ctr"/>
           <a:lstStyle/>
           <a:p>
             <a:pPr algn="ctr"/>
@@ -16496,7 +16465,7 @@
           </a:fontRef>
         </p:style>
         <p:txBody>
-          <a:bodyPr rtlCol="0" anchor="ctr" lIns="0" rIns="0" tIns="0" bIns="0"/>
+          <a:bodyPr lIns="0" tIns="0" rIns="0" bIns="0" rtlCol="0" anchor="ctr"/>
           <a:lstStyle/>
           <a:p>
             <a:pPr algn="ctr"/>
@@ -16552,6 +16521,7 @@
           <a:lstStyle/>
           <a:p>
             <a:pPr algn="ctr"/>
+            <a:endParaRPr/>
           </a:p>
         </p:txBody>
       </p:sp>
@@ -16630,7 +16600,7 @@
           </a:fontRef>
         </p:style>
         <p:txBody>
-          <a:bodyPr rtlCol="0" anchor="ctr" lIns="0" rIns="0" tIns="0" bIns="0"/>
+          <a:bodyPr lIns="0" tIns="0" rIns="0" bIns="0" rtlCol="0" anchor="ctr"/>
           <a:lstStyle/>
           <a:p>
             <a:pPr algn="ctr"/>
@@ -16686,7 +16656,7 @@
           </a:fontRef>
         </p:style>
         <p:txBody>
-          <a:bodyPr rtlCol="0" anchor="ctr" lIns="0" rIns="0" tIns="0" bIns="0"/>
+          <a:bodyPr lIns="0" tIns="0" rIns="0" bIns="0" rtlCol="0" anchor="ctr"/>
           <a:lstStyle/>
           <a:p>
             <a:pPr algn="ctr"/>
@@ -16742,7 +16712,7 @@
           </a:fontRef>
         </p:style>
         <p:txBody>
-          <a:bodyPr rtlCol="0" anchor="ctr" lIns="0" rIns="0" tIns="0" bIns="0"/>
+          <a:bodyPr lIns="0" tIns="0" rIns="0" bIns="0" rtlCol="0" anchor="ctr"/>
           <a:lstStyle/>
           <a:p>
             <a:pPr algn="ctr"/>
@@ -16802,6 +16772,7 @@
           <a:lstStyle/>
           <a:p>
             <a:pPr algn="ctr"/>
+            <a:endParaRPr/>
           </a:p>
         </p:txBody>
       </p:sp>
@@ -16822,7 +16793,7 @@
           <a:noFill/>
         </p:spPr>
         <p:txBody>
-          <a:bodyPr wrap="square" anchor="ctr" lIns="0" rIns="0" tIns="0" bIns="0">
+          <a:bodyPr wrap="square" lIns="0" tIns="0" rIns="0" bIns="0" anchor="ctr">
             <a:spAutoFit/>
           </a:bodyPr>
           <a:lstStyle/>
@@ -16884,6 +16855,7 @@
           <a:lstStyle/>
           <a:p>
             <a:pPr algn="ctr"/>
+            <a:endParaRPr/>
           </a:p>
         </p:txBody>
       </p:sp>
@@ -16904,7 +16876,7 @@
           <a:noFill/>
         </p:spPr>
         <p:txBody>
-          <a:bodyPr wrap="square" anchor="ctr" lIns="0" rIns="0" tIns="0" bIns="0">
+          <a:bodyPr wrap="square" lIns="0" tIns="0" rIns="0" bIns="0" anchor="ctr">
             <a:spAutoFit/>
           </a:bodyPr>
           <a:lstStyle/>
@@ -16966,6 +16938,7 @@
           <a:lstStyle/>
           <a:p>
             <a:pPr algn="ctr"/>
+            <a:endParaRPr/>
           </a:p>
         </p:txBody>
       </p:sp>
@@ -16986,7 +16959,7 @@
           <a:noFill/>
         </p:spPr>
         <p:txBody>
-          <a:bodyPr wrap="square" anchor="t" lIns="0" rIns="0" tIns="0" bIns="0">
+          <a:bodyPr wrap="square" lIns="0" tIns="0" rIns="0" bIns="0" anchor="t">
             <a:spAutoFit/>
           </a:bodyPr>
           <a:lstStyle/>
@@ -17021,7 +16994,7 @@
           <a:noFill/>
         </p:spPr>
         <p:txBody>
-          <a:bodyPr wrap="square" anchor="t" lIns="0" rIns="0" tIns="0" bIns="0">
+          <a:bodyPr wrap="square" lIns="0" tIns="0" rIns="0" bIns="0" anchor="t">
             <a:spAutoFit/>
           </a:bodyPr>
           <a:lstStyle/>
@@ -17052,7 +17025,7 @@
         <p:spPr>
           <a:xfrm>
             <a:off x="1737360" y="4892040"/>
-            <a:ext cx="4023360" cy="457200"/>
+            <a:ext cx="4023360" cy="176972"/>
           </a:xfrm>
           <a:prstGeom prst="rect">
             <a:avLst/>
@@ -17060,20 +17033,38 @@
           <a:noFill/>
         </p:spPr>
         <p:txBody>
-          <a:bodyPr wrap="square" anchor="t" lIns="0" rIns="0" tIns="0" bIns="0">
+          <a:bodyPr wrap="square" lIns="0" tIns="0" rIns="0" bIns="0" anchor="t">
             <a:spAutoFit/>
           </a:bodyPr>
           <a:lstStyle/>
           <a:p>
             <a:pPr algn="l"/>
             <a:r>
-              <a:rPr sz="1150" b="1" i="0">
+              <a:rPr sz="1150" b="1" i="0" dirty="0">
                 <a:solidFill>
                   <a:srgbClr val="E06C6C"/>
                 </a:solidFill>
                 <a:latin typeface="Segoe UI"/>
               </a:rPr>
-              <a:t>shares 3 words → top result ✗</a:t>
+              <a:t>shares </a:t>
+            </a:r>
+            <a:r>
+              <a:rPr lang="en-AU" sz="1150" b="1" i="0" dirty="0">
+                <a:solidFill>
+                  <a:srgbClr val="E06C6C"/>
+                </a:solidFill>
+                <a:latin typeface="Segoe UI"/>
+              </a:rPr>
+              <a:t>2</a:t>
+            </a:r>
+            <a:r>
+              <a:rPr sz="1150" b="1" i="0" dirty="0">
+                <a:solidFill>
+                  <a:srgbClr val="E06C6C"/>
+                </a:solidFill>
+                <a:latin typeface="Segoe UI"/>
+              </a:rPr>
+              <a:t> words → top result ✗</a:t>
             </a:r>
           </a:p>
         </p:txBody>
@@ -17122,6 +17113,7 @@
           <a:lstStyle/>
           <a:p>
             <a:pPr algn="ctr"/>
+            <a:endParaRPr/>
           </a:p>
         </p:txBody>
       </p:sp>
@@ -17142,7 +17134,7 @@
           <a:noFill/>
         </p:spPr>
         <p:txBody>
-          <a:bodyPr wrap="square" anchor="t" lIns="0" rIns="0" tIns="0" bIns="0">
+          <a:bodyPr wrap="square" lIns="0" tIns="0" rIns="0" bIns="0" anchor="t">
             <a:spAutoFit/>
           </a:bodyPr>
           <a:lstStyle/>
@@ -17177,7 +17169,7 @@
           <a:noFill/>
         </p:spPr>
         <p:txBody>
-          <a:bodyPr wrap="square" anchor="t" lIns="0" rIns="0" tIns="0" bIns="0">
+          <a:bodyPr wrap="square" lIns="0" tIns="0" rIns="0" bIns="0" anchor="t">
             <a:spAutoFit/>
           </a:bodyPr>
           <a:lstStyle/>
@@ -17220,7 +17212,7 @@
         <p:spPr>
           <a:xfrm>
             <a:off x="6583680" y="4892040"/>
-            <a:ext cx="4023360" cy="457200"/>
+            <a:ext cx="4023360" cy="176972"/>
           </a:xfrm>
           <a:prstGeom prst="rect">
             <a:avLst/>
@@ -17228,20 +17220,47 @@
           <a:noFill/>
         </p:spPr>
         <p:txBody>
-          <a:bodyPr wrap="square" anchor="t" lIns="0" rIns="0" tIns="0" bIns="0">
+          <a:bodyPr wrap="square" lIns="0" tIns="0" rIns="0" bIns="0" anchor="t">
             <a:spAutoFit/>
           </a:bodyPr>
           <a:lstStyle/>
           <a:p>
             <a:pPr algn="l"/>
             <a:r>
+              <a:rPr sz="1150" b="1" i="0" dirty="0">
+                <a:solidFill>
+                  <a:srgbClr val="9FB3C8"/>
+                </a:solidFill>
+                <a:latin typeface="Segoe UI"/>
+              </a:rPr>
+              <a:t>shares </a:t>
+            </a:r>
+            <a:r>
+              <a:rPr lang="en-AU" sz="1150" b="1" i="0">
+                <a:solidFill>
+                  <a:srgbClr val="9FB3C8"/>
+                </a:solidFill>
+                <a:latin typeface="Segoe UI"/>
+              </a:rPr>
+              <a:t>0</a:t>
+            </a:r>
+            <a:r>
               <a:rPr sz="1150" b="1" i="0">
                 <a:solidFill>
                   <a:srgbClr val="9FB3C8"/>
                 </a:solidFill>
                 <a:latin typeface="Segoe UI"/>
               </a:rPr>
-              <a:t>shares 1 word → ranked low</a:t>
+              <a:t> </a:t>
+            </a:r>
+            <a:r>
+              <a:rPr sz="1150" b="1" i="0" dirty="0">
+                <a:solidFill>
+                  <a:srgbClr val="9FB3C8"/>
+                </a:solidFill>
+                <a:latin typeface="Segoe UI"/>
+              </a:rPr>
+              <a:t>word → ranked low</a:t>
             </a:r>
           </a:p>
         </p:txBody>
@@ -17263,7 +17282,7 @@
           <a:noFill/>
         </p:spPr>
         <p:txBody>
-          <a:bodyPr wrap="square" anchor="t" lIns="0" rIns="0" tIns="0" bIns="0">
+          <a:bodyPr wrap="square" lIns="0" tIns="0" rIns="0" bIns="0" anchor="t">
             <a:spAutoFit/>
           </a:bodyPr>
           <a:lstStyle/>
@@ -17290,7 +17309,7 @@
 </file>
 
 <file path=ppt/slides/slide7.xml><?xml version="1.0" encoding="utf-8"?>
-<p:sld xmlns:a="http://schemas.openxmlformats.org/drawingml/2006/main" xmlns:p="http://schemas.openxmlformats.org/presentationml/2006/main" xmlns:r="http://schemas.openxmlformats.org/officeDocument/2006/relationships">
+<p:sld xmlns:a="http://schemas.openxmlformats.org/drawingml/2006/main" xmlns:r="http://schemas.openxmlformats.org/officeDocument/2006/relationships" xmlns:p="http://schemas.openxmlformats.org/presentationml/2006/main">
   <p:cSld>
     <p:spTree>
       <p:nvGrpSpPr>
@@ -17298,7 +17317,14 @@
         <p:cNvGrpSpPr/>
         <p:nvPr/>
       </p:nvGrpSpPr>
-      <p:grpSpPr/>
+      <p:grpSpPr>
+        <a:xfrm>
+          <a:off x="0" y="0"/>
+          <a:ext cx="0" cy="0"/>
+          <a:chOff x="0" y="0"/>
+          <a:chExt cx="0" cy="0"/>
+        </a:xfrm>
+      </p:grpSpPr>
       <p:sp>
         <p:nvSpPr>
           <p:cNvPr id="2" name="Rectangle 1"/>
@@ -17339,6 +17365,7 @@
           <a:lstStyle/>
           <a:p>
             <a:pPr algn="ctr"/>
+            <a:endParaRPr/>
           </a:p>
         </p:txBody>
       </p:sp>
@@ -17382,6 +17409,7 @@
           <a:lstStyle/>
           <a:p>
             <a:pPr algn="ctr"/>
+            <a:endParaRPr/>
           </a:p>
         </p:txBody>
       </p:sp>
@@ -17402,7 +17430,7 @@
           <a:noFill/>
         </p:spPr>
         <p:txBody>
-          <a:bodyPr wrap="square" anchor="t" lIns="0" rIns="0" tIns="0" bIns="0">
+          <a:bodyPr wrap="square" lIns="0" tIns="0" rIns="0" bIns="0" anchor="t">
             <a:spAutoFit/>
           </a:bodyPr>
           <a:lstStyle/>
@@ -17437,7 +17465,7 @@
           <a:noFill/>
         </p:spPr>
         <p:txBody>
-          <a:bodyPr wrap="square" anchor="t" lIns="0" rIns="0" tIns="0" bIns="0">
+          <a:bodyPr wrap="square" lIns="0" tIns="0" rIns="0" bIns="0" anchor="t">
             <a:spAutoFit/>
           </a:bodyPr>
           <a:lstStyle/>
@@ -17499,6 +17527,7 @@
           <a:lstStyle/>
           <a:p>
             <a:pPr algn="ctr"/>
+            <a:endParaRPr/>
           </a:p>
         </p:txBody>
       </p:sp>
@@ -17542,6 +17571,7 @@
           <a:lstStyle/>
           <a:p>
             <a:pPr algn="ctr"/>
+            <a:endParaRPr/>
           </a:p>
         </p:txBody>
       </p:sp>
@@ -17585,6 +17615,7 @@
           <a:lstStyle/>
           <a:p>
             <a:pPr algn="ctr"/>
+            <a:endParaRPr/>
           </a:p>
         </p:txBody>
       </p:sp>
@@ -17605,7 +17636,7 @@
           <a:noFill/>
         </p:spPr>
         <p:txBody>
-          <a:bodyPr wrap="square" anchor="ctr" lIns="0" rIns="0" tIns="0" bIns="0">
+          <a:bodyPr wrap="square" lIns="0" tIns="0" rIns="0" bIns="0" anchor="ctr">
             <a:spAutoFit/>
           </a:bodyPr>
           <a:lstStyle/>
@@ -17663,7 +17694,7 @@
           </a:fontRef>
         </p:style>
         <p:txBody>
-          <a:bodyPr rtlCol="0" anchor="ctr" lIns="0" rIns="0" tIns="0" bIns="0"/>
+          <a:bodyPr lIns="0" tIns="0" rIns="0" bIns="0" rtlCol="0" anchor="ctr"/>
           <a:lstStyle/>
           <a:p>
             <a:pPr algn="ctr"/>
@@ -17717,7 +17748,7 @@
           </a:fontRef>
         </p:style>
         <p:txBody>
-          <a:bodyPr rtlCol="0" anchor="ctr" lIns="0" rIns="0" tIns="0" bIns="0"/>
+          <a:bodyPr lIns="0" tIns="0" rIns="0" bIns="0" rtlCol="0" anchor="ctr"/>
           <a:lstStyle/>
           <a:p>
             <a:pPr algn="ctr"/>
@@ -17773,6 +17804,7 @@
           <a:lstStyle/>
           <a:p>
             <a:pPr algn="ctr"/>
+            <a:endParaRPr/>
           </a:p>
         </p:txBody>
       </p:sp>
@@ -17886,7 +17918,7 @@
           </a:fontRef>
         </p:style>
         <p:txBody>
-          <a:bodyPr rtlCol="0" anchor="ctr" lIns="0" rIns="0" tIns="0" bIns="0"/>
+          <a:bodyPr lIns="0" tIns="0" rIns="0" bIns="0" rtlCol="0" anchor="ctr"/>
           <a:lstStyle/>
           <a:p>
             <a:pPr algn="ctr"/>
@@ -17940,7 +17972,7 @@
           </a:fontRef>
         </p:style>
         <p:txBody>
-          <a:bodyPr rtlCol="0" anchor="ctr" lIns="0" rIns="0" tIns="0" bIns="0"/>
+          <a:bodyPr lIns="0" tIns="0" rIns="0" bIns="0" rtlCol="0" anchor="ctr"/>
           <a:lstStyle/>
           <a:p>
             <a:pPr algn="ctr"/>
@@ -17996,6 +18028,7 @@
           <a:lstStyle/>
           <a:p>
             <a:pPr algn="ctr"/>
+            <a:endParaRPr/>
           </a:p>
         </p:txBody>
       </p:sp>
@@ -18074,7 +18107,7 @@
           </a:fontRef>
         </p:style>
         <p:txBody>
-          <a:bodyPr rtlCol="0" anchor="ctr" lIns="0" rIns="0" tIns="0" bIns="0"/>
+          <a:bodyPr lIns="0" tIns="0" rIns="0" bIns="0" rtlCol="0" anchor="ctr"/>
           <a:lstStyle/>
           <a:p>
             <a:pPr algn="ctr"/>
@@ -18130,7 +18163,7 @@
           </a:fontRef>
         </p:style>
         <p:txBody>
-          <a:bodyPr rtlCol="0" anchor="ctr" lIns="0" rIns="0" tIns="0" bIns="0"/>
+          <a:bodyPr lIns="0" tIns="0" rIns="0" bIns="0" rtlCol="0" anchor="ctr"/>
           <a:lstStyle/>
           <a:p>
             <a:pPr algn="ctr"/>
@@ -18186,7 +18219,7 @@
           </a:fontRef>
         </p:style>
         <p:txBody>
-          <a:bodyPr rtlCol="0" anchor="ctr" lIns="0" rIns="0" tIns="0" bIns="0"/>
+          <a:bodyPr lIns="0" tIns="0" rIns="0" bIns="0" rtlCol="0" anchor="ctr"/>
           <a:lstStyle/>
           <a:p>
             <a:pPr algn="ctr"/>
@@ -18219,7 +18252,7 @@
           <a:noFill/>
         </p:spPr>
         <p:txBody>
-          <a:bodyPr wrap="square" anchor="t" lIns="0" rIns="0" tIns="0" bIns="0">
+          <a:bodyPr wrap="square" lIns="0" tIns="0" rIns="0" bIns="0" anchor="t">
             <a:spAutoFit/>
           </a:bodyPr>
           <a:lstStyle/>
@@ -18281,6 +18314,7 @@
           <a:lstStyle/>
           <a:p>
             <a:pPr algn="ctr"/>
+            <a:endParaRPr/>
           </a:p>
         </p:txBody>
       </p:sp>
@@ -18324,6 +18358,7 @@
           <a:lstStyle/>
           <a:p>
             <a:pPr algn="ctr"/>
+            <a:endParaRPr/>
           </a:p>
         </p:txBody>
       </p:sp>
@@ -18344,7 +18379,7 @@
           <a:noFill/>
         </p:spPr>
         <p:txBody>
-          <a:bodyPr wrap="square" anchor="t" lIns="0" rIns="0" tIns="0" bIns="0">
+          <a:bodyPr wrap="square" lIns="0" tIns="0" rIns="0" bIns="0" anchor="t">
             <a:spAutoFit/>
           </a:bodyPr>
           <a:lstStyle/>
@@ -18402,6 +18437,7 @@
           <a:lstStyle/>
           <a:p>
             <a:pPr algn="ctr"/>
+            <a:endParaRPr/>
           </a:p>
         </p:txBody>
       </p:sp>
@@ -18422,7 +18458,7 @@
           <a:noFill/>
         </p:spPr>
         <p:txBody>
-          <a:bodyPr wrap="square" anchor="t" lIns="0" rIns="0" tIns="0" bIns="0">
+          <a:bodyPr wrap="square" lIns="0" tIns="0" rIns="0" bIns="0" anchor="t">
             <a:spAutoFit/>
           </a:bodyPr>
           <a:lstStyle/>
@@ -18480,6 +18516,7 @@
           <a:lstStyle/>
           <a:p>
             <a:pPr algn="ctr"/>
+            <a:endParaRPr/>
           </a:p>
         </p:txBody>
       </p:sp>
@@ -18500,7 +18537,7 @@
           <a:noFill/>
         </p:spPr>
         <p:txBody>
-          <a:bodyPr wrap="square" anchor="t" lIns="0" rIns="0" tIns="0" bIns="0">
+          <a:bodyPr wrap="square" lIns="0" tIns="0" rIns="0" bIns="0" anchor="t">
             <a:spAutoFit/>
           </a:bodyPr>
           <a:lstStyle/>
@@ -18558,6 +18595,7 @@
           <a:lstStyle/>
           <a:p>
             <a:pPr algn="ctr"/>
+            <a:endParaRPr/>
           </a:p>
         </p:txBody>
       </p:sp>
@@ -18578,7 +18616,7 @@
           <a:noFill/>
         </p:spPr>
         <p:txBody>
-          <a:bodyPr wrap="square" anchor="t" lIns="0" rIns="0" tIns="0" bIns="0">
+          <a:bodyPr wrap="square" lIns="0" tIns="0" rIns="0" bIns="0" anchor="t">
             <a:spAutoFit/>
           </a:bodyPr>
           <a:lstStyle/>
@@ -18683,7 +18721,7 @@
           <a:noFill/>
         </p:spPr>
         <p:txBody>
-          <a:bodyPr wrap="square" anchor="t" lIns="0" rIns="0" tIns="0" bIns="0">
+          <a:bodyPr wrap="square" lIns="0" tIns="0" rIns="0" bIns="0" anchor="t">
             <a:spAutoFit/>
           </a:bodyPr>
           <a:lstStyle/>
@@ -18806,7 +18844,7 @@
 </file>
 
 <file path=ppt/slides/slide8.xml><?xml version="1.0" encoding="utf-8"?>
-<p:sld xmlns:a="http://schemas.openxmlformats.org/drawingml/2006/main" xmlns:p="http://schemas.openxmlformats.org/presentationml/2006/main" xmlns:r="http://schemas.openxmlformats.org/officeDocument/2006/relationships">
+<p:sld xmlns:a="http://schemas.openxmlformats.org/drawingml/2006/main" xmlns:r="http://schemas.openxmlformats.org/officeDocument/2006/relationships" xmlns:p="http://schemas.openxmlformats.org/presentationml/2006/main">
   <p:cSld>
     <p:spTree>
       <p:nvGrpSpPr>
@@ -18814,7 +18852,14 @@
         <p:cNvGrpSpPr/>
         <p:nvPr/>
       </p:nvGrpSpPr>
-      <p:grpSpPr/>
+      <p:grpSpPr>
+        <a:xfrm>
+          <a:off x="0" y="0"/>
+          <a:ext cx="0" cy="0"/>
+          <a:chOff x="0" y="0"/>
+          <a:chExt cx="0" cy="0"/>
+        </a:xfrm>
+      </p:grpSpPr>
       <p:sp>
         <p:nvSpPr>
           <p:cNvPr id="2" name="Rectangle 1"/>
@@ -18855,6 +18900,7 @@
           <a:lstStyle/>
           <a:p>
             <a:pPr algn="ctr"/>
+            <a:endParaRPr/>
           </a:p>
         </p:txBody>
       </p:sp>
@@ -18898,6 +18944,7 @@
           <a:lstStyle/>
           <a:p>
             <a:pPr algn="ctr"/>
+            <a:endParaRPr/>
           </a:p>
         </p:txBody>
       </p:sp>
@@ -18918,7 +18965,7 @@
           <a:noFill/>
         </p:spPr>
         <p:txBody>
-          <a:bodyPr wrap="square" anchor="t" lIns="0" rIns="0" tIns="0" bIns="0">
+          <a:bodyPr wrap="square" lIns="0" tIns="0" rIns="0" bIns="0" anchor="t">
             <a:spAutoFit/>
           </a:bodyPr>
           <a:lstStyle/>
@@ -18953,7 +19000,7 @@
           <a:noFill/>
         </p:spPr>
         <p:txBody>
-          <a:bodyPr wrap="square" anchor="t" lIns="0" rIns="0" tIns="0" bIns="0">
+          <a:bodyPr wrap="square" lIns="0" tIns="0" rIns="0" bIns="0" anchor="t">
             <a:spAutoFit/>
           </a:bodyPr>
           <a:lstStyle/>
@@ -19015,6 +19062,7 @@
           <a:lstStyle/>
           <a:p>
             <a:pPr algn="ctr"/>
+            <a:endParaRPr/>
           </a:p>
         </p:txBody>
       </p:sp>
@@ -19058,6 +19106,7 @@
           <a:lstStyle/>
           <a:p>
             <a:pPr algn="ctr"/>
+            <a:endParaRPr/>
           </a:p>
         </p:txBody>
       </p:sp>
@@ -19101,6 +19150,7 @@
           <a:lstStyle/>
           <a:p>
             <a:pPr algn="ctr"/>
+            <a:endParaRPr/>
           </a:p>
         </p:txBody>
       </p:sp>
@@ -19121,7 +19171,7 @@
           <a:noFill/>
         </p:spPr>
         <p:txBody>
-          <a:bodyPr wrap="square" anchor="ctr" lIns="0" rIns="0" tIns="0" bIns="0">
+          <a:bodyPr wrap="square" lIns="0" tIns="0" rIns="0" bIns="0" anchor="ctr">
             <a:spAutoFit/>
           </a:bodyPr>
           <a:lstStyle/>
@@ -19179,7 +19229,7 @@
           </a:fontRef>
         </p:style>
         <p:txBody>
-          <a:bodyPr rtlCol="0" anchor="ctr" lIns="0" rIns="0" tIns="0" bIns="0"/>
+          <a:bodyPr lIns="0" tIns="0" rIns="0" bIns="0" rtlCol="0" anchor="ctr"/>
           <a:lstStyle/>
           <a:p>
             <a:pPr algn="ctr"/>
@@ -19233,7 +19283,7 @@
           </a:fontRef>
         </p:style>
         <p:txBody>
-          <a:bodyPr rtlCol="0" anchor="ctr" lIns="0" rIns="0" tIns="0" bIns="0"/>
+          <a:bodyPr lIns="0" tIns="0" rIns="0" bIns="0" rtlCol="0" anchor="ctr"/>
           <a:lstStyle/>
           <a:p>
             <a:pPr algn="ctr"/>
@@ -19289,6 +19339,7 @@
           <a:lstStyle/>
           <a:p>
             <a:pPr algn="ctr"/>
+            <a:endParaRPr/>
           </a:p>
         </p:txBody>
       </p:sp>
@@ -19402,7 +19453,7 @@
           </a:fontRef>
         </p:style>
         <p:txBody>
-          <a:bodyPr rtlCol="0" anchor="ctr" lIns="0" rIns="0" tIns="0" bIns="0"/>
+          <a:bodyPr lIns="0" tIns="0" rIns="0" bIns="0" rtlCol="0" anchor="ctr"/>
           <a:lstStyle/>
           <a:p>
             <a:pPr algn="ctr"/>
@@ -19458,7 +19509,7 @@
           </a:fontRef>
         </p:style>
         <p:txBody>
-          <a:bodyPr rtlCol="0" anchor="ctr" lIns="0" rIns="0" tIns="0" bIns="0"/>
+          <a:bodyPr lIns="0" tIns="0" rIns="0" bIns="0" rtlCol="0" anchor="ctr"/>
           <a:lstStyle/>
           <a:p>
             <a:pPr algn="ctr"/>
@@ -19514,7 +19565,7 @@
           </a:fontRef>
         </p:style>
         <p:txBody>
-          <a:bodyPr rtlCol="0" anchor="ctr" lIns="0" rIns="0" tIns="0" bIns="0"/>
+          <a:bodyPr lIns="0" tIns="0" rIns="0" bIns="0" rtlCol="0" anchor="ctr"/>
           <a:lstStyle/>
           <a:p>
             <a:pPr algn="ctr"/>
@@ -19570,7 +19621,7 @@
           </a:fontRef>
         </p:style>
         <p:txBody>
-          <a:bodyPr rtlCol="0" anchor="ctr" lIns="0" rIns="0" tIns="0" bIns="0"/>
+          <a:bodyPr lIns="0" tIns="0" rIns="0" bIns="0" rtlCol="0" anchor="ctr"/>
           <a:lstStyle/>
           <a:p>
             <a:pPr algn="ctr"/>
@@ -19626,7 +19677,7 @@
           </a:fontRef>
         </p:style>
         <p:txBody>
-          <a:bodyPr rtlCol="0" anchor="ctr" lIns="0" rIns="0" tIns="0" bIns="0"/>
+          <a:bodyPr lIns="0" tIns="0" rIns="0" bIns="0" rtlCol="0" anchor="ctr"/>
           <a:lstStyle/>
           <a:p>
             <a:pPr algn="ctr"/>
@@ -19659,7 +19710,7 @@
           <a:noFill/>
         </p:spPr>
         <p:txBody>
-          <a:bodyPr wrap="square" anchor="t" lIns="0" rIns="0" tIns="0" bIns="0">
+          <a:bodyPr wrap="square" lIns="0" tIns="0" rIns="0" bIns="0" anchor="t">
             <a:spAutoFit/>
           </a:bodyPr>
           <a:lstStyle/>
@@ -19717,7 +19768,7 @@
           </a:fontRef>
         </p:style>
         <p:txBody>
-          <a:bodyPr rtlCol="0" anchor="ctr" lIns="0" rIns="0" tIns="0" bIns="0"/>
+          <a:bodyPr lIns="0" tIns="0" rIns="0" bIns="0" rtlCol="0" anchor="ctr"/>
           <a:lstStyle/>
           <a:p>
             <a:pPr algn="ctr"/>
@@ -19777,6 +19828,7 @@
           <a:lstStyle/>
           <a:p>
             <a:pPr algn="ctr"/>
+            <a:endParaRPr/>
           </a:p>
         </p:txBody>
       </p:sp>
@@ -19797,7 +19849,7 @@
           <a:noFill/>
         </p:spPr>
         <p:txBody>
-          <a:bodyPr wrap="square" anchor="ctr" lIns="0" rIns="0" tIns="0" bIns="0">
+          <a:bodyPr wrap="square" lIns="0" tIns="0" rIns="0" bIns="0" anchor="ctr">
             <a:spAutoFit/>
           </a:bodyPr>
           <a:lstStyle/>
@@ -19855,7 +19907,7 @@
           </a:fontRef>
         </p:style>
         <p:txBody>
-          <a:bodyPr rtlCol="0" anchor="ctr" lIns="0" rIns="0" tIns="0" bIns="0"/>
+          <a:bodyPr lIns="0" tIns="0" rIns="0" bIns="0" rtlCol="0" anchor="ctr"/>
           <a:lstStyle/>
           <a:p>
             <a:pPr algn="ctr"/>
@@ -19915,6 +19967,7 @@
           <a:lstStyle/>
           <a:p>
             <a:pPr algn="ctr"/>
+            <a:endParaRPr/>
           </a:p>
         </p:txBody>
       </p:sp>
@@ -19935,7 +19988,7 @@
           <a:noFill/>
         </p:spPr>
         <p:txBody>
-          <a:bodyPr wrap="square" anchor="ctr" lIns="0" rIns="0" tIns="0" bIns="0">
+          <a:bodyPr wrap="square" lIns="0" tIns="0" rIns="0" bIns="0" anchor="ctr">
             <a:spAutoFit/>
           </a:bodyPr>
           <a:lstStyle/>
@@ -19993,6 +20046,7 @@
           <a:lstStyle/>
           <a:p>
             <a:pPr algn="ctr"/>
+            <a:endParaRPr/>
           </a:p>
         </p:txBody>
       </p:sp>
@@ -20040,6 +20094,7 @@
           <a:lstStyle/>
           <a:p>
             <a:pPr algn="ctr"/>
+            <a:endParaRPr/>
           </a:p>
         </p:txBody>
       </p:sp>
@@ -20060,7 +20115,7 @@
           <a:noFill/>
         </p:spPr>
         <p:txBody>
-          <a:bodyPr wrap="square" anchor="t" lIns="0" rIns="0" tIns="0" bIns="0">
+          <a:bodyPr wrap="square" lIns="0" tIns="0" rIns="0" bIns="0" anchor="t">
             <a:spAutoFit/>
           </a:bodyPr>
           <a:lstStyle/>
@@ -20095,7 +20150,7 @@
           <a:noFill/>
         </p:spPr>
         <p:txBody>
-          <a:bodyPr wrap="square" anchor="t" lIns="0" rIns="0" tIns="0" bIns="0">
+          <a:bodyPr wrap="square" lIns="0" tIns="0" rIns="0" bIns="0" anchor="t">
             <a:spAutoFit/>
           </a:bodyPr>
           <a:lstStyle/>
@@ -20146,7 +20201,7 @@
           <a:noFill/>
         </p:spPr>
         <p:txBody>
-          <a:bodyPr wrap="square" anchor="t" lIns="0" rIns="0" tIns="0" bIns="0">
+          <a:bodyPr wrap="square" lIns="0" tIns="0" rIns="0" bIns="0" anchor="t">
             <a:spAutoFit/>
           </a:bodyPr>
           <a:lstStyle/>
@@ -20173,7 +20228,7 @@
 </file>
 
 <file path=ppt/slides/slide9.xml><?xml version="1.0" encoding="utf-8"?>
-<p:sld xmlns:a="http://schemas.openxmlformats.org/drawingml/2006/main" xmlns:p="http://schemas.openxmlformats.org/presentationml/2006/main" xmlns:r="http://schemas.openxmlformats.org/officeDocument/2006/relationships">
+<p:sld xmlns:a="http://schemas.openxmlformats.org/drawingml/2006/main" xmlns:r="http://schemas.openxmlformats.org/officeDocument/2006/relationships" xmlns:p="http://schemas.openxmlformats.org/presentationml/2006/main">
   <p:cSld>
     <p:spTree>
       <p:nvGrpSpPr>
@@ -20181,7 +20236,14 @@
         <p:cNvGrpSpPr/>
         <p:nvPr/>
       </p:nvGrpSpPr>
-      <p:grpSpPr/>
+      <p:grpSpPr>
+        <a:xfrm>
+          <a:off x="0" y="0"/>
+          <a:ext cx="0" cy="0"/>
+          <a:chOff x="0" y="0"/>
+          <a:chExt cx="0" cy="0"/>
+        </a:xfrm>
+      </p:grpSpPr>
       <p:sp>
         <p:nvSpPr>
           <p:cNvPr id="2" name="Rectangle 1"/>
@@ -20222,6 +20284,7 @@
           <a:lstStyle/>
           <a:p>
             <a:pPr algn="ctr"/>
+            <a:endParaRPr/>
           </a:p>
         </p:txBody>
       </p:sp>
@@ -20265,6 +20328,7 @@
           <a:lstStyle/>
           <a:p>
             <a:pPr algn="ctr"/>
+            <a:endParaRPr/>
           </a:p>
         </p:txBody>
       </p:sp>
@@ -20285,7 +20349,7 @@
           <a:noFill/>
         </p:spPr>
         <p:txBody>
-          <a:bodyPr wrap="square" anchor="t" lIns="0" rIns="0" tIns="0" bIns="0">
+          <a:bodyPr wrap="square" lIns="0" tIns="0" rIns="0" bIns="0" anchor="t">
             <a:spAutoFit/>
           </a:bodyPr>
           <a:lstStyle/>
@@ -20320,7 +20384,7 @@
           <a:noFill/>
         </p:spPr>
         <p:txBody>
-          <a:bodyPr wrap="square" anchor="t" lIns="0" rIns="0" tIns="0" bIns="0">
+          <a:bodyPr wrap="square" lIns="0" tIns="0" rIns="0" bIns="0" anchor="t">
             <a:spAutoFit/>
           </a:bodyPr>
           <a:lstStyle/>
@@ -20382,6 +20446,7 @@
           <a:lstStyle/>
           <a:p>
             <a:pPr algn="ctr"/>
+            <a:endParaRPr/>
           </a:p>
         </p:txBody>
       </p:sp>
@@ -20425,6 +20490,7 @@
           <a:lstStyle/>
           <a:p>
             <a:pPr algn="ctr"/>
+            <a:endParaRPr/>
           </a:p>
         </p:txBody>
       </p:sp>
@@ -20468,6 +20534,7 @@
           <a:lstStyle/>
           <a:p>
             <a:pPr algn="ctr"/>
+            <a:endParaRPr/>
           </a:p>
         </p:txBody>
       </p:sp>
@@ -20488,7 +20555,7 @@
           <a:noFill/>
         </p:spPr>
         <p:txBody>
-          <a:bodyPr wrap="square" anchor="ctr" lIns="0" rIns="0" tIns="0" bIns="0">
+          <a:bodyPr wrap="square" lIns="0" tIns="0" rIns="0" bIns="0" anchor="ctr">
             <a:spAutoFit/>
           </a:bodyPr>
           <a:lstStyle/>
@@ -20546,7 +20613,7 @@
           </a:fontRef>
         </p:style>
         <p:txBody>
-          <a:bodyPr rtlCol="0" anchor="ctr" lIns="0" rIns="0" tIns="0" bIns="0"/>
+          <a:bodyPr lIns="0" tIns="0" rIns="0" bIns="0" rtlCol="0" anchor="ctr"/>
           <a:lstStyle/>
           <a:p>
             <a:pPr algn="ctr"/>
@@ -20602,7 +20669,7 @@
           </a:fontRef>
         </p:style>
         <p:txBody>
-          <a:bodyPr rtlCol="0" anchor="ctr" lIns="0" rIns="0" tIns="0" bIns="0"/>
+          <a:bodyPr lIns="0" tIns="0" rIns="0" bIns="0" rtlCol="0" anchor="ctr"/>
           <a:lstStyle/>
           <a:p>
             <a:pPr algn="ctr"/>
@@ -20693,7 +20760,7 @@
           </a:fontRef>
         </p:style>
         <p:txBody>
-          <a:bodyPr rtlCol="0" anchor="ctr" lIns="0" rIns="0" tIns="0" bIns="0"/>
+          <a:bodyPr lIns="0" tIns="0" rIns="0" bIns="0" rtlCol="0" anchor="ctr"/>
           <a:lstStyle/>
           <a:p>
             <a:pPr algn="ctr"/>
@@ -20749,7 +20816,7 @@
           </a:fontRef>
         </p:style>
         <p:txBody>
-          <a:bodyPr rtlCol="0" anchor="ctr" lIns="0" rIns="0" tIns="0" bIns="0"/>
+          <a:bodyPr lIns="0" tIns="0" rIns="0" bIns="0" rtlCol="0" anchor="ctr"/>
           <a:lstStyle/>
           <a:p>
             <a:pPr algn="ctr"/>
@@ -20805,7 +20872,7 @@
           </a:fontRef>
         </p:style>
         <p:txBody>
-          <a:bodyPr rtlCol="0" anchor="ctr" lIns="0" rIns="0" tIns="0" bIns="0"/>
+          <a:bodyPr lIns="0" tIns="0" rIns="0" bIns="0" rtlCol="0" anchor="ctr"/>
           <a:lstStyle/>
           <a:p>
             <a:pPr algn="ctr"/>
@@ -20859,7 +20926,7 @@
           </a:fontRef>
         </p:style>
         <p:txBody>
-          <a:bodyPr rtlCol="0" anchor="ctr" lIns="0" rIns="0" tIns="0" bIns="0"/>
+          <a:bodyPr lIns="0" tIns="0" rIns="0" bIns="0" rtlCol="0" anchor="ctr"/>
           <a:lstStyle/>
           <a:p>
             <a:pPr algn="ctr"/>
@@ -20915,6 +20982,7 @@
           <a:lstStyle/>
           <a:p>
             <a:pPr algn="ctr"/>
+            <a:endParaRPr/>
           </a:p>
         </p:txBody>
       </p:sp>
@@ -20993,7 +21061,7 @@
           </a:fontRef>
         </p:style>
         <p:txBody>
-          <a:bodyPr rtlCol="0" anchor="ctr" lIns="0" rIns="0" tIns="0" bIns="0"/>
+          <a:bodyPr lIns="0" tIns="0" rIns="0" bIns="0" rtlCol="0" anchor="ctr"/>
           <a:lstStyle/>
           <a:p>
             <a:pPr algn="ctr"/>
@@ -21053,6 +21121,7 @@
           <a:lstStyle/>
           <a:p>
             <a:pPr algn="ctr"/>
+            <a:endParaRPr/>
           </a:p>
         </p:txBody>
       </p:sp>
@@ -21073,7 +21142,7 @@
           <a:noFill/>
         </p:spPr>
         <p:txBody>
-          <a:bodyPr wrap="square" anchor="ctr" lIns="0" rIns="0" tIns="0" bIns="0">
+          <a:bodyPr wrap="square" lIns="0" tIns="0" rIns="0" bIns="0" anchor="ctr">
             <a:spAutoFit/>
           </a:bodyPr>
           <a:lstStyle/>
@@ -21135,6 +21204,7 @@
           <a:lstStyle/>
           <a:p>
             <a:pPr algn="ctr"/>
+            <a:endParaRPr/>
           </a:p>
         </p:txBody>
       </p:sp>
@@ -21155,7 +21225,7 @@
           <a:noFill/>
         </p:spPr>
         <p:txBody>
-          <a:bodyPr wrap="square" anchor="ctr" lIns="0" rIns="0" tIns="0" bIns="0">
+          <a:bodyPr wrap="square" lIns="0" tIns="0" rIns="0" bIns="0" anchor="ctr">
             <a:spAutoFit/>
           </a:bodyPr>
           <a:lstStyle/>
@@ -21217,6 +21287,7 @@
           <a:lstStyle/>
           <a:p>
             <a:pPr algn="ctr"/>
+            <a:endParaRPr/>
           </a:p>
         </p:txBody>
       </p:sp>
@@ -21237,7 +21308,7 @@
           <a:noFill/>
         </p:spPr>
         <p:txBody>
-          <a:bodyPr wrap="square" anchor="t" lIns="0" rIns="0" tIns="0" bIns="0">
+          <a:bodyPr wrap="square" lIns="0" tIns="0" rIns="0" bIns="0" anchor="t">
             <a:spAutoFit/>
           </a:bodyPr>
           <a:lstStyle/>
@@ -21272,7 +21343,7 @@
           <a:noFill/>
         </p:spPr>
         <p:txBody>
-          <a:bodyPr wrap="square" anchor="t" lIns="0" rIns="0" tIns="0" bIns="0">
+          <a:bodyPr wrap="square" lIns="0" tIns="0" rIns="0" bIns="0" anchor="t">
             <a:spAutoFit/>
           </a:bodyPr>
           <a:lstStyle/>
@@ -21307,7 +21378,7 @@
           <a:noFill/>
         </p:spPr>
         <p:txBody>
-          <a:bodyPr wrap="square" anchor="t" lIns="0" rIns="0" tIns="0" bIns="0">
+          <a:bodyPr wrap="square" lIns="0" tIns="0" rIns="0" bIns="0" anchor="t">
             <a:spAutoFit/>
           </a:bodyPr>
           <a:lstStyle/>
@@ -21342,7 +21413,7 @@
           <a:noFill/>
         </p:spPr>
         <p:txBody>
-          <a:bodyPr wrap="square" anchor="t" lIns="0" rIns="0" tIns="0" bIns="0">
+          <a:bodyPr wrap="square" lIns="0" tIns="0" rIns="0" bIns="0" anchor="t">
             <a:spAutoFit/>
           </a:bodyPr>
           <a:lstStyle/>
@@ -21377,7 +21448,7 @@
           <a:noFill/>
         </p:spPr>
         <p:txBody>
-          <a:bodyPr wrap="square" anchor="t" lIns="0" rIns="0" tIns="0" bIns="0">
+          <a:bodyPr wrap="square" lIns="0" tIns="0" rIns="0" bIns="0" anchor="t">
             <a:spAutoFit/>
           </a:bodyPr>
           <a:lstStyle/>
@@ -21412,7 +21483,7 @@
           <a:noFill/>
         </p:spPr>
         <p:txBody>
-          <a:bodyPr wrap="square" anchor="t" lIns="0" rIns="0" tIns="0" bIns="0">
+          <a:bodyPr wrap="square" lIns="0" tIns="0" rIns="0" bIns="0" anchor="t">
             <a:spAutoFit/>
           </a:bodyPr>
           <a:lstStyle/>
@@ -21447,7 +21518,7 @@
           <a:noFill/>
         </p:spPr>
         <p:txBody>
-          <a:bodyPr wrap="square" anchor="t" lIns="0" rIns="0" tIns="0" bIns="0">
+          <a:bodyPr wrap="square" lIns="0" tIns="0" rIns="0" bIns="0" anchor="t">
             <a:spAutoFit/>
           </a:bodyPr>
           <a:lstStyle/>
@@ -21509,6 +21580,7 @@
           <a:lstStyle/>
           <a:p>
             <a:pPr algn="ctr"/>
+            <a:endParaRPr/>
           </a:p>
         </p:txBody>
       </p:sp>
@@ -21529,7 +21601,7 @@
           <a:noFill/>
         </p:spPr>
         <p:txBody>
-          <a:bodyPr wrap="square" anchor="t" lIns="0" rIns="0" tIns="0" bIns="0">
+          <a:bodyPr wrap="square" lIns="0" tIns="0" rIns="0" bIns="0" anchor="t">
             <a:spAutoFit/>
           </a:bodyPr>
           <a:lstStyle/>
@@ -21564,7 +21636,7 @@
           <a:noFill/>
         </p:spPr>
         <p:txBody>
-          <a:bodyPr wrap="square" anchor="t" lIns="0" rIns="0" tIns="0" bIns="0">
+          <a:bodyPr wrap="square" lIns="0" tIns="0" rIns="0" bIns="0" anchor="t">
             <a:spAutoFit/>
           </a:bodyPr>
           <a:lstStyle/>
@@ -21599,7 +21671,7 @@
           <a:noFill/>
         </p:spPr>
         <p:txBody>
-          <a:bodyPr wrap="square" anchor="t" lIns="0" rIns="0" tIns="0" bIns="0">
+          <a:bodyPr wrap="square" lIns="0" tIns="0" rIns="0" bIns="0" anchor="t">
             <a:spAutoFit/>
           </a:bodyPr>
           <a:lstStyle/>
@@ -21634,7 +21706,7 @@
           <a:noFill/>
         </p:spPr>
         <p:txBody>
-          <a:bodyPr wrap="square" anchor="t" lIns="0" rIns="0" tIns="0" bIns="0">
+          <a:bodyPr wrap="square" lIns="0" tIns="0" rIns="0" bIns="0" anchor="t">
             <a:spAutoFit/>
           </a:bodyPr>
           <a:lstStyle/>
@@ -21669,7 +21741,7 @@
           <a:noFill/>
         </p:spPr>
         <p:txBody>
-          <a:bodyPr wrap="square" anchor="t" lIns="0" rIns="0" tIns="0" bIns="0">
+          <a:bodyPr wrap="square" lIns="0" tIns="0" rIns="0" bIns="0" anchor="t">
             <a:spAutoFit/>
           </a:bodyPr>
           <a:lstStyle/>
@@ -21704,7 +21776,7 @@
           <a:noFill/>
         </p:spPr>
         <p:txBody>
-          <a:bodyPr wrap="square" anchor="t" lIns="0" rIns="0" tIns="0" bIns="0">
+          <a:bodyPr wrap="square" lIns="0" tIns="0" rIns="0" bIns="0" anchor="t">
             <a:spAutoFit/>
           </a:bodyPr>
           <a:lstStyle/>
@@ -21739,7 +21811,7 @@
           <a:noFill/>
         </p:spPr>
         <p:txBody>
-          <a:bodyPr wrap="square" anchor="t" lIns="0" rIns="0" tIns="0" bIns="0">
+          <a:bodyPr wrap="square" lIns="0" tIns="0" rIns="0" bIns="0" anchor="t">
             <a:spAutoFit/>
           </a:bodyPr>
           <a:lstStyle/>
@@ -21774,7 +21846,7 @@
           <a:noFill/>
         </p:spPr>
         <p:txBody>
-          <a:bodyPr wrap="square" anchor="t" lIns="0" rIns="0" tIns="0" bIns="0">
+          <a:bodyPr wrap="square" lIns="0" tIns="0" rIns="0" bIns="0" anchor="t">
             <a:spAutoFit/>
           </a:bodyPr>
           <a:lstStyle/>
@@ -22131,44 +22203,44 @@
         <a:sysClr val="window" lastClr="FFFFFF"/>
       </a:lt1>
       <a:dk2>
-        <a:srgbClr val="1F497D"/>
+        <a:srgbClr val="0E2841"/>
       </a:dk2>
       <a:lt2>
-        <a:srgbClr val="EEECE1"/>
+        <a:srgbClr val="E8E8E8"/>
       </a:lt2>
       <a:accent1>
-        <a:srgbClr val="4F81BD"/>
+        <a:srgbClr val="156082"/>
       </a:accent1>
       <a:accent2>
-        <a:srgbClr val="C0504D"/>
+        <a:srgbClr val="E97132"/>
       </a:accent2>
       <a:accent3>
-        <a:srgbClr val="9BBB59"/>
+        <a:srgbClr val="196B24"/>
       </a:accent3>
       <a:accent4>
-        <a:srgbClr val="8064A2"/>
+        <a:srgbClr val="0F9ED5"/>
       </a:accent4>
       <a:accent5>
-        <a:srgbClr val="4BACC6"/>
+        <a:srgbClr val="A02B93"/>
       </a:accent5>
       <a:accent6>
-        <a:srgbClr val="F79646"/>
+        <a:srgbClr val="4EA72E"/>
       </a:accent6>
       <a:hlink>
-        <a:srgbClr val="0000FF"/>
+        <a:srgbClr val="467886"/>
       </a:hlink>
       <a:folHlink>
-        <a:srgbClr val="800080"/>
+        <a:srgbClr val="96607D"/>
       </a:folHlink>
     </a:clrScheme>
     <a:fontScheme name="Office">
       <a:majorFont>
-        <a:latin typeface="Calibri"/>
+        <a:latin typeface="Aptos Display" panose="02110004020202020204"/>
         <a:ea typeface=""/>
         <a:cs typeface=""/>
-        <a:font script="Jpan" typeface="ＭＳ Ｐゴシック"/>
+        <a:font script="Jpan" typeface="游ゴシック Light"/>
         <a:font script="Hang" typeface="맑은 고딕"/>
-        <a:font script="Hans" typeface="宋体"/>
+        <a:font script="Hans" typeface="等线 Light"/>
         <a:font script="Hant" typeface="新細明體"/>
         <a:font script="Arab" typeface="Times New Roman"/>
         <a:font script="Hebr" typeface="Times New Roman"/>
@@ -22196,14 +22268,31 @@
         <a:font script="Viet" typeface="Times New Roman"/>
         <a:font script="Uigh" typeface="Microsoft Uighur"/>
         <a:font script="Geor" typeface="Sylfaen"/>
+        <a:font script="Armn" typeface="Arial"/>
+        <a:font script="Bugi" typeface="Leelawadee UI"/>
+        <a:font script="Bopo" typeface="Microsoft JhengHei"/>
+        <a:font script="Java" typeface="Javanese Text"/>
+        <a:font script="Lisu" typeface="Segoe UI"/>
+        <a:font script="Mymr" typeface="Myanmar Text"/>
+        <a:font script="Nkoo" typeface="Ebrima"/>
+        <a:font script="Olck" typeface="Nirmala UI"/>
+        <a:font script="Osma" typeface="Ebrima"/>
+        <a:font script="Phag" typeface="Phagspa"/>
+        <a:font script="Syrn" typeface="Estrangelo Edessa"/>
+        <a:font script="Syrj" typeface="Estrangelo Edessa"/>
+        <a:font script="Syre" typeface="Estrangelo Edessa"/>
+        <a:font script="Sora" typeface="Nirmala UI"/>
+        <a:font script="Tale" typeface="Microsoft Tai Le"/>
+        <a:font script="Talu" typeface="Microsoft New Tai Lue"/>
+        <a:font script="Tfng" typeface="Ebrima"/>
       </a:majorFont>
       <a:minorFont>
-        <a:latin typeface="Calibri"/>
+        <a:latin typeface="Aptos" panose="02110004020202020204"/>
         <a:ea typeface=""/>
         <a:cs typeface=""/>
-        <a:font script="Jpan" typeface="ＭＳ Ｐゴシック"/>
+        <a:font script="Jpan" typeface="游ゴシック"/>
         <a:font script="Hang" typeface="맑은 고딕"/>
-        <a:font script="Hans" typeface="宋体"/>
+        <a:font script="Hans" typeface="等线"/>
         <a:font script="Hant" typeface="新細明體"/>
         <a:font script="Arab" typeface="Arial"/>
         <a:font script="Hebr" typeface="Arial"/>
@@ -22231,6 +22320,23 @@
         <a:font script="Viet" typeface="Arial"/>
         <a:font script="Uigh" typeface="Microsoft Uighur"/>
         <a:font script="Geor" typeface="Sylfaen"/>
+        <a:font script="Armn" typeface="Arial"/>
+        <a:font script="Bugi" typeface="Leelawadee UI"/>
+        <a:font script="Bopo" typeface="Microsoft JhengHei"/>
+        <a:font script="Java" typeface="Javanese Text"/>
+        <a:font script="Lisu" typeface="Segoe UI"/>
+        <a:font script="Mymr" typeface="Myanmar Text"/>
+        <a:font script="Nkoo" typeface="Ebrima"/>
+        <a:font script="Olck" typeface="Nirmala UI"/>
+        <a:font script="Osma" typeface="Ebrima"/>
+        <a:font script="Phag" typeface="Phagspa"/>
+        <a:font script="Syrn" typeface="Estrangelo Edessa"/>
+        <a:font script="Syrj" typeface="Estrangelo Edessa"/>
+        <a:font script="Syre" typeface="Estrangelo Edessa"/>
+        <a:font script="Sora" typeface="Nirmala UI"/>
+        <a:font script="Tale" typeface="Microsoft Tai Le"/>
+        <a:font script="Talu" typeface="Microsoft New Tai Lue"/>
+        <a:font script="Tfng" typeface="Ebrima"/>
       </a:minorFont>
     </a:fontScheme>
     <a:fmtScheme name="Office">
@@ -22242,180 +22348,136 @@
           <a:gsLst>
             <a:gs pos="0">
               <a:schemeClr val="phClr">
-                <a:tint val="50000"/>
-                <a:satMod val="300000"/>
+                <a:lumMod val="110000"/>
+                <a:satMod val="105000"/>
+                <a:tint val="67000"/>
               </a:schemeClr>
             </a:gs>
-            <a:gs pos="35000">
+            <a:gs pos="50000">
               <a:schemeClr val="phClr">
-                <a:tint val="37000"/>
-                <a:satMod val="300000"/>
+                <a:lumMod val="105000"/>
+                <a:satMod val="103000"/>
+                <a:tint val="73000"/>
               </a:schemeClr>
             </a:gs>
             <a:gs pos="100000">
               <a:schemeClr val="phClr">
-                <a:tint val="15000"/>
-                <a:satMod val="350000"/>
+                <a:lumMod val="105000"/>
+                <a:satMod val="109000"/>
+                <a:tint val="81000"/>
               </a:schemeClr>
             </a:gs>
           </a:gsLst>
-          <a:lin ang="16200000" scaled="1"/>
+          <a:lin ang="5400000" scaled="0"/>
         </a:gradFill>
         <a:gradFill rotWithShape="1">
           <a:gsLst>
             <a:gs pos="0">
               <a:schemeClr val="phClr">
-                <a:tint val="100000"/>
+                <a:satMod val="103000"/>
+                <a:lumMod val="102000"/>
+                <a:tint val="94000"/>
+              </a:schemeClr>
+            </a:gs>
+            <a:gs pos="50000">
+              <a:schemeClr val="phClr">
+                <a:satMod val="110000"/>
+                <a:lumMod val="100000"/>
                 <a:shade val="100000"/>
-                <a:satMod val="130000"/>
               </a:schemeClr>
             </a:gs>
             <a:gs pos="100000">
               <a:schemeClr val="phClr">
-                <a:tint val="50000"/>
-                <a:shade val="100000"/>
-                <a:satMod val="350000"/>
+                <a:lumMod val="99000"/>
+                <a:satMod val="120000"/>
+                <a:shade val="78000"/>
               </a:schemeClr>
             </a:gs>
           </a:gsLst>
-          <a:lin ang="16200000" scaled="0"/>
+          <a:lin ang="5400000" scaled="0"/>
         </a:gradFill>
       </a:fillStyleLst>
       <a:lnStyleLst>
-        <a:ln w="9525" cap="flat" cmpd="sng" algn="ctr">
-          <a:solidFill>
-            <a:schemeClr val="phClr">
-              <a:shade val="95000"/>
-              <a:satMod val="105000"/>
-            </a:schemeClr>
+        <a:ln w="12700" cap="flat" cmpd="sng" algn="ctr">
+          <a:solidFill>
+            <a:schemeClr val="phClr"/>
           </a:solidFill>
           <a:prstDash val="solid"/>
+          <a:miter lim="800000"/>
+        </a:ln>
+        <a:ln w="19050" cap="flat" cmpd="sng" algn="ctr">
+          <a:solidFill>
+            <a:schemeClr val="phClr"/>
+          </a:solidFill>
+          <a:prstDash val="solid"/>
+          <a:miter lim="800000"/>
         </a:ln>
         <a:ln w="25400" cap="flat" cmpd="sng" algn="ctr">
           <a:solidFill>
             <a:schemeClr val="phClr"/>
           </a:solidFill>
           <a:prstDash val="solid"/>
-        </a:ln>
-        <a:ln w="38100" cap="flat" cmpd="sng" algn="ctr">
-          <a:solidFill>
-            <a:schemeClr val="phClr"/>
-          </a:solidFill>
-          <a:prstDash val="solid"/>
+          <a:miter lim="800000"/>
         </a:ln>
       </a:lnStyleLst>
       <a:effectStyleLst>
         <a:effectStyle>
+          <a:effectLst/>
+        </a:effectStyle>
+        <a:effectStyle>
+          <a:effectLst/>
+        </a:effectStyle>
+        <a:effectStyle>
           <a:effectLst>
-            <a:outerShdw blurRad="40000" dist="20000" dir="5400000" rotWithShape="0">
+            <a:outerShdw blurRad="57150" dist="19050" dir="5400000" algn="ctr" rotWithShape="0">
               <a:srgbClr val="000000">
-                <a:alpha val="38000"/>
+                <a:alpha val="63000"/>
               </a:srgbClr>
             </a:outerShdw>
           </a:effectLst>
-        </a:effectStyle>
-        <a:effectStyle>
-          <a:effectLst>
-            <a:outerShdw blurRad="40000" dist="23000" dir="5400000" rotWithShape="0">
-              <a:srgbClr val="000000">
-                <a:alpha val="35000"/>
-              </a:srgbClr>
-            </a:outerShdw>
-          </a:effectLst>
-        </a:effectStyle>
-        <a:effectStyle>
-          <a:effectLst>
-            <a:outerShdw blurRad="40000" dist="23000" dir="5400000" rotWithShape="0">
-              <a:srgbClr val="000000">
-                <a:alpha val="35000"/>
-              </a:srgbClr>
-            </a:outerShdw>
-          </a:effectLst>
-          <a:scene3d>
-            <a:camera prst="orthographicFront">
-              <a:rot lat="0" lon="0" rev="0"/>
-            </a:camera>
-            <a:lightRig rig="threePt" dir="t">
-              <a:rot lat="0" lon="0" rev="1200000"/>
-            </a:lightRig>
-          </a:scene3d>
-          <a:sp3d>
-            <a:bevelT w="63500" h="25400"/>
-          </a:sp3d>
         </a:effectStyle>
       </a:effectStyleLst>
       <a:bgFillStyleLst>
         <a:solidFill>
           <a:schemeClr val="phClr"/>
         </a:solidFill>
+        <a:solidFill>
+          <a:schemeClr val="phClr">
+            <a:tint val="95000"/>
+            <a:satMod val="170000"/>
+          </a:schemeClr>
+        </a:solidFill>
         <a:gradFill rotWithShape="1">
           <a:gsLst>
             <a:gs pos="0">
               <a:schemeClr val="phClr">
-                <a:tint val="40000"/>
-                <a:satMod val="350000"/>
+                <a:tint val="93000"/>
+                <a:satMod val="150000"/>
+                <a:shade val="98000"/>
+                <a:lumMod val="102000"/>
               </a:schemeClr>
             </a:gs>
-            <a:gs pos="40000">
+            <a:gs pos="50000">
               <a:schemeClr val="phClr">
-                <a:tint val="45000"/>
-                <a:shade val="99000"/>
-                <a:satMod val="350000"/>
+                <a:tint val="98000"/>
+                <a:satMod val="130000"/>
+                <a:shade val="90000"/>
+                <a:lumMod val="103000"/>
               </a:schemeClr>
             </a:gs>
             <a:gs pos="100000">
               <a:schemeClr val="phClr">
-                <a:shade val="20000"/>
-                <a:satMod val="255000"/>
+                <a:shade val="63000"/>
+                <a:satMod val="120000"/>
               </a:schemeClr>
             </a:gs>
           </a:gsLst>
-          <a:path path="circle">
-            <a:fillToRect l="50000" t="-80000" r="50000" b="180000"/>
-          </a:path>
-        </a:gradFill>
-        <a:gradFill rotWithShape="1">
-          <a:gsLst>
-            <a:gs pos="0">
-              <a:schemeClr val="phClr">
-                <a:tint val="80000"/>
-                <a:satMod val="300000"/>
-              </a:schemeClr>
-            </a:gs>
-            <a:gs pos="100000">
-              <a:schemeClr val="phClr">
-                <a:shade val="30000"/>
-                <a:satMod val="200000"/>
-              </a:schemeClr>
-            </a:gs>
-          </a:gsLst>
-          <a:path path="circle">
-            <a:fillToRect l="50000" t="50000" r="50000" b="50000"/>
-          </a:path>
+          <a:lin ang="5400000" scaled="0"/>
         </a:gradFill>
       </a:bgFillStyleLst>
     </a:fmtScheme>
   </a:themeElements>
   <a:objectDefaults>
-    <a:spDef>
-      <a:spPr/>
-      <a:bodyPr/>
-      <a:lstStyle/>
-      <a:style>
-        <a:lnRef idx="1">
-          <a:schemeClr val="accent1"/>
-        </a:lnRef>
-        <a:fillRef idx="3">
-          <a:schemeClr val="accent1"/>
-        </a:fillRef>
-        <a:effectRef idx="2">
-          <a:schemeClr val="accent1"/>
-        </a:effectRef>
-        <a:fontRef idx="minor">
-          <a:schemeClr val="lt1"/>
-        </a:fontRef>
-      </a:style>
-    </a:spDef>
     <a:lnDef>
       <a:spPr/>
       <a:bodyPr/>
@@ -22437,5 +22499,10 @@
     </a:lnDef>
   </a:objectDefaults>
   <a:extraClrSchemeLst/>
+  <a:extLst>
+    <a:ext uri="{05A4C25C-085E-4340-85A3-A5531E510DB2}">
+      <thm15:themeFamily xmlns:thm15="http://schemas.microsoft.com/office/thememl/2012/main" name="Office Theme" id="{2E142A2C-CD16-42D6-873A-C26D2A0506FA}" vid="{1BDDFF52-6CD6-40A5-AB3C-68EB2F1E4D0A}"/>
+    </a:ext>
+  </a:extLst>
 </a:theme>
 </file>
--- a/lecture/deck.pptx
+++ b/lecture/deck.pptx
@@ -4,26 +4,29 @@
   <p:sldMasterIdLst>
     <p:sldMasterId id="2147483648" r:id="rId1"/>
   </p:sldMasterIdLst>
+  <p:notesMasterIdLst>
+    <p:notesMasterId r:id="rId19"/>
+  </p:notesMasterIdLst>
   <p:sldIdLst>
-    <p:sldId id="256" r:id="rId7"/>
-    <p:sldId id="257" r:id="rId9"/>
-    <p:sldId id="258" r:id="rId10"/>
-    <p:sldId id="259" r:id="rId11"/>
-    <p:sldId id="260" r:id="rId12"/>
-    <p:sldId id="261" r:id="rId13"/>
-    <p:sldId id="262" r:id="rId14"/>
-    <p:sldId id="263" r:id="rId15"/>
-    <p:sldId id="264" r:id="rId16"/>
-    <p:sldId id="265" r:id="rId17"/>
-    <p:sldId id="266" r:id="rId18"/>
-    <p:sldId id="267" r:id="rId19"/>
-    <p:sldId id="268" r:id="rId20"/>
-    <p:sldId id="269" r:id="rId21"/>
-    <p:sldId id="270" r:id="rId22"/>
-    <p:sldId id="271" r:id="rId23"/>
-    <p:sldId id="272" r:id="rId24"/>
+    <p:sldId id="256" r:id="rId2"/>
+    <p:sldId id="257" r:id="rId3"/>
+    <p:sldId id="258" r:id="rId4"/>
+    <p:sldId id="259" r:id="rId5"/>
+    <p:sldId id="260" r:id="rId6"/>
+    <p:sldId id="261" r:id="rId7"/>
+    <p:sldId id="262" r:id="rId8"/>
+    <p:sldId id="263" r:id="rId9"/>
+    <p:sldId id="264" r:id="rId10"/>
+    <p:sldId id="265" r:id="rId11"/>
+    <p:sldId id="266" r:id="rId12"/>
+    <p:sldId id="267" r:id="rId13"/>
+    <p:sldId id="268" r:id="rId14"/>
+    <p:sldId id="269" r:id="rId15"/>
+    <p:sldId id="270" r:id="rId16"/>
+    <p:sldId id="271" r:id="rId17"/>
+    <p:sldId id="272" r:id="rId18"/>
   </p:sldIdLst>
-  <p:sldSz cx="12191695" cy="6858000" type="screen4x3"/>
+  <p:sldSz cx="12192000" cy="6858000"/>
   <p:notesSz cx="6858000" cy="9144000"/>
   <p:defaultTextStyle>
     <a:defPPr>
@@ -120,11 +123,27 @@
       </a:defRPr>
     </a:lvl9pPr>
   </p:defaultTextStyle>
+  <p:extLst>
+    <p:ext uri="{EFAFB233-063F-42B5-8137-9DF3F51BA10A}">
+      <p15:sldGuideLst xmlns:p15="http://schemas.microsoft.com/office/powerpoint/2012/main">
+        <p15:guide id="1" orient="horz" pos="2160">
+          <p15:clr>
+            <a:srgbClr val="A4A3A4"/>
+          </p15:clr>
+        </p15:guide>
+        <p15:guide id="2" pos="2880">
+          <p15:clr>
+            <a:srgbClr val="A4A3A4"/>
+          </p15:clr>
+        </p15:guide>
+      </p15:sldGuideLst>
+    </p:ext>
+  </p:extLst>
 </p:presentation>
 </file>
 
 <file path=ppt/notesMasters/notesMaster1.xml><?xml version="1.0" encoding="utf-8"?>
-<p:notesMaster xmlns:a="http://schemas.openxmlformats.org/drawingml/2006/main" xmlns:p="http://schemas.openxmlformats.org/presentationml/2006/main" xmlns:r="http://schemas.openxmlformats.org/officeDocument/2006/relationships">
+<p:notesMaster xmlns:a="http://schemas.openxmlformats.org/drawingml/2006/main" xmlns:r="http://schemas.openxmlformats.org/officeDocument/2006/relationships" xmlns:p="http://schemas.openxmlformats.org/presentationml/2006/main">
   <p:cSld>
     <p:bg>
       <p:bgRef idx="1001">
@@ -145,241 +164,16 @@
           <a:chExt cx="0" cy="0"/>
         </a:xfrm>
       </p:grpSpPr>
-      <p:sp>
-        <p:nvSpPr>
-          <p:cNvPr id="2" name="Header Placeholder 1"/>
-          <p:cNvSpPr>
-            <a:spLocks noGrp="1"/>
-          </p:cNvSpPr>
-          <p:nvPr>
-            <p:ph type="hdr" sz="quarter"/>
-          </p:nvPr>
-        </p:nvSpPr>
-        <p:spPr>
-          <a:xfrm>
-            <a:off x="0" y="0"/>
-            <a:ext cx="2971800" cy="457200"/>
-          </a:xfrm>
-          <a:prstGeom prst="rect">
-            <a:avLst/>
-          </a:prstGeom>
-        </p:spPr>
-        <p:txBody>
-          <a:bodyPr vert="horz" lIns="91440" tIns="45720" rIns="91440" bIns="45720" rtlCol="0"/>
-          <a:lstStyle>
-            <a:lvl1pPr algn="l">
-              <a:defRPr sz="1200"/>
-            </a:lvl1pPr>
-          </a:lstStyle>
-          <a:p>
-            <a:endParaRPr lang="en-US"/>
-          </a:p>
-        </p:txBody>
-      </p:sp>
-      <p:sp>
-        <p:nvSpPr>
-          <p:cNvPr id="3" name="Date Placeholder 2"/>
-          <p:cNvSpPr>
-            <a:spLocks noGrp="1"/>
-          </p:cNvSpPr>
-          <p:nvPr>
-            <p:ph type="dt" idx="1"/>
-          </p:nvPr>
-        </p:nvSpPr>
-        <p:spPr>
-          <a:xfrm>
-            <a:off x="3884613" y="0"/>
-            <a:ext cx="2971800" cy="457200"/>
-          </a:xfrm>
-          <a:prstGeom prst="rect">
-            <a:avLst/>
-          </a:prstGeom>
-        </p:spPr>
-        <p:txBody>
-          <a:bodyPr vert="horz" lIns="91440" tIns="45720" rIns="91440" bIns="45720" rtlCol="0"/>
-          <a:lstStyle>
-            <a:lvl1pPr algn="r">
-              <a:defRPr sz="1200"/>
-            </a:lvl1pPr>
-          </a:lstStyle>
-          <a:p>
-            <a:fld id="{0F89C1C7-3DCD-1040-A9CF-14679D8B5DDD}" type="datetimeFigureOut">
-              <a:rPr lang="en-US" smtClean="0"/>
-              <a:t>10/17/16</a:t>
-            </a:fld>
-            <a:endParaRPr lang="en-US"/>
-          </a:p>
-        </p:txBody>
-      </p:sp>
-      <p:sp>
-        <p:nvSpPr>
-          <p:cNvPr id="4" name="Slide Image Placeholder 3"/>
-          <p:cNvSpPr>
-            <a:spLocks noGrp="1" noRot="1" noChangeAspect="1"/>
-          </p:cNvSpPr>
-          <p:nvPr>
-            <p:ph type="sldImg" idx="2"/>
-          </p:nvPr>
-        </p:nvSpPr>
-        <p:spPr>
-          <a:xfrm>
-            <a:off x="1143000" y="685800"/>
-            <a:ext cx="4572000" cy="3429000"/>
-          </a:xfrm>
-          <a:prstGeom prst="rect">
-            <a:avLst/>
-          </a:prstGeom>
-          <a:noFill/>
-          <a:ln w="12700">
-            <a:solidFill>
-              <a:prstClr val="black"/>
-            </a:solidFill>
-          </a:ln>
-        </p:spPr>
-        <p:txBody>
-          <a:bodyPr vert="horz" lIns="91440" tIns="45720" rIns="91440" bIns="45720" rtlCol="0" anchor="ctr"/>
-          <a:lstStyle/>
-          <a:p>
-            <a:endParaRPr lang="en-US"/>
-          </a:p>
-        </p:txBody>
-      </p:sp>
-      <p:sp>
-        <p:nvSpPr>
-          <p:cNvPr id="5" name="Notes Placeholder 4"/>
-          <p:cNvSpPr>
-            <a:spLocks noGrp="1"/>
-          </p:cNvSpPr>
-          <p:nvPr>
-            <p:ph type="body" sz="quarter" idx="3"/>
-          </p:nvPr>
-        </p:nvSpPr>
-        <p:spPr>
-          <a:xfrm>
-            <a:off x="685800" y="4343400"/>
-            <a:ext cx="5486400" cy="4114800"/>
-          </a:xfrm>
-          <a:prstGeom prst="rect">
-            <a:avLst/>
-          </a:prstGeom>
-        </p:spPr>
-        <p:txBody>
-          <a:bodyPr vert="horz" lIns="91440" tIns="45720" rIns="91440" bIns="45720" rtlCol="0"/>
-          <a:lstStyle/>
-          <a:p>
-            <a:pPr lvl="0"/>
-            <a:r>
-              <a:rPr lang="en-US" smtClean="0"/>
-              <a:t>Click to edit Master text styles</a:t>
-            </a:r>
-          </a:p>
-          <a:p>
-            <a:pPr lvl="1"/>
-            <a:r>
-              <a:rPr lang="en-US" smtClean="0"/>
-              <a:t>Second level</a:t>
-            </a:r>
-          </a:p>
-          <a:p>
-            <a:pPr lvl="2"/>
-            <a:r>
-              <a:rPr lang="en-US" smtClean="0"/>
-              <a:t>Third level</a:t>
-            </a:r>
-          </a:p>
-          <a:p>
-            <a:pPr lvl="3"/>
-            <a:r>
-              <a:rPr lang="en-US" smtClean="0"/>
-              <a:t>Fourth level</a:t>
-            </a:r>
-          </a:p>
-          <a:p>
-            <a:pPr lvl="4"/>
-            <a:r>
-              <a:rPr lang="en-US" smtClean="0"/>
-              <a:t>Fifth level</a:t>
-            </a:r>
-            <a:endParaRPr lang="en-US"/>
-          </a:p>
-        </p:txBody>
-      </p:sp>
-      <p:sp>
-        <p:nvSpPr>
-          <p:cNvPr id="6" name="Footer Placeholder 5"/>
-          <p:cNvSpPr>
-            <a:spLocks noGrp="1"/>
-          </p:cNvSpPr>
-          <p:nvPr>
-            <p:ph type="ftr" sz="quarter" idx="4"/>
-          </p:nvPr>
-        </p:nvSpPr>
-        <p:spPr>
-          <a:xfrm>
-            <a:off x="0" y="8685213"/>
-            <a:ext cx="2971800" cy="457200"/>
-          </a:xfrm>
-          <a:prstGeom prst="rect">
-            <a:avLst/>
-          </a:prstGeom>
-        </p:spPr>
-        <p:txBody>
-          <a:bodyPr vert="horz" lIns="91440" tIns="45720" rIns="91440" bIns="45720" rtlCol="0" anchor="b"/>
-          <a:lstStyle>
-            <a:lvl1pPr algn="l">
-              <a:defRPr sz="1200"/>
-            </a:lvl1pPr>
-          </a:lstStyle>
-          <a:p>
-            <a:endParaRPr lang="en-US"/>
-          </a:p>
-        </p:txBody>
-      </p:sp>
-      <p:sp>
-        <p:nvSpPr>
-          <p:cNvPr id="7" name="Slide Number Placeholder 6"/>
-          <p:cNvSpPr>
-            <a:spLocks noGrp="1"/>
-          </p:cNvSpPr>
-          <p:nvPr>
-            <p:ph type="sldNum" sz="quarter" idx="5"/>
-          </p:nvPr>
-        </p:nvSpPr>
-        <p:spPr>
-          <a:xfrm>
-            <a:off x="3884613" y="8685213"/>
-            <a:ext cx="2971800" cy="457200"/>
-          </a:xfrm>
-          <a:prstGeom prst="rect">
-            <a:avLst/>
-          </a:prstGeom>
-        </p:spPr>
-        <p:txBody>
-          <a:bodyPr vert="horz" lIns="91440" tIns="45720" rIns="91440" bIns="45720" rtlCol="0" anchor="b"/>
-          <a:lstStyle>
-            <a:lvl1pPr algn="r">
-              <a:defRPr sz="1200"/>
-            </a:lvl1pPr>
-          </a:lstStyle>
-          <a:p>
-            <a:fld id="{BB5E49A5-4136-284D-997B-48E1D791AD67}" type="slidenum">
-              <a:rPr lang="en-US" smtClean="0"/>
-              <a:t>‹#›</a:t>
-            </a:fld>
-            <a:endParaRPr lang="en-US"/>
-          </a:p>
-        </p:txBody>
-      </p:sp>
     </p:spTree>
     <p:extLst>
       <p:ext uri="{BB962C8B-B14F-4D97-AF65-F5344CB8AC3E}">
-        <p14:creationId xmlns:p14="http://schemas.microsoft.com/office/powerpoint/2010/main" val="2623252185"/>
+        <p14:creationId xmlns:p14="http://schemas.microsoft.com/office/powerpoint/2010/main" val="3113962996"/>
       </p:ext>
     </p:extLst>
   </p:cSld>
   <p:clrMap bg1="lt1" tx1="dk1" bg2="lt2" tx2="dk2" accent1="accent1" accent2="accent2" accent3="accent3" accent4="accent4" accent5="accent5" accent6="accent6" hlink="hlink" folHlink="folHlink"/>
   <p:notesStyle>
-    <a:lvl1pPr marL="0" algn="l" defTabSz="457200" rtl="0" eaLnBrk="1" latinLnBrk="0" hangingPunct="1">
+    <a:lvl1pPr marL="0" algn="l" defTabSz="914400" rtl="0" eaLnBrk="1" latinLnBrk="0" hangingPunct="1">
       <a:defRPr sz="1200" kern="1200">
         <a:solidFill>
           <a:schemeClr val="tx1"/>
@@ -389,7 +183,7 @@
         <a:cs typeface="+mn-cs"/>
       </a:defRPr>
     </a:lvl1pPr>
-    <a:lvl2pPr marL="457200" algn="l" defTabSz="457200" rtl="0" eaLnBrk="1" latinLnBrk="0" hangingPunct="1">
+    <a:lvl2pPr marL="457200" algn="l" defTabSz="914400" rtl="0" eaLnBrk="1" latinLnBrk="0" hangingPunct="1">
       <a:defRPr sz="1200" kern="1200">
         <a:solidFill>
           <a:schemeClr val="tx1"/>
@@ -399,7 +193,7 @@
         <a:cs typeface="+mn-cs"/>
       </a:defRPr>
     </a:lvl2pPr>
-    <a:lvl3pPr marL="914400" algn="l" defTabSz="457200" rtl="0" eaLnBrk="1" latinLnBrk="0" hangingPunct="1">
+    <a:lvl3pPr marL="914400" algn="l" defTabSz="914400" rtl="0" eaLnBrk="1" latinLnBrk="0" hangingPunct="1">
       <a:defRPr sz="1200" kern="1200">
         <a:solidFill>
           <a:schemeClr val="tx1"/>
@@ -409,7 +203,7 @@
         <a:cs typeface="+mn-cs"/>
       </a:defRPr>
     </a:lvl3pPr>
-    <a:lvl4pPr marL="1371600" algn="l" defTabSz="457200" rtl="0" eaLnBrk="1" latinLnBrk="0" hangingPunct="1">
+    <a:lvl4pPr marL="1371600" algn="l" defTabSz="914400" rtl="0" eaLnBrk="1" latinLnBrk="0" hangingPunct="1">
       <a:defRPr sz="1200" kern="1200">
         <a:solidFill>
           <a:schemeClr val="tx1"/>
@@ -419,7 +213,7 @@
         <a:cs typeface="+mn-cs"/>
       </a:defRPr>
     </a:lvl4pPr>
-    <a:lvl5pPr marL="1828800" algn="l" defTabSz="457200" rtl="0" eaLnBrk="1" latinLnBrk="0" hangingPunct="1">
+    <a:lvl5pPr marL="1828800" algn="l" defTabSz="914400" rtl="0" eaLnBrk="1" latinLnBrk="0" hangingPunct="1">
       <a:defRPr sz="1200" kern="1200">
         <a:solidFill>
           <a:schemeClr val="tx1"/>
@@ -429,7 +223,7 @@
         <a:cs typeface="+mn-cs"/>
       </a:defRPr>
     </a:lvl5pPr>
-    <a:lvl6pPr marL="2286000" algn="l" defTabSz="457200" rtl="0" eaLnBrk="1" latinLnBrk="0" hangingPunct="1">
+    <a:lvl6pPr marL="2286000" algn="l" defTabSz="914400" rtl="0" eaLnBrk="1" latinLnBrk="0" hangingPunct="1">
       <a:defRPr sz="1200" kern="1200">
         <a:solidFill>
           <a:schemeClr val="tx1"/>
@@ -439,7 +233,7 @@
         <a:cs typeface="+mn-cs"/>
       </a:defRPr>
     </a:lvl6pPr>
-    <a:lvl7pPr marL="2743200" algn="l" defTabSz="457200" rtl="0" eaLnBrk="1" latinLnBrk="0" hangingPunct="1">
+    <a:lvl7pPr marL="2743200" algn="l" defTabSz="914400" rtl="0" eaLnBrk="1" latinLnBrk="0" hangingPunct="1">
       <a:defRPr sz="1200" kern="1200">
         <a:solidFill>
           <a:schemeClr val="tx1"/>
@@ -449,7 +243,7 @@
         <a:cs typeface="+mn-cs"/>
       </a:defRPr>
     </a:lvl7pPr>
-    <a:lvl8pPr marL="3200400" algn="l" defTabSz="457200" rtl="0" eaLnBrk="1" latinLnBrk="0" hangingPunct="1">
+    <a:lvl8pPr marL="3200400" algn="l" defTabSz="914400" rtl="0" eaLnBrk="1" latinLnBrk="0" hangingPunct="1">
       <a:defRPr sz="1200" kern="1200">
         <a:solidFill>
           <a:schemeClr val="tx1"/>
@@ -459,7 +253,7 @@
         <a:cs typeface="+mn-cs"/>
       </a:defRPr>
     </a:lvl8pPr>
-    <a:lvl9pPr marL="3657600" algn="l" defTabSz="457200" rtl="0" eaLnBrk="1" latinLnBrk="0" hangingPunct="1">
+    <a:lvl9pPr marL="3657600" algn="l" defTabSz="914400" rtl="0" eaLnBrk="1" latinLnBrk="0" hangingPunct="1">
       <a:defRPr sz="1200" kern="1200">
         <a:solidFill>
           <a:schemeClr val="tx1"/>
@@ -474,7 +268,7 @@
 </file>
 
 <file path=ppt/notesSlides/notesSlide1.xml><?xml version="1.0" encoding="utf-8"?>
-<p:notes xmlns:a="http://schemas.openxmlformats.org/drawingml/2006/main" xmlns:p="http://schemas.openxmlformats.org/presentationml/2006/main" xmlns:r="http://schemas.openxmlformats.org/officeDocument/2006/relationships">
+<p:notes xmlns:a="http://schemas.openxmlformats.org/drawingml/2006/main" xmlns:r="http://schemas.openxmlformats.org/officeDocument/2006/relationships" xmlns:p="http://schemas.openxmlformats.org/presentationml/2006/main">
   <p:cSld>
     <p:spTree>
       <p:nvGrpSpPr>
@@ -494,7 +288,7 @@
         <p:nvSpPr>
           <p:cNvPr id="2" name="Slide Image Placeholder 1"/>
           <p:cNvSpPr>
-            <a:spLocks noGrp="1"/>
+            <a:spLocks noGrp="1" noRot="1" noChangeAspect="1"/>
           </p:cNvSpPr>
           <p:nvPr>
             <p:ph type="sldImg" idx="2"/>
@@ -509,7 +303,7 @@
             <a:spLocks noGrp="1"/>
           </p:cNvSpPr>
           <p:nvPr>
-            <p:ph type="body" idx="3" sz="quarter"/>
+            <p:ph type="body" sz="quarter" idx="3"/>
           </p:nvPr>
         </p:nvSpPr>
         <p:spPr/>
@@ -530,7 +324,7 @@
             <a:spLocks noGrp="1"/>
           </p:cNvSpPr>
           <p:nvPr>
-            <p:ph type="sldNum" idx="5" sz="quarter"/>
+            <p:ph type="sldNum" sz="quarter" idx="5"/>
           </p:nvPr>
         </p:nvSpPr>
         <p:spPr/>
@@ -544,7 +338,7 @@
 </file>
 
 <file path=ppt/notesSlides/notesSlide10.xml><?xml version="1.0" encoding="utf-8"?>
-<p:notes xmlns:a="http://schemas.openxmlformats.org/drawingml/2006/main" xmlns:p="http://schemas.openxmlformats.org/presentationml/2006/main" xmlns:r="http://schemas.openxmlformats.org/officeDocument/2006/relationships">
+<p:notes xmlns:a="http://schemas.openxmlformats.org/drawingml/2006/main" xmlns:r="http://schemas.openxmlformats.org/officeDocument/2006/relationships" xmlns:p="http://schemas.openxmlformats.org/presentationml/2006/main">
   <p:cSld>
     <p:spTree>
       <p:nvGrpSpPr>
@@ -564,7 +358,7 @@
         <p:nvSpPr>
           <p:cNvPr id="2" name="Slide Image Placeholder 1"/>
           <p:cNvSpPr>
-            <a:spLocks noGrp="1"/>
+            <a:spLocks noGrp="1" noRot="1" noChangeAspect="1"/>
           </p:cNvSpPr>
           <p:nvPr>
             <p:ph type="sldImg" idx="2"/>
@@ -579,7 +373,7 @@
             <a:spLocks noGrp="1"/>
           </p:cNvSpPr>
           <p:nvPr>
-            <p:ph type="body" idx="3" sz="quarter"/>
+            <p:ph type="body" sz="quarter" idx="3"/>
           </p:nvPr>
         </p:nvSpPr>
         <p:spPr/>
@@ -600,7 +394,7 @@
             <a:spLocks noGrp="1"/>
           </p:cNvSpPr>
           <p:nvPr>
-            <p:ph type="sldNum" idx="5" sz="quarter"/>
+            <p:ph type="sldNum" sz="quarter" idx="5"/>
           </p:nvPr>
         </p:nvSpPr>
         <p:spPr/>
@@ -614,7 +408,7 @@
 </file>
 
 <file path=ppt/notesSlides/notesSlide11.xml><?xml version="1.0" encoding="utf-8"?>
-<p:notes xmlns:a="http://schemas.openxmlformats.org/drawingml/2006/main" xmlns:p="http://schemas.openxmlformats.org/presentationml/2006/main" xmlns:r="http://schemas.openxmlformats.org/officeDocument/2006/relationships">
+<p:notes xmlns:a="http://schemas.openxmlformats.org/drawingml/2006/main" xmlns:r="http://schemas.openxmlformats.org/officeDocument/2006/relationships" xmlns:p="http://schemas.openxmlformats.org/presentationml/2006/main">
   <p:cSld>
     <p:spTree>
       <p:nvGrpSpPr>
@@ -634,7 +428,7 @@
         <p:nvSpPr>
           <p:cNvPr id="2" name="Slide Image Placeholder 1"/>
           <p:cNvSpPr>
-            <a:spLocks noGrp="1"/>
+            <a:spLocks noGrp="1" noRot="1" noChangeAspect="1"/>
           </p:cNvSpPr>
           <p:nvPr>
             <p:ph type="sldImg" idx="2"/>
@@ -649,7 +443,7 @@
             <a:spLocks noGrp="1"/>
           </p:cNvSpPr>
           <p:nvPr>
-            <p:ph type="body" idx="3" sz="quarter"/>
+            <p:ph type="body" sz="quarter" idx="3"/>
           </p:nvPr>
         </p:nvSpPr>
         <p:spPr/>
@@ -670,7 +464,7 @@
             <a:spLocks noGrp="1"/>
           </p:cNvSpPr>
           <p:nvPr>
-            <p:ph type="sldNum" idx="5" sz="quarter"/>
+            <p:ph type="sldNum" sz="quarter" idx="5"/>
           </p:nvPr>
         </p:nvSpPr>
         <p:spPr/>
@@ -684,7 +478,7 @@
 </file>
 
 <file path=ppt/notesSlides/notesSlide12.xml><?xml version="1.0" encoding="utf-8"?>
-<p:notes xmlns:a="http://schemas.openxmlformats.org/drawingml/2006/main" xmlns:p="http://schemas.openxmlformats.org/presentationml/2006/main" xmlns:r="http://schemas.openxmlformats.org/officeDocument/2006/relationships">
+<p:notes xmlns:a="http://schemas.openxmlformats.org/drawingml/2006/main" xmlns:r="http://schemas.openxmlformats.org/officeDocument/2006/relationships" xmlns:p="http://schemas.openxmlformats.org/presentationml/2006/main">
   <p:cSld>
     <p:spTree>
       <p:nvGrpSpPr>
@@ -704,7 +498,7 @@
         <p:nvSpPr>
           <p:cNvPr id="2" name="Slide Image Placeholder 1"/>
           <p:cNvSpPr>
-            <a:spLocks noGrp="1"/>
+            <a:spLocks noGrp="1" noRot="1" noChangeAspect="1"/>
           </p:cNvSpPr>
           <p:nvPr>
             <p:ph type="sldImg" idx="2"/>
@@ -719,7 +513,7 @@
             <a:spLocks noGrp="1"/>
           </p:cNvSpPr>
           <p:nvPr>
-            <p:ph type="body" idx="3" sz="quarter"/>
+            <p:ph type="body" sz="quarter" idx="3"/>
           </p:nvPr>
         </p:nvSpPr>
         <p:spPr/>
@@ -740,7 +534,7 @@
             <a:spLocks noGrp="1"/>
           </p:cNvSpPr>
           <p:nvPr>
-            <p:ph type="sldNum" idx="5" sz="quarter"/>
+            <p:ph type="sldNum" sz="quarter" idx="5"/>
           </p:nvPr>
         </p:nvSpPr>
         <p:spPr/>
@@ -754,7 +548,7 @@
 </file>
 
 <file path=ppt/notesSlides/notesSlide13.xml><?xml version="1.0" encoding="utf-8"?>
-<p:notes xmlns:a="http://schemas.openxmlformats.org/drawingml/2006/main" xmlns:p="http://schemas.openxmlformats.org/presentationml/2006/main" xmlns:r="http://schemas.openxmlformats.org/officeDocument/2006/relationships">
+<p:notes xmlns:a="http://schemas.openxmlformats.org/drawingml/2006/main" xmlns:r="http://schemas.openxmlformats.org/officeDocument/2006/relationships" xmlns:p="http://schemas.openxmlformats.org/presentationml/2006/main">
   <p:cSld>
     <p:spTree>
       <p:nvGrpSpPr>
@@ -774,7 +568,7 @@
         <p:nvSpPr>
           <p:cNvPr id="2" name="Slide Image Placeholder 1"/>
           <p:cNvSpPr>
-            <a:spLocks noGrp="1"/>
+            <a:spLocks noGrp="1" noRot="1" noChangeAspect="1"/>
           </p:cNvSpPr>
           <p:nvPr>
             <p:ph type="sldImg" idx="2"/>
@@ -789,7 +583,7 @@
             <a:spLocks noGrp="1"/>
           </p:cNvSpPr>
           <p:nvPr>
-            <p:ph type="body" idx="3" sz="quarter"/>
+            <p:ph type="body" sz="quarter" idx="3"/>
           </p:nvPr>
         </p:nvSpPr>
         <p:spPr/>
@@ -810,7 +604,7 @@
             <a:spLocks noGrp="1"/>
           </p:cNvSpPr>
           <p:nvPr>
-            <p:ph type="sldNum" idx="5" sz="quarter"/>
+            <p:ph type="sldNum" sz="quarter" idx="5"/>
           </p:nvPr>
         </p:nvSpPr>
         <p:spPr/>
@@ -824,7 +618,7 @@
 </file>
 
 <file path=ppt/notesSlides/notesSlide14.xml><?xml version="1.0" encoding="utf-8"?>
-<p:notes xmlns:a="http://schemas.openxmlformats.org/drawingml/2006/main" xmlns:p="http://schemas.openxmlformats.org/presentationml/2006/main" xmlns:r="http://schemas.openxmlformats.org/officeDocument/2006/relationships">
+<p:notes xmlns:a="http://schemas.openxmlformats.org/drawingml/2006/main" xmlns:r="http://schemas.openxmlformats.org/officeDocument/2006/relationships" xmlns:p="http://schemas.openxmlformats.org/presentationml/2006/main">
   <p:cSld>
     <p:spTree>
       <p:nvGrpSpPr>
@@ -844,7 +638,7 @@
         <p:nvSpPr>
           <p:cNvPr id="2" name="Slide Image Placeholder 1"/>
           <p:cNvSpPr>
-            <a:spLocks noGrp="1"/>
+            <a:spLocks noGrp="1" noRot="1" noChangeAspect="1"/>
           </p:cNvSpPr>
           <p:nvPr>
             <p:ph type="sldImg" idx="2"/>
@@ -859,7 +653,7 @@
             <a:spLocks noGrp="1"/>
           </p:cNvSpPr>
           <p:nvPr>
-            <p:ph type="body" idx="3" sz="quarter"/>
+            <p:ph type="body" sz="quarter" idx="3"/>
           </p:nvPr>
         </p:nvSpPr>
         <p:spPr/>
@@ -880,7 +674,7 @@
             <a:spLocks noGrp="1"/>
           </p:cNvSpPr>
           <p:nvPr>
-            <p:ph type="sldNum" idx="5" sz="quarter"/>
+            <p:ph type="sldNum" sz="quarter" idx="5"/>
           </p:nvPr>
         </p:nvSpPr>
         <p:spPr/>
@@ -894,7 +688,7 @@
 </file>
 
 <file path=ppt/notesSlides/notesSlide15.xml><?xml version="1.0" encoding="utf-8"?>
-<p:notes xmlns:a="http://schemas.openxmlformats.org/drawingml/2006/main" xmlns:p="http://schemas.openxmlformats.org/presentationml/2006/main" xmlns:r="http://schemas.openxmlformats.org/officeDocument/2006/relationships">
+<p:notes xmlns:a="http://schemas.openxmlformats.org/drawingml/2006/main" xmlns:r="http://schemas.openxmlformats.org/officeDocument/2006/relationships" xmlns:p="http://schemas.openxmlformats.org/presentationml/2006/main">
   <p:cSld>
     <p:spTree>
       <p:nvGrpSpPr>
@@ -914,7 +708,7 @@
         <p:nvSpPr>
           <p:cNvPr id="2" name="Slide Image Placeholder 1"/>
           <p:cNvSpPr>
-            <a:spLocks noGrp="1"/>
+            <a:spLocks noGrp="1" noRot="1" noChangeAspect="1"/>
           </p:cNvSpPr>
           <p:nvPr>
             <p:ph type="sldImg" idx="2"/>
@@ -929,7 +723,7 @@
             <a:spLocks noGrp="1"/>
           </p:cNvSpPr>
           <p:nvPr>
-            <p:ph type="body" idx="3" sz="quarter"/>
+            <p:ph type="body" sz="quarter" idx="3"/>
           </p:nvPr>
         </p:nvSpPr>
         <p:spPr/>
@@ -950,7 +744,7 @@
             <a:spLocks noGrp="1"/>
           </p:cNvSpPr>
           <p:nvPr>
-            <p:ph type="sldNum" idx="5" sz="quarter"/>
+            <p:ph type="sldNum" sz="quarter" idx="5"/>
           </p:nvPr>
         </p:nvSpPr>
         <p:spPr/>
@@ -964,7 +758,7 @@
 </file>
 
 <file path=ppt/notesSlides/notesSlide16.xml><?xml version="1.0" encoding="utf-8"?>
-<p:notes xmlns:a="http://schemas.openxmlformats.org/drawingml/2006/main" xmlns:p="http://schemas.openxmlformats.org/presentationml/2006/main" xmlns:r="http://schemas.openxmlformats.org/officeDocument/2006/relationships">
+<p:notes xmlns:a="http://schemas.openxmlformats.org/drawingml/2006/main" xmlns:r="http://schemas.openxmlformats.org/officeDocument/2006/relationships" xmlns:p="http://schemas.openxmlformats.org/presentationml/2006/main">
   <p:cSld>
     <p:spTree>
       <p:nvGrpSpPr>
@@ -984,7 +778,7 @@
         <p:nvSpPr>
           <p:cNvPr id="2" name="Slide Image Placeholder 1"/>
           <p:cNvSpPr>
-            <a:spLocks noGrp="1"/>
+            <a:spLocks noGrp="1" noRot="1" noChangeAspect="1"/>
           </p:cNvSpPr>
           <p:nvPr>
             <p:ph type="sldImg" idx="2"/>
@@ -999,7 +793,7 @@
             <a:spLocks noGrp="1"/>
           </p:cNvSpPr>
           <p:nvPr>
-            <p:ph type="body" idx="3" sz="quarter"/>
+            <p:ph type="body" sz="quarter" idx="3"/>
           </p:nvPr>
         </p:nvSpPr>
         <p:spPr/>
@@ -1020,7 +814,7 @@
             <a:spLocks noGrp="1"/>
           </p:cNvSpPr>
           <p:nvPr>
-            <p:ph type="sldNum" idx="5" sz="quarter"/>
+            <p:ph type="sldNum" sz="quarter" idx="5"/>
           </p:nvPr>
         </p:nvSpPr>
         <p:spPr/>
@@ -1034,7 +828,7 @@
 </file>
 
 <file path=ppt/notesSlides/notesSlide17.xml><?xml version="1.0" encoding="utf-8"?>
-<p:notes xmlns:a="http://schemas.openxmlformats.org/drawingml/2006/main" xmlns:p="http://schemas.openxmlformats.org/presentationml/2006/main" xmlns:r="http://schemas.openxmlformats.org/officeDocument/2006/relationships">
+<p:notes xmlns:a="http://schemas.openxmlformats.org/drawingml/2006/main" xmlns:r="http://schemas.openxmlformats.org/officeDocument/2006/relationships" xmlns:p="http://schemas.openxmlformats.org/presentationml/2006/main">
   <p:cSld>
     <p:spTree>
       <p:nvGrpSpPr>
@@ -1054,7 +848,7 @@
         <p:nvSpPr>
           <p:cNvPr id="2" name="Slide Image Placeholder 1"/>
           <p:cNvSpPr>
-            <a:spLocks noGrp="1"/>
+            <a:spLocks noGrp="1" noRot="1" noChangeAspect="1"/>
           </p:cNvSpPr>
           <p:nvPr>
             <p:ph type="sldImg" idx="2"/>
@@ -1069,7 +863,7 @@
             <a:spLocks noGrp="1"/>
           </p:cNvSpPr>
           <p:nvPr>
-            <p:ph type="body" idx="3" sz="quarter"/>
+            <p:ph type="body" sz="quarter" idx="3"/>
           </p:nvPr>
         </p:nvSpPr>
         <p:spPr/>
@@ -1090,7 +884,7 @@
             <a:spLocks noGrp="1"/>
           </p:cNvSpPr>
           <p:nvPr>
-            <p:ph type="sldNum" idx="5" sz="quarter"/>
+            <p:ph type="sldNum" sz="quarter" idx="5"/>
           </p:nvPr>
         </p:nvSpPr>
         <p:spPr/>
@@ -1104,7 +898,7 @@
 </file>
 
 <file path=ppt/notesSlides/notesSlide2.xml><?xml version="1.0" encoding="utf-8"?>
-<p:notes xmlns:a="http://schemas.openxmlformats.org/drawingml/2006/main" xmlns:p="http://schemas.openxmlformats.org/presentationml/2006/main" xmlns:r="http://schemas.openxmlformats.org/officeDocument/2006/relationships">
+<p:notes xmlns:a="http://schemas.openxmlformats.org/drawingml/2006/main" xmlns:r="http://schemas.openxmlformats.org/officeDocument/2006/relationships" xmlns:p="http://schemas.openxmlformats.org/presentationml/2006/main">
   <p:cSld>
     <p:spTree>
       <p:nvGrpSpPr>
@@ -1124,7 +918,7 @@
         <p:nvSpPr>
           <p:cNvPr id="2" name="Slide Image Placeholder 1"/>
           <p:cNvSpPr>
-            <a:spLocks noGrp="1"/>
+            <a:spLocks noGrp="1" noRot="1" noChangeAspect="1"/>
           </p:cNvSpPr>
           <p:nvPr>
             <p:ph type="sldImg" idx="2"/>
@@ -1139,7 +933,7 @@
             <a:spLocks noGrp="1"/>
           </p:cNvSpPr>
           <p:nvPr>
-            <p:ph type="body" idx="3" sz="quarter"/>
+            <p:ph type="body" sz="quarter" idx="3"/>
           </p:nvPr>
         </p:nvSpPr>
         <p:spPr/>
@@ -1160,7 +954,7 @@
             <a:spLocks noGrp="1"/>
           </p:cNvSpPr>
           <p:nvPr>
-            <p:ph type="sldNum" idx="5" sz="quarter"/>
+            <p:ph type="sldNum" sz="quarter" idx="5"/>
           </p:nvPr>
         </p:nvSpPr>
         <p:spPr/>
@@ -1174,7 +968,7 @@
 </file>
 
 <file path=ppt/notesSlides/notesSlide3.xml><?xml version="1.0" encoding="utf-8"?>
-<p:notes xmlns:a="http://schemas.openxmlformats.org/drawingml/2006/main" xmlns:p="http://schemas.openxmlformats.org/presentationml/2006/main" xmlns:r="http://schemas.openxmlformats.org/officeDocument/2006/relationships">
+<p:notes xmlns:a="http://schemas.openxmlformats.org/drawingml/2006/main" xmlns:r="http://schemas.openxmlformats.org/officeDocument/2006/relationships" xmlns:p="http://schemas.openxmlformats.org/presentationml/2006/main">
   <p:cSld>
     <p:spTree>
       <p:nvGrpSpPr>
@@ -1194,7 +988,7 @@
         <p:nvSpPr>
           <p:cNvPr id="2" name="Slide Image Placeholder 1"/>
           <p:cNvSpPr>
-            <a:spLocks noGrp="1"/>
+            <a:spLocks noGrp="1" noRot="1" noChangeAspect="1"/>
           </p:cNvSpPr>
           <p:nvPr>
             <p:ph type="sldImg" idx="2"/>
@@ -1209,7 +1003,7 @@
             <a:spLocks noGrp="1"/>
           </p:cNvSpPr>
           <p:nvPr>
-            <p:ph type="body" idx="3" sz="quarter"/>
+            <p:ph type="body" sz="quarter" idx="3"/>
           </p:nvPr>
         </p:nvSpPr>
         <p:spPr/>
@@ -1230,7 +1024,7 @@
             <a:spLocks noGrp="1"/>
           </p:cNvSpPr>
           <p:nvPr>
-            <p:ph type="sldNum" idx="5" sz="quarter"/>
+            <p:ph type="sldNum" sz="quarter" idx="5"/>
           </p:nvPr>
         </p:nvSpPr>
         <p:spPr/>
@@ -1244,7 +1038,7 @@
 </file>
 
 <file path=ppt/notesSlides/notesSlide4.xml><?xml version="1.0" encoding="utf-8"?>
-<p:notes xmlns:a="http://schemas.openxmlformats.org/drawingml/2006/main" xmlns:p="http://schemas.openxmlformats.org/presentationml/2006/main" xmlns:r="http://schemas.openxmlformats.org/officeDocument/2006/relationships">
+<p:notes xmlns:a="http://schemas.openxmlformats.org/drawingml/2006/main" xmlns:r="http://schemas.openxmlformats.org/officeDocument/2006/relationships" xmlns:p="http://schemas.openxmlformats.org/presentationml/2006/main">
   <p:cSld>
     <p:spTree>
       <p:nvGrpSpPr>
@@ -1264,7 +1058,7 @@
         <p:nvSpPr>
           <p:cNvPr id="2" name="Slide Image Placeholder 1"/>
           <p:cNvSpPr>
-            <a:spLocks noGrp="1"/>
+            <a:spLocks noGrp="1" noRot="1" noChangeAspect="1"/>
           </p:cNvSpPr>
           <p:nvPr>
             <p:ph type="sldImg" idx="2"/>
@@ -1279,7 +1073,7 @@
             <a:spLocks noGrp="1"/>
           </p:cNvSpPr>
           <p:nvPr>
-            <p:ph type="body" idx="3" sz="quarter"/>
+            <p:ph type="body" sz="quarter" idx="3"/>
           </p:nvPr>
         </p:nvSpPr>
         <p:spPr/>
@@ -1300,7 +1094,7 @@
             <a:spLocks noGrp="1"/>
           </p:cNvSpPr>
           <p:nvPr>
-            <p:ph type="sldNum" idx="5" sz="quarter"/>
+            <p:ph type="sldNum" sz="quarter" idx="5"/>
           </p:nvPr>
         </p:nvSpPr>
         <p:spPr/>
@@ -1314,7 +1108,7 @@
 </file>
 
 <file path=ppt/notesSlides/notesSlide5.xml><?xml version="1.0" encoding="utf-8"?>
-<p:notes xmlns:a="http://schemas.openxmlformats.org/drawingml/2006/main" xmlns:p="http://schemas.openxmlformats.org/presentationml/2006/main" xmlns:r="http://schemas.openxmlformats.org/officeDocument/2006/relationships">
+<p:notes xmlns:a="http://schemas.openxmlformats.org/drawingml/2006/main" xmlns:r="http://schemas.openxmlformats.org/officeDocument/2006/relationships" xmlns:p="http://schemas.openxmlformats.org/presentationml/2006/main">
   <p:cSld>
     <p:spTree>
       <p:nvGrpSpPr>
@@ -1334,7 +1128,7 @@
         <p:nvSpPr>
           <p:cNvPr id="2" name="Slide Image Placeholder 1"/>
           <p:cNvSpPr>
-            <a:spLocks noGrp="1"/>
+            <a:spLocks noGrp="1" noRot="1" noChangeAspect="1"/>
           </p:cNvSpPr>
           <p:nvPr>
             <p:ph type="sldImg" idx="2"/>
@@ -1349,7 +1143,7 @@
             <a:spLocks noGrp="1"/>
           </p:cNvSpPr>
           <p:nvPr>
-            <p:ph type="body" idx="3" sz="quarter"/>
+            <p:ph type="body" sz="quarter" idx="3"/>
           </p:nvPr>
         </p:nvSpPr>
         <p:spPr/>
@@ -1370,7 +1164,7 @@
             <a:spLocks noGrp="1"/>
           </p:cNvSpPr>
           <p:nvPr>
-            <p:ph type="sldNum" idx="5" sz="quarter"/>
+            <p:ph type="sldNum" sz="quarter" idx="5"/>
           </p:nvPr>
         </p:nvSpPr>
         <p:spPr/>
@@ -1384,7 +1178,7 @@
 </file>
 
 <file path=ppt/notesSlides/notesSlide6.xml><?xml version="1.0" encoding="utf-8"?>
-<p:notes xmlns:a="http://schemas.openxmlformats.org/drawingml/2006/main" xmlns:p="http://schemas.openxmlformats.org/presentationml/2006/main" xmlns:r="http://schemas.openxmlformats.org/officeDocument/2006/relationships">
+<p:notes xmlns:a="http://schemas.openxmlformats.org/drawingml/2006/main" xmlns:r="http://schemas.openxmlformats.org/officeDocument/2006/relationships" xmlns:p="http://schemas.openxmlformats.org/presentationml/2006/main">
   <p:cSld>
     <p:spTree>
       <p:nvGrpSpPr>
@@ -1404,7 +1198,7 @@
         <p:nvSpPr>
           <p:cNvPr id="2" name="Slide Image Placeholder 1"/>
           <p:cNvSpPr>
-            <a:spLocks noGrp="1"/>
+            <a:spLocks noGrp="1" noRot="1" noChangeAspect="1"/>
           </p:cNvSpPr>
           <p:nvPr>
             <p:ph type="sldImg" idx="2"/>
@@ -1419,7 +1213,7 @@
             <a:spLocks noGrp="1"/>
           </p:cNvSpPr>
           <p:nvPr>
-            <p:ph type="body" idx="3" sz="quarter"/>
+            <p:ph type="body" sz="quarter" idx="3"/>
           </p:nvPr>
         </p:nvSpPr>
         <p:spPr/>
@@ -1440,7 +1234,7 @@
             <a:spLocks noGrp="1"/>
           </p:cNvSpPr>
           <p:nvPr>
-            <p:ph type="sldNum" idx="5" sz="quarter"/>
+            <p:ph type="sldNum" sz="quarter" idx="5"/>
           </p:nvPr>
         </p:nvSpPr>
         <p:spPr/>
@@ -1454,7 +1248,7 @@
 </file>
 
 <file path=ppt/notesSlides/notesSlide7.xml><?xml version="1.0" encoding="utf-8"?>
-<p:notes xmlns:a="http://schemas.openxmlformats.org/drawingml/2006/main" xmlns:p="http://schemas.openxmlformats.org/presentationml/2006/main" xmlns:r="http://schemas.openxmlformats.org/officeDocument/2006/relationships">
+<p:notes xmlns:a="http://schemas.openxmlformats.org/drawingml/2006/main" xmlns:r="http://schemas.openxmlformats.org/officeDocument/2006/relationships" xmlns:p="http://schemas.openxmlformats.org/presentationml/2006/main">
   <p:cSld>
     <p:spTree>
       <p:nvGrpSpPr>
@@ -1474,7 +1268,7 @@
         <p:nvSpPr>
           <p:cNvPr id="2" name="Slide Image Placeholder 1"/>
           <p:cNvSpPr>
-            <a:spLocks noGrp="1"/>
+            <a:spLocks noGrp="1" noRot="1" noChangeAspect="1"/>
           </p:cNvSpPr>
           <p:nvPr>
             <p:ph type="sldImg" idx="2"/>
@@ -1489,7 +1283,7 @@
             <a:spLocks noGrp="1"/>
           </p:cNvSpPr>
           <p:nvPr>
-            <p:ph type="body" idx="3" sz="quarter"/>
+            <p:ph type="body" sz="quarter" idx="3"/>
           </p:nvPr>
         </p:nvSpPr>
         <p:spPr/>
@@ -1510,7 +1304,7 @@
             <a:spLocks noGrp="1"/>
           </p:cNvSpPr>
           <p:nvPr>
-            <p:ph type="sldNum" idx="5" sz="quarter"/>
+            <p:ph type="sldNum" sz="quarter" idx="5"/>
           </p:nvPr>
         </p:nvSpPr>
         <p:spPr/>
@@ -1524,7 +1318,7 @@
 </file>
 
 <file path=ppt/notesSlides/notesSlide8.xml><?xml version="1.0" encoding="utf-8"?>
-<p:notes xmlns:a="http://schemas.openxmlformats.org/drawingml/2006/main" xmlns:p="http://schemas.openxmlformats.org/presentationml/2006/main" xmlns:r="http://schemas.openxmlformats.org/officeDocument/2006/relationships">
+<p:notes xmlns:a="http://schemas.openxmlformats.org/drawingml/2006/main" xmlns:r="http://schemas.openxmlformats.org/officeDocument/2006/relationships" xmlns:p="http://schemas.openxmlformats.org/presentationml/2006/main">
   <p:cSld>
     <p:spTree>
       <p:nvGrpSpPr>
@@ -1544,7 +1338,7 @@
         <p:nvSpPr>
           <p:cNvPr id="2" name="Slide Image Placeholder 1"/>
           <p:cNvSpPr>
-            <a:spLocks noGrp="1"/>
+            <a:spLocks noGrp="1" noRot="1" noChangeAspect="1"/>
           </p:cNvSpPr>
           <p:nvPr>
             <p:ph type="sldImg" idx="2"/>
@@ -1559,7 +1353,7 @@
             <a:spLocks noGrp="1"/>
           </p:cNvSpPr>
           <p:nvPr>
-            <p:ph type="body" idx="3" sz="quarter"/>
+            <p:ph type="body" sz="quarter" idx="3"/>
           </p:nvPr>
         </p:nvSpPr>
         <p:spPr/>
@@ -1580,7 +1374,7 @@
             <a:spLocks noGrp="1"/>
           </p:cNvSpPr>
           <p:nvPr>
-            <p:ph type="sldNum" idx="5" sz="quarter"/>
+            <p:ph type="sldNum" sz="quarter" idx="5"/>
           </p:nvPr>
         </p:nvSpPr>
         <p:spPr/>
@@ -1594,7 +1388,7 @@
 </file>
 
 <file path=ppt/notesSlides/notesSlide9.xml><?xml version="1.0" encoding="utf-8"?>
-<p:notes xmlns:a="http://schemas.openxmlformats.org/drawingml/2006/main" xmlns:p="http://schemas.openxmlformats.org/presentationml/2006/main" xmlns:r="http://schemas.openxmlformats.org/officeDocument/2006/relationships">
+<p:notes xmlns:a="http://schemas.openxmlformats.org/drawingml/2006/main" xmlns:r="http://schemas.openxmlformats.org/officeDocument/2006/relationships" xmlns:p="http://schemas.openxmlformats.org/presentationml/2006/main">
   <p:cSld>
     <p:spTree>
       <p:nvGrpSpPr>
@@ -1614,7 +1408,7 @@
         <p:nvSpPr>
           <p:cNvPr id="2" name="Slide Image Placeholder 1"/>
           <p:cNvSpPr>
-            <a:spLocks noGrp="1"/>
+            <a:spLocks noGrp="1" noRot="1" noChangeAspect="1"/>
           </p:cNvSpPr>
           <p:nvPr>
             <p:ph type="sldImg" idx="2"/>
@@ -1629,7 +1423,7 @@
             <a:spLocks noGrp="1"/>
           </p:cNvSpPr>
           <p:nvPr>
-            <p:ph type="body" idx="3" sz="quarter"/>
+            <p:ph type="body" sz="quarter" idx="3"/>
           </p:nvPr>
         </p:nvSpPr>
         <p:spPr/>
@@ -1650,7 +1444,7 @@
             <a:spLocks noGrp="1"/>
           </p:cNvSpPr>
           <p:nvPr>
-            <p:ph type="sldNum" idx="5" sz="quarter"/>
+            <p:ph type="sldNum" sz="quarter" idx="5"/>
           </p:nvPr>
         </p:nvSpPr>
         <p:spPr/>
@@ -1701,10 +1495,9 @@
           <a:lstStyle/>
           <a:p>
             <a:r>
-              <a:rPr lang="en-US" smtClean="0"/>
+              <a:rPr lang="en-US"/>
               <a:t>Click to edit Master title style</a:t>
             </a:r>
-            <a:endParaRPr lang="en-US"/>
           </a:p>
         </p:txBody>
       </p:sp>
@@ -1820,10 +1613,9 @@
           </a:lstStyle>
           <a:p>
             <a:r>
-              <a:rPr lang="en-US" smtClean="0"/>
+              <a:rPr lang="en-US"/>
               <a:t>Click to edit Master subtitle style</a:t>
             </a:r>
-            <a:endParaRPr lang="en-US"/>
           </a:p>
         </p:txBody>
       </p:sp>
@@ -1844,7 +1636,7 @@
           <a:p>
             <a:fld id="{5BCAD085-E8A6-8845-BD4E-CB4CCA059FC4}" type="datetimeFigureOut">
               <a:rPr lang="en-US" smtClean="0"/>
-              <a:t>1/27/13</a:t>
+              <a:t>7/14/2026</a:t>
             </a:fld>
             <a:endParaRPr lang="en-US"/>
           </a:p>
@@ -1938,10 +1730,9 @@
           <a:lstStyle/>
           <a:p>
             <a:r>
-              <a:rPr lang="en-US" smtClean="0"/>
+              <a:rPr lang="en-US"/>
               <a:t>Click to edit Master title style</a:t>
             </a:r>
-            <a:endParaRPr lang="en-US"/>
           </a:p>
         </p:txBody>
       </p:sp>
@@ -1962,38 +1753,37 @@
           <a:p>
             <a:pPr lvl="0"/>
             <a:r>
-              <a:rPr lang="en-US" smtClean="0"/>
+              <a:rPr lang="en-US"/>
               <a:t>Click to edit Master text styles</a:t>
             </a:r>
           </a:p>
           <a:p>
             <a:pPr lvl="1"/>
             <a:r>
-              <a:rPr lang="en-US" smtClean="0"/>
+              <a:rPr lang="en-US"/>
               <a:t>Second level</a:t>
             </a:r>
           </a:p>
           <a:p>
             <a:pPr lvl="2"/>
             <a:r>
-              <a:rPr lang="en-US" smtClean="0"/>
+              <a:rPr lang="en-US"/>
               <a:t>Third level</a:t>
             </a:r>
           </a:p>
           <a:p>
             <a:pPr lvl="3"/>
             <a:r>
-              <a:rPr lang="en-US" smtClean="0"/>
+              <a:rPr lang="en-US"/>
               <a:t>Fourth level</a:t>
             </a:r>
           </a:p>
           <a:p>
             <a:pPr lvl="4"/>
             <a:r>
-              <a:rPr lang="en-US" smtClean="0"/>
+              <a:rPr lang="en-US"/>
               <a:t>Fifth level</a:t>
             </a:r>
-            <a:endParaRPr lang="en-US"/>
           </a:p>
         </p:txBody>
       </p:sp>
@@ -2014,7 +1804,7 @@
           <a:p>
             <a:fld id="{5BCAD085-E8A6-8845-BD4E-CB4CCA059FC4}" type="datetimeFigureOut">
               <a:rPr lang="en-US" smtClean="0"/>
-              <a:t>1/27/13</a:t>
+              <a:t>7/14/2026</a:t>
             </a:fld>
             <a:endParaRPr lang="en-US"/>
           </a:p>
@@ -2113,10 +1903,9 @@
           <a:lstStyle/>
           <a:p>
             <a:r>
-              <a:rPr lang="en-US" smtClean="0"/>
+              <a:rPr lang="en-US"/>
               <a:t>Click to edit Master title style</a:t>
             </a:r>
-            <a:endParaRPr lang="en-US"/>
           </a:p>
         </p:txBody>
       </p:sp>
@@ -2142,38 +1931,37 @@
           <a:p>
             <a:pPr lvl="0"/>
             <a:r>
-              <a:rPr lang="en-US" smtClean="0"/>
+              <a:rPr lang="en-US"/>
               <a:t>Click to edit Master text styles</a:t>
             </a:r>
           </a:p>
           <a:p>
             <a:pPr lvl="1"/>
             <a:r>
-              <a:rPr lang="en-US" smtClean="0"/>
+              <a:rPr lang="en-US"/>
               <a:t>Second level</a:t>
             </a:r>
           </a:p>
           <a:p>
             <a:pPr lvl="2"/>
             <a:r>
-              <a:rPr lang="en-US" smtClean="0"/>
+              <a:rPr lang="en-US"/>
               <a:t>Third level</a:t>
             </a:r>
           </a:p>
           <a:p>
             <a:pPr lvl="3"/>
             <a:r>
-              <a:rPr lang="en-US" smtClean="0"/>
+              <a:rPr lang="en-US"/>
               <a:t>Fourth level</a:t>
             </a:r>
           </a:p>
           <a:p>
             <a:pPr lvl="4"/>
             <a:r>
-              <a:rPr lang="en-US" smtClean="0"/>
+              <a:rPr lang="en-US"/>
               <a:t>Fifth level</a:t>
             </a:r>
-            <a:endParaRPr lang="en-US"/>
           </a:p>
         </p:txBody>
       </p:sp>
@@ -2194,7 +1982,7 @@
           <a:p>
             <a:fld id="{5BCAD085-E8A6-8845-BD4E-CB4CCA059FC4}" type="datetimeFigureOut">
               <a:rPr lang="en-US" smtClean="0"/>
-              <a:t>1/27/13</a:t>
+              <a:t>7/14/2026</a:t>
             </a:fld>
             <a:endParaRPr lang="en-US"/>
           </a:p>
@@ -2288,10 +2076,9 @@
           <a:lstStyle/>
           <a:p>
             <a:r>
-              <a:rPr lang="en-US" smtClean="0"/>
+              <a:rPr lang="en-US"/>
               <a:t>Click to edit Master title style</a:t>
             </a:r>
-            <a:endParaRPr lang="en-US"/>
           </a:p>
         </p:txBody>
       </p:sp>
@@ -2312,38 +2099,37 @@
           <a:p>
             <a:pPr lvl="0"/>
             <a:r>
-              <a:rPr lang="en-US" smtClean="0"/>
+              <a:rPr lang="en-US"/>
               <a:t>Click to edit Master text styles</a:t>
             </a:r>
           </a:p>
           <a:p>
             <a:pPr lvl="1"/>
             <a:r>
-              <a:rPr lang="en-US" smtClean="0"/>
+              <a:rPr lang="en-US"/>
               <a:t>Second level</a:t>
             </a:r>
           </a:p>
           <a:p>
             <a:pPr lvl="2"/>
             <a:r>
-              <a:rPr lang="en-US" smtClean="0"/>
+              <a:rPr lang="en-US"/>
               <a:t>Third level</a:t>
             </a:r>
           </a:p>
           <a:p>
             <a:pPr lvl="3"/>
             <a:r>
-              <a:rPr lang="en-US" smtClean="0"/>
+              <a:rPr lang="en-US"/>
               <a:t>Fourth level</a:t>
             </a:r>
           </a:p>
           <a:p>
             <a:pPr lvl="4"/>
             <a:r>
-              <a:rPr lang="en-US" smtClean="0"/>
+              <a:rPr lang="en-US"/>
               <a:t>Fifth level</a:t>
             </a:r>
-            <a:endParaRPr lang="en-US"/>
           </a:p>
         </p:txBody>
       </p:sp>
@@ -2364,7 +2150,7 @@
           <a:p>
             <a:fld id="{5BCAD085-E8A6-8845-BD4E-CB4CCA059FC4}" type="datetimeFigureOut">
               <a:rPr lang="en-US" smtClean="0"/>
-              <a:t>1/27/13</a:t>
+              <a:t>7/14/2026</a:t>
             </a:fld>
             <a:endParaRPr lang="en-US"/>
           </a:p>
@@ -2467,10 +2253,9 @@
           </a:lstStyle>
           <a:p>
             <a:r>
-              <a:rPr lang="en-US" smtClean="0"/>
+              <a:rPr lang="en-US"/>
               <a:t>Click to edit Master title style</a:t>
             </a:r>
-            <a:endParaRPr lang="en-US"/>
           </a:p>
         </p:txBody>
       </p:sp>
@@ -2587,7 +2372,7 @@
           <a:p>
             <a:pPr lvl="0"/>
             <a:r>
-              <a:rPr lang="en-US" smtClean="0"/>
+              <a:rPr lang="en-US"/>
               <a:t>Click to edit Master text styles</a:t>
             </a:r>
           </a:p>
@@ -2610,7 +2395,7 @@
           <a:p>
             <a:fld id="{5BCAD085-E8A6-8845-BD4E-CB4CCA059FC4}" type="datetimeFigureOut">
               <a:rPr lang="en-US" smtClean="0"/>
-              <a:t>1/27/13</a:t>
+              <a:t>7/14/2026</a:t>
             </a:fld>
             <a:endParaRPr lang="en-US"/>
           </a:p>
@@ -2704,10 +2489,9 @@
           <a:lstStyle/>
           <a:p>
             <a:r>
-              <a:rPr lang="en-US" smtClean="0"/>
+              <a:rPr lang="en-US"/>
               <a:t>Click to edit Master title style</a:t>
             </a:r>
-            <a:endParaRPr lang="en-US"/>
           </a:p>
         </p:txBody>
       </p:sp>
@@ -2761,38 +2545,37 @@
           <a:p>
             <a:pPr lvl="0"/>
             <a:r>
-              <a:rPr lang="en-US" smtClean="0"/>
+              <a:rPr lang="en-US"/>
               <a:t>Click to edit Master text styles</a:t>
             </a:r>
           </a:p>
           <a:p>
             <a:pPr lvl="1"/>
             <a:r>
-              <a:rPr lang="en-US" smtClean="0"/>
+              <a:rPr lang="en-US"/>
               <a:t>Second level</a:t>
             </a:r>
           </a:p>
           <a:p>
             <a:pPr lvl="2"/>
             <a:r>
-              <a:rPr lang="en-US" smtClean="0"/>
+              <a:rPr lang="en-US"/>
               <a:t>Third level</a:t>
             </a:r>
           </a:p>
           <a:p>
             <a:pPr lvl="3"/>
             <a:r>
-              <a:rPr lang="en-US" smtClean="0"/>
+              <a:rPr lang="en-US"/>
               <a:t>Fourth level</a:t>
             </a:r>
           </a:p>
           <a:p>
             <a:pPr lvl="4"/>
             <a:r>
-              <a:rPr lang="en-US" smtClean="0"/>
+              <a:rPr lang="en-US"/>
               <a:t>Fifth level</a:t>
             </a:r>
-            <a:endParaRPr lang="en-US"/>
           </a:p>
         </p:txBody>
       </p:sp>
@@ -2846,38 +2629,37 @@
           <a:p>
             <a:pPr lvl="0"/>
             <a:r>
-              <a:rPr lang="en-US" smtClean="0"/>
+              <a:rPr lang="en-US"/>
               <a:t>Click to edit Master text styles</a:t>
             </a:r>
           </a:p>
           <a:p>
             <a:pPr lvl="1"/>
             <a:r>
-              <a:rPr lang="en-US" smtClean="0"/>
+              <a:rPr lang="en-US"/>
               <a:t>Second level</a:t>
             </a:r>
           </a:p>
           <a:p>
             <a:pPr lvl="2"/>
             <a:r>
-              <a:rPr lang="en-US" smtClean="0"/>
+              <a:rPr lang="en-US"/>
               <a:t>Third level</a:t>
             </a:r>
           </a:p>
           <a:p>
             <a:pPr lvl="3"/>
             <a:r>
-              <a:rPr lang="en-US" smtClean="0"/>
+              <a:rPr lang="en-US"/>
               <a:t>Fourth level</a:t>
             </a:r>
           </a:p>
           <a:p>
             <a:pPr lvl="4"/>
             <a:r>
-              <a:rPr lang="en-US" smtClean="0"/>
+              <a:rPr lang="en-US"/>
               <a:t>Fifth level</a:t>
             </a:r>
-            <a:endParaRPr lang="en-US"/>
           </a:p>
         </p:txBody>
       </p:sp>
@@ -2898,7 +2680,7 @@
           <a:p>
             <a:fld id="{5BCAD085-E8A6-8845-BD4E-CB4CCA059FC4}" type="datetimeFigureOut">
               <a:rPr lang="en-US" smtClean="0"/>
-              <a:t>1/27/13</a:t>
+              <a:t>7/14/2026</a:t>
             </a:fld>
             <a:endParaRPr lang="en-US"/>
           </a:p>
@@ -2996,10 +2778,9 @@
           </a:lstStyle>
           <a:p>
             <a:r>
-              <a:rPr lang="en-US" smtClean="0"/>
+              <a:rPr lang="en-US"/>
               <a:t>Click to edit Master title style</a:t>
             </a:r>
-            <a:endParaRPr lang="en-US"/>
           </a:p>
         </p:txBody>
       </p:sp>
@@ -3062,7 +2843,7 @@
           <a:p>
             <a:pPr lvl="0"/>
             <a:r>
-              <a:rPr lang="en-US" smtClean="0"/>
+              <a:rPr lang="en-US"/>
               <a:t>Click to edit Master text styles</a:t>
             </a:r>
           </a:p>
@@ -3118,38 +2899,37 @@
           <a:p>
             <a:pPr lvl="0"/>
             <a:r>
-              <a:rPr lang="en-US" smtClean="0"/>
+              <a:rPr lang="en-US"/>
               <a:t>Click to edit Master text styles</a:t>
             </a:r>
           </a:p>
           <a:p>
             <a:pPr lvl="1"/>
             <a:r>
-              <a:rPr lang="en-US" smtClean="0"/>
+              <a:rPr lang="en-US"/>
               <a:t>Second level</a:t>
             </a:r>
           </a:p>
           <a:p>
             <a:pPr lvl="2"/>
             <a:r>
-              <a:rPr lang="en-US" smtClean="0"/>
+              <a:rPr lang="en-US"/>
               <a:t>Third level</a:t>
             </a:r>
           </a:p>
           <a:p>
             <a:pPr lvl="3"/>
             <a:r>
-              <a:rPr lang="en-US" smtClean="0"/>
+              <a:rPr lang="en-US"/>
               <a:t>Fourth level</a:t>
             </a:r>
           </a:p>
           <a:p>
             <a:pPr lvl="4"/>
             <a:r>
-              <a:rPr lang="en-US" smtClean="0"/>
+              <a:rPr lang="en-US"/>
               <a:t>Fifth level</a:t>
             </a:r>
-            <a:endParaRPr lang="en-US"/>
           </a:p>
         </p:txBody>
       </p:sp>
@@ -3212,7 +2992,7 @@
           <a:p>
             <a:pPr lvl="0"/>
             <a:r>
-              <a:rPr lang="en-US" smtClean="0"/>
+              <a:rPr lang="en-US"/>
               <a:t>Click to edit Master text styles</a:t>
             </a:r>
           </a:p>
@@ -3268,38 +3048,37 @@
           <a:p>
             <a:pPr lvl="0"/>
             <a:r>
-              <a:rPr lang="en-US" smtClean="0"/>
+              <a:rPr lang="en-US"/>
               <a:t>Click to edit Master text styles</a:t>
             </a:r>
           </a:p>
           <a:p>
             <a:pPr lvl="1"/>
             <a:r>
-              <a:rPr lang="en-US" smtClean="0"/>
+              <a:rPr lang="en-US"/>
               <a:t>Second level</a:t>
             </a:r>
           </a:p>
           <a:p>
             <a:pPr lvl="2"/>
             <a:r>
-              <a:rPr lang="en-US" smtClean="0"/>
+              <a:rPr lang="en-US"/>
               <a:t>Third level</a:t>
             </a:r>
           </a:p>
           <a:p>
             <a:pPr lvl="3"/>
             <a:r>
-              <a:rPr lang="en-US" smtClean="0"/>
+              <a:rPr lang="en-US"/>
               <a:t>Fourth level</a:t>
             </a:r>
           </a:p>
           <a:p>
             <a:pPr lvl="4"/>
             <a:r>
-              <a:rPr lang="en-US" smtClean="0"/>
+              <a:rPr lang="en-US"/>
               <a:t>Fifth level</a:t>
             </a:r>
-            <a:endParaRPr lang="en-US"/>
           </a:p>
         </p:txBody>
       </p:sp>
@@ -3320,7 +3099,7 @@
           <a:p>
             <a:fld id="{5BCAD085-E8A6-8845-BD4E-CB4CCA059FC4}" type="datetimeFigureOut">
               <a:rPr lang="en-US" smtClean="0"/>
-              <a:t>1/27/13</a:t>
+              <a:t>7/14/2026</a:t>
             </a:fld>
             <a:endParaRPr lang="en-US"/>
           </a:p>
@@ -3414,10 +3193,9 @@
           <a:lstStyle/>
           <a:p>
             <a:r>
-              <a:rPr lang="en-US" smtClean="0"/>
+              <a:rPr lang="en-US"/>
               <a:t>Click to edit Master title style</a:t>
             </a:r>
-            <a:endParaRPr lang="en-US"/>
           </a:p>
         </p:txBody>
       </p:sp>
@@ -3438,7 +3216,7 @@
           <a:p>
             <a:fld id="{5BCAD085-E8A6-8845-BD4E-CB4CCA059FC4}" type="datetimeFigureOut">
               <a:rPr lang="en-US" smtClean="0"/>
-              <a:t>1/27/13</a:t>
+              <a:t>7/14/2026</a:t>
             </a:fld>
             <a:endParaRPr lang="en-US"/>
           </a:p>
@@ -3533,7 +3311,7 @@
           <a:p>
             <a:fld id="{5BCAD085-E8A6-8845-BD4E-CB4CCA059FC4}" type="datetimeFigureOut">
               <a:rPr lang="en-US" smtClean="0"/>
-              <a:t>1/27/13</a:t>
+              <a:t>7/14/2026</a:t>
             </a:fld>
             <a:endParaRPr lang="en-US"/>
           </a:p>
@@ -3636,10 +3414,9 @@
           </a:lstStyle>
           <a:p>
             <a:r>
-              <a:rPr lang="en-US" smtClean="0"/>
+              <a:rPr lang="en-US"/>
               <a:t>Click to edit Master title style</a:t>
             </a:r>
-            <a:endParaRPr lang="en-US"/>
           </a:p>
         </p:txBody>
       </p:sp>
@@ -3693,38 +3470,37 @@
           <a:p>
             <a:pPr lvl="0"/>
             <a:r>
-              <a:rPr lang="en-US" smtClean="0"/>
+              <a:rPr lang="en-US"/>
               <a:t>Click to edit Master text styles</a:t>
             </a:r>
           </a:p>
           <a:p>
             <a:pPr lvl="1"/>
             <a:r>
-              <a:rPr lang="en-US" smtClean="0"/>
+              <a:rPr lang="en-US"/>
               <a:t>Second level</a:t>
             </a:r>
           </a:p>
           <a:p>
             <a:pPr lvl="2"/>
             <a:r>
-              <a:rPr lang="en-US" smtClean="0"/>
+              <a:rPr lang="en-US"/>
               <a:t>Third level</a:t>
             </a:r>
           </a:p>
           <a:p>
             <a:pPr lvl="3"/>
             <a:r>
-              <a:rPr lang="en-US" smtClean="0"/>
+              <a:rPr lang="en-US"/>
               <a:t>Fourth level</a:t>
             </a:r>
           </a:p>
           <a:p>
             <a:pPr lvl="4"/>
             <a:r>
-              <a:rPr lang="en-US" smtClean="0"/>
+              <a:rPr lang="en-US"/>
               <a:t>Fifth level</a:t>
             </a:r>
-            <a:endParaRPr lang="en-US"/>
           </a:p>
         </p:txBody>
       </p:sp>
@@ -3787,7 +3563,7 @@
           <a:p>
             <a:pPr lvl="0"/>
             <a:r>
-              <a:rPr lang="en-US" smtClean="0"/>
+              <a:rPr lang="en-US"/>
               <a:t>Click to edit Master text styles</a:t>
             </a:r>
           </a:p>
@@ -3810,7 +3586,7 @@
           <a:p>
             <a:fld id="{5BCAD085-E8A6-8845-BD4E-CB4CCA059FC4}" type="datetimeFigureOut">
               <a:rPr lang="en-US" smtClean="0"/>
-              <a:t>1/27/13</a:t>
+              <a:t>7/14/2026</a:t>
             </a:fld>
             <a:endParaRPr lang="en-US"/>
           </a:p>
@@ -3913,10 +3689,9 @@
           </a:lstStyle>
           <a:p>
             <a:r>
-              <a:rPr lang="en-US" smtClean="0"/>
+              <a:rPr lang="en-US"/>
               <a:t>Click to edit Master title style</a:t>
             </a:r>
-            <a:endParaRPr lang="en-US"/>
           </a:p>
         </p:txBody>
       </p:sp>
@@ -4040,7 +3815,7 @@
           <a:p>
             <a:pPr lvl="0"/>
             <a:r>
-              <a:rPr lang="en-US" smtClean="0"/>
+              <a:rPr lang="en-US"/>
               <a:t>Click to edit Master text styles</a:t>
             </a:r>
           </a:p>
@@ -4063,7 +3838,7 @@
           <a:p>
             <a:fld id="{5BCAD085-E8A6-8845-BD4E-CB4CCA059FC4}" type="datetimeFigureOut">
               <a:rPr lang="en-US" smtClean="0"/>
-              <a:t>1/27/13</a:t>
+              <a:t>7/14/2026</a:t>
             </a:fld>
             <a:endParaRPr lang="en-US"/>
           </a:p>
@@ -4172,10 +3947,9 @@
           <a:lstStyle/>
           <a:p>
             <a:r>
-              <a:rPr lang="en-US" smtClean="0"/>
+              <a:rPr lang="en-US"/>
               <a:t>Click to edit Master title style</a:t>
             </a:r>
-            <a:endParaRPr lang="en-US"/>
           </a:p>
         </p:txBody>
       </p:sp>
@@ -4206,38 +3980,37 @@
           <a:p>
             <a:pPr lvl="0"/>
             <a:r>
-              <a:rPr lang="en-US" smtClean="0"/>
+              <a:rPr lang="en-US"/>
               <a:t>Click to edit Master text styles</a:t>
             </a:r>
           </a:p>
           <a:p>
             <a:pPr lvl="1"/>
             <a:r>
-              <a:rPr lang="en-US" smtClean="0"/>
+              <a:rPr lang="en-US"/>
               <a:t>Second level</a:t>
             </a:r>
           </a:p>
           <a:p>
             <a:pPr lvl="2"/>
             <a:r>
-              <a:rPr lang="en-US" smtClean="0"/>
+              <a:rPr lang="en-US"/>
               <a:t>Third level</a:t>
             </a:r>
           </a:p>
           <a:p>
             <a:pPr lvl="3"/>
             <a:r>
-              <a:rPr lang="en-US" smtClean="0"/>
+              <a:rPr lang="en-US"/>
               <a:t>Fourth level</a:t>
             </a:r>
           </a:p>
           <a:p>
             <a:pPr lvl="4"/>
             <a:r>
-              <a:rPr lang="en-US" smtClean="0"/>
+              <a:rPr lang="en-US"/>
               <a:t>Fifth level</a:t>
             </a:r>
-            <a:endParaRPr lang="en-US"/>
           </a:p>
         </p:txBody>
       </p:sp>
@@ -4276,7 +4049,7 @@
           <a:p>
             <a:fld id="{5BCAD085-E8A6-8845-BD4E-CB4CCA059FC4}" type="datetimeFigureOut">
               <a:rPr lang="en-US" smtClean="0"/>
-              <a:t>1/27/13</a:t>
+              <a:t>7/14/2026</a:t>
             </a:fld>
             <a:endParaRPr lang="en-US"/>
           </a:p>
@@ -4357,6 +4130,54 @@
               <a:t>‹#›</a:t>
             </a:fld>
             <a:endParaRPr lang="en-US"/>
+          </a:p>
+        </p:txBody>
+      </p:sp>
+      <p:sp>
+        <p:nvSpPr>
+          <p:cNvPr id="8" name="TextBox 7">
+            <a:extLst>
+              <a:ext uri="{FF2B5EF4-FFF2-40B4-BE49-F238E27FC236}">
+                <a16:creationId xmlns:a16="http://schemas.microsoft.com/office/drawing/2014/main" id="{0611BD3A-479B-8677-E6BF-8A54C15F95E4}"/>
+              </a:ext>
+            </a:extLst>
+          </p:cNvPr>
+          <p:cNvSpPr txBox="1"/>
+          <p:nvPr userDrawn="1">
+            <p:extLst>
+              <p:ext uri="{1162E1C5-73C7-4A58-AE30-91384D911F3F}">
+                <p184:classification xmlns:p184="http://schemas.microsoft.com/office/powerpoint/2018/4/main" val="hdr"/>
+              </p:ext>
+            </p:extLst>
+          </p:nvPr>
+        </p:nvSpPr>
+        <p:spPr>
+          <a:xfrm>
+            <a:off x="5732463" y="63500"/>
+            <a:ext cx="763587" cy="213360"/>
+          </a:xfrm>
+          <a:prstGeom prst="rect">
+            <a:avLst/>
+          </a:prstGeom>
+        </p:spPr>
+        <p:txBody>
+          <a:bodyPr horzOverflow="overflow" lIns="0" tIns="0" rIns="0" bIns="0">
+            <a:spAutoFit/>
+          </a:bodyPr>
+          <a:lstStyle/>
+          <a:p>
+            <a:pPr algn="l"/>
+            <a:r>
+              <a:rPr lang="en-US" sz="1400">
+                <a:solidFill>
+                  <a:srgbClr val="000000">
+                    <a:alpha val="50000"/>
+                  </a:srgbClr>
+                </a:solidFill>
+                <a:latin typeface="Aptos" panose="020B0004020202020204" pitchFamily="34" charset="0"/>
+              </a:rPr>
+              <a:t>OFFICIAL</a:t>
+            </a:r>
           </a:p>
         </p:txBody>
       </p:sp>
@@ -4635,7 +4456,7 @@
 </file>
 
 <file path=ppt/slides/slide1.xml><?xml version="1.0" encoding="utf-8"?>
-<p:sld xmlns:a="http://schemas.openxmlformats.org/drawingml/2006/main" xmlns:p="http://schemas.openxmlformats.org/presentationml/2006/main" xmlns:r="http://schemas.openxmlformats.org/officeDocument/2006/relationships">
+<p:sld xmlns:a="http://schemas.openxmlformats.org/drawingml/2006/main" xmlns:r="http://schemas.openxmlformats.org/officeDocument/2006/relationships" xmlns:p="http://schemas.openxmlformats.org/presentationml/2006/main">
   <p:cSld>
     <p:spTree>
       <p:nvGrpSpPr>
@@ -4643,7 +4464,14 @@
         <p:cNvGrpSpPr/>
         <p:nvPr/>
       </p:nvGrpSpPr>
-      <p:grpSpPr/>
+      <p:grpSpPr>
+        <a:xfrm>
+          <a:off x="0" y="0"/>
+          <a:ext cx="0" cy="0"/>
+          <a:chOff x="0" y="0"/>
+          <a:chExt cx="0" cy="0"/>
+        </a:xfrm>
+      </p:grpSpPr>
       <p:sp>
         <p:nvSpPr>
           <p:cNvPr id="2" name="Rectangle 1"/>
@@ -4684,6 +4512,7 @@
           <a:lstStyle/>
           <a:p>
             <a:pPr algn="ctr"/>
+            <a:endParaRPr/>
           </a:p>
         </p:txBody>
       </p:sp>
@@ -4727,41 +4556,7 @@
           <a:lstStyle/>
           <a:p>
             <a:pPr algn="ctr"/>
-          </a:p>
-        </p:txBody>
-      </p:sp>
-      <p:sp>
-        <p:nvSpPr>
-          <p:cNvPr id="4" name="TextBox 3"/>
-          <p:cNvSpPr txBox="1"/>
-          <p:nvPr/>
-        </p:nvSpPr>
-        <p:spPr>
-          <a:xfrm>
-            <a:off x="594360" y="1143000"/>
-            <a:ext cx="10058400" cy="365760"/>
-          </a:xfrm>
-          <a:prstGeom prst="rect">
-            <a:avLst/>
-          </a:prstGeom>
-          <a:noFill/>
-        </p:spPr>
-        <p:txBody>
-          <a:bodyPr wrap="square" anchor="t" lIns="0" rIns="0" tIns="0" bIns="0">
-            <a:spAutoFit/>
-          </a:bodyPr>
-          <a:lstStyle/>
-          <a:p>
-            <a:pPr algn="l"/>
-            <a:r>
-              <a:rPr sz="1300" b="1" i="0" spc="240">
-                <a:solidFill>
-                  <a:srgbClr val="2DD4BF"/>
-                </a:solidFill>
-                <a:latin typeface="Segoe UI"/>
-              </a:rPr>
-              <a:t>GUEST LECTURE   ·   ICT108   ·   SYDNEY MET</a:t>
-            </a:r>
+            <a:endParaRPr/>
           </a:p>
         </p:txBody>
       </p:sp>
@@ -4782,7 +4577,7 @@
           <a:noFill/>
         </p:spPr>
         <p:txBody>
-          <a:bodyPr wrap="square" anchor="t" lIns="0" rIns="0" tIns="0" bIns="0">
+          <a:bodyPr wrap="square" lIns="0" tIns="0" rIns="0" bIns="0" anchor="t">
             <a:spAutoFit/>
           </a:bodyPr>
           <a:lstStyle/>
@@ -4793,7 +4588,7 @@
               </a:lnSpc>
             </a:pPr>
             <a:r>
-              <a:rPr sz="4600" b="1" i="0">
+              <a:rPr sz="4600" b="1" i="0" dirty="0">
                 <a:solidFill>
                   <a:srgbClr val="FFFFFF"/>
                 </a:solidFill>
@@ -4844,6 +4639,7 @@
           <a:lstStyle/>
           <a:p>
             <a:pPr algn="ctr"/>
+            <a:endParaRPr/>
           </a:p>
         </p:txBody>
       </p:sp>
@@ -4864,7 +4660,7 @@
           <a:noFill/>
         </p:spPr>
         <p:txBody>
-          <a:bodyPr wrap="square" anchor="t" lIns="0" rIns="0" tIns="0" bIns="0">
+          <a:bodyPr wrap="square" lIns="0" tIns="0" rIns="0" bIns="0" anchor="t">
             <a:spAutoFit/>
           </a:bodyPr>
           <a:lstStyle/>
@@ -4894,8 +4690,8 @@
         </p:nvSpPr>
         <p:spPr>
           <a:xfrm>
-            <a:off x="594360" y="3520440"/>
-            <a:ext cx="10515600" cy="411480"/>
+            <a:off x="640384" y="3993570"/>
+            <a:ext cx="10515600" cy="492443"/>
           </a:xfrm>
           <a:prstGeom prst="rect">
             <a:avLst/>
@@ -4903,189 +4699,36 @@
           <a:noFill/>
         </p:spPr>
         <p:txBody>
-          <a:bodyPr wrap="square" anchor="t" lIns="0" rIns="0" tIns="0" bIns="0">
+          <a:bodyPr wrap="square" lIns="0" tIns="0" rIns="0" bIns="0" anchor="t">
             <a:spAutoFit/>
           </a:bodyPr>
           <a:lstStyle/>
           <a:p>
             <a:pPr algn="l"/>
             <a:r>
-              <a:rPr sz="1500" b="1" i="0">
+              <a:rPr sz="3200" b="1" i="0" dirty="0">
                 <a:solidFill>
                   <a:srgbClr val="2DD4BF"/>
                 </a:solidFill>
                 <a:latin typeface="Segoe UI"/>
               </a:rPr>
-              <a:t>Case study: MetMate</a:t>
-            </a:r>
-          </a:p>
-        </p:txBody>
-      </p:sp>
-      <p:sp>
-        <p:nvSpPr>
-          <p:cNvPr id="9" name="TextBox 8"/>
-          <p:cNvSpPr txBox="1"/>
-          <p:nvPr/>
-        </p:nvSpPr>
-        <p:spPr>
-          <a:xfrm>
-            <a:off x="594360" y="3913632"/>
-            <a:ext cx="10515600" cy="411480"/>
-          </a:xfrm>
-          <a:prstGeom prst="rect">
-            <a:avLst/>
-          </a:prstGeom>
-          <a:noFill/>
-        </p:spPr>
-        <p:txBody>
-          <a:bodyPr wrap="square" anchor="t" lIns="0" rIns="0" tIns="0" bIns="0">
-            <a:spAutoFit/>
-          </a:bodyPr>
-          <a:lstStyle/>
-          <a:p>
-            <a:pPr algn="l"/>
-            <a:r>
-              <a:rPr sz="1300" b="0" i="1">
-                <a:solidFill>
-                  <a:srgbClr val="9FB3C8"/>
-                </a:solidFill>
-                <a:latin typeface="Segoe UI"/>
-              </a:rPr>
-              <a:t>An invented chatbot answering Sydney Met student questions — enrolment, library, exams.</a:t>
-            </a:r>
-          </a:p>
-        </p:txBody>
-      </p:sp>
-      <p:sp>
-        <p:nvSpPr>
-          <p:cNvPr id="10" name="Rounded Rectangle 9"/>
-          <p:cNvSpPr/>
-          <p:nvPr/>
-        </p:nvSpPr>
-        <p:spPr>
-          <a:xfrm>
-            <a:off x="594360" y="4572000"/>
-            <a:ext cx="9326880" cy="868680"/>
-          </a:xfrm>
-          <a:prstGeom prst="roundRect">
-            <a:avLst>
-              <a:gd name="adj" fmla="val 6000"/>
-            </a:avLst>
-          </a:prstGeom>
-          <a:solidFill>
-            <a:srgbClr val="142847"/>
-          </a:solidFill>
-          <a:ln w="12700">
-            <a:solidFill>
-              <a:srgbClr val="253B5E"/>
-            </a:solidFill>
-          </a:ln>
-        </p:spPr>
-        <p:style>
-          <a:lnRef idx="1">
-            <a:schemeClr val="accent1"/>
-          </a:lnRef>
-          <a:fillRef idx="3">
-            <a:schemeClr val="accent1"/>
-          </a:fillRef>
-          <a:effectRef idx="2">
-            <a:schemeClr val="accent1"/>
-          </a:effectRef>
-          <a:fontRef idx="minor">
-            <a:schemeClr val="lt1"/>
-          </a:fontRef>
-        </p:style>
-        <p:txBody>
-          <a:bodyPr rtlCol="0" anchor="ctr"/>
-          <a:lstStyle/>
-          <a:p>
-            <a:pPr algn="ctr"/>
-          </a:p>
-        </p:txBody>
-      </p:sp>
-      <p:sp>
-        <p:nvSpPr>
-          <p:cNvPr id="11" name="TextBox 10"/>
-          <p:cNvSpPr txBox="1"/>
-          <p:nvPr/>
-        </p:nvSpPr>
-        <p:spPr>
-          <a:xfrm>
-            <a:off x="841248" y="4572000"/>
-            <a:ext cx="8869680" cy="868680"/>
-          </a:xfrm>
-          <a:prstGeom prst="rect">
-            <a:avLst/>
-          </a:prstGeom>
-          <a:noFill/>
-        </p:spPr>
-        <p:txBody>
-          <a:bodyPr wrap="square" anchor="ctr" lIns="0" rIns="0" tIns="0" bIns="0">
-            <a:spAutoFit/>
-          </a:bodyPr>
-          <a:lstStyle/>
-          <a:p>
-            <a:pPr algn="l">
-              <a:lnSpc>
-                <a:spcPct val="125000"/>
-              </a:lnSpc>
-            </a:pPr>
-            <a:r>
-              <a:rPr sz="1200" b="0" i="1">
-                <a:solidFill>
-                  <a:srgbClr val="9FB3C8"/>
-                </a:solidFill>
-                <a:latin typeface="Segoe UI"/>
-              </a:rPr>
-              <a:t>Concepts over terminology: every technical term arrives only when the story needs it,</a:t>
-            </a:r>
-          </a:p>
-          <a:p>
-            <a:pPr algn="l"/>
-            <a:r>
-              <a:rPr sz="1200" b="0" i="1">
-                <a:solidFill>
-                  <a:srgbClr val="9FB3C8"/>
-                </a:solidFill>
-                <a:latin typeface="Segoe UI"/>
-              </a:rPr>
-              <a:t>defined in plain English. Nothing to memorise up front — everything is look-up-able later.</a:t>
-            </a:r>
-          </a:p>
-        </p:txBody>
-      </p:sp>
-      <p:sp>
-        <p:nvSpPr>
-          <p:cNvPr id="12" name="TextBox 11"/>
-          <p:cNvSpPr txBox="1"/>
-          <p:nvPr/>
-        </p:nvSpPr>
-        <p:spPr>
-          <a:xfrm>
-            <a:off x="594360" y="5715000"/>
-            <a:ext cx="11155680" cy="365760"/>
-          </a:xfrm>
-          <a:prstGeom prst="rect">
-            <a:avLst/>
-          </a:prstGeom>
-          <a:noFill/>
-        </p:spPr>
-        <p:txBody>
-          <a:bodyPr wrap="square" anchor="t" lIns="0" rIns="0" tIns="0" bIns="0">
-            <a:spAutoFit/>
-          </a:bodyPr>
-          <a:lstStyle/>
-          <a:p>
-            <a:pPr algn="l"/>
-            <a:r>
-              <a:rPr sz="1050" b="0" i="0">
+              <a:t>Case study: </a:t>
+            </a:r>
+            <a:r>
+              <a:rPr sz="3200" b="1" i="0" dirty="0" err="1">
                 <a:solidFill>
                   <a:srgbClr val="2DD4BF"/>
                 </a:solidFill>
                 <a:latin typeface="Segoe UI"/>
               </a:rPr>
-              <a:t>Phase 1  Just ask ChatGPT   →   Phase 2  Our own bot   →   Phase 3  Search first   →   Phase 4  Search by meaning   →   Phase 5  Toward the real world</a:t>
-            </a:r>
+              <a:t>MetMate</a:t>
+            </a:r>
+            <a:endParaRPr sz="3200" b="1" i="0" dirty="0">
+              <a:solidFill>
+                <a:srgbClr val="2DD4BF"/>
+              </a:solidFill>
+              <a:latin typeface="Segoe UI"/>
+            </a:endParaRPr>
           </a:p>
         </p:txBody>
       </p:sp>
@@ -5098,7 +4741,7 @@
           <p:nvPr/>
         </p:nvPicPr>
         <p:blipFill>
-          <a:blip r:embed="rId2"/>
+          <a:blip r:embed="rId3"/>
           <a:stretch>
             <a:fillRect/>
           </a:stretch>
@@ -5153,6 +4796,7 @@
           <a:lstStyle/>
           <a:p>
             <a:pPr algn="ctr"/>
+            <a:endParaRPr/>
           </a:p>
         </p:txBody>
       </p:sp>
@@ -5196,41 +4840,7 @@
           <a:lstStyle/>
           <a:p>
             <a:pPr algn="ctr"/>
-          </a:p>
-        </p:txBody>
-      </p:sp>
-      <p:sp>
-        <p:nvSpPr>
-          <p:cNvPr id="16" name="TextBox 15"/>
-          <p:cNvSpPr txBox="1"/>
-          <p:nvPr/>
-        </p:nvSpPr>
-        <p:spPr>
-          <a:xfrm>
-            <a:off x="594360" y="6355080"/>
-            <a:ext cx="4572000" cy="502920"/>
-          </a:xfrm>
-          <a:prstGeom prst="rect">
-            <a:avLst/>
-          </a:prstGeom>
-          <a:noFill/>
-        </p:spPr>
-        <p:txBody>
-          <a:bodyPr wrap="square" anchor="ctr" lIns="0" rIns="0" tIns="0" bIns="0">
-            <a:spAutoFit/>
-          </a:bodyPr>
-          <a:lstStyle/>
-          <a:p>
-            <a:pPr algn="l"/>
-            <a:r>
-              <a:rPr sz="1000" b="0" i="0">
-                <a:solidFill>
-                  <a:srgbClr val="9FB3C8"/>
-                </a:solidFill>
-                <a:latin typeface="Segoe UI"/>
-              </a:rPr>
-              <a:t>ICT108  ·  MetMate case study</a:t>
-            </a:r>
+            <a:endParaRPr/>
           </a:p>
         </p:txBody>
       </p:sp>
@@ -5287,7 +4897,7 @@
 </file>
 
 <file path=ppt/slides/slide10.xml><?xml version="1.0" encoding="utf-8"?>
-<p:sld xmlns:a="http://schemas.openxmlformats.org/drawingml/2006/main" xmlns:p="http://schemas.openxmlformats.org/presentationml/2006/main" xmlns:r="http://schemas.openxmlformats.org/officeDocument/2006/relationships">
+<p:sld xmlns:a="http://schemas.openxmlformats.org/drawingml/2006/main" xmlns:r="http://schemas.openxmlformats.org/officeDocument/2006/relationships" xmlns:p="http://schemas.openxmlformats.org/presentationml/2006/main">
   <p:cSld>
     <p:spTree>
       <p:nvGrpSpPr>
@@ -5295,7 +4905,14 @@
         <p:cNvGrpSpPr/>
         <p:nvPr/>
       </p:nvGrpSpPr>
-      <p:grpSpPr/>
+      <p:grpSpPr>
+        <a:xfrm>
+          <a:off x="0" y="0"/>
+          <a:ext cx="0" cy="0"/>
+          <a:chOff x="0" y="0"/>
+          <a:chExt cx="0" cy="0"/>
+        </a:xfrm>
+      </p:grpSpPr>
       <p:sp>
         <p:nvSpPr>
           <p:cNvPr id="2" name="Rectangle 1"/>
@@ -5336,6 +4953,7 @@
           <a:lstStyle/>
           <a:p>
             <a:pPr algn="ctr"/>
+            <a:endParaRPr/>
           </a:p>
         </p:txBody>
       </p:sp>
@@ -5379,6 +4997,7 @@
           <a:lstStyle/>
           <a:p>
             <a:pPr algn="ctr"/>
+            <a:endParaRPr/>
           </a:p>
         </p:txBody>
       </p:sp>
@@ -5399,7 +5018,7 @@
           <a:noFill/>
         </p:spPr>
         <p:txBody>
-          <a:bodyPr wrap="square" anchor="t" lIns="0" rIns="0" tIns="0" bIns="0">
+          <a:bodyPr wrap="square" lIns="0" tIns="0" rIns="0" bIns="0" anchor="t">
             <a:spAutoFit/>
           </a:bodyPr>
           <a:lstStyle/>
@@ -5434,7 +5053,7 @@
           <a:noFill/>
         </p:spPr>
         <p:txBody>
-          <a:bodyPr wrap="square" anchor="t" lIns="0" rIns="0" tIns="0" bIns="0">
+          <a:bodyPr wrap="square" lIns="0" tIns="0" rIns="0" bIns="0" anchor="t">
             <a:spAutoFit/>
           </a:bodyPr>
           <a:lstStyle/>
@@ -5496,6 +5115,7 @@
           <a:lstStyle/>
           <a:p>
             <a:pPr algn="ctr"/>
+            <a:endParaRPr/>
           </a:p>
         </p:txBody>
       </p:sp>
@@ -5508,7 +5128,7 @@
           <p:nvPr/>
         </p:nvPicPr>
         <p:blipFill>
-          <a:blip r:embed="rId2"/>
+          <a:blip r:embed="rId3"/>
           <a:stretch>
             <a:fillRect/>
           </a:stretch>
@@ -5563,6 +5183,7 @@
           <a:lstStyle/>
           <a:p>
             <a:pPr algn="ctr"/>
+            <a:endParaRPr/>
           </a:p>
         </p:txBody>
       </p:sp>
@@ -5606,41 +5227,7 @@
           <a:lstStyle/>
           <a:p>
             <a:pPr algn="ctr"/>
-          </a:p>
-        </p:txBody>
-      </p:sp>
-      <p:sp>
-        <p:nvSpPr>
-          <p:cNvPr id="10" name="TextBox 9"/>
-          <p:cNvSpPr txBox="1"/>
-          <p:nvPr/>
-        </p:nvSpPr>
-        <p:spPr>
-          <a:xfrm>
-            <a:off x="594360" y="6355080"/>
-            <a:ext cx="4572000" cy="502920"/>
-          </a:xfrm>
-          <a:prstGeom prst="rect">
-            <a:avLst/>
-          </a:prstGeom>
-          <a:noFill/>
-        </p:spPr>
-        <p:txBody>
-          <a:bodyPr wrap="square" anchor="ctr" lIns="0" rIns="0" tIns="0" bIns="0">
-            <a:spAutoFit/>
-          </a:bodyPr>
-          <a:lstStyle/>
-          <a:p>
-            <a:pPr algn="l"/>
-            <a:r>
-              <a:rPr sz="1000" b="0" i="0">
-                <a:solidFill>
-                  <a:srgbClr val="9FB3C8"/>
-                </a:solidFill>
-                <a:latin typeface="Segoe UI"/>
-              </a:rPr>
-              <a:t>ICT108  ·  MetMate case study</a:t>
-            </a:r>
+            <a:endParaRPr/>
           </a:p>
         </p:txBody>
       </p:sp>
@@ -5732,6 +5319,7 @@
           <a:lstStyle/>
           <a:p>
             <a:pPr algn="ctr"/>
+            <a:endParaRPr/>
           </a:p>
         </p:txBody>
       </p:sp>
@@ -5752,7 +5340,7 @@
           <a:noFill/>
         </p:spPr>
         <p:txBody>
-          <a:bodyPr wrap="square" anchor="ctr" lIns="0" rIns="0" tIns="0" bIns="0">
+          <a:bodyPr wrap="square" lIns="0" tIns="0" rIns="0" bIns="0" anchor="ctr">
             <a:spAutoFit/>
           </a:bodyPr>
           <a:lstStyle/>
@@ -5814,6 +5402,7 @@
           <a:lstStyle/>
           <a:p>
             <a:pPr algn="ctr"/>
+            <a:endParaRPr/>
           </a:p>
         </p:txBody>
       </p:sp>
@@ -5834,7 +5423,7 @@
           <a:noFill/>
         </p:spPr>
         <p:txBody>
-          <a:bodyPr wrap="square" anchor="ctr" lIns="0" rIns="0" tIns="0" bIns="0">
+          <a:bodyPr wrap="square" lIns="0" tIns="0" rIns="0" bIns="0" anchor="ctr">
             <a:spAutoFit/>
           </a:bodyPr>
           <a:lstStyle/>
@@ -5896,6 +5485,7 @@
           <a:lstStyle/>
           <a:p>
             <a:pPr algn="ctr"/>
+            <a:endParaRPr/>
           </a:p>
         </p:txBody>
       </p:sp>
@@ -5916,7 +5506,7 @@
           <a:noFill/>
         </p:spPr>
         <p:txBody>
-          <a:bodyPr wrap="square" anchor="t" lIns="0" rIns="0" tIns="0" bIns="0">
+          <a:bodyPr wrap="square" lIns="0" tIns="0" rIns="0" bIns="0" anchor="t">
             <a:spAutoFit/>
           </a:bodyPr>
           <a:lstStyle/>
@@ -5951,7 +5541,7 @@
           <a:noFill/>
         </p:spPr>
         <p:txBody>
-          <a:bodyPr wrap="square" anchor="t" lIns="0" rIns="0" tIns="0" bIns="0">
+          <a:bodyPr wrap="square" lIns="0" tIns="0" rIns="0" bIns="0" anchor="t">
             <a:spAutoFit/>
           </a:bodyPr>
           <a:lstStyle/>
@@ -5990,7 +5580,7 @@
           <a:noFill/>
         </p:spPr>
         <p:txBody>
-          <a:bodyPr wrap="square" anchor="t" lIns="0" rIns="0" tIns="0" bIns="0">
+          <a:bodyPr wrap="square" lIns="0" tIns="0" rIns="0" bIns="0" anchor="t">
             <a:spAutoFit/>
           </a:bodyPr>
           <a:lstStyle/>
@@ -6052,6 +5642,7 @@
           <a:lstStyle/>
           <a:p>
             <a:pPr algn="ctr"/>
+            <a:endParaRPr/>
           </a:p>
         </p:txBody>
       </p:sp>
@@ -6072,7 +5663,7 @@
           <a:noFill/>
         </p:spPr>
         <p:txBody>
-          <a:bodyPr wrap="square" anchor="t" lIns="0" rIns="0" tIns="0" bIns="0">
+          <a:bodyPr wrap="square" lIns="0" tIns="0" rIns="0" bIns="0" anchor="t">
             <a:spAutoFit/>
           </a:bodyPr>
           <a:lstStyle/>
@@ -6107,7 +5698,7 @@
           <a:noFill/>
         </p:spPr>
         <p:txBody>
-          <a:bodyPr wrap="square" anchor="t" lIns="0" rIns="0" tIns="0" bIns="0">
+          <a:bodyPr wrap="square" lIns="0" tIns="0" rIns="0" bIns="0" anchor="t">
             <a:spAutoFit/>
           </a:bodyPr>
           <a:lstStyle/>
@@ -6146,7 +5737,7 @@
           <a:noFill/>
         </p:spPr>
         <p:txBody>
-          <a:bodyPr wrap="square" anchor="t" lIns="0" rIns="0" tIns="0" bIns="0">
+          <a:bodyPr wrap="square" lIns="0" tIns="0" rIns="0" bIns="0" anchor="t">
             <a:spAutoFit/>
           </a:bodyPr>
           <a:lstStyle/>
@@ -6208,6 +5799,7 @@
           <a:lstStyle/>
           <a:p>
             <a:pPr algn="ctr"/>
+            <a:endParaRPr/>
           </a:p>
         </p:txBody>
       </p:sp>
@@ -6228,7 +5820,7 @@
           <a:noFill/>
         </p:spPr>
         <p:txBody>
-          <a:bodyPr wrap="square" anchor="ctr" lIns="0" rIns="0" tIns="0" bIns="0">
+          <a:bodyPr wrap="square" lIns="0" tIns="0" rIns="0" bIns="0" anchor="ctr">
             <a:spAutoFit/>
           </a:bodyPr>
           <a:lstStyle/>
@@ -6306,6 +5898,7 @@
           <a:lstStyle/>
           <a:p>
             <a:pPr algn="ctr"/>
+            <a:endParaRPr/>
           </a:p>
         </p:txBody>
       </p:sp>
@@ -6326,7 +5919,7 @@
           <a:noFill/>
         </p:spPr>
         <p:txBody>
-          <a:bodyPr wrap="square" anchor="ctr" lIns="0" rIns="0" tIns="0" bIns="0">
+          <a:bodyPr wrap="square" lIns="0" tIns="0" rIns="0" bIns="0" anchor="ctr">
             <a:spAutoFit/>
           </a:bodyPr>
           <a:lstStyle/>
@@ -6377,7 +5970,7 @@
           <a:noFill/>
         </p:spPr>
         <p:txBody>
-          <a:bodyPr wrap="square" anchor="t" lIns="0" rIns="0" tIns="0" bIns="0">
+          <a:bodyPr wrap="square" lIns="0" tIns="0" rIns="0" bIns="0" anchor="t">
             <a:spAutoFit/>
           </a:bodyPr>
           <a:lstStyle/>
@@ -6420,7 +6013,7 @@
 </file>
 
 <file path=ppt/slides/slide11.xml><?xml version="1.0" encoding="utf-8"?>
-<p:sld xmlns:a="http://schemas.openxmlformats.org/drawingml/2006/main" xmlns:p="http://schemas.openxmlformats.org/presentationml/2006/main" xmlns:r="http://schemas.openxmlformats.org/officeDocument/2006/relationships">
+<p:sld xmlns:a="http://schemas.openxmlformats.org/drawingml/2006/main" xmlns:r="http://schemas.openxmlformats.org/officeDocument/2006/relationships" xmlns:p="http://schemas.openxmlformats.org/presentationml/2006/main">
   <p:cSld>
     <p:spTree>
       <p:nvGrpSpPr>
@@ -6428,7 +6021,14 @@
         <p:cNvGrpSpPr/>
         <p:nvPr/>
       </p:nvGrpSpPr>
-      <p:grpSpPr/>
+      <p:grpSpPr>
+        <a:xfrm>
+          <a:off x="0" y="0"/>
+          <a:ext cx="0" cy="0"/>
+          <a:chOff x="0" y="0"/>
+          <a:chExt cx="0" cy="0"/>
+        </a:xfrm>
+      </p:grpSpPr>
       <p:sp>
         <p:nvSpPr>
           <p:cNvPr id="2" name="Rectangle 1"/>
@@ -6469,6 +6069,7 @@
           <a:lstStyle/>
           <a:p>
             <a:pPr algn="ctr"/>
+            <a:endParaRPr/>
           </a:p>
         </p:txBody>
       </p:sp>
@@ -6512,6 +6113,7 @@
           <a:lstStyle/>
           <a:p>
             <a:pPr algn="ctr"/>
+            <a:endParaRPr/>
           </a:p>
         </p:txBody>
       </p:sp>
@@ -6532,7 +6134,7 @@
           <a:noFill/>
         </p:spPr>
         <p:txBody>
-          <a:bodyPr wrap="square" anchor="t" lIns="0" rIns="0" tIns="0" bIns="0">
+          <a:bodyPr wrap="square" lIns="0" tIns="0" rIns="0" bIns="0" anchor="t">
             <a:spAutoFit/>
           </a:bodyPr>
           <a:lstStyle/>
@@ -6567,7 +6169,7 @@
           <a:noFill/>
         </p:spPr>
         <p:txBody>
-          <a:bodyPr wrap="square" anchor="t" lIns="0" rIns="0" tIns="0" bIns="0">
+          <a:bodyPr wrap="square" lIns="0" tIns="0" rIns="0" bIns="0" anchor="t">
             <a:spAutoFit/>
           </a:bodyPr>
           <a:lstStyle/>
@@ -6629,6 +6231,7 @@
           <a:lstStyle/>
           <a:p>
             <a:pPr algn="ctr"/>
+            <a:endParaRPr/>
           </a:p>
         </p:txBody>
       </p:sp>
@@ -6641,7 +6244,7 @@
           <p:nvPr/>
         </p:nvPicPr>
         <p:blipFill>
-          <a:blip r:embed="rId2"/>
+          <a:blip r:embed="rId3"/>
           <a:stretch>
             <a:fillRect/>
           </a:stretch>
@@ -6696,6 +6299,7 @@
           <a:lstStyle/>
           <a:p>
             <a:pPr algn="ctr"/>
+            <a:endParaRPr/>
           </a:p>
         </p:txBody>
       </p:sp>
@@ -6739,41 +6343,7 @@
           <a:lstStyle/>
           <a:p>
             <a:pPr algn="ctr"/>
-          </a:p>
-        </p:txBody>
-      </p:sp>
-      <p:sp>
-        <p:nvSpPr>
-          <p:cNvPr id="10" name="TextBox 9"/>
-          <p:cNvSpPr txBox="1"/>
-          <p:nvPr/>
-        </p:nvSpPr>
-        <p:spPr>
-          <a:xfrm>
-            <a:off x="594360" y="6355080"/>
-            <a:ext cx="4572000" cy="502920"/>
-          </a:xfrm>
-          <a:prstGeom prst="rect">
-            <a:avLst/>
-          </a:prstGeom>
-          <a:noFill/>
-        </p:spPr>
-        <p:txBody>
-          <a:bodyPr wrap="square" anchor="ctr" lIns="0" rIns="0" tIns="0" bIns="0">
-            <a:spAutoFit/>
-          </a:bodyPr>
-          <a:lstStyle/>
-          <a:p>
-            <a:pPr algn="l"/>
-            <a:r>
-              <a:rPr sz="1000" b="0" i="0">
-                <a:solidFill>
-                  <a:srgbClr val="9FB3C8"/>
-                </a:solidFill>
-                <a:latin typeface="Segoe UI"/>
-              </a:rPr>
-              <a:t>ICT108  ·  MetMate case study</a:t>
-            </a:r>
+            <a:endParaRPr/>
           </a:p>
         </p:txBody>
       </p:sp>
@@ -6838,7 +6408,7 @@
           <a:noFill/>
         </p:spPr>
         <p:txBody>
-          <a:bodyPr wrap="square" anchor="t" lIns="0" rIns="0" tIns="0" bIns="0">
+          <a:bodyPr wrap="square" lIns="0" tIns="0" rIns="0" bIns="0" anchor="t">
             <a:spAutoFit/>
           </a:bodyPr>
           <a:lstStyle/>
@@ -6900,6 +6470,7 @@
           <a:lstStyle/>
           <a:p>
             <a:pPr algn="ctr"/>
+            <a:endParaRPr/>
           </a:p>
         </p:txBody>
       </p:sp>
@@ -6990,7 +6561,7 @@
           <a:noFill/>
         </p:spPr>
         <p:txBody>
-          <a:bodyPr wrap="square" anchor="t" lIns="0" rIns="0" tIns="0" bIns="0">
+          <a:bodyPr wrap="square" lIns="0" tIns="0" rIns="0" bIns="0" anchor="t">
             <a:spAutoFit/>
           </a:bodyPr>
           <a:lstStyle/>
@@ -7060,7 +6631,7 @@
           <a:noFill/>
         </p:spPr>
         <p:txBody>
-          <a:bodyPr wrap="square" anchor="t" lIns="0" rIns="0" tIns="0" bIns="0">
+          <a:bodyPr wrap="square" lIns="0" tIns="0" rIns="0" bIns="0" anchor="t">
             <a:spAutoFit/>
           </a:bodyPr>
           <a:lstStyle/>
@@ -7130,7 +6701,7 @@
           <a:noFill/>
         </p:spPr>
         <p:txBody>
-          <a:bodyPr wrap="square" anchor="t" lIns="0" rIns="0" tIns="0" bIns="0">
+          <a:bodyPr wrap="square" lIns="0" tIns="0" rIns="0" bIns="0" anchor="t">
             <a:spAutoFit/>
           </a:bodyPr>
           <a:lstStyle/>
@@ -7200,7 +6771,7 @@
           <a:noFill/>
         </p:spPr>
         <p:txBody>
-          <a:bodyPr wrap="square" anchor="t" lIns="0" rIns="0" tIns="0" bIns="0">
+          <a:bodyPr wrap="square" lIns="0" tIns="0" rIns="0" bIns="0" anchor="t">
             <a:spAutoFit/>
           </a:bodyPr>
           <a:lstStyle/>
@@ -7258,6 +6829,7 @@
           <a:lstStyle/>
           <a:p>
             <a:pPr algn="ctr"/>
+            <a:endParaRPr/>
           </a:p>
         </p:txBody>
       </p:sp>
@@ -7278,7 +6850,7 @@
           <a:noFill/>
         </p:spPr>
         <p:txBody>
-          <a:bodyPr wrap="square" anchor="t" lIns="0" rIns="0" tIns="0" bIns="0">
+          <a:bodyPr wrap="square" lIns="0" tIns="0" rIns="0" bIns="0" anchor="t">
             <a:spAutoFit/>
           </a:bodyPr>
           <a:lstStyle/>
@@ -7336,6 +6908,7 @@
           <a:lstStyle/>
           <a:p>
             <a:pPr algn="ctr"/>
+            <a:endParaRPr/>
           </a:p>
         </p:txBody>
       </p:sp>
@@ -7356,7 +6929,7 @@
           <a:noFill/>
         </p:spPr>
         <p:txBody>
-          <a:bodyPr wrap="square" anchor="t" lIns="0" rIns="0" tIns="0" bIns="0">
+          <a:bodyPr wrap="square" lIns="0" tIns="0" rIns="0" bIns="0" anchor="t">
             <a:spAutoFit/>
           </a:bodyPr>
           <a:lstStyle/>
@@ -7414,6 +6987,7 @@
           <a:lstStyle/>
           <a:p>
             <a:pPr algn="ctr"/>
+            <a:endParaRPr/>
           </a:p>
         </p:txBody>
       </p:sp>
@@ -7434,7 +7008,7 @@
           <a:noFill/>
         </p:spPr>
         <p:txBody>
-          <a:bodyPr wrap="square" anchor="t" lIns="0" rIns="0" tIns="0" bIns="0">
+          <a:bodyPr wrap="square" lIns="0" tIns="0" rIns="0" bIns="0" anchor="t">
             <a:spAutoFit/>
           </a:bodyPr>
           <a:lstStyle/>
@@ -7469,7 +7043,7 @@
           <a:noFill/>
         </p:spPr>
         <p:txBody>
-          <a:bodyPr wrap="square" anchor="t" lIns="0" rIns="0" tIns="0" bIns="0">
+          <a:bodyPr wrap="square" lIns="0" tIns="0" rIns="0" bIns="0" anchor="t">
             <a:spAutoFit/>
           </a:bodyPr>
           <a:lstStyle/>
@@ -7504,7 +7078,7 @@
           <a:noFill/>
         </p:spPr>
         <p:txBody>
-          <a:bodyPr wrap="square" anchor="t" lIns="0" rIns="0" tIns="0" bIns="0">
+          <a:bodyPr wrap="square" lIns="0" tIns="0" rIns="0" bIns="0" anchor="t">
             <a:spAutoFit/>
           </a:bodyPr>
           <a:lstStyle/>
@@ -7566,6 +7140,7 @@
           <a:lstStyle/>
           <a:p>
             <a:pPr algn="ctr"/>
+            <a:endParaRPr/>
           </a:p>
         </p:txBody>
       </p:sp>
@@ -7586,7 +7161,7 @@
           <a:noFill/>
         </p:spPr>
         <p:txBody>
-          <a:bodyPr wrap="square" anchor="ctr" lIns="0" rIns="0" tIns="0" bIns="0">
+          <a:bodyPr wrap="square" lIns="0" tIns="0" rIns="0" bIns="0" anchor="ctr">
             <a:spAutoFit/>
           </a:bodyPr>
           <a:lstStyle/>
@@ -7661,6 +7236,7 @@
           <a:lstStyle/>
           <a:p>
             <a:pPr algn="ctr"/>
+            <a:endParaRPr/>
           </a:p>
         </p:txBody>
       </p:sp>
@@ -7681,7 +7257,7 @@
           <a:noFill/>
         </p:spPr>
         <p:txBody>
-          <a:bodyPr wrap="square" anchor="ctr" lIns="0" rIns="0" tIns="0" bIns="0">
+          <a:bodyPr wrap="square" lIns="0" tIns="0" rIns="0" bIns="0" anchor="ctr">
             <a:spAutoFit/>
           </a:bodyPr>
           <a:lstStyle/>
@@ -7759,6 +7335,7 @@
           <a:lstStyle/>
           <a:p>
             <a:pPr algn="ctr"/>
+            <a:endParaRPr/>
           </a:p>
         </p:txBody>
       </p:sp>
@@ -7779,7 +7356,7 @@
           <a:noFill/>
         </p:spPr>
         <p:txBody>
-          <a:bodyPr wrap="square" anchor="ctr" lIns="0" rIns="0" tIns="0" bIns="0">
+          <a:bodyPr wrap="square" lIns="0" tIns="0" rIns="0" bIns="0" anchor="ctr">
             <a:spAutoFit/>
           </a:bodyPr>
           <a:lstStyle/>
@@ -7822,7 +7399,7 @@
 </file>
 
 <file path=ppt/slides/slide12.xml><?xml version="1.0" encoding="utf-8"?>
-<p:sld xmlns:a="http://schemas.openxmlformats.org/drawingml/2006/main" xmlns:p="http://schemas.openxmlformats.org/presentationml/2006/main" xmlns:r="http://schemas.openxmlformats.org/officeDocument/2006/relationships">
+<p:sld xmlns:a="http://schemas.openxmlformats.org/drawingml/2006/main" xmlns:r="http://schemas.openxmlformats.org/officeDocument/2006/relationships" xmlns:p="http://schemas.openxmlformats.org/presentationml/2006/main">
   <p:cSld>
     <p:spTree>
       <p:nvGrpSpPr>
@@ -7830,7 +7407,14 @@
         <p:cNvGrpSpPr/>
         <p:nvPr/>
       </p:nvGrpSpPr>
-      <p:grpSpPr/>
+      <p:grpSpPr>
+        <a:xfrm>
+          <a:off x="0" y="0"/>
+          <a:ext cx="0" cy="0"/>
+          <a:chOff x="0" y="0"/>
+          <a:chExt cx="0" cy="0"/>
+        </a:xfrm>
+      </p:grpSpPr>
       <p:sp>
         <p:nvSpPr>
           <p:cNvPr id="2" name="Rectangle 1"/>
@@ -7871,6 +7455,7 @@
           <a:lstStyle/>
           <a:p>
             <a:pPr algn="ctr"/>
+            <a:endParaRPr/>
           </a:p>
         </p:txBody>
       </p:sp>
@@ -7914,6 +7499,7 @@
           <a:lstStyle/>
           <a:p>
             <a:pPr algn="ctr"/>
+            <a:endParaRPr/>
           </a:p>
         </p:txBody>
       </p:sp>
@@ -7934,7 +7520,7 @@
           <a:noFill/>
         </p:spPr>
         <p:txBody>
-          <a:bodyPr wrap="square" anchor="t" lIns="0" rIns="0" tIns="0" bIns="0">
+          <a:bodyPr wrap="square" lIns="0" tIns="0" rIns="0" bIns="0" anchor="t">
             <a:spAutoFit/>
           </a:bodyPr>
           <a:lstStyle/>
@@ -7969,7 +7555,7 @@
           <a:noFill/>
         </p:spPr>
         <p:txBody>
-          <a:bodyPr wrap="square" anchor="t" lIns="0" rIns="0" tIns="0" bIns="0">
+          <a:bodyPr wrap="square" lIns="0" tIns="0" rIns="0" bIns="0" anchor="t">
             <a:spAutoFit/>
           </a:bodyPr>
           <a:lstStyle/>
@@ -8031,6 +7617,7 @@
           <a:lstStyle/>
           <a:p>
             <a:pPr algn="ctr"/>
+            <a:endParaRPr/>
           </a:p>
         </p:txBody>
       </p:sp>
@@ -8043,7 +7630,7 @@
           <p:nvPr/>
         </p:nvPicPr>
         <p:blipFill>
-          <a:blip r:embed="rId2"/>
+          <a:blip r:embed="rId3"/>
           <a:stretch>
             <a:fillRect/>
           </a:stretch>
@@ -8098,6 +7685,7 @@
           <a:lstStyle/>
           <a:p>
             <a:pPr algn="ctr"/>
+            <a:endParaRPr/>
           </a:p>
         </p:txBody>
       </p:sp>
@@ -8141,41 +7729,7 @@
           <a:lstStyle/>
           <a:p>
             <a:pPr algn="ctr"/>
-          </a:p>
-        </p:txBody>
-      </p:sp>
-      <p:sp>
-        <p:nvSpPr>
-          <p:cNvPr id="10" name="TextBox 9"/>
-          <p:cNvSpPr txBox="1"/>
-          <p:nvPr/>
-        </p:nvSpPr>
-        <p:spPr>
-          <a:xfrm>
-            <a:off x="594360" y="6355080"/>
-            <a:ext cx="4572000" cy="502920"/>
-          </a:xfrm>
-          <a:prstGeom prst="rect">
-            <a:avLst/>
-          </a:prstGeom>
-          <a:noFill/>
-        </p:spPr>
-        <p:txBody>
-          <a:bodyPr wrap="square" anchor="ctr" lIns="0" rIns="0" tIns="0" bIns="0">
-            <a:spAutoFit/>
-          </a:bodyPr>
-          <a:lstStyle/>
-          <a:p>
-            <a:pPr algn="l"/>
-            <a:r>
-              <a:rPr sz="1000" b="0" i="0">
-                <a:solidFill>
-                  <a:srgbClr val="9FB3C8"/>
-                </a:solidFill>
-                <a:latin typeface="Segoe UI"/>
-              </a:rPr>
-              <a:t>ICT108  ·  MetMate case study</a:t>
-            </a:r>
+            <a:endParaRPr/>
           </a:p>
         </p:txBody>
       </p:sp>
@@ -8267,6 +7821,7 @@
           <a:lstStyle/>
           <a:p>
             <a:pPr algn="ctr"/>
+            <a:endParaRPr/>
           </a:p>
         </p:txBody>
       </p:sp>
@@ -8357,7 +7912,7 @@
           <a:noFill/>
         </p:spPr>
         <p:txBody>
-          <a:bodyPr wrap="square" anchor="t" lIns="0" rIns="0" tIns="0" bIns="0">
+          <a:bodyPr wrap="square" lIns="0" tIns="0" rIns="0" bIns="0" anchor="t">
             <a:spAutoFit/>
           </a:bodyPr>
           <a:lstStyle/>
@@ -8431,6 +7986,7 @@
           <a:lstStyle/>
           <a:p>
             <a:pPr algn="ctr"/>
+            <a:endParaRPr/>
           </a:p>
         </p:txBody>
       </p:sp>
@@ -8451,7 +8007,7 @@
           <a:noFill/>
         </p:spPr>
         <p:txBody>
-          <a:bodyPr wrap="square" anchor="t" lIns="0" rIns="0" tIns="0" bIns="0">
+          <a:bodyPr wrap="square" lIns="0" tIns="0" rIns="0" bIns="0" anchor="t">
             <a:spAutoFit/>
           </a:bodyPr>
           <a:lstStyle/>
@@ -8509,6 +8065,7 @@
           <a:lstStyle/>
           <a:p>
             <a:pPr algn="ctr"/>
+            <a:endParaRPr/>
           </a:p>
         </p:txBody>
       </p:sp>
@@ -8529,7 +8086,7 @@
           <a:noFill/>
         </p:spPr>
         <p:txBody>
-          <a:bodyPr wrap="square" anchor="t" lIns="0" rIns="0" tIns="0" bIns="0">
+          <a:bodyPr wrap="square" lIns="0" tIns="0" rIns="0" bIns="0" anchor="t">
             <a:spAutoFit/>
           </a:bodyPr>
           <a:lstStyle/>
@@ -8587,6 +8144,7 @@
           <a:lstStyle/>
           <a:p>
             <a:pPr algn="ctr"/>
+            <a:endParaRPr/>
           </a:p>
         </p:txBody>
       </p:sp>
@@ -8607,7 +8165,7 @@
           <a:noFill/>
         </p:spPr>
         <p:txBody>
-          <a:bodyPr wrap="square" anchor="t" lIns="0" rIns="0" tIns="0" bIns="0">
+          <a:bodyPr wrap="square" lIns="0" tIns="0" rIns="0" bIns="0" anchor="t">
             <a:spAutoFit/>
           </a:bodyPr>
           <a:lstStyle/>
@@ -8665,6 +8223,7 @@
           <a:lstStyle/>
           <a:p>
             <a:pPr algn="ctr"/>
+            <a:endParaRPr/>
           </a:p>
         </p:txBody>
       </p:sp>
@@ -8685,7 +8244,7 @@
           <a:noFill/>
         </p:spPr>
         <p:txBody>
-          <a:bodyPr wrap="square" anchor="t" lIns="0" rIns="0" tIns="0" bIns="0">
+          <a:bodyPr wrap="square" lIns="0" tIns="0" rIns="0" bIns="0" anchor="t">
             <a:spAutoFit/>
           </a:bodyPr>
           <a:lstStyle/>
@@ -8743,6 +8302,7 @@
           <a:lstStyle/>
           <a:p>
             <a:pPr algn="ctr"/>
+            <a:endParaRPr/>
           </a:p>
         </p:txBody>
       </p:sp>
@@ -8763,7 +8323,7 @@
           <a:noFill/>
         </p:spPr>
         <p:txBody>
-          <a:bodyPr wrap="square" anchor="t" lIns="0" rIns="0" tIns="0" bIns="0">
+          <a:bodyPr wrap="square" lIns="0" tIns="0" rIns="0" bIns="0" anchor="t">
             <a:spAutoFit/>
           </a:bodyPr>
           <a:lstStyle/>
@@ -8821,6 +8381,7 @@
           <a:lstStyle/>
           <a:p>
             <a:pPr algn="ctr"/>
+            <a:endParaRPr/>
           </a:p>
         </p:txBody>
       </p:sp>
@@ -8864,6 +8425,7 @@
           <a:lstStyle/>
           <a:p>
             <a:pPr algn="ctr"/>
+            <a:endParaRPr/>
           </a:p>
         </p:txBody>
       </p:sp>
@@ -8884,7 +8446,7 @@
           <a:noFill/>
         </p:spPr>
         <p:txBody>
-          <a:bodyPr wrap="square" anchor="t" lIns="0" rIns="0" tIns="0" bIns="0">
+          <a:bodyPr wrap="square" lIns="0" tIns="0" rIns="0" bIns="0" anchor="t">
             <a:spAutoFit/>
           </a:bodyPr>
           <a:lstStyle/>
@@ -8946,6 +8508,7 @@
           <a:lstStyle/>
           <a:p>
             <a:pPr algn="ctr"/>
+            <a:endParaRPr/>
           </a:p>
         </p:txBody>
       </p:sp>
@@ -8966,7 +8529,7 @@
           <a:noFill/>
         </p:spPr>
         <p:txBody>
-          <a:bodyPr wrap="square" anchor="ctr" lIns="0" rIns="0" tIns="0" bIns="0">
+          <a:bodyPr wrap="square" lIns="0" tIns="0" rIns="0" bIns="0" anchor="ctr">
             <a:spAutoFit/>
           </a:bodyPr>
           <a:lstStyle/>
@@ -9041,6 +8604,7 @@
           <a:lstStyle/>
           <a:p>
             <a:pPr algn="ctr"/>
+            <a:endParaRPr/>
           </a:p>
         </p:txBody>
       </p:sp>
@@ -9061,7 +8625,7 @@
           <a:noFill/>
         </p:spPr>
         <p:txBody>
-          <a:bodyPr wrap="square" anchor="ctr" lIns="0" rIns="0" tIns="0" bIns="0">
+          <a:bodyPr wrap="square" lIns="0" tIns="0" rIns="0" bIns="0" anchor="ctr">
             <a:spAutoFit/>
           </a:bodyPr>
           <a:lstStyle/>
@@ -9136,6 +8700,7 @@
           <a:lstStyle/>
           <a:p>
             <a:pPr algn="ctr"/>
+            <a:endParaRPr/>
           </a:p>
         </p:txBody>
       </p:sp>
@@ -9156,7 +8721,7 @@
           <a:noFill/>
         </p:spPr>
         <p:txBody>
-          <a:bodyPr wrap="square" anchor="ctr" lIns="0" rIns="0" tIns="0" bIns="0">
+          <a:bodyPr wrap="square" lIns="0" tIns="0" rIns="0" bIns="0" anchor="ctr">
             <a:spAutoFit/>
           </a:bodyPr>
           <a:lstStyle/>
@@ -9234,6 +8799,7 @@
           <a:lstStyle/>
           <a:p>
             <a:pPr algn="ctr"/>
+            <a:endParaRPr/>
           </a:p>
         </p:txBody>
       </p:sp>
@@ -9254,7 +8820,7 @@
           <a:noFill/>
         </p:spPr>
         <p:txBody>
-          <a:bodyPr wrap="square" anchor="ctr" lIns="0" rIns="0" tIns="0" bIns="0">
+          <a:bodyPr wrap="square" lIns="0" tIns="0" rIns="0" bIns="0" anchor="ctr">
             <a:spAutoFit/>
           </a:bodyPr>
           <a:lstStyle/>
@@ -9305,7 +8871,7 @@
           <a:noFill/>
         </p:spPr>
         <p:txBody>
-          <a:bodyPr wrap="square" anchor="t" lIns="0" rIns="0" tIns="0" bIns="0">
+          <a:bodyPr wrap="square" lIns="0" tIns="0" rIns="0" bIns="0" anchor="t">
             <a:spAutoFit/>
           </a:bodyPr>
           <a:lstStyle/>
@@ -9332,7 +8898,7 @@
 </file>
 
 <file path=ppt/slides/slide13.xml><?xml version="1.0" encoding="utf-8"?>
-<p:sld xmlns:a="http://schemas.openxmlformats.org/drawingml/2006/main" xmlns:p="http://schemas.openxmlformats.org/presentationml/2006/main" xmlns:r="http://schemas.openxmlformats.org/officeDocument/2006/relationships">
+<p:sld xmlns:a="http://schemas.openxmlformats.org/drawingml/2006/main" xmlns:r="http://schemas.openxmlformats.org/officeDocument/2006/relationships" xmlns:p="http://schemas.openxmlformats.org/presentationml/2006/main">
   <p:cSld>
     <p:spTree>
       <p:nvGrpSpPr>
@@ -9340,7 +8906,14 @@
         <p:cNvGrpSpPr/>
         <p:nvPr/>
       </p:nvGrpSpPr>
-      <p:grpSpPr/>
+      <p:grpSpPr>
+        <a:xfrm>
+          <a:off x="0" y="0"/>
+          <a:ext cx="0" cy="0"/>
+          <a:chOff x="0" y="0"/>
+          <a:chExt cx="0" cy="0"/>
+        </a:xfrm>
+      </p:grpSpPr>
       <p:sp>
         <p:nvSpPr>
           <p:cNvPr id="2" name="Rectangle 1"/>
@@ -9381,6 +8954,7 @@
           <a:lstStyle/>
           <a:p>
             <a:pPr algn="ctr"/>
+            <a:endParaRPr/>
           </a:p>
         </p:txBody>
       </p:sp>
@@ -9424,6 +8998,7 @@
           <a:lstStyle/>
           <a:p>
             <a:pPr algn="ctr"/>
+            <a:endParaRPr/>
           </a:p>
         </p:txBody>
       </p:sp>
@@ -9444,7 +9019,7 @@
           <a:noFill/>
         </p:spPr>
         <p:txBody>
-          <a:bodyPr wrap="square" anchor="t" lIns="0" rIns="0" tIns="0" bIns="0">
+          <a:bodyPr wrap="square" lIns="0" tIns="0" rIns="0" bIns="0" anchor="t">
             <a:spAutoFit/>
           </a:bodyPr>
           <a:lstStyle/>
@@ -9479,7 +9054,7 @@
           <a:noFill/>
         </p:spPr>
         <p:txBody>
-          <a:bodyPr wrap="square" anchor="t" lIns="0" rIns="0" tIns="0" bIns="0">
+          <a:bodyPr wrap="square" lIns="0" tIns="0" rIns="0" bIns="0" anchor="t">
             <a:spAutoFit/>
           </a:bodyPr>
           <a:lstStyle/>
@@ -9541,6 +9116,7 @@
           <a:lstStyle/>
           <a:p>
             <a:pPr algn="ctr"/>
+            <a:endParaRPr/>
           </a:p>
         </p:txBody>
       </p:sp>
@@ -9553,7 +9129,7 @@
           <p:nvPr/>
         </p:nvPicPr>
         <p:blipFill>
-          <a:blip r:embed="rId2"/>
+          <a:blip r:embed="rId3"/>
           <a:stretch>
             <a:fillRect/>
           </a:stretch>
@@ -9608,6 +9184,7 @@
           <a:lstStyle/>
           <a:p>
             <a:pPr algn="ctr"/>
+            <a:endParaRPr/>
           </a:p>
         </p:txBody>
       </p:sp>
@@ -9651,41 +9228,7 @@
           <a:lstStyle/>
           <a:p>
             <a:pPr algn="ctr"/>
-          </a:p>
-        </p:txBody>
-      </p:sp>
-      <p:sp>
-        <p:nvSpPr>
-          <p:cNvPr id="10" name="TextBox 9"/>
-          <p:cNvSpPr txBox="1"/>
-          <p:nvPr/>
-        </p:nvSpPr>
-        <p:spPr>
-          <a:xfrm>
-            <a:off x="594360" y="6355080"/>
-            <a:ext cx="4572000" cy="502920"/>
-          </a:xfrm>
-          <a:prstGeom prst="rect">
-            <a:avLst/>
-          </a:prstGeom>
-          <a:noFill/>
-        </p:spPr>
-        <p:txBody>
-          <a:bodyPr wrap="square" anchor="ctr" lIns="0" rIns="0" tIns="0" bIns="0">
-            <a:spAutoFit/>
-          </a:bodyPr>
-          <a:lstStyle/>
-          <a:p>
-            <a:pPr algn="l"/>
-            <a:r>
-              <a:rPr sz="1000" b="0" i="0">
-                <a:solidFill>
-                  <a:srgbClr val="9FB3C8"/>
-                </a:solidFill>
-                <a:latin typeface="Segoe UI"/>
-              </a:rPr>
-              <a:t>ICT108  ·  MetMate case study</a:t>
-            </a:r>
+            <a:endParaRPr/>
           </a:p>
         </p:txBody>
       </p:sp>
@@ -9750,7 +9293,7 @@
           <a:noFill/>
         </p:spPr>
         <p:txBody>
-          <a:bodyPr wrap="square" anchor="t" lIns="0" rIns="0" tIns="0" bIns="0">
+          <a:bodyPr wrap="square" lIns="0" tIns="0" rIns="0" bIns="0" anchor="t">
             <a:spAutoFit/>
           </a:bodyPr>
           <a:lstStyle/>
@@ -9812,6 +9355,7 @@
           <a:lstStyle/>
           <a:p>
             <a:pPr algn="ctr"/>
+            <a:endParaRPr/>
           </a:p>
         </p:txBody>
       </p:sp>
@@ -9832,7 +9376,7 @@
           <a:noFill/>
         </p:spPr>
         <p:txBody>
-          <a:bodyPr wrap="square" anchor="t" lIns="0" rIns="0" tIns="0" bIns="0">
+          <a:bodyPr wrap="square" lIns="0" tIns="0" rIns="0" bIns="0" anchor="t">
             <a:spAutoFit/>
           </a:bodyPr>
           <a:lstStyle/>
@@ -9867,7 +9411,7 @@
           <a:noFill/>
         </p:spPr>
         <p:txBody>
-          <a:bodyPr wrap="square" anchor="t" lIns="0" rIns="0" tIns="0" bIns="0">
+          <a:bodyPr wrap="square" lIns="0" tIns="0" rIns="0" bIns="0" anchor="t">
             <a:spAutoFit/>
           </a:bodyPr>
           <a:lstStyle/>
@@ -9929,6 +9473,7 @@
           <a:lstStyle/>
           <a:p>
             <a:pPr algn="ctr"/>
+            <a:endParaRPr/>
           </a:p>
         </p:txBody>
       </p:sp>
@@ -9949,7 +9494,7 @@
           <a:noFill/>
         </p:spPr>
         <p:txBody>
-          <a:bodyPr wrap="square" anchor="t" lIns="0" rIns="0" tIns="0" bIns="0">
+          <a:bodyPr wrap="square" lIns="0" tIns="0" rIns="0" bIns="0" anchor="t">
             <a:spAutoFit/>
           </a:bodyPr>
           <a:lstStyle/>
@@ -9984,7 +9529,7 @@
           <a:noFill/>
         </p:spPr>
         <p:txBody>
-          <a:bodyPr wrap="square" anchor="t" lIns="0" rIns="0" tIns="0" bIns="0">
+          <a:bodyPr wrap="square" lIns="0" tIns="0" rIns="0" bIns="0" anchor="t">
             <a:spAutoFit/>
           </a:bodyPr>
           <a:lstStyle/>
@@ -10044,6 +9589,7 @@
           <a:lstStyle/>
           <a:p>
             <a:pPr algn="ctr"/>
+            <a:endParaRPr/>
           </a:p>
         </p:txBody>
       </p:sp>
@@ -10064,7 +9610,7 @@
           <a:noFill/>
         </p:spPr>
         <p:txBody>
-          <a:bodyPr wrap="square" anchor="t" lIns="0" rIns="0" tIns="0" bIns="0">
+          <a:bodyPr wrap="square" lIns="0" tIns="0" rIns="0" bIns="0" anchor="t">
             <a:spAutoFit/>
           </a:bodyPr>
           <a:lstStyle/>
@@ -10099,7 +9645,7 @@
           <a:noFill/>
         </p:spPr>
         <p:txBody>
-          <a:bodyPr wrap="square" anchor="t" lIns="0" rIns="0" tIns="0" bIns="0">
+          <a:bodyPr wrap="square" lIns="0" tIns="0" rIns="0" bIns="0" anchor="t">
             <a:spAutoFit/>
           </a:bodyPr>
           <a:lstStyle/>
@@ -10159,6 +9705,7 @@
           <a:lstStyle/>
           <a:p>
             <a:pPr algn="ctr"/>
+            <a:endParaRPr/>
           </a:p>
         </p:txBody>
       </p:sp>
@@ -10179,7 +9726,7 @@
           <a:noFill/>
         </p:spPr>
         <p:txBody>
-          <a:bodyPr wrap="square" anchor="t" lIns="0" rIns="0" tIns="0" bIns="0">
+          <a:bodyPr wrap="square" lIns="0" tIns="0" rIns="0" bIns="0" anchor="t">
             <a:spAutoFit/>
           </a:bodyPr>
           <a:lstStyle/>
@@ -10214,7 +9761,7 @@
           <a:noFill/>
         </p:spPr>
         <p:txBody>
-          <a:bodyPr wrap="square" anchor="t" lIns="0" rIns="0" tIns="0" bIns="0">
+          <a:bodyPr wrap="square" lIns="0" tIns="0" rIns="0" bIns="0" anchor="t">
             <a:spAutoFit/>
           </a:bodyPr>
           <a:lstStyle/>
@@ -10274,6 +9821,7 @@
           <a:lstStyle/>
           <a:p>
             <a:pPr algn="ctr"/>
+            <a:endParaRPr/>
           </a:p>
         </p:txBody>
       </p:sp>
@@ -10294,7 +9842,7 @@
           <a:noFill/>
         </p:spPr>
         <p:txBody>
-          <a:bodyPr wrap="square" anchor="t" lIns="0" rIns="0" tIns="0" bIns="0">
+          <a:bodyPr wrap="square" lIns="0" tIns="0" rIns="0" bIns="0" anchor="t">
             <a:spAutoFit/>
           </a:bodyPr>
           <a:lstStyle/>
@@ -10356,6 +9904,7 @@
           <a:lstStyle/>
           <a:p>
             <a:pPr algn="ctr"/>
+            <a:endParaRPr/>
           </a:p>
         </p:txBody>
       </p:sp>
@@ -10376,7 +9925,7 @@
           <a:noFill/>
         </p:spPr>
         <p:txBody>
-          <a:bodyPr wrap="square" anchor="t" lIns="0" rIns="0" tIns="0" bIns="0">
+          <a:bodyPr wrap="square" lIns="0" tIns="0" rIns="0" bIns="0" anchor="t">
             <a:spAutoFit/>
           </a:bodyPr>
           <a:lstStyle/>
@@ -10506,6 +10055,7 @@
           <a:lstStyle/>
           <a:p>
             <a:pPr algn="ctr"/>
+            <a:endParaRPr/>
           </a:p>
         </p:txBody>
       </p:sp>
@@ -10526,7 +10076,7 @@
           <a:noFill/>
         </p:spPr>
         <p:txBody>
-          <a:bodyPr wrap="square" anchor="ctr" lIns="0" rIns="0" tIns="0" bIns="0">
+          <a:bodyPr wrap="square" lIns="0" tIns="0" rIns="0" bIns="0" anchor="ctr">
             <a:spAutoFit/>
           </a:bodyPr>
           <a:lstStyle/>
@@ -10566,7 +10116,7 @@
 </file>
 
 <file path=ppt/slides/slide14.xml><?xml version="1.0" encoding="utf-8"?>
-<p:sld xmlns:a="http://schemas.openxmlformats.org/drawingml/2006/main" xmlns:p="http://schemas.openxmlformats.org/presentationml/2006/main" xmlns:r="http://schemas.openxmlformats.org/officeDocument/2006/relationships">
+<p:sld xmlns:a="http://schemas.openxmlformats.org/drawingml/2006/main" xmlns:r="http://schemas.openxmlformats.org/officeDocument/2006/relationships" xmlns:p="http://schemas.openxmlformats.org/presentationml/2006/main">
   <p:cSld>
     <p:spTree>
       <p:nvGrpSpPr>
@@ -10574,7 +10124,14 @@
         <p:cNvGrpSpPr/>
         <p:nvPr/>
       </p:nvGrpSpPr>
-      <p:grpSpPr/>
+      <p:grpSpPr>
+        <a:xfrm>
+          <a:off x="0" y="0"/>
+          <a:ext cx="0" cy="0"/>
+          <a:chOff x="0" y="0"/>
+          <a:chExt cx="0" cy="0"/>
+        </a:xfrm>
+      </p:grpSpPr>
       <p:sp>
         <p:nvSpPr>
           <p:cNvPr id="2" name="Rectangle 1"/>
@@ -10615,6 +10172,7 @@
           <a:lstStyle/>
           <a:p>
             <a:pPr algn="ctr"/>
+            <a:endParaRPr/>
           </a:p>
         </p:txBody>
       </p:sp>
@@ -10658,6 +10216,7 @@
           <a:lstStyle/>
           <a:p>
             <a:pPr algn="ctr"/>
+            <a:endParaRPr/>
           </a:p>
         </p:txBody>
       </p:sp>
@@ -10678,7 +10237,7 @@
           <a:noFill/>
         </p:spPr>
         <p:txBody>
-          <a:bodyPr wrap="square" anchor="t" lIns="0" rIns="0" tIns="0" bIns="0">
+          <a:bodyPr wrap="square" lIns="0" tIns="0" rIns="0" bIns="0" anchor="t">
             <a:spAutoFit/>
           </a:bodyPr>
           <a:lstStyle/>
@@ -10713,7 +10272,7 @@
           <a:noFill/>
         </p:spPr>
         <p:txBody>
-          <a:bodyPr wrap="square" anchor="t" lIns="0" rIns="0" tIns="0" bIns="0">
+          <a:bodyPr wrap="square" lIns="0" tIns="0" rIns="0" bIns="0" anchor="t">
             <a:spAutoFit/>
           </a:bodyPr>
           <a:lstStyle/>
@@ -10775,6 +10334,7 @@
           <a:lstStyle/>
           <a:p>
             <a:pPr algn="ctr"/>
+            <a:endParaRPr/>
           </a:p>
         </p:txBody>
       </p:sp>
@@ -10787,7 +10347,7 @@
           <p:nvPr/>
         </p:nvPicPr>
         <p:blipFill>
-          <a:blip r:embed="rId2"/>
+          <a:blip r:embed="rId3"/>
           <a:stretch>
             <a:fillRect/>
           </a:stretch>
@@ -10802,49 +10362,6 @@
           </a:prstGeom>
         </p:spPr>
       </p:pic>
-      <p:sp>
-        <p:nvSpPr>
-          <p:cNvPr id="8" name="Rectangle 7"/>
-          <p:cNvSpPr/>
-          <p:nvPr/>
-        </p:nvSpPr>
-        <p:spPr>
-          <a:xfrm>
-            <a:off x="0" y="6355080"/>
-            <a:ext cx="12191695" cy="502920"/>
-          </a:xfrm>
-          <a:prstGeom prst="rect">
-            <a:avLst/>
-          </a:prstGeom>
-          <a:solidFill>
-            <a:srgbClr val="0F2240"/>
-          </a:solidFill>
-          <a:ln>
-            <a:noFill/>
-          </a:ln>
-        </p:spPr>
-        <p:style>
-          <a:lnRef idx="1">
-            <a:schemeClr val="accent1"/>
-          </a:lnRef>
-          <a:fillRef idx="3">
-            <a:schemeClr val="accent1"/>
-          </a:fillRef>
-          <a:effectRef idx="2">
-            <a:schemeClr val="accent1"/>
-          </a:effectRef>
-          <a:fontRef idx="minor">
-            <a:schemeClr val="lt1"/>
-          </a:fontRef>
-        </p:style>
-        <p:txBody>
-          <a:bodyPr rtlCol="0" anchor="ctr"/>
-          <a:lstStyle/>
-          <a:p>
-            <a:pPr algn="ctr"/>
-          </a:p>
-        </p:txBody>
-      </p:sp>
       <p:sp>
         <p:nvSpPr>
           <p:cNvPr id="9" name="Rectangle 8"/>
@@ -10885,41 +10402,7 @@
           <a:lstStyle/>
           <a:p>
             <a:pPr algn="ctr"/>
-          </a:p>
-        </p:txBody>
-      </p:sp>
-      <p:sp>
-        <p:nvSpPr>
-          <p:cNvPr id="10" name="TextBox 9"/>
-          <p:cNvSpPr txBox="1"/>
-          <p:nvPr/>
-        </p:nvSpPr>
-        <p:spPr>
-          <a:xfrm>
-            <a:off x="594360" y="6355080"/>
-            <a:ext cx="4572000" cy="502920"/>
-          </a:xfrm>
-          <a:prstGeom prst="rect">
-            <a:avLst/>
-          </a:prstGeom>
-          <a:noFill/>
-        </p:spPr>
-        <p:txBody>
-          <a:bodyPr wrap="square" anchor="ctr" lIns="0" rIns="0" tIns="0" bIns="0">
-            <a:spAutoFit/>
-          </a:bodyPr>
-          <a:lstStyle/>
-          <a:p>
-            <a:pPr algn="l"/>
-            <a:r>
-              <a:rPr sz="1000" b="0" i="0">
-                <a:solidFill>
-                  <a:srgbClr val="9FB3C8"/>
-                </a:solidFill>
-                <a:latin typeface="Segoe UI"/>
-              </a:rPr>
-              <a:t>ICT108  ·  MetMate case study</a:t>
-            </a:r>
+            <a:endParaRPr/>
           </a:p>
         </p:txBody>
       </p:sp>
@@ -11011,6 +10494,7 @@
           <a:lstStyle/>
           <a:p>
             <a:pPr algn="ctr"/>
+            <a:endParaRPr/>
           </a:p>
         </p:txBody>
       </p:sp>
@@ -11031,7 +10515,7 @@
           <a:noFill/>
         </p:spPr>
         <p:txBody>
-          <a:bodyPr wrap="square" anchor="t" lIns="0" rIns="0" tIns="0" bIns="0">
+          <a:bodyPr wrap="square" lIns="0" tIns="0" rIns="0" bIns="0" anchor="t">
             <a:spAutoFit/>
           </a:bodyPr>
           <a:lstStyle/>
@@ -11066,7 +10550,7 @@
           <a:noFill/>
         </p:spPr>
         <p:txBody>
-          <a:bodyPr wrap="square" anchor="ctr" lIns="0" rIns="0" tIns="0" bIns="0">
+          <a:bodyPr wrap="square" lIns="0" tIns="0" rIns="0" bIns="0" anchor="ctr">
             <a:spAutoFit/>
           </a:bodyPr>
           <a:lstStyle/>
@@ -11105,7 +10589,7 @@
           <a:noFill/>
         </p:spPr>
         <p:txBody>
-          <a:bodyPr wrap="square" anchor="ctr" lIns="0" rIns="0" tIns="0" bIns="0">
+          <a:bodyPr wrap="square" lIns="0" tIns="0" rIns="0" bIns="0" anchor="ctr">
             <a:spAutoFit/>
           </a:bodyPr>
           <a:lstStyle/>
@@ -11140,7 +10624,7 @@
           <a:noFill/>
         </p:spPr>
         <p:txBody>
-          <a:bodyPr wrap="square" anchor="ctr" lIns="0" rIns="0" tIns="0" bIns="0">
+          <a:bodyPr wrap="square" lIns="0" tIns="0" rIns="0" bIns="0" anchor="ctr">
             <a:spAutoFit/>
           </a:bodyPr>
           <a:lstStyle/>
@@ -11179,7 +10663,7 @@
           <a:noFill/>
         </p:spPr>
         <p:txBody>
-          <a:bodyPr wrap="square" anchor="ctr" lIns="0" rIns="0" tIns="0" bIns="0">
+          <a:bodyPr wrap="square" lIns="0" tIns="0" rIns="0" bIns="0" anchor="ctr">
             <a:spAutoFit/>
           </a:bodyPr>
           <a:lstStyle/>
@@ -11214,7 +10698,7 @@
           <a:noFill/>
         </p:spPr>
         <p:txBody>
-          <a:bodyPr wrap="square" anchor="ctr" lIns="0" rIns="0" tIns="0" bIns="0">
+          <a:bodyPr wrap="square" lIns="0" tIns="0" rIns="0" bIns="0" anchor="ctr">
             <a:spAutoFit/>
           </a:bodyPr>
           <a:lstStyle/>
@@ -11253,7 +10737,7 @@
           <a:noFill/>
         </p:spPr>
         <p:txBody>
-          <a:bodyPr wrap="square" anchor="ctr" lIns="0" rIns="0" tIns="0" bIns="0">
+          <a:bodyPr wrap="square" lIns="0" tIns="0" rIns="0" bIns="0" anchor="ctr">
             <a:spAutoFit/>
           </a:bodyPr>
           <a:lstStyle/>
@@ -11315,6 +10799,7 @@
           <a:lstStyle/>
           <a:p>
             <a:pPr algn="ctr"/>
+            <a:endParaRPr/>
           </a:p>
         </p:txBody>
       </p:sp>
@@ -11335,7 +10820,7 @@
           <a:noFill/>
         </p:spPr>
         <p:txBody>
-          <a:bodyPr wrap="square" anchor="ctr" lIns="0" rIns="0" tIns="0" bIns="0">
+          <a:bodyPr wrap="square" lIns="0" tIns="0" rIns="0" bIns="0" anchor="ctr">
             <a:spAutoFit/>
           </a:bodyPr>
           <a:lstStyle/>
@@ -11410,6 +10895,7 @@
           <a:lstStyle/>
           <a:p>
             <a:pPr algn="ctr"/>
+            <a:endParaRPr/>
           </a:p>
         </p:txBody>
       </p:sp>
@@ -11430,7 +10916,7 @@
           <a:noFill/>
         </p:spPr>
         <p:txBody>
-          <a:bodyPr wrap="square" anchor="ctr" lIns="0" rIns="0" tIns="0" bIns="0">
+          <a:bodyPr wrap="square" lIns="0" tIns="0" rIns="0" bIns="0" anchor="ctr">
             <a:spAutoFit/>
           </a:bodyPr>
           <a:lstStyle/>
@@ -11496,6 +10982,7 @@
           <a:lstStyle/>
           <a:p>
             <a:pPr algn="ctr"/>
+            <a:endParaRPr/>
           </a:p>
         </p:txBody>
       </p:sp>
@@ -11516,7 +11003,7 @@
           <a:noFill/>
         </p:spPr>
         <p:txBody>
-          <a:bodyPr wrap="square" anchor="ctr" lIns="0" rIns="0" tIns="0" bIns="0">
+          <a:bodyPr wrap="square" lIns="0" tIns="0" rIns="0" bIns="0" anchor="ctr">
             <a:spAutoFit/>
           </a:bodyPr>
           <a:lstStyle/>
@@ -11578,6 +11065,7 @@
           <a:lstStyle/>
           <a:p>
             <a:pPr algn="ctr"/>
+            <a:endParaRPr/>
           </a:p>
         </p:txBody>
       </p:sp>
@@ -11625,6 +11113,7 @@
           <a:lstStyle/>
           <a:p>
             <a:pPr algn="ctr"/>
+            <a:endParaRPr/>
           </a:p>
         </p:txBody>
       </p:sp>
@@ -11645,7 +11134,7 @@
           <a:noFill/>
         </p:spPr>
         <p:txBody>
-          <a:bodyPr wrap="square" anchor="ctr" lIns="0" rIns="0" tIns="0" bIns="0">
+          <a:bodyPr wrap="square" lIns="0" tIns="0" rIns="0" bIns="0" anchor="ctr">
             <a:spAutoFit/>
           </a:bodyPr>
           <a:lstStyle/>
@@ -11703,6 +11192,7 @@
           <a:lstStyle/>
           <a:p>
             <a:pPr algn="ctr"/>
+            <a:endParaRPr/>
           </a:p>
         </p:txBody>
       </p:sp>
@@ -11750,6 +11240,7 @@
           <a:lstStyle/>
           <a:p>
             <a:pPr algn="ctr"/>
+            <a:endParaRPr/>
           </a:p>
         </p:txBody>
       </p:sp>
@@ -11770,7 +11261,7 @@
           <a:noFill/>
         </p:spPr>
         <p:txBody>
-          <a:bodyPr wrap="square" anchor="ctr" lIns="0" rIns="0" tIns="0" bIns="0">
+          <a:bodyPr wrap="square" lIns="0" tIns="0" rIns="0" bIns="0" anchor="ctr">
             <a:spAutoFit/>
           </a:bodyPr>
           <a:lstStyle/>
@@ -11821,7 +11312,7 @@
           <a:noFill/>
         </p:spPr>
         <p:txBody>
-          <a:bodyPr wrap="square" anchor="t" lIns="0" rIns="0" tIns="0" bIns="0">
+          <a:bodyPr wrap="square" lIns="0" tIns="0" rIns="0" bIns="0" anchor="t">
             <a:spAutoFit/>
           </a:bodyPr>
           <a:lstStyle/>
@@ -11856,7 +11347,7 @@
           <a:noFill/>
         </p:spPr>
         <p:txBody>
-          <a:bodyPr wrap="square" anchor="t" lIns="0" rIns="0" tIns="0" bIns="0">
+          <a:bodyPr wrap="square" lIns="0" tIns="0" rIns="0" bIns="0" anchor="t">
             <a:spAutoFit/>
           </a:bodyPr>
           <a:lstStyle/>
@@ -11883,7 +11374,7 @@
 </file>
 
 <file path=ppt/slides/slide15.xml><?xml version="1.0" encoding="utf-8"?>
-<p:sld xmlns:a="http://schemas.openxmlformats.org/drawingml/2006/main" xmlns:p="http://schemas.openxmlformats.org/presentationml/2006/main" xmlns:r="http://schemas.openxmlformats.org/officeDocument/2006/relationships">
+<p:sld xmlns:a="http://schemas.openxmlformats.org/drawingml/2006/main" xmlns:r="http://schemas.openxmlformats.org/officeDocument/2006/relationships" xmlns:p="http://schemas.openxmlformats.org/presentationml/2006/main">
   <p:cSld>
     <p:spTree>
       <p:nvGrpSpPr>
@@ -11891,7 +11382,14 @@
         <p:cNvGrpSpPr/>
         <p:nvPr/>
       </p:nvGrpSpPr>
-      <p:grpSpPr/>
+      <p:grpSpPr>
+        <a:xfrm>
+          <a:off x="0" y="0"/>
+          <a:ext cx="0" cy="0"/>
+          <a:chOff x="0" y="0"/>
+          <a:chExt cx="0" cy="0"/>
+        </a:xfrm>
+      </p:grpSpPr>
       <p:sp>
         <p:nvSpPr>
           <p:cNvPr id="2" name="Rectangle 1"/>
@@ -11932,6 +11430,7 @@
           <a:lstStyle/>
           <a:p>
             <a:pPr algn="ctr"/>
+            <a:endParaRPr/>
           </a:p>
         </p:txBody>
       </p:sp>
@@ -11975,6 +11474,7 @@
           <a:lstStyle/>
           <a:p>
             <a:pPr algn="ctr"/>
+            <a:endParaRPr/>
           </a:p>
         </p:txBody>
       </p:sp>
@@ -11995,7 +11495,7 @@
           <a:noFill/>
         </p:spPr>
         <p:txBody>
-          <a:bodyPr wrap="square" anchor="t" lIns="0" rIns="0" tIns="0" bIns="0">
+          <a:bodyPr wrap="square" lIns="0" tIns="0" rIns="0" bIns="0" anchor="t">
             <a:spAutoFit/>
           </a:bodyPr>
           <a:lstStyle/>
@@ -12030,7 +11530,7 @@
           <a:noFill/>
         </p:spPr>
         <p:txBody>
-          <a:bodyPr wrap="square" anchor="t" lIns="0" rIns="0" tIns="0" bIns="0">
+          <a:bodyPr wrap="square" lIns="0" tIns="0" rIns="0" bIns="0" anchor="t">
             <a:spAutoFit/>
           </a:bodyPr>
           <a:lstStyle/>
@@ -12092,6 +11592,7 @@
           <a:lstStyle/>
           <a:p>
             <a:pPr algn="ctr"/>
+            <a:endParaRPr/>
           </a:p>
         </p:txBody>
       </p:sp>
@@ -12104,7 +11605,7 @@
           <p:nvPr/>
         </p:nvPicPr>
         <p:blipFill>
-          <a:blip r:embed="rId2"/>
+          <a:blip r:embed="rId3"/>
           <a:stretch>
             <a:fillRect/>
           </a:stretch>
@@ -12159,6 +11660,7 @@
           <a:lstStyle/>
           <a:p>
             <a:pPr algn="ctr"/>
+            <a:endParaRPr/>
           </a:p>
         </p:txBody>
       </p:sp>
@@ -12202,41 +11704,7 @@
           <a:lstStyle/>
           <a:p>
             <a:pPr algn="ctr"/>
-          </a:p>
-        </p:txBody>
-      </p:sp>
-      <p:sp>
-        <p:nvSpPr>
-          <p:cNvPr id="10" name="TextBox 9"/>
-          <p:cNvSpPr txBox="1"/>
-          <p:nvPr/>
-        </p:nvSpPr>
-        <p:spPr>
-          <a:xfrm>
-            <a:off x="594360" y="6355080"/>
-            <a:ext cx="4572000" cy="502920"/>
-          </a:xfrm>
-          <a:prstGeom prst="rect">
-            <a:avLst/>
-          </a:prstGeom>
-          <a:noFill/>
-        </p:spPr>
-        <p:txBody>
-          <a:bodyPr wrap="square" anchor="ctr" lIns="0" rIns="0" tIns="0" bIns="0">
-            <a:spAutoFit/>
-          </a:bodyPr>
-          <a:lstStyle/>
-          <a:p>
-            <a:pPr algn="l"/>
-            <a:r>
-              <a:rPr sz="1000" b="0" i="0">
-                <a:solidFill>
-                  <a:srgbClr val="9FB3C8"/>
-                </a:solidFill>
-                <a:latin typeface="Segoe UI"/>
-              </a:rPr>
-              <a:t>ICT108  ·  MetMate case study</a:t>
-            </a:r>
+            <a:endParaRPr/>
           </a:p>
         </p:txBody>
       </p:sp>
@@ -12301,7 +11769,7 @@
           <a:noFill/>
         </p:spPr>
         <p:txBody>
-          <a:bodyPr wrap="square" anchor="t" lIns="0" rIns="0" tIns="0" bIns="0">
+          <a:bodyPr wrap="square" lIns="0" tIns="0" rIns="0" bIns="0" anchor="t">
             <a:spAutoFit/>
           </a:bodyPr>
           <a:lstStyle/>
@@ -12363,6 +11831,7 @@
           <a:lstStyle/>
           <a:p>
             <a:pPr algn="ctr"/>
+            <a:endParaRPr/>
           </a:p>
         </p:txBody>
       </p:sp>
@@ -12383,7 +11852,7 @@
           <a:noFill/>
         </p:spPr>
         <p:txBody>
-          <a:bodyPr wrap="square" anchor="t" lIns="0" rIns="0" tIns="0" bIns="0">
+          <a:bodyPr wrap="square" lIns="0" tIns="0" rIns="0" bIns="0" anchor="t">
             <a:spAutoFit/>
           </a:bodyPr>
           <a:lstStyle/>
@@ -12445,6 +11914,7 @@
           <a:lstStyle/>
           <a:p>
             <a:pPr algn="ctr"/>
+            <a:endParaRPr/>
           </a:p>
         </p:txBody>
       </p:sp>
@@ -12465,7 +11935,7 @@
           <a:noFill/>
         </p:spPr>
         <p:txBody>
-          <a:bodyPr wrap="square" anchor="t" lIns="0" rIns="0" tIns="0" bIns="0">
+          <a:bodyPr wrap="square" lIns="0" tIns="0" rIns="0" bIns="0" anchor="t">
             <a:spAutoFit/>
           </a:bodyPr>
           <a:lstStyle/>
@@ -12527,6 +11997,7 @@
           <a:lstStyle/>
           <a:p>
             <a:pPr algn="ctr"/>
+            <a:endParaRPr/>
           </a:p>
         </p:txBody>
       </p:sp>
@@ -12547,7 +12018,7 @@
           <a:noFill/>
         </p:spPr>
         <p:txBody>
-          <a:bodyPr wrap="square" anchor="t" lIns="0" rIns="0" tIns="0" bIns="0">
+          <a:bodyPr wrap="square" lIns="0" tIns="0" rIns="0" bIns="0" anchor="t">
             <a:spAutoFit/>
           </a:bodyPr>
           <a:lstStyle/>
@@ -12609,6 +12080,7 @@
           <a:lstStyle/>
           <a:p>
             <a:pPr algn="ctr"/>
+            <a:endParaRPr/>
           </a:p>
         </p:txBody>
       </p:sp>
@@ -12629,7 +12101,7 @@
           <a:noFill/>
         </p:spPr>
         <p:txBody>
-          <a:bodyPr wrap="square" anchor="ctr" lIns="0" rIns="0" tIns="0" bIns="0">
+          <a:bodyPr wrap="square" lIns="0" tIns="0" rIns="0" bIns="0" anchor="ctr">
             <a:spAutoFit/>
           </a:bodyPr>
           <a:lstStyle/>
@@ -12691,6 +12163,7 @@
           <a:lstStyle/>
           <a:p>
             <a:pPr algn="ctr"/>
+            <a:endParaRPr/>
           </a:p>
         </p:txBody>
       </p:sp>
@@ -12738,6 +12211,7 @@
           <a:lstStyle/>
           <a:p>
             <a:pPr algn="ctr"/>
+            <a:endParaRPr/>
           </a:p>
         </p:txBody>
       </p:sp>
@@ -12758,7 +12232,7 @@
           <a:noFill/>
         </p:spPr>
         <p:txBody>
-          <a:bodyPr wrap="square" anchor="ctr" lIns="0" rIns="0" tIns="0" bIns="0">
+          <a:bodyPr wrap="square" lIns="0" tIns="0" rIns="0" bIns="0" anchor="ctr">
             <a:spAutoFit/>
           </a:bodyPr>
           <a:lstStyle/>
@@ -12820,6 +12294,7 @@
           <a:lstStyle/>
           <a:p>
             <a:pPr algn="ctr"/>
+            <a:endParaRPr/>
           </a:p>
         </p:txBody>
       </p:sp>
@@ -12867,6 +12342,7 @@
           <a:lstStyle/>
           <a:p>
             <a:pPr algn="ctr"/>
+            <a:endParaRPr/>
           </a:p>
         </p:txBody>
       </p:sp>
@@ -12887,7 +12363,7 @@
           <a:noFill/>
         </p:spPr>
         <p:txBody>
-          <a:bodyPr wrap="square" anchor="ctr" lIns="0" rIns="0" tIns="0" bIns="0">
+          <a:bodyPr wrap="square" lIns="0" tIns="0" rIns="0" bIns="0" anchor="ctr">
             <a:spAutoFit/>
           </a:bodyPr>
           <a:lstStyle/>
@@ -12949,6 +12425,7 @@
           <a:lstStyle/>
           <a:p>
             <a:pPr algn="ctr"/>
+            <a:endParaRPr/>
           </a:p>
         </p:txBody>
       </p:sp>
@@ -12996,6 +12473,7 @@
           <a:lstStyle/>
           <a:p>
             <a:pPr algn="ctr"/>
+            <a:endParaRPr/>
           </a:p>
         </p:txBody>
       </p:sp>
@@ -13016,7 +12494,7 @@
           <a:noFill/>
         </p:spPr>
         <p:txBody>
-          <a:bodyPr wrap="square" anchor="ctr" lIns="0" rIns="0" tIns="0" bIns="0">
+          <a:bodyPr wrap="square" lIns="0" tIns="0" rIns="0" bIns="0" anchor="ctr">
             <a:spAutoFit/>
           </a:bodyPr>
           <a:lstStyle/>
@@ -13055,7 +12533,7 @@
           <a:noFill/>
         </p:spPr>
         <p:txBody>
-          <a:bodyPr wrap="square" anchor="t" lIns="0" rIns="0" tIns="0" bIns="0">
+          <a:bodyPr wrap="square" lIns="0" tIns="0" rIns="0" bIns="0" anchor="t">
             <a:spAutoFit/>
           </a:bodyPr>
           <a:lstStyle/>
@@ -13117,6 +12595,7 @@
           <a:lstStyle/>
           <a:p>
             <a:pPr algn="ctr"/>
+            <a:endParaRPr/>
           </a:p>
         </p:txBody>
       </p:sp>
@@ -13137,7 +12616,7 @@
           <a:noFill/>
         </p:spPr>
         <p:txBody>
-          <a:bodyPr wrap="square" anchor="ctr" lIns="0" rIns="0" tIns="0" bIns="0">
+          <a:bodyPr wrap="square" lIns="0" tIns="0" rIns="0" bIns="0" anchor="ctr">
             <a:spAutoFit/>
           </a:bodyPr>
           <a:lstStyle/>
@@ -13199,6 +12678,7 @@
           <a:lstStyle/>
           <a:p>
             <a:pPr algn="ctr"/>
+            <a:endParaRPr/>
           </a:p>
         </p:txBody>
       </p:sp>
@@ -13246,6 +12726,7 @@
           <a:lstStyle/>
           <a:p>
             <a:pPr algn="ctr"/>
+            <a:endParaRPr/>
           </a:p>
         </p:txBody>
       </p:sp>
@@ -13266,7 +12747,7 @@
           <a:noFill/>
         </p:spPr>
         <p:txBody>
-          <a:bodyPr wrap="square" anchor="ctr" lIns="0" rIns="0" tIns="0" bIns="0">
+          <a:bodyPr wrap="square" lIns="0" tIns="0" rIns="0" bIns="0" anchor="ctr">
             <a:spAutoFit/>
           </a:bodyPr>
           <a:lstStyle/>
@@ -13328,6 +12809,7 @@
           <a:lstStyle/>
           <a:p>
             <a:pPr algn="ctr"/>
+            <a:endParaRPr/>
           </a:p>
         </p:txBody>
       </p:sp>
@@ -13375,6 +12857,7 @@
           <a:lstStyle/>
           <a:p>
             <a:pPr algn="ctr"/>
+            <a:endParaRPr/>
           </a:p>
         </p:txBody>
       </p:sp>
@@ -13395,7 +12878,7 @@
           <a:noFill/>
         </p:spPr>
         <p:txBody>
-          <a:bodyPr wrap="square" anchor="ctr" lIns="0" rIns="0" tIns="0" bIns="0">
+          <a:bodyPr wrap="square" lIns="0" tIns="0" rIns="0" bIns="0" anchor="ctr">
             <a:spAutoFit/>
           </a:bodyPr>
           <a:lstStyle/>
@@ -13457,6 +12940,7 @@
           <a:lstStyle/>
           <a:p>
             <a:pPr algn="ctr"/>
+            <a:endParaRPr/>
           </a:p>
         </p:txBody>
       </p:sp>
@@ -13504,6 +12988,7 @@
           <a:lstStyle/>
           <a:p>
             <a:pPr algn="ctr"/>
+            <a:endParaRPr/>
           </a:p>
         </p:txBody>
       </p:sp>
@@ -13524,7 +13009,7 @@
           <a:noFill/>
         </p:spPr>
         <p:txBody>
-          <a:bodyPr wrap="square" anchor="ctr" lIns="0" rIns="0" tIns="0" bIns="0">
+          <a:bodyPr wrap="square" lIns="0" tIns="0" rIns="0" bIns="0" anchor="ctr">
             <a:spAutoFit/>
           </a:bodyPr>
           <a:lstStyle/>
@@ -13587,6 +13072,7 @@
           <a:lstStyle/>
           <a:p>
             <a:pPr algn="ctr"/>
+            <a:endParaRPr/>
           </a:p>
         </p:txBody>
       </p:sp>
@@ -13634,6 +13120,7 @@
           <a:lstStyle/>
           <a:p>
             <a:pPr algn="ctr"/>
+            <a:endParaRPr/>
           </a:p>
         </p:txBody>
       </p:sp>
@@ -13654,7 +13141,7 @@
           <a:noFill/>
         </p:spPr>
         <p:txBody>
-          <a:bodyPr wrap="square" anchor="ctr" lIns="0" rIns="0" tIns="0" bIns="0">
+          <a:bodyPr wrap="square" lIns="0" tIns="0" rIns="0" bIns="0" anchor="ctr">
             <a:spAutoFit/>
           </a:bodyPr>
           <a:lstStyle/>
@@ -13716,6 +13203,7 @@
           <a:lstStyle/>
           <a:p>
             <a:pPr algn="ctr"/>
+            <a:endParaRPr/>
           </a:p>
         </p:txBody>
       </p:sp>
@@ -13763,6 +13251,7 @@
           <a:lstStyle/>
           <a:p>
             <a:pPr algn="ctr"/>
+            <a:endParaRPr/>
           </a:p>
         </p:txBody>
       </p:sp>
@@ -13783,7 +13272,7 @@
           <a:noFill/>
         </p:spPr>
         <p:txBody>
-          <a:bodyPr wrap="square" anchor="ctr" lIns="0" rIns="0" tIns="0" bIns="0">
+          <a:bodyPr wrap="square" lIns="0" tIns="0" rIns="0" bIns="0" anchor="ctr">
             <a:spAutoFit/>
           </a:bodyPr>
           <a:lstStyle/>
@@ -13880,7 +13369,7 @@
           </a:fontRef>
         </p:style>
         <p:txBody>
-          <a:bodyPr rtlCol="0" anchor="ctr" lIns="0" rIns="0" tIns="0" bIns="0" wrap="square"/>
+          <a:bodyPr wrap="square" lIns="0" tIns="0" rIns="0" bIns="0" rtlCol="0" anchor="ctr"/>
           <a:lstStyle/>
           <a:p>
             <a:pPr algn="ctr"/>
@@ -14018,7 +13507,7 @@
           <a:noFill/>
         </p:spPr>
         <p:txBody>
-          <a:bodyPr wrap="square" anchor="t" lIns="0" rIns="0" tIns="0" bIns="0">
+          <a:bodyPr wrap="square" lIns="0" tIns="0" rIns="0" bIns="0" anchor="t">
             <a:spAutoFit/>
           </a:bodyPr>
           <a:lstStyle/>
@@ -14158,7 +13647,7 @@
           <a:noFill/>
         </p:spPr>
         <p:txBody>
-          <a:bodyPr wrap="square" anchor="t" lIns="0" rIns="0" tIns="0" bIns="0">
+          <a:bodyPr wrap="square" lIns="0" tIns="0" rIns="0" bIns="0" anchor="t">
             <a:spAutoFit/>
           </a:bodyPr>
           <a:lstStyle/>
@@ -14298,7 +13787,7 @@
           <a:noFill/>
         </p:spPr>
         <p:txBody>
-          <a:bodyPr wrap="square" anchor="t" lIns="0" rIns="0" tIns="0" bIns="0">
+          <a:bodyPr wrap="square" lIns="0" tIns="0" rIns="0" bIns="0" anchor="t">
             <a:spAutoFit/>
           </a:bodyPr>
           <a:lstStyle/>
@@ -14360,6 +13849,7 @@
           <a:lstStyle/>
           <a:p>
             <a:pPr algn="ctr"/>
+            <a:endParaRPr/>
           </a:p>
         </p:txBody>
       </p:sp>
@@ -14380,7 +13870,7 @@
           <a:noFill/>
         </p:spPr>
         <p:txBody>
-          <a:bodyPr wrap="square" anchor="ctr" lIns="0" rIns="0" tIns="0" bIns="0">
+          <a:bodyPr wrap="square" lIns="0" tIns="0" rIns="0" bIns="0" anchor="ctr">
             <a:spAutoFit/>
           </a:bodyPr>
           <a:lstStyle/>
@@ -14423,7 +13913,7 @@
 </file>
 
 <file path=ppt/slides/slide16.xml><?xml version="1.0" encoding="utf-8"?>
-<p:sld xmlns:a="http://schemas.openxmlformats.org/drawingml/2006/main" xmlns:p="http://schemas.openxmlformats.org/presentationml/2006/main" xmlns:r="http://schemas.openxmlformats.org/officeDocument/2006/relationships">
+<p:sld xmlns:a="http://schemas.openxmlformats.org/drawingml/2006/main" xmlns:r="http://schemas.openxmlformats.org/officeDocument/2006/relationships" xmlns:p="http://schemas.openxmlformats.org/presentationml/2006/main">
   <p:cSld>
     <p:spTree>
       <p:nvGrpSpPr>
@@ -14431,7 +13921,14 @@
         <p:cNvGrpSpPr/>
         <p:nvPr/>
       </p:nvGrpSpPr>
-      <p:grpSpPr/>
+      <p:grpSpPr>
+        <a:xfrm>
+          <a:off x="0" y="0"/>
+          <a:ext cx="0" cy="0"/>
+          <a:chOff x="0" y="0"/>
+          <a:chExt cx="0" cy="0"/>
+        </a:xfrm>
+      </p:grpSpPr>
       <p:sp>
         <p:nvSpPr>
           <p:cNvPr id="2" name="Rectangle 1"/>
@@ -14472,6 +13969,7 @@
           <a:lstStyle/>
           <a:p>
             <a:pPr algn="ctr"/>
+            <a:endParaRPr/>
           </a:p>
         </p:txBody>
       </p:sp>
@@ -14515,6 +14013,7 @@
           <a:lstStyle/>
           <a:p>
             <a:pPr algn="ctr"/>
+            <a:endParaRPr/>
           </a:p>
         </p:txBody>
       </p:sp>
@@ -14535,7 +14034,7 @@
           <a:noFill/>
         </p:spPr>
         <p:txBody>
-          <a:bodyPr wrap="square" anchor="t" lIns="0" rIns="0" tIns="0" bIns="0">
+          <a:bodyPr wrap="square" lIns="0" tIns="0" rIns="0" bIns="0" anchor="t">
             <a:spAutoFit/>
           </a:bodyPr>
           <a:lstStyle/>
@@ -14570,7 +14069,7 @@
           <a:noFill/>
         </p:spPr>
         <p:txBody>
-          <a:bodyPr wrap="square" anchor="t" lIns="0" rIns="0" tIns="0" bIns="0">
+          <a:bodyPr wrap="square" lIns="0" tIns="0" rIns="0" bIns="0" anchor="t">
             <a:spAutoFit/>
           </a:bodyPr>
           <a:lstStyle/>
@@ -14632,6 +14131,7 @@
           <a:lstStyle/>
           <a:p>
             <a:pPr algn="ctr"/>
+            <a:endParaRPr/>
           </a:p>
         </p:txBody>
       </p:sp>
@@ -14644,7 +14144,7 @@
           <p:nvPr/>
         </p:nvPicPr>
         <p:blipFill>
-          <a:blip r:embed="rId2"/>
+          <a:blip r:embed="rId3"/>
           <a:stretch>
             <a:fillRect/>
           </a:stretch>
@@ -14699,6 +14199,7 @@
           <a:lstStyle/>
           <a:p>
             <a:pPr algn="ctr"/>
+            <a:endParaRPr/>
           </a:p>
         </p:txBody>
       </p:sp>
@@ -14742,41 +14243,7 @@
           <a:lstStyle/>
           <a:p>
             <a:pPr algn="ctr"/>
-          </a:p>
-        </p:txBody>
-      </p:sp>
-      <p:sp>
-        <p:nvSpPr>
-          <p:cNvPr id="10" name="TextBox 9"/>
-          <p:cNvSpPr txBox="1"/>
-          <p:nvPr/>
-        </p:nvSpPr>
-        <p:spPr>
-          <a:xfrm>
-            <a:off x="594360" y="6355080"/>
-            <a:ext cx="4572000" cy="502920"/>
-          </a:xfrm>
-          <a:prstGeom prst="rect">
-            <a:avLst/>
-          </a:prstGeom>
-          <a:noFill/>
-        </p:spPr>
-        <p:txBody>
-          <a:bodyPr wrap="square" anchor="ctr" lIns="0" rIns="0" tIns="0" bIns="0">
-            <a:spAutoFit/>
-          </a:bodyPr>
-          <a:lstStyle/>
-          <a:p>
-            <a:pPr algn="l"/>
-            <a:r>
-              <a:rPr sz="1000" b="0" i="0">
-                <a:solidFill>
-                  <a:srgbClr val="9FB3C8"/>
-                </a:solidFill>
-                <a:latin typeface="Segoe UI"/>
-              </a:rPr>
-              <a:t>ICT108  ·  MetMate case study</a:t>
-            </a:r>
+            <a:endParaRPr/>
           </a:p>
         </p:txBody>
       </p:sp>
@@ -14841,7 +14308,7 @@
           <a:noFill/>
         </p:spPr>
         <p:txBody>
-          <a:bodyPr wrap="square" anchor="t" lIns="0" rIns="0" tIns="0" bIns="0">
+          <a:bodyPr wrap="square" lIns="0" tIns="0" rIns="0" bIns="0" anchor="t">
             <a:spAutoFit/>
           </a:bodyPr>
           <a:lstStyle/>
@@ -14903,6 +14370,7 @@
           <a:lstStyle/>
           <a:p>
             <a:pPr algn="ctr"/>
+            <a:endParaRPr/>
           </a:p>
         </p:txBody>
       </p:sp>
@@ -14923,7 +14391,7 @@
           <a:noFill/>
         </p:spPr>
         <p:txBody>
-          <a:bodyPr wrap="square" anchor="t" lIns="0" rIns="0" tIns="0" bIns="0">
+          <a:bodyPr wrap="square" lIns="0" tIns="0" rIns="0" bIns="0" anchor="t">
             <a:spAutoFit/>
           </a:bodyPr>
           <a:lstStyle/>
@@ -14958,7 +14426,7 @@
           <a:noFill/>
         </p:spPr>
         <p:txBody>
-          <a:bodyPr wrap="square" anchor="t" lIns="0" rIns="0" tIns="0" bIns="0">
+          <a:bodyPr wrap="square" lIns="0" tIns="0" rIns="0" bIns="0" anchor="t">
             <a:spAutoFit/>
           </a:bodyPr>
           <a:lstStyle/>
@@ -15024,6 +14492,7 @@
           <a:lstStyle/>
           <a:p>
             <a:pPr algn="ctr"/>
+            <a:endParaRPr/>
           </a:p>
         </p:txBody>
       </p:sp>
@@ -15044,7 +14513,7 @@
           <a:noFill/>
         </p:spPr>
         <p:txBody>
-          <a:bodyPr wrap="square" anchor="t" lIns="0" rIns="0" tIns="0" bIns="0">
+          <a:bodyPr wrap="square" lIns="0" tIns="0" rIns="0" bIns="0" anchor="t">
             <a:spAutoFit/>
           </a:bodyPr>
           <a:lstStyle/>
@@ -15079,7 +14548,7 @@
           <a:noFill/>
         </p:spPr>
         <p:txBody>
-          <a:bodyPr wrap="square" anchor="t" lIns="0" rIns="0" tIns="0" bIns="0">
+          <a:bodyPr wrap="square" lIns="0" tIns="0" rIns="0" bIns="0" anchor="t">
             <a:spAutoFit/>
           </a:bodyPr>
           <a:lstStyle/>
@@ -15145,6 +14614,7 @@
           <a:lstStyle/>
           <a:p>
             <a:pPr algn="ctr"/>
+            <a:endParaRPr/>
           </a:p>
         </p:txBody>
       </p:sp>
@@ -15165,7 +14635,7 @@
           <a:noFill/>
         </p:spPr>
         <p:txBody>
-          <a:bodyPr wrap="square" anchor="t" lIns="0" rIns="0" tIns="0" bIns="0">
+          <a:bodyPr wrap="square" lIns="0" tIns="0" rIns="0" bIns="0" anchor="t">
             <a:spAutoFit/>
           </a:bodyPr>
           <a:lstStyle/>
@@ -15200,7 +14670,7 @@
           <a:noFill/>
         </p:spPr>
         <p:txBody>
-          <a:bodyPr wrap="square" anchor="t" lIns="0" rIns="0" tIns="0" bIns="0">
+          <a:bodyPr wrap="square" lIns="0" tIns="0" rIns="0" bIns="0" anchor="t">
             <a:spAutoFit/>
           </a:bodyPr>
           <a:lstStyle/>
@@ -15266,6 +14736,7 @@
           <a:lstStyle/>
           <a:p>
             <a:pPr algn="ctr"/>
+            <a:endParaRPr/>
           </a:p>
         </p:txBody>
       </p:sp>
@@ -15286,7 +14757,7 @@
           <a:noFill/>
         </p:spPr>
         <p:txBody>
-          <a:bodyPr wrap="square" anchor="t" lIns="0" rIns="0" tIns="0" bIns="0">
+          <a:bodyPr wrap="square" lIns="0" tIns="0" rIns="0" bIns="0" anchor="t">
             <a:spAutoFit/>
           </a:bodyPr>
           <a:lstStyle/>
@@ -15321,7 +14792,7 @@
           <a:noFill/>
         </p:spPr>
         <p:txBody>
-          <a:bodyPr wrap="square" anchor="t" lIns="0" rIns="0" tIns="0" bIns="0">
+          <a:bodyPr wrap="square" lIns="0" tIns="0" rIns="0" bIns="0" anchor="t">
             <a:spAutoFit/>
           </a:bodyPr>
           <a:lstStyle/>
@@ -15387,6 +14858,7 @@
           <a:lstStyle/>
           <a:p>
             <a:pPr algn="ctr"/>
+            <a:endParaRPr/>
           </a:p>
         </p:txBody>
       </p:sp>
@@ -15407,7 +14879,7 @@
           <a:noFill/>
         </p:spPr>
         <p:txBody>
-          <a:bodyPr wrap="square" anchor="t" lIns="0" rIns="0" tIns="0" bIns="0">
+          <a:bodyPr wrap="square" lIns="0" tIns="0" rIns="0" bIns="0" anchor="t">
             <a:spAutoFit/>
           </a:bodyPr>
           <a:lstStyle/>
@@ -15442,7 +14914,7 @@
           <a:noFill/>
         </p:spPr>
         <p:txBody>
-          <a:bodyPr wrap="square" anchor="t" lIns="0" rIns="0" tIns="0" bIns="0">
+          <a:bodyPr wrap="square" lIns="0" tIns="0" rIns="0" bIns="0" anchor="t">
             <a:spAutoFit/>
           </a:bodyPr>
           <a:lstStyle/>
@@ -15508,6 +14980,7 @@
           <a:lstStyle/>
           <a:p>
             <a:pPr algn="ctr"/>
+            <a:endParaRPr/>
           </a:p>
         </p:txBody>
       </p:sp>
@@ -15528,7 +15001,7 @@
           <a:noFill/>
         </p:spPr>
         <p:txBody>
-          <a:bodyPr wrap="square" anchor="t" lIns="0" rIns="0" tIns="0" bIns="0">
+          <a:bodyPr wrap="square" lIns="0" tIns="0" rIns="0" bIns="0" anchor="t">
             <a:spAutoFit/>
           </a:bodyPr>
           <a:lstStyle/>
@@ -15563,7 +15036,7 @@
           <a:noFill/>
         </p:spPr>
         <p:txBody>
-          <a:bodyPr wrap="square" anchor="t" lIns="0" rIns="0" tIns="0" bIns="0">
+          <a:bodyPr wrap="square" lIns="0" tIns="0" rIns="0" bIns="0" anchor="t">
             <a:spAutoFit/>
           </a:bodyPr>
           <a:lstStyle/>
@@ -15602,7 +15075,7 @@
           <a:noFill/>
         </p:spPr>
         <p:txBody>
-          <a:bodyPr wrap="square" anchor="t" lIns="0" rIns="0" tIns="0" bIns="0">
+          <a:bodyPr wrap="square" lIns="0" tIns="0" rIns="0" bIns="0" anchor="t">
             <a:spAutoFit/>
           </a:bodyPr>
           <a:lstStyle/>
@@ -15629,7 +15102,7 @@
 </file>
 
 <file path=ppt/slides/slide17.xml><?xml version="1.0" encoding="utf-8"?>
-<p:sld xmlns:a="http://schemas.openxmlformats.org/drawingml/2006/main" xmlns:p="http://schemas.openxmlformats.org/presentationml/2006/main" xmlns:r="http://schemas.openxmlformats.org/officeDocument/2006/relationships">
+<p:sld xmlns:a="http://schemas.openxmlformats.org/drawingml/2006/main" xmlns:r="http://schemas.openxmlformats.org/officeDocument/2006/relationships" xmlns:p="http://schemas.openxmlformats.org/presentationml/2006/main">
   <p:cSld>
     <p:spTree>
       <p:nvGrpSpPr>
@@ -15637,7 +15110,14 @@
         <p:cNvGrpSpPr/>
         <p:nvPr/>
       </p:nvGrpSpPr>
-      <p:grpSpPr/>
+      <p:grpSpPr>
+        <a:xfrm>
+          <a:off x="0" y="0"/>
+          <a:ext cx="0" cy="0"/>
+          <a:chOff x="0" y="0"/>
+          <a:chExt cx="0" cy="0"/>
+        </a:xfrm>
+      </p:grpSpPr>
       <p:sp>
         <p:nvSpPr>
           <p:cNvPr id="2" name="Rectangle 1"/>
@@ -15678,6 +15158,7 @@
           <a:lstStyle/>
           <a:p>
             <a:pPr algn="ctr"/>
+            <a:endParaRPr/>
           </a:p>
         </p:txBody>
       </p:sp>
@@ -15721,6 +15202,7 @@
           <a:lstStyle/>
           <a:p>
             <a:pPr algn="ctr"/>
+            <a:endParaRPr/>
           </a:p>
         </p:txBody>
       </p:sp>
@@ -15741,7 +15223,7 @@
           <a:noFill/>
         </p:spPr>
         <p:txBody>
-          <a:bodyPr wrap="square" anchor="t" lIns="0" rIns="0" tIns="0" bIns="0">
+          <a:bodyPr wrap="square" lIns="0" tIns="0" rIns="0" bIns="0" anchor="t">
             <a:spAutoFit/>
           </a:bodyPr>
           <a:lstStyle/>
@@ -15776,7 +15258,7 @@
           <a:noFill/>
         </p:spPr>
         <p:txBody>
-          <a:bodyPr wrap="square" anchor="t" lIns="0" rIns="0" tIns="0" bIns="0">
+          <a:bodyPr wrap="square" lIns="0" tIns="0" rIns="0" bIns="0" anchor="t">
             <a:spAutoFit/>
           </a:bodyPr>
           <a:lstStyle/>
@@ -15838,6 +15320,7 @@
           <a:lstStyle/>
           <a:p>
             <a:pPr algn="ctr"/>
+            <a:endParaRPr/>
           </a:p>
         </p:txBody>
       </p:sp>
@@ -15850,7 +15333,7 @@
           <p:nvPr/>
         </p:nvPicPr>
         <p:blipFill>
-          <a:blip r:embed="rId2"/>
+          <a:blip r:embed="rId3"/>
           <a:stretch>
             <a:fillRect/>
           </a:stretch>
@@ -15905,6 +15388,7 @@
           <a:lstStyle/>
           <a:p>
             <a:pPr algn="ctr"/>
+            <a:endParaRPr/>
           </a:p>
         </p:txBody>
       </p:sp>
@@ -15948,41 +15432,7 @@
           <a:lstStyle/>
           <a:p>
             <a:pPr algn="ctr"/>
-          </a:p>
-        </p:txBody>
-      </p:sp>
-      <p:sp>
-        <p:nvSpPr>
-          <p:cNvPr id="10" name="TextBox 9"/>
-          <p:cNvSpPr txBox="1"/>
-          <p:nvPr/>
-        </p:nvSpPr>
-        <p:spPr>
-          <a:xfrm>
-            <a:off x="594360" y="6355080"/>
-            <a:ext cx="4572000" cy="502920"/>
-          </a:xfrm>
-          <a:prstGeom prst="rect">
-            <a:avLst/>
-          </a:prstGeom>
-          <a:noFill/>
-        </p:spPr>
-        <p:txBody>
-          <a:bodyPr wrap="square" anchor="ctr" lIns="0" rIns="0" tIns="0" bIns="0">
-            <a:spAutoFit/>
-          </a:bodyPr>
-          <a:lstStyle/>
-          <a:p>
-            <a:pPr algn="l"/>
-            <a:r>
-              <a:rPr sz="1000" b="0" i="0">
-                <a:solidFill>
-                  <a:srgbClr val="9FB3C8"/>
-                </a:solidFill>
-                <a:latin typeface="Segoe UI"/>
-              </a:rPr>
-              <a:t>ICT108  ·  MetMate case study</a:t>
-            </a:r>
+            <a:endParaRPr/>
           </a:p>
         </p:txBody>
       </p:sp>
@@ -16074,6 +15524,7 @@
           <a:lstStyle/>
           <a:p>
             <a:pPr algn="ctr"/>
+            <a:endParaRPr/>
           </a:p>
         </p:txBody>
       </p:sp>
@@ -16113,7 +15564,7 @@
           </a:fontRef>
         </p:style>
         <p:txBody>
-          <a:bodyPr rtlCol="0" anchor="ctr" lIns="0" rIns="0" tIns="0" bIns="0" wrap="square"/>
+          <a:bodyPr wrap="square" lIns="0" tIns="0" rIns="0" bIns="0" rtlCol="0" anchor="ctr"/>
           <a:lstStyle/>
           <a:p>
             <a:pPr algn="ctr"/>
@@ -16216,6 +15667,7 @@
           <a:lstStyle/>
           <a:p>
             <a:pPr algn="ctr"/>
+            <a:endParaRPr/>
           </a:p>
         </p:txBody>
       </p:sp>
@@ -16255,7 +15707,7 @@
           </a:fontRef>
         </p:style>
         <p:txBody>
-          <a:bodyPr rtlCol="0" anchor="ctr" lIns="0" rIns="0" tIns="0" bIns="0" wrap="square"/>
+          <a:bodyPr wrap="square" lIns="0" tIns="0" rIns="0" bIns="0" rtlCol="0" anchor="ctr"/>
           <a:lstStyle/>
           <a:p>
             <a:pPr algn="ctr"/>
@@ -16358,6 +15810,7 @@
           <a:lstStyle/>
           <a:p>
             <a:pPr algn="ctr"/>
+            <a:endParaRPr/>
           </a:p>
         </p:txBody>
       </p:sp>
@@ -16397,7 +15850,7 @@
           </a:fontRef>
         </p:style>
         <p:txBody>
-          <a:bodyPr rtlCol="0" anchor="ctr" lIns="0" rIns="0" tIns="0" bIns="0" wrap="square"/>
+          <a:bodyPr wrap="square" lIns="0" tIns="0" rIns="0" bIns="0" rtlCol="0" anchor="ctr"/>
           <a:lstStyle/>
           <a:p>
             <a:pPr algn="ctr"/>
@@ -16473,7 +15926,7 @@
           <a:noFill/>
         </p:spPr>
         <p:txBody>
-          <a:bodyPr wrap="square" anchor="t" lIns="0" rIns="0" tIns="0" bIns="0">
+          <a:bodyPr wrap="square" lIns="0" tIns="0" rIns="0" bIns="0" anchor="t">
             <a:spAutoFit/>
           </a:bodyPr>
           <a:lstStyle/>
@@ -16508,7 +15961,7 @@
           <a:noFill/>
         </p:spPr>
         <p:txBody>
-          <a:bodyPr wrap="square" anchor="t" lIns="0" rIns="0" tIns="0" bIns="0">
+          <a:bodyPr wrap="square" lIns="0" tIns="0" rIns="0" bIns="0" anchor="t">
             <a:spAutoFit/>
           </a:bodyPr>
           <a:lstStyle/>
@@ -16535,7 +15988,7 @@
 </file>
 
 <file path=ppt/slides/slide2.xml><?xml version="1.0" encoding="utf-8"?>
-<p:sld xmlns:a="http://schemas.openxmlformats.org/drawingml/2006/main" xmlns:p="http://schemas.openxmlformats.org/presentationml/2006/main" xmlns:r="http://schemas.openxmlformats.org/officeDocument/2006/relationships">
+<p:sld xmlns:a="http://schemas.openxmlformats.org/drawingml/2006/main" xmlns:r="http://schemas.openxmlformats.org/officeDocument/2006/relationships" xmlns:p="http://schemas.openxmlformats.org/presentationml/2006/main">
   <p:cSld>
     <p:spTree>
       <p:nvGrpSpPr>
@@ -16543,7 +15996,14 @@
         <p:cNvGrpSpPr/>
         <p:nvPr/>
       </p:nvGrpSpPr>
-      <p:grpSpPr/>
+      <p:grpSpPr>
+        <a:xfrm>
+          <a:off x="0" y="0"/>
+          <a:ext cx="0" cy="0"/>
+          <a:chOff x="0" y="0"/>
+          <a:chExt cx="0" cy="0"/>
+        </a:xfrm>
+      </p:grpSpPr>
       <p:sp>
         <p:nvSpPr>
           <p:cNvPr id="2" name="Rectangle 1"/>
@@ -16584,6 +16044,7 @@
           <a:lstStyle/>
           <a:p>
             <a:pPr algn="ctr"/>
+            <a:endParaRPr/>
           </a:p>
         </p:txBody>
       </p:sp>
@@ -16627,6 +16088,7 @@
           <a:lstStyle/>
           <a:p>
             <a:pPr algn="ctr"/>
+            <a:endParaRPr/>
           </a:p>
         </p:txBody>
       </p:sp>
@@ -16647,7 +16109,7 @@
           <a:noFill/>
         </p:spPr>
         <p:txBody>
-          <a:bodyPr wrap="square" anchor="t" lIns="0" rIns="0" tIns="0" bIns="0">
+          <a:bodyPr wrap="square" lIns="0" tIns="0" rIns="0" bIns="0" anchor="t">
             <a:spAutoFit/>
           </a:bodyPr>
           <a:lstStyle/>
@@ -16682,7 +16144,7 @@
           <a:noFill/>
         </p:spPr>
         <p:txBody>
-          <a:bodyPr wrap="square" anchor="t" lIns="0" rIns="0" tIns="0" bIns="0">
+          <a:bodyPr wrap="square" lIns="0" tIns="0" rIns="0" bIns="0" anchor="t">
             <a:spAutoFit/>
           </a:bodyPr>
           <a:lstStyle/>
@@ -16744,6 +16206,7 @@
           <a:lstStyle/>
           <a:p>
             <a:pPr algn="ctr"/>
+            <a:endParaRPr/>
           </a:p>
         </p:txBody>
       </p:sp>
@@ -16756,7 +16219,7 @@
           <p:nvPr/>
         </p:nvPicPr>
         <p:blipFill>
-          <a:blip r:embed="rId2"/>
+          <a:blip r:embed="rId3"/>
           <a:stretch>
             <a:fillRect/>
           </a:stretch>
@@ -16811,6 +16274,7 @@
           <a:lstStyle/>
           <a:p>
             <a:pPr algn="ctr"/>
+            <a:endParaRPr/>
           </a:p>
         </p:txBody>
       </p:sp>
@@ -16854,41 +16318,7 @@
           <a:lstStyle/>
           <a:p>
             <a:pPr algn="ctr"/>
-          </a:p>
-        </p:txBody>
-      </p:sp>
-      <p:sp>
-        <p:nvSpPr>
-          <p:cNvPr id="10" name="TextBox 9"/>
-          <p:cNvSpPr txBox="1"/>
-          <p:nvPr/>
-        </p:nvSpPr>
-        <p:spPr>
-          <a:xfrm>
-            <a:off x="594360" y="6355080"/>
-            <a:ext cx="4572000" cy="502920"/>
-          </a:xfrm>
-          <a:prstGeom prst="rect">
-            <a:avLst/>
-          </a:prstGeom>
-          <a:noFill/>
-        </p:spPr>
-        <p:txBody>
-          <a:bodyPr wrap="square" anchor="ctr" lIns="0" rIns="0" tIns="0" bIns="0">
-            <a:spAutoFit/>
-          </a:bodyPr>
-          <a:lstStyle/>
-          <a:p>
-            <a:pPr algn="l"/>
-            <a:r>
-              <a:rPr sz="1000" b="0" i="0">
-                <a:solidFill>
-                  <a:srgbClr val="9FB3C8"/>
-                </a:solidFill>
-                <a:latin typeface="Segoe UI"/>
-              </a:rPr>
-              <a:t>ICT108  ·  MetMate case study</a:t>
-            </a:r>
+            <a:endParaRPr/>
           </a:p>
         </p:txBody>
       </p:sp>
@@ -16953,7 +16383,7 @@
           <a:noFill/>
         </p:spPr>
         <p:txBody>
-          <a:bodyPr wrap="square" anchor="t" lIns="0" rIns="0" tIns="0" bIns="0">
+          <a:bodyPr wrap="square" lIns="0" tIns="0" rIns="0" bIns="0" anchor="t">
             <a:spAutoFit/>
           </a:bodyPr>
           <a:lstStyle/>
@@ -17015,6 +16445,7 @@
           <a:lstStyle/>
           <a:p>
             <a:pPr algn="ctr"/>
+            <a:endParaRPr/>
           </a:p>
         </p:txBody>
       </p:sp>
@@ -17062,6 +16493,7 @@
           <a:lstStyle/>
           <a:p>
             <a:pPr algn="ctr"/>
+            <a:endParaRPr/>
           </a:p>
         </p:txBody>
       </p:sp>
@@ -17082,7 +16514,7 @@
           <a:noFill/>
         </p:spPr>
         <p:txBody>
-          <a:bodyPr wrap="square" anchor="ctr" lIns="0" rIns="0" tIns="0" bIns="0">
+          <a:bodyPr wrap="square" lIns="0" tIns="0" rIns="0" bIns="0" anchor="ctr">
             <a:spAutoFit/>
           </a:bodyPr>
           <a:lstStyle/>
@@ -17144,6 +16576,7 @@
           <a:lstStyle/>
           <a:p>
             <a:pPr algn="ctr"/>
+            <a:endParaRPr/>
           </a:p>
         </p:txBody>
       </p:sp>
@@ -17164,7 +16597,7 @@
           <a:noFill/>
         </p:spPr>
         <p:txBody>
-          <a:bodyPr wrap="square" anchor="ctr" lIns="0" rIns="0" tIns="0" bIns="0">
+          <a:bodyPr wrap="square" lIns="0" tIns="0" rIns="0" bIns="0" anchor="ctr">
             <a:spAutoFit/>
           </a:bodyPr>
           <a:lstStyle/>
@@ -17226,6 +16659,7 @@
           <a:lstStyle/>
           <a:p>
             <a:pPr algn="ctr"/>
+            <a:endParaRPr/>
           </a:p>
         </p:txBody>
       </p:sp>
@@ -17246,7 +16680,7 @@
           <a:noFill/>
         </p:spPr>
         <p:txBody>
-          <a:bodyPr wrap="square" anchor="ctr" lIns="0" rIns="0" tIns="0" bIns="0">
+          <a:bodyPr wrap="square" lIns="0" tIns="0" rIns="0" bIns="0" anchor="ctr">
             <a:spAutoFit/>
           </a:bodyPr>
           <a:lstStyle/>
@@ -17312,6 +16746,7 @@
           <a:lstStyle/>
           <a:p>
             <a:pPr algn="ctr"/>
+            <a:endParaRPr/>
           </a:p>
         </p:txBody>
       </p:sp>
@@ -17332,7 +16767,7 @@
           <a:noFill/>
         </p:spPr>
         <p:txBody>
-          <a:bodyPr wrap="square" anchor="ctr" lIns="0" rIns="0" tIns="0" bIns="0">
+          <a:bodyPr wrap="square" lIns="0" tIns="0" rIns="0" bIns="0" anchor="ctr">
             <a:spAutoFit/>
           </a:bodyPr>
           <a:lstStyle/>
@@ -17371,7 +16806,7 @@
           <a:noFill/>
         </p:spPr>
         <p:txBody>
-          <a:bodyPr wrap="square" anchor="t" lIns="0" rIns="0" tIns="0" bIns="0">
+          <a:bodyPr wrap="square" lIns="0" tIns="0" rIns="0" bIns="0" anchor="t">
             <a:spAutoFit/>
           </a:bodyPr>
           <a:lstStyle/>
@@ -17406,7 +16841,7 @@
           <a:noFill/>
         </p:spPr>
         <p:txBody>
-          <a:bodyPr wrap="square" anchor="t" lIns="0" rIns="0" tIns="0" bIns="0">
+          <a:bodyPr wrap="square" lIns="0" tIns="0" rIns="0" bIns="0" anchor="t">
             <a:spAutoFit/>
           </a:bodyPr>
           <a:lstStyle/>
@@ -17441,7 +16876,7 @@
           <a:noFill/>
         </p:spPr>
         <p:txBody>
-          <a:bodyPr wrap="square" anchor="t" lIns="0" rIns="0" tIns="0" bIns="0">
+          <a:bodyPr wrap="square" lIns="0" tIns="0" rIns="0" bIns="0" anchor="t">
             <a:spAutoFit/>
           </a:bodyPr>
           <a:lstStyle/>
@@ -17499,6 +16934,7 @@
           <a:lstStyle/>
           <a:p>
             <a:pPr algn="ctr"/>
+            <a:endParaRPr/>
           </a:p>
         </p:txBody>
       </p:sp>
@@ -17546,6 +16982,7 @@
           <a:lstStyle/>
           <a:p>
             <a:pPr algn="ctr"/>
+            <a:endParaRPr/>
           </a:p>
         </p:txBody>
       </p:sp>
@@ -17566,7 +17003,7 @@
           <a:noFill/>
         </p:spPr>
         <p:txBody>
-          <a:bodyPr wrap="square" anchor="t" lIns="0" rIns="0" tIns="0" bIns="0">
+          <a:bodyPr wrap="square" lIns="0" tIns="0" rIns="0" bIns="0" anchor="t">
             <a:spAutoFit/>
           </a:bodyPr>
           <a:lstStyle/>
@@ -17601,7 +17038,7 @@
           <a:noFill/>
         </p:spPr>
         <p:txBody>
-          <a:bodyPr wrap="square" anchor="t" lIns="0" rIns="0" tIns="0" bIns="0">
+          <a:bodyPr wrap="square" lIns="0" tIns="0" rIns="0" bIns="0" anchor="t">
             <a:spAutoFit/>
           </a:bodyPr>
           <a:lstStyle/>
@@ -17700,7 +17137,7 @@
           <a:noFill/>
         </p:spPr>
         <p:txBody>
-          <a:bodyPr wrap="square" anchor="t" lIns="0" rIns="0" tIns="0" bIns="0">
+          <a:bodyPr wrap="square" lIns="0" tIns="0" rIns="0" bIns="0" anchor="t">
             <a:spAutoFit/>
           </a:bodyPr>
           <a:lstStyle/>
@@ -17758,6 +17195,7 @@
           <a:lstStyle/>
           <a:p>
             <a:pPr algn="ctr"/>
+            <a:endParaRPr/>
           </a:p>
         </p:txBody>
       </p:sp>
@@ -17805,6 +17243,7 @@
           <a:lstStyle/>
           <a:p>
             <a:pPr algn="ctr"/>
+            <a:endParaRPr/>
           </a:p>
         </p:txBody>
       </p:sp>
@@ -17825,7 +17264,7 @@
           <a:noFill/>
         </p:spPr>
         <p:txBody>
-          <a:bodyPr wrap="square" anchor="t" lIns="0" rIns="0" tIns="0" bIns="0">
+          <a:bodyPr wrap="square" lIns="0" tIns="0" rIns="0" bIns="0" anchor="t">
             <a:spAutoFit/>
           </a:bodyPr>
           <a:lstStyle/>
@@ -17860,7 +17299,7 @@
           <a:noFill/>
         </p:spPr>
         <p:txBody>
-          <a:bodyPr wrap="square" anchor="t" lIns="0" rIns="0" tIns="0" bIns="0">
+          <a:bodyPr wrap="square" lIns="0" tIns="0" rIns="0" bIns="0" anchor="t">
             <a:spAutoFit/>
           </a:bodyPr>
           <a:lstStyle/>
@@ -17926,6 +17365,7 @@
           <a:lstStyle/>
           <a:p>
             <a:pPr algn="ctr"/>
+            <a:endParaRPr/>
           </a:p>
         </p:txBody>
       </p:sp>
@@ -17946,7 +17386,7 @@
           <a:noFill/>
         </p:spPr>
         <p:txBody>
-          <a:bodyPr wrap="square" anchor="ctr" lIns="0" rIns="0" tIns="0" bIns="0">
+          <a:bodyPr wrap="square" lIns="0" tIns="0" rIns="0" bIns="0" anchor="ctr">
             <a:spAutoFit/>
           </a:bodyPr>
           <a:lstStyle/>
@@ -17973,7 +17413,7 @@
 </file>
 
 <file path=ppt/slides/slide3.xml><?xml version="1.0" encoding="utf-8"?>
-<p:sld xmlns:a="http://schemas.openxmlformats.org/drawingml/2006/main" xmlns:p="http://schemas.openxmlformats.org/presentationml/2006/main" xmlns:r="http://schemas.openxmlformats.org/officeDocument/2006/relationships">
+<p:sld xmlns:a="http://schemas.openxmlformats.org/drawingml/2006/main" xmlns:r="http://schemas.openxmlformats.org/officeDocument/2006/relationships" xmlns:p="http://schemas.openxmlformats.org/presentationml/2006/main">
   <p:cSld>
     <p:spTree>
       <p:nvGrpSpPr>
@@ -17981,7 +17421,14 @@
         <p:cNvGrpSpPr/>
         <p:nvPr/>
       </p:nvGrpSpPr>
-      <p:grpSpPr/>
+      <p:grpSpPr>
+        <a:xfrm>
+          <a:off x="0" y="0"/>
+          <a:ext cx="0" cy="0"/>
+          <a:chOff x="0" y="0"/>
+          <a:chExt cx="0" cy="0"/>
+        </a:xfrm>
+      </p:grpSpPr>
       <p:sp>
         <p:nvSpPr>
           <p:cNvPr id="2" name="Rectangle 1"/>
@@ -18022,6 +17469,7 @@
           <a:lstStyle/>
           <a:p>
             <a:pPr algn="ctr"/>
+            <a:endParaRPr/>
           </a:p>
         </p:txBody>
       </p:sp>
@@ -18065,6 +17513,7 @@
           <a:lstStyle/>
           <a:p>
             <a:pPr algn="ctr"/>
+            <a:endParaRPr/>
           </a:p>
         </p:txBody>
       </p:sp>
@@ -18085,7 +17534,7 @@
           <a:noFill/>
         </p:spPr>
         <p:txBody>
-          <a:bodyPr wrap="square" anchor="t" lIns="0" rIns="0" tIns="0" bIns="0">
+          <a:bodyPr wrap="square" lIns="0" tIns="0" rIns="0" bIns="0" anchor="t">
             <a:spAutoFit/>
           </a:bodyPr>
           <a:lstStyle/>
@@ -18120,7 +17569,7 @@
           <a:noFill/>
         </p:spPr>
         <p:txBody>
-          <a:bodyPr wrap="square" anchor="t" lIns="0" rIns="0" tIns="0" bIns="0">
+          <a:bodyPr wrap="square" lIns="0" tIns="0" rIns="0" bIns="0" anchor="t">
             <a:spAutoFit/>
           </a:bodyPr>
           <a:lstStyle/>
@@ -18182,6 +17631,7 @@
           <a:lstStyle/>
           <a:p>
             <a:pPr algn="ctr"/>
+            <a:endParaRPr/>
           </a:p>
         </p:txBody>
       </p:sp>
@@ -18194,7 +17644,7 @@
           <p:nvPr/>
         </p:nvPicPr>
         <p:blipFill>
-          <a:blip r:embed="rId2"/>
+          <a:blip r:embed="rId3"/>
           <a:stretch>
             <a:fillRect/>
           </a:stretch>
@@ -18249,6 +17699,7 @@
           <a:lstStyle/>
           <a:p>
             <a:pPr algn="ctr"/>
+            <a:endParaRPr/>
           </a:p>
         </p:txBody>
       </p:sp>
@@ -18292,41 +17743,7 @@
           <a:lstStyle/>
           <a:p>
             <a:pPr algn="ctr"/>
-          </a:p>
-        </p:txBody>
-      </p:sp>
-      <p:sp>
-        <p:nvSpPr>
-          <p:cNvPr id="10" name="TextBox 9"/>
-          <p:cNvSpPr txBox="1"/>
-          <p:nvPr/>
-        </p:nvSpPr>
-        <p:spPr>
-          <a:xfrm>
-            <a:off x="594360" y="6355080"/>
-            <a:ext cx="4572000" cy="502920"/>
-          </a:xfrm>
-          <a:prstGeom prst="rect">
-            <a:avLst/>
-          </a:prstGeom>
-          <a:noFill/>
-        </p:spPr>
-        <p:txBody>
-          <a:bodyPr wrap="square" anchor="ctr" lIns="0" rIns="0" tIns="0" bIns="0">
-            <a:spAutoFit/>
-          </a:bodyPr>
-          <a:lstStyle/>
-          <a:p>
-            <a:pPr algn="l"/>
-            <a:r>
-              <a:rPr sz="1000" b="0" i="0">
-                <a:solidFill>
-                  <a:srgbClr val="9FB3C8"/>
-                </a:solidFill>
-                <a:latin typeface="Segoe UI"/>
-              </a:rPr>
-              <a:t>ICT108  ·  MetMate case study</a:t>
-            </a:r>
+            <a:endParaRPr/>
           </a:p>
         </p:txBody>
       </p:sp>
@@ -18391,7 +17808,7 @@
           <a:noFill/>
         </p:spPr>
         <p:txBody>
-          <a:bodyPr wrap="square" anchor="t" lIns="0" rIns="0" tIns="0" bIns="0">
+          <a:bodyPr wrap="square" lIns="0" tIns="0" rIns="0" bIns="0" anchor="t">
             <a:spAutoFit/>
           </a:bodyPr>
           <a:lstStyle/>
@@ -18453,6 +17870,7 @@
           <a:lstStyle/>
           <a:p>
             <a:pPr algn="ctr"/>
+            <a:endParaRPr/>
           </a:p>
         </p:txBody>
       </p:sp>
@@ -18492,7 +17910,7 @@
           </a:fontRef>
         </p:style>
         <p:txBody>
-          <a:bodyPr rtlCol="0" anchor="ctr" lIns="0" rIns="0" tIns="0" bIns="0" wrap="square"/>
+          <a:bodyPr wrap="square" lIns="0" tIns="0" rIns="0" bIns="0" rtlCol="0" anchor="ctr"/>
           <a:lstStyle/>
           <a:p>
             <a:pPr algn="ctr"/>
@@ -18525,7 +17943,7 @@
           <a:noFill/>
         </p:spPr>
         <p:txBody>
-          <a:bodyPr wrap="square" anchor="t" lIns="0" rIns="0" tIns="0" bIns="0">
+          <a:bodyPr wrap="square" lIns="0" tIns="0" rIns="0" bIns="0" anchor="t">
             <a:spAutoFit/>
           </a:bodyPr>
           <a:lstStyle/>
@@ -18564,7 +17982,7 @@
           <a:noFill/>
         </p:spPr>
         <p:txBody>
-          <a:bodyPr wrap="square" anchor="t" lIns="0" rIns="0" tIns="0" bIns="0">
+          <a:bodyPr wrap="square" lIns="0" tIns="0" rIns="0" bIns="0" anchor="t">
             <a:spAutoFit/>
           </a:bodyPr>
           <a:lstStyle/>
@@ -18630,6 +18048,7 @@
           <a:lstStyle/>
           <a:p>
             <a:pPr algn="ctr"/>
+            <a:endParaRPr/>
           </a:p>
         </p:txBody>
       </p:sp>
@@ -18669,7 +18088,7 @@
           </a:fontRef>
         </p:style>
         <p:txBody>
-          <a:bodyPr rtlCol="0" anchor="ctr" lIns="0" rIns="0" tIns="0" bIns="0" wrap="square"/>
+          <a:bodyPr wrap="square" lIns="0" tIns="0" rIns="0" bIns="0" rtlCol="0" anchor="ctr"/>
           <a:lstStyle/>
           <a:p>
             <a:pPr algn="ctr"/>
@@ -18702,7 +18121,7 @@
           <a:noFill/>
         </p:spPr>
         <p:txBody>
-          <a:bodyPr wrap="square" anchor="t" lIns="0" rIns="0" tIns="0" bIns="0">
+          <a:bodyPr wrap="square" lIns="0" tIns="0" rIns="0" bIns="0" anchor="t">
             <a:spAutoFit/>
           </a:bodyPr>
           <a:lstStyle/>
@@ -18741,7 +18160,7 @@
           <a:noFill/>
         </p:spPr>
         <p:txBody>
-          <a:bodyPr wrap="square" anchor="t" lIns="0" rIns="0" tIns="0" bIns="0">
+          <a:bodyPr wrap="square" lIns="0" tIns="0" rIns="0" bIns="0" anchor="t">
             <a:spAutoFit/>
           </a:bodyPr>
           <a:lstStyle/>
@@ -18807,6 +18226,7 @@
           <a:lstStyle/>
           <a:p>
             <a:pPr algn="ctr"/>
+            <a:endParaRPr/>
           </a:p>
         </p:txBody>
       </p:sp>
@@ -18846,7 +18266,7 @@
           </a:fontRef>
         </p:style>
         <p:txBody>
-          <a:bodyPr rtlCol="0" anchor="ctr" lIns="0" rIns="0" tIns="0" bIns="0" wrap="square"/>
+          <a:bodyPr wrap="square" lIns="0" tIns="0" rIns="0" bIns="0" rtlCol="0" anchor="ctr"/>
           <a:lstStyle/>
           <a:p>
             <a:pPr algn="ctr"/>
@@ -18879,7 +18299,7 @@
           <a:noFill/>
         </p:spPr>
         <p:txBody>
-          <a:bodyPr wrap="square" anchor="t" lIns="0" rIns="0" tIns="0" bIns="0">
+          <a:bodyPr wrap="square" lIns="0" tIns="0" rIns="0" bIns="0" anchor="t">
             <a:spAutoFit/>
           </a:bodyPr>
           <a:lstStyle/>
@@ -18918,7 +18338,7 @@
           <a:noFill/>
         </p:spPr>
         <p:txBody>
-          <a:bodyPr wrap="square" anchor="t" lIns="0" rIns="0" tIns="0" bIns="0">
+          <a:bodyPr wrap="square" lIns="0" tIns="0" rIns="0" bIns="0" anchor="t">
             <a:spAutoFit/>
           </a:bodyPr>
           <a:lstStyle/>
@@ -18984,6 +18404,7 @@
           <a:lstStyle/>
           <a:p>
             <a:pPr algn="ctr"/>
+            <a:endParaRPr/>
           </a:p>
         </p:txBody>
       </p:sp>
@@ -18995,8 +18416,8 @@
         </p:nvSpPr>
         <p:spPr>
           <a:xfrm>
-            <a:off x="1005840" y="4709160"/>
-            <a:ext cx="10195560" cy="685800"/>
+            <a:off x="1005840" y="4953122"/>
+            <a:ext cx="10195560" cy="197875"/>
           </a:xfrm>
           <a:prstGeom prst="rect">
             <a:avLst/>
@@ -19004,7 +18425,7 @@
           <a:noFill/>
         </p:spPr>
         <p:txBody>
-          <a:bodyPr wrap="square" anchor="ctr" lIns="0" rIns="0" tIns="0" bIns="0">
+          <a:bodyPr wrap="square" lIns="0" tIns="0" rIns="0" bIns="0" anchor="ctr">
             <a:spAutoFit/>
           </a:bodyPr>
           <a:lstStyle/>
@@ -19015,7 +18436,7 @@
               </a:lnSpc>
             </a:pPr>
             <a:r>
-              <a:rPr sz="1250" b="1">
+              <a:rPr sz="1250" b="1" dirty="0">
                 <a:solidFill>
                   <a:srgbClr val="2DD4BF"/>
                 </a:solidFill>
@@ -19024,48 +18445,13 @@
               <a:t>Knowledge Base (KB)</a:t>
             </a:r>
             <a:r>
-              <a:rPr sz="1050">
+              <a:rPr sz="1050" dirty="0">
                 <a:solidFill>
                   <a:srgbClr val="9FB3C8"/>
                 </a:solidFill>
                 <a:latin typeface="Segoe UI"/>
               </a:rPr>
-              <a:t>  —  the pile of official documents the bot must answer from. Our first term — every teal box like this one is a new term entering the story.</a:t>
-            </a:r>
-          </a:p>
-        </p:txBody>
-      </p:sp>
-      <p:sp>
-        <p:nvSpPr>
-          <p:cNvPr id="27" name="TextBox 26"/>
-          <p:cNvSpPr txBox="1"/>
-          <p:nvPr/>
-        </p:nvSpPr>
-        <p:spPr>
-          <a:xfrm>
-            <a:off x="822960" y="5669280"/>
-            <a:ext cx="10607040" cy="457200"/>
-          </a:xfrm>
-          <a:prstGeom prst="rect">
-            <a:avLst/>
-          </a:prstGeom>
-          <a:noFill/>
-        </p:spPr>
-        <p:txBody>
-          <a:bodyPr wrap="square" anchor="t" lIns="0" rIns="0" tIns="0" bIns="0">
-            <a:spAutoFit/>
-          </a:bodyPr>
-          <a:lstStyle/>
-          <a:p>
-            <a:pPr algn="l"/>
-            <a:r>
-              <a:rPr sz="1350" b="0" i="1">
-                <a:solidFill>
-                  <a:srgbClr val="F5B342"/>
-                </a:solidFill>
-                <a:latin typeface="Segoe UI"/>
-              </a:rPr>
-              <a:t>What we want: ONE bot, OURS, on the university site — always reading the CURRENT documents. So we build.</a:t>
+              <a:t>  —  the pile of official documents the bot must answer from.</a:t>
             </a:r>
           </a:p>
         </p:txBody>
@@ -19079,7 +18465,7 @@
 </file>
 
 <file path=ppt/slides/slide4.xml><?xml version="1.0" encoding="utf-8"?>
-<p:sld xmlns:a="http://schemas.openxmlformats.org/drawingml/2006/main" xmlns:p="http://schemas.openxmlformats.org/presentationml/2006/main" xmlns:r="http://schemas.openxmlformats.org/officeDocument/2006/relationships">
+<p:sld xmlns:a="http://schemas.openxmlformats.org/drawingml/2006/main" xmlns:r="http://schemas.openxmlformats.org/officeDocument/2006/relationships" xmlns:p="http://schemas.openxmlformats.org/presentationml/2006/main">
   <p:cSld>
     <p:spTree>
       <p:nvGrpSpPr>
@@ -19087,7 +18473,14 @@
         <p:cNvGrpSpPr/>
         <p:nvPr/>
       </p:nvGrpSpPr>
-      <p:grpSpPr/>
+      <p:grpSpPr>
+        <a:xfrm>
+          <a:off x="0" y="0"/>
+          <a:ext cx="0" cy="0"/>
+          <a:chOff x="0" y="0"/>
+          <a:chExt cx="0" cy="0"/>
+        </a:xfrm>
+      </p:grpSpPr>
       <p:sp>
         <p:nvSpPr>
           <p:cNvPr id="2" name="Rectangle 1"/>
@@ -19128,6 +18521,7 @@
           <a:lstStyle/>
           <a:p>
             <a:pPr algn="ctr"/>
+            <a:endParaRPr/>
           </a:p>
         </p:txBody>
       </p:sp>
@@ -19171,6 +18565,7 @@
           <a:lstStyle/>
           <a:p>
             <a:pPr algn="ctr"/>
+            <a:endParaRPr/>
           </a:p>
         </p:txBody>
       </p:sp>
@@ -19191,7 +18586,7 @@
           <a:noFill/>
         </p:spPr>
         <p:txBody>
-          <a:bodyPr wrap="square" anchor="t" lIns="0" rIns="0" tIns="0" bIns="0">
+          <a:bodyPr wrap="square" lIns="0" tIns="0" rIns="0" bIns="0" anchor="t">
             <a:spAutoFit/>
           </a:bodyPr>
           <a:lstStyle/>
@@ -19226,7 +18621,7 @@
           <a:noFill/>
         </p:spPr>
         <p:txBody>
-          <a:bodyPr wrap="square" anchor="t" lIns="0" rIns="0" tIns="0" bIns="0">
+          <a:bodyPr wrap="square" lIns="0" tIns="0" rIns="0" bIns="0" anchor="t">
             <a:spAutoFit/>
           </a:bodyPr>
           <a:lstStyle/>
@@ -19288,6 +18683,7 @@
           <a:lstStyle/>
           <a:p>
             <a:pPr algn="ctr"/>
+            <a:endParaRPr/>
           </a:p>
         </p:txBody>
       </p:sp>
@@ -19300,7 +18696,7 @@
           <p:nvPr/>
         </p:nvPicPr>
         <p:blipFill>
-          <a:blip r:embed="rId2"/>
+          <a:blip r:embed="rId3"/>
           <a:stretch>
             <a:fillRect/>
           </a:stretch>
@@ -19355,6 +18751,7 @@
           <a:lstStyle/>
           <a:p>
             <a:pPr algn="ctr"/>
+            <a:endParaRPr/>
           </a:p>
         </p:txBody>
       </p:sp>
@@ -19398,41 +18795,7 @@
           <a:lstStyle/>
           <a:p>
             <a:pPr algn="ctr"/>
-          </a:p>
-        </p:txBody>
-      </p:sp>
-      <p:sp>
-        <p:nvSpPr>
-          <p:cNvPr id="10" name="TextBox 9"/>
-          <p:cNvSpPr txBox="1"/>
-          <p:nvPr/>
-        </p:nvSpPr>
-        <p:spPr>
-          <a:xfrm>
-            <a:off x="594360" y="6355080"/>
-            <a:ext cx="4572000" cy="502920"/>
-          </a:xfrm>
-          <a:prstGeom prst="rect">
-            <a:avLst/>
-          </a:prstGeom>
-          <a:noFill/>
-        </p:spPr>
-        <p:txBody>
-          <a:bodyPr wrap="square" anchor="ctr" lIns="0" rIns="0" tIns="0" bIns="0">
-            <a:spAutoFit/>
-          </a:bodyPr>
-          <a:lstStyle/>
-          <a:p>
-            <a:pPr algn="l"/>
-            <a:r>
-              <a:rPr sz="1000" b="0" i="0">
-                <a:solidFill>
-                  <a:srgbClr val="9FB3C8"/>
-                </a:solidFill>
-                <a:latin typeface="Segoe UI"/>
-              </a:rPr>
-              <a:t>ICT108  ·  MetMate case study</a:t>
-            </a:r>
+            <a:endParaRPr/>
           </a:p>
         </p:txBody>
       </p:sp>
@@ -19524,6 +18887,7 @@
           <a:lstStyle/>
           <a:p>
             <a:pPr algn="ctr"/>
+            <a:endParaRPr/>
           </a:p>
         </p:txBody>
       </p:sp>
@@ -19544,7 +18908,7 @@
           <a:noFill/>
         </p:spPr>
         <p:txBody>
-          <a:bodyPr wrap="square" anchor="ctr" lIns="0" rIns="0" tIns="0" bIns="0">
+          <a:bodyPr wrap="square" lIns="0" tIns="0" rIns="0" bIns="0" anchor="ctr">
             <a:spAutoFit/>
           </a:bodyPr>
           <a:lstStyle/>
@@ -19607,6 +18971,7 @@
           <a:lstStyle/>
           <a:p>
             <a:pPr algn="ctr"/>
+            <a:endParaRPr/>
           </a:p>
         </p:txBody>
       </p:sp>
@@ -19654,6 +19019,7 @@
           <a:lstStyle/>
           <a:p>
             <a:pPr algn="ctr"/>
+            <a:endParaRPr/>
           </a:p>
         </p:txBody>
       </p:sp>
@@ -19674,7 +19040,7 @@
           <a:noFill/>
         </p:spPr>
         <p:txBody>
-          <a:bodyPr wrap="square" anchor="ctr" lIns="0" rIns="0" tIns="0" bIns="0">
+          <a:bodyPr wrap="square" lIns="0" tIns="0" rIns="0" bIns="0" anchor="ctr">
             <a:spAutoFit/>
           </a:bodyPr>
           <a:lstStyle/>
@@ -19736,6 +19102,7 @@
           <a:lstStyle/>
           <a:p>
             <a:pPr algn="ctr"/>
+            <a:endParaRPr/>
           </a:p>
         </p:txBody>
       </p:sp>
@@ -19783,6 +19150,7 @@
           <a:lstStyle/>
           <a:p>
             <a:pPr algn="ctr"/>
+            <a:endParaRPr/>
           </a:p>
         </p:txBody>
       </p:sp>
@@ -19803,7 +19171,7 @@
           <a:noFill/>
         </p:spPr>
         <p:txBody>
-          <a:bodyPr wrap="square" anchor="ctr" lIns="0" rIns="0" tIns="0" bIns="0">
+          <a:bodyPr wrap="square" lIns="0" tIns="0" rIns="0" bIns="0" anchor="ctr">
             <a:spAutoFit/>
           </a:bodyPr>
           <a:lstStyle/>
@@ -19843,7 +19211,7 @@
           <a:noFill/>
         </p:spPr>
         <p:txBody>
-          <a:bodyPr wrap="square" anchor="t" lIns="0" rIns="0" tIns="0" bIns="0">
+          <a:bodyPr wrap="square" lIns="0" tIns="0" rIns="0" bIns="0" anchor="t">
             <a:spAutoFit/>
           </a:bodyPr>
           <a:lstStyle/>
@@ -19878,7 +19246,7 @@
           <a:noFill/>
         </p:spPr>
         <p:txBody>
-          <a:bodyPr wrap="square" anchor="t" lIns="0" rIns="0" tIns="0" bIns="0">
+          <a:bodyPr wrap="square" lIns="0" tIns="0" rIns="0" bIns="0" anchor="t">
             <a:spAutoFit/>
           </a:bodyPr>
           <a:lstStyle/>
@@ -19913,7 +19281,7 @@
           <a:noFill/>
         </p:spPr>
         <p:txBody>
-          <a:bodyPr wrap="square" anchor="t" lIns="0" rIns="0" tIns="0" bIns="0">
+          <a:bodyPr wrap="square" lIns="0" tIns="0" rIns="0" bIns="0" anchor="t">
             <a:spAutoFit/>
           </a:bodyPr>
           <a:lstStyle/>
@@ -19975,6 +19343,7 @@
           <a:lstStyle/>
           <a:p>
             <a:pPr algn="ctr"/>
+            <a:endParaRPr/>
           </a:p>
         </p:txBody>
       </p:sp>
@@ -19995,7 +19364,7 @@
           <a:noFill/>
         </p:spPr>
         <p:txBody>
-          <a:bodyPr wrap="square" anchor="t" lIns="0" rIns="0" tIns="0" bIns="0">
+          <a:bodyPr wrap="square" lIns="0" tIns="0" rIns="0" bIns="0" anchor="t">
             <a:spAutoFit/>
           </a:bodyPr>
           <a:lstStyle/>
@@ -20030,7 +19399,7 @@
           <a:noFill/>
         </p:spPr>
         <p:txBody>
-          <a:bodyPr wrap="square" anchor="t" lIns="0" rIns="0" tIns="0" bIns="0">
+          <a:bodyPr wrap="square" lIns="0" tIns="0" rIns="0" bIns="0" anchor="t">
             <a:spAutoFit/>
           </a:bodyPr>
           <a:lstStyle/>
@@ -20108,6 +19477,7 @@
           <a:lstStyle/>
           <a:p>
             <a:pPr algn="ctr"/>
+            <a:endParaRPr/>
           </a:p>
         </p:txBody>
       </p:sp>
@@ -20128,7 +19498,7 @@
           <a:noFill/>
         </p:spPr>
         <p:txBody>
-          <a:bodyPr wrap="square" anchor="ctr" lIns="0" rIns="0" tIns="0" bIns="0">
+          <a:bodyPr wrap="square" lIns="0" tIns="0" rIns="0" bIns="0" anchor="ctr">
             <a:spAutoFit/>
           </a:bodyPr>
           <a:lstStyle/>
@@ -20203,6 +19573,7 @@
           <a:lstStyle/>
           <a:p>
             <a:pPr algn="ctr"/>
+            <a:endParaRPr/>
           </a:p>
         </p:txBody>
       </p:sp>
@@ -20223,7 +19594,7 @@
           <a:noFill/>
         </p:spPr>
         <p:txBody>
-          <a:bodyPr wrap="square" anchor="ctr" lIns="0" rIns="0" tIns="0" bIns="0">
+          <a:bodyPr wrap="square" lIns="0" tIns="0" rIns="0" bIns="0" anchor="ctr">
             <a:spAutoFit/>
           </a:bodyPr>
           <a:lstStyle/>
@@ -20262,7 +19633,7 @@
           <a:noFill/>
         </p:spPr>
         <p:txBody>
-          <a:bodyPr wrap="square" anchor="t" lIns="0" rIns="0" tIns="0" bIns="0">
+          <a:bodyPr wrap="square" lIns="0" tIns="0" rIns="0" bIns="0" anchor="t">
             <a:spAutoFit/>
           </a:bodyPr>
           <a:lstStyle/>
@@ -20289,7 +19660,7 @@
 </file>
 
 <file path=ppt/slides/slide5.xml><?xml version="1.0" encoding="utf-8"?>
-<p:sld xmlns:a="http://schemas.openxmlformats.org/drawingml/2006/main" xmlns:p="http://schemas.openxmlformats.org/presentationml/2006/main" xmlns:r="http://schemas.openxmlformats.org/officeDocument/2006/relationships">
+<p:sld xmlns:a="http://schemas.openxmlformats.org/drawingml/2006/main" xmlns:r="http://schemas.openxmlformats.org/officeDocument/2006/relationships" xmlns:p="http://schemas.openxmlformats.org/presentationml/2006/main">
   <p:cSld>
     <p:spTree>
       <p:nvGrpSpPr>
@@ -20297,7 +19668,14 @@
         <p:cNvGrpSpPr/>
         <p:nvPr/>
       </p:nvGrpSpPr>
-      <p:grpSpPr/>
+      <p:grpSpPr>
+        <a:xfrm>
+          <a:off x="0" y="0"/>
+          <a:ext cx="0" cy="0"/>
+          <a:chOff x="0" y="0"/>
+          <a:chExt cx="0" cy="0"/>
+        </a:xfrm>
+      </p:grpSpPr>
       <p:sp>
         <p:nvSpPr>
           <p:cNvPr id="2" name="Rectangle 1"/>
@@ -20338,6 +19716,7 @@
           <a:lstStyle/>
           <a:p>
             <a:pPr algn="ctr"/>
+            <a:endParaRPr/>
           </a:p>
         </p:txBody>
       </p:sp>
@@ -20381,6 +19760,7 @@
           <a:lstStyle/>
           <a:p>
             <a:pPr algn="ctr"/>
+            <a:endParaRPr/>
           </a:p>
         </p:txBody>
       </p:sp>
@@ -20401,7 +19781,7 @@
           <a:noFill/>
         </p:spPr>
         <p:txBody>
-          <a:bodyPr wrap="square" anchor="t" lIns="0" rIns="0" tIns="0" bIns="0">
+          <a:bodyPr wrap="square" lIns="0" tIns="0" rIns="0" bIns="0" anchor="t">
             <a:spAutoFit/>
           </a:bodyPr>
           <a:lstStyle/>
@@ -20436,7 +19816,7 @@
           <a:noFill/>
         </p:spPr>
         <p:txBody>
-          <a:bodyPr wrap="square" anchor="t" lIns="0" rIns="0" tIns="0" bIns="0">
+          <a:bodyPr wrap="square" lIns="0" tIns="0" rIns="0" bIns="0" anchor="t">
             <a:spAutoFit/>
           </a:bodyPr>
           <a:lstStyle/>
@@ -20498,6 +19878,7 @@
           <a:lstStyle/>
           <a:p>
             <a:pPr algn="ctr"/>
+            <a:endParaRPr/>
           </a:p>
         </p:txBody>
       </p:sp>
@@ -20510,7 +19891,7 @@
           <p:nvPr/>
         </p:nvPicPr>
         <p:blipFill>
-          <a:blip r:embed="rId2"/>
+          <a:blip r:embed="rId3"/>
           <a:stretch>
             <a:fillRect/>
           </a:stretch>
@@ -20565,6 +19946,7 @@
           <a:lstStyle/>
           <a:p>
             <a:pPr algn="ctr"/>
+            <a:endParaRPr/>
           </a:p>
         </p:txBody>
       </p:sp>
@@ -20608,41 +19990,7 @@
           <a:lstStyle/>
           <a:p>
             <a:pPr algn="ctr"/>
-          </a:p>
-        </p:txBody>
-      </p:sp>
-      <p:sp>
-        <p:nvSpPr>
-          <p:cNvPr id="10" name="TextBox 9"/>
-          <p:cNvSpPr txBox="1"/>
-          <p:nvPr/>
-        </p:nvSpPr>
-        <p:spPr>
-          <a:xfrm>
-            <a:off x="594360" y="6355080"/>
-            <a:ext cx="4572000" cy="502920"/>
-          </a:xfrm>
-          <a:prstGeom prst="rect">
-            <a:avLst/>
-          </a:prstGeom>
-          <a:noFill/>
-        </p:spPr>
-        <p:txBody>
-          <a:bodyPr wrap="square" anchor="ctr" lIns="0" rIns="0" tIns="0" bIns="0">
-            <a:spAutoFit/>
-          </a:bodyPr>
-          <a:lstStyle/>
-          <a:p>
-            <a:pPr algn="l"/>
-            <a:r>
-              <a:rPr sz="1000" b="0" i="0">
-                <a:solidFill>
-                  <a:srgbClr val="9FB3C8"/>
-                </a:solidFill>
-                <a:latin typeface="Segoe UI"/>
-              </a:rPr>
-              <a:t>ICT108  ·  MetMate case study</a:t>
-            </a:r>
+            <a:endParaRPr/>
           </a:p>
         </p:txBody>
       </p:sp>
@@ -20734,6 +20082,7 @@
           <a:lstStyle/>
           <a:p>
             <a:pPr algn="ctr"/>
+            <a:endParaRPr/>
           </a:p>
         </p:txBody>
       </p:sp>
@@ -20754,7 +20103,7 @@
           <a:noFill/>
         </p:spPr>
         <p:txBody>
-          <a:bodyPr wrap="square" anchor="ctr" lIns="0" rIns="0" tIns="0" bIns="0">
+          <a:bodyPr wrap="square" lIns="0" tIns="0" rIns="0" bIns="0" anchor="ctr">
             <a:spAutoFit/>
           </a:bodyPr>
           <a:lstStyle/>
@@ -20796,15 +20145,12 @@
                 <a:spcPct val="100000"/>
               </a:lnSpc>
             </a:pPr>
-            <a:r>
-              <a:rPr sz="1000" b="0" i="0">
-                <a:solidFill>
-                  <a:srgbClr val="9FB3C8"/>
-                </a:solidFill>
-                <a:latin typeface="Consolas"/>
-              </a:rPr>
-              <a:t/>
-            </a:r>
+            <a:endParaRPr sz="1500" b="0" i="1">
+              <a:solidFill>
+                <a:srgbClr val="9FB3C8"/>
+              </a:solidFill>
+              <a:latin typeface="Consolas"/>
+            </a:endParaRPr>
           </a:p>
           <a:p>
             <a:pPr algn="l">
@@ -20844,15 +20190,12 @@
                 <a:spcPct val="100000"/>
               </a:lnSpc>
             </a:pPr>
-            <a:r>
-              <a:rPr sz="1000" b="0" i="0">
-                <a:solidFill>
-                  <a:srgbClr val="9FB3C8"/>
-                </a:solidFill>
-                <a:latin typeface="Consolas"/>
-              </a:rPr>
-              <a:t/>
-            </a:r>
+            <a:endParaRPr sz="1500" b="0" i="1">
+              <a:solidFill>
+                <a:srgbClr val="9FB3C8"/>
+              </a:solidFill>
+              <a:latin typeface="Consolas"/>
+            </a:endParaRPr>
           </a:p>
           <a:p>
             <a:pPr algn="l">
@@ -20928,6 +20271,7 @@
           <a:lstStyle/>
           <a:p>
             <a:pPr algn="ctr"/>
+            <a:endParaRPr/>
           </a:p>
         </p:txBody>
       </p:sp>
@@ -20948,7 +20292,7 @@
           <a:noFill/>
         </p:spPr>
         <p:txBody>
-          <a:bodyPr wrap="square" anchor="ctr" lIns="0" rIns="0" tIns="0" bIns="0">
+          <a:bodyPr wrap="square" lIns="0" tIns="0" rIns="0" bIns="0" anchor="ctr">
             <a:spAutoFit/>
           </a:bodyPr>
           <a:lstStyle/>
@@ -21023,6 +20367,7 @@
           <a:lstStyle/>
           <a:p>
             <a:pPr algn="ctr"/>
+            <a:endParaRPr/>
           </a:p>
         </p:txBody>
       </p:sp>
@@ -21043,7 +20388,7 @@
           <a:noFill/>
         </p:spPr>
         <p:txBody>
-          <a:bodyPr wrap="square" anchor="ctr" lIns="0" rIns="0" tIns="0" bIns="0">
+          <a:bodyPr wrap="square" lIns="0" tIns="0" rIns="0" bIns="0" anchor="ctr">
             <a:spAutoFit/>
           </a:bodyPr>
           <a:lstStyle/>
@@ -21118,6 +20463,7 @@
           <a:lstStyle/>
           <a:p>
             <a:pPr algn="ctr"/>
+            <a:endParaRPr/>
           </a:p>
         </p:txBody>
       </p:sp>
@@ -21138,7 +20484,7 @@
           <a:noFill/>
         </p:spPr>
         <p:txBody>
-          <a:bodyPr wrap="square" anchor="t" lIns="0" rIns="0" tIns="0" bIns="0">
+          <a:bodyPr wrap="square" lIns="0" tIns="0" rIns="0" bIns="0" anchor="t">
             <a:spAutoFit/>
           </a:bodyPr>
           <a:lstStyle/>
@@ -21209,7 +20555,7 @@
           <a:noFill/>
         </p:spPr>
         <p:txBody>
-          <a:bodyPr wrap="square" anchor="t" lIns="0" rIns="0" tIns="0" bIns="0">
+          <a:bodyPr wrap="square" lIns="0" tIns="0" rIns="0" bIns="0" anchor="t">
             <a:spAutoFit/>
           </a:bodyPr>
           <a:lstStyle/>
@@ -21236,7 +20582,7 @@
 </file>
 
 <file path=ppt/slides/slide6.xml><?xml version="1.0" encoding="utf-8"?>
-<p:sld xmlns:a="http://schemas.openxmlformats.org/drawingml/2006/main" xmlns:p="http://schemas.openxmlformats.org/presentationml/2006/main" xmlns:r="http://schemas.openxmlformats.org/officeDocument/2006/relationships">
+<p:sld xmlns:a="http://schemas.openxmlformats.org/drawingml/2006/main" xmlns:r="http://schemas.openxmlformats.org/officeDocument/2006/relationships" xmlns:p="http://schemas.openxmlformats.org/presentationml/2006/main">
   <p:cSld>
     <p:spTree>
       <p:nvGrpSpPr>
@@ -21244,7 +20590,14 @@
         <p:cNvGrpSpPr/>
         <p:nvPr/>
       </p:nvGrpSpPr>
-      <p:grpSpPr/>
+      <p:grpSpPr>
+        <a:xfrm>
+          <a:off x="0" y="0"/>
+          <a:ext cx="0" cy="0"/>
+          <a:chOff x="0" y="0"/>
+          <a:chExt cx="0" cy="0"/>
+        </a:xfrm>
+      </p:grpSpPr>
       <p:sp>
         <p:nvSpPr>
           <p:cNvPr id="2" name="Rectangle 1"/>
@@ -21285,6 +20638,7 @@
           <a:lstStyle/>
           <a:p>
             <a:pPr algn="ctr"/>
+            <a:endParaRPr/>
           </a:p>
         </p:txBody>
       </p:sp>
@@ -21328,6 +20682,7 @@
           <a:lstStyle/>
           <a:p>
             <a:pPr algn="ctr"/>
+            <a:endParaRPr/>
           </a:p>
         </p:txBody>
       </p:sp>
@@ -21348,7 +20703,7 @@
           <a:noFill/>
         </p:spPr>
         <p:txBody>
-          <a:bodyPr wrap="square" anchor="t" lIns="0" rIns="0" tIns="0" bIns="0">
+          <a:bodyPr wrap="square" lIns="0" tIns="0" rIns="0" bIns="0" anchor="t">
             <a:spAutoFit/>
           </a:bodyPr>
           <a:lstStyle/>
@@ -21383,7 +20738,7 @@
           <a:noFill/>
         </p:spPr>
         <p:txBody>
-          <a:bodyPr wrap="square" anchor="t" lIns="0" rIns="0" tIns="0" bIns="0">
+          <a:bodyPr wrap="square" lIns="0" tIns="0" rIns="0" bIns="0" anchor="t">
             <a:spAutoFit/>
           </a:bodyPr>
           <a:lstStyle/>
@@ -21445,6 +20800,7 @@
           <a:lstStyle/>
           <a:p>
             <a:pPr algn="ctr"/>
+            <a:endParaRPr/>
           </a:p>
         </p:txBody>
       </p:sp>
@@ -21457,7 +20813,7 @@
           <p:nvPr/>
         </p:nvPicPr>
         <p:blipFill>
-          <a:blip r:embed="rId2"/>
+          <a:blip r:embed="rId3"/>
           <a:stretch>
             <a:fillRect/>
           </a:stretch>
@@ -21512,6 +20868,7 @@
           <a:lstStyle/>
           <a:p>
             <a:pPr algn="ctr"/>
+            <a:endParaRPr/>
           </a:p>
         </p:txBody>
       </p:sp>
@@ -21555,41 +20912,7 @@
           <a:lstStyle/>
           <a:p>
             <a:pPr algn="ctr"/>
-          </a:p>
-        </p:txBody>
-      </p:sp>
-      <p:sp>
-        <p:nvSpPr>
-          <p:cNvPr id="10" name="TextBox 9"/>
-          <p:cNvSpPr txBox="1"/>
-          <p:nvPr/>
-        </p:nvSpPr>
-        <p:spPr>
-          <a:xfrm>
-            <a:off x="594360" y="6355080"/>
-            <a:ext cx="4572000" cy="502920"/>
-          </a:xfrm>
-          <a:prstGeom prst="rect">
-            <a:avLst/>
-          </a:prstGeom>
-          <a:noFill/>
-        </p:spPr>
-        <p:txBody>
-          <a:bodyPr wrap="square" anchor="ctr" lIns="0" rIns="0" tIns="0" bIns="0">
-            <a:spAutoFit/>
-          </a:bodyPr>
-          <a:lstStyle/>
-          <a:p>
-            <a:pPr algn="l"/>
-            <a:r>
-              <a:rPr sz="1000" b="0" i="0">
-                <a:solidFill>
-                  <a:srgbClr val="9FB3C8"/>
-                </a:solidFill>
-                <a:latin typeface="Segoe UI"/>
-              </a:rPr>
-              <a:t>ICT108  ·  MetMate case study</a:t>
-            </a:r>
+            <a:endParaRPr/>
           </a:p>
         </p:txBody>
       </p:sp>
@@ -21681,6 +21004,7 @@
           <a:lstStyle/>
           <a:p>
             <a:pPr algn="ctr"/>
+            <a:endParaRPr/>
           </a:p>
         </p:txBody>
       </p:sp>
@@ -21701,7 +21025,7 @@
           <a:noFill/>
         </p:spPr>
         <p:txBody>
-          <a:bodyPr wrap="square" anchor="ctr" lIns="0" rIns="0" tIns="0" bIns="0">
+          <a:bodyPr wrap="square" lIns="0" tIns="0" rIns="0" bIns="0" anchor="ctr">
             <a:spAutoFit/>
           </a:bodyPr>
           <a:lstStyle/>
@@ -21763,6 +21087,7 @@
           <a:lstStyle/>
           <a:p>
             <a:pPr algn="ctr"/>
+            <a:endParaRPr/>
           </a:p>
         </p:txBody>
       </p:sp>
@@ -21810,6 +21135,7 @@
           <a:lstStyle/>
           <a:p>
             <a:pPr algn="ctr"/>
+            <a:endParaRPr/>
           </a:p>
         </p:txBody>
       </p:sp>
@@ -21830,7 +21156,7 @@
           <a:noFill/>
         </p:spPr>
         <p:txBody>
-          <a:bodyPr wrap="square" anchor="ctr" lIns="0" rIns="0" tIns="0" bIns="0">
+          <a:bodyPr wrap="square" lIns="0" tIns="0" rIns="0" bIns="0" anchor="ctr">
             <a:spAutoFit/>
           </a:bodyPr>
           <a:lstStyle/>
@@ -21892,6 +21218,7 @@
           <a:lstStyle/>
           <a:p>
             <a:pPr algn="ctr"/>
+            <a:endParaRPr/>
           </a:p>
         </p:txBody>
       </p:sp>
@@ -21939,6 +21266,7 @@
           <a:lstStyle/>
           <a:p>
             <a:pPr algn="ctr"/>
+            <a:endParaRPr/>
           </a:p>
         </p:txBody>
       </p:sp>
@@ -21959,7 +21287,7 @@
           <a:noFill/>
         </p:spPr>
         <p:txBody>
-          <a:bodyPr wrap="square" anchor="ctr" lIns="0" rIns="0" tIns="0" bIns="0">
+          <a:bodyPr wrap="square" lIns="0" tIns="0" rIns="0" bIns="0" anchor="ctr">
             <a:spAutoFit/>
           </a:bodyPr>
           <a:lstStyle/>
@@ -22021,6 +21349,7 @@
           <a:lstStyle/>
           <a:p>
             <a:pPr algn="ctr"/>
+            <a:endParaRPr/>
           </a:p>
         </p:txBody>
       </p:sp>
@@ -22068,6 +21397,7 @@
           <a:lstStyle/>
           <a:p>
             <a:pPr algn="ctr"/>
+            <a:endParaRPr/>
           </a:p>
         </p:txBody>
       </p:sp>
@@ -22088,7 +21418,7 @@
           <a:noFill/>
         </p:spPr>
         <p:txBody>
-          <a:bodyPr wrap="square" anchor="ctr" lIns="0" rIns="0" tIns="0" bIns="0">
+          <a:bodyPr wrap="square" lIns="0" tIns="0" rIns="0" bIns="0" anchor="ctr">
             <a:spAutoFit/>
           </a:bodyPr>
           <a:lstStyle/>
@@ -22152,6 +21482,7 @@
           <a:lstStyle/>
           <a:p>
             <a:pPr algn="ctr"/>
+            <a:endParaRPr/>
           </a:p>
         </p:txBody>
       </p:sp>
@@ -22172,7 +21503,7 @@
           <a:noFill/>
         </p:spPr>
         <p:txBody>
-          <a:bodyPr wrap="square" anchor="t" lIns="0" rIns="0" tIns="0" bIns="0">
+          <a:bodyPr wrap="square" lIns="0" tIns="0" rIns="0" bIns="0" anchor="t">
             <a:spAutoFit/>
           </a:bodyPr>
           <a:lstStyle/>
@@ -22232,6 +21563,7 @@
           <a:lstStyle/>
           <a:p>
             <a:pPr algn="ctr"/>
+            <a:endParaRPr/>
           </a:p>
         </p:txBody>
       </p:sp>
@@ -22252,7 +21584,7 @@
           <a:noFill/>
         </p:spPr>
         <p:txBody>
-          <a:bodyPr wrap="square" anchor="t" lIns="0" rIns="0" tIns="0" bIns="0">
+          <a:bodyPr wrap="square" lIns="0" tIns="0" rIns="0" bIns="0" anchor="t">
             <a:spAutoFit/>
           </a:bodyPr>
           <a:lstStyle/>
@@ -22314,6 +21646,7 @@
           <a:lstStyle/>
           <a:p>
             <a:pPr algn="ctr"/>
+            <a:endParaRPr/>
           </a:p>
         </p:txBody>
       </p:sp>
@@ -22334,7 +21667,7 @@
           <a:noFill/>
         </p:spPr>
         <p:txBody>
-          <a:bodyPr wrap="square" anchor="ctr" lIns="0" rIns="0" tIns="0" bIns="0">
+          <a:bodyPr wrap="square" lIns="0" tIns="0" rIns="0" bIns="0" anchor="ctr">
             <a:spAutoFit/>
           </a:bodyPr>
           <a:lstStyle/>
@@ -22409,6 +21742,7 @@
           <a:lstStyle/>
           <a:p>
             <a:pPr algn="ctr"/>
+            <a:endParaRPr/>
           </a:p>
         </p:txBody>
       </p:sp>
@@ -22429,7 +21763,7 @@
           <a:noFill/>
         </p:spPr>
         <p:txBody>
-          <a:bodyPr wrap="square" anchor="ctr" lIns="0" rIns="0" tIns="0" bIns="0">
+          <a:bodyPr wrap="square" lIns="0" tIns="0" rIns="0" bIns="0" anchor="ctr">
             <a:spAutoFit/>
           </a:bodyPr>
           <a:lstStyle/>
@@ -22477,7 +21811,7 @@
           <a:noFill/>
         </p:spPr>
         <p:txBody>
-          <a:bodyPr wrap="square" anchor="t" lIns="0" rIns="0" tIns="0" bIns="0">
+          <a:bodyPr wrap="square" lIns="0" tIns="0" rIns="0" bIns="0" anchor="t">
             <a:spAutoFit/>
           </a:bodyPr>
           <a:lstStyle/>
@@ -22512,7 +21846,7 @@
           <a:noFill/>
         </p:spPr>
         <p:txBody>
-          <a:bodyPr wrap="square" anchor="t" lIns="0" rIns="0" tIns="0" bIns="0">
+          <a:bodyPr wrap="square" lIns="0" tIns="0" rIns="0" bIns="0" anchor="t">
             <a:spAutoFit/>
           </a:bodyPr>
           <a:lstStyle/>
@@ -22539,7 +21873,7 @@
 </file>
 
 <file path=ppt/slides/slide7.xml><?xml version="1.0" encoding="utf-8"?>
-<p:sld xmlns:a="http://schemas.openxmlformats.org/drawingml/2006/main" xmlns:p="http://schemas.openxmlformats.org/presentationml/2006/main" xmlns:r="http://schemas.openxmlformats.org/officeDocument/2006/relationships">
+<p:sld xmlns:a="http://schemas.openxmlformats.org/drawingml/2006/main" xmlns:r="http://schemas.openxmlformats.org/officeDocument/2006/relationships" xmlns:p="http://schemas.openxmlformats.org/presentationml/2006/main">
   <p:cSld>
     <p:spTree>
       <p:nvGrpSpPr>
@@ -22547,7 +21881,14 @@
         <p:cNvGrpSpPr/>
         <p:nvPr/>
       </p:nvGrpSpPr>
-      <p:grpSpPr/>
+      <p:grpSpPr>
+        <a:xfrm>
+          <a:off x="0" y="0"/>
+          <a:ext cx="0" cy="0"/>
+          <a:chOff x="0" y="0"/>
+          <a:chExt cx="0" cy="0"/>
+        </a:xfrm>
+      </p:grpSpPr>
       <p:sp>
         <p:nvSpPr>
           <p:cNvPr id="2" name="Rectangle 1"/>
@@ -22588,6 +21929,7 @@
           <a:lstStyle/>
           <a:p>
             <a:pPr algn="ctr"/>
+            <a:endParaRPr/>
           </a:p>
         </p:txBody>
       </p:sp>
@@ -22631,6 +21973,7 @@
           <a:lstStyle/>
           <a:p>
             <a:pPr algn="ctr"/>
+            <a:endParaRPr/>
           </a:p>
         </p:txBody>
       </p:sp>
@@ -22651,7 +21994,7 @@
           <a:noFill/>
         </p:spPr>
         <p:txBody>
-          <a:bodyPr wrap="square" anchor="t" lIns="0" rIns="0" tIns="0" bIns="0">
+          <a:bodyPr wrap="square" lIns="0" tIns="0" rIns="0" bIns="0" anchor="t">
             <a:spAutoFit/>
           </a:bodyPr>
           <a:lstStyle/>
@@ -22686,7 +22029,7 @@
           <a:noFill/>
         </p:spPr>
         <p:txBody>
-          <a:bodyPr wrap="square" anchor="t" lIns="0" rIns="0" tIns="0" bIns="0">
+          <a:bodyPr wrap="square" lIns="0" tIns="0" rIns="0" bIns="0" anchor="t">
             <a:spAutoFit/>
           </a:bodyPr>
           <a:lstStyle/>
@@ -22748,6 +22091,7 @@
           <a:lstStyle/>
           <a:p>
             <a:pPr algn="ctr"/>
+            <a:endParaRPr/>
           </a:p>
         </p:txBody>
       </p:sp>
@@ -22760,7 +22104,7 @@
           <p:nvPr/>
         </p:nvPicPr>
         <p:blipFill>
-          <a:blip r:embed="rId2"/>
+          <a:blip r:embed="rId3"/>
           <a:stretch>
             <a:fillRect/>
           </a:stretch>
@@ -22815,6 +22159,7 @@
           <a:lstStyle/>
           <a:p>
             <a:pPr algn="ctr"/>
+            <a:endParaRPr/>
           </a:p>
         </p:txBody>
       </p:sp>
@@ -22858,41 +22203,7 @@
           <a:lstStyle/>
           <a:p>
             <a:pPr algn="ctr"/>
-          </a:p>
-        </p:txBody>
-      </p:sp>
-      <p:sp>
-        <p:nvSpPr>
-          <p:cNvPr id="10" name="TextBox 9"/>
-          <p:cNvSpPr txBox="1"/>
-          <p:nvPr/>
-        </p:nvSpPr>
-        <p:spPr>
-          <a:xfrm>
-            <a:off x="594360" y="6355080"/>
-            <a:ext cx="4572000" cy="502920"/>
-          </a:xfrm>
-          <a:prstGeom prst="rect">
-            <a:avLst/>
-          </a:prstGeom>
-          <a:noFill/>
-        </p:spPr>
-        <p:txBody>
-          <a:bodyPr wrap="square" anchor="ctr" lIns="0" rIns="0" tIns="0" bIns="0">
-            <a:spAutoFit/>
-          </a:bodyPr>
-          <a:lstStyle/>
-          <a:p>
-            <a:pPr algn="l"/>
-            <a:r>
-              <a:rPr sz="1000" b="0" i="0">
-                <a:solidFill>
-                  <a:srgbClr val="9FB3C8"/>
-                </a:solidFill>
-                <a:latin typeface="Segoe UI"/>
-              </a:rPr>
-              <a:t>ICT108  ·  MetMate case study</a:t>
-            </a:r>
+            <a:endParaRPr/>
           </a:p>
         </p:txBody>
       </p:sp>
@@ -22984,6 +22295,7 @@
           <a:lstStyle/>
           <a:p>
             <a:pPr algn="ctr"/>
+            <a:endParaRPr/>
           </a:p>
         </p:txBody>
       </p:sp>
@@ -23004,7 +22316,7 @@
           <a:noFill/>
         </p:spPr>
         <p:txBody>
-          <a:bodyPr wrap="square" anchor="ctr" lIns="0" rIns="0" tIns="0" bIns="0">
+          <a:bodyPr wrap="square" lIns="0" tIns="0" rIns="0" bIns="0" anchor="ctr">
             <a:spAutoFit/>
           </a:bodyPr>
           <a:lstStyle/>
@@ -23066,6 +22378,7 @@
           <a:lstStyle/>
           <a:p>
             <a:pPr algn="ctr"/>
+            <a:endParaRPr/>
           </a:p>
         </p:txBody>
       </p:sp>
@@ -23086,7 +22399,7 @@
           <a:noFill/>
         </p:spPr>
         <p:txBody>
-          <a:bodyPr wrap="square" anchor="t" lIns="0" rIns="0" tIns="0" bIns="0">
+          <a:bodyPr wrap="square" lIns="0" tIns="0" rIns="0" bIns="0" anchor="t">
             <a:spAutoFit/>
           </a:bodyPr>
           <a:lstStyle/>
@@ -23121,7 +22434,7 @@
           <a:noFill/>
         </p:spPr>
         <p:txBody>
-          <a:bodyPr wrap="square" anchor="t" lIns="0" rIns="0" tIns="0" bIns="0">
+          <a:bodyPr wrap="square" lIns="0" tIns="0" rIns="0" bIns="0" anchor="t">
             <a:spAutoFit/>
           </a:bodyPr>
           <a:lstStyle/>
@@ -23156,7 +22469,7 @@
           <a:noFill/>
         </p:spPr>
         <p:txBody>
-          <a:bodyPr wrap="square" anchor="t" lIns="0" rIns="0" tIns="0" bIns="0">
+          <a:bodyPr wrap="square" lIns="0" tIns="0" rIns="0" bIns="0" anchor="t">
             <a:spAutoFit/>
           </a:bodyPr>
           <a:lstStyle/>
@@ -23214,6 +22527,7 @@
           <a:lstStyle/>
           <a:p>
             <a:pPr algn="ctr"/>
+            <a:endParaRPr/>
           </a:p>
         </p:txBody>
       </p:sp>
@@ -23261,6 +22575,7 @@
           <a:lstStyle/>
           <a:p>
             <a:pPr algn="ctr"/>
+            <a:endParaRPr/>
           </a:p>
         </p:txBody>
       </p:sp>
@@ -23281,7 +22596,7 @@
           <a:noFill/>
         </p:spPr>
         <p:txBody>
-          <a:bodyPr wrap="square" anchor="t" lIns="0" rIns="0" tIns="0" bIns="0">
+          <a:bodyPr wrap="square" lIns="0" tIns="0" rIns="0" bIns="0" anchor="t">
             <a:spAutoFit/>
           </a:bodyPr>
           <a:lstStyle/>
@@ -23316,7 +22631,7 @@
           <a:noFill/>
         </p:spPr>
         <p:txBody>
-          <a:bodyPr wrap="square" anchor="t" lIns="0" rIns="0" tIns="0" bIns="0">
+          <a:bodyPr wrap="square" lIns="0" tIns="0" rIns="0" bIns="0" anchor="t">
             <a:spAutoFit/>
           </a:bodyPr>
           <a:lstStyle/>
@@ -23390,6 +22705,7 @@
           <a:lstStyle/>
           <a:p>
             <a:pPr algn="ctr"/>
+            <a:endParaRPr/>
           </a:p>
         </p:txBody>
       </p:sp>
@@ -23437,6 +22753,7 @@
           <a:lstStyle/>
           <a:p>
             <a:pPr algn="ctr"/>
+            <a:endParaRPr/>
           </a:p>
         </p:txBody>
       </p:sp>
@@ -23457,7 +22774,7 @@
           <a:noFill/>
         </p:spPr>
         <p:txBody>
-          <a:bodyPr wrap="square" anchor="t" lIns="0" rIns="0" tIns="0" bIns="0">
+          <a:bodyPr wrap="square" lIns="0" tIns="0" rIns="0" bIns="0" anchor="t">
             <a:spAutoFit/>
           </a:bodyPr>
           <a:lstStyle/>
@@ -23492,7 +22809,7 @@
           <a:noFill/>
         </p:spPr>
         <p:txBody>
-          <a:bodyPr wrap="square" anchor="t" lIns="0" rIns="0" tIns="0" bIns="0">
+          <a:bodyPr wrap="square" lIns="0" tIns="0" rIns="0" bIns="0" anchor="t">
             <a:spAutoFit/>
           </a:bodyPr>
           <a:lstStyle/>
@@ -23527,7 +22844,7 @@
           <a:noFill/>
         </p:spPr>
         <p:txBody>
-          <a:bodyPr wrap="square" anchor="t" lIns="0" rIns="0" tIns="0" bIns="0">
+          <a:bodyPr wrap="square" lIns="0" tIns="0" rIns="0" bIns="0" anchor="t">
             <a:spAutoFit/>
           </a:bodyPr>
           <a:lstStyle/>
@@ -23566,7 +22883,7 @@
           <a:noFill/>
         </p:spPr>
         <p:txBody>
-          <a:bodyPr wrap="square" anchor="t" lIns="0" rIns="0" tIns="0" bIns="0">
+          <a:bodyPr wrap="square" lIns="0" tIns="0" rIns="0" bIns="0" anchor="t">
             <a:spAutoFit/>
           </a:bodyPr>
           <a:lstStyle/>
@@ -23628,6 +22945,7 @@
           <a:lstStyle/>
           <a:p>
             <a:pPr algn="ctr"/>
+            <a:endParaRPr/>
           </a:p>
         </p:txBody>
       </p:sp>
@@ -23648,7 +22966,7 @@
           <a:noFill/>
         </p:spPr>
         <p:txBody>
-          <a:bodyPr wrap="square" anchor="ctr" lIns="0" rIns="0" tIns="0" bIns="0">
+          <a:bodyPr wrap="square" lIns="0" tIns="0" rIns="0" bIns="0" anchor="ctr">
             <a:spAutoFit/>
           </a:bodyPr>
           <a:lstStyle/>
@@ -23726,6 +23044,7 @@
           <a:lstStyle/>
           <a:p>
             <a:pPr algn="ctr"/>
+            <a:endParaRPr/>
           </a:p>
         </p:txBody>
       </p:sp>
@@ -23746,7 +23065,7 @@
           <a:noFill/>
         </p:spPr>
         <p:txBody>
-          <a:bodyPr wrap="square" anchor="ctr" lIns="0" rIns="0" tIns="0" bIns="0">
+          <a:bodyPr wrap="square" lIns="0" tIns="0" rIns="0" bIns="0" anchor="ctr">
             <a:spAutoFit/>
           </a:bodyPr>
           <a:lstStyle/>
@@ -23789,7 +23108,7 @@
 </file>
 
 <file path=ppt/slides/slide8.xml><?xml version="1.0" encoding="utf-8"?>
-<p:sld xmlns:a="http://schemas.openxmlformats.org/drawingml/2006/main" xmlns:p="http://schemas.openxmlformats.org/presentationml/2006/main" xmlns:r="http://schemas.openxmlformats.org/officeDocument/2006/relationships">
+<p:sld xmlns:a="http://schemas.openxmlformats.org/drawingml/2006/main" xmlns:r="http://schemas.openxmlformats.org/officeDocument/2006/relationships" xmlns:p="http://schemas.openxmlformats.org/presentationml/2006/main">
   <p:cSld>
     <p:spTree>
       <p:nvGrpSpPr>
@@ -23797,7 +23116,14 @@
         <p:cNvGrpSpPr/>
         <p:nvPr/>
       </p:nvGrpSpPr>
-      <p:grpSpPr/>
+      <p:grpSpPr>
+        <a:xfrm>
+          <a:off x="0" y="0"/>
+          <a:ext cx="0" cy="0"/>
+          <a:chOff x="0" y="0"/>
+          <a:chExt cx="0" cy="0"/>
+        </a:xfrm>
+      </p:grpSpPr>
       <p:sp>
         <p:nvSpPr>
           <p:cNvPr id="2" name="Rectangle 1"/>
@@ -23838,6 +23164,7 @@
           <a:lstStyle/>
           <a:p>
             <a:pPr algn="ctr"/>
+            <a:endParaRPr/>
           </a:p>
         </p:txBody>
       </p:sp>
@@ -23881,6 +23208,7 @@
           <a:lstStyle/>
           <a:p>
             <a:pPr algn="ctr"/>
+            <a:endParaRPr/>
           </a:p>
         </p:txBody>
       </p:sp>
@@ -23901,7 +23229,7 @@
           <a:noFill/>
         </p:spPr>
         <p:txBody>
-          <a:bodyPr wrap="square" anchor="t" lIns="0" rIns="0" tIns="0" bIns="0">
+          <a:bodyPr wrap="square" lIns="0" tIns="0" rIns="0" bIns="0" anchor="t">
             <a:spAutoFit/>
           </a:bodyPr>
           <a:lstStyle/>
@@ -23936,7 +23264,7 @@
           <a:noFill/>
         </p:spPr>
         <p:txBody>
-          <a:bodyPr wrap="square" anchor="t" lIns="0" rIns="0" tIns="0" bIns="0">
+          <a:bodyPr wrap="square" lIns="0" tIns="0" rIns="0" bIns="0" anchor="t">
             <a:spAutoFit/>
           </a:bodyPr>
           <a:lstStyle/>
@@ -23998,6 +23326,7 @@
           <a:lstStyle/>
           <a:p>
             <a:pPr algn="ctr"/>
+            <a:endParaRPr/>
           </a:p>
         </p:txBody>
       </p:sp>
@@ -24010,7 +23339,7 @@
           <p:nvPr/>
         </p:nvPicPr>
         <p:blipFill>
-          <a:blip r:embed="rId2"/>
+          <a:blip r:embed="rId3"/>
           <a:stretch>
             <a:fillRect/>
           </a:stretch>
@@ -24065,6 +23394,7 @@
           <a:lstStyle/>
           <a:p>
             <a:pPr algn="ctr"/>
+            <a:endParaRPr/>
           </a:p>
         </p:txBody>
       </p:sp>
@@ -24108,41 +23438,7 @@
           <a:lstStyle/>
           <a:p>
             <a:pPr algn="ctr"/>
-          </a:p>
-        </p:txBody>
-      </p:sp>
-      <p:sp>
-        <p:nvSpPr>
-          <p:cNvPr id="10" name="TextBox 9"/>
-          <p:cNvSpPr txBox="1"/>
-          <p:nvPr/>
-        </p:nvSpPr>
-        <p:spPr>
-          <a:xfrm>
-            <a:off x="594360" y="6355080"/>
-            <a:ext cx="4572000" cy="502920"/>
-          </a:xfrm>
-          <a:prstGeom prst="rect">
-            <a:avLst/>
-          </a:prstGeom>
-          <a:noFill/>
-        </p:spPr>
-        <p:txBody>
-          <a:bodyPr wrap="square" anchor="ctr" lIns="0" rIns="0" tIns="0" bIns="0">
-            <a:spAutoFit/>
-          </a:bodyPr>
-          <a:lstStyle/>
-          <a:p>
-            <a:pPr algn="l"/>
-            <a:r>
-              <a:rPr sz="1000" b="0" i="0">
-                <a:solidFill>
-                  <a:srgbClr val="9FB3C8"/>
-                </a:solidFill>
-                <a:latin typeface="Segoe UI"/>
-              </a:rPr>
-              <a:t>ICT108  ·  MetMate case study</a:t>
-            </a:r>
+            <a:endParaRPr/>
           </a:p>
         </p:txBody>
       </p:sp>
@@ -24207,7 +23503,7 @@
           <a:noFill/>
         </p:spPr>
         <p:txBody>
-          <a:bodyPr wrap="square" anchor="t" lIns="0" rIns="0" tIns="0" bIns="0">
+          <a:bodyPr wrap="square" lIns="0" tIns="0" rIns="0" bIns="0" anchor="t">
             <a:spAutoFit/>
           </a:bodyPr>
           <a:lstStyle/>
@@ -24269,6 +23565,7 @@
           <a:lstStyle/>
           <a:p>
             <a:pPr algn="ctr"/>
+            <a:endParaRPr/>
           </a:p>
         </p:txBody>
       </p:sp>
@@ -24289,7 +23586,7 @@
           <a:noFill/>
         </p:spPr>
         <p:txBody>
-          <a:bodyPr wrap="square" anchor="ctr" lIns="0" rIns="0" tIns="0" bIns="0">
+          <a:bodyPr wrap="square" lIns="0" tIns="0" rIns="0" bIns="0" anchor="ctr">
             <a:spAutoFit/>
           </a:bodyPr>
           <a:lstStyle/>
@@ -24352,6 +23649,7 @@
           <a:lstStyle/>
           <a:p>
             <a:pPr algn="ctr"/>
+            <a:endParaRPr/>
           </a:p>
         </p:txBody>
       </p:sp>
@@ -24399,6 +23697,7 @@
           <a:lstStyle/>
           <a:p>
             <a:pPr algn="ctr"/>
+            <a:endParaRPr/>
           </a:p>
         </p:txBody>
       </p:sp>
@@ -24419,7 +23718,7 @@
           <a:noFill/>
         </p:spPr>
         <p:txBody>
-          <a:bodyPr wrap="square" anchor="ctr" lIns="0" rIns="0" tIns="0" bIns="0">
+          <a:bodyPr wrap="square" lIns="0" tIns="0" rIns="0" bIns="0" anchor="ctr">
             <a:spAutoFit/>
           </a:bodyPr>
           <a:lstStyle/>
@@ -24482,6 +23781,7 @@
           <a:lstStyle/>
           <a:p>
             <a:pPr algn="ctr"/>
+            <a:endParaRPr/>
           </a:p>
         </p:txBody>
       </p:sp>
@@ -24529,6 +23829,7 @@
           <a:lstStyle/>
           <a:p>
             <a:pPr algn="ctr"/>
+            <a:endParaRPr/>
           </a:p>
         </p:txBody>
       </p:sp>
@@ -24549,7 +23850,7 @@
           <a:noFill/>
         </p:spPr>
         <p:txBody>
-          <a:bodyPr wrap="square" anchor="ctr" lIns="0" rIns="0" tIns="0" bIns="0">
+          <a:bodyPr wrap="square" lIns="0" tIns="0" rIns="0" bIns="0" anchor="ctr">
             <a:spAutoFit/>
           </a:bodyPr>
           <a:lstStyle/>
@@ -24612,6 +23913,7 @@
           <a:lstStyle/>
           <a:p>
             <a:pPr algn="ctr"/>
+            <a:endParaRPr/>
           </a:p>
         </p:txBody>
       </p:sp>
@@ -24659,6 +23961,7 @@
           <a:lstStyle/>
           <a:p>
             <a:pPr algn="ctr"/>
+            <a:endParaRPr/>
           </a:p>
         </p:txBody>
       </p:sp>
@@ -24679,7 +23982,7 @@
           <a:noFill/>
         </p:spPr>
         <p:txBody>
-          <a:bodyPr wrap="square" anchor="ctr" lIns="0" rIns="0" tIns="0" bIns="0">
+          <a:bodyPr wrap="square" lIns="0" tIns="0" rIns="0" bIns="0" anchor="ctr">
             <a:spAutoFit/>
           </a:bodyPr>
           <a:lstStyle/>
@@ -24742,6 +24045,7 @@
           <a:lstStyle/>
           <a:p>
             <a:pPr algn="ctr"/>
+            <a:endParaRPr/>
           </a:p>
         </p:txBody>
       </p:sp>
@@ -24789,6 +24093,7 @@
           <a:lstStyle/>
           <a:p>
             <a:pPr algn="ctr"/>
+            <a:endParaRPr/>
           </a:p>
         </p:txBody>
       </p:sp>
@@ -24809,7 +24114,7 @@
           <a:noFill/>
         </p:spPr>
         <p:txBody>
-          <a:bodyPr wrap="square" anchor="ctr" lIns="0" rIns="0" tIns="0" bIns="0">
+          <a:bodyPr wrap="square" lIns="0" tIns="0" rIns="0" bIns="0" anchor="ctr">
             <a:spAutoFit/>
           </a:bodyPr>
           <a:lstStyle/>
@@ -24871,6 +24176,7 @@
           <a:lstStyle/>
           <a:p>
             <a:pPr algn="ctr"/>
+            <a:endParaRPr/>
           </a:p>
         </p:txBody>
       </p:sp>
@@ -24918,6 +24224,7 @@
           <a:lstStyle/>
           <a:p>
             <a:pPr algn="ctr"/>
+            <a:endParaRPr/>
           </a:p>
         </p:txBody>
       </p:sp>
@@ -24938,7 +24245,7 @@
           <a:noFill/>
         </p:spPr>
         <p:txBody>
-          <a:bodyPr wrap="square" anchor="ctr" lIns="0" rIns="0" tIns="0" bIns="0">
+          <a:bodyPr wrap="square" lIns="0" tIns="0" rIns="0" bIns="0" anchor="ctr">
             <a:spAutoFit/>
           </a:bodyPr>
           <a:lstStyle/>
@@ -25004,6 +24311,7 @@
           <a:lstStyle/>
           <a:p>
             <a:pPr algn="ctr"/>
+            <a:endParaRPr/>
           </a:p>
         </p:txBody>
       </p:sp>
@@ -25024,7 +24332,7 @@
           <a:noFill/>
         </p:spPr>
         <p:txBody>
-          <a:bodyPr wrap="square" anchor="ctr" lIns="0" rIns="0" tIns="0" bIns="0">
+          <a:bodyPr wrap="square" lIns="0" tIns="0" rIns="0" bIns="0" anchor="ctr">
             <a:spAutoFit/>
           </a:bodyPr>
           <a:lstStyle/>
@@ -25099,6 +24407,7 @@
           <a:lstStyle/>
           <a:p>
             <a:pPr algn="ctr"/>
+            <a:endParaRPr/>
           </a:p>
         </p:txBody>
       </p:sp>
@@ -25119,7 +24428,7 @@
           <a:noFill/>
         </p:spPr>
         <p:txBody>
-          <a:bodyPr wrap="square" anchor="ctr" lIns="0" rIns="0" tIns="0" bIns="0">
+          <a:bodyPr wrap="square" lIns="0" tIns="0" rIns="0" bIns="0" anchor="ctr">
             <a:spAutoFit/>
           </a:bodyPr>
           <a:lstStyle/>
@@ -25181,6 +24490,7 @@
           <a:lstStyle/>
           <a:p>
             <a:pPr algn="ctr"/>
+            <a:endParaRPr/>
           </a:p>
         </p:txBody>
       </p:sp>
@@ -25201,7 +24511,7 @@
           <a:noFill/>
         </p:spPr>
         <p:txBody>
-          <a:bodyPr wrap="square" anchor="t" lIns="0" rIns="0" tIns="0" bIns="0">
+          <a:bodyPr wrap="square" lIns="0" tIns="0" rIns="0" bIns="0" anchor="t">
             <a:spAutoFit/>
           </a:bodyPr>
           <a:lstStyle/>
@@ -25236,7 +24546,7 @@
           <a:noFill/>
         </p:spPr>
         <p:txBody>
-          <a:bodyPr wrap="square" anchor="t" lIns="0" rIns="0" tIns="0" bIns="0">
+          <a:bodyPr wrap="square" lIns="0" tIns="0" rIns="0" bIns="0" anchor="t">
             <a:spAutoFit/>
           </a:bodyPr>
           <a:lstStyle/>
@@ -25267,7 +24577,7 @@
 </file>
 
 <file path=ppt/slides/slide9.xml><?xml version="1.0" encoding="utf-8"?>
-<p:sld xmlns:a="http://schemas.openxmlformats.org/drawingml/2006/main" xmlns:p="http://schemas.openxmlformats.org/presentationml/2006/main" xmlns:r="http://schemas.openxmlformats.org/officeDocument/2006/relationships">
+<p:sld xmlns:a="http://schemas.openxmlformats.org/drawingml/2006/main" xmlns:r="http://schemas.openxmlformats.org/officeDocument/2006/relationships" xmlns:p="http://schemas.openxmlformats.org/presentationml/2006/main">
   <p:cSld>
     <p:spTree>
       <p:nvGrpSpPr>
@@ -25275,7 +24585,14 @@
         <p:cNvGrpSpPr/>
         <p:nvPr/>
       </p:nvGrpSpPr>
-      <p:grpSpPr/>
+      <p:grpSpPr>
+        <a:xfrm>
+          <a:off x="0" y="0"/>
+          <a:ext cx="0" cy="0"/>
+          <a:chOff x="0" y="0"/>
+          <a:chExt cx="0" cy="0"/>
+        </a:xfrm>
+      </p:grpSpPr>
       <p:sp>
         <p:nvSpPr>
           <p:cNvPr id="2" name="Rectangle 1"/>
@@ -25316,6 +24633,7 @@
           <a:lstStyle/>
           <a:p>
             <a:pPr algn="ctr"/>
+            <a:endParaRPr/>
           </a:p>
         </p:txBody>
       </p:sp>
@@ -25359,6 +24677,7 @@
           <a:lstStyle/>
           <a:p>
             <a:pPr algn="ctr"/>
+            <a:endParaRPr/>
           </a:p>
         </p:txBody>
       </p:sp>
@@ -25379,7 +24698,7 @@
           <a:noFill/>
         </p:spPr>
         <p:txBody>
-          <a:bodyPr wrap="square" anchor="t" lIns="0" rIns="0" tIns="0" bIns="0">
+          <a:bodyPr wrap="square" lIns="0" tIns="0" rIns="0" bIns="0" anchor="t">
             <a:spAutoFit/>
           </a:bodyPr>
           <a:lstStyle/>
@@ -25414,7 +24733,7 @@
           <a:noFill/>
         </p:spPr>
         <p:txBody>
-          <a:bodyPr wrap="square" anchor="t" lIns="0" rIns="0" tIns="0" bIns="0">
+          <a:bodyPr wrap="square" lIns="0" tIns="0" rIns="0" bIns="0" anchor="t">
             <a:spAutoFit/>
           </a:bodyPr>
           <a:lstStyle/>
@@ -25476,6 +24795,7 @@
           <a:lstStyle/>
           <a:p>
             <a:pPr algn="ctr"/>
+            <a:endParaRPr/>
           </a:p>
         </p:txBody>
       </p:sp>
@@ -25488,7 +24808,7 @@
           <p:nvPr/>
         </p:nvPicPr>
         <p:blipFill>
-          <a:blip r:embed="rId2"/>
+          <a:blip r:embed="rId3"/>
           <a:stretch>
             <a:fillRect/>
           </a:stretch>
@@ -25543,6 +24863,7 @@
           <a:lstStyle/>
           <a:p>
             <a:pPr algn="ctr"/>
+            <a:endParaRPr/>
           </a:p>
         </p:txBody>
       </p:sp>
@@ -25586,41 +24907,7 @@
           <a:lstStyle/>
           <a:p>
             <a:pPr algn="ctr"/>
-          </a:p>
-        </p:txBody>
-      </p:sp>
-      <p:sp>
-        <p:nvSpPr>
-          <p:cNvPr id="10" name="TextBox 9"/>
-          <p:cNvSpPr txBox="1"/>
-          <p:nvPr/>
-        </p:nvSpPr>
-        <p:spPr>
-          <a:xfrm>
-            <a:off x="594360" y="6355080"/>
-            <a:ext cx="4572000" cy="502920"/>
-          </a:xfrm>
-          <a:prstGeom prst="rect">
-            <a:avLst/>
-          </a:prstGeom>
-          <a:noFill/>
-        </p:spPr>
-        <p:txBody>
-          <a:bodyPr wrap="square" anchor="ctr" lIns="0" rIns="0" tIns="0" bIns="0">
-            <a:spAutoFit/>
-          </a:bodyPr>
-          <a:lstStyle/>
-          <a:p>
-            <a:pPr algn="l"/>
-            <a:r>
-              <a:rPr sz="1000" b="0" i="0">
-                <a:solidFill>
-                  <a:srgbClr val="9FB3C8"/>
-                </a:solidFill>
-                <a:latin typeface="Segoe UI"/>
-              </a:rPr>
-              <a:t>ICT108  ·  MetMate case study</a:t>
-            </a:r>
+            <a:endParaRPr/>
           </a:p>
         </p:txBody>
       </p:sp>
@@ -25712,6 +24999,7 @@
           <a:lstStyle/>
           <a:p>
             <a:pPr algn="ctr"/>
+            <a:endParaRPr/>
           </a:p>
         </p:txBody>
       </p:sp>
@@ -25732,7 +25020,7 @@
           <a:noFill/>
         </p:spPr>
         <p:txBody>
-          <a:bodyPr wrap="square" anchor="ctr" lIns="0" rIns="0" tIns="0" bIns="0">
+          <a:bodyPr wrap="square" lIns="0" tIns="0" rIns="0" bIns="0" anchor="ctr">
             <a:spAutoFit/>
           </a:bodyPr>
           <a:lstStyle/>
@@ -25767,7 +25055,7 @@
           <a:noFill/>
         </p:spPr>
         <p:txBody>
-          <a:bodyPr wrap="square" anchor="t" lIns="0" rIns="0" tIns="0" bIns="0">
+          <a:bodyPr wrap="square" lIns="0" tIns="0" rIns="0" bIns="0" anchor="t">
             <a:spAutoFit/>
           </a:bodyPr>
           <a:lstStyle/>
@@ -25829,6 +25117,7 @@
           <a:lstStyle/>
           <a:p>
             <a:pPr algn="ctr"/>
+            <a:endParaRPr/>
           </a:p>
         </p:txBody>
       </p:sp>
@@ -25868,7 +25157,7 @@
           </a:fontRef>
         </p:style>
         <p:txBody>
-          <a:bodyPr rtlCol="0" anchor="ctr" lIns="0" rIns="0" tIns="0" bIns="0" wrap="square"/>
+          <a:bodyPr wrap="square" lIns="0" tIns="0" rIns="0" bIns="0" rtlCol="0" anchor="ctr"/>
           <a:lstStyle/>
           <a:p>
             <a:pPr algn="ctr"/>
@@ -25901,7 +25190,7 @@
           <a:noFill/>
         </p:spPr>
         <p:txBody>
-          <a:bodyPr wrap="square" anchor="ctr" lIns="0" rIns="0" tIns="0" bIns="0">
+          <a:bodyPr wrap="square" lIns="0" tIns="0" rIns="0" bIns="0" anchor="ctr">
             <a:spAutoFit/>
           </a:bodyPr>
           <a:lstStyle/>
@@ -25940,7 +25229,7 @@
           <a:noFill/>
         </p:spPr>
         <p:txBody>
-          <a:bodyPr wrap="square" anchor="ctr" lIns="0" rIns="0" tIns="0" bIns="0">
+          <a:bodyPr wrap="square" lIns="0" tIns="0" rIns="0" bIns="0" anchor="ctr">
             <a:spAutoFit/>
           </a:bodyPr>
           <a:lstStyle/>
@@ -25979,7 +25268,7 @@
           <a:noFill/>
         </p:spPr>
         <p:txBody>
-          <a:bodyPr wrap="square" anchor="ctr" lIns="0" rIns="0" tIns="0" bIns="0">
+          <a:bodyPr wrap="square" lIns="0" tIns="0" rIns="0" bIns="0" anchor="ctr">
             <a:spAutoFit/>
           </a:bodyPr>
           <a:lstStyle/>
@@ -26041,6 +25330,7 @@
           <a:lstStyle/>
           <a:p>
             <a:pPr algn="ctr"/>
+            <a:endParaRPr/>
           </a:p>
         </p:txBody>
       </p:sp>
@@ -26080,7 +25370,7 @@
           </a:fontRef>
         </p:style>
         <p:txBody>
-          <a:bodyPr rtlCol="0" anchor="ctr" lIns="0" rIns="0" tIns="0" bIns="0" wrap="square"/>
+          <a:bodyPr wrap="square" lIns="0" tIns="0" rIns="0" bIns="0" rtlCol="0" anchor="ctr"/>
           <a:lstStyle/>
           <a:p>
             <a:pPr algn="ctr"/>
@@ -26113,7 +25403,7 @@
           <a:noFill/>
         </p:spPr>
         <p:txBody>
-          <a:bodyPr wrap="square" anchor="ctr" lIns="0" rIns="0" tIns="0" bIns="0">
+          <a:bodyPr wrap="square" lIns="0" tIns="0" rIns="0" bIns="0" anchor="ctr">
             <a:spAutoFit/>
           </a:bodyPr>
           <a:lstStyle/>
@@ -26152,7 +25442,7 @@
           <a:noFill/>
         </p:spPr>
         <p:txBody>
-          <a:bodyPr wrap="square" anchor="ctr" lIns="0" rIns="0" tIns="0" bIns="0">
+          <a:bodyPr wrap="square" lIns="0" tIns="0" rIns="0" bIns="0" anchor="ctr">
             <a:spAutoFit/>
           </a:bodyPr>
           <a:lstStyle/>
@@ -26191,7 +25481,7 @@
           <a:noFill/>
         </p:spPr>
         <p:txBody>
-          <a:bodyPr wrap="square" anchor="ctr" lIns="0" rIns="0" tIns="0" bIns="0">
+          <a:bodyPr wrap="square" lIns="0" tIns="0" rIns="0" bIns="0" anchor="ctr">
             <a:spAutoFit/>
           </a:bodyPr>
           <a:lstStyle/>
@@ -26253,6 +25543,7 @@
           <a:lstStyle/>
           <a:p>
             <a:pPr algn="ctr"/>
+            <a:endParaRPr/>
           </a:p>
         </p:txBody>
       </p:sp>
@@ -26292,7 +25583,7 @@
           </a:fontRef>
         </p:style>
         <p:txBody>
-          <a:bodyPr rtlCol="0" anchor="ctr" lIns="0" rIns="0" tIns="0" bIns="0" wrap="square"/>
+          <a:bodyPr wrap="square" lIns="0" tIns="0" rIns="0" bIns="0" rtlCol="0" anchor="ctr"/>
           <a:lstStyle/>
           <a:p>
             <a:pPr algn="ctr"/>
@@ -26325,7 +25616,7 @@
           <a:noFill/>
         </p:spPr>
         <p:txBody>
-          <a:bodyPr wrap="square" anchor="ctr" lIns="0" rIns="0" tIns="0" bIns="0">
+          <a:bodyPr wrap="square" lIns="0" tIns="0" rIns="0" bIns="0" anchor="ctr">
             <a:spAutoFit/>
           </a:bodyPr>
           <a:lstStyle/>
@@ -26364,7 +25655,7 @@
           <a:noFill/>
         </p:spPr>
         <p:txBody>
-          <a:bodyPr wrap="square" anchor="ctr" lIns="0" rIns="0" tIns="0" bIns="0">
+          <a:bodyPr wrap="square" lIns="0" tIns="0" rIns="0" bIns="0" anchor="ctr">
             <a:spAutoFit/>
           </a:bodyPr>
           <a:lstStyle/>
@@ -26403,7 +25694,7 @@
           <a:noFill/>
         </p:spPr>
         <p:txBody>
-          <a:bodyPr wrap="square" anchor="ctr" lIns="0" rIns="0" tIns="0" bIns="0">
+          <a:bodyPr wrap="square" lIns="0" tIns="0" rIns="0" bIns="0" anchor="ctr">
             <a:spAutoFit/>
           </a:bodyPr>
           <a:lstStyle/>
@@ -26465,6 +25756,7 @@
           <a:lstStyle/>
           <a:p>
             <a:pPr algn="ctr"/>
+            <a:endParaRPr/>
           </a:p>
         </p:txBody>
       </p:sp>
@@ -26485,7 +25777,7 @@
           <a:noFill/>
         </p:spPr>
         <p:txBody>
-          <a:bodyPr wrap="square" anchor="ctr" lIns="0" rIns="0" tIns="0" bIns="0">
+          <a:bodyPr wrap="square" lIns="0" tIns="0" rIns="0" bIns="0" anchor="ctr">
             <a:spAutoFit/>
           </a:bodyPr>
           <a:lstStyle/>
@@ -26611,6 +25903,7 @@
           <a:lstStyle/>
           <a:p>
             <a:pPr algn="ctr"/>
+            <a:endParaRPr/>
           </a:p>
         </p:txBody>
       </p:sp>
@@ -26631,7 +25924,7 @@
           <a:noFill/>
         </p:spPr>
         <p:txBody>
-          <a:bodyPr wrap="square" anchor="ctr" lIns="0" rIns="0" tIns="0" bIns="0">
+          <a:bodyPr wrap="square" lIns="0" tIns="0" rIns="0" bIns="0" anchor="ctr">
             <a:spAutoFit/>
           </a:bodyPr>
           <a:lstStyle/>
@@ -26679,7 +25972,7 @@
           <a:noFill/>
         </p:spPr>
         <p:txBody>
-          <a:bodyPr wrap="square" anchor="t" lIns="0" rIns="0" tIns="0" bIns="0">
+          <a:bodyPr wrap="square" lIns="0" tIns="0" rIns="0" bIns="0" anchor="t">
             <a:spAutoFit/>
           </a:bodyPr>
           <a:lstStyle/>
@@ -27036,44 +26329,44 @@
         <a:sysClr val="window" lastClr="FFFFFF"/>
       </a:lt1>
       <a:dk2>
-        <a:srgbClr val="1F497D"/>
+        <a:srgbClr val="0E2841"/>
       </a:dk2>
       <a:lt2>
-        <a:srgbClr val="EEECE1"/>
+        <a:srgbClr val="E8E8E8"/>
       </a:lt2>
       <a:accent1>
-        <a:srgbClr val="4F81BD"/>
+        <a:srgbClr val="156082"/>
       </a:accent1>
       <a:accent2>
-        <a:srgbClr val="C0504D"/>
+        <a:srgbClr val="E97132"/>
       </a:accent2>
       <a:accent3>
-        <a:srgbClr val="9BBB59"/>
+        <a:srgbClr val="196B24"/>
       </a:accent3>
       <a:accent4>
-        <a:srgbClr val="8064A2"/>
+        <a:srgbClr val="0F9ED5"/>
       </a:accent4>
       <a:accent5>
-        <a:srgbClr val="4BACC6"/>
+        <a:srgbClr val="A02B93"/>
       </a:accent5>
       <a:accent6>
-        <a:srgbClr val="F79646"/>
+        <a:srgbClr val="4EA72E"/>
       </a:accent6>
       <a:hlink>
-        <a:srgbClr val="0000FF"/>
+        <a:srgbClr val="467886"/>
       </a:hlink>
       <a:folHlink>
-        <a:srgbClr val="800080"/>
+        <a:srgbClr val="96607D"/>
       </a:folHlink>
     </a:clrScheme>
     <a:fontScheme name="Office">
       <a:majorFont>
-        <a:latin typeface="Calibri"/>
+        <a:latin typeface="Aptos Display" panose="02110004020202020204"/>
         <a:ea typeface=""/>
         <a:cs typeface=""/>
-        <a:font script="Jpan" typeface="ＭＳ Ｐゴシック"/>
+        <a:font script="Jpan" typeface="游ゴシック Light"/>
         <a:font script="Hang" typeface="맑은 고딕"/>
-        <a:font script="Hans" typeface="宋体"/>
+        <a:font script="Hans" typeface="等线 Light"/>
         <a:font script="Hant" typeface="新細明體"/>
         <a:font script="Arab" typeface="Times New Roman"/>
         <a:font script="Hebr" typeface="Times New Roman"/>
@@ -27101,14 +26394,31 @@
         <a:font script="Viet" typeface="Times New Roman"/>
         <a:font script="Uigh" typeface="Microsoft Uighur"/>
         <a:font script="Geor" typeface="Sylfaen"/>
+        <a:font script="Armn" typeface="Arial"/>
+        <a:font script="Bugi" typeface="Leelawadee UI"/>
+        <a:font script="Bopo" typeface="Microsoft JhengHei"/>
+        <a:font script="Java" typeface="Javanese Text"/>
+        <a:font script="Lisu" typeface="Segoe UI"/>
+        <a:font script="Mymr" typeface="Myanmar Text"/>
+        <a:font script="Nkoo" typeface="Ebrima"/>
+        <a:font script="Olck" typeface="Nirmala UI"/>
+        <a:font script="Osma" typeface="Ebrima"/>
+        <a:font script="Phag" typeface="Phagspa"/>
+        <a:font script="Syrn" typeface="Estrangelo Edessa"/>
+        <a:font script="Syrj" typeface="Estrangelo Edessa"/>
+        <a:font script="Syre" typeface="Estrangelo Edessa"/>
+        <a:font script="Sora" typeface="Nirmala UI"/>
+        <a:font script="Tale" typeface="Microsoft Tai Le"/>
+        <a:font script="Talu" typeface="Microsoft New Tai Lue"/>
+        <a:font script="Tfng" typeface="Ebrima"/>
       </a:majorFont>
       <a:minorFont>
-        <a:latin typeface="Calibri"/>
+        <a:latin typeface="Aptos" panose="02110004020202020204"/>
         <a:ea typeface=""/>
         <a:cs typeface=""/>
-        <a:font script="Jpan" typeface="ＭＳ Ｐゴシック"/>
+        <a:font script="Jpan" typeface="游ゴシック"/>
         <a:font script="Hang" typeface="맑은 고딕"/>
-        <a:font script="Hans" typeface="宋体"/>
+        <a:font script="Hans" typeface="等线"/>
         <a:font script="Hant" typeface="新細明體"/>
         <a:font script="Arab" typeface="Arial"/>
         <a:font script="Hebr" typeface="Arial"/>
@@ -27136,6 +26446,23 @@
         <a:font script="Viet" typeface="Arial"/>
         <a:font script="Uigh" typeface="Microsoft Uighur"/>
         <a:font script="Geor" typeface="Sylfaen"/>
+        <a:font script="Armn" typeface="Arial"/>
+        <a:font script="Bugi" typeface="Leelawadee UI"/>
+        <a:font script="Bopo" typeface="Microsoft JhengHei"/>
+        <a:font script="Java" typeface="Javanese Text"/>
+        <a:font script="Lisu" typeface="Segoe UI"/>
+        <a:font script="Mymr" typeface="Myanmar Text"/>
+        <a:font script="Nkoo" typeface="Ebrima"/>
+        <a:font script="Olck" typeface="Nirmala UI"/>
+        <a:font script="Osma" typeface="Ebrima"/>
+        <a:font script="Phag" typeface="Phagspa"/>
+        <a:font script="Syrn" typeface="Estrangelo Edessa"/>
+        <a:font script="Syrj" typeface="Estrangelo Edessa"/>
+        <a:font script="Syre" typeface="Estrangelo Edessa"/>
+        <a:font script="Sora" typeface="Nirmala UI"/>
+        <a:font script="Tale" typeface="Microsoft Tai Le"/>
+        <a:font script="Talu" typeface="Microsoft New Tai Lue"/>
+        <a:font script="Tfng" typeface="Ebrima"/>
       </a:minorFont>
     </a:fontScheme>
     <a:fmtScheme name="Office">
@@ -27147,180 +26474,136 @@
           <a:gsLst>
             <a:gs pos="0">
               <a:schemeClr val="phClr">
-                <a:tint val="50000"/>
-                <a:satMod val="300000"/>
+                <a:lumMod val="110000"/>
+                <a:satMod val="105000"/>
+                <a:tint val="67000"/>
               </a:schemeClr>
             </a:gs>
-            <a:gs pos="35000">
+            <a:gs pos="50000">
               <a:schemeClr val="phClr">
-                <a:tint val="37000"/>
-                <a:satMod val="300000"/>
+                <a:lumMod val="105000"/>
+                <a:satMod val="103000"/>
+                <a:tint val="73000"/>
               </a:schemeClr>
             </a:gs>
             <a:gs pos="100000">
               <a:schemeClr val="phClr">
-                <a:tint val="15000"/>
-                <a:satMod val="350000"/>
+                <a:lumMod val="105000"/>
+                <a:satMod val="109000"/>
+                <a:tint val="81000"/>
               </a:schemeClr>
             </a:gs>
           </a:gsLst>
-          <a:lin ang="16200000" scaled="1"/>
+          <a:lin ang="5400000" scaled="0"/>
         </a:gradFill>
         <a:gradFill rotWithShape="1">
           <a:gsLst>
             <a:gs pos="0">
               <a:schemeClr val="phClr">
-                <a:tint val="100000"/>
+                <a:satMod val="103000"/>
+                <a:lumMod val="102000"/>
+                <a:tint val="94000"/>
+              </a:schemeClr>
+            </a:gs>
+            <a:gs pos="50000">
+              <a:schemeClr val="phClr">
+                <a:satMod val="110000"/>
+                <a:lumMod val="100000"/>
                 <a:shade val="100000"/>
-                <a:satMod val="130000"/>
               </a:schemeClr>
             </a:gs>
             <a:gs pos="100000">
               <a:schemeClr val="phClr">
-                <a:tint val="50000"/>
-                <a:shade val="100000"/>
-                <a:satMod val="350000"/>
+                <a:lumMod val="99000"/>
+                <a:satMod val="120000"/>
+                <a:shade val="78000"/>
               </a:schemeClr>
             </a:gs>
           </a:gsLst>
-          <a:lin ang="16200000" scaled="0"/>
+          <a:lin ang="5400000" scaled="0"/>
         </a:gradFill>
       </a:fillStyleLst>
       <a:lnStyleLst>
-        <a:ln w="9525" cap="flat" cmpd="sng" algn="ctr">
+        <a:ln w="12700" cap="flat" cmpd="sng" algn="ctr">
           <a:solidFill>
-            <a:schemeClr val="phClr">
-              <a:shade val="95000"/>
-              <a:satMod val="105000"/>
-            </a:schemeClr>
+            <a:schemeClr val="phClr"/>
           </a:solidFill>
           <a:prstDash val="solid"/>
+          <a:miter lim="800000"/>
+        </a:ln>
+        <a:ln w="19050" cap="flat" cmpd="sng" algn="ctr">
+          <a:solidFill>
+            <a:schemeClr val="phClr"/>
+          </a:solidFill>
+          <a:prstDash val="solid"/>
+          <a:miter lim="800000"/>
         </a:ln>
         <a:ln w="25400" cap="flat" cmpd="sng" algn="ctr">
           <a:solidFill>
             <a:schemeClr val="phClr"/>
           </a:solidFill>
           <a:prstDash val="solid"/>
-        </a:ln>
-        <a:ln w="38100" cap="flat" cmpd="sng" algn="ctr">
-          <a:solidFill>
-            <a:schemeClr val="phClr"/>
-          </a:solidFill>
-          <a:prstDash val="solid"/>
+          <a:miter lim="800000"/>
         </a:ln>
       </a:lnStyleLst>
       <a:effectStyleLst>
         <a:effectStyle>
+          <a:effectLst/>
+        </a:effectStyle>
+        <a:effectStyle>
+          <a:effectLst/>
+        </a:effectStyle>
+        <a:effectStyle>
           <a:effectLst>
-            <a:outerShdw blurRad="40000" dist="20000" dir="5400000" rotWithShape="0">
+            <a:outerShdw blurRad="57150" dist="19050" dir="5400000" algn="ctr" rotWithShape="0">
               <a:srgbClr val="000000">
-                <a:alpha val="38000"/>
+                <a:alpha val="63000"/>
               </a:srgbClr>
             </a:outerShdw>
           </a:effectLst>
-        </a:effectStyle>
-        <a:effectStyle>
-          <a:effectLst>
-            <a:outerShdw blurRad="40000" dist="23000" dir="5400000" rotWithShape="0">
-              <a:srgbClr val="000000">
-                <a:alpha val="35000"/>
-              </a:srgbClr>
-            </a:outerShdw>
-          </a:effectLst>
-        </a:effectStyle>
-        <a:effectStyle>
-          <a:effectLst>
-            <a:outerShdw blurRad="40000" dist="23000" dir="5400000" rotWithShape="0">
-              <a:srgbClr val="000000">
-                <a:alpha val="35000"/>
-              </a:srgbClr>
-            </a:outerShdw>
-          </a:effectLst>
-          <a:scene3d>
-            <a:camera prst="orthographicFront">
-              <a:rot lat="0" lon="0" rev="0"/>
-            </a:camera>
-            <a:lightRig rig="threePt" dir="t">
-              <a:rot lat="0" lon="0" rev="1200000"/>
-            </a:lightRig>
-          </a:scene3d>
-          <a:sp3d>
-            <a:bevelT w="63500" h="25400"/>
-          </a:sp3d>
         </a:effectStyle>
       </a:effectStyleLst>
       <a:bgFillStyleLst>
         <a:solidFill>
           <a:schemeClr val="phClr"/>
         </a:solidFill>
+        <a:solidFill>
+          <a:schemeClr val="phClr">
+            <a:tint val="95000"/>
+            <a:satMod val="170000"/>
+          </a:schemeClr>
+        </a:solidFill>
         <a:gradFill rotWithShape="1">
           <a:gsLst>
             <a:gs pos="0">
               <a:schemeClr val="phClr">
-                <a:tint val="40000"/>
-                <a:satMod val="350000"/>
+                <a:tint val="93000"/>
+                <a:satMod val="150000"/>
+                <a:shade val="98000"/>
+                <a:lumMod val="102000"/>
               </a:schemeClr>
             </a:gs>
-            <a:gs pos="40000">
+            <a:gs pos="50000">
               <a:schemeClr val="phClr">
-                <a:tint val="45000"/>
-                <a:shade val="99000"/>
-                <a:satMod val="350000"/>
+                <a:tint val="98000"/>
+                <a:satMod val="130000"/>
+                <a:shade val="90000"/>
+                <a:lumMod val="103000"/>
               </a:schemeClr>
             </a:gs>
             <a:gs pos="100000">
               <a:schemeClr val="phClr">
-                <a:shade val="20000"/>
-                <a:satMod val="255000"/>
+                <a:shade val="63000"/>
+                <a:satMod val="120000"/>
               </a:schemeClr>
             </a:gs>
           </a:gsLst>
-          <a:path path="circle">
-            <a:fillToRect l="50000" t="-80000" r="50000" b="180000"/>
-          </a:path>
-        </a:gradFill>
-        <a:gradFill rotWithShape="1">
-          <a:gsLst>
-            <a:gs pos="0">
-              <a:schemeClr val="phClr">
-                <a:tint val="80000"/>
-                <a:satMod val="300000"/>
-              </a:schemeClr>
-            </a:gs>
-            <a:gs pos="100000">
-              <a:schemeClr val="phClr">
-                <a:shade val="30000"/>
-                <a:satMod val="200000"/>
-              </a:schemeClr>
-            </a:gs>
-          </a:gsLst>
-          <a:path path="circle">
-            <a:fillToRect l="50000" t="50000" r="50000" b="50000"/>
-          </a:path>
+          <a:lin ang="5400000" scaled="0"/>
         </a:gradFill>
       </a:bgFillStyleLst>
     </a:fmtScheme>
   </a:themeElements>
   <a:objectDefaults>
-    <a:spDef>
-      <a:spPr/>
-      <a:bodyPr/>
-      <a:lstStyle/>
-      <a:style>
-        <a:lnRef idx="1">
-          <a:schemeClr val="accent1"/>
-        </a:lnRef>
-        <a:fillRef idx="3">
-          <a:schemeClr val="accent1"/>
-        </a:fillRef>
-        <a:effectRef idx="2">
-          <a:schemeClr val="accent1"/>
-        </a:effectRef>
-        <a:fontRef idx="minor">
-          <a:schemeClr val="lt1"/>
-        </a:fontRef>
-      </a:style>
-    </a:spDef>
     <a:lnDef>
       <a:spPr/>
       <a:bodyPr/>
@@ -27342,5 +26625,10 @@
     </a:lnDef>
   </a:objectDefaults>
   <a:extraClrSchemeLst/>
+  <a:extLst>
+    <a:ext uri="{05A4C25C-085E-4340-85A3-A5531E510DB2}">
+      <thm15:themeFamily xmlns:thm15="http://schemas.microsoft.com/office/thememl/2012/main" name="Office Theme" id="{2E142A2C-CD16-42D6-873A-C26D2A0506FA}" vid="{1BDDFF52-6CD6-40A5-AB3C-68EB2F1E4D0A}"/>
+    </a:ext>
+  </a:extLst>
 </a:theme>
 </file>
--- a/lecture/deck.pptx
+++ b/lecture/deck.pptx
@@ -522,8 +522,22 @@
           <a:lstStyle/>
           <a:p>
             <a:r>
-              <a:t>[~4 min] The fix: give each word SEVERAL numbers instead of one — a list. New term: a VECTOR. In our context, a vector is just a list of numbers. Let the first number measure the enrolment-versus-withdrawal direction, and the second measure the pass-versus-fail direction. Now watch. Enrolment: [5, 0] — strongly about enrolling, nothing to do with passing or failing. Registration: [6, 0]. Withdrawal: [minus 5, 0]. Pass: [0, 5] — nothing to do with enrolment. And fail: [0, minus 5], a bonus word. Each slot in the list is called a DIMENSION — a 3-number vector is 3-dimensional, and so on. Now think about the word 'course'. It's related to enrolment — you enrol in a course. It's related to passing — you pass a course. But it is not quite either. Do we need a third slot for it? We could add one — or we can reuse what we already have: course = [2.5, 2.5]. A bit of both. And that is the deep trick of embeddings: we do NOT need a new dimension for every word. A few hundred well-chosen dimensions can place hundreds of thousands of words, each word a point, similar words nearby. Real production embeddings use roughly three hundred to three thousand dimensions — not two — but it is exactly this idea, just with more room. Meaning has become geometry: distance IS similarity.</a:t>
-            </a:r>
+              <a:rPr lang="en-AU" dirty="0"/>
+              <a:t>Pass, fail, course</a:t>
+            </a:r>
+          </a:p>
+          <a:p>
+            <a:r>
+              <a:rPr lang="en-AU" dirty="0"/>
+              <a:t>Dimension</a:t>
+            </a:r>
+          </a:p>
+          <a:p>
+            <a:r>
+              <a:rPr lang="en-AU" dirty="0"/>
+              <a:t>300-3000</a:t>
+            </a:r>
+            <a:endParaRPr dirty="0"/>
           </a:p>
         </p:txBody>
       </p:sp>
@@ -592,8 +606,16 @@
           <a:lstStyle/>
           <a:p>
             <a:r>
-              <a:t>[~2.5 min] One question should be bothering you: who assigns all these numbers? If we typed them by hand it would literally take forever — and we'd argue for a week about 'course'. The answer: nobody assigns them. They are LEARNED. Here is one classic recipe. Take millions of real sentences. Hide a word: 'Students must ______ before the census date.' Make the computer guess the missing word. Notice the beautiful part — this needs no human answer sheet, because the hidden word IS the answer. Words that fit the same gaps — enrol, register — get pushed toward nearby numbers. Words that never fit that gap — 'party' — drift away. Repeat over millions of sentences, and the numbers assign themselves. The general name for this — learning the number-form of things from data instead of designing it by hand — is REPRESENTATION LEARNING. And there is a famous party trick you can look up later: with vectors learned this way, king minus man plus woman lands almost exactly on queen. The arithmetic works because meaning became geometry.</a:t>
-            </a:r>
+              <a:rPr lang="en-AU" dirty="0"/>
+              <a:t>Representation learning</a:t>
+            </a:r>
+          </a:p>
+          <a:p>
+            <a:r>
+              <a:rPr lang="en-AU" dirty="0"/>
+              <a:t>Internet</a:t>
+            </a:r>
+            <a:endParaRPr dirty="0"/>
           </a:p>
         </p:txBody>
       </p:sp>
@@ -4512,7 +4534,7 @@
           <a:lstStyle/>
           <a:p>
             <a:pPr algn="ctr"/>
-            <a:endParaRPr/>
+            <a:endParaRPr dirty="0"/>
           </a:p>
         </p:txBody>
       </p:sp>
@@ -4690,7 +4712,7 @@
         </p:nvSpPr>
         <p:spPr>
           <a:xfrm>
-            <a:off x="640384" y="3993570"/>
+            <a:off x="566928" y="3283396"/>
             <a:ext cx="10515600" cy="492443"/>
           </a:xfrm>
           <a:prstGeom prst="rect">
@@ -4884,6 +4906,114 @@
                 <a:latin typeface="Segoe UI"/>
               </a:rPr>
               <a:t>   ·   Analyst Programmer  ·  Wimmera CMA, Victoria</a:t>
+            </a:r>
+          </a:p>
+        </p:txBody>
+      </p:sp>
+      <p:sp>
+        <p:nvSpPr>
+          <p:cNvPr id="19" name="Rounded Rectangle 17">
+            <a:extLst>
+              <a:ext uri="{FF2B5EF4-FFF2-40B4-BE49-F238E27FC236}">
+                <a16:creationId xmlns:a16="http://schemas.microsoft.com/office/drawing/2014/main" id="{61910CB8-D5BA-7CDA-00F2-FD5737F91B76}"/>
+              </a:ext>
+            </a:extLst>
+          </p:cNvPr>
+          <p:cNvSpPr/>
+          <p:nvPr/>
+        </p:nvSpPr>
+        <p:spPr>
+          <a:xfrm>
+            <a:off x="3120705" y="4377795"/>
+            <a:ext cx="4353886" cy="731520"/>
+          </a:xfrm>
+          <a:prstGeom prst="roundRect">
+            <a:avLst>
+              <a:gd name="adj" fmla="val 25000"/>
+            </a:avLst>
+          </a:prstGeom>
+          <a:solidFill>
+            <a:srgbClr val="142847"/>
+          </a:solidFill>
+          <a:ln w="12700">
+            <a:solidFill>
+              <a:srgbClr val="2DD4BF"/>
+            </a:solidFill>
+          </a:ln>
+        </p:spPr>
+        <p:style>
+          <a:lnRef idx="1">
+            <a:schemeClr val="accent1"/>
+          </a:lnRef>
+          <a:fillRef idx="3">
+            <a:schemeClr val="accent1"/>
+          </a:fillRef>
+          <a:effectRef idx="2">
+            <a:schemeClr val="accent1"/>
+          </a:effectRef>
+          <a:fontRef idx="minor">
+            <a:schemeClr val="lt1"/>
+          </a:fontRef>
+        </p:style>
+        <p:txBody>
+          <a:bodyPr rtlCol="0" anchor="ctr"/>
+          <a:lstStyle/>
+          <a:p>
+            <a:pPr algn="ctr"/>
+            <a:endParaRPr/>
+          </a:p>
+        </p:txBody>
+      </p:sp>
+      <p:sp>
+        <p:nvSpPr>
+          <p:cNvPr id="21" name="TextBox 20">
+            <a:extLst>
+              <a:ext uri="{FF2B5EF4-FFF2-40B4-BE49-F238E27FC236}">
+                <a16:creationId xmlns:a16="http://schemas.microsoft.com/office/drawing/2014/main" id="{336FF880-C597-AAB4-5321-97F3D5F4326E}"/>
+              </a:ext>
+            </a:extLst>
+          </p:cNvPr>
+          <p:cNvSpPr txBox="1"/>
+          <p:nvPr/>
+        </p:nvSpPr>
+        <p:spPr>
+          <a:xfrm>
+            <a:off x="3552738" y="4654588"/>
+            <a:ext cx="3028845" cy="177934"/>
+          </a:xfrm>
+          <a:prstGeom prst="rect">
+            <a:avLst/>
+          </a:prstGeom>
+          <a:noFill/>
+        </p:spPr>
+        <p:txBody>
+          <a:bodyPr wrap="square" lIns="0" tIns="0" rIns="0" bIns="0" anchor="ctr">
+            <a:spAutoFit/>
+          </a:bodyPr>
+          <a:lstStyle/>
+          <a:p>
+            <a:pPr algn="l">
+              <a:lnSpc>
+                <a:spcPct val="115000"/>
+              </a:lnSpc>
+            </a:pPr>
+            <a:r>
+              <a:rPr lang="en-AU" sz="1100" b="0" i="1" dirty="0">
+                <a:solidFill>
+                  <a:srgbClr val="FFFFFF"/>
+                </a:solidFill>
+                <a:latin typeface="Segoe UI"/>
+              </a:rPr>
+              <a:t>Question: </a:t>
+            </a:r>
+            <a:r>
+              <a:rPr sz="1100" b="0" i="1" dirty="0">
+                <a:solidFill>
+                  <a:srgbClr val="FFFFFF"/>
+                </a:solidFill>
+                <a:latin typeface="Segoe UI"/>
+              </a:rPr>
+              <a:t>What are the library opening hours?</a:t>
             </a:r>
           </a:p>
         </p:txBody>
@@ -5962,7 +6092,7 @@
         <p:spPr>
           <a:xfrm>
             <a:off x="822960" y="5669280"/>
-            <a:ext cx="10607040" cy="548640"/>
+            <a:ext cx="10607040" cy="492892"/>
           </a:xfrm>
           <a:prstGeom prst="rect">
             <a:avLst/>
@@ -5981,26 +6111,54 @@
               </a:lnSpc>
             </a:pPr>
             <a:r>
-              <a:rPr sz="1300" b="0" i="1">
+              <a:rPr sz="1300" b="0" i="1" dirty="0">
                 <a:solidFill>
                   <a:srgbClr val="F5B342"/>
                 </a:solidFill>
                 <a:latin typeface="Segoe UI"/>
               </a:rPr>
-              <a:t>Matching exact words has a name: LEXICAL matching. What we actually need: match the MEANING —</a:t>
-            </a:r>
-          </a:p>
-          <a:p>
-            <a:pPr algn="l"/>
-            <a:r>
-              <a:rPr sz="1300" b="0" i="1">
+              <a:t>LEXICAL matching</a:t>
+            </a:r>
+            <a:r>
+              <a:rPr lang="en-AU" sz="1300" b="0" i="1" dirty="0">
                 <a:solidFill>
                   <a:srgbClr val="F5B342"/>
                 </a:solidFill>
                 <a:latin typeface="Segoe UI"/>
               </a:rPr>
-              <a:t>SEMANTIC matching. That is Phase 4.</a:t>
-            </a:r>
+              <a:t> fails</a:t>
+            </a:r>
+          </a:p>
+          <a:p>
+            <a:pPr algn="l">
+              <a:lnSpc>
+                <a:spcPct val="130000"/>
+              </a:lnSpc>
+            </a:pPr>
+            <a:r>
+              <a:rPr sz="1300" b="0" i="1" dirty="0">
+                <a:solidFill>
+                  <a:srgbClr val="F5B342"/>
+                </a:solidFill>
+                <a:latin typeface="Segoe UI"/>
+              </a:rPr>
+              <a:t>SEMANTIC matching</a:t>
+            </a:r>
+            <a:r>
+              <a:rPr lang="en-AU" sz="1300" b="0" i="1" dirty="0">
+                <a:solidFill>
+                  <a:srgbClr val="F5B342"/>
+                </a:solidFill>
+                <a:latin typeface="Segoe UI"/>
+              </a:rPr>
+              <a:t> - solution</a:t>
+            </a:r>
+            <a:endParaRPr sz="1300" b="0" i="1" dirty="0">
+              <a:solidFill>
+                <a:srgbClr val="F5B342"/>
+              </a:solidFill>
+              <a:latin typeface="Segoe UI"/>
+            </a:endParaRPr>
           </a:p>
         </p:txBody>
       </p:sp>
@@ -6400,7 +6558,7 @@
         <p:spPr>
           <a:xfrm>
             <a:off x="822960" y="1691640"/>
-            <a:ext cx="10607040" cy="365760"/>
+            <a:ext cx="10607040" cy="207749"/>
           </a:xfrm>
           <a:prstGeom prst="rect">
             <a:avLst/>
@@ -6415,14 +6573,20 @@
           <a:p>
             <a:pPr algn="l"/>
             <a:r>
-              <a:rPr sz="1350" b="0" i="1">
+              <a:rPr lang="en-AU" sz="1350" b="0" i="1" dirty="0">
                 <a:solidFill>
                   <a:srgbClr val="9FB3C8"/>
                 </a:solidFill>
                 <a:latin typeface="Segoe UI"/>
               </a:rPr>
-              <a:t>Give every word a number — then “how similar?” becomes “how close?”, plain subtraction.</a:t>
-            </a:r>
+              <a:t>Three words: enrolment, registration, withdrawal</a:t>
+            </a:r>
+            <a:endParaRPr sz="1350" b="0" i="1" dirty="0">
+              <a:solidFill>
+                <a:srgbClr val="9FB3C8"/>
+              </a:solidFill>
+              <a:latin typeface="Segoe UI"/>
+            </a:endParaRPr>
           </a:p>
         </p:txBody>
       </p:sp>
@@ -7063,48 +7227,13 @@
       </p:sp>
       <p:sp>
         <p:nvSpPr>
-          <p:cNvPr id="30" name="TextBox 29"/>
-          <p:cNvSpPr txBox="1"/>
-          <p:nvPr/>
-        </p:nvSpPr>
-        <p:spPr>
-          <a:xfrm>
-            <a:off x="1965960" y="4434840"/>
-            <a:ext cx="2743200" cy="320040"/>
-          </a:xfrm>
-          <a:prstGeom prst="rect">
-            <a:avLst/>
-          </a:prstGeom>
-          <a:noFill/>
-        </p:spPr>
-        <p:txBody>
-          <a:bodyPr wrap="square" lIns="0" tIns="0" rIns="0" bIns="0" anchor="t">
-            <a:spAutoFit/>
-          </a:bodyPr>
-          <a:lstStyle/>
-          <a:p>
-            <a:pPr algn="ctr"/>
-            <a:r>
-              <a:rPr sz="1100" b="0" i="1">
-                <a:solidFill>
-                  <a:srgbClr val="9FB3C8"/>
-                </a:solidFill>
-                <a:latin typeface="Segoe UI"/>
-              </a:rPr>
-              <a:t>10 apart — opposite</a:t>
-            </a:r>
-          </a:p>
-        </p:txBody>
-      </p:sp>
-      <p:sp>
-        <p:nvSpPr>
           <p:cNvPr id="31" name="Rounded Rectangle 30"/>
           <p:cNvSpPr/>
           <p:nvPr/>
         </p:nvSpPr>
         <p:spPr>
           <a:xfrm>
-            <a:off x="8412480" y="2240280"/>
+            <a:off x="8440583" y="2926080"/>
             <a:ext cx="3200400" cy="1188720"/>
           </a:xfrm>
           <a:prstGeom prst="roundRect">
@@ -7152,7 +7281,7 @@
         </p:nvSpPr>
         <p:spPr>
           <a:xfrm>
-            <a:off x="8595359" y="2240280"/>
+            <a:off x="8623462" y="2926080"/>
             <a:ext cx="2834640" cy="1188720"/>
           </a:xfrm>
           <a:prstGeom prst="rect">
@@ -7188,105 +7317,6 @@
                 <a:latin typeface="Segoe UI"/>
               </a:rPr>
               <a:t>  —  writing words as numbers so that close numbers = similar meaning.</a:t>
-            </a:r>
-          </a:p>
-        </p:txBody>
-      </p:sp>
-      <p:sp>
-        <p:nvSpPr>
-          <p:cNvPr id="33" name="Rounded Rectangle 32"/>
-          <p:cNvSpPr/>
-          <p:nvPr/>
-        </p:nvSpPr>
-        <p:spPr>
-          <a:xfrm>
-            <a:off x="8412480" y="3611880"/>
-            <a:ext cx="3200400" cy="1280160"/>
-          </a:xfrm>
-          <a:prstGeom prst="roundRect">
-            <a:avLst>
-              <a:gd name="adj" fmla="val 6000"/>
-            </a:avLst>
-          </a:prstGeom>
-          <a:solidFill>
-            <a:srgbClr val="142847"/>
-          </a:solidFill>
-          <a:ln w="12700">
-            <a:solidFill>
-              <a:srgbClr val="F5B342"/>
-            </a:solidFill>
-          </a:ln>
-        </p:spPr>
-        <p:style>
-          <a:lnRef idx="1">
-            <a:schemeClr val="accent1"/>
-          </a:lnRef>
-          <a:fillRef idx="3">
-            <a:schemeClr val="accent1"/>
-          </a:fillRef>
-          <a:effectRef idx="2">
-            <a:schemeClr val="accent1"/>
-          </a:effectRef>
-          <a:fontRef idx="minor">
-            <a:schemeClr val="lt1"/>
-          </a:fontRef>
-        </p:style>
-        <p:txBody>
-          <a:bodyPr rtlCol="0" anchor="ctr"/>
-          <a:lstStyle/>
-          <a:p>
-            <a:pPr algn="ctr"/>
-            <a:endParaRPr/>
-          </a:p>
-        </p:txBody>
-      </p:sp>
-      <p:sp>
-        <p:nvSpPr>
-          <p:cNvPr id="34" name="TextBox 33"/>
-          <p:cNvSpPr txBox="1"/>
-          <p:nvPr/>
-        </p:nvSpPr>
-        <p:spPr>
-          <a:xfrm>
-            <a:off x="8641080" y="3611880"/>
-            <a:ext cx="2743200" cy="1280160"/>
-          </a:xfrm>
-          <a:prstGeom prst="rect">
-            <a:avLst/>
-          </a:prstGeom>
-          <a:noFill/>
-        </p:spPr>
-        <p:txBody>
-          <a:bodyPr wrap="square" lIns="0" tIns="0" rIns="0" bIns="0" anchor="ctr">
-            <a:spAutoFit/>
-          </a:bodyPr>
-          <a:lstStyle/>
-          <a:p>
-            <a:pPr algn="l">
-              <a:lnSpc>
-                <a:spcPct val="130000"/>
-              </a:lnSpc>
-            </a:pPr>
-            <a:r>
-              <a:rPr sz="1200" b="1" i="0">
-                <a:solidFill>
-                  <a:srgbClr val="F5B342"/>
-                </a:solidFill>
-                <a:latin typeface="Segoe UI"/>
-              </a:rPr>
-              <a:t>Take ONE thing home today: this concept.</a:t>
-            </a:r>
-          </a:p>
-          <a:p>
-            <a:pPr algn="l"/>
-            <a:r>
-              <a:rPr sz="1100" b="0" i="0">
-                <a:solidFill>
-                  <a:srgbClr val="FFFFFF"/>
-                </a:solidFill>
-                <a:latin typeface="Segoe UI"/>
-              </a:rPr>
-              <a:t>It unlocks half of the LLM world.</a:t>
             </a:r>
           </a:p>
         </p:txBody>
@@ -7347,8 +7377,8 @@
         </p:nvSpPr>
         <p:spPr>
           <a:xfrm>
-            <a:off x="1097280" y="5166360"/>
-            <a:ext cx="10241280" cy="868680"/>
+            <a:off x="1097280" y="5488041"/>
+            <a:ext cx="10241280" cy="225318"/>
           </a:xfrm>
           <a:prstGeom prst="rect">
             <a:avLst/>
@@ -7367,25 +7397,13 @@
               </a:lnSpc>
             </a:pPr>
             <a:r>
-              <a:rPr sz="1300" b="0" i="1">
+              <a:rPr sz="1300" b="0" i="1" dirty="0">
                 <a:solidFill>
                   <a:srgbClr val="FFFFFF"/>
                 </a:solidFill>
                 <a:latin typeface="Segoe UI"/>
               </a:rPr>
-              <a:t>But where does “pass” go on this line? Not similar to enrolment, not opposite either…</a:t>
-            </a:r>
-          </a:p>
-          <a:p>
-            <a:pPr algn="l"/>
-            <a:r>
-              <a:rPr sz="1300" b="0" i="1">
-                <a:solidFill>
-                  <a:srgbClr val="FFFFFF"/>
-                </a:solidFill>
-                <a:latin typeface="Segoe UI"/>
-              </a:rPr>
-              <a:t>one number per word is not enough.</a:t>
+              <a:t>But where does “pass” go on this line? </a:t>
             </a:r>
           </a:p>
         </p:txBody>
@@ -7828,7 +7846,9 @@
       <p:cxnSp>
         <p:nvCxnSpPr>
           <p:cNvPr id="13" name="Connector 12"/>
-          <p:cNvCxnSpPr/>
+          <p:cNvCxnSpPr>
+            <a:cxnSpLocks/>
+          </p:cNvCxnSpPr>
           <p:nvPr/>
         </p:nvCxnSpPr>
         <p:spPr>
@@ -7863,7 +7883,9 @@
       <p:cxnSp>
         <p:nvCxnSpPr>
           <p:cNvPr id="14" name="Connector 13"/>
-          <p:cNvCxnSpPr/>
+          <p:cNvCxnSpPr>
+            <a:cxnSpLocks/>
+          </p:cNvCxnSpPr>
           <p:nvPr/>
         </p:nvCxnSpPr>
         <p:spPr>
@@ -7904,7 +7926,7 @@
         <p:spPr>
           <a:xfrm>
             <a:off x="1051560" y="1965960"/>
-            <a:ext cx="2240280" cy="685800"/>
+            <a:ext cx="2240280" cy="369332"/>
           </a:xfrm>
           <a:prstGeom prst="rect">
             <a:avLst/>
@@ -7999,7 +8021,7 @@
         <p:spPr>
           <a:xfrm>
             <a:off x="3931920" y="3502152"/>
-            <a:ext cx="1920240" cy="274320"/>
+            <a:ext cx="1920240" cy="161583"/>
           </a:xfrm>
           <a:prstGeom prst="rect">
             <a:avLst/>
@@ -8078,7 +8100,7 @@
         <p:spPr>
           <a:xfrm>
             <a:off x="5184648" y="4123944"/>
-            <a:ext cx="1920240" cy="274320"/>
+            <a:ext cx="1920240" cy="161583"/>
           </a:xfrm>
           <a:prstGeom prst="rect">
             <a:avLst/>
@@ -8157,7 +8179,7 @@
         <p:spPr>
           <a:xfrm>
             <a:off x="731519" y="3502152"/>
-            <a:ext cx="1920240" cy="274320"/>
+            <a:ext cx="1920240" cy="161583"/>
           </a:xfrm>
           <a:prstGeom prst="rect">
             <a:avLst/>
@@ -8236,7 +8258,7 @@
         <p:spPr>
           <a:xfrm>
             <a:off x="3557016" y="2057400"/>
-            <a:ext cx="1920240" cy="274320"/>
+            <a:ext cx="1920240" cy="161583"/>
           </a:xfrm>
           <a:prstGeom prst="rect">
             <a:avLst/>
@@ -8315,7 +8337,7 @@
         <p:spPr>
           <a:xfrm>
             <a:off x="3557016" y="5513832"/>
-            <a:ext cx="1920240" cy="274320"/>
+            <a:ext cx="1920240" cy="161583"/>
           </a:xfrm>
           <a:prstGeom prst="rect">
             <a:avLst/>
@@ -8438,7 +8460,7 @@
         <p:spPr>
           <a:xfrm>
             <a:off x="4572000" y="2697479"/>
-            <a:ext cx="2011680" cy="274320"/>
+            <a:ext cx="2011680" cy="176972"/>
           </a:xfrm>
           <a:prstGeom prst="rect">
             <a:avLst/>
@@ -8472,7 +8494,7 @@
         </p:nvSpPr>
         <p:spPr>
           <a:xfrm>
-            <a:off x="6858000" y="1783080"/>
+            <a:off x="6858000" y="3246120"/>
             <a:ext cx="4526280" cy="822960"/>
           </a:xfrm>
           <a:prstGeom prst="roundRect">
@@ -8520,8 +8542,8 @@
         </p:nvSpPr>
         <p:spPr>
           <a:xfrm>
-            <a:off x="7040880" y="1783080"/>
-            <a:ext cx="4160520" cy="822960"/>
+            <a:off x="7040880" y="3558662"/>
+            <a:ext cx="4160520" cy="197875"/>
           </a:xfrm>
           <a:prstGeom prst="rect">
             <a:avLst/>
@@ -8562,308 +8584,14 @@
       </p:sp>
       <p:sp>
         <p:nvSpPr>
-          <p:cNvPr id="31" name="Rounded Rectangle 30"/>
-          <p:cNvSpPr/>
-          <p:nvPr/>
-        </p:nvSpPr>
-        <p:spPr>
-          <a:xfrm>
-            <a:off x="6858000" y="2743200"/>
-            <a:ext cx="4526280" cy="822960"/>
-          </a:xfrm>
-          <a:prstGeom prst="roundRect">
-            <a:avLst>
-              <a:gd name="adj" fmla="val 6000"/>
-            </a:avLst>
-          </a:prstGeom>
-          <a:solidFill>
-            <a:srgbClr val="142847"/>
-          </a:solidFill>
-          <a:ln w="12700">
-            <a:solidFill>
-              <a:srgbClr val="2DD4BF"/>
-            </a:solidFill>
-          </a:ln>
-        </p:spPr>
-        <p:style>
-          <a:lnRef idx="1">
-            <a:schemeClr val="accent1"/>
-          </a:lnRef>
-          <a:fillRef idx="3">
-            <a:schemeClr val="accent1"/>
-          </a:fillRef>
-          <a:effectRef idx="2">
-            <a:schemeClr val="accent1"/>
-          </a:effectRef>
-          <a:fontRef idx="minor">
-            <a:schemeClr val="lt1"/>
-          </a:fontRef>
-        </p:style>
-        <p:txBody>
-          <a:bodyPr rtlCol="0" anchor="ctr"/>
-          <a:lstStyle/>
-          <a:p>
-            <a:pPr algn="ctr"/>
-            <a:endParaRPr/>
-          </a:p>
-        </p:txBody>
-      </p:sp>
-      <p:sp>
-        <p:nvSpPr>
-          <p:cNvPr id="32" name="TextBox 31"/>
-          <p:cNvSpPr txBox="1"/>
-          <p:nvPr/>
-        </p:nvSpPr>
-        <p:spPr>
-          <a:xfrm>
-            <a:off x="7040880" y="2743200"/>
-            <a:ext cx="4160520" cy="822960"/>
-          </a:xfrm>
-          <a:prstGeom prst="rect">
-            <a:avLst/>
-          </a:prstGeom>
-          <a:noFill/>
-        </p:spPr>
-        <p:txBody>
-          <a:bodyPr wrap="square" lIns="0" tIns="0" rIns="0" bIns="0" anchor="ctr">
-            <a:spAutoFit/>
-          </a:bodyPr>
-          <a:lstStyle/>
-          <a:p>
-            <a:pPr>
-              <a:lnSpc>
-                <a:spcPct val="112000"/>
-              </a:lnSpc>
-            </a:pPr>
-            <a:r>
-              <a:rPr sz="1250" b="1">
-                <a:solidFill>
-                  <a:srgbClr val="2DD4BF"/>
-                </a:solidFill>
-                <a:latin typeface="Segoe UI"/>
-              </a:rPr>
-              <a:t>Dimension</a:t>
-            </a:r>
-            <a:r>
-              <a:rPr sz="1050">
-                <a:solidFill>
-                  <a:srgbClr val="9FB3C8"/>
-                </a:solidFill>
-                <a:latin typeface="Segoe UI"/>
-              </a:rPr>
-              <a:t>  —  one slot in that list. A 3-number vector = 3-dimensional.</a:t>
-            </a:r>
-          </a:p>
-        </p:txBody>
-      </p:sp>
-      <p:sp>
-        <p:nvSpPr>
-          <p:cNvPr id="33" name="Rounded Rectangle 32"/>
-          <p:cNvSpPr/>
-          <p:nvPr/>
-        </p:nvSpPr>
-        <p:spPr>
-          <a:xfrm>
-            <a:off x="6858000" y="3703320"/>
-            <a:ext cx="4526280" cy="1188720"/>
-          </a:xfrm>
-          <a:prstGeom prst="roundRect">
-            <a:avLst>
-              <a:gd name="adj" fmla="val 6000"/>
-            </a:avLst>
-          </a:prstGeom>
-          <a:solidFill>
-            <a:srgbClr val="142847"/>
-          </a:solidFill>
-          <a:ln w="12700">
-            <a:solidFill>
-              <a:srgbClr val="F5B342"/>
-            </a:solidFill>
-          </a:ln>
-        </p:spPr>
-        <p:style>
-          <a:lnRef idx="1">
-            <a:schemeClr val="accent1"/>
-          </a:lnRef>
-          <a:fillRef idx="3">
-            <a:schemeClr val="accent1"/>
-          </a:fillRef>
-          <a:effectRef idx="2">
-            <a:schemeClr val="accent1"/>
-          </a:effectRef>
-          <a:fontRef idx="minor">
-            <a:schemeClr val="lt1"/>
-          </a:fontRef>
-        </p:style>
-        <p:txBody>
-          <a:bodyPr rtlCol="0" anchor="ctr"/>
-          <a:lstStyle/>
-          <a:p>
-            <a:pPr algn="ctr"/>
-            <a:endParaRPr/>
-          </a:p>
-        </p:txBody>
-      </p:sp>
-      <p:sp>
-        <p:nvSpPr>
-          <p:cNvPr id="34" name="TextBox 33"/>
-          <p:cNvSpPr txBox="1"/>
-          <p:nvPr/>
-        </p:nvSpPr>
-        <p:spPr>
-          <a:xfrm>
-            <a:off x="7086600" y="3703320"/>
-            <a:ext cx="4069080" cy="1188720"/>
-          </a:xfrm>
-          <a:prstGeom prst="rect">
-            <a:avLst/>
-          </a:prstGeom>
-          <a:noFill/>
-        </p:spPr>
-        <p:txBody>
-          <a:bodyPr wrap="square" lIns="0" tIns="0" rIns="0" bIns="0" anchor="ctr">
-            <a:spAutoFit/>
-          </a:bodyPr>
-          <a:lstStyle/>
-          <a:p>
-            <a:pPr algn="l">
-              <a:lnSpc>
-                <a:spcPct val="130000"/>
-              </a:lnSpc>
-            </a:pPr>
-            <a:r>
-              <a:rPr sz="1200" b="1" i="0">
-                <a:solidFill>
-                  <a:srgbClr val="FFFFFF"/>
-                </a:solidFill>
-                <a:latin typeface="Segoe UI"/>
-              </a:rPr>
-              <a:t>“course” needs NO new axis: [2.5, 2.5] — a bit of both.</a:t>
-            </a:r>
-          </a:p>
-          <a:p>
-            <a:pPr algn="l"/>
-            <a:r>
-              <a:rPr sz="1150" b="0" i="0">
-                <a:solidFill>
-                  <a:srgbClr val="9FB3C8"/>
-                </a:solidFill>
-                <a:latin typeface="Segoe UI"/>
-              </a:rPr>
-              <a:t>A few hundred dimensions can place ALL the words.</a:t>
-            </a:r>
-          </a:p>
-        </p:txBody>
-      </p:sp>
-      <p:sp>
-        <p:nvSpPr>
-          <p:cNvPr id="35" name="Rounded Rectangle 34"/>
-          <p:cNvSpPr/>
-          <p:nvPr/>
-        </p:nvSpPr>
-        <p:spPr>
-          <a:xfrm>
-            <a:off x="6858000" y="5029200"/>
-            <a:ext cx="4526280" cy="914400"/>
-          </a:xfrm>
-          <a:prstGeom prst="roundRect">
-            <a:avLst>
-              <a:gd name="adj" fmla="val 6000"/>
-            </a:avLst>
-          </a:prstGeom>
-          <a:solidFill>
-            <a:srgbClr val="142847"/>
-          </a:solidFill>
-          <a:ln w="12700">
-            <a:solidFill>
-              <a:srgbClr val="253B5E"/>
-            </a:solidFill>
-          </a:ln>
-        </p:spPr>
-        <p:style>
-          <a:lnRef idx="1">
-            <a:schemeClr val="accent1"/>
-          </a:lnRef>
-          <a:fillRef idx="3">
-            <a:schemeClr val="accent1"/>
-          </a:fillRef>
-          <a:effectRef idx="2">
-            <a:schemeClr val="accent1"/>
-          </a:effectRef>
-          <a:fontRef idx="minor">
-            <a:schemeClr val="lt1"/>
-          </a:fontRef>
-        </p:style>
-        <p:txBody>
-          <a:bodyPr rtlCol="0" anchor="ctr"/>
-          <a:lstStyle/>
-          <a:p>
-            <a:pPr algn="ctr"/>
-            <a:endParaRPr/>
-          </a:p>
-        </p:txBody>
-      </p:sp>
-      <p:sp>
-        <p:nvSpPr>
-          <p:cNvPr id="36" name="TextBox 35"/>
-          <p:cNvSpPr txBox="1"/>
-          <p:nvPr/>
-        </p:nvSpPr>
-        <p:spPr>
-          <a:xfrm>
-            <a:off x="7086600" y="5029200"/>
-            <a:ext cx="4069080" cy="914400"/>
-          </a:xfrm>
-          <a:prstGeom prst="rect">
-            <a:avLst/>
-          </a:prstGeom>
-          <a:noFill/>
-        </p:spPr>
-        <p:txBody>
-          <a:bodyPr wrap="square" lIns="0" tIns="0" rIns="0" bIns="0" anchor="ctr">
-            <a:spAutoFit/>
-          </a:bodyPr>
-          <a:lstStyle/>
-          <a:p>
-            <a:pPr algn="l">
-              <a:lnSpc>
-                <a:spcPct val="130000"/>
-              </a:lnSpc>
-            </a:pPr>
-            <a:r>
-              <a:rPr sz="1150" b="0" i="0">
-                <a:solidFill>
-                  <a:srgbClr val="FFFFFF"/>
-                </a:solidFill>
-                <a:latin typeface="Segoe UI"/>
-              </a:rPr>
-              <a:t>Production embeddings: ~300–3,000 dimensions.</a:t>
-            </a:r>
-          </a:p>
-          <a:p>
-            <a:pPr algn="l"/>
-            <a:r>
-              <a:rPr sz="1100" b="0" i="1">
-                <a:solidFill>
-                  <a:srgbClr val="9FB3C8"/>
-                </a:solidFill>
-                <a:latin typeface="Segoe UI"/>
-              </a:rPr>
-              <a:t>Same idea — just more room.</a:t>
-            </a:r>
-          </a:p>
-        </p:txBody>
-      </p:sp>
-      <p:sp>
-        <p:nvSpPr>
           <p:cNvPr id="37" name="TextBox 36"/>
           <p:cNvSpPr txBox="1"/>
           <p:nvPr/>
         </p:nvSpPr>
         <p:spPr>
           <a:xfrm>
-            <a:off x="822960" y="6035040"/>
-            <a:ext cx="5760720" cy="320040"/>
+            <a:off x="91440" y="1512151"/>
+            <a:ext cx="5760720" cy="176972"/>
           </a:xfrm>
           <a:prstGeom prst="rect">
             <a:avLst/>
@@ -8878,14 +8606,38 @@
           <a:p>
             <a:pPr algn="ctr"/>
             <a:r>
-              <a:rPr sz="1150" b="0" i="1">
+              <a:rPr lang="en-AU" sz="1150" b="0" i="1" dirty="0">
                 <a:solidFill>
                   <a:srgbClr val="2DD4BF"/>
                 </a:solidFill>
                 <a:latin typeface="Segoe UI"/>
               </a:rPr>
-              <a:t>similar meaning = nearby points — distance IS similarity</a:t>
-            </a:r>
+              <a:t>New word </a:t>
+            </a:r>
+            <a:r>
+              <a:rPr lang="en-AU" sz="1150" b="0" i="1" dirty="0" err="1">
+                <a:solidFill>
+                  <a:srgbClr val="2DD4BF"/>
+                </a:solidFill>
+                <a:latin typeface="Segoe UI"/>
+              </a:rPr>
+              <a:t>comess</a:t>
+            </a:r>
+            <a:r>
+              <a:rPr lang="en-AU" sz="1150" b="0" i="1" dirty="0">
+                <a:solidFill>
+                  <a:srgbClr val="2DD4BF"/>
+                </a:solidFill>
+                <a:latin typeface="Segoe UI"/>
+              </a:rPr>
+              <a:t>: pass</a:t>
+            </a:r>
+            <a:endParaRPr sz="1150" b="0" i="1" dirty="0">
+              <a:solidFill>
+                <a:srgbClr val="2DD4BF"/>
+              </a:solidFill>
+              <a:latin typeface="Segoe UI"/>
+            </a:endParaRPr>
           </a:p>
         </p:txBody>
       </p:sp>
@@ -9278,41 +9030,6 @@
       </p:sp>
       <p:sp>
         <p:nvSpPr>
-          <p:cNvPr id="12" name="TextBox 11"/>
-          <p:cNvSpPr txBox="1"/>
-          <p:nvPr/>
-        </p:nvSpPr>
-        <p:spPr>
-          <a:xfrm>
-            <a:off x="822960" y="1691640"/>
-            <a:ext cx="10607040" cy="365760"/>
-          </a:xfrm>
-          <a:prstGeom prst="rect">
-            <a:avLst/>
-          </a:prstGeom>
-          <a:noFill/>
-        </p:spPr>
-        <p:txBody>
-          <a:bodyPr wrap="square" lIns="0" tIns="0" rIns="0" bIns="0" anchor="t">
-            <a:spAutoFit/>
-          </a:bodyPr>
-          <a:lstStyle/>
-          <a:p>
-            <a:pPr algn="l"/>
-            <a:r>
-              <a:rPr sz="1350" b="0" i="1">
-                <a:solidFill>
-                  <a:srgbClr val="9FB3C8"/>
-                </a:solidFill>
-                <a:latin typeface="Segoe UI"/>
-              </a:rPr>
-              <a:t>Typing numbers for every word by hand would take forever. They are LEARNED.</a:t>
-            </a:r>
-          </a:p>
-        </p:txBody>
-      </p:sp>
-      <p:sp>
-        <p:nvSpPr>
           <p:cNvPr id="13" name="Rounded Rectangle 12"/>
           <p:cNvSpPr/>
           <p:nvPr/>
@@ -9856,253 +9573,6 @@
                 <a:latin typeface="Segoe UI"/>
               </a:rPr>
               <a:t>0.1%</a:t>
-            </a:r>
-          </a:p>
-        </p:txBody>
-      </p:sp>
-      <p:sp>
-        <p:nvSpPr>
-          <p:cNvPr id="27" name="Rounded Rectangle 26"/>
-          <p:cNvSpPr/>
-          <p:nvPr/>
-        </p:nvSpPr>
-        <p:spPr>
-          <a:xfrm>
-            <a:off x="7223760" y="2286000"/>
-            <a:ext cx="4160520" cy="3154680"/>
-          </a:xfrm>
-          <a:prstGeom prst="roundRect">
-            <a:avLst>
-              <a:gd name="adj" fmla="val 6000"/>
-            </a:avLst>
-          </a:prstGeom>
-          <a:solidFill>
-            <a:srgbClr val="142847"/>
-          </a:solidFill>
-          <a:ln w="12700">
-            <a:solidFill>
-              <a:srgbClr val="253B5E"/>
-            </a:solidFill>
-          </a:ln>
-        </p:spPr>
-        <p:style>
-          <a:lnRef idx="1">
-            <a:schemeClr val="accent1"/>
-          </a:lnRef>
-          <a:fillRef idx="3">
-            <a:schemeClr val="accent1"/>
-          </a:fillRef>
-          <a:effectRef idx="2">
-            <a:schemeClr val="accent1"/>
-          </a:effectRef>
-          <a:fontRef idx="minor">
-            <a:schemeClr val="lt1"/>
-          </a:fontRef>
-        </p:style>
-        <p:txBody>
-          <a:bodyPr rtlCol="0" anchor="ctr"/>
-          <a:lstStyle/>
-          <a:p>
-            <a:pPr algn="ctr"/>
-            <a:endParaRPr/>
-          </a:p>
-        </p:txBody>
-      </p:sp>
-      <p:sp>
-        <p:nvSpPr>
-          <p:cNvPr id="28" name="TextBox 27"/>
-          <p:cNvSpPr txBox="1"/>
-          <p:nvPr/>
-        </p:nvSpPr>
-        <p:spPr>
-          <a:xfrm>
-            <a:off x="7498079" y="2487168"/>
-            <a:ext cx="3657600" cy="2834640"/>
-          </a:xfrm>
-          <a:prstGeom prst="rect">
-            <a:avLst/>
-          </a:prstGeom>
-          <a:noFill/>
-        </p:spPr>
-        <p:txBody>
-          <a:bodyPr wrap="square" lIns="0" tIns="0" rIns="0" bIns="0" anchor="t">
-            <a:spAutoFit/>
-          </a:bodyPr>
-          <a:lstStyle/>
-          <a:p>
-            <a:pPr algn="l">
-              <a:lnSpc>
-                <a:spcPct val="130000"/>
-              </a:lnSpc>
-            </a:pPr>
-            <a:r>
-              <a:rPr sz="1250" b="1" i="0">
-                <a:solidFill>
-                  <a:srgbClr val="2DD4BF"/>
-                </a:solidFill>
-                <a:latin typeface="Segoe UI"/>
-              </a:rPr>
-              <a:t>No answer sheet needed —</a:t>
-            </a:r>
-          </a:p>
-          <a:p>
-            <a:pPr algn="l">
-              <a:lnSpc>
-                <a:spcPct val="150000"/>
-              </a:lnSpc>
-            </a:pPr>
-            <a:r>
-              <a:rPr sz="1250" b="1" i="0">
-                <a:solidFill>
-                  <a:srgbClr val="2DD4BF"/>
-                </a:solidFill>
-                <a:latin typeface="Segoe UI"/>
-              </a:rPr>
-              <a:t>the hidden word IS the answer.</a:t>
-            </a:r>
-          </a:p>
-          <a:p>
-            <a:pPr algn="l">
-              <a:lnSpc>
-                <a:spcPct val="130000"/>
-              </a:lnSpc>
-            </a:pPr>
-            <a:r>
-              <a:rPr sz="1200" b="0" i="0">
-                <a:solidFill>
-                  <a:srgbClr val="FFFFFF"/>
-                </a:solidFill>
-                <a:latin typeface="Segoe UI"/>
-              </a:rPr>
-              <a:t>Words that fit the same gaps (enrol, register) get pushed to nearby numbers.</a:t>
-            </a:r>
-          </a:p>
-          <a:p>
-            <a:pPr algn="l">
-              <a:lnSpc>
-                <a:spcPct val="150000"/>
-              </a:lnSpc>
-            </a:pPr>
-            <a:r>
-              <a:rPr sz="1200" b="0" i="0">
-                <a:solidFill>
-                  <a:srgbClr val="FFFFFF"/>
-                </a:solidFill>
-                <a:latin typeface="Segoe UI"/>
-              </a:rPr>
-              <a:t>Words that never fit drift away.</a:t>
-            </a:r>
-          </a:p>
-          <a:p>
-            <a:pPr algn="l">
-              <a:lnSpc>
-                <a:spcPct val="130000"/>
-              </a:lnSpc>
-            </a:pPr>
-            <a:r>
-              <a:rPr sz="1200" b="0" i="0">
-                <a:solidFill>
-                  <a:srgbClr val="9FB3C8"/>
-                </a:solidFill>
-                <a:latin typeface="Segoe UI"/>
-              </a:rPr>
-              <a:t>Millions of sentences later, the numbers have assigned themselves.</a:t>
-            </a:r>
-          </a:p>
-        </p:txBody>
-      </p:sp>
-      <p:sp>
-        <p:nvSpPr>
-          <p:cNvPr id="29" name="Rounded Rectangle 28"/>
-          <p:cNvSpPr/>
-          <p:nvPr/>
-        </p:nvSpPr>
-        <p:spPr>
-          <a:xfrm>
-            <a:off x="822960" y="5623560"/>
-            <a:ext cx="10561320" cy="685800"/>
-          </a:xfrm>
-          <a:prstGeom prst="roundRect">
-            <a:avLst>
-              <a:gd name="adj" fmla="val 6000"/>
-            </a:avLst>
-          </a:prstGeom>
-          <a:solidFill>
-            <a:srgbClr val="142847"/>
-          </a:solidFill>
-          <a:ln w="12700">
-            <a:solidFill>
-              <a:srgbClr val="2DD4BF"/>
-            </a:solidFill>
-          </a:ln>
-        </p:spPr>
-        <p:style>
-          <a:lnRef idx="1">
-            <a:schemeClr val="accent1"/>
-          </a:lnRef>
-          <a:fillRef idx="3">
-            <a:schemeClr val="accent1"/>
-          </a:fillRef>
-          <a:effectRef idx="2">
-            <a:schemeClr val="accent1"/>
-          </a:effectRef>
-          <a:fontRef idx="minor">
-            <a:schemeClr val="lt1"/>
-          </a:fontRef>
-        </p:style>
-        <p:txBody>
-          <a:bodyPr rtlCol="0" anchor="ctr"/>
-          <a:lstStyle/>
-          <a:p>
-            <a:pPr algn="ctr"/>
-            <a:endParaRPr/>
-          </a:p>
-        </p:txBody>
-      </p:sp>
-      <p:sp>
-        <p:nvSpPr>
-          <p:cNvPr id="30" name="TextBox 29"/>
-          <p:cNvSpPr txBox="1"/>
-          <p:nvPr/>
-        </p:nvSpPr>
-        <p:spPr>
-          <a:xfrm>
-            <a:off x="1005840" y="5623560"/>
-            <a:ext cx="10195560" cy="685800"/>
-          </a:xfrm>
-          <a:prstGeom prst="rect">
-            <a:avLst/>
-          </a:prstGeom>
-          <a:noFill/>
-        </p:spPr>
-        <p:txBody>
-          <a:bodyPr wrap="square" lIns="0" tIns="0" rIns="0" bIns="0" anchor="ctr">
-            <a:spAutoFit/>
-          </a:bodyPr>
-          <a:lstStyle/>
-          <a:p>
-            <a:pPr>
-              <a:lnSpc>
-                <a:spcPct val="112000"/>
-              </a:lnSpc>
-            </a:pPr>
-            <a:r>
-              <a:rPr sz="1250" b="1">
-                <a:solidFill>
-                  <a:srgbClr val="2DD4BF"/>
-                </a:solidFill>
-                <a:latin typeface="Segoe UI"/>
-              </a:rPr>
-              <a:t>Representation learning</a:t>
-            </a:r>
-            <a:r>
-              <a:rPr sz="1050">
-                <a:solidFill>
-                  <a:srgbClr val="9FB3C8"/>
-                </a:solidFill>
-                <a:latin typeface="Segoe UI"/>
-              </a:rPr>
-              <a:t>  —  the numbers are learned from data, not designed by hand. Look up later: king − man + woman ≈ queen.</a:t>
             </a:r>
           </a:p>
         </p:txBody>
@@ -10757,18 +10227,18 @@
       </p:sp>
       <p:sp>
         <p:nvSpPr>
-          <p:cNvPr id="20" name="Rounded Rectangle 19"/>
+          <p:cNvPr id="24" name="Rounded Rectangle 23"/>
           <p:cNvSpPr/>
           <p:nvPr/>
         </p:nvSpPr>
         <p:spPr>
           <a:xfrm>
-            <a:off x="6949440" y="1737360"/>
-            <a:ext cx="4434840" cy="868680"/>
+            <a:off x="822960" y="4434840"/>
+            <a:ext cx="4114800" cy="731520"/>
           </a:xfrm>
           <a:prstGeom prst="roundRect">
             <a:avLst>
-              <a:gd name="adj" fmla="val 6000"/>
+              <a:gd name="adj" fmla="val 30000"/>
             </a:avLst>
           </a:prstGeom>
           <a:solidFill>
@@ -10805,14 +10275,14 @@
       </p:sp>
       <p:sp>
         <p:nvSpPr>
-          <p:cNvPr id="21" name="TextBox 20"/>
+          <p:cNvPr id="25" name="TextBox 24"/>
           <p:cNvSpPr txBox="1"/>
           <p:nvPr/>
         </p:nvSpPr>
         <p:spPr>
           <a:xfrm>
-            <a:off x="7132320" y="1737360"/>
-            <a:ext cx="4069079" cy="868680"/>
+            <a:off x="1051560" y="4434840"/>
+            <a:ext cx="3657600" cy="731520"/>
           </a:xfrm>
           <a:prstGeom prst="rect">
             <a:avLst/>
@@ -10825,42 +10295,77 @@
           </a:bodyPr>
           <a:lstStyle/>
           <a:p>
-            <a:pPr>
+            <a:pPr algn="l">
               <a:lnSpc>
-                <a:spcPct val="112000"/>
+                <a:spcPct val="120000"/>
               </a:lnSpc>
             </a:pPr>
             <a:r>
-              <a:rPr sz="1250" b="1">
-                <a:solidFill>
-                  <a:srgbClr val="2DD4BF"/>
-                </a:solidFill>
-                <a:latin typeface="Segoe UI"/>
-              </a:rPr>
-              <a:t>Similarity</a:t>
-            </a:r>
-            <a:r>
-              <a:rPr sz="1050">
-                <a:solidFill>
-                  <a:srgbClr val="9FB3C8"/>
-                </a:solidFill>
-                <a:latin typeface="Segoe UI"/>
-              </a:rPr>
-              <a:t>  —  the closeness of two vectors. Official name: cosine similarity.</a:t>
-            </a:r>
-          </a:p>
-        </p:txBody>
-      </p:sp>
-      <p:sp>
-        <p:nvSpPr>
-          <p:cNvPr id="22" name="Rounded Rectangle 21"/>
+              <a:rPr sz="1150" b="1" i="1">
+                <a:solidFill>
+                  <a:srgbClr val="FFFFFF"/>
+                </a:solidFill>
+                <a:latin typeface="Segoe UI"/>
+              </a:rPr>
+              <a:t>“How do I fix a mistake in my registration?”</a:t>
+            </a:r>
+          </a:p>
+        </p:txBody>
+      </p:sp>
+      <p:sp>
+        <p:nvSpPr>
+          <p:cNvPr id="26" name="Right Arrow 25"/>
           <p:cNvSpPr/>
           <p:nvPr/>
         </p:nvSpPr>
         <p:spPr>
           <a:xfrm>
-            <a:off x="6949440" y="2743200"/>
-            <a:ext cx="4434840" cy="1371600"/>
+            <a:off x="5029200" y="4663440"/>
+            <a:ext cx="411480" cy="274320"/>
+          </a:xfrm>
+          <a:prstGeom prst="rightArrow">
+            <a:avLst/>
+          </a:prstGeom>
+          <a:solidFill>
+            <a:srgbClr val="2DD4BF"/>
+          </a:solidFill>
+          <a:ln>
+            <a:noFill/>
+          </a:ln>
+        </p:spPr>
+        <p:style>
+          <a:lnRef idx="1">
+            <a:schemeClr val="accent1"/>
+          </a:lnRef>
+          <a:fillRef idx="3">
+            <a:schemeClr val="accent1"/>
+          </a:fillRef>
+          <a:effectRef idx="2">
+            <a:schemeClr val="accent1"/>
+          </a:effectRef>
+          <a:fontRef idx="minor">
+            <a:schemeClr val="lt1"/>
+          </a:fontRef>
+        </p:style>
+        <p:txBody>
+          <a:bodyPr rtlCol="0" anchor="ctr"/>
+          <a:lstStyle/>
+          <a:p>
+            <a:pPr algn="ctr"/>
+            <a:endParaRPr/>
+          </a:p>
+        </p:txBody>
+      </p:sp>
+      <p:sp>
+        <p:nvSpPr>
+          <p:cNvPr id="27" name="Rounded Rectangle 26"/>
+          <p:cNvSpPr/>
+          <p:nvPr/>
+        </p:nvSpPr>
+        <p:spPr>
+          <a:xfrm>
+            <a:off x="5532120" y="4434840"/>
+            <a:ext cx="1691640" cy="731520"/>
           </a:xfrm>
           <a:prstGeom prst="roundRect">
             <a:avLst>
@@ -10872,7 +10377,7 @@
           </a:solidFill>
           <a:ln w="12700">
             <a:solidFill>
-              <a:srgbClr val="253B5E"/>
+              <a:srgbClr val="F5B342"/>
             </a:solidFill>
           </a:ln>
         </p:spPr>
@@ -10901,14 +10406,14 @@
       </p:sp>
       <p:sp>
         <p:nvSpPr>
-          <p:cNvPr id="23" name="TextBox 22"/>
+          <p:cNvPr id="28" name="TextBox 27"/>
           <p:cNvSpPr txBox="1"/>
           <p:nvPr/>
         </p:nvSpPr>
         <p:spPr>
           <a:xfrm>
-            <a:off x="7178040" y="2743200"/>
-            <a:ext cx="3977639" cy="1371600"/>
+            <a:off x="5669280" y="4434840"/>
+            <a:ext cx="1417320" cy="731520"/>
           </a:xfrm>
           <a:prstGeom prst="rect">
             <a:avLst/>
@@ -10921,37 +10426,77 @@
           </a:bodyPr>
           <a:lstStyle/>
           <a:p>
-            <a:pPr algn="l">
-              <a:lnSpc>
-                <a:spcPct val="125000"/>
-              </a:lnSpc>
-            </a:pPr>
-            <a:r>
-              <a:rPr sz="1050" b="0" i="0">
-                <a:solidFill>
-                  <a:srgbClr val="FFFFFF"/>
-                </a:solidFill>
-                <a:latin typeface="Segoe UI"/>
-              </a:rPr>
-              <a:t>And the library trap? A “24/7” question now retrieves BOTH library chunks — rule and appendix are both ABOUT library access. The model sees the full picture and answers with the condition. ✓</a:t>
-            </a:r>
-          </a:p>
-        </p:txBody>
-      </p:sp>
-      <p:sp>
-        <p:nvSpPr>
-          <p:cNvPr id="24" name="Rounded Rectangle 23"/>
+            <a:pPr algn="ctr"/>
+            <a:r>
+              <a:rPr sz="1100" b="1" i="0">
+                <a:solidFill>
+                  <a:srgbClr val="F5B342"/>
+                </a:solidFill>
+                <a:latin typeface="Consolas"/>
+              </a:rPr>
+              <a:t>[ 5.6,  0.2, …]</a:t>
+            </a:r>
+          </a:p>
+        </p:txBody>
+      </p:sp>
+      <p:sp>
+        <p:nvSpPr>
+          <p:cNvPr id="29" name="Right Arrow 28"/>
           <p:cNvSpPr/>
           <p:nvPr/>
         </p:nvSpPr>
         <p:spPr>
           <a:xfrm>
-            <a:off x="822960" y="4434840"/>
-            <a:ext cx="4114800" cy="731520"/>
+            <a:off x="7315200" y="4663440"/>
+            <a:ext cx="411480" cy="274320"/>
+          </a:xfrm>
+          <a:prstGeom prst="rightArrow">
+            <a:avLst/>
+          </a:prstGeom>
+          <a:solidFill>
+            <a:srgbClr val="2DD4BF"/>
+          </a:solidFill>
+          <a:ln>
+            <a:noFill/>
+          </a:ln>
+        </p:spPr>
+        <p:style>
+          <a:lnRef idx="1">
+            <a:schemeClr val="accent1"/>
+          </a:lnRef>
+          <a:fillRef idx="3">
+            <a:schemeClr val="accent1"/>
+          </a:fillRef>
+          <a:effectRef idx="2">
+            <a:schemeClr val="accent1"/>
+          </a:effectRef>
+          <a:fontRef idx="minor">
+            <a:schemeClr val="lt1"/>
+          </a:fontRef>
+        </p:style>
+        <p:txBody>
+          <a:bodyPr rtlCol="0" anchor="ctr"/>
+          <a:lstStyle/>
+          <a:p>
+            <a:pPr algn="ctr"/>
+            <a:endParaRPr/>
+          </a:p>
+        </p:txBody>
+      </p:sp>
+      <p:sp>
+        <p:nvSpPr>
+          <p:cNvPr id="30" name="Rounded Rectangle 29"/>
+          <p:cNvSpPr/>
+          <p:nvPr/>
+        </p:nvSpPr>
+        <p:spPr>
+          <a:xfrm>
+            <a:off x="7818120" y="4343400"/>
+            <a:ext cx="3566160" cy="914400"/>
           </a:xfrm>
           <a:prstGeom prst="roundRect">
             <a:avLst>
-              <a:gd name="adj" fmla="val 30000"/>
+              <a:gd name="adj" fmla="val 6000"/>
             </a:avLst>
           </a:prstGeom>
           <a:solidFill>
@@ -10988,14 +10533,14 @@
       </p:sp>
       <p:sp>
         <p:nvSpPr>
-          <p:cNvPr id="25" name="TextBox 24"/>
+          <p:cNvPr id="31" name="TextBox 30"/>
           <p:cNvSpPr txBox="1"/>
           <p:nvPr/>
         </p:nvSpPr>
         <p:spPr>
           <a:xfrm>
-            <a:off x="1051560" y="4434840"/>
-            <a:ext cx="3657600" cy="731520"/>
+            <a:off x="8046720" y="4343400"/>
+            <a:ext cx="3108960" cy="914400"/>
           </a:xfrm>
           <a:prstGeom prst="rect">
             <a:avLst/>
@@ -11014,270 +10559,12 @@
               </a:lnSpc>
             </a:pPr>
             <a:r>
-              <a:rPr sz="1150" b="1" i="1">
+              <a:rPr sz="1100" b="1" i="0">
                 <a:solidFill>
                   <a:srgbClr val="FFFFFF"/>
                 </a:solidFill>
                 <a:latin typeface="Segoe UI"/>
               </a:rPr>
-              <a:t>“How do I fix a mistake in my registration?”</a:t>
-            </a:r>
-          </a:p>
-        </p:txBody>
-      </p:sp>
-      <p:sp>
-        <p:nvSpPr>
-          <p:cNvPr id="26" name="Right Arrow 25"/>
-          <p:cNvSpPr/>
-          <p:nvPr/>
-        </p:nvSpPr>
-        <p:spPr>
-          <a:xfrm>
-            <a:off x="5029200" y="4663440"/>
-            <a:ext cx="411480" cy="274320"/>
-          </a:xfrm>
-          <a:prstGeom prst="rightArrow">
-            <a:avLst/>
-          </a:prstGeom>
-          <a:solidFill>
-            <a:srgbClr val="2DD4BF"/>
-          </a:solidFill>
-          <a:ln>
-            <a:noFill/>
-          </a:ln>
-        </p:spPr>
-        <p:style>
-          <a:lnRef idx="1">
-            <a:schemeClr val="accent1"/>
-          </a:lnRef>
-          <a:fillRef idx="3">
-            <a:schemeClr val="accent1"/>
-          </a:fillRef>
-          <a:effectRef idx="2">
-            <a:schemeClr val="accent1"/>
-          </a:effectRef>
-          <a:fontRef idx="minor">
-            <a:schemeClr val="lt1"/>
-          </a:fontRef>
-        </p:style>
-        <p:txBody>
-          <a:bodyPr rtlCol="0" anchor="ctr"/>
-          <a:lstStyle/>
-          <a:p>
-            <a:pPr algn="ctr"/>
-            <a:endParaRPr/>
-          </a:p>
-        </p:txBody>
-      </p:sp>
-      <p:sp>
-        <p:nvSpPr>
-          <p:cNvPr id="27" name="Rounded Rectangle 26"/>
-          <p:cNvSpPr/>
-          <p:nvPr/>
-        </p:nvSpPr>
-        <p:spPr>
-          <a:xfrm>
-            <a:off x="5532120" y="4434840"/>
-            <a:ext cx="1691640" cy="731520"/>
-          </a:xfrm>
-          <a:prstGeom prst="roundRect">
-            <a:avLst>
-              <a:gd name="adj" fmla="val 6000"/>
-            </a:avLst>
-          </a:prstGeom>
-          <a:solidFill>
-            <a:srgbClr val="142847"/>
-          </a:solidFill>
-          <a:ln w="12700">
-            <a:solidFill>
-              <a:srgbClr val="F5B342"/>
-            </a:solidFill>
-          </a:ln>
-        </p:spPr>
-        <p:style>
-          <a:lnRef idx="1">
-            <a:schemeClr val="accent1"/>
-          </a:lnRef>
-          <a:fillRef idx="3">
-            <a:schemeClr val="accent1"/>
-          </a:fillRef>
-          <a:effectRef idx="2">
-            <a:schemeClr val="accent1"/>
-          </a:effectRef>
-          <a:fontRef idx="minor">
-            <a:schemeClr val="lt1"/>
-          </a:fontRef>
-        </p:style>
-        <p:txBody>
-          <a:bodyPr rtlCol="0" anchor="ctr"/>
-          <a:lstStyle/>
-          <a:p>
-            <a:pPr algn="ctr"/>
-            <a:endParaRPr/>
-          </a:p>
-        </p:txBody>
-      </p:sp>
-      <p:sp>
-        <p:nvSpPr>
-          <p:cNvPr id="28" name="TextBox 27"/>
-          <p:cNvSpPr txBox="1"/>
-          <p:nvPr/>
-        </p:nvSpPr>
-        <p:spPr>
-          <a:xfrm>
-            <a:off x="5669280" y="4434840"/>
-            <a:ext cx="1417320" cy="731520"/>
-          </a:xfrm>
-          <a:prstGeom prst="rect">
-            <a:avLst/>
-          </a:prstGeom>
-          <a:noFill/>
-        </p:spPr>
-        <p:txBody>
-          <a:bodyPr wrap="square" lIns="0" tIns="0" rIns="0" bIns="0" anchor="ctr">
-            <a:spAutoFit/>
-          </a:bodyPr>
-          <a:lstStyle/>
-          <a:p>
-            <a:pPr algn="ctr"/>
-            <a:r>
-              <a:rPr sz="1100" b="1" i="0">
-                <a:solidFill>
-                  <a:srgbClr val="F5B342"/>
-                </a:solidFill>
-                <a:latin typeface="Consolas"/>
-              </a:rPr>
-              <a:t>[ 5.6,  0.2, …]</a:t>
-            </a:r>
-          </a:p>
-        </p:txBody>
-      </p:sp>
-      <p:sp>
-        <p:nvSpPr>
-          <p:cNvPr id="29" name="Right Arrow 28"/>
-          <p:cNvSpPr/>
-          <p:nvPr/>
-        </p:nvSpPr>
-        <p:spPr>
-          <a:xfrm>
-            <a:off x="7315200" y="4663440"/>
-            <a:ext cx="411480" cy="274320"/>
-          </a:xfrm>
-          <a:prstGeom prst="rightArrow">
-            <a:avLst/>
-          </a:prstGeom>
-          <a:solidFill>
-            <a:srgbClr val="2DD4BF"/>
-          </a:solidFill>
-          <a:ln>
-            <a:noFill/>
-          </a:ln>
-        </p:spPr>
-        <p:style>
-          <a:lnRef idx="1">
-            <a:schemeClr val="accent1"/>
-          </a:lnRef>
-          <a:fillRef idx="3">
-            <a:schemeClr val="accent1"/>
-          </a:fillRef>
-          <a:effectRef idx="2">
-            <a:schemeClr val="accent1"/>
-          </a:effectRef>
-          <a:fontRef idx="minor">
-            <a:schemeClr val="lt1"/>
-          </a:fontRef>
-        </p:style>
-        <p:txBody>
-          <a:bodyPr rtlCol="0" anchor="ctr"/>
-          <a:lstStyle/>
-          <a:p>
-            <a:pPr algn="ctr"/>
-            <a:endParaRPr/>
-          </a:p>
-        </p:txBody>
-      </p:sp>
-      <p:sp>
-        <p:nvSpPr>
-          <p:cNvPr id="30" name="Rounded Rectangle 29"/>
-          <p:cNvSpPr/>
-          <p:nvPr/>
-        </p:nvSpPr>
-        <p:spPr>
-          <a:xfrm>
-            <a:off x="7818120" y="4343400"/>
-            <a:ext cx="3566160" cy="914400"/>
-          </a:xfrm>
-          <a:prstGeom prst="roundRect">
-            <a:avLst>
-              <a:gd name="adj" fmla="val 6000"/>
-            </a:avLst>
-          </a:prstGeom>
-          <a:solidFill>
-            <a:srgbClr val="142847"/>
-          </a:solidFill>
-          <a:ln w="12700">
-            <a:solidFill>
-              <a:srgbClr val="2DD4BF"/>
-            </a:solidFill>
-          </a:ln>
-        </p:spPr>
-        <p:style>
-          <a:lnRef idx="1">
-            <a:schemeClr val="accent1"/>
-          </a:lnRef>
-          <a:fillRef idx="3">
-            <a:schemeClr val="accent1"/>
-          </a:fillRef>
-          <a:effectRef idx="2">
-            <a:schemeClr val="accent1"/>
-          </a:effectRef>
-          <a:fontRef idx="minor">
-            <a:schemeClr val="lt1"/>
-          </a:fontRef>
-        </p:style>
-        <p:txBody>
-          <a:bodyPr rtlCol="0" anchor="ctr"/>
-          <a:lstStyle/>
-          <a:p>
-            <a:pPr algn="ctr"/>
-            <a:endParaRPr/>
-          </a:p>
-        </p:txBody>
-      </p:sp>
-      <p:sp>
-        <p:nvSpPr>
-          <p:cNvPr id="31" name="TextBox 30"/>
-          <p:cNvSpPr txBox="1"/>
-          <p:nvPr/>
-        </p:nvSpPr>
-        <p:spPr>
-          <a:xfrm>
-            <a:off x="8046720" y="4343400"/>
-            <a:ext cx="3108960" cy="914400"/>
-          </a:xfrm>
-          <a:prstGeom prst="rect">
-            <a:avLst/>
-          </a:prstGeom>
-          <a:noFill/>
-        </p:spPr>
-        <p:txBody>
-          <a:bodyPr wrap="square" lIns="0" tIns="0" rIns="0" bIns="0" anchor="ctr">
-            <a:spAutoFit/>
-          </a:bodyPr>
-          <a:lstStyle/>
-          <a:p>
-            <a:pPr algn="l">
-              <a:lnSpc>
-                <a:spcPct val="120000"/>
-              </a:lnSpc>
-            </a:pPr>
-            <a:r>
-              <a:rPr sz="1100" b="1" i="0">
-                <a:solidFill>
-                  <a:srgbClr val="FFFFFF"/>
-                </a:solidFill>
-                <a:latin typeface="Segoe UI"/>
-              </a:rPr>
               <a:t>nearest chunk: “Enrolment corrections…”</a:t>
             </a:r>
           </a:p>
@@ -11291,76 +10578,6 @@
                 <a:latin typeface="Segoe UI"/>
               </a:rPr>
               <a:t>ZERO shared words — found by meaning ✓</a:t>
-            </a:r>
-          </a:p>
-        </p:txBody>
-      </p:sp>
-      <p:sp>
-        <p:nvSpPr>
-          <p:cNvPr id="32" name="TextBox 31"/>
-          <p:cNvSpPr txBox="1"/>
-          <p:nvPr/>
-        </p:nvSpPr>
-        <p:spPr>
-          <a:xfrm>
-            <a:off x="822960" y="5623560"/>
-            <a:ext cx="10607040" cy="411480"/>
-          </a:xfrm>
-          <a:prstGeom prst="rect">
-            <a:avLst/>
-          </a:prstGeom>
-          <a:noFill/>
-        </p:spPr>
-        <p:txBody>
-          <a:bodyPr wrap="square" lIns="0" tIns="0" rIns="0" bIns="0" anchor="t">
-            <a:spAutoFit/>
-          </a:bodyPr>
-          <a:lstStyle/>
-          <a:p>
-            <a:pPr algn="l"/>
-            <a:r>
-              <a:rPr sz="1400" b="1" i="0">
-                <a:solidFill>
-                  <a:srgbClr val="F5B342"/>
-                </a:solidFill>
-                <a:latin typeface="Segoe UI"/>
-              </a:rPr>
-              <a:t>Same skeleton — one box upgraded. The bot just learned MEANING.</a:t>
-            </a:r>
-          </a:p>
-        </p:txBody>
-      </p:sp>
-      <p:sp>
-        <p:nvSpPr>
-          <p:cNvPr id="33" name="TextBox 32"/>
-          <p:cNvSpPr txBox="1"/>
-          <p:nvPr/>
-        </p:nvSpPr>
-        <p:spPr>
-          <a:xfrm>
-            <a:off x="822960" y="6035040"/>
-            <a:ext cx="10607040" cy="320040"/>
-          </a:xfrm>
-          <a:prstGeom prst="rect">
-            <a:avLst/>
-          </a:prstGeom>
-          <a:noFill/>
-        </p:spPr>
-        <p:txBody>
-          <a:bodyPr wrap="square" lIns="0" tIns="0" rIns="0" bIns="0" anchor="t">
-            <a:spAutoFit/>
-          </a:bodyPr>
-          <a:lstStyle/>
-          <a:p>
-            <a:pPr algn="l"/>
-            <a:r>
-              <a:rPr sz="1150" b="0" i="1">
-                <a:solidFill>
-                  <a:srgbClr val="9FB3C8"/>
-                </a:solidFill>
-                <a:latin typeface="Segoe UI"/>
-              </a:rPr>
-              <a:t>Search with “registration” — texts about “enrolment” now come to you.</a:t>
             </a:r>
           </a:p>
         </p:txBody>
@@ -11789,255 +11006,6 @@
       </p:sp>
       <p:sp>
         <p:nvSpPr>
-          <p:cNvPr id="13" name="Rounded Rectangle 12"/>
-          <p:cNvSpPr/>
-          <p:nvPr/>
-        </p:nvSpPr>
-        <p:spPr>
-          <a:xfrm>
-            <a:off x="7863840" y="1682496"/>
-            <a:ext cx="310896" cy="182880"/>
-          </a:xfrm>
-          <a:prstGeom prst="roundRect">
-            <a:avLst>
-              <a:gd name="adj" fmla="val 25000"/>
-            </a:avLst>
-          </a:prstGeom>
-          <a:solidFill>
-            <a:srgbClr val="142847"/>
-          </a:solidFill>
-          <a:ln w="12700">
-            <a:solidFill>
-              <a:srgbClr val="253B5E"/>
-            </a:solidFill>
-          </a:ln>
-        </p:spPr>
-        <p:style>
-          <a:lnRef idx="1">
-            <a:schemeClr val="accent1"/>
-          </a:lnRef>
-          <a:fillRef idx="3">
-            <a:schemeClr val="accent1"/>
-          </a:fillRef>
-          <a:effectRef idx="2">
-            <a:schemeClr val="accent1"/>
-          </a:effectRef>
-          <a:fontRef idx="minor">
-            <a:schemeClr val="lt1"/>
-          </a:fontRef>
-        </p:style>
-        <p:txBody>
-          <a:bodyPr rtlCol="0" anchor="ctr"/>
-          <a:lstStyle/>
-          <a:p>
-            <a:pPr algn="ctr"/>
-            <a:endParaRPr/>
-          </a:p>
-        </p:txBody>
-      </p:sp>
-      <p:sp>
-        <p:nvSpPr>
-          <p:cNvPr id="14" name="TextBox 13"/>
-          <p:cNvSpPr txBox="1"/>
-          <p:nvPr/>
-        </p:nvSpPr>
-        <p:spPr>
-          <a:xfrm>
-            <a:off x="8247888" y="1627632"/>
-            <a:ext cx="868680" cy="274320"/>
-          </a:xfrm>
-          <a:prstGeom prst="rect">
-            <a:avLst/>
-          </a:prstGeom>
-          <a:noFill/>
-        </p:spPr>
-        <p:txBody>
-          <a:bodyPr wrap="square" lIns="0" tIns="0" rIns="0" bIns="0" anchor="t">
-            <a:spAutoFit/>
-          </a:bodyPr>
-          <a:lstStyle/>
-          <a:p>
-            <a:pPr algn="l"/>
-            <a:r>
-              <a:rPr sz="1000" b="0" i="0">
-                <a:solidFill>
-                  <a:srgbClr val="9FB3C8"/>
-                </a:solidFill>
-                <a:latin typeface="Segoe UI"/>
-              </a:rPr>
-              <a:t>phase 2</a:t>
-            </a:r>
-          </a:p>
-        </p:txBody>
-      </p:sp>
-      <p:sp>
-        <p:nvSpPr>
-          <p:cNvPr id="15" name="Rounded Rectangle 14"/>
-          <p:cNvSpPr/>
-          <p:nvPr/>
-        </p:nvSpPr>
-        <p:spPr>
-          <a:xfrm>
-            <a:off x="9189719" y="1682496"/>
-            <a:ext cx="310896" cy="182880"/>
-          </a:xfrm>
-          <a:prstGeom prst="roundRect">
-            <a:avLst>
-              <a:gd name="adj" fmla="val 25000"/>
-            </a:avLst>
-          </a:prstGeom>
-          <a:solidFill>
-            <a:srgbClr val="142847"/>
-          </a:solidFill>
-          <a:ln w="12700">
-            <a:solidFill>
-              <a:srgbClr val="2DD4BF"/>
-            </a:solidFill>
-          </a:ln>
-        </p:spPr>
-        <p:style>
-          <a:lnRef idx="1">
-            <a:schemeClr val="accent1"/>
-          </a:lnRef>
-          <a:fillRef idx="3">
-            <a:schemeClr val="accent1"/>
-          </a:fillRef>
-          <a:effectRef idx="2">
-            <a:schemeClr val="accent1"/>
-          </a:effectRef>
-          <a:fontRef idx="minor">
-            <a:schemeClr val="lt1"/>
-          </a:fontRef>
-        </p:style>
-        <p:txBody>
-          <a:bodyPr rtlCol="0" anchor="ctr"/>
-          <a:lstStyle/>
-          <a:p>
-            <a:pPr algn="ctr"/>
-            <a:endParaRPr/>
-          </a:p>
-        </p:txBody>
-      </p:sp>
-      <p:sp>
-        <p:nvSpPr>
-          <p:cNvPr id="16" name="TextBox 15"/>
-          <p:cNvSpPr txBox="1"/>
-          <p:nvPr/>
-        </p:nvSpPr>
-        <p:spPr>
-          <a:xfrm>
-            <a:off x="9573767" y="1627632"/>
-            <a:ext cx="868680" cy="274320"/>
-          </a:xfrm>
-          <a:prstGeom prst="rect">
-            <a:avLst/>
-          </a:prstGeom>
-          <a:noFill/>
-        </p:spPr>
-        <p:txBody>
-          <a:bodyPr wrap="square" lIns="0" tIns="0" rIns="0" bIns="0" anchor="t">
-            <a:spAutoFit/>
-          </a:bodyPr>
-          <a:lstStyle/>
-          <a:p>
-            <a:pPr algn="l"/>
-            <a:r>
-              <a:rPr sz="1000" b="0" i="0">
-                <a:solidFill>
-                  <a:srgbClr val="9FB3C8"/>
-                </a:solidFill>
-                <a:latin typeface="Segoe UI"/>
-              </a:rPr>
-              <a:t>phase 3</a:t>
-            </a:r>
-          </a:p>
-        </p:txBody>
-      </p:sp>
-      <p:sp>
-        <p:nvSpPr>
-          <p:cNvPr id="17" name="Rounded Rectangle 16"/>
-          <p:cNvSpPr/>
-          <p:nvPr/>
-        </p:nvSpPr>
-        <p:spPr>
-          <a:xfrm>
-            <a:off x="10515599" y="1682496"/>
-            <a:ext cx="310896" cy="182880"/>
-          </a:xfrm>
-          <a:prstGeom prst="roundRect">
-            <a:avLst>
-              <a:gd name="adj" fmla="val 25000"/>
-            </a:avLst>
-          </a:prstGeom>
-          <a:solidFill>
-            <a:srgbClr val="142847"/>
-          </a:solidFill>
-          <a:ln w="12700">
-            <a:solidFill>
-              <a:srgbClr val="F5B342"/>
-            </a:solidFill>
-          </a:ln>
-        </p:spPr>
-        <p:style>
-          <a:lnRef idx="1">
-            <a:schemeClr val="accent1"/>
-          </a:lnRef>
-          <a:fillRef idx="3">
-            <a:schemeClr val="accent1"/>
-          </a:fillRef>
-          <a:effectRef idx="2">
-            <a:schemeClr val="accent1"/>
-          </a:effectRef>
-          <a:fontRef idx="minor">
-            <a:schemeClr val="lt1"/>
-          </a:fontRef>
-        </p:style>
-        <p:txBody>
-          <a:bodyPr rtlCol="0" anchor="ctr"/>
-          <a:lstStyle/>
-          <a:p>
-            <a:pPr algn="ctr"/>
-            <a:endParaRPr/>
-          </a:p>
-        </p:txBody>
-      </p:sp>
-      <p:sp>
-        <p:nvSpPr>
-          <p:cNvPr id="18" name="TextBox 17"/>
-          <p:cNvSpPr txBox="1"/>
-          <p:nvPr/>
-        </p:nvSpPr>
-        <p:spPr>
-          <a:xfrm>
-            <a:off x="10899647" y="1627632"/>
-            <a:ext cx="868680" cy="274320"/>
-          </a:xfrm>
-          <a:prstGeom prst="rect">
-            <a:avLst/>
-          </a:prstGeom>
-          <a:noFill/>
-        </p:spPr>
-        <p:txBody>
-          <a:bodyPr wrap="square" lIns="0" tIns="0" rIns="0" bIns="0" anchor="t">
-            <a:spAutoFit/>
-          </a:bodyPr>
-          <a:lstStyle/>
-          <a:p>
-            <a:pPr algn="l"/>
-            <a:r>
-              <a:rPr sz="1000" b="0" i="0">
-                <a:solidFill>
-                  <a:srgbClr val="9FB3C8"/>
-                </a:solidFill>
-                <a:latin typeface="Segoe UI"/>
-              </a:rPr>
-              <a:t>phase 4</a:t>
-            </a:r>
-          </a:p>
-        </p:txBody>
-      </p:sp>
-      <p:sp>
-        <p:nvSpPr>
           <p:cNvPr id="19" name="Rounded Rectangle 18"/>
           <p:cNvSpPr/>
           <p:nvPr/>
@@ -13861,8 +12829,8 @@
         </p:nvSpPr>
         <p:spPr>
           <a:xfrm>
-            <a:off x="1097280" y="5257800"/>
-            <a:ext cx="10058400" cy="822960"/>
+            <a:off x="1097280" y="5534980"/>
+            <a:ext cx="10058400" cy="268600"/>
           </a:xfrm>
           <a:prstGeom prst="rect">
             <a:avLst/>
@@ -13881,26 +12849,29 @@
               </a:lnSpc>
             </a:pPr>
             <a:r>
-              <a:rPr sz="1500" b="1" i="0">
+              <a:rPr sz="1500" b="1" i="0" dirty="0">
                 <a:solidFill>
                   <a:srgbClr val="FFFFFF"/>
                 </a:solidFill>
                 <a:latin typeface="Segoe UI"/>
               </a:rPr>
-              <a:t>This recipe has a name: RAG — Retrieval-Augmented Generation.</a:t>
-            </a:r>
-          </a:p>
-          <a:p>
-            <a:pPr algn="l"/>
-            <a:r>
-              <a:rPr sz="1200" b="0" i="1">
-                <a:solidFill>
-                  <a:srgbClr val="2DD4BF"/>
-                </a:solidFill>
-                <a:latin typeface="Segoe UI"/>
-              </a:rPr>
-              <a:t>You didn't memorise it. You built it, failure by failure.</a:t>
-            </a:r>
+              <a:t>This recipe has a name: RAG — Retrieval-Augmented Generation</a:t>
+            </a:r>
+            <a:r>
+              <a:rPr lang="en-AU" sz="1500" b="1" dirty="0">
+                <a:solidFill>
+                  <a:srgbClr val="FFFFFF"/>
+                </a:solidFill>
+                <a:latin typeface="Segoe UI"/>
+              </a:rPr>
+              <a:t>.</a:t>
+            </a:r>
+            <a:endParaRPr sz="1500" b="1" i="0" dirty="0">
+              <a:solidFill>
+                <a:srgbClr val="FFFFFF"/>
+              </a:solidFill>
+              <a:latin typeface="Segoe UI"/>
+            </a:endParaRPr>
           </a:p>
         </p:txBody>
       </p:sp>
@@ -14091,50 +13062,6 @@
           </a:p>
         </p:txBody>
       </p:sp>
-      <p:sp>
-        <p:nvSpPr>
-          <p:cNvPr id="6" name="Rounded Rectangle 5"/>
-          <p:cNvSpPr/>
-          <p:nvPr/>
-        </p:nvSpPr>
-        <p:spPr>
-          <a:xfrm>
-            <a:off x="621792" y="1371600"/>
-            <a:ext cx="1188720" cy="54864"/>
-          </a:xfrm>
-          <a:prstGeom prst="roundRect">
-            <a:avLst/>
-          </a:prstGeom>
-          <a:solidFill>
-            <a:srgbClr val="F5B342"/>
-          </a:solidFill>
-          <a:ln>
-            <a:noFill/>
-          </a:ln>
-        </p:spPr>
-        <p:style>
-          <a:lnRef idx="1">
-            <a:schemeClr val="accent1"/>
-          </a:lnRef>
-          <a:fillRef idx="3">
-            <a:schemeClr val="accent1"/>
-          </a:fillRef>
-          <a:effectRef idx="2">
-            <a:schemeClr val="accent1"/>
-          </a:effectRef>
-          <a:fontRef idx="minor">
-            <a:schemeClr val="lt1"/>
-          </a:fontRef>
-        </p:style>
-        <p:txBody>
-          <a:bodyPr rtlCol="0" anchor="ctr"/>
-          <a:lstStyle/>
-          <a:p>
-            <a:pPr algn="ctr"/>
-            <a:endParaRPr/>
-          </a:p>
-        </p:txBody>
-      </p:sp>
       <p:pic>
         <p:nvPicPr>
           <p:cNvPr id="7" name="Picture 6" descr="logo-wimmera-white.png"/>
@@ -14287,41 +13214,6 @@
                 <a:latin typeface="Segoe UI"/>
               </a:rPr>
               <a:t>   ·   Analyst Programmer  ·  Wimmera CMA, Victoria</a:t>
-            </a:r>
-          </a:p>
-        </p:txBody>
-      </p:sp>
-      <p:sp>
-        <p:nvSpPr>
-          <p:cNvPr id="12" name="TextBox 11"/>
-          <p:cNvSpPr txBox="1"/>
-          <p:nvPr/>
-        </p:nvSpPr>
-        <p:spPr>
-          <a:xfrm>
-            <a:off x="822960" y="1691640"/>
-            <a:ext cx="10607040" cy="411480"/>
-          </a:xfrm>
-          <a:prstGeom prst="rect">
-            <a:avLst/>
-          </a:prstGeom>
-          <a:noFill/>
-        </p:spPr>
-        <p:txBody>
-          <a:bodyPr wrap="square" lIns="0" tIns="0" rIns="0" bIns="0" anchor="t">
-            <a:spAutoFit/>
-          </a:bodyPr>
-          <a:lstStyle/>
-          <a:p>
-            <a:pPr algn="l"/>
-            <a:r>
-              <a:rPr sz="1250" b="0" i="1">
-                <a:solidFill>
-                  <a:srgbClr val="9FB3C8"/>
-                </a:solidFill>
-                <a:latin typeface="Segoe UI"/>
-              </a:rPr>
-              <a:t>Between today's bot and a production bot: refinements, not new ideas. One line each — look them up when you need them.</a:t>
             </a:r>
           </a:p>
         </p:txBody>
@@ -14382,7 +13274,7 @@
         </p:nvSpPr>
         <p:spPr>
           <a:xfrm>
-            <a:off x="1024128" y="2468879"/>
+            <a:off x="1547316" y="2880360"/>
             <a:ext cx="2960522" cy="365760"/>
           </a:xfrm>
           <a:prstGeom prst="rect">
@@ -14398,52 +13290,13 @@
           <a:p>
             <a:pPr algn="l"/>
             <a:r>
-              <a:rPr sz="1350" b="1" i="0">
+              <a:rPr sz="1350" b="1" i="0" dirty="0">
                 <a:solidFill>
                   <a:srgbClr val="2DD4BF"/>
                 </a:solidFill>
                 <a:latin typeface="Segoe UI"/>
               </a:rPr>
               <a:t>Hierarchical chunking</a:t>
-            </a:r>
-          </a:p>
-        </p:txBody>
-      </p:sp>
-      <p:sp>
-        <p:nvSpPr>
-          <p:cNvPr id="15" name="TextBox 14"/>
-          <p:cNvSpPr txBox="1"/>
-          <p:nvPr/>
-        </p:nvSpPr>
-        <p:spPr>
-          <a:xfrm>
-            <a:off x="1024128" y="2880360"/>
-            <a:ext cx="2960522" cy="777240"/>
-          </a:xfrm>
-          <a:prstGeom prst="rect">
-            <a:avLst/>
-          </a:prstGeom>
-          <a:noFill/>
-        </p:spPr>
-        <p:txBody>
-          <a:bodyPr wrap="square" lIns="0" tIns="0" rIns="0" bIns="0" anchor="t">
-            <a:spAutoFit/>
-          </a:bodyPr>
-          <a:lstStyle/>
-          <a:p>
-            <a:pPr algn="l">
-              <a:lnSpc>
-                <a:spcPct val="120000"/>
-              </a:lnSpc>
-            </a:pPr>
-            <a:r>
-              <a:rPr sz="1050" b="0" i="0">
-                <a:solidFill>
-                  <a:srgbClr val="9FB3C8"/>
-                </a:solidFill>
-                <a:latin typeface="Segoe UI"/>
-              </a:rPr>
-              <a:t>store small chunks AND whole sections — detail questions and overview questions both work</a:t>
             </a:r>
           </a:p>
         </p:txBody>
@@ -14504,7 +13357,7 @@
         </p:nvSpPr>
         <p:spPr>
           <a:xfrm>
-            <a:off x="4615586" y="2468879"/>
+            <a:off x="5045354" y="2880360"/>
             <a:ext cx="2960522" cy="365760"/>
           </a:xfrm>
           <a:prstGeom prst="rect">
@@ -14520,52 +13373,13 @@
           <a:p>
             <a:pPr algn="l"/>
             <a:r>
-              <a:rPr sz="1350" b="1" i="0">
+              <a:rPr sz="1350" b="1" i="0" dirty="0">
                 <a:solidFill>
                   <a:srgbClr val="2DD4BF"/>
                 </a:solidFill>
                 <a:latin typeface="Segoe UI"/>
               </a:rPr>
               <a:t>Context-aware chunking</a:t>
-            </a:r>
-          </a:p>
-        </p:txBody>
-      </p:sp>
-      <p:sp>
-        <p:nvSpPr>
-          <p:cNvPr id="18" name="TextBox 17"/>
-          <p:cNvSpPr txBox="1"/>
-          <p:nvPr/>
-        </p:nvSpPr>
-        <p:spPr>
-          <a:xfrm>
-            <a:off x="4615586" y="2880360"/>
-            <a:ext cx="2960522" cy="777240"/>
-          </a:xfrm>
-          <a:prstGeom prst="rect">
-            <a:avLst/>
-          </a:prstGeom>
-          <a:noFill/>
-        </p:spPr>
-        <p:txBody>
-          <a:bodyPr wrap="square" lIns="0" tIns="0" rIns="0" bIns="0" anchor="t">
-            <a:spAutoFit/>
-          </a:bodyPr>
-          <a:lstStyle/>
-          <a:p>
-            <a:pPr algn="l">
-              <a:lnSpc>
-                <a:spcPct val="120000"/>
-              </a:lnSpc>
-            </a:pPr>
-            <a:r>
-              <a:rPr sz="1050" b="0" i="0">
-                <a:solidFill>
-                  <a:srgbClr val="9FB3C8"/>
-                </a:solidFill>
-                <a:latin typeface="Segoe UI"/>
-              </a:rPr>
-              <a:t>cut at natural boundaries — headings, clauses — not blindly every N words</a:t>
             </a:r>
           </a:p>
         </p:txBody>
@@ -14626,7 +13440,7 @@
         </p:nvSpPr>
         <p:spPr>
           <a:xfrm>
-            <a:off x="8207044" y="2468879"/>
+            <a:off x="9097877" y="2893557"/>
             <a:ext cx="2960522" cy="365760"/>
           </a:xfrm>
           <a:prstGeom prst="rect">
@@ -14642,52 +13456,13 @@
           <a:p>
             <a:pPr algn="l"/>
             <a:r>
-              <a:rPr sz="1350" b="1" i="0">
+              <a:rPr sz="1350" b="1" i="0" dirty="0">
                 <a:solidFill>
                   <a:srgbClr val="2DD4BF"/>
                 </a:solidFill>
                 <a:latin typeface="Segoe UI"/>
               </a:rPr>
               <a:t>Hybrid search</a:t>
-            </a:r>
-          </a:p>
-        </p:txBody>
-      </p:sp>
-      <p:sp>
-        <p:nvSpPr>
-          <p:cNvPr id="21" name="TextBox 20"/>
-          <p:cNvSpPr txBox="1"/>
-          <p:nvPr/>
-        </p:nvSpPr>
-        <p:spPr>
-          <a:xfrm>
-            <a:off x="8207044" y="2880360"/>
-            <a:ext cx="2960522" cy="777240"/>
-          </a:xfrm>
-          <a:prstGeom prst="rect">
-            <a:avLst/>
-          </a:prstGeom>
-          <a:noFill/>
-        </p:spPr>
-        <p:txBody>
-          <a:bodyPr wrap="square" lIns="0" tIns="0" rIns="0" bIns="0" anchor="t">
-            <a:spAutoFit/>
-          </a:bodyPr>
-          <a:lstStyle/>
-          <a:p>
-            <a:pPr algn="l">
-              <a:lnSpc>
-                <a:spcPct val="120000"/>
-              </a:lnSpc>
-            </a:pPr>
-            <a:r>
-              <a:rPr sz="1050" b="0" i="0">
-                <a:solidFill>
-                  <a:srgbClr val="9FB3C8"/>
-                </a:solidFill>
-                <a:latin typeface="Segoe UI"/>
-              </a:rPr>
-              <a:t>keyword + meaning search together; each catches what the other misses</a:t>
             </a:r>
           </a:p>
         </p:txBody>
@@ -14748,7 +13523,7 @@
         </p:nvSpPr>
         <p:spPr>
           <a:xfrm>
-            <a:off x="1024128" y="4114800"/>
+            <a:off x="2042223" y="4480560"/>
             <a:ext cx="2960522" cy="365760"/>
           </a:xfrm>
           <a:prstGeom prst="rect">
@@ -14764,52 +13539,13 @@
           <a:p>
             <a:pPr algn="l"/>
             <a:r>
-              <a:rPr sz="1350" b="1" i="0">
+              <a:rPr sz="1350" b="1" i="0" dirty="0">
                 <a:solidFill>
                   <a:srgbClr val="2DD4BF"/>
                 </a:solidFill>
                 <a:latin typeface="Segoe UI"/>
               </a:rPr>
               <a:t>Reranking</a:t>
-            </a:r>
-          </a:p>
-        </p:txBody>
-      </p:sp>
-      <p:sp>
-        <p:nvSpPr>
-          <p:cNvPr id="24" name="TextBox 23"/>
-          <p:cNvSpPr txBox="1"/>
-          <p:nvPr/>
-        </p:nvSpPr>
-        <p:spPr>
-          <a:xfrm>
-            <a:off x="1024128" y="4526279"/>
-            <a:ext cx="2960522" cy="777240"/>
-          </a:xfrm>
-          <a:prstGeom prst="rect">
-            <a:avLst/>
-          </a:prstGeom>
-          <a:noFill/>
-        </p:spPr>
-        <p:txBody>
-          <a:bodyPr wrap="square" lIns="0" tIns="0" rIns="0" bIns="0" anchor="t">
-            <a:spAutoFit/>
-          </a:bodyPr>
-          <a:lstStyle/>
-          <a:p>
-            <a:pPr algn="l">
-              <a:lnSpc>
-                <a:spcPct val="120000"/>
-              </a:lnSpc>
-            </a:pPr>
-            <a:r>
-              <a:rPr sz="1050" b="0" i="0">
-                <a:solidFill>
-                  <a:srgbClr val="9FB3C8"/>
-                </a:solidFill>
-                <a:latin typeface="Segoe UI"/>
-              </a:rPr>
-              <a:t>a second, more careful pass re-orders the top chunks before the prompt</a:t>
             </a:r>
           </a:p>
         </p:txBody>
@@ -14870,7 +13606,7 @@
         </p:nvSpPr>
         <p:spPr>
           <a:xfrm>
-            <a:off x="4615586" y="4114800"/>
+            <a:off x="5145938" y="4480560"/>
             <a:ext cx="2960522" cy="365760"/>
           </a:xfrm>
           <a:prstGeom prst="rect">
@@ -14886,52 +13622,13 @@
           <a:p>
             <a:pPr algn="l"/>
             <a:r>
-              <a:rPr sz="1350" b="1" i="0">
+              <a:rPr sz="1350" b="1" i="0" dirty="0">
                 <a:solidFill>
                   <a:srgbClr val="2DD4BF"/>
                 </a:solidFill>
                 <a:latin typeface="Segoe UI"/>
               </a:rPr>
               <a:t>Conversation memory</a:t>
-            </a:r>
-          </a:p>
-        </p:txBody>
-      </p:sp>
-      <p:sp>
-        <p:nvSpPr>
-          <p:cNvPr id="27" name="TextBox 26"/>
-          <p:cNvSpPr txBox="1"/>
-          <p:nvPr/>
-        </p:nvSpPr>
-        <p:spPr>
-          <a:xfrm>
-            <a:off x="4615586" y="4526279"/>
-            <a:ext cx="2960522" cy="777240"/>
-          </a:xfrm>
-          <a:prstGeom prst="rect">
-            <a:avLst/>
-          </a:prstGeom>
-          <a:noFill/>
-        </p:spPr>
-        <p:txBody>
-          <a:bodyPr wrap="square" lIns="0" tIns="0" rIns="0" bIns="0" anchor="t">
-            <a:spAutoFit/>
-          </a:bodyPr>
-          <a:lstStyle/>
-          <a:p>
-            <a:pPr algn="l">
-              <a:lnSpc>
-                <a:spcPct val="120000"/>
-              </a:lnSpc>
-            </a:pPr>
-            <a:r>
-              <a:rPr sz="1050" b="0" i="0">
-                <a:solidFill>
-                  <a:srgbClr val="9FB3C8"/>
-                </a:solidFill>
-                <a:latin typeface="Segoe UI"/>
-              </a:rPr>
-              <a:t>“what about postgrads?” only works with the chat so far — rewrite it into a full question</a:t>
             </a:r>
           </a:p>
         </p:txBody>
@@ -14992,7 +13689,7 @@
         </p:nvSpPr>
         <p:spPr>
           <a:xfrm>
-            <a:off x="8207044" y="4114800"/>
+            <a:off x="9231173" y="4480559"/>
             <a:ext cx="2960522" cy="365760"/>
           </a:xfrm>
           <a:prstGeom prst="rect">
@@ -15008,87 +13705,13 @@
           <a:p>
             <a:pPr algn="l"/>
             <a:r>
-              <a:rPr sz="1350" b="1" i="0">
+              <a:rPr sz="1350" b="1" i="0" dirty="0">
                 <a:solidFill>
                   <a:srgbClr val="2DD4BF"/>
                 </a:solidFill>
                 <a:latin typeface="Segoe UI"/>
               </a:rPr>
               <a:t>Verification</a:t>
-            </a:r>
-          </a:p>
-        </p:txBody>
-      </p:sp>
-      <p:sp>
-        <p:nvSpPr>
-          <p:cNvPr id="30" name="TextBox 29"/>
-          <p:cNvSpPr txBox="1"/>
-          <p:nvPr/>
-        </p:nvSpPr>
-        <p:spPr>
-          <a:xfrm>
-            <a:off x="8207044" y="4526279"/>
-            <a:ext cx="2960522" cy="777240"/>
-          </a:xfrm>
-          <a:prstGeom prst="rect">
-            <a:avLst/>
-          </a:prstGeom>
-          <a:noFill/>
-        </p:spPr>
-        <p:txBody>
-          <a:bodyPr wrap="square" lIns="0" tIns="0" rIns="0" bIns="0" anchor="t">
-            <a:spAutoFit/>
-          </a:bodyPr>
-          <a:lstStyle/>
-          <a:p>
-            <a:pPr algn="l">
-              <a:lnSpc>
-                <a:spcPct val="120000"/>
-              </a:lnSpc>
-            </a:pPr>
-            <a:r>
-              <a:rPr sz="1050" b="0" i="0">
-                <a:solidFill>
-                  <a:srgbClr val="9FB3C8"/>
-                </a:solidFill>
-                <a:latin typeface="Segoe UI"/>
-              </a:rPr>
-              <a:t>check every claim against the sources before showing it — if support is missing, say “I don't know”</a:t>
-            </a:r>
-          </a:p>
-        </p:txBody>
-      </p:sp>
-      <p:sp>
-        <p:nvSpPr>
-          <p:cNvPr id="31" name="TextBox 30"/>
-          <p:cNvSpPr txBox="1"/>
-          <p:nvPr/>
-        </p:nvSpPr>
-        <p:spPr>
-          <a:xfrm>
-            <a:off x="822960" y="5806440"/>
-            <a:ext cx="10607040" cy="411480"/>
-          </a:xfrm>
-          <a:prstGeom prst="rect">
-            <a:avLst/>
-          </a:prstGeom>
-          <a:noFill/>
-        </p:spPr>
-        <p:txBody>
-          <a:bodyPr wrap="square" lIns="0" tIns="0" rIns="0" bIns="0" anchor="t">
-            <a:spAutoFit/>
-          </a:bodyPr>
-          <a:lstStyle/>
-          <a:p>
-            <a:pPr algn="ctr"/>
-            <a:r>
-              <a:rPr sz="1250" b="0" i="1">
-                <a:solidFill>
-                  <a:srgbClr val="F5B342"/>
-                </a:solidFill>
-                <a:latin typeface="Segoe UI"/>
-              </a:rPr>
-              <a:t>Every one of these earned its place the same way everything today did: a real failure demanded it.</a:t>
             </a:r>
           </a:p>
         </p:txBody>
@@ -15933,7 +14556,7 @@
           <a:p>
             <a:pPr algn="ctr"/>
             <a:r>
-              <a:rPr sz="1350" b="0" i="1">
+              <a:rPr sz="1350" b="0" i="1" dirty="0">
                 <a:solidFill>
                   <a:srgbClr val="F5B342"/>
                 </a:solidFill>
@@ -16691,7 +15314,7 @@
               </a:lnSpc>
             </a:pPr>
             <a:r>
-              <a:rPr sz="1100" b="0" i="0">
+              <a:rPr sz="1100" b="0" i="0" dirty="0">
                 <a:solidFill>
                   <a:srgbClr val="FFFFFF"/>
                 </a:solidFill>
@@ -18489,7 +17112,7 @@
         </p:nvSpPr>
         <p:spPr>
           <a:xfrm>
-            <a:off x="0" y="0"/>
+            <a:off x="305" y="0"/>
             <a:ext cx="12191695" cy="6858000"/>
           </a:xfrm>
           <a:prstGeom prst="rect">
@@ -19162,8 +17785,8 @@
         </p:nvSpPr>
         <p:spPr>
           <a:xfrm>
-            <a:off x="8083296" y="2103120"/>
-            <a:ext cx="3209544" cy="960120"/>
+            <a:off x="8083296" y="2487127"/>
+            <a:ext cx="3209544" cy="192104"/>
           </a:xfrm>
           <a:prstGeom prst="rect">
             <a:avLst/>
@@ -19182,14 +17805,13 @@
               </a:lnSpc>
             </a:pPr>
             <a:r>
-              <a:rPr sz="1250" b="1" i="0">
+              <a:rPr sz="1250" b="1" i="0" dirty="0">
                 <a:solidFill>
                   <a:srgbClr val="FFFFFF"/>
                 </a:solidFill>
                 <a:latin typeface="Segoe UI"/>
               </a:rPr>
-              <a:t>OpenAI API
-the model behind ChatGPT</a:t>
+              <a:t>OpenAI API</a:t>
             </a:r>
           </a:p>
         </p:txBody>
@@ -19307,7 +17929,7 @@
         </p:nvSpPr>
         <p:spPr>
           <a:xfrm>
-            <a:off x="3017520" y="3703320"/>
+            <a:off x="3017520" y="4315709"/>
             <a:ext cx="6126480" cy="1051560"/>
           </a:xfrm>
           <a:prstGeom prst="roundRect">
@@ -19355,7 +17977,7 @@
         </p:nvSpPr>
         <p:spPr>
           <a:xfrm>
-            <a:off x="3246120" y="3840480"/>
+            <a:off x="3246120" y="4452869"/>
             <a:ext cx="5669280" cy="365760"/>
           </a:xfrm>
           <a:prstGeom prst="rect">
@@ -19390,7 +18012,7 @@
         </p:nvSpPr>
         <p:spPr>
           <a:xfrm>
-            <a:off x="3246120" y="4206240"/>
+            <a:off x="3246120" y="4818629"/>
             <a:ext cx="5669280" cy="502920"/>
           </a:xfrm>
           <a:prstGeom prst="rect">
@@ -19429,224 +18051,6 @@
                 <a:latin typeface="Consolas"/>
               </a:rPr>
               <a:t>→  one big string</a:t>
-            </a:r>
-          </a:p>
-        </p:txBody>
-      </p:sp>
-      <p:sp>
-        <p:nvSpPr>
-          <p:cNvPr id="26" name="Rounded Rectangle 25"/>
-          <p:cNvSpPr/>
-          <p:nvPr/>
-        </p:nvSpPr>
-        <p:spPr>
-          <a:xfrm>
-            <a:off x="822960" y="5029200"/>
-            <a:ext cx="6492240" cy="777240"/>
-          </a:xfrm>
-          <a:prstGeom prst="roundRect">
-            <a:avLst>
-              <a:gd name="adj" fmla="val 6000"/>
-            </a:avLst>
-          </a:prstGeom>
-          <a:solidFill>
-            <a:srgbClr val="142847"/>
-          </a:solidFill>
-          <a:ln w="12700">
-            <a:solidFill>
-              <a:srgbClr val="2DD4BF"/>
-            </a:solidFill>
-          </a:ln>
-        </p:spPr>
-        <p:style>
-          <a:lnRef idx="1">
-            <a:schemeClr val="accent1"/>
-          </a:lnRef>
-          <a:fillRef idx="3">
-            <a:schemeClr val="accent1"/>
-          </a:fillRef>
-          <a:effectRef idx="2">
-            <a:schemeClr val="accent1"/>
-          </a:effectRef>
-          <a:fontRef idx="minor">
-            <a:schemeClr val="lt1"/>
-          </a:fontRef>
-        </p:style>
-        <p:txBody>
-          <a:bodyPr rtlCol="0" anchor="ctr"/>
-          <a:lstStyle/>
-          <a:p>
-            <a:pPr algn="ctr"/>
-            <a:endParaRPr/>
-          </a:p>
-        </p:txBody>
-      </p:sp>
-      <p:sp>
-        <p:nvSpPr>
-          <p:cNvPr id="27" name="TextBox 26"/>
-          <p:cNvSpPr txBox="1"/>
-          <p:nvPr/>
-        </p:nvSpPr>
-        <p:spPr>
-          <a:xfrm>
-            <a:off x="1005840" y="5029200"/>
-            <a:ext cx="6126479" cy="777240"/>
-          </a:xfrm>
-          <a:prstGeom prst="rect">
-            <a:avLst/>
-          </a:prstGeom>
-          <a:noFill/>
-        </p:spPr>
-        <p:txBody>
-          <a:bodyPr wrap="square" lIns="0" tIns="0" rIns="0" bIns="0" anchor="ctr">
-            <a:spAutoFit/>
-          </a:bodyPr>
-          <a:lstStyle/>
-          <a:p>
-            <a:pPr>
-              <a:lnSpc>
-                <a:spcPct val="112000"/>
-              </a:lnSpc>
-            </a:pPr>
-            <a:r>
-              <a:rPr sz="1250" b="1">
-                <a:solidFill>
-                  <a:srgbClr val="2DD4BF"/>
-                </a:solidFill>
-                <a:latin typeface="Segoe UI"/>
-              </a:rPr>
-              <a:t>API</a:t>
-            </a:r>
-            <a:r>
-              <a:rPr sz="1050">
-                <a:solidFill>
-                  <a:srgbClr val="9FB3C8"/>
-                </a:solidFill>
-                <a:latin typeface="Segoe UI"/>
-              </a:rPr>
-              <a:t>  —  a doorway for programs: our code sends text over the internet, the model's reply comes back. ChatGPT is the product — OpenAI is the company and the API.</a:t>
-            </a:r>
-          </a:p>
-        </p:txBody>
-      </p:sp>
-      <p:sp>
-        <p:nvSpPr>
-          <p:cNvPr id="28" name="Rounded Rectangle 27"/>
-          <p:cNvSpPr/>
-          <p:nvPr/>
-        </p:nvSpPr>
-        <p:spPr>
-          <a:xfrm>
-            <a:off x="7543800" y="5029200"/>
-            <a:ext cx="3840480" cy="777240"/>
-          </a:xfrm>
-          <a:prstGeom prst="roundRect">
-            <a:avLst>
-              <a:gd name="adj" fmla="val 6000"/>
-            </a:avLst>
-          </a:prstGeom>
-          <a:solidFill>
-            <a:srgbClr val="142847"/>
-          </a:solidFill>
-          <a:ln w="12700">
-            <a:solidFill>
-              <a:srgbClr val="253B5E"/>
-            </a:solidFill>
-          </a:ln>
-        </p:spPr>
-        <p:style>
-          <a:lnRef idx="1">
-            <a:schemeClr val="accent1"/>
-          </a:lnRef>
-          <a:fillRef idx="3">
-            <a:schemeClr val="accent1"/>
-          </a:fillRef>
-          <a:effectRef idx="2">
-            <a:schemeClr val="accent1"/>
-          </a:effectRef>
-          <a:fontRef idx="minor">
-            <a:schemeClr val="lt1"/>
-          </a:fontRef>
-        </p:style>
-        <p:txBody>
-          <a:bodyPr rtlCol="0" anchor="ctr"/>
-          <a:lstStyle/>
-          <a:p>
-            <a:pPr algn="ctr"/>
-            <a:endParaRPr/>
-          </a:p>
-        </p:txBody>
-      </p:sp>
-      <p:sp>
-        <p:nvSpPr>
-          <p:cNvPr id="29" name="TextBox 28"/>
-          <p:cNvSpPr txBox="1"/>
-          <p:nvPr/>
-        </p:nvSpPr>
-        <p:spPr>
-          <a:xfrm>
-            <a:off x="7772400" y="5029200"/>
-            <a:ext cx="3383280" cy="777240"/>
-          </a:xfrm>
-          <a:prstGeom prst="rect">
-            <a:avLst/>
-          </a:prstGeom>
-          <a:noFill/>
-        </p:spPr>
-        <p:txBody>
-          <a:bodyPr wrap="square" lIns="0" tIns="0" rIns="0" bIns="0" anchor="ctr">
-            <a:spAutoFit/>
-          </a:bodyPr>
-          <a:lstStyle/>
-          <a:p>
-            <a:pPr algn="l">
-              <a:lnSpc>
-                <a:spcPct val="120000"/>
-              </a:lnSpc>
-            </a:pPr>
-            <a:r>
-              <a:rPr sz="1050" b="0" i="1">
-                <a:solidFill>
-                  <a:srgbClr val="9FB3C8"/>
-                </a:solidFill>
-                <a:latin typeface="Segoe UI"/>
-              </a:rPr>
-              <a:t>Local option: run a free model on your own machine (e.g. Ollama). Same story either way.</a:t>
-            </a:r>
-          </a:p>
-        </p:txBody>
-      </p:sp>
-      <p:sp>
-        <p:nvSpPr>
-          <p:cNvPr id="30" name="TextBox 29"/>
-          <p:cNvSpPr txBox="1"/>
-          <p:nvPr/>
-        </p:nvSpPr>
-        <p:spPr>
-          <a:xfrm>
-            <a:off x="822960" y="5989320"/>
-            <a:ext cx="10607040" cy="365760"/>
-          </a:xfrm>
-          <a:prstGeom prst="rect">
-            <a:avLst/>
-          </a:prstGeom>
-          <a:noFill/>
-        </p:spPr>
-        <p:txBody>
-          <a:bodyPr wrap="square" lIns="0" tIns="0" rIns="0" bIns="0" anchor="t">
-            <a:spAutoFit/>
-          </a:bodyPr>
-          <a:lstStyle/>
-          <a:p>
-            <a:pPr algn="l"/>
-            <a:r>
-              <a:rPr sz="1200" b="0" i="1">
-                <a:solidFill>
-                  <a:srgbClr val="2DD4BF"/>
-                </a:solidFill>
-                <a:latin typeface="Segoe UI"/>
-              </a:rPr>
-              <a:t>For the rest of the talk: we use the OpenAI API.</a:t>
             </a:r>
           </a:p>
         </p:txBody>
@@ -20421,125 +18825,6 @@
       </p:sp>
       <p:sp>
         <p:nvSpPr>
-          <p:cNvPr id="18" name="Rounded Rectangle 17"/>
-          <p:cNvSpPr/>
-          <p:nvPr/>
-        </p:nvSpPr>
-        <p:spPr>
-          <a:xfrm>
-            <a:off x="7406640" y="4023360"/>
-            <a:ext cx="3977639" cy="1691640"/>
-          </a:xfrm>
-          <a:prstGeom prst="roundRect">
-            <a:avLst>
-              <a:gd name="adj" fmla="val 6000"/>
-            </a:avLst>
-          </a:prstGeom>
-          <a:solidFill>
-            <a:srgbClr val="142847"/>
-          </a:solidFill>
-          <a:ln w="12700">
-            <a:solidFill>
-              <a:srgbClr val="253B5E"/>
-            </a:solidFill>
-          </a:ln>
-        </p:spPr>
-        <p:style>
-          <a:lnRef idx="1">
-            <a:schemeClr val="accent1"/>
-          </a:lnRef>
-          <a:fillRef idx="3">
-            <a:schemeClr val="accent1"/>
-          </a:fillRef>
-          <a:effectRef idx="2">
-            <a:schemeClr val="accent1"/>
-          </a:effectRef>
-          <a:fontRef idx="minor">
-            <a:schemeClr val="lt1"/>
-          </a:fontRef>
-        </p:style>
-        <p:txBody>
-          <a:bodyPr rtlCol="0" anchor="ctr"/>
-          <a:lstStyle/>
-          <a:p>
-            <a:pPr algn="ctr"/>
-            <a:endParaRPr/>
-          </a:p>
-        </p:txBody>
-      </p:sp>
-      <p:sp>
-        <p:nvSpPr>
-          <p:cNvPr id="19" name="TextBox 18"/>
-          <p:cNvSpPr txBox="1"/>
-          <p:nvPr/>
-        </p:nvSpPr>
-        <p:spPr>
-          <a:xfrm>
-            <a:off x="7635240" y="4206240"/>
-            <a:ext cx="3520440" cy="1371600"/>
-          </a:xfrm>
-          <a:prstGeom prst="rect">
-            <a:avLst/>
-          </a:prstGeom>
-          <a:noFill/>
-        </p:spPr>
-        <p:txBody>
-          <a:bodyPr wrap="square" lIns="0" tIns="0" rIns="0" bIns="0" anchor="t">
-            <a:spAutoFit/>
-          </a:bodyPr>
-          <a:lstStyle/>
-          <a:p>
-            <a:pPr algn="l">
-              <a:lnSpc>
-                <a:spcPct val="135000"/>
-              </a:lnSpc>
-            </a:pPr>
-            <a:r>
-              <a:rPr sz="1150" b="0" i="0">
-                <a:solidFill>
-                  <a:srgbClr val="FFFFFF"/>
-                </a:solidFill>
-                <a:latin typeface="Segoe UI"/>
-              </a:rPr>
-              <a:t>No memory of Sydney Met.</a:t>
-            </a:r>
-          </a:p>
-          <a:p>
-            <a:pPr algn="l">
-              <a:lnSpc>
-                <a:spcPct val="135000"/>
-              </a:lnSpc>
-            </a:pPr>
-            <a:r>
-              <a:rPr sz="1150" b="0" i="0">
-                <a:solidFill>
-                  <a:srgbClr val="FFFFFF"/>
-                </a:solidFill>
-                <a:latin typeface="Segoe UI"/>
-              </a:rPr>
-              <a:t>No hidden database.</a:t>
-            </a:r>
-          </a:p>
-          <a:p>
-            <a:pPr algn="l">
-              <a:lnSpc>
-                <a:spcPct val="125000"/>
-              </a:lnSpc>
-            </a:pPr>
-            <a:r>
-              <a:rPr sz="1150" b="0" i="0">
-                <a:solidFill>
-                  <a:srgbClr val="9FB3C8"/>
-                </a:solidFill>
-                <a:latin typeface="Segoe UI"/>
-              </a:rPr>
-              <a:t>If the right fact is not in the prompt, the model can only guess.</a:t>
-            </a:r>
-          </a:p>
-        </p:txBody>
-      </p:sp>
-      <p:sp>
-        <p:nvSpPr>
           <p:cNvPr id="20" name="TextBox 19"/>
           <p:cNvSpPr txBox="1"/>
           <p:nvPr/>
@@ -21409,8 +19694,8 @@
         </p:nvSpPr>
         <p:spPr>
           <a:xfrm>
-            <a:off x="8897112" y="2331720"/>
-            <a:ext cx="2185415" cy="914400"/>
+            <a:off x="8897112" y="2692868"/>
+            <a:ext cx="2185415" cy="192104"/>
           </a:xfrm>
           <a:prstGeom prst="rect">
             <a:avLst/>
@@ -21429,14 +19714,20 @@
               </a:lnSpc>
             </a:pPr>
             <a:r>
-              <a:rPr sz="1250" b="1" i="0">
+              <a:rPr lang="en-AU" sz="1250" b="1" i="0" dirty="0">
                 <a:solidFill>
                   <a:srgbClr val="FFFFFF"/>
                 </a:solidFill>
                 <a:latin typeface="Segoe UI"/>
               </a:rPr>
-              <a:t>The model</a:t>
-            </a:r>
+              <a:t>OpenAI API</a:t>
+            </a:r>
+            <a:endParaRPr sz="1250" b="1" i="0" dirty="0">
+              <a:solidFill>
+                <a:srgbClr val="FFFFFF"/>
+              </a:solidFill>
+              <a:latin typeface="Segoe UI"/>
+            </a:endParaRPr>
           </a:p>
         </p:txBody>
       </p:sp>
@@ -21604,198 +19895,6 @@
       </p:sp>
       <p:sp>
         <p:nvSpPr>
-          <p:cNvPr id="27" name="Rounded Rectangle 26"/>
-          <p:cNvSpPr/>
-          <p:nvPr/>
-        </p:nvSpPr>
-        <p:spPr>
-          <a:xfrm>
-            <a:off x="822960" y="4251960"/>
-            <a:ext cx="5166360" cy="868680"/>
-          </a:xfrm>
-          <a:prstGeom prst="roundRect">
-            <a:avLst>
-              <a:gd name="adj" fmla="val 6000"/>
-            </a:avLst>
-          </a:prstGeom>
-          <a:solidFill>
-            <a:srgbClr val="142847"/>
-          </a:solidFill>
-          <a:ln w="12700">
-            <a:solidFill>
-              <a:srgbClr val="2DD4BF"/>
-            </a:solidFill>
-          </a:ln>
-        </p:spPr>
-        <p:style>
-          <a:lnRef idx="1">
-            <a:schemeClr val="accent1"/>
-          </a:lnRef>
-          <a:fillRef idx="3">
-            <a:schemeClr val="accent1"/>
-          </a:fillRef>
-          <a:effectRef idx="2">
-            <a:schemeClr val="accent1"/>
-          </a:effectRef>
-          <a:fontRef idx="minor">
-            <a:schemeClr val="lt1"/>
-          </a:fontRef>
-        </p:style>
-        <p:txBody>
-          <a:bodyPr rtlCol="0" anchor="ctr"/>
-          <a:lstStyle/>
-          <a:p>
-            <a:pPr algn="ctr"/>
-            <a:endParaRPr/>
-          </a:p>
-        </p:txBody>
-      </p:sp>
-      <p:sp>
-        <p:nvSpPr>
-          <p:cNvPr id="28" name="TextBox 27"/>
-          <p:cNvSpPr txBox="1"/>
-          <p:nvPr/>
-        </p:nvSpPr>
-        <p:spPr>
-          <a:xfrm>
-            <a:off x="1005840" y="4251960"/>
-            <a:ext cx="4800600" cy="868680"/>
-          </a:xfrm>
-          <a:prstGeom prst="rect">
-            <a:avLst/>
-          </a:prstGeom>
-          <a:noFill/>
-        </p:spPr>
-        <p:txBody>
-          <a:bodyPr wrap="square" lIns="0" tIns="0" rIns="0" bIns="0" anchor="ctr">
-            <a:spAutoFit/>
-          </a:bodyPr>
-          <a:lstStyle/>
-          <a:p>
-            <a:pPr>
-              <a:lnSpc>
-                <a:spcPct val="112000"/>
-              </a:lnSpc>
-            </a:pPr>
-            <a:r>
-              <a:rPr sz="1250" b="1">
-                <a:solidFill>
-                  <a:srgbClr val="2DD4BF"/>
-                </a:solidFill>
-                <a:latin typeface="Segoe UI"/>
-              </a:rPr>
-              <a:t>Deterministic</a:t>
-            </a:r>
-            <a:r>
-              <a:rPr sz="1050">
-                <a:solidFill>
-                  <a:srgbClr val="9FB3C8"/>
-                </a:solidFill>
-                <a:latin typeface="Segoe UI"/>
-              </a:rPr>
-              <a:t>  —  same input → same output, every time. Testable, predictable, debuggable.</a:t>
-            </a:r>
-          </a:p>
-        </p:txBody>
-      </p:sp>
-      <p:sp>
-        <p:nvSpPr>
-          <p:cNvPr id="29" name="Rounded Rectangle 28"/>
-          <p:cNvSpPr/>
-          <p:nvPr/>
-        </p:nvSpPr>
-        <p:spPr>
-          <a:xfrm>
-            <a:off x="6217920" y="4251960"/>
-            <a:ext cx="5166360" cy="868680"/>
-          </a:xfrm>
-          <a:prstGeom prst="roundRect">
-            <a:avLst>
-              <a:gd name="adj" fmla="val 6000"/>
-            </a:avLst>
-          </a:prstGeom>
-          <a:solidFill>
-            <a:srgbClr val="142847"/>
-          </a:solidFill>
-          <a:ln w="12700">
-            <a:solidFill>
-              <a:srgbClr val="2DD4BF"/>
-            </a:solidFill>
-          </a:ln>
-        </p:spPr>
-        <p:style>
-          <a:lnRef idx="1">
-            <a:schemeClr val="accent1"/>
-          </a:lnRef>
-          <a:fillRef idx="3">
-            <a:schemeClr val="accent1"/>
-          </a:fillRef>
-          <a:effectRef idx="2">
-            <a:schemeClr val="accent1"/>
-          </a:effectRef>
-          <a:fontRef idx="minor">
-            <a:schemeClr val="lt1"/>
-          </a:fontRef>
-        </p:style>
-        <p:txBody>
-          <a:bodyPr rtlCol="0" anchor="ctr"/>
-          <a:lstStyle/>
-          <a:p>
-            <a:pPr algn="ctr"/>
-            <a:endParaRPr/>
-          </a:p>
-        </p:txBody>
-      </p:sp>
-      <p:sp>
-        <p:nvSpPr>
-          <p:cNvPr id="30" name="TextBox 29"/>
-          <p:cNvSpPr txBox="1"/>
-          <p:nvPr/>
-        </p:nvSpPr>
-        <p:spPr>
-          <a:xfrm>
-            <a:off x="6400800" y="4251960"/>
-            <a:ext cx="4800600" cy="868680"/>
-          </a:xfrm>
-          <a:prstGeom prst="rect">
-            <a:avLst/>
-          </a:prstGeom>
-          <a:noFill/>
-        </p:spPr>
-        <p:txBody>
-          <a:bodyPr wrap="square" lIns="0" tIns="0" rIns="0" bIns="0" anchor="ctr">
-            <a:spAutoFit/>
-          </a:bodyPr>
-          <a:lstStyle/>
-          <a:p>
-            <a:pPr>
-              <a:lnSpc>
-                <a:spcPct val="112000"/>
-              </a:lnSpc>
-            </a:pPr>
-            <a:r>
-              <a:rPr sz="1250" b="1">
-                <a:solidFill>
-                  <a:srgbClr val="2DD4BF"/>
-                </a:solidFill>
-                <a:latin typeface="Segoe UI"/>
-              </a:rPr>
-              <a:t>Non-deterministic</a:t>
-            </a:r>
-            <a:r>
-              <a:rPr sz="1050">
-                <a:solidFill>
-                  <a:srgbClr val="9FB3C8"/>
-                </a:solidFill>
-                <a:latin typeface="Segoe UI"/>
-              </a:rPr>
-              <a:t>  —  same input → the output may vary. Ask twice, get two wordings.</a:t>
-            </a:r>
-          </a:p>
-        </p:txBody>
-      </p:sp>
-      <p:sp>
-        <p:nvSpPr>
           <p:cNvPr id="31" name="TextBox 30"/>
           <p:cNvSpPr txBox="1"/>
           <p:nvPr/>
@@ -21825,41 +19924,6 @@
                 <a:latin typeface="Segoe UI"/>
               </a:rPr>
               <a:t>An “AI system” is mostly NOT AI — one AI box, surrounded by ordinary software.</a:t>
-            </a:r>
-          </a:p>
-        </p:txBody>
-      </p:sp>
-      <p:sp>
-        <p:nvSpPr>
-          <p:cNvPr id="32" name="TextBox 31"/>
-          <p:cNvSpPr txBox="1"/>
-          <p:nvPr/>
-        </p:nvSpPr>
-        <p:spPr>
-          <a:xfrm>
-            <a:off x="822960" y="5897880"/>
-            <a:ext cx="10607040" cy="365760"/>
-          </a:xfrm>
-          <a:prstGeom prst="rect">
-            <a:avLst/>
-          </a:prstGeom>
-          <a:noFill/>
-        </p:spPr>
-        <p:txBody>
-          <a:bodyPr wrap="square" lIns="0" tIns="0" rIns="0" bIns="0" anchor="t">
-            <a:spAutoFit/>
-          </a:bodyPr>
-          <a:lstStyle/>
-          <a:p>
-            <a:pPr algn="l"/>
-            <a:r>
-              <a:rPr sz="1200" b="0" i="1">
-                <a:solidFill>
-                  <a:srgbClr val="9FB3C8"/>
-                </a:solidFill>
-                <a:latin typeface="Segoe UI"/>
-              </a:rPr>
-              <a:t>Most of your work as a developer — and most of your value — lives in the deterministic part.</a:t>
             </a:r>
           </a:p>
         </p:txBody>
@@ -22957,8 +21021,8 @@
         </p:nvSpPr>
         <p:spPr>
           <a:xfrm>
-            <a:off x="1051560" y="5166360"/>
-            <a:ext cx="6263640" cy="960120"/>
+            <a:off x="1051560" y="5546745"/>
+            <a:ext cx="6263640" cy="199350"/>
           </a:xfrm>
           <a:prstGeom prst="rect">
             <a:avLst/>
@@ -22977,124 +21041,13 @@
               </a:lnSpc>
             </a:pPr>
             <a:r>
-              <a:rPr sz="1150" b="0" i="0">
+              <a:rPr sz="1150" b="0" i="0" dirty="0">
                 <a:solidFill>
                   <a:srgbClr val="FFFFFF"/>
                 </a:solidFill>
                 <a:latin typeface="Segoe UI"/>
               </a:rPr>
               <a:t>The model stays a MAGIC BOX today — how it works inside is a field of its own.</a:t>
-            </a:r>
-          </a:p>
-          <a:p>
-            <a:pPr algn="l"/>
-            <a:r>
-              <a:rPr sz="1150" b="0" i="0">
-                <a:solidFill>
-                  <a:srgbClr val="9FB3C8"/>
-                </a:solidFill>
-                <a:latin typeface="Segoe UI"/>
-              </a:rPr>
-              <a:t>Our job as chatbot developers: feed the box well — fast and accurate.</a:t>
-            </a:r>
-          </a:p>
-        </p:txBody>
-      </p:sp>
-      <p:sp>
-        <p:nvSpPr>
-          <p:cNvPr id="30" name="Rounded Rectangle 29"/>
-          <p:cNvSpPr/>
-          <p:nvPr/>
-        </p:nvSpPr>
-        <p:spPr>
-          <a:xfrm>
-            <a:off x="7772400" y="5166360"/>
-            <a:ext cx="3794760" cy="960120"/>
-          </a:xfrm>
-          <a:prstGeom prst="roundRect">
-            <a:avLst>
-              <a:gd name="adj" fmla="val 6000"/>
-            </a:avLst>
-          </a:prstGeom>
-          <a:solidFill>
-            <a:srgbClr val="142847"/>
-          </a:solidFill>
-          <a:ln w="12700">
-            <a:solidFill>
-              <a:srgbClr val="2DD4BF"/>
-            </a:solidFill>
-          </a:ln>
-        </p:spPr>
-        <p:style>
-          <a:lnRef idx="1">
-            <a:schemeClr val="accent1"/>
-          </a:lnRef>
-          <a:fillRef idx="3">
-            <a:schemeClr val="accent1"/>
-          </a:fillRef>
-          <a:effectRef idx="2">
-            <a:schemeClr val="accent1"/>
-          </a:effectRef>
-          <a:fontRef idx="minor">
-            <a:schemeClr val="lt1"/>
-          </a:fontRef>
-        </p:style>
-        <p:txBody>
-          <a:bodyPr rtlCol="0" anchor="ctr"/>
-          <a:lstStyle/>
-          <a:p>
-            <a:pPr algn="ctr"/>
-            <a:endParaRPr/>
-          </a:p>
-        </p:txBody>
-      </p:sp>
-      <p:sp>
-        <p:nvSpPr>
-          <p:cNvPr id="31" name="TextBox 30"/>
-          <p:cNvSpPr txBox="1"/>
-          <p:nvPr/>
-        </p:nvSpPr>
-        <p:spPr>
-          <a:xfrm>
-            <a:off x="8001000" y="5166360"/>
-            <a:ext cx="3337560" cy="960120"/>
-          </a:xfrm>
-          <a:prstGeom prst="rect">
-            <a:avLst/>
-          </a:prstGeom>
-          <a:noFill/>
-        </p:spPr>
-        <p:txBody>
-          <a:bodyPr wrap="square" lIns="0" tIns="0" rIns="0" bIns="0" anchor="ctr">
-            <a:spAutoFit/>
-          </a:bodyPr>
-          <a:lstStyle/>
-          <a:p>
-            <a:pPr algn="l">
-              <a:lnSpc>
-                <a:spcPct val="125000"/>
-              </a:lnSpc>
-            </a:pPr>
-            <a:r>
-              <a:rPr sz="1300" b="1" i="0">
-                <a:solidFill>
-                  <a:srgbClr val="2DD4BF"/>
-                </a:solidFill>
-                <a:latin typeface="Segoe UI"/>
-              </a:rPr>
-              <a:t>So: send LESS.</a:t>
-            </a:r>
-          </a:p>
-          <a:p>
-            <a:pPr algn="l"/>
-            <a:r>
-              <a:rPr sz="1200" b="0" i="0">
-                <a:solidFill>
-                  <a:srgbClr val="FFFFFF"/>
-                </a:solidFill>
-                <a:latin typeface="Segoe UI"/>
-              </a:rPr>
-              <a:t>But which part?  →  Phase 3</a:t>
             </a:r>
           </a:p>
         </p:txBody>
@@ -23729,7 +21682,7 @@
               </a:lnSpc>
             </a:pPr>
             <a:r>
-              <a:rPr sz="1050" b="1" i="0">
+              <a:rPr sz="1050" b="1" i="0" dirty="0">
                 <a:solidFill>
                   <a:srgbClr val="FFFFFF"/>
                 </a:solidFill>
@@ -24105,8 +22058,8 @@
         </p:nvSpPr>
         <p:spPr>
           <a:xfrm>
-            <a:off x="8083296" y="2240280"/>
-            <a:ext cx="1412748" cy="914400"/>
+            <a:off x="8083296" y="2616784"/>
+            <a:ext cx="1412748" cy="161391"/>
           </a:xfrm>
           <a:prstGeom prst="rect">
             <a:avLst/>
@@ -24125,14 +22078,20 @@
               </a:lnSpc>
             </a:pPr>
             <a:r>
-              <a:rPr sz="1050" b="1" i="0">
+              <a:rPr lang="en-AU" sz="1050" b="1" i="0" dirty="0">
                 <a:solidFill>
                   <a:srgbClr val="FFFFFF"/>
                 </a:solidFill>
                 <a:latin typeface="Segoe UI"/>
               </a:rPr>
-              <a:t>model</a:t>
-            </a:r>
+              <a:t>OpenAI API</a:t>
+            </a:r>
+            <a:endParaRPr sz="1050" b="1" i="0" dirty="0">
+              <a:solidFill>
+                <a:srgbClr val="FFFFFF"/>
+              </a:solidFill>
+              <a:latin typeface="Segoe UI"/>
+            </a:endParaRPr>
           </a:p>
         </p:txBody>
       </p:sp>
@@ -24275,7 +22234,7 @@
         </p:nvSpPr>
         <p:spPr>
           <a:xfrm>
-            <a:off x="822960" y="3566160"/>
+            <a:off x="822960" y="4807724"/>
             <a:ext cx="6492240" cy="731520"/>
           </a:xfrm>
           <a:prstGeom prst="roundRect">
@@ -24323,7 +22282,7 @@
         </p:nvSpPr>
         <p:spPr>
           <a:xfrm>
-            <a:off x="1005840" y="3566160"/>
+            <a:off x="1005840" y="4807724"/>
             <a:ext cx="6126479" cy="731520"/>
           </a:xfrm>
           <a:prstGeom prst="rect">
@@ -24371,7 +22330,7 @@
         </p:nvSpPr>
         <p:spPr>
           <a:xfrm>
-            <a:off x="7543800" y="3566160"/>
+            <a:off x="7543800" y="4807724"/>
             <a:ext cx="3840480" cy="731520"/>
           </a:xfrm>
           <a:prstGeom prst="roundRect">
@@ -24419,7 +22378,7 @@
         </p:nvSpPr>
         <p:spPr>
           <a:xfrm>
-            <a:off x="7772400" y="3566160"/>
+            <a:off x="7772400" y="4807724"/>
             <a:ext cx="3383280" cy="731520"/>
           </a:xfrm>
           <a:prstGeom prst="rect">
@@ -24442,128 +22401,6 @@
                 <a:latin typeface="Segoe UI"/>
               </a:rPr>
               <a:t>200 pages  →  2 pages per question</a:t>
-            </a:r>
-          </a:p>
-        </p:txBody>
-      </p:sp>
-      <p:sp>
-        <p:nvSpPr>
-          <p:cNvPr id="34" name="Rounded Rectangle 33"/>
-          <p:cNvSpPr/>
-          <p:nvPr/>
-        </p:nvSpPr>
-        <p:spPr>
-          <a:xfrm>
-            <a:off x="822960" y="4617720"/>
-            <a:ext cx="10561320" cy="1325880"/>
-          </a:xfrm>
-          <a:prstGeom prst="roundRect">
-            <a:avLst>
-              <a:gd name="adj" fmla="val 6000"/>
-            </a:avLst>
-          </a:prstGeom>
-          <a:solidFill>
-            <a:srgbClr val="142847"/>
-          </a:solidFill>
-          <a:ln w="12700">
-            <a:solidFill>
-              <a:srgbClr val="F5B342"/>
-            </a:solidFill>
-          </a:ln>
-        </p:spPr>
-        <p:style>
-          <a:lnRef idx="1">
-            <a:schemeClr val="accent1"/>
-          </a:lnRef>
-          <a:fillRef idx="3">
-            <a:schemeClr val="accent1"/>
-          </a:fillRef>
-          <a:effectRef idx="2">
-            <a:schemeClr val="accent1"/>
-          </a:effectRef>
-          <a:fontRef idx="minor">
-            <a:schemeClr val="lt1"/>
-          </a:fontRef>
-        </p:style>
-        <p:txBody>
-          <a:bodyPr rtlCol="0" anchor="ctr"/>
-          <a:lstStyle/>
-          <a:p>
-            <a:pPr algn="ctr"/>
-            <a:endParaRPr/>
-          </a:p>
-        </p:txBody>
-      </p:sp>
-      <p:sp>
-        <p:nvSpPr>
-          <p:cNvPr id="35" name="TextBox 34"/>
-          <p:cNvSpPr txBox="1"/>
-          <p:nvPr/>
-        </p:nvSpPr>
-        <p:spPr>
-          <a:xfrm>
-            <a:off x="1097280" y="4773168"/>
-            <a:ext cx="10058400" cy="365760"/>
-          </a:xfrm>
-          <a:prstGeom prst="rect">
-            <a:avLst/>
-          </a:prstGeom>
-          <a:noFill/>
-        </p:spPr>
-        <p:txBody>
-          <a:bodyPr wrap="square" lIns="0" tIns="0" rIns="0" bIns="0" anchor="t">
-            <a:spAutoFit/>
-          </a:bodyPr>
-          <a:lstStyle/>
-          <a:p>
-            <a:pPr algn="l"/>
-            <a:r>
-              <a:rPr sz="1400" b="1" i="0">
-                <a:solidFill>
-                  <a:srgbClr val="F5B342"/>
-                </a:solidFill>
-                <a:latin typeface="Segoe UI"/>
-              </a:rPr>
-              <a:t>This choosing step is YOUR craft</a:t>
-            </a:r>
-          </a:p>
-        </p:txBody>
-      </p:sp>
-      <p:sp>
-        <p:nvSpPr>
-          <p:cNvPr id="36" name="TextBox 35"/>
-          <p:cNvSpPr txBox="1"/>
-          <p:nvPr/>
-        </p:nvSpPr>
-        <p:spPr>
-          <a:xfrm>
-            <a:off x="1097280" y="5166360"/>
-            <a:ext cx="10058400" cy="685800"/>
-          </a:xfrm>
-          <a:prstGeom prst="rect">
-            <a:avLst/>
-          </a:prstGeom>
-          <a:noFill/>
-        </p:spPr>
-        <p:txBody>
-          <a:bodyPr wrap="square" lIns="0" tIns="0" rIns="0" bIns="0" anchor="t">
-            <a:spAutoFit/>
-          </a:bodyPr>
-          <a:lstStyle/>
-          <a:p>
-            <a:pPr algn="l">
-              <a:lnSpc>
-                <a:spcPct val="125000"/>
-              </a:lnSpc>
-            </a:pPr>
-            <a:r>
-              <a:rPr sz="1150" b="0" i="0">
-                <a:solidFill>
-                  <a:srgbClr val="FFFFFF"/>
-                </a:solidFill>
-                <a:latin typeface="Segoe UI"/>
-              </a:rPr>
-              <a:t>How the model answers from text — not our department, we take it as given. Choosing WHAT it reads — that is exactly where a chatbot developer shows their skill. Most of what made my real bot better happened right here.</a:t>
             </a:r>
           </a:p>
         </p:txBody>
@@ -25714,153 +23551,6 @@
       </p:sp>
       <p:sp>
         <p:nvSpPr>
-          <p:cNvPr id="30" name="Rounded Rectangle 29"/>
-          <p:cNvSpPr/>
-          <p:nvPr/>
-        </p:nvSpPr>
-        <p:spPr>
-          <a:xfrm>
-            <a:off x="9006840" y="1737360"/>
-            <a:ext cx="2606040" cy="2743200"/>
-          </a:xfrm>
-          <a:prstGeom prst="roundRect">
-            <a:avLst>
-              <a:gd name="adj" fmla="val 6000"/>
-            </a:avLst>
-          </a:prstGeom>
-          <a:solidFill>
-            <a:srgbClr val="142847"/>
-          </a:solidFill>
-          <a:ln w="12700">
-            <a:solidFill>
-              <a:srgbClr val="253B5E"/>
-            </a:solidFill>
-          </a:ln>
-        </p:spPr>
-        <p:style>
-          <a:lnRef idx="1">
-            <a:schemeClr val="accent1"/>
-          </a:lnRef>
-          <a:fillRef idx="3">
-            <a:schemeClr val="accent1"/>
-          </a:fillRef>
-          <a:effectRef idx="2">
-            <a:schemeClr val="accent1"/>
-          </a:effectRef>
-          <a:fontRef idx="minor">
-            <a:schemeClr val="lt1"/>
-          </a:fontRef>
-        </p:style>
-        <p:txBody>
-          <a:bodyPr rtlCol="0" anchor="ctr"/>
-          <a:lstStyle/>
-          <a:p>
-            <a:pPr algn="ctr"/>
-            <a:endParaRPr/>
-          </a:p>
-        </p:txBody>
-      </p:sp>
-      <p:sp>
-        <p:nvSpPr>
-          <p:cNvPr id="31" name="TextBox 30"/>
-          <p:cNvSpPr txBox="1"/>
-          <p:nvPr/>
-        </p:nvSpPr>
-        <p:spPr>
-          <a:xfrm>
-            <a:off x="9235440" y="1737360"/>
-            <a:ext cx="2148840" cy="2743200"/>
-          </a:xfrm>
-          <a:prstGeom prst="rect">
-            <a:avLst/>
-          </a:prstGeom>
-          <a:noFill/>
-        </p:spPr>
-        <p:txBody>
-          <a:bodyPr wrap="square" lIns="0" tIns="0" rIns="0" bIns="0" anchor="ctr">
-            <a:spAutoFit/>
-          </a:bodyPr>
-          <a:lstStyle/>
-          <a:p>
-            <a:pPr algn="l">
-              <a:lnSpc>
-                <a:spcPct val="140000"/>
-              </a:lnSpc>
-            </a:pPr>
-            <a:r>
-              <a:rPr sz="1200" b="1" i="0">
-                <a:solidFill>
-                  <a:srgbClr val="FFFFFF"/>
-                </a:solidFill>
-                <a:latin typeface="Segoe UI"/>
-              </a:rPr>
-              <a:t>Count shared words.</a:t>
-            </a:r>
-          </a:p>
-          <a:p>
-            <a:pPr algn="l">
-              <a:lnSpc>
-                <a:spcPct val="140000"/>
-              </a:lnSpc>
-            </a:pPr>
-            <a:r>
-              <a:rPr sz="1200" b="0" i="0">
-                <a:solidFill>
-                  <a:srgbClr val="FFFFFF"/>
-                </a:solidFill>
-                <a:latin typeface="Segoe UI"/>
-              </a:rPr>
-              <a:t>Rare words weigh extra.</a:t>
-            </a:r>
-          </a:p>
-          <a:p>
-            <a:pPr algn="l">
-              <a:lnSpc>
-                <a:spcPct val="155000"/>
-              </a:lnSpc>
-            </a:pPr>
-            <a:r>
-              <a:rPr sz="1200" b="0" i="0">
-                <a:solidFill>
-                  <a:srgbClr val="FFFFFF"/>
-                </a:solidFill>
-                <a:latin typeface="Segoe UI"/>
-              </a:rPr>
-              <a:t>Highest score wins.</a:t>
-            </a:r>
-          </a:p>
-          <a:p>
-            <a:pPr algn="l">
-              <a:lnSpc>
-                <a:spcPct val="135000"/>
-              </a:lnSpc>
-            </a:pPr>
-            <a:r>
-              <a:rPr sz="1100" b="0" i="1">
-                <a:solidFill>
-                  <a:srgbClr val="9FB3C8"/>
-                </a:solidFill>
-                <a:latin typeface="Segoe UI"/>
-              </a:rPr>
-              <a:t>How search engines worked for decades.</a:t>
-            </a:r>
-          </a:p>
-          <a:p>
-            <a:pPr algn="l"/>
-            <a:r>
-              <a:rPr sz="1250" b="1" i="0">
-                <a:solidFill>
-                  <a:srgbClr val="2DD4BF"/>
-                </a:solidFill>
-                <a:latin typeface="Segoe UI"/>
-              </a:rPr>
-              <a:t>No AI anywhere.</a:t>
-            </a:r>
-          </a:p>
-        </p:txBody>
-      </p:sp>
-      <p:sp>
-        <p:nvSpPr>
           <p:cNvPr id="32" name="Rounded Rectangle 31"/>
           <p:cNvSpPr/>
           <p:nvPr/>
@@ -25951,41 +23641,6 @@
                 <a:latin typeface="Segoe UI"/>
               </a:rPr>
               <a:t>  —  score each chunk by word overlap with the question, rare words counting extra.</a:t>
-            </a:r>
-          </a:p>
-        </p:txBody>
-      </p:sp>
-      <p:sp>
-        <p:nvSpPr>
-          <p:cNvPr id="34" name="TextBox 33"/>
-          <p:cNvSpPr txBox="1"/>
-          <p:nvPr/>
-        </p:nvSpPr>
-        <p:spPr>
-          <a:xfrm>
-            <a:off x="822960" y="5943600"/>
-            <a:ext cx="10607040" cy="365760"/>
-          </a:xfrm>
-          <a:prstGeom prst="rect">
-            <a:avLst/>
-          </a:prstGeom>
-          <a:noFill/>
-        </p:spPr>
-        <p:txBody>
-          <a:bodyPr wrap="square" lIns="0" tIns="0" rIns="0" bIns="0" anchor="t">
-            <a:spAutoFit/>
-          </a:bodyPr>
-          <a:lstStyle/>
-          <a:p>
-            <a:pPr algn="l"/>
-            <a:r>
-              <a:rPr sz="1300" b="0" i="1">
-                <a:solidFill>
-                  <a:srgbClr val="2DD4BF"/>
-                </a:solidFill>
-                <a:latin typeface="Segoe UI"/>
-              </a:rPr>
-              <a:t>Wire this in — and the bot suddenly works surprisingly well. Fast, cheap… and usually right.</a:t>
             </a:r>
           </a:p>
         </p:txBody>

--- a/lecture/deck.pptx
+++ b/lecture/deck.pptx
@@ -312,7 +312,16 @@
           <a:lstStyle/>
           <a:p>
             <a:r>
-              <a:t>[~1 min] Good afternoon everyone, thank you for having me. I'm Arif — Analyst Programmer at Wimmera CMA in regional Victoria. My day job is building software and mapping systems, and over the last year I have built several AI tools for my organisation. One of them is a chatbot that answers questions from official documents, and it is in real daily use. Today I will show you how such a chatbot really works — by building one from zero, in five phases. Each phase will hit a real problem, and the problem will force the next idea. I can't show my workplace's internal system, so we will use a stand-in: MetMate, an invented chatbot for Sydney Met itself, answering student questions about enrolment, the library, and exams. Same ideas, public-friendly example. One promise before we start: concepts over terminology. Every technical term will arrive only when the story needs it, and I will define it in plain English when it does. Nothing to memorise up front — and everything can be looked up later.</a:t>
+              <a:rPr lang="en-US" sz="1200" b="0" i="0" kern="1200" dirty="0">
+                <a:solidFill>
+                  <a:schemeClr val="tx1"/>
+                </a:solidFill>
+                <a:effectLst/>
+                <a:latin typeface="+mn-lt"/>
+                <a:ea typeface="+mn-ea"/>
+                <a:cs typeface="+mn-cs"/>
+              </a:rPr>
+              <a:t>Terminologies</a:t>
             </a:r>
           </a:p>
         </p:txBody>
@@ -382,7 +391,16 @@
           <a:lstStyle/>
           <a:p>
             <a:r>
-              <a:t>[~3.5 min] Here is the failure that ends phase three — and it is a real one; my bot did exactly this, and this example is its public stand-in. Week three of term. A student asks: 'Can I access the library 24/7?' Count the words. The Exam Period Appendix contains 'library', 'access', AND '24/7' — score three, top result. The general rule — the one that actually governs an ordinary week — says 'library opening hours 8am to 10pm on term days'. It shares one word. Score one. Left behind. So MetMate answers, fluently and confidently: 'Yes — the library is open 24/7.' Wrong. And notice the scary part: every single word of that answer came from a real official document. Word counting rewards the chunk that ECHOES the question — not the rule that APPLIES. There's a quieter failure hiding underneath too: a question about 'enrolment' scores ZERO against a chunk that says 'registration'. Synonyms are invisible to word counting. Both failures point the same way. Matching exact words — the technical name is LEXICAL matching — is not enough. We need to match MEANING — SEMANTIC matching. How on earth does a computer compute with meaning? That is phase four, and it is the heart of this lecture.</a:t>
+              <a:rPr dirty="0"/>
+              <a:t>[~3.5 min] Here is the failure that ends phase three — and it is a real one; my bot did exactly this, and this example is its public stand-in. Week three of term. A student asks: 'Can I access the library 24/7?' Count the words. The Exam Period Appendix contains 'library', 'access', AND '24/7' — score three, top result. The general rule — the one that actually governs an ordinary week — says 'library opening hours 8am to 10pm on term days'. It shares one word. Score one. Left behind. So </a:t>
+            </a:r>
+            <a:r>
+              <a:rPr dirty="0" err="1"/>
+              <a:t>MetMate</a:t>
+            </a:r>
+            <a:r>
+              <a:rPr dirty="0"/>
+              <a:t> answers, fluently and confidently: 'Yes — the library is open 24/7.' Wrong. And notice the scary part: every single word of that answer came from a real official document. Word counting rewards the chunk that ECHOES the question — not the rule that APPLIES. There's a quieter failure hiding underneath too: a question about 'enrolment' scores ZERO against a chunk that says 'registration'. Synonyms are invisible to word counting. Both failures point the same way. Matching exact words — the technical name is LEXICAL matching — is not enough. We need to match MEANING — SEMANTIC matching. How on earth does a computer compute with meaning? That is phase four, and it is the heart of this lecture.</a:t>
             </a:r>
           </a:p>
         </p:txBody>
@@ -452,6 +470,7 @@
           <a:lstStyle/>
           <a:p>
             <a:r>
+              <a:rPr dirty="0"/>
               <a:t>[~3 min] To match meaning, we need to be able to do MATH with words. Take three words from our university world: enrolment, registration, withdrawal. You and I know enrolment and registration are nearly the same thing, and withdrawal is roughly the opposite. The question is: how can a computer measure that? Here is the simple, almost silly idea: give every word a NUMBER. Enrolment: 5. Registration: 6. Withdrawal: minus 5. Now 'how similar?' becomes 'how close?' — plain subtraction. Five and six are one apart: close, similar. Five and minus five are ten apart: far, opposite. This idea — writing words as numbers so that close numbers mean similar meaning — is called an EMBEDDING. And I will say this directly: if you take only ONE thing home from this lecture, I would be very glad if it is this concept. Understand embeddings and half of the modern LLM world becomes accessible to you. But there's a problem with one number per word. Along comes the word 'pass'. Where does it go on this line? It's not similar to enrolment. It's not the opposite either. It's just… about something else. One number is not enough.</a:t>
             </a:r>
           </a:p>
@@ -964,8 +983,10 @@
           <a:lstStyle/>
           <a:p>
             <a:r>
-              <a:t>[~2 min] Phase one. The simplest possible way to talk to your documents — and it needs no code at all. Open ChatGPT, attach the student handbook PDF, type your question. Done. What happens under the hood? For text, you can imagine it very simply: the full text of the document and your question are glued together into ONE long piece of text, and the model reads all of it and writes an answer. That's the picture — one big string of text. Keep it in your head, because the whole lecture is about improving this one picture. Two small notes. First, today we care about text only — what happens with images or complex files is a story for another day. Second, and honestly: this works. If you are one person with one document, this is genuinely the right solution, and my honest advice is: just do this. The rest of this lecture exists because a university is not one person.</a:t>
-            </a:r>
+              <a:rPr lang="en-AU" dirty="0"/>
+              <a:t>Under the hood</a:t>
+            </a:r>
+            <a:endParaRPr dirty="0"/>
           </a:p>
         </p:txBody>
       </p:sp>
@@ -1034,8 +1055,10 @@
           <a:lstStyle/>
           <a:p>
             <a:r>
-              <a:t>[~2.5 min] So why can't Sydney Met just tell 30,000 students 'go upload the handbook to ChatGPT'? Three problems. One — ChatGPT is somebody else's product. We can't put ChatGPT itself on the university website; to offer that experience ourselves we would have to build our own ChatGPT-like product, which is a huge job. Two — the alternative is that every student needs their own paid subscription. Thousands of seats, just to ask about the handbook. Three — and this is the quiet killer — a real answer often needs several documents at once: the handbook, the library rules, the exam procedures. And these documents evolve; they change through the year. Expecting every student to re-upload the right, current pile of PDFs into every private chat, every time — that will simply never happen. Now our first technical term of the day. That pile of official documents the bot must answer from has a name: the Knowledge Base — the KB. And notice the teal box on the slide — every time you see a box like that today, it means a new term just entered our story, defined in plain English, ready to be looked up later. So here is what we actually want: ONE bot, OUR OWN, sitting on the university website, always reading the CURRENT documents. That means we build. Phase two.</a:t>
-            </a:r>
+              <a:rPr lang="en-AU" dirty="0"/>
+              <a:t>KB</a:t>
+            </a:r>
+            <a:endParaRPr dirty="0"/>
           </a:p>
         </p:txBody>
       </p:sp>
@@ -1104,8 +1127,10 @@
           <a:lstStyle/>
           <a:p>
             <a:r>
-              <a:t>[~2.5 min] Phase two: our own bot, the smallest one possible. Three pieces. A web page with a chat box — ordinary web development, many of you can build this already. A server behind it — ordinary backend code. And the model? We don't have our own model — but the maker of ChatGPT sells access to the machine behind it. That is the OpenAI API. A quick word on names, because it confuses everyone: ChatGPT is the product, the website you chat with. OpenAI is the company, and the API is how our program talks to their model directly. API — a doorway for programs: our server sends text over the internet, the model's reply comes back as text. No chat window involved. I should also say: you don't have to use a paid API at all. You can run a free model on your own machine — a popular tool for that is called Ollama — and everything in this lecture would work the same way. For a concrete picture, for the rest of the talk, let's say we use the OpenAI API. And what does our server actually send? Exactly the phase-one trick, just through pipes: one big string — every document in the KB, plus the student's question.</a:t>
-            </a:r>
+              <a:rPr lang="en-AU" dirty="0"/>
+              <a:t>OpenAI -&gt; ChatGPT</a:t>
+            </a:r>
+            <a:endParaRPr dirty="0"/>
           </a:p>
         </p:txBody>
       </p:sp>
@@ -1174,8 +1199,16 @@
           <a:lstStyle/>
           <a:p>
             <a:r>
-              <a:t>[~2.5 min] Let's make that string concrete, because this exact shape carries the rest of the lecture. You can imagine the model receives a text like this: the word 'Context', then the documents pasted in; the word 'Question', then the student's question; then one instruction — 'answer using only the context above'. Two terms arrive here. This whole message, everything we send, is called the PROMPT. And the reference material we paste in for the model to answer from is called the CONTEXT. Now the important realisation: this is ALL the model sees. It has no memory of Sydney Met, no hidden database, no idea our university exists. If the right fact is not somewhere in that prompt, the model can only guess. So the whole craft of a document chatbot comes down to one question: WHAT goes into this text? Hold that — it is the rest of the lecture.</a:t>
-            </a:r>
+              <a:rPr lang="en-AU" dirty="0"/>
+              <a:t>Prompt</a:t>
+            </a:r>
+          </a:p>
+          <a:p>
+            <a:r>
+              <a:rPr lang="en-AU" dirty="0"/>
+              <a:t>Context</a:t>
+            </a:r>
+            <a:endParaRPr dirty="0"/>
           </a:p>
         </p:txBody>
       </p:sp>
@@ -1244,8 +1277,10 @@
           <a:lstStyle/>
           <a:p>
             <a:r>
-              <a:t>[~3 min] Before we go further, pause and look at what we have — because there is an important observation here. Any 'AI system' you meet is not fully AI. The web page — ordinary code. The server — ordinary code. Gluing strings together — ordinary code. Exactly ONE box in this picture is AI: the model. There is a clean way to tell the two worlds apart — not by definition, but by behaviour. Ordinary code is DETERMINISTIC: same input, same output, every single time. You can test it, trust it, debug it — the skills you already have from software engineering apply directly. The model is NON-DETERMINISTIC: ask the exact same question twice and the wording of the answer may differ. So when you hear 'AI system', picture this slide: one non-deterministic box, surrounded by ordinary, deterministic software. And here is the part I want you to remember as future developers: most of the work — and most of the value you add — lives in the deterministic part. That is where we spend the rest of today.</a:t>
-            </a:r>
+              <a:rPr lang="en-AU"/>
+              <a:t>All docs</a:t>
+            </a:r>
+            <a:endParaRPr dirty="0"/>
           </a:p>
         </p:txBody>
       </p:sp>
@@ -1314,8 +1349,10 @@
           <a:lstStyle/>
           <a:p>
             <a:r>
-              <a:t>[~2.5 min] Now phase two breaks. A university KB is not one handbook — it's hundreds of PDFs. Say 300 PDFs, roughly two million words. And our design sends ALL of it, for EVERY question — even for 'what are the library hours?'. I can tell you from experience what happens, because my first real bot was built exactly this way: it took about a MINUTE to answer. Nobody sits in a chat window waiting a minute. And think about what we are doing — almost everything we send is completely irrelevant to the question being asked. One honest disclaimer before we fix it: we will NOT open up how the model itself works today. That is a deep field of its own, and for this lecture the model stays a very capable magic box. Our job — the chatbot developer's job — is to feed that box well: fast, and accurate. So the direction is obvious: send LESS. But which part? That question is phase three.</a:t>
-            </a:r>
+              <a:rPr lang="en-AU" dirty="0"/>
+              <a:t>OpenAI API – magic box</a:t>
+            </a:r>
+            <a:endParaRPr dirty="0"/>
           </a:p>
         </p:txBody>
       </p:sp>
@@ -1384,8 +1421,10 @@
           <a:lstStyle/>
           <a:p>
             <a:r>
-              <a:t>[~3 min] Here's the idea. For any single question, only a few paragraphs out of the whole KB actually matter. So — ahead of time — we cut every document into small pieces. New term: a CHUNK. A chunk is a small passage cut from a document, a few paragraphs, ideally about one topic. Then, when a question arrives, we pick the top five or ten chunks that look most relevant, and we build exactly the same prompt as before — same Context-Question shape — just with those few chunks as the context instead of everything. Two hundred pages become two pages, per question. And one framing I really want you to keep. How the model answers from the text we give it — that is not our department; we take it as given. But choosing WHAT it reads — that is precisely where you, the chatbot developer, show your skill. Answering like ChatGPT does is a giant AI problem; picking the right text is an engineering problem, and it is YOUR problem. Almost everything that made my real bot better over time happened in this choosing step.</a:t>
-            </a:r>
+              <a:rPr lang="en-AU" dirty="0"/>
+              <a:t>chunk</a:t>
+            </a:r>
+            <a:endParaRPr dirty="0"/>
           </a:p>
         </p:txBody>
       </p:sp>
@@ -1454,8 +1493,10 @@
           <a:lstStyle/>
           <a:p>
             <a:r>
-              <a:t>[~3.5 min] So how do we pick the right chunks? First question to ask: do we need AI for this? And the honest answer is NO — and I want you to see that concretely. Here is the KB as it is actually stored: a plain table of chunks. Nothing exotic. The question comes in: 'What are the library opening hours?' Now just count shared words. Chunk A — the library hours rule — shares three: library, opening, hours. Chunk B, about enrolment — zero. Chunk C, the exam appendix — one: library. Chunk A wins, and chunk A is genuinely the right passage. Add one refinement — rare words count extra, because 'library' says more than 'the' — and you have essentially rebuilt BM25, the scoring recipe search engines ran on for decades. This is how search worked before AI — and notice, it is still ordinary deterministic code: a word table and counting. Build this, wire it into our pipeline, and something surprising happens: the bot suddenly feels GOOD. Fast, cheap, and usually right. My real bot at this stage was already impressing people. Usually right. Remember that word — usually.</a:t>
-            </a:r>
+              <a:rPr lang="en-AU" dirty="0"/>
+              <a:t>BM25</a:t>
+            </a:r>
+            <a:endParaRPr dirty="0"/>
           </a:p>
         </p:txBody>
       </p:sp>
@@ -15944,89 +15985,6 @@
           </a:p>
         </p:txBody>
       </p:sp>
-      <p:sp>
-        <p:nvSpPr>
-          <p:cNvPr id="34" name="Rounded Rectangle 33"/>
-          <p:cNvSpPr/>
-          <p:nvPr/>
-        </p:nvSpPr>
-        <p:spPr>
-          <a:xfrm>
-            <a:off x="4160520" y="5623560"/>
-            <a:ext cx="7452360" cy="548640"/>
-          </a:xfrm>
-          <a:prstGeom prst="roundRect">
-            <a:avLst>
-              <a:gd name="adj" fmla="val 6000"/>
-            </a:avLst>
-          </a:prstGeom>
-          <a:solidFill>
-            <a:srgbClr val="142847"/>
-          </a:solidFill>
-          <a:ln w="12700">
-            <a:solidFill>
-              <a:srgbClr val="253B5E"/>
-            </a:solidFill>
-          </a:ln>
-        </p:spPr>
-        <p:style>
-          <a:lnRef idx="1">
-            <a:schemeClr val="accent1"/>
-          </a:lnRef>
-          <a:fillRef idx="3">
-            <a:schemeClr val="accent1"/>
-          </a:fillRef>
-          <a:effectRef idx="2">
-            <a:schemeClr val="accent1"/>
-          </a:effectRef>
-          <a:fontRef idx="minor">
-            <a:schemeClr val="lt1"/>
-          </a:fontRef>
-        </p:style>
-        <p:txBody>
-          <a:bodyPr rtlCol="0" anchor="ctr"/>
-          <a:lstStyle/>
-          <a:p>
-            <a:pPr algn="ctr"/>
-            <a:endParaRPr/>
-          </a:p>
-        </p:txBody>
-      </p:sp>
-      <p:sp>
-        <p:nvSpPr>
-          <p:cNvPr id="35" name="TextBox 34"/>
-          <p:cNvSpPr txBox="1"/>
-          <p:nvPr/>
-        </p:nvSpPr>
-        <p:spPr>
-          <a:xfrm>
-            <a:off x="4389120" y="5623560"/>
-            <a:ext cx="7040880" cy="548640"/>
-          </a:xfrm>
-          <a:prstGeom prst="rect">
-            <a:avLst/>
-          </a:prstGeom>
-          <a:noFill/>
-        </p:spPr>
-        <p:txBody>
-          <a:bodyPr wrap="square" lIns="0" tIns="0" rIns="0" bIns="0" anchor="ctr">
-            <a:spAutoFit/>
-          </a:bodyPr>
-          <a:lstStyle/>
-          <a:p>
-            <a:pPr algn="l"/>
-            <a:r>
-              <a:rPr sz="1100" b="0" i="1">
-                <a:solidFill>
-                  <a:srgbClr val="9FB3C8"/>
-                </a:solidFill>
-                <a:latin typeface="Segoe UI"/>
-              </a:rPr>
-              <a:t>Today: TEXT only. Images, audio, complex layouts — a story for another day.</a:t>
-            </a:r>
-          </a:p>
-        </p:txBody>
-      </p:sp>
     </p:spTree>
   </p:cSld>
   <p:clrMapOvr>
@@ -17474,7 +17432,7 @@
         </p:nvSpPr>
         <p:spPr>
           <a:xfrm>
-            <a:off x="822960" y="2103120"/>
+            <a:off x="896112" y="3086100"/>
             <a:ext cx="3355848" cy="960120"/>
           </a:xfrm>
           <a:prstGeom prst="roundRect">
@@ -17522,7 +17480,7 @@
         </p:nvSpPr>
         <p:spPr>
           <a:xfrm>
-            <a:off x="896112" y="2103120"/>
+            <a:off x="969264" y="3086100"/>
             <a:ext cx="3209544" cy="960120"/>
           </a:xfrm>
           <a:prstGeom prst="rect">
@@ -17542,7 +17500,7 @@
               </a:lnSpc>
             </a:pPr>
             <a:r>
-              <a:rPr sz="1250" b="1" i="0">
+              <a:rPr sz="1250" b="1" i="0" dirty="0">
                 <a:solidFill>
                   <a:srgbClr val="FFFFFF"/>
                 </a:solidFill>
@@ -17562,7 +17520,7 @@
         </p:nvSpPr>
         <p:spPr>
           <a:xfrm>
-            <a:off x="4197096" y="2500884"/>
+            <a:off x="4270248" y="3483864"/>
             <a:ext cx="201168" cy="164592"/>
           </a:xfrm>
           <a:prstGeom prst="rightArrow">
@@ -17606,7 +17564,7 @@
         </p:nvSpPr>
         <p:spPr>
           <a:xfrm>
-            <a:off x="4416552" y="2103120"/>
+            <a:off x="4489704" y="3086100"/>
             <a:ext cx="3355848" cy="960120"/>
           </a:xfrm>
           <a:prstGeom prst="roundRect">
@@ -17654,8 +17612,8 @@
         </p:nvSpPr>
         <p:spPr>
           <a:xfrm>
-            <a:off x="4489704" y="2103120"/>
-            <a:ext cx="3209544" cy="960120"/>
+            <a:off x="4562856" y="3470108"/>
+            <a:ext cx="3209544" cy="192104"/>
           </a:xfrm>
           <a:prstGeom prst="rect">
             <a:avLst/>
@@ -17674,14 +17632,29 @@
               </a:lnSpc>
             </a:pPr>
             <a:r>
-              <a:rPr sz="1250" b="1" i="0">
+              <a:rPr sz="1250" b="1" i="0" dirty="0">
                 <a:solidFill>
                   <a:srgbClr val="FFFFFF"/>
                 </a:solidFill>
                 <a:latin typeface="Segoe UI"/>
               </a:rPr>
-              <a:t>Our server</a:t>
-            </a:r>
+              <a:t>Our </a:t>
+            </a:r>
+            <a:r>
+              <a:rPr lang="en-AU" sz="1250" b="1" i="0" dirty="0">
+                <a:solidFill>
+                  <a:srgbClr val="FFFFFF"/>
+                </a:solidFill>
+                <a:latin typeface="Segoe UI"/>
+              </a:rPr>
+              <a:t>web application</a:t>
+            </a:r>
+            <a:endParaRPr sz="1250" b="1" i="0" dirty="0">
+              <a:solidFill>
+                <a:srgbClr val="FFFFFF"/>
+              </a:solidFill>
+              <a:latin typeface="Segoe UI"/>
+            </a:endParaRPr>
           </a:p>
         </p:txBody>
       </p:sp>
@@ -17693,7 +17666,7 @@
         </p:nvSpPr>
         <p:spPr>
           <a:xfrm>
-            <a:off x="7790688" y="2500884"/>
+            <a:off x="7863840" y="3483864"/>
             <a:ext cx="201168" cy="164592"/>
           </a:xfrm>
           <a:prstGeom prst="rightArrow">
@@ -17737,7 +17710,7 @@
         </p:nvSpPr>
         <p:spPr>
           <a:xfrm>
-            <a:off x="8010144" y="2103120"/>
+            <a:off x="8083296" y="3086100"/>
             <a:ext cx="3355848" cy="960120"/>
           </a:xfrm>
           <a:prstGeom prst="roundRect">
@@ -17785,7 +17758,7 @@
         </p:nvSpPr>
         <p:spPr>
           <a:xfrm>
-            <a:off x="8083296" y="2487127"/>
+            <a:off x="8156448" y="3470107"/>
             <a:ext cx="3209544" cy="192104"/>
           </a:xfrm>
           <a:prstGeom prst="rect">
@@ -17812,245 +17785,6 @@
                 <a:latin typeface="Segoe UI"/>
               </a:rPr>
               <a:t>OpenAI API</a:t>
-            </a:r>
-          </a:p>
-        </p:txBody>
-      </p:sp>
-      <p:sp>
-        <p:nvSpPr>
-          <p:cNvPr id="20" name="TextBox 19"/>
-          <p:cNvSpPr txBox="1"/>
-          <p:nvPr/>
-        </p:nvSpPr>
-        <p:spPr>
-          <a:xfrm>
-            <a:off x="822960" y="3200400"/>
-            <a:ext cx="3474720" cy="320040"/>
-          </a:xfrm>
-          <a:prstGeom prst="rect">
-            <a:avLst/>
-          </a:prstGeom>
-          <a:noFill/>
-        </p:spPr>
-        <p:txBody>
-          <a:bodyPr wrap="square" lIns="0" tIns="0" rIns="0" bIns="0" anchor="t">
-            <a:spAutoFit/>
-          </a:bodyPr>
-          <a:lstStyle/>
-          <a:p>
-            <a:pPr algn="ctr"/>
-            <a:r>
-              <a:rPr sz="1000" b="0" i="1">
-                <a:solidFill>
-                  <a:srgbClr val="9FB3C8"/>
-                </a:solidFill>
-                <a:latin typeface="Segoe UI"/>
-              </a:rPr>
-              <a:t>ordinary web dev</a:t>
-            </a:r>
-          </a:p>
-        </p:txBody>
-      </p:sp>
-      <p:sp>
-        <p:nvSpPr>
-          <p:cNvPr id="21" name="TextBox 20"/>
-          <p:cNvSpPr txBox="1"/>
-          <p:nvPr/>
-        </p:nvSpPr>
-        <p:spPr>
-          <a:xfrm>
-            <a:off x="4535424" y="3200400"/>
-            <a:ext cx="3474720" cy="320040"/>
-          </a:xfrm>
-          <a:prstGeom prst="rect">
-            <a:avLst/>
-          </a:prstGeom>
-          <a:noFill/>
-        </p:spPr>
-        <p:txBody>
-          <a:bodyPr wrap="square" lIns="0" tIns="0" rIns="0" bIns="0" anchor="t">
-            <a:spAutoFit/>
-          </a:bodyPr>
-          <a:lstStyle/>
-          <a:p>
-            <a:pPr algn="ctr"/>
-            <a:r>
-              <a:rPr sz="1000" b="0" i="1">
-                <a:solidFill>
-                  <a:srgbClr val="9FB3C8"/>
-                </a:solidFill>
-                <a:latin typeface="Segoe UI"/>
-              </a:rPr>
-              <a:t>ordinary backend</a:t>
-            </a:r>
-          </a:p>
-        </p:txBody>
-      </p:sp>
-      <p:sp>
-        <p:nvSpPr>
-          <p:cNvPr id="22" name="TextBox 21"/>
-          <p:cNvSpPr txBox="1"/>
-          <p:nvPr/>
-        </p:nvSpPr>
-        <p:spPr>
-          <a:xfrm>
-            <a:off x="8247888" y="3200400"/>
-            <a:ext cx="3200400" cy="320040"/>
-          </a:xfrm>
-          <a:prstGeom prst="rect">
-            <a:avLst/>
-          </a:prstGeom>
-          <a:noFill/>
-        </p:spPr>
-        <p:txBody>
-          <a:bodyPr wrap="square" lIns="0" tIns="0" rIns="0" bIns="0" anchor="t">
-            <a:spAutoFit/>
-          </a:bodyPr>
-          <a:lstStyle/>
-          <a:p>
-            <a:pPr algn="ctr"/>
-            <a:r>
-              <a:rPr sz="1000" b="0" i="1">
-                <a:solidFill>
-                  <a:srgbClr val="9FB3C8"/>
-                </a:solidFill>
-                <a:latin typeface="Segoe UI"/>
-              </a:rPr>
-              <a:t>their computers, our text</a:t>
-            </a:r>
-          </a:p>
-        </p:txBody>
-      </p:sp>
-      <p:sp>
-        <p:nvSpPr>
-          <p:cNvPr id="23" name="Rounded Rectangle 22"/>
-          <p:cNvSpPr/>
-          <p:nvPr/>
-        </p:nvSpPr>
-        <p:spPr>
-          <a:xfrm>
-            <a:off x="3017520" y="4315709"/>
-            <a:ext cx="6126480" cy="1051560"/>
-          </a:xfrm>
-          <a:prstGeom prst="roundRect">
-            <a:avLst>
-              <a:gd name="adj" fmla="val 6000"/>
-            </a:avLst>
-          </a:prstGeom>
-          <a:solidFill>
-            <a:srgbClr val="142847"/>
-          </a:solidFill>
-          <a:ln w="12700">
-            <a:solidFill>
-              <a:srgbClr val="F5B342"/>
-            </a:solidFill>
-          </a:ln>
-        </p:spPr>
-        <p:style>
-          <a:lnRef idx="1">
-            <a:schemeClr val="accent1"/>
-          </a:lnRef>
-          <a:fillRef idx="3">
-            <a:schemeClr val="accent1"/>
-          </a:fillRef>
-          <a:effectRef idx="2">
-            <a:schemeClr val="accent1"/>
-          </a:effectRef>
-          <a:fontRef idx="minor">
-            <a:schemeClr val="lt1"/>
-          </a:fontRef>
-        </p:style>
-        <p:txBody>
-          <a:bodyPr rtlCol="0" anchor="ctr"/>
-          <a:lstStyle/>
-          <a:p>
-            <a:pPr algn="ctr"/>
-            <a:endParaRPr/>
-          </a:p>
-        </p:txBody>
-      </p:sp>
-      <p:sp>
-        <p:nvSpPr>
-          <p:cNvPr id="24" name="TextBox 23"/>
-          <p:cNvSpPr txBox="1"/>
-          <p:nvPr/>
-        </p:nvSpPr>
-        <p:spPr>
-          <a:xfrm>
-            <a:off x="3246120" y="4452869"/>
-            <a:ext cx="5669280" cy="365760"/>
-          </a:xfrm>
-          <a:prstGeom prst="rect">
-            <a:avLst/>
-          </a:prstGeom>
-          <a:noFill/>
-        </p:spPr>
-        <p:txBody>
-          <a:bodyPr wrap="square" lIns="0" tIns="0" rIns="0" bIns="0" anchor="t">
-            <a:spAutoFit/>
-          </a:bodyPr>
-          <a:lstStyle/>
-          <a:p>
-            <a:pPr algn="l"/>
-            <a:r>
-              <a:rPr sz="1100" b="1" i="0">
-                <a:solidFill>
-                  <a:srgbClr val="F5B342"/>
-                </a:solidFill>
-                <a:latin typeface="Segoe UI"/>
-              </a:rPr>
-              <a:t>what our server sends — the phase-1 trick, through pipes:</a:t>
-            </a:r>
-          </a:p>
-        </p:txBody>
-      </p:sp>
-      <p:sp>
-        <p:nvSpPr>
-          <p:cNvPr id="25" name="TextBox 24"/>
-          <p:cNvSpPr txBox="1"/>
-          <p:nvPr/>
-        </p:nvSpPr>
-        <p:spPr>
-          <a:xfrm>
-            <a:off x="3246120" y="4818629"/>
-            <a:ext cx="5669280" cy="502920"/>
-          </a:xfrm>
-          <a:prstGeom prst="rect">
-            <a:avLst/>
-          </a:prstGeom>
-          <a:noFill/>
-        </p:spPr>
-        <p:txBody>
-          <a:bodyPr wrap="square" lIns="0" tIns="0" rIns="0" bIns="0" anchor="t">
-            <a:spAutoFit/>
-          </a:bodyPr>
-          <a:lstStyle/>
-          <a:p>
-            <a:pPr algn="l">
-              <a:lnSpc>
-                <a:spcPct val="120000"/>
-              </a:lnSpc>
-            </a:pPr>
-            <a:r>
-              <a:rPr sz="1200" b="0" i="0">
-                <a:solidFill>
-                  <a:srgbClr val="FFFFFF"/>
-                </a:solidFill>
-                <a:latin typeface="Consolas"/>
-              </a:rPr>
-              <a:t>every KB document  +  the student's question</a:t>
-            </a:r>
-          </a:p>
-          <a:p>
-            <a:pPr algn="l"/>
-            <a:r>
-              <a:rPr sz="1200" b="1" i="0">
-                <a:solidFill>
-                  <a:srgbClr val="2DD4BF"/>
-                </a:solidFill>
-                <a:latin typeface="Consolas"/>
-              </a:rPr>
-              <a:t>→  one big string</a:t>
             </a:r>
           </a:p>
         </p:txBody>
@@ -18639,7 +18373,7 @@
         </p:nvSpPr>
         <p:spPr>
           <a:xfrm>
-            <a:off x="7406640" y="1828800"/>
+            <a:off x="7490309" y="2783500"/>
             <a:ext cx="3977639" cy="914400"/>
           </a:xfrm>
           <a:prstGeom prst="roundRect">
@@ -18687,8 +18421,8 @@
         </p:nvSpPr>
         <p:spPr>
           <a:xfrm>
-            <a:off x="7589519" y="1828800"/>
-            <a:ext cx="3611879" cy="914400"/>
+            <a:off x="9219184" y="3141762"/>
+            <a:ext cx="3611879" cy="197875"/>
           </a:xfrm>
           <a:prstGeom prst="rect">
             <a:avLst/>
@@ -18707,7 +18441,7 @@
               </a:lnSpc>
             </a:pPr>
             <a:r>
-              <a:rPr sz="1250" b="1">
+              <a:rPr sz="1250" b="1" dirty="0">
                 <a:solidFill>
                   <a:srgbClr val="2DD4BF"/>
                 </a:solidFill>
@@ -18715,15 +18449,12 @@
               </a:rPr>
               <a:t>Prompt</a:t>
             </a:r>
-            <a:r>
-              <a:rPr sz="1050">
-                <a:solidFill>
-                  <a:srgbClr val="9FB3C8"/>
-                </a:solidFill>
-                <a:latin typeface="Segoe UI"/>
-              </a:rPr>
-              <a:t>  —  the full text we send to the model. This is literally everything it sees.</a:t>
-            </a:r>
+            <a:endParaRPr sz="1050" dirty="0">
+              <a:solidFill>
+                <a:srgbClr val="9FB3C8"/>
+              </a:solidFill>
+              <a:latin typeface="Segoe UI"/>
+            </a:endParaRPr>
           </a:p>
         </p:txBody>
       </p:sp>
@@ -18735,7 +18466,7 @@
         </p:nvSpPr>
         <p:spPr>
           <a:xfrm>
-            <a:off x="7406640" y="2926080"/>
+            <a:off x="7490309" y="3880780"/>
             <a:ext cx="3977639" cy="914400"/>
           </a:xfrm>
           <a:prstGeom prst="roundRect">
@@ -18783,8 +18514,8 @@
         </p:nvSpPr>
         <p:spPr>
           <a:xfrm>
-            <a:off x="7589519" y="2926080"/>
-            <a:ext cx="3611879" cy="914400"/>
+            <a:off x="9219184" y="4231309"/>
+            <a:ext cx="3611879" cy="197875"/>
           </a:xfrm>
           <a:prstGeom prst="rect">
             <a:avLst/>
@@ -18803,7 +18534,7 @@
               </a:lnSpc>
             </a:pPr>
             <a:r>
-              <a:rPr sz="1250" b="1">
+              <a:rPr sz="1250" b="1" dirty="0">
                 <a:solidFill>
                   <a:srgbClr val="2DD4BF"/>
                 </a:solidFill>
@@ -18811,15 +18542,12 @@
               </a:rPr>
               <a:t>Context</a:t>
             </a:r>
-            <a:r>
-              <a:rPr sz="1050">
-                <a:solidFill>
-                  <a:srgbClr val="9FB3C8"/>
-                </a:solidFill>
-                <a:latin typeface="Segoe UI"/>
-              </a:rPr>
-              <a:t>  —  the reference text we paste into the prompt, for the model to answer from.</a:t>
-            </a:r>
+            <a:endParaRPr sz="1050" dirty="0">
+              <a:solidFill>
+                <a:srgbClr val="9FB3C8"/>
+              </a:solidFill>
+              <a:latin typeface="Segoe UI"/>
+            </a:endParaRPr>
           </a:p>
         </p:txBody>
       </p:sp>
@@ -19801,7 +19529,7 @@
           <a:p>
             <a:pPr algn="ctr"/>
             <a:r>
-              <a:rPr sz="1200" b="1" i="0">
+              <a:rPr sz="1200" b="1" i="0" dirty="0">
                 <a:solidFill>
                   <a:srgbClr val="2DD4BF"/>
                 </a:solidFill>
@@ -20965,93 +20693,6 @@
           </a:p>
         </p:txBody>
       </p:sp>
-      <p:sp>
-        <p:nvSpPr>
-          <p:cNvPr id="28" name="Rounded Rectangle 27"/>
-          <p:cNvSpPr/>
-          <p:nvPr/>
-        </p:nvSpPr>
-        <p:spPr>
-          <a:xfrm>
-            <a:off x="822960" y="5166360"/>
-            <a:ext cx="6720840" cy="960120"/>
-          </a:xfrm>
-          <a:prstGeom prst="roundRect">
-            <a:avLst>
-              <a:gd name="adj" fmla="val 6000"/>
-            </a:avLst>
-          </a:prstGeom>
-          <a:solidFill>
-            <a:srgbClr val="142847"/>
-          </a:solidFill>
-          <a:ln w="12700">
-            <a:solidFill>
-              <a:srgbClr val="253B5E"/>
-            </a:solidFill>
-          </a:ln>
-        </p:spPr>
-        <p:style>
-          <a:lnRef idx="1">
-            <a:schemeClr val="accent1"/>
-          </a:lnRef>
-          <a:fillRef idx="3">
-            <a:schemeClr val="accent1"/>
-          </a:fillRef>
-          <a:effectRef idx="2">
-            <a:schemeClr val="accent1"/>
-          </a:effectRef>
-          <a:fontRef idx="minor">
-            <a:schemeClr val="lt1"/>
-          </a:fontRef>
-        </p:style>
-        <p:txBody>
-          <a:bodyPr rtlCol="0" anchor="ctr"/>
-          <a:lstStyle/>
-          <a:p>
-            <a:pPr algn="ctr"/>
-            <a:endParaRPr/>
-          </a:p>
-        </p:txBody>
-      </p:sp>
-      <p:sp>
-        <p:nvSpPr>
-          <p:cNvPr id="29" name="TextBox 28"/>
-          <p:cNvSpPr txBox="1"/>
-          <p:nvPr/>
-        </p:nvSpPr>
-        <p:spPr>
-          <a:xfrm>
-            <a:off x="1051560" y="5546745"/>
-            <a:ext cx="6263640" cy="199350"/>
-          </a:xfrm>
-          <a:prstGeom prst="rect">
-            <a:avLst/>
-          </a:prstGeom>
-          <a:noFill/>
-        </p:spPr>
-        <p:txBody>
-          <a:bodyPr wrap="square" lIns="0" tIns="0" rIns="0" bIns="0" anchor="ctr">
-            <a:spAutoFit/>
-          </a:bodyPr>
-          <a:lstStyle/>
-          <a:p>
-            <a:pPr algn="l">
-              <a:lnSpc>
-                <a:spcPct val="125000"/>
-              </a:lnSpc>
-            </a:pPr>
-            <a:r>
-              <a:rPr sz="1150" b="0" i="0" dirty="0">
-                <a:solidFill>
-                  <a:srgbClr val="FFFFFF"/>
-                </a:solidFill>
-                <a:latin typeface="Segoe UI"/>
-              </a:rPr>
-              <a:t>The model stays a MAGIC BOX today — how it works inside is a field of its own.</a:t>
-            </a:r>
-          </a:p>
-        </p:txBody>
-      </p:sp>
     </p:spTree>
   </p:cSld>
   <p:clrMapOvr>
@@ -22405,6 +22046,107 @@
           </a:p>
         </p:txBody>
       </p:sp>
+      <p:sp>
+        <p:nvSpPr>
+          <p:cNvPr id="38" name="Rounded Rectangle 31">
+            <a:extLst>
+              <a:ext uri="{FF2B5EF4-FFF2-40B4-BE49-F238E27FC236}">
+                <a16:creationId xmlns:a16="http://schemas.microsoft.com/office/drawing/2014/main" id="{E0230A7D-146A-4D31-5A00-2E3734E72C9D}"/>
+              </a:ext>
+            </a:extLst>
+          </p:cNvPr>
+          <p:cNvSpPr/>
+          <p:nvPr/>
+        </p:nvSpPr>
+        <p:spPr>
+          <a:xfrm>
+            <a:off x="4668105" y="3657600"/>
+            <a:ext cx="2253573" cy="731520"/>
+          </a:xfrm>
+          <a:prstGeom prst="roundRect">
+            <a:avLst>
+              <a:gd name="adj" fmla="val 6000"/>
+            </a:avLst>
+          </a:prstGeom>
+          <a:solidFill>
+            <a:srgbClr val="142847"/>
+          </a:solidFill>
+          <a:ln w="12700">
+            <a:solidFill>
+              <a:srgbClr val="253B5E"/>
+            </a:solidFill>
+          </a:ln>
+        </p:spPr>
+        <p:style>
+          <a:lnRef idx="1">
+            <a:schemeClr val="accent1"/>
+          </a:lnRef>
+          <a:fillRef idx="3">
+            <a:schemeClr val="accent1"/>
+          </a:fillRef>
+          <a:effectRef idx="2">
+            <a:schemeClr val="accent1"/>
+          </a:effectRef>
+          <a:fontRef idx="minor">
+            <a:schemeClr val="lt1"/>
+          </a:fontRef>
+        </p:style>
+        <p:txBody>
+          <a:bodyPr rtlCol="0" anchor="ctr"/>
+          <a:lstStyle/>
+          <a:p>
+            <a:pPr algn="ctr"/>
+            <a:endParaRPr/>
+          </a:p>
+        </p:txBody>
+      </p:sp>
+      <p:sp>
+        <p:nvSpPr>
+          <p:cNvPr id="40" name="TextBox 39">
+            <a:extLst>
+              <a:ext uri="{FF2B5EF4-FFF2-40B4-BE49-F238E27FC236}">
+                <a16:creationId xmlns:a16="http://schemas.microsoft.com/office/drawing/2014/main" id="{91F9C2E9-C4CF-1413-5C42-83102BEA364F}"/>
+              </a:ext>
+            </a:extLst>
+          </p:cNvPr>
+          <p:cNvSpPr txBox="1"/>
+          <p:nvPr/>
+        </p:nvSpPr>
+        <p:spPr>
+          <a:xfrm>
+            <a:off x="4896705" y="3927180"/>
+            <a:ext cx="3383280" cy="192360"/>
+          </a:xfrm>
+          <a:prstGeom prst="rect">
+            <a:avLst/>
+          </a:prstGeom>
+          <a:noFill/>
+        </p:spPr>
+        <p:txBody>
+          <a:bodyPr wrap="square" lIns="0" tIns="0" rIns="0" bIns="0" anchor="ctr">
+            <a:spAutoFit/>
+          </a:bodyPr>
+          <a:lstStyle/>
+          <a:p>
+            <a:pPr algn="l"/>
+            <a:r>
+              <a:rPr lang="en-AU" sz="1250" b="1" i="0" dirty="0">
+                <a:solidFill>
+                  <a:srgbClr val="2DD4BF"/>
+                </a:solidFill>
+                <a:latin typeface="Segoe UI"/>
+              </a:rPr>
+              <a:t>New terminology: chunk</a:t>
+            </a:r>
+            <a:endParaRPr sz="1250" b="1" i="0" dirty="0">
+              <a:solidFill>
+                <a:srgbClr val="2DD4BF"/>
+              </a:solidFill>
+              <a:latin typeface="Segoe UI"/>
+            </a:endParaRPr>
+          </a:p>
+        </p:txBody>
+      </p:sp>
     </p:spTree>
   </p:cSld>
   <p:clrMapOvr>
@@ -23558,7 +23300,7 @@
         <p:spPr>
           <a:xfrm>
             <a:off x="822960" y="5074920"/>
-            <a:ext cx="7955279" cy="685800"/>
+            <a:ext cx="2608397" cy="685800"/>
           </a:xfrm>
           <a:prstGeom prst="roundRect">
             <a:avLst>
@@ -23605,8 +23347,8 @@
         </p:nvSpPr>
         <p:spPr>
           <a:xfrm>
-            <a:off x="1005840" y="5074920"/>
-            <a:ext cx="7589519" cy="685800"/>
+            <a:off x="1005840" y="5318882"/>
+            <a:ext cx="2488471" cy="197875"/>
           </a:xfrm>
           <a:prstGeom prst="rect">
             <a:avLst/>
@@ -23625,7 +23367,7 @@
               </a:lnSpc>
             </a:pPr>
             <a:r>
-              <a:rPr sz="1250" b="1">
+              <a:rPr sz="1250" b="1" dirty="0">
                 <a:solidFill>
                   <a:srgbClr val="2DD4BF"/>
                 </a:solidFill>
@@ -23633,15 +23375,12 @@
               </a:rPr>
               <a:t>Keyword search (BM25)</a:t>
             </a:r>
-            <a:r>
-              <a:rPr sz="1050">
-                <a:solidFill>
-                  <a:srgbClr val="9FB3C8"/>
-                </a:solidFill>
-                <a:latin typeface="Segoe UI"/>
-              </a:rPr>
-              <a:t>  —  score each chunk by word overlap with the question, rare words counting extra.</a:t>
-            </a:r>
+            <a:endParaRPr sz="1050" dirty="0">
+              <a:solidFill>
+                <a:srgbClr val="9FB3C8"/>
+              </a:solidFill>
+              <a:latin typeface="Segoe UI"/>
+            </a:endParaRPr>
           </a:p>
         </p:txBody>
       </p:sp>

--- a/lecture/deck.pptx
+++ b/lecture/deck.pptx
@@ -12839,41 +12839,6 @@
       </p:sp>
       <p:sp>
         <p:nvSpPr>
-          <p:cNvPr id="12" name="TextBox 11"/>
-          <p:cNvSpPr txBox="1"/>
-          <p:nvPr/>
-        </p:nvSpPr>
-        <p:spPr>
-          <a:xfrm>
-            <a:off x="822960" y="1691640"/>
-            <a:ext cx="10607040" cy="365760"/>
-          </a:xfrm>
-          <a:prstGeom prst="rect">
-            <a:avLst/>
-          </a:prstGeom>
-          <a:noFill/>
-        </p:spPr>
-        <p:txBody>
-          <a:bodyPr wrap="square" lIns="0" tIns="0" rIns="0" bIns="0" anchor="t">
-            <a:spAutoFit/>
-          </a:bodyPr>
-          <a:lstStyle/>
-          <a:p>
-            <a:pPr algn="l"/>
-            <a:r>
-              <a:rPr sz="1350" b="0" i="1">
-                <a:solidFill>
-                  <a:srgbClr val="9FB3C8"/>
-                </a:solidFill>
-                <a:latin typeface="Segoe UI"/>
-              </a:rPr>
-              <a:t>The simplest possible start — no code at all.</a:t>
-            </a:r>
-          </a:p>
-        </p:txBody>
-      </p:sp>
-      <p:sp>
-        <p:nvSpPr>
           <p:cNvPr id="13" name="Rounded Rectangle 12"/>
           <p:cNvSpPr/>
           <p:nvPr/>
@@ -13059,8 +13024,8 @@
         </p:nvSpPr>
         <p:spPr>
           <a:xfrm>
-            <a:off x="1234440" y="2788920"/>
-            <a:ext cx="1645920" cy="384048"/>
+            <a:off x="1234440" y="2900152"/>
+            <a:ext cx="1645920" cy="161583"/>
           </a:xfrm>
           <a:prstGeom prst="rect">
             <a:avLst/>
@@ -13075,7 +13040,7 @@
           <a:p>
             <a:pPr algn="l"/>
             <a:r>
-              <a:rPr sz="1050" b="0" i="0">
+              <a:rPr sz="1050" b="0" i="0" dirty="0">
                 <a:solidFill>
                   <a:srgbClr val="FFFFFF"/>
                 </a:solidFill>
@@ -13083,6 +13048,21 @@
               </a:rPr>
               <a:t>handbook.pdf</a:t>
             </a:r>
+            <a:r>
+              <a:rPr lang="en-AU" sz="1050" b="0" i="0">
+                <a:solidFill>
+                  <a:srgbClr val="FFFFFF"/>
+                </a:solidFill>
+                <a:latin typeface="Segoe UI"/>
+              </a:rPr>
+              <a:t> (200 pages)</a:t>
+            </a:r>
+            <a:endParaRPr sz="1050" b="0" i="0">
+              <a:solidFill>
+                <a:srgbClr val="FFFFFF"/>
+              </a:solidFill>
+              <a:latin typeface="Segoe UI"/>
+            </a:endParaRPr>
           </a:p>
         </p:txBody>
       </p:sp>

--- a/lecture/deck.pptx
+++ b/lecture/deck.pptx
@@ -5,7 +5,7 @@
     <p:sldMasterId id="2147483648" r:id="rId1"/>
   </p:sldMasterIdLst>
   <p:notesMasterIdLst>
-    <p:notesMasterId r:id="rId17"/>
+    <p:notesMasterId r:id="rId18"/>
   </p:notesMasterIdLst>
   <p:sldIdLst>
     <p:sldId id="256" r:id="rId2"/>
@@ -22,7 +22,8 @@
     <p:sldId id="268" r:id="rId13"/>
     <p:sldId id="269" r:id="rId14"/>
     <p:sldId id="270" r:id="rId15"/>
-    <p:sldId id="271" r:id="rId16"/>
+    <p:sldId id="272" r:id="rId16"/>
+    <p:sldId id="271" r:id="rId17"/>
   </p:sldIdLst>
   <p:sldSz cx="12192000" cy="6858000"/>
   <p:notesSz cx="6858000" cy="9144000"/>
@@ -717,6 +718,107 @@
 </file>
 
 <file path=ppt/notesSlides/notesSlide15.xml><?xml version="1.0" encoding="utf-8"?>
+<p:notes xmlns:a="http://schemas.openxmlformats.org/drawingml/2006/main" xmlns:r="http://schemas.openxmlformats.org/officeDocument/2006/relationships" xmlns:p="http://schemas.openxmlformats.org/presentationml/2006/main">
+  <p:cSld>
+    <p:spTree>
+      <p:nvGrpSpPr>
+        <p:cNvPr id="1" name="">
+          <a:extLst>
+            <a:ext uri="{FF2B5EF4-FFF2-40B4-BE49-F238E27FC236}">
+              <a16:creationId xmlns:a16="http://schemas.microsoft.com/office/drawing/2014/main" id="{92A82417-D982-CC3B-5F9B-7E48A0438D2C}"/>
+            </a:ext>
+          </a:extLst>
+        </p:cNvPr>
+        <p:cNvGrpSpPr/>
+        <p:nvPr/>
+      </p:nvGrpSpPr>
+      <p:grpSpPr>
+        <a:xfrm>
+          <a:off x="0" y="0"/>
+          <a:ext cx="0" cy="0"/>
+          <a:chOff x="0" y="0"/>
+          <a:chExt cx="0" cy="0"/>
+        </a:xfrm>
+      </p:grpSpPr>
+      <p:sp>
+        <p:nvSpPr>
+          <p:cNvPr id="2" name="Slide Image Placeholder 1">
+            <a:extLst>
+              <a:ext uri="{FF2B5EF4-FFF2-40B4-BE49-F238E27FC236}">
+                <a16:creationId xmlns:a16="http://schemas.microsoft.com/office/drawing/2014/main" id="{428D380A-4828-67A9-C0D9-E18C5A640701}"/>
+              </a:ext>
+            </a:extLst>
+          </p:cNvPr>
+          <p:cNvSpPr>
+            <a:spLocks noGrp="1" noRot="1" noChangeAspect="1"/>
+          </p:cNvSpPr>
+          <p:nvPr>
+            <p:ph type="sldImg" idx="2"/>
+          </p:nvPr>
+        </p:nvSpPr>
+        <p:spPr/>
+      </p:sp>
+      <p:sp>
+        <p:nvSpPr>
+          <p:cNvPr id="3" name="Notes Placeholder 2">
+            <a:extLst>
+              <a:ext uri="{FF2B5EF4-FFF2-40B4-BE49-F238E27FC236}">
+                <a16:creationId xmlns:a16="http://schemas.microsoft.com/office/drawing/2014/main" id="{CD18FF01-FD02-A1AA-ADB2-7285E71C8381}"/>
+              </a:ext>
+            </a:extLst>
+          </p:cNvPr>
+          <p:cNvSpPr>
+            <a:spLocks noGrp="1"/>
+          </p:cNvSpPr>
+          <p:nvPr>
+            <p:ph type="body" sz="quarter" idx="3"/>
+          </p:nvPr>
+        </p:nvSpPr>
+        <p:spPr/>
+        <p:txBody>
+          <a:bodyPr/>
+          <a:lstStyle/>
+          <a:p>
+            <a:r>
+              <a:rPr lang="en-AU" dirty="0"/>
+              <a:t>chunk</a:t>
+            </a:r>
+            <a:endParaRPr dirty="0"/>
+          </a:p>
+        </p:txBody>
+      </p:sp>
+      <p:sp>
+        <p:nvSpPr>
+          <p:cNvPr id="4" name="Slide Number Placeholder 3">
+            <a:extLst>
+              <a:ext uri="{FF2B5EF4-FFF2-40B4-BE49-F238E27FC236}">
+                <a16:creationId xmlns:a16="http://schemas.microsoft.com/office/drawing/2014/main" id="{EAEA1CCE-AD47-D1B0-70AA-BF7D18BA4928}"/>
+              </a:ext>
+            </a:extLst>
+          </p:cNvPr>
+          <p:cNvSpPr>
+            <a:spLocks noGrp="1"/>
+          </p:cNvSpPr>
+          <p:nvPr>
+            <p:ph type="sldNum" sz="quarter" idx="5"/>
+          </p:nvPr>
+        </p:nvSpPr>
+        <p:spPr/>
+      </p:sp>
+    </p:spTree>
+    <p:extLst>
+      <p:ext uri="{BB962C8B-B14F-4D97-AF65-F5344CB8AC3E}">
+        <p14:creationId xmlns:p14="http://schemas.microsoft.com/office/powerpoint/2010/main" val="1551090862"/>
+      </p:ext>
+    </p:extLst>
+  </p:cSld>
+  <p:clrMapOvr>
+    <a:masterClrMapping/>
+  </p:clrMapOvr>
+</p:notes>
+</file>
+
+<file path=ppt/notesSlides/notesSlide16.xml><?xml version="1.0" encoding="utf-8"?>
 <p:notes xmlns:a="http://schemas.openxmlformats.org/drawingml/2006/main" xmlns:r="http://schemas.openxmlformats.org/officeDocument/2006/relationships" xmlns:p="http://schemas.openxmlformats.org/presentationml/2006/main">
   <p:cSld>
     <p:spTree>
@@ -4766,8 +4868,8 @@
         </p:nvSpPr>
         <p:spPr>
           <a:xfrm>
-            <a:off x="3120705" y="4377795"/>
-            <a:ext cx="4353886" cy="731520"/>
+            <a:off x="2359152" y="4377795"/>
+            <a:ext cx="7236911" cy="1201072"/>
           </a:xfrm>
           <a:prstGeom prst="roundRect">
             <a:avLst>
@@ -4820,8 +4922,8 @@
         </p:nvSpPr>
         <p:spPr>
           <a:xfrm>
-            <a:off x="3287730" y="4630319"/>
-            <a:ext cx="3955551" cy="226472"/>
+            <a:off x="3196687" y="4770725"/>
+            <a:ext cx="5907639" cy="323550"/>
           </a:xfrm>
           <a:prstGeom prst="rect">
             <a:avLst/>
@@ -4840,7 +4942,7 @@
               </a:lnSpc>
             </a:pPr>
             <a:r>
-              <a:rPr lang="en-AU" sz="1400" b="0" i="1" dirty="0">
+              <a:rPr lang="en-AU" sz="2000" b="0" i="1" dirty="0">
                 <a:solidFill>
                   <a:srgbClr val="FFFFFF"/>
                 </a:solidFill>
@@ -4849,7 +4951,7 @@
               <a:t>Question: </a:t>
             </a:r>
             <a:r>
-              <a:rPr sz="1400" b="0" i="1" dirty="0">
+              <a:rPr sz="2000" b="0" i="1" dirty="0">
                 <a:solidFill>
                   <a:srgbClr val="FFFFFF"/>
                 </a:solidFill>
@@ -5277,11 +5379,20 @@
                 </a:solidFill>
                 <a:latin typeface="Segoe UI"/>
               </a:rPr>
-              <a:t>Three words: enrolment, registration, withdrawal</a:t>
-            </a:r>
-            <a:endParaRPr sz="1350" b="0" i="1" dirty="0">
+              <a:t>Three words: </a:t>
+            </a:r>
+            <a:r>
+              <a:rPr lang="en-AU" sz="1350" b="1" i="1" dirty="0">
+                <a:solidFill>
+                  <a:schemeClr val="accent6"/>
+                </a:solidFill>
+                <a:latin typeface="Segoe UI"/>
+              </a:rPr>
+              <a:t>enrolment, registration, withdrawal</a:t>
+            </a:r>
+            <a:endParaRPr sz="1350" b="1" i="1" dirty="0">
               <a:solidFill>
-                <a:srgbClr val="9FB3C8"/>
+                <a:schemeClr val="accent6"/>
               </a:solidFill>
               <a:latin typeface="Segoe UI"/>
             </a:endParaRPr>
@@ -5332,7 +5443,7 @@
           <a:lstStyle/>
           <a:p>
             <a:pPr algn="ctr"/>
-            <a:endParaRPr/>
+            <a:endParaRPr sz="3600"/>
           </a:p>
         </p:txBody>
       </p:sp>
@@ -5379,7 +5490,7 @@
         </p:nvCxnSpPr>
         <p:spPr>
           <a:xfrm>
-            <a:off x="2194560" y="3730752"/>
+            <a:off x="2995944" y="3730752"/>
             <a:ext cx="0" cy="128016"/>
           </a:xfrm>
           <a:prstGeom prst="line">
@@ -5414,8 +5525,8 @@
         </p:nvSpPr>
         <p:spPr>
           <a:xfrm>
-            <a:off x="1828800" y="3922776"/>
-            <a:ext cx="731520" cy="274320"/>
+            <a:off x="2630184" y="3922776"/>
+            <a:ext cx="731520" cy="246221"/>
           </a:xfrm>
           <a:prstGeom prst="rect">
             <a:avLst/>
@@ -5430,7 +5541,7 @@
           <a:p>
             <a:pPr algn="ctr"/>
             <a:r>
-              <a:rPr sz="1000" b="0" i="0">
+              <a:rPr sz="1600" b="0" i="0">
                 <a:solidFill>
                   <a:srgbClr val="9FB3C8"/>
                 </a:solidFill>
@@ -5485,7 +5596,7 @@
         <p:spPr>
           <a:xfrm>
             <a:off x="4114800" y="3922776"/>
-            <a:ext cx="731520" cy="274320"/>
+            <a:ext cx="731520" cy="246221"/>
           </a:xfrm>
           <a:prstGeom prst="rect">
             <a:avLst/>
@@ -5500,7 +5611,7 @@
           <a:p>
             <a:pPr algn="ctr"/>
             <a:r>
-              <a:rPr sz="1000" b="0" i="0">
+              <a:rPr sz="1600" b="0" i="0">
                 <a:solidFill>
                   <a:srgbClr val="9FB3C8"/>
                 </a:solidFill>
@@ -5519,7 +5630,7 @@
         </p:nvCxnSpPr>
         <p:spPr>
           <a:xfrm>
-            <a:off x="6766560" y="3730752"/>
+            <a:off x="6170660" y="3730752"/>
             <a:ext cx="0" cy="128016"/>
           </a:xfrm>
           <a:prstGeom prst="line">
@@ -5554,8 +5665,8 @@
         </p:nvSpPr>
         <p:spPr>
           <a:xfrm>
-            <a:off x="6400800" y="3922776"/>
-            <a:ext cx="731520" cy="274320"/>
+            <a:off x="5804900" y="3994020"/>
+            <a:ext cx="731520" cy="246221"/>
           </a:xfrm>
           <a:prstGeom prst="rect">
             <a:avLst/>
@@ -5570,7 +5681,7 @@
           <a:p>
             <a:pPr algn="ctr"/>
             <a:r>
-              <a:rPr sz="1000" b="0" i="0">
+              <a:rPr sz="1600" b="0" i="0" dirty="0">
                 <a:solidFill>
                   <a:srgbClr val="9FB3C8"/>
                 </a:solidFill>
@@ -5589,7 +5700,7 @@
         </p:nvCxnSpPr>
         <p:spPr>
           <a:xfrm>
-            <a:off x="7223760" y="3730752"/>
+            <a:off x="6812794" y="3730752"/>
             <a:ext cx="0" cy="128016"/>
           </a:xfrm>
           <a:prstGeom prst="line">
@@ -5624,8 +5735,8 @@
         </p:nvSpPr>
         <p:spPr>
           <a:xfrm>
-            <a:off x="6858000" y="3922776"/>
-            <a:ext cx="731520" cy="274320"/>
+            <a:off x="6447034" y="3922776"/>
+            <a:ext cx="731520" cy="246221"/>
           </a:xfrm>
           <a:prstGeom prst="rect">
             <a:avLst/>
@@ -5640,7 +5751,7 @@
           <a:p>
             <a:pPr algn="ctr"/>
             <a:r>
-              <a:rPr sz="1000" b="0" i="0">
+              <a:rPr sz="1600" b="0" i="0">
                 <a:solidFill>
                   <a:srgbClr val="9FB3C8"/>
                 </a:solidFill>
@@ -5659,7 +5770,7 @@
         </p:nvSpPr>
         <p:spPr>
           <a:xfrm>
-            <a:off x="2112264" y="3712464"/>
+            <a:off x="2913648" y="3712464"/>
             <a:ext cx="164592" cy="164592"/>
           </a:xfrm>
           <a:prstGeom prst="ellipse">
@@ -5691,7 +5802,7 @@
           <a:lstStyle/>
           <a:p>
             <a:pPr algn="ctr"/>
-            <a:endParaRPr/>
+            <a:endParaRPr sz="3600"/>
           </a:p>
         </p:txBody>
       </p:sp>
@@ -5703,8 +5814,8 @@
         </p:nvSpPr>
         <p:spPr>
           <a:xfrm>
-            <a:off x="1280160" y="3291840"/>
-            <a:ext cx="1828800" cy="320040"/>
+            <a:off x="2081544" y="3291840"/>
+            <a:ext cx="1828800" cy="276999"/>
           </a:xfrm>
           <a:prstGeom prst="rect">
             <a:avLst/>
@@ -5719,7 +5830,7 @@
           <a:p>
             <a:pPr algn="ctr"/>
             <a:r>
-              <a:rPr sz="1200" b="1" i="0">
+              <a:rPr b="1" i="0">
                 <a:solidFill>
                   <a:srgbClr val="E06C6C"/>
                 </a:solidFill>
@@ -5738,7 +5849,7 @@
         </p:nvSpPr>
         <p:spPr>
           <a:xfrm>
-            <a:off x="6684264" y="3712464"/>
+            <a:off x="6088364" y="3712464"/>
             <a:ext cx="164592" cy="164592"/>
           </a:xfrm>
           <a:prstGeom prst="ellipse">
@@ -5770,7 +5881,7 @@
           <a:lstStyle/>
           <a:p>
             <a:pPr algn="ctr"/>
-            <a:endParaRPr/>
+            <a:endParaRPr sz="3600"/>
           </a:p>
         </p:txBody>
       </p:sp>
@@ -5782,8 +5893,8 @@
         </p:nvSpPr>
         <p:spPr>
           <a:xfrm>
-            <a:off x="5852160" y="3291840"/>
-            <a:ext cx="1828800" cy="320040"/>
+            <a:off x="5029200" y="3301651"/>
+            <a:ext cx="1828800" cy="276999"/>
           </a:xfrm>
           <a:prstGeom prst="rect">
             <a:avLst/>
@@ -5798,7 +5909,7 @@
           <a:p>
             <a:pPr algn="ctr"/>
             <a:r>
-              <a:rPr sz="1200" b="1" i="0">
+              <a:rPr b="1" i="0" dirty="0">
                 <a:solidFill>
                   <a:srgbClr val="2DD4BF"/>
                 </a:solidFill>
@@ -5817,7 +5928,7 @@
         </p:nvSpPr>
         <p:spPr>
           <a:xfrm>
-            <a:off x="7141464" y="3712464"/>
+            <a:off x="6730498" y="3712464"/>
             <a:ext cx="164592" cy="164592"/>
           </a:xfrm>
           <a:prstGeom prst="ellipse">
@@ -5849,7 +5960,7 @@
           <a:lstStyle/>
           <a:p>
             <a:pPr algn="ctr"/>
-            <a:endParaRPr/>
+            <a:endParaRPr sz="3600"/>
           </a:p>
         </p:txBody>
       </p:sp>
@@ -5861,8 +5972,8 @@
         </p:nvSpPr>
         <p:spPr>
           <a:xfrm>
-            <a:off x="6309360" y="4251960"/>
-            <a:ext cx="1828800" cy="320040"/>
+            <a:off x="6376142" y="3299532"/>
+            <a:ext cx="1828800" cy="276999"/>
           </a:xfrm>
           <a:prstGeom prst="rect">
             <a:avLst/>
@@ -5877,7 +5988,7 @@
           <a:p>
             <a:pPr algn="ctr"/>
             <a:r>
-              <a:rPr sz="1200" b="1" i="0">
+              <a:rPr b="1" i="0" dirty="0">
                 <a:solidFill>
                   <a:srgbClr val="2DD4BF"/>
                 </a:solidFill>
@@ -5897,7 +6008,7 @@
         <p:spPr>
           <a:xfrm>
             <a:off x="5760720" y="2514600"/>
-            <a:ext cx="2651760" cy="320040"/>
+            <a:ext cx="2651760" cy="307777"/>
           </a:xfrm>
           <a:prstGeom prst="rect">
             <a:avLst/>
@@ -5912,7 +6023,7 @@
           <a:p>
             <a:pPr algn="l"/>
             <a:r>
-              <a:rPr sz="1100" b="0" i="1">
+              <a:rPr sz="2000" b="0" i="1">
                 <a:solidFill>
                   <a:srgbClr val="2DD4BF"/>
                 </a:solidFill>
@@ -5967,7 +6078,7 @@
           <a:lstStyle/>
           <a:p>
             <a:pPr algn="ctr"/>
-            <a:endParaRPr/>
+            <a:endParaRPr sz="3600"/>
           </a:p>
         </p:txBody>
       </p:sp>
@@ -5979,8 +6090,8 @@
         </p:nvSpPr>
         <p:spPr>
           <a:xfrm>
-            <a:off x="8623462" y="2926080"/>
-            <a:ext cx="2834640" cy="1188720"/>
+            <a:off x="9281160" y="3330454"/>
+            <a:ext cx="2176942" cy="379976"/>
           </a:xfrm>
           <a:prstGeom prst="rect">
             <a:avLst/>
@@ -5999,7 +6110,7 @@
               </a:lnSpc>
             </a:pPr>
             <a:r>
-              <a:rPr sz="1250" b="1">
+              <a:rPr sz="2400" b="1" dirty="0">
                 <a:solidFill>
                   <a:srgbClr val="2DD4BF"/>
                 </a:solidFill>
@@ -6007,102 +6118,12 @@
               </a:rPr>
               <a:t>Embedding</a:t>
             </a:r>
-            <a:r>
-              <a:rPr sz="1050">
-                <a:solidFill>
-                  <a:srgbClr val="9FB3C8"/>
-                </a:solidFill>
-                <a:latin typeface="Segoe UI"/>
-              </a:rPr>
-              <a:t>  —  writing words as numbers so that close numbers = similar meaning.</a:t>
-            </a:r>
-          </a:p>
-        </p:txBody>
-      </p:sp>
-      <p:sp>
-        <p:nvSpPr>
-          <p:cNvPr id="35" name="Rounded Rectangle 34"/>
-          <p:cNvSpPr/>
-          <p:nvPr/>
-        </p:nvSpPr>
-        <p:spPr>
-          <a:xfrm>
-            <a:off x="822960" y="5166360"/>
-            <a:ext cx="10789920" cy="868680"/>
-          </a:xfrm>
-          <a:prstGeom prst="roundRect">
-            <a:avLst>
-              <a:gd name="adj" fmla="val 6000"/>
-            </a:avLst>
-          </a:prstGeom>
-          <a:solidFill>
-            <a:srgbClr val="142847"/>
-          </a:solidFill>
-          <a:ln w="12700">
-            <a:solidFill>
-              <a:srgbClr val="253B5E"/>
-            </a:solidFill>
-          </a:ln>
-        </p:spPr>
-        <p:style>
-          <a:lnRef idx="1">
-            <a:schemeClr val="accent1"/>
-          </a:lnRef>
-          <a:fillRef idx="3">
-            <a:schemeClr val="accent1"/>
-          </a:fillRef>
-          <a:effectRef idx="2">
-            <a:schemeClr val="accent1"/>
-          </a:effectRef>
-          <a:fontRef idx="minor">
-            <a:schemeClr val="lt1"/>
-          </a:fontRef>
-        </p:style>
-        <p:txBody>
-          <a:bodyPr rtlCol="0" anchor="ctr"/>
-          <a:lstStyle/>
-          <a:p>
-            <a:pPr algn="ctr"/>
-            <a:endParaRPr/>
-          </a:p>
-        </p:txBody>
-      </p:sp>
-      <p:sp>
-        <p:nvSpPr>
-          <p:cNvPr id="36" name="TextBox 35"/>
-          <p:cNvSpPr txBox="1"/>
-          <p:nvPr/>
-        </p:nvSpPr>
-        <p:spPr>
-          <a:xfrm>
-            <a:off x="1097280" y="5488041"/>
-            <a:ext cx="10241280" cy="225318"/>
-          </a:xfrm>
-          <a:prstGeom prst="rect">
-            <a:avLst/>
-          </a:prstGeom>
-          <a:noFill/>
-        </p:spPr>
-        <p:txBody>
-          <a:bodyPr wrap="square" lIns="0" tIns="0" rIns="0" bIns="0" anchor="ctr">
-            <a:spAutoFit/>
-          </a:bodyPr>
-          <a:lstStyle/>
-          <a:p>
-            <a:pPr algn="l">
-              <a:lnSpc>
-                <a:spcPct val="125000"/>
-              </a:lnSpc>
-            </a:pPr>
-            <a:r>
-              <a:rPr sz="1300" b="0" i="1" dirty="0">
-                <a:solidFill>
-                  <a:srgbClr val="FFFFFF"/>
-                </a:solidFill>
-                <a:latin typeface="Segoe UI"/>
-              </a:rPr>
-              <a:t>But where does “pass” go on this line? </a:t>
-            </a:r>
+            <a:endParaRPr dirty="0">
+              <a:solidFill>
+                <a:srgbClr val="9FB3C8"/>
+              </a:solidFill>
+              <a:latin typeface="Segoe UI"/>
+            </a:endParaRPr>
           </a:p>
         </p:txBody>
       </p:sp>
@@ -6501,8 +6522,8 @@
         </p:nvSpPr>
         <p:spPr>
           <a:xfrm>
-            <a:off x="822960" y="1783080"/>
-            <a:ext cx="5760720" cy="4160520"/>
+            <a:off x="509598" y="2041534"/>
+            <a:ext cx="6615838" cy="4160520"/>
           </a:xfrm>
           <a:prstGeom prst="roundRect">
             <a:avLst>
@@ -6537,7 +6558,7 @@
           <a:lstStyle/>
           <a:p>
             <a:pPr algn="ctr"/>
-            <a:endParaRPr/>
+            <a:endParaRPr sz="3600"/>
           </a:p>
         </p:txBody>
       </p:sp>
@@ -6551,7 +6572,7 @@
         </p:nvCxnSpPr>
         <p:spPr>
           <a:xfrm>
-            <a:off x="1278331" y="3886200"/>
+            <a:off x="1211857" y="4144654"/>
             <a:ext cx="4685385" cy="0"/>
           </a:xfrm>
           <a:prstGeom prst="line">
@@ -6588,7 +6609,7 @@
         </p:nvCxnSpPr>
         <p:spPr>
           <a:xfrm>
-            <a:off x="3429000" y="1940356"/>
+            <a:off x="3362526" y="2198810"/>
             <a:ext cx="0" cy="3891687"/>
           </a:xfrm>
           <a:prstGeom prst="line">
@@ -6617,64 +6638,13 @@
       </p:cxnSp>
       <p:sp>
         <p:nvSpPr>
-          <p:cNvPr id="15" name="TextBox 14"/>
-          <p:cNvSpPr txBox="1"/>
-          <p:nvPr/>
-        </p:nvSpPr>
-        <p:spPr>
-          <a:xfrm>
-            <a:off x="1051560" y="1965960"/>
-            <a:ext cx="2240280" cy="369332"/>
-          </a:xfrm>
-          <a:prstGeom prst="rect">
-            <a:avLst/>
-          </a:prstGeom>
-          <a:noFill/>
-        </p:spPr>
-        <p:txBody>
-          <a:bodyPr wrap="square" lIns="0" tIns="0" rIns="0" bIns="0" anchor="t">
-            <a:spAutoFit/>
-          </a:bodyPr>
-          <a:lstStyle/>
-          <a:p>
-            <a:pPr algn="l">
-              <a:lnSpc>
-                <a:spcPct val="140000"/>
-              </a:lnSpc>
-            </a:pPr>
-            <a:r>
-              <a:rPr sz="1000" b="0" i="1">
-                <a:solidFill>
-                  <a:srgbClr val="9FB3C8"/>
-                </a:solidFill>
-                <a:latin typeface="Segoe UI"/>
-              </a:rPr>
-              <a:t>x: withdrawal ↔ enrolment</a:t>
-            </a:r>
-          </a:p>
-          <a:p>
-            <a:pPr algn="l"/>
-            <a:r>
-              <a:rPr sz="1000" b="0" i="1">
-                <a:solidFill>
-                  <a:srgbClr val="9FB3C8"/>
-                </a:solidFill>
-                <a:latin typeface="Segoe UI"/>
-              </a:rPr>
-              <a:t>y: fail ↔ pass</a:t>
-            </a:r>
-          </a:p>
-        </p:txBody>
-      </p:sp>
-      <p:sp>
-        <p:nvSpPr>
           <p:cNvPr id="16" name="Oval 15"/>
           <p:cNvSpPr/>
           <p:nvPr/>
         </p:nvSpPr>
         <p:spPr>
           <a:xfrm>
-            <a:off x="5276088" y="3813048"/>
+            <a:off x="5209614" y="4071502"/>
             <a:ext cx="146304" cy="146304"/>
           </a:xfrm>
           <a:prstGeom prst="ellipse">
@@ -6706,7 +6676,7 @@
           <a:lstStyle/>
           <a:p>
             <a:pPr algn="ctr"/>
-            <a:endParaRPr/>
+            <a:endParaRPr sz="3600"/>
           </a:p>
         </p:txBody>
       </p:sp>
@@ -6718,8 +6688,8 @@
         </p:nvSpPr>
         <p:spPr>
           <a:xfrm>
-            <a:off x="3931920" y="3502152"/>
-            <a:ext cx="1920240" cy="161583"/>
+            <a:off x="3865446" y="3760606"/>
+            <a:ext cx="1920240" cy="276999"/>
           </a:xfrm>
           <a:prstGeom prst="rect">
             <a:avLst/>
@@ -6734,7 +6704,7 @@
           <a:p>
             <a:pPr algn="l"/>
             <a:r>
-              <a:rPr sz="1050" b="1" i="0">
+              <a:rPr b="1" i="0">
                 <a:solidFill>
                   <a:srgbClr val="2DD4BF"/>
                 </a:solidFill>
@@ -6753,7 +6723,7 @@
         </p:nvSpPr>
         <p:spPr>
           <a:xfrm>
-            <a:off x="5660136" y="3813048"/>
+            <a:off x="5593662" y="4071502"/>
             <a:ext cx="146304" cy="146304"/>
           </a:xfrm>
           <a:prstGeom prst="ellipse">
@@ -6785,7 +6755,7 @@
           <a:lstStyle/>
           <a:p>
             <a:pPr algn="ctr"/>
-            <a:endParaRPr/>
+            <a:endParaRPr sz="3600"/>
           </a:p>
         </p:txBody>
       </p:sp>
@@ -6797,8 +6767,8 @@
         </p:nvSpPr>
         <p:spPr>
           <a:xfrm>
-            <a:off x="5184648" y="4123944"/>
-            <a:ext cx="1920240" cy="161583"/>
+            <a:off x="5118174" y="4382398"/>
+            <a:ext cx="1920240" cy="276999"/>
           </a:xfrm>
           <a:prstGeom prst="rect">
             <a:avLst/>
@@ -6813,7 +6783,7 @@
           <a:p>
             <a:pPr algn="l"/>
             <a:r>
-              <a:rPr sz="1050" b="1" i="0">
+              <a:rPr b="1" i="0">
                 <a:solidFill>
                   <a:srgbClr val="2DD4BF"/>
                 </a:solidFill>
@@ -6832,7 +6802,7 @@
         </p:nvSpPr>
         <p:spPr>
           <a:xfrm>
-            <a:off x="1435607" y="3813048"/>
+            <a:off x="1369133" y="4071502"/>
             <a:ext cx="146304" cy="146304"/>
           </a:xfrm>
           <a:prstGeom prst="ellipse">
@@ -6864,7 +6834,7 @@
           <a:lstStyle/>
           <a:p>
             <a:pPr algn="ctr"/>
-            <a:endParaRPr/>
+            <a:endParaRPr sz="3600"/>
           </a:p>
         </p:txBody>
       </p:sp>
@@ -6876,8 +6846,8 @@
         </p:nvSpPr>
         <p:spPr>
           <a:xfrm>
-            <a:off x="731519" y="3502152"/>
-            <a:ext cx="1920240" cy="161583"/>
+            <a:off x="665044" y="3760606"/>
+            <a:ext cx="2194557" cy="276999"/>
           </a:xfrm>
           <a:prstGeom prst="rect">
             <a:avLst/>
@@ -6892,7 +6862,7 @@
           <a:p>
             <a:pPr algn="l"/>
             <a:r>
-              <a:rPr sz="1050" b="1" i="0">
+              <a:rPr b="1" i="0" dirty="0">
                 <a:solidFill>
                   <a:srgbClr val="2DD4BF"/>
                 </a:solidFill>
@@ -6911,7 +6881,7 @@
         </p:nvSpPr>
         <p:spPr>
           <a:xfrm>
-            <a:off x="3355848" y="2075688"/>
+            <a:off x="3289374" y="2334142"/>
             <a:ext cx="146304" cy="146304"/>
           </a:xfrm>
           <a:prstGeom prst="ellipse">
@@ -6943,7 +6913,7 @@
           <a:lstStyle/>
           <a:p>
             <a:pPr algn="ctr"/>
-            <a:endParaRPr/>
+            <a:endParaRPr sz="3600"/>
           </a:p>
         </p:txBody>
       </p:sp>
@@ -6955,8 +6925,8 @@
         </p:nvSpPr>
         <p:spPr>
           <a:xfrm>
-            <a:off x="3557016" y="2057400"/>
-            <a:ext cx="1920240" cy="161583"/>
+            <a:off x="3490542" y="2315854"/>
+            <a:ext cx="1920240" cy="276999"/>
           </a:xfrm>
           <a:prstGeom prst="rect">
             <a:avLst/>
@@ -6971,7 +6941,7 @@
           <a:p>
             <a:pPr algn="l"/>
             <a:r>
-              <a:rPr sz="1050" b="1" i="0">
+              <a:rPr b="1" i="0">
                 <a:solidFill>
                   <a:srgbClr val="F5B342"/>
                 </a:solidFill>
@@ -6990,7 +6960,7 @@
         </p:nvSpPr>
         <p:spPr>
           <a:xfrm>
-            <a:off x="3355848" y="5550408"/>
+            <a:off x="3289374" y="5808862"/>
             <a:ext cx="146304" cy="146304"/>
           </a:xfrm>
           <a:prstGeom prst="ellipse">
@@ -7022,7 +6992,7 @@
           <a:lstStyle/>
           <a:p>
             <a:pPr algn="ctr"/>
-            <a:endParaRPr/>
+            <a:endParaRPr sz="3600"/>
           </a:p>
         </p:txBody>
       </p:sp>
@@ -7034,8 +7004,8 @@
         </p:nvSpPr>
         <p:spPr>
           <a:xfrm>
-            <a:off x="3557016" y="5513832"/>
-            <a:ext cx="1920240" cy="161583"/>
+            <a:off x="3490542" y="5772286"/>
+            <a:ext cx="1920240" cy="276999"/>
           </a:xfrm>
           <a:prstGeom prst="rect">
             <a:avLst/>
@@ -7050,7 +7020,7 @@
           <a:p>
             <a:pPr algn="l"/>
             <a:r>
-              <a:rPr sz="1050" b="1" i="0">
+              <a:rPr b="1" i="0">
                 <a:solidFill>
                   <a:srgbClr val="F5B342"/>
                 </a:solidFill>
@@ -7069,7 +7039,7 @@
         </p:nvSpPr>
         <p:spPr>
           <a:xfrm>
-            <a:off x="4233672" y="2862072"/>
+            <a:off x="4167198" y="3120526"/>
             <a:ext cx="310896" cy="310896"/>
           </a:xfrm>
           <a:prstGeom prst="ellipse">
@@ -7101,7 +7071,7 @@
           <a:lstStyle/>
           <a:p>
             <a:pPr algn="ctr"/>
-            <a:endParaRPr/>
+            <a:endParaRPr sz="3600"/>
           </a:p>
         </p:txBody>
       </p:sp>
@@ -7113,7 +7083,7 @@
         </p:nvSpPr>
         <p:spPr>
           <a:xfrm>
-            <a:off x="4315968" y="2944368"/>
+            <a:off x="4249494" y="3202822"/>
             <a:ext cx="146304" cy="146304"/>
           </a:xfrm>
           <a:prstGeom prst="ellipse">
@@ -7145,7 +7115,7 @@
           <a:lstStyle/>
           <a:p>
             <a:pPr algn="ctr"/>
-            <a:endParaRPr/>
+            <a:endParaRPr sz="3600"/>
           </a:p>
         </p:txBody>
       </p:sp>
@@ -7157,8 +7127,8 @@
         </p:nvSpPr>
         <p:spPr>
           <a:xfrm>
-            <a:off x="4572000" y="2697479"/>
-            <a:ext cx="2011680" cy="176972"/>
+            <a:off x="4505526" y="2955933"/>
+            <a:ext cx="2011680" cy="307777"/>
           </a:xfrm>
           <a:prstGeom prst="rect">
             <a:avLst/>
@@ -7173,7 +7143,7 @@
           <a:p>
             <a:pPr algn="l"/>
             <a:r>
-              <a:rPr sz="1150" b="1" i="0">
+              <a:rPr sz="2000" b="1" i="0">
                 <a:solidFill>
                   <a:srgbClr val="FFFFFF"/>
                 </a:solidFill>
@@ -7192,8 +7162,8 @@
         </p:nvSpPr>
         <p:spPr>
           <a:xfrm>
-            <a:off x="6858000" y="3246120"/>
-            <a:ext cx="4526280" cy="822960"/>
+            <a:off x="7582204" y="3246120"/>
+            <a:ext cx="3174189" cy="822960"/>
           </a:xfrm>
           <a:prstGeom prst="roundRect">
             <a:avLst>
@@ -7228,7 +7198,7 @@
           <a:lstStyle/>
           <a:p>
             <a:pPr algn="ctr"/>
-            <a:endParaRPr/>
+            <a:endParaRPr sz="3600"/>
           </a:p>
         </p:txBody>
       </p:sp>
@@ -7240,8 +7210,8 @@
         </p:nvSpPr>
         <p:spPr>
           <a:xfrm>
-            <a:off x="7040880" y="3558662"/>
-            <a:ext cx="4160520" cy="197875"/>
+            <a:off x="8541867" y="3467614"/>
+            <a:ext cx="2735494" cy="379976"/>
           </a:xfrm>
           <a:prstGeom prst="rect">
             <a:avLst/>
@@ -7260,7 +7230,7 @@
               </a:lnSpc>
             </a:pPr>
             <a:r>
-              <a:rPr sz="1250" b="1">
+              <a:rPr lang="en-US" sz="2400" b="1" dirty="0">
                 <a:solidFill>
                   <a:srgbClr val="2DD4BF"/>
                 </a:solidFill>
@@ -7268,15 +7238,12 @@
               </a:rPr>
               <a:t>Vector</a:t>
             </a:r>
-            <a:r>
-              <a:rPr sz="1050">
-                <a:solidFill>
-                  <a:srgbClr val="9FB3C8"/>
-                </a:solidFill>
-                <a:latin typeface="Segoe UI"/>
-              </a:rPr>
-              <a:t>  —  a list of numbers. Here: [enrolment-ness, pass-ness].</a:t>
-            </a:r>
+            <a:endParaRPr lang="en-US" dirty="0">
+              <a:solidFill>
+                <a:srgbClr val="9FB3C8"/>
+              </a:solidFill>
+              <a:latin typeface="Segoe UI"/>
+            </a:endParaRPr>
           </a:p>
         </p:txBody>
       </p:sp>
@@ -7288,8 +7255,8 @@
         </p:nvSpPr>
         <p:spPr>
           <a:xfrm>
-            <a:off x="91440" y="1512151"/>
-            <a:ext cx="5760720" cy="176972"/>
+            <a:off x="317574" y="1593823"/>
+            <a:ext cx="5760720" cy="307777"/>
           </a:xfrm>
           <a:prstGeom prst="rect">
             <a:avLst/>
@@ -7304,7 +7271,7 @@
           <a:p>
             <a:pPr algn="ctr"/>
             <a:r>
-              <a:rPr lang="en-AU" sz="1150" b="0" i="1" dirty="0">
+              <a:rPr lang="en-AU" sz="2000" b="0" i="1" dirty="0">
                 <a:solidFill>
                   <a:srgbClr val="2DD4BF"/>
                 </a:solidFill>
@@ -7313,7 +7280,7 @@
               <a:t>New word </a:t>
             </a:r>
             <a:r>
-              <a:rPr lang="en-AU" sz="1150" b="0" i="1" dirty="0" err="1">
+              <a:rPr lang="en-AU" sz="2000" b="0" i="1" dirty="0" err="1">
                 <a:solidFill>
                   <a:srgbClr val="2DD4BF"/>
                 </a:solidFill>
@@ -7322,17 +7289,131 @@
               <a:t>comess</a:t>
             </a:r>
             <a:r>
-              <a:rPr lang="en-AU" sz="1150" b="0" i="1" dirty="0">
+              <a:rPr lang="en-AU" sz="2000" b="0" i="1" dirty="0">
                 <a:solidFill>
                   <a:srgbClr val="2DD4BF"/>
                 </a:solidFill>
                 <a:latin typeface="Segoe UI"/>
               </a:rPr>
-              <a:t>: pass</a:t>
-            </a:r>
-            <a:endParaRPr sz="1150" b="0" i="1" dirty="0">
+              <a:t>: </a:t>
+            </a:r>
+            <a:r>
+              <a:rPr lang="en-AU" sz="2000" b="0" i="1" dirty="0">
+                <a:solidFill>
+                  <a:schemeClr val="accent6"/>
+                </a:solidFill>
+                <a:latin typeface="Segoe UI"/>
+              </a:rPr>
+              <a:t>pass</a:t>
+            </a:r>
+            <a:endParaRPr sz="2000" b="0" i="1" dirty="0">
               <a:solidFill>
-                <a:srgbClr val="2DD4BF"/>
+                <a:schemeClr val="accent6"/>
+              </a:solidFill>
+              <a:latin typeface="Segoe UI"/>
+            </a:endParaRPr>
+          </a:p>
+        </p:txBody>
+      </p:sp>
+      <p:sp>
+        <p:nvSpPr>
+          <p:cNvPr id="31" name="Rounded Rectangle 28">
+            <a:extLst>
+              <a:ext uri="{FF2B5EF4-FFF2-40B4-BE49-F238E27FC236}">
+                <a16:creationId xmlns:a16="http://schemas.microsoft.com/office/drawing/2014/main" id="{06ED7CB0-C34B-0301-F8DF-12A0BBC73FEF}"/>
+              </a:ext>
+            </a:extLst>
+          </p:cNvPr>
+          <p:cNvSpPr/>
+          <p:nvPr/>
+        </p:nvSpPr>
+        <p:spPr>
+          <a:xfrm>
+            <a:off x="7582204" y="4555750"/>
+            <a:ext cx="3164565" cy="822960"/>
+          </a:xfrm>
+          <a:prstGeom prst="roundRect">
+            <a:avLst>
+              <a:gd name="adj" fmla="val 6000"/>
+            </a:avLst>
+          </a:prstGeom>
+          <a:solidFill>
+            <a:srgbClr val="142847"/>
+          </a:solidFill>
+          <a:ln w="12700">
+            <a:solidFill>
+              <a:srgbClr val="2DD4BF"/>
+            </a:solidFill>
+          </a:ln>
+        </p:spPr>
+        <p:style>
+          <a:lnRef idx="1">
+            <a:schemeClr val="accent1"/>
+          </a:lnRef>
+          <a:fillRef idx="3">
+            <a:schemeClr val="accent1"/>
+          </a:fillRef>
+          <a:effectRef idx="2">
+            <a:schemeClr val="accent1"/>
+          </a:effectRef>
+          <a:fontRef idx="minor">
+            <a:schemeClr val="lt1"/>
+          </a:fontRef>
+        </p:style>
+        <p:txBody>
+          <a:bodyPr rtlCol="0" anchor="ctr"/>
+          <a:lstStyle/>
+          <a:p>
+            <a:pPr algn="ctr"/>
+            <a:endParaRPr sz="3600"/>
+          </a:p>
+        </p:txBody>
+      </p:sp>
+      <p:sp>
+        <p:nvSpPr>
+          <p:cNvPr id="33" name="TextBox 32">
+            <a:extLst>
+              <a:ext uri="{FF2B5EF4-FFF2-40B4-BE49-F238E27FC236}">
+                <a16:creationId xmlns:a16="http://schemas.microsoft.com/office/drawing/2014/main" id="{21BD7BAB-936D-79F8-C438-742001F9EF1C}"/>
+              </a:ext>
+            </a:extLst>
+          </p:cNvPr>
+          <p:cNvSpPr txBox="1"/>
+          <p:nvPr/>
+        </p:nvSpPr>
+        <p:spPr>
+          <a:xfrm>
+            <a:off x="7760584" y="4771999"/>
+            <a:ext cx="3041152" cy="379976"/>
+          </a:xfrm>
+          <a:prstGeom prst="rect">
+            <a:avLst/>
+          </a:prstGeom>
+          <a:noFill/>
+        </p:spPr>
+        <p:txBody>
+          <a:bodyPr wrap="square" lIns="0" tIns="0" rIns="0" bIns="0" anchor="ctr">
+            <a:spAutoFit/>
+          </a:bodyPr>
+          <a:lstStyle/>
+          <a:p>
+            <a:pPr>
+              <a:lnSpc>
+                <a:spcPct val="112000"/>
+              </a:lnSpc>
+            </a:pPr>
+            <a:r>
+              <a:rPr lang="en-US" sz="2400" b="1" dirty="0">
+                <a:solidFill>
+                  <a:srgbClr val="2DD4BF"/>
+                </a:solidFill>
+                <a:latin typeface="Segoe UI"/>
+              </a:rPr>
+              <a:t>Embedding models</a:t>
+            </a:r>
+            <a:endParaRPr lang="en-US" dirty="0">
+              <a:solidFill>
+                <a:srgbClr val="9FB3C8"/>
               </a:solidFill>
               <a:latin typeface="Segoe UI"/>
             </a:endParaRPr>
@@ -7770,7 +7851,7 @@
           <a:lstStyle/>
           <a:p>
             <a:pPr algn="ctr"/>
-            <a:endParaRPr/>
+            <a:endParaRPr sz="2800"/>
           </a:p>
         </p:txBody>
       </p:sp>
@@ -7782,8 +7863,8 @@
         </p:nvSpPr>
         <p:spPr>
           <a:xfrm>
-            <a:off x="1097280" y="2423160"/>
-            <a:ext cx="5486400" cy="457200"/>
+            <a:off x="960120" y="2639052"/>
+            <a:ext cx="5760720" cy="307777"/>
           </a:xfrm>
           <a:prstGeom prst="rect">
             <a:avLst/>
@@ -7798,48 +7879,31 @@
           <a:p>
             <a:pPr algn="l"/>
             <a:r>
-              <a:rPr sz="1500" b="1" i="0">
+              <a:rPr sz="2000" b="1" i="0" dirty="0">
                 <a:solidFill>
                   <a:srgbClr val="FFFFFF"/>
                 </a:solidFill>
                 <a:latin typeface="Segoe UI"/>
               </a:rPr>
-              <a:t>“Students must  ______  before the census date.”</a:t>
-            </a:r>
-          </a:p>
-        </p:txBody>
-      </p:sp>
-      <p:sp>
-        <p:nvSpPr>
-          <p:cNvPr id="15" name="TextBox 14"/>
-          <p:cNvSpPr txBox="1"/>
-          <p:nvPr/>
-        </p:nvSpPr>
-        <p:spPr>
-          <a:xfrm>
-            <a:off x="1097280" y="2926080"/>
-            <a:ext cx="5486400" cy="320040"/>
-          </a:xfrm>
-          <a:prstGeom prst="rect">
-            <a:avLst/>
-          </a:prstGeom>
-          <a:noFill/>
-        </p:spPr>
-        <p:txBody>
-          <a:bodyPr wrap="square" lIns="0" tIns="0" rIns="0" bIns="0" anchor="t">
-            <a:spAutoFit/>
-          </a:bodyPr>
-          <a:lstStyle/>
-          <a:p>
-            <a:pPr algn="l"/>
-            <a:r>
-              <a:rPr sz="1050" b="0" i="1">
-                <a:solidFill>
-                  <a:srgbClr val="9FB3C8"/>
-                </a:solidFill>
-                <a:latin typeface="Segoe UI"/>
-              </a:rPr>
-              <a:t>hide a word from a real sentence — make the computer guess it</a:t>
+              <a:t>“Students must  </a:t>
+            </a:r>
+            <a:r>
+              <a:rPr lang="en-AU" sz="2000" b="1" i="0" dirty="0">
+                <a:solidFill>
+                  <a:schemeClr val="accent6"/>
+                </a:solidFill>
+                <a:latin typeface="Segoe UI"/>
+              </a:rPr>
+              <a:t>______</a:t>
+            </a:r>
+            <a:r>
+              <a:rPr sz="2000" b="1" i="0" dirty="0">
+                <a:solidFill>
+                  <a:srgbClr val="FFFFFF"/>
+                </a:solidFill>
+                <a:latin typeface="Segoe UI"/>
+              </a:rPr>
+              <a:t>  before the census date.”</a:t>
             </a:r>
           </a:p>
         </p:txBody>
@@ -7888,7 +7952,7 @@
           <a:lstStyle/>
           <a:p>
             <a:pPr algn="ctr"/>
-            <a:endParaRPr/>
+            <a:endParaRPr sz="2800"/>
           </a:p>
         </p:txBody>
       </p:sp>
@@ -7901,7 +7965,7 @@
         <p:spPr>
           <a:xfrm>
             <a:off x="1097280" y="3749039"/>
-            <a:ext cx="5486400" cy="320040"/>
+            <a:ext cx="5486400" cy="246221"/>
           </a:xfrm>
           <a:prstGeom prst="rect">
             <a:avLst/>
@@ -7916,13 +7980,31 @@
           <a:p>
             <a:pPr algn="l"/>
             <a:r>
-              <a:rPr sz="1100" b="1" i="0">
+              <a:rPr sz="1600" b="1" i="0" dirty="0">
                 <a:solidFill>
                   <a:srgbClr val="9FB3C8"/>
                 </a:solidFill>
                 <a:latin typeface="Segoe UI"/>
               </a:rPr>
-              <a:t>the computer's guesses:</a:t>
+              <a:t>the </a:t>
+            </a:r>
+            <a:r>
+              <a:rPr lang="en-AU" sz="1600" b="1" i="0" dirty="0">
+                <a:solidFill>
+                  <a:srgbClr val="9FB3C8"/>
+                </a:solidFill>
+                <a:latin typeface="Segoe UI"/>
+              </a:rPr>
+              <a:t>model</a:t>
+            </a:r>
+            <a:r>
+              <a:rPr sz="1600" b="1" i="0" dirty="0">
+                <a:solidFill>
+                  <a:srgbClr val="9FB3C8"/>
+                </a:solidFill>
+                <a:latin typeface="Segoe UI"/>
+              </a:rPr>
+              <a:t> guesses:</a:t>
             </a:r>
           </a:p>
         </p:txBody>
@@ -7936,7 +8018,7 @@
         <p:spPr>
           <a:xfrm>
             <a:off x="1097280" y="4160520"/>
-            <a:ext cx="1188720" cy="320040"/>
+            <a:ext cx="1188720" cy="276999"/>
           </a:xfrm>
           <a:prstGeom prst="rect">
             <a:avLst/>
@@ -7951,7 +8033,7 @@
           <a:p>
             <a:pPr algn="l"/>
             <a:r>
-              <a:rPr sz="1200" b="1" i="0">
+              <a:rPr b="1" i="0" dirty="0" err="1">
                 <a:solidFill>
                   <a:srgbClr val="FFFFFF"/>
                 </a:solidFill>
@@ -7959,6 +8041,12 @@
               </a:rPr>
               <a:t>enrol</a:t>
             </a:r>
+            <a:endParaRPr b="1" i="0" dirty="0">
+              <a:solidFill>
+                <a:srgbClr val="FFFFFF"/>
+              </a:solidFill>
+              <a:latin typeface="Segoe UI"/>
+            </a:endParaRPr>
           </a:p>
         </p:txBody>
       </p:sp>
@@ -8004,7 +8092,7 @@
           <a:lstStyle/>
           <a:p>
             <a:pPr algn="ctr"/>
-            <a:endParaRPr/>
+            <a:endParaRPr sz="2800"/>
           </a:p>
         </p:txBody>
       </p:sp>
@@ -8017,7 +8105,7 @@
         <p:spPr>
           <a:xfrm>
             <a:off x="5120640" y="4160520"/>
-            <a:ext cx="822960" cy="320040"/>
+            <a:ext cx="822960" cy="215444"/>
           </a:xfrm>
           <a:prstGeom prst="rect">
             <a:avLst/>
@@ -8032,7 +8120,7 @@
           <a:p>
             <a:pPr algn="l"/>
             <a:r>
-              <a:rPr sz="1050" b="0" i="0">
+              <a:rPr sz="1400" b="0" i="0">
                 <a:solidFill>
                   <a:srgbClr val="9FB3C8"/>
                 </a:solidFill>
@@ -8052,7 +8140,7 @@
         <p:spPr>
           <a:xfrm>
             <a:off x="1097280" y="4572000"/>
-            <a:ext cx="1188720" cy="320040"/>
+            <a:ext cx="1188720" cy="276999"/>
           </a:xfrm>
           <a:prstGeom prst="rect">
             <a:avLst/>
@@ -8067,7 +8155,7 @@
           <a:p>
             <a:pPr algn="l"/>
             <a:r>
-              <a:rPr sz="1200" b="1" i="0">
+              <a:rPr b="1" i="0">
                 <a:solidFill>
                   <a:srgbClr val="FFFFFF"/>
                 </a:solidFill>
@@ -8120,7 +8208,7 @@
           <a:lstStyle/>
           <a:p>
             <a:pPr algn="ctr"/>
-            <a:endParaRPr/>
+            <a:endParaRPr sz="2800"/>
           </a:p>
         </p:txBody>
       </p:sp>
@@ -8133,7 +8221,7 @@
         <p:spPr>
           <a:xfrm>
             <a:off x="3794760" y="4572000"/>
-            <a:ext cx="822960" cy="320040"/>
+            <a:ext cx="822960" cy="215444"/>
           </a:xfrm>
           <a:prstGeom prst="rect">
             <a:avLst/>
@@ -8148,7 +8236,7 @@
           <a:p>
             <a:pPr algn="l"/>
             <a:r>
-              <a:rPr sz="1050" b="0" i="0">
+              <a:rPr sz="1400" b="0" i="0">
                 <a:solidFill>
                   <a:srgbClr val="9FB3C8"/>
                 </a:solidFill>
@@ -8168,7 +8256,7 @@
         <p:spPr>
           <a:xfrm>
             <a:off x="1097280" y="4983480"/>
-            <a:ext cx="1188720" cy="320040"/>
+            <a:ext cx="1188720" cy="276999"/>
           </a:xfrm>
           <a:prstGeom prst="rect">
             <a:avLst/>
@@ -8183,7 +8271,7 @@
           <a:p>
             <a:pPr algn="l"/>
             <a:r>
-              <a:rPr sz="1200" b="1" i="0">
+              <a:rPr b="1" i="0">
                 <a:solidFill>
                   <a:srgbClr val="FFFFFF"/>
                 </a:solidFill>
@@ -8236,7 +8324,7 @@
           <a:lstStyle/>
           <a:p>
             <a:pPr algn="ctr"/>
-            <a:endParaRPr/>
+            <a:endParaRPr sz="2800"/>
           </a:p>
         </p:txBody>
       </p:sp>
@@ -8249,7 +8337,7 @@
         <p:spPr>
           <a:xfrm>
             <a:off x="2542032" y="4983480"/>
-            <a:ext cx="822960" cy="320040"/>
+            <a:ext cx="822960" cy="215444"/>
           </a:xfrm>
           <a:prstGeom prst="rect">
             <a:avLst/>
@@ -8264,7 +8352,7 @@
           <a:p>
             <a:pPr algn="l"/>
             <a:r>
-              <a:rPr sz="1050" b="0" i="0">
+              <a:rPr sz="1400" b="0" i="0">
                 <a:solidFill>
                   <a:srgbClr val="9FB3C8"/>
                 </a:solidFill>
@@ -8272,6 +8360,638 @@
               </a:rPr>
               <a:t>0.1%</a:t>
             </a:r>
+          </a:p>
+        </p:txBody>
+      </p:sp>
+      <p:sp>
+        <p:nvSpPr>
+          <p:cNvPr id="12" name="TextBox 11">
+            <a:extLst>
+              <a:ext uri="{FF2B5EF4-FFF2-40B4-BE49-F238E27FC236}">
+                <a16:creationId xmlns:a16="http://schemas.microsoft.com/office/drawing/2014/main" id="{B620175A-9E58-D96F-6AAC-CAFEC3B2BD2E}"/>
+              </a:ext>
+            </a:extLst>
+          </p:cNvPr>
+          <p:cNvSpPr txBox="1"/>
+          <p:nvPr/>
+        </p:nvSpPr>
+        <p:spPr>
+          <a:xfrm>
+            <a:off x="912345" y="1755755"/>
+            <a:ext cx="6310387" cy="307777"/>
+          </a:xfrm>
+          <a:prstGeom prst="rect">
+            <a:avLst/>
+          </a:prstGeom>
+          <a:noFill/>
+        </p:spPr>
+        <p:txBody>
+          <a:bodyPr wrap="square" lIns="0" tIns="0" rIns="0" bIns="0" anchor="t">
+            <a:spAutoFit/>
+          </a:bodyPr>
+          <a:lstStyle/>
+          <a:p>
+            <a:pPr algn="l"/>
+            <a:r>
+              <a:rPr sz="2000" b="1" i="0" dirty="0">
+                <a:solidFill>
+                  <a:srgbClr val="FFFFFF"/>
+                </a:solidFill>
+                <a:latin typeface="Segoe UI"/>
+              </a:rPr>
+              <a:t>“Students must  </a:t>
+            </a:r>
+            <a:r>
+              <a:rPr lang="en-AU" sz="2000" b="1" i="0" dirty="0">
+                <a:solidFill>
+                  <a:schemeClr val="accent6"/>
+                </a:solidFill>
+                <a:latin typeface="Segoe UI"/>
+              </a:rPr>
+              <a:t>enrol</a:t>
+            </a:r>
+            <a:r>
+              <a:rPr sz="2000" b="1" i="0" dirty="0">
+                <a:solidFill>
+                  <a:srgbClr val="FFFFFF"/>
+                </a:solidFill>
+                <a:latin typeface="Segoe UI"/>
+              </a:rPr>
+              <a:t> before the census date.”</a:t>
+            </a:r>
+          </a:p>
+        </p:txBody>
+      </p:sp>
+      <p:sp>
+        <p:nvSpPr>
+          <p:cNvPr id="28" name="TextBox 27">
+            <a:extLst>
+              <a:ext uri="{FF2B5EF4-FFF2-40B4-BE49-F238E27FC236}">
+                <a16:creationId xmlns:a16="http://schemas.microsoft.com/office/drawing/2014/main" id="{A1127620-5780-9B18-3BEF-FD88552971D7}"/>
+              </a:ext>
+            </a:extLst>
+          </p:cNvPr>
+          <p:cNvSpPr txBox="1"/>
+          <p:nvPr/>
+        </p:nvSpPr>
+        <p:spPr>
+          <a:xfrm>
+            <a:off x="7589520" y="3322292"/>
+            <a:ext cx="1188720" cy="276999"/>
+          </a:xfrm>
+          <a:prstGeom prst="rect">
+            <a:avLst/>
+          </a:prstGeom>
+          <a:noFill/>
+        </p:spPr>
+        <p:txBody>
+          <a:bodyPr wrap="square" lIns="0" tIns="0" rIns="0" bIns="0" anchor="t">
+            <a:spAutoFit/>
+          </a:bodyPr>
+          <a:lstStyle/>
+          <a:p>
+            <a:pPr algn="l"/>
+            <a:r>
+              <a:rPr b="1" i="0" dirty="0" err="1">
+                <a:solidFill>
+                  <a:srgbClr val="FFFFFF"/>
+                </a:solidFill>
+                <a:latin typeface="Segoe UI"/>
+              </a:rPr>
+              <a:t>enrol</a:t>
+            </a:r>
+            <a:endParaRPr b="1" i="0" dirty="0">
+              <a:solidFill>
+                <a:srgbClr val="FFFFFF"/>
+              </a:solidFill>
+              <a:latin typeface="Segoe UI"/>
+            </a:endParaRPr>
+          </a:p>
+        </p:txBody>
+      </p:sp>
+      <p:sp>
+        <p:nvSpPr>
+          <p:cNvPr id="30" name="TextBox 29">
+            <a:extLst>
+              <a:ext uri="{FF2B5EF4-FFF2-40B4-BE49-F238E27FC236}">
+                <a16:creationId xmlns:a16="http://schemas.microsoft.com/office/drawing/2014/main" id="{5503682E-B13A-DF96-D358-B4DF1478BA97}"/>
+              </a:ext>
+            </a:extLst>
+          </p:cNvPr>
+          <p:cNvSpPr txBox="1"/>
+          <p:nvPr/>
+        </p:nvSpPr>
+        <p:spPr>
+          <a:xfrm>
+            <a:off x="7589520" y="3733772"/>
+            <a:ext cx="1188720" cy="276999"/>
+          </a:xfrm>
+          <a:prstGeom prst="rect">
+            <a:avLst/>
+          </a:prstGeom>
+          <a:noFill/>
+        </p:spPr>
+        <p:txBody>
+          <a:bodyPr wrap="square" lIns="0" tIns="0" rIns="0" bIns="0" anchor="t">
+            <a:spAutoFit/>
+          </a:bodyPr>
+          <a:lstStyle/>
+          <a:p>
+            <a:pPr algn="l"/>
+            <a:r>
+              <a:rPr b="1" i="0">
+                <a:solidFill>
+                  <a:srgbClr val="FFFFFF"/>
+                </a:solidFill>
+                <a:latin typeface="Segoe UI"/>
+              </a:rPr>
+              <a:t>register</a:t>
+            </a:r>
+          </a:p>
+        </p:txBody>
+      </p:sp>
+      <p:sp>
+        <p:nvSpPr>
+          <p:cNvPr id="32" name="TextBox 31">
+            <a:extLst>
+              <a:ext uri="{FF2B5EF4-FFF2-40B4-BE49-F238E27FC236}">
+                <a16:creationId xmlns:a16="http://schemas.microsoft.com/office/drawing/2014/main" id="{17D22397-6A23-C843-9707-F1E4ACCF4D97}"/>
+              </a:ext>
+            </a:extLst>
+          </p:cNvPr>
+          <p:cNvSpPr txBox="1"/>
+          <p:nvPr/>
+        </p:nvSpPr>
+        <p:spPr>
+          <a:xfrm>
+            <a:off x="7589520" y="4145252"/>
+            <a:ext cx="1188720" cy="276999"/>
+          </a:xfrm>
+          <a:prstGeom prst="rect">
+            <a:avLst/>
+          </a:prstGeom>
+          <a:noFill/>
+        </p:spPr>
+        <p:txBody>
+          <a:bodyPr wrap="square" lIns="0" tIns="0" rIns="0" bIns="0" anchor="t">
+            <a:spAutoFit/>
+          </a:bodyPr>
+          <a:lstStyle/>
+          <a:p>
+            <a:pPr algn="l"/>
+            <a:r>
+              <a:rPr b="1" i="0">
+                <a:solidFill>
+                  <a:srgbClr val="FFFFFF"/>
+                </a:solidFill>
+                <a:latin typeface="Segoe UI"/>
+              </a:rPr>
+              <a:t>party</a:t>
+            </a:r>
+          </a:p>
+        </p:txBody>
+      </p:sp>
+      <p:sp>
+        <p:nvSpPr>
+          <p:cNvPr id="36" name="TextBox 35">
+            <a:extLst>
+              <a:ext uri="{FF2B5EF4-FFF2-40B4-BE49-F238E27FC236}">
+                <a16:creationId xmlns:a16="http://schemas.microsoft.com/office/drawing/2014/main" id="{EFFFC4AB-1A09-F9DF-C5F1-7CFA7AF33925}"/>
+              </a:ext>
+            </a:extLst>
+          </p:cNvPr>
+          <p:cNvSpPr txBox="1"/>
+          <p:nvPr/>
+        </p:nvSpPr>
+        <p:spPr>
+          <a:xfrm>
+            <a:off x="8915400" y="2746132"/>
+            <a:ext cx="1188720" cy="276999"/>
+          </a:xfrm>
+          <a:prstGeom prst="rect">
+            <a:avLst/>
+          </a:prstGeom>
+          <a:noFill/>
+        </p:spPr>
+        <p:txBody>
+          <a:bodyPr wrap="square" lIns="0" tIns="0" rIns="0" bIns="0" anchor="t">
+            <a:spAutoFit/>
+          </a:bodyPr>
+          <a:lstStyle/>
+          <a:p>
+            <a:pPr algn="l"/>
+            <a:r>
+              <a:rPr lang="en-AU" b="1" i="0" dirty="0">
+                <a:solidFill>
+                  <a:schemeClr val="accent1"/>
+                </a:solidFill>
+                <a:latin typeface="Segoe UI"/>
+              </a:rPr>
+              <a:t>Initial</a:t>
+            </a:r>
+            <a:endParaRPr b="1" i="0" dirty="0">
+              <a:solidFill>
+                <a:schemeClr val="accent1"/>
+              </a:solidFill>
+              <a:latin typeface="Segoe UI"/>
+            </a:endParaRPr>
+          </a:p>
+        </p:txBody>
+      </p:sp>
+      <p:sp>
+        <p:nvSpPr>
+          <p:cNvPr id="38" name="TextBox 37">
+            <a:extLst>
+              <a:ext uri="{FF2B5EF4-FFF2-40B4-BE49-F238E27FC236}">
+                <a16:creationId xmlns:a16="http://schemas.microsoft.com/office/drawing/2014/main" id="{9EEA4408-7C3D-20F4-7C8A-7AD6919E3B9D}"/>
+              </a:ext>
+            </a:extLst>
+          </p:cNvPr>
+          <p:cNvSpPr txBox="1"/>
+          <p:nvPr/>
+        </p:nvSpPr>
+        <p:spPr>
+          <a:xfrm>
+            <a:off x="10553547" y="2762042"/>
+            <a:ext cx="1188720" cy="276999"/>
+          </a:xfrm>
+          <a:prstGeom prst="rect">
+            <a:avLst/>
+          </a:prstGeom>
+          <a:noFill/>
+        </p:spPr>
+        <p:txBody>
+          <a:bodyPr wrap="square" lIns="0" tIns="0" rIns="0" bIns="0" anchor="t">
+            <a:spAutoFit/>
+          </a:bodyPr>
+          <a:lstStyle/>
+          <a:p>
+            <a:pPr algn="l"/>
+            <a:r>
+              <a:rPr lang="en-AU" b="1" i="0" dirty="0">
+                <a:solidFill>
+                  <a:schemeClr val="accent1"/>
+                </a:solidFill>
+                <a:latin typeface="Segoe UI"/>
+              </a:rPr>
+              <a:t>End</a:t>
+            </a:r>
+            <a:endParaRPr b="1" i="0" dirty="0">
+              <a:solidFill>
+                <a:schemeClr val="accent1"/>
+              </a:solidFill>
+              <a:latin typeface="Segoe UI"/>
+            </a:endParaRPr>
+          </a:p>
+        </p:txBody>
+      </p:sp>
+      <p:sp>
+        <p:nvSpPr>
+          <p:cNvPr id="40" name="TextBox 39">
+            <a:extLst>
+              <a:ext uri="{FF2B5EF4-FFF2-40B4-BE49-F238E27FC236}">
+                <a16:creationId xmlns:a16="http://schemas.microsoft.com/office/drawing/2014/main" id="{AD931E22-6F42-2750-7DBC-2129A9852DAC}"/>
+              </a:ext>
+            </a:extLst>
+          </p:cNvPr>
+          <p:cNvSpPr txBox="1"/>
+          <p:nvPr/>
+        </p:nvSpPr>
+        <p:spPr>
+          <a:xfrm>
+            <a:off x="8615841" y="3318519"/>
+            <a:ext cx="1652871" cy="307777"/>
+          </a:xfrm>
+          <a:prstGeom prst="rect">
+            <a:avLst/>
+          </a:prstGeom>
+          <a:noFill/>
+        </p:spPr>
+        <p:txBody>
+          <a:bodyPr wrap="square">
+            <a:spAutoFit/>
+          </a:bodyPr>
+          <a:lstStyle/>
+          <a:p>
+            <a:r>
+              <a:rPr lang="en-AU" sz="1400" b="1" i="0" dirty="0">
+                <a:solidFill>
+                  <a:srgbClr val="2DD4BF"/>
+                </a:solidFill>
+                <a:latin typeface="Consolas"/>
+              </a:rPr>
+              <a:t> [-1.2, 0.1]</a:t>
+            </a:r>
+            <a:endParaRPr lang="en-AU" sz="1400" dirty="0"/>
+          </a:p>
+        </p:txBody>
+      </p:sp>
+      <p:sp>
+        <p:nvSpPr>
+          <p:cNvPr id="47" name="Speech Bubble: Rectangle 46">
+            <a:extLst>
+              <a:ext uri="{FF2B5EF4-FFF2-40B4-BE49-F238E27FC236}">
+                <a16:creationId xmlns:a16="http://schemas.microsoft.com/office/drawing/2014/main" id="{6ED2C494-AC48-6B2C-D150-C5FCD861D989}"/>
+              </a:ext>
+            </a:extLst>
+          </p:cNvPr>
+          <p:cNvSpPr/>
+          <p:nvPr/>
+        </p:nvSpPr>
+        <p:spPr>
+          <a:xfrm>
+            <a:off x="8778240" y="5091202"/>
+            <a:ext cx="2073202" cy="819874"/>
+          </a:xfrm>
+          <a:prstGeom prst="wedgeRectCallout">
+            <a:avLst>
+              <a:gd name="adj1" fmla="val -22320"/>
+              <a:gd name="adj2" fmla="val -121711"/>
+            </a:avLst>
+          </a:prstGeom>
+          <a:noFill/>
+          <a:ln w="9525" cap="flat" cmpd="sng" algn="ctr">
+            <a:solidFill>
+              <a:schemeClr val="accent2"/>
+            </a:solidFill>
+            <a:prstDash val="solid"/>
+            <a:round/>
+            <a:headEnd type="none" w="med" len="med"/>
+            <a:tailEnd type="none" w="med" len="med"/>
+          </a:ln>
+        </p:spPr>
+        <p:style>
+          <a:lnRef idx="0">
+            <a:scrgbClr r="0" g="0" b="0"/>
+          </a:lnRef>
+          <a:fillRef idx="0">
+            <a:scrgbClr r="0" g="0" b="0"/>
+          </a:fillRef>
+          <a:effectRef idx="0">
+            <a:scrgbClr r="0" g="0" b="0"/>
+          </a:effectRef>
+          <a:fontRef idx="minor">
+            <a:schemeClr val="accent2"/>
+          </a:fontRef>
+        </p:style>
+        <p:txBody>
+          <a:bodyPr rtlCol="0" anchor="ctr"/>
+          <a:lstStyle/>
+          <a:p>
+            <a:pPr algn="ctr"/>
+            <a:endParaRPr lang="en-AU"/>
+          </a:p>
+        </p:txBody>
+      </p:sp>
+      <p:sp>
+        <p:nvSpPr>
+          <p:cNvPr id="49" name="TextBox 48">
+            <a:extLst>
+              <a:ext uri="{FF2B5EF4-FFF2-40B4-BE49-F238E27FC236}">
+                <a16:creationId xmlns:a16="http://schemas.microsoft.com/office/drawing/2014/main" id="{AFC9EA35-754A-3621-0897-1785EF02D02D}"/>
+              </a:ext>
+            </a:extLst>
+          </p:cNvPr>
+          <p:cNvSpPr txBox="1"/>
+          <p:nvPr/>
+        </p:nvSpPr>
+        <p:spPr>
+          <a:xfrm>
+            <a:off x="8892221" y="5349087"/>
+            <a:ext cx="1845239" cy="215444"/>
+          </a:xfrm>
+          <a:prstGeom prst="rect">
+            <a:avLst/>
+          </a:prstGeom>
+          <a:noFill/>
+        </p:spPr>
+        <p:txBody>
+          <a:bodyPr wrap="square" lIns="0" tIns="0" rIns="0" bIns="0" anchor="t">
+            <a:spAutoFit/>
+          </a:bodyPr>
+          <a:lstStyle/>
+          <a:p>
+            <a:pPr algn="l"/>
+            <a:r>
+              <a:rPr lang="en-AU" sz="1400" b="1" i="0" dirty="0">
+                <a:solidFill>
+                  <a:schemeClr val="accent6"/>
+                </a:solidFill>
+                <a:latin typeface="Segoe UI"/>
+              </a:rPr>
+              <a:t> Random initialisation</a:t>
+            </a:r>
+            <a:endParaRPr sz="1400" b="1" i="0" dirty="0">
+              <a:solidFill>
+                <a:schemeClr val="accent6"/>
+              </a:solidFill>
+              <a:latin typeface="Segoe UI"/>
+            </a:endParaRPr>
+          </a:p>
+        </p:txBody>
+      </p:sp>
+      <p:sp>
+        <p:nvSpPr>
+          <p:cNvPr id="51" name="TextBox 50">
+            <a:extLst>
+              <a:ext uri="{FF2B5EF4-FFF2-40B4-BE49-F238E27FC236}">
+                <a16:creationId xmlns:a16="http://schemas.microsoft.com/office/drawing/2014/main" id="{59E72985-A6F8-61FC-6A43-27D8EA5041B2}"/>
+              </a:ext>
+            </a:extLst>
+          </p:cNvPr>
+          <p:cNvSpPr txBox="1"/>
+          <p:nvPr/>
+        </p:nvSpPr>
+        <p:spPr>
+          <a:xfrm>
+            <a:off x="10127344" y="3337560"/>
+            <a:ext cx="1652871" cy="307777"/>
+          </a:xfrm>
+          <a:prstGeom prst="rect">
+            <a:avLst/>
+          </a:prstGeom>
+          <a:noFill/>
+        </p:spPr>
+        <p:txBody>
+          <a:bodyPr wrap="square">
+            <a:spAutoFit/>
+          </a:bodyPr>
+          <a:lstStyle/>
+          <a:p>
+            <a:r>
+              <a:rPr lang="en-AU" sz="1400" b="1" i="0" dirty="0">
+                <a:solidFill>
+                  <a:srgbClr val="2DD4BF"/>
+                </a:solidFill>
+                <a:latin typeface="Consolas"/>
+              </a:rPr>
+              <a:t> [5.2, 1.2]</a:t>
+            </a:r>
+            <a:endParaRPr lang="en-AU" sz="1400" dirty="0"/>
+          </a:p>
+        </p:txBody>
+      </p:sp>
+      <p:sp>
+        <p:nvSpPr>
+          <p:cNvPr id="53" name="TextBox 52">
+            <a:extLst>
+              <a:ext uri="{FF2B5EF4-FFF2-40B4-BE49-F238E27FC236}">
+                <a16:creationId xmlns:a16="http://schemas.microsoft.com/office/drawing/2014/main" id="{14AE1CC2-762A-C481-D2AC-AF7335A5F972}"/>
+              </a:ext>
+            </a:extLst>
+          </p:cNvPr>
+          <p:cNvSpPr txBox="1"/>
+          <p:nvPr/>
+        </p:nvSpPr>
+        <p:spPr>
+          <a:xfrm>
+            <a:off x="8598889" y="3740423"/>
+            <a:ext cx="1652871" cy="307777"/>
+          </a:xfrm>
+          <a:prstGeom prst="rect">
+            <a:avLst/>
+          </a:prstGeom>
+          <a:noFill/>
+        </p:spPr>
+        <p:txBody>
+          <a:bodyPr wrap="square">
+            <a:spAutoFit/>
+          </a:bodyPr>
+          <a:lstStyle/>
+          <a:p>
+            <a:r>
+              <a:rPr lang="en-AU" sz="1400" b="1" i="0" dirty="0">
+                <a:solidFill>
+                  <a:srgbClr val="2DD4BF"/>
+                </a:solidFill>
+                <a:latin typeface="Consolas"/>
+              </a:rPr>
+              <a:t> [1.3, -0.2]</a:t>
+            </a:r>
+            <a:endParaRPr lang="en-AU" sz="1400" dirty="0"/>
+          </a:p>
+        </p:txBody>
+      </p:sp>
+      <p:sp>
+        <p:nvSpPr>
+          <p:cNvPr id="55" name="TextBox 54">
+            <a:extLst>
+              <a:ext uri="{FF2B5EF4-FFF2-40B4-BE49-F238E27FC236}">
+                <a16:creationId xmlns:a16="http://schemas.microsoft.com/office/drawing/2014/main" id="{AA28CBCC-834E-C257-5394-5F9C1A1D9457}"/>
+              </a:ext>
+            </a:extLst>
+          </p:cNvPr>
+          <p:cNvSpPr txBox="1"/>
+          <p:nvPr/>
+        </p:nvSpPr>
+        <p:spPr>
+          <a:xfrm>
+            <a:off x="10110392" y="3759464"/>
+            <a:ext cx="1652871" cy="307777"/>
+          </a:xfrm>
+          <a:prstGeom prst="rect">
+            <a:avLst/>
+          </a:prstGeom>
+          <a:noFill/>
+        </p:spPr>
+        <p:txBody>
+          <a:bodyPr wrap="square">
+            <a:spAutoFit/>
+          </a:bodyPr>
+          <a:lstStyle/>
+          <a:p>
+            <a:r>
+              <a:rPr lang="en-AU" sz="1400" b="1" i="0" dirty="0">
+                <a:solidFill>
+                  <a:srgbClr val="2DD4BF"/>
+                </a:solidFill>
+                <a:latin typeface="Consolas"/>
+              </a:rPr>
+              <a:t> [5.1, 1.3]</a:t>
+            </a:r>
+            <a:endParaRPr lang="en-AU" sz="1400" dirty="0"/>
+          </a:p>
+        </p:txBody>
+      </p:sp>
+      <p:sp>
+        <p:nvSpPr>
+          <p:cNvPr id="57" name="TextBox 56">
+            <a:extLst>
+              <a:ext uri="{FF2B5EF4-FFF2-40B4-BE49-F238E27FC236}">
+                <a16:creationId xmlns:a16="http://schemas.microsoft.com/office/drawing/2014/main" id="{A1EB1A4C-5735-71D3-4C93-E7C16B675A22}"/>
+              </a:ext>
+            </a:extLst>
+          </p:cNvPr>
+          <p:cNvSpPr txBox="1"/>
+          <p:nvPr/>
+        </p:nvSpPr>
+        <p:spPr>
+          <a:xfrm>
+            <a:off x="8592211" y="4178530"/>
+            <a:ext cx="1652871" cy="307777"/>
+          </a:xfrm>
+          <a:prstGeom prst="rect">
+            <a:avLst/>
+          </a:prstGeom>
+          <a:noFill/>
+        </p:spPr>
+        <p:txBody>
+          <a:bodyPr wrap="square">
+            <a:spAutoFit/>
+          </a:bodyPr>
+          <a:lstStyle/>
+          <a:p>
+            <a:r>
+              <a:rPr lang="en-AU" sz="1400" b="1" i="0" dirty="0">
+                <a:solidFill>
+                  <a:srgbClr val="2DD4BF"/>
+                </a:solidFill>
+                <a:latin typeface="Consolas"/>
+              </a:rPr>
+              <a:t> [-2, 0.3]</a:t>
+            </a:r>
+            <a:endParaRPr lang="en-AU" sz="1400" dirty="0"/>
+          </a:p>
+        </p:txBody>
+      </p:sp>
+      <p:sp>
+        <p:nvSpPr>
+          <p:cNvPr id="59" name="TextBox 58">
+            <a:extLst>
+              <a:ext uri="{FF2B5EF4-FFF2-40B4-BE49-F238E27FC236}">
+                <a16:creationId xmlns:a16="http://schemas.microsoft.com/office/drawing/2014/main" id="{CB5C721B-3A2E-3938-8EA9-413E31E6E710}"/>
+              </a:ext>
+            </a:extLst>
+          </p:cNvPr>
+          <p:cNvSpPr txBox="1"/>
+          <p:nvPr/>
+        </p:nvSpPr>
+        <p:spPr>
+          <a:xfrm>
+            <a:off x="10103714" y="4197571"/>
+            <a:ext cx="1652871" cy="307777"/>
+          </a:xfrm>
+          <a:prstGeom prst="rect">
+            <a:avLst/>
+          </a:prstGeom>
+          <a:noFill/>
+        </p:spPr>
+        <p:txBody>
+          <a:bodyPr wrap="square">
+            <a:spAutoFit/>
+          </a:bodyPr>
+          <a:lstStyle/>
+          <a:p>
+            <a:r>
+              <a:rPr lang="en-AU" sz="1400" b="1" i="0" dirty="0">
+                <a:solidFill>
+                  <a:srgbClr val="2DD4BF"/>
+                </a:solidFill>
+                <a:latin typeface="Consolas"/>
+              </a:rPr>
+              <a:t> [-1.2, 5.1]</a:t>
+            </a:r>
+            <a:endParaRPr lang="en-AU" sz="1400" dirty="0"/>
           </a:p>
         </p:txBody>
       </p:sp>
@@ -8627,7 +9347,7 @@
         <p:spPr>
           <a:xfrm>
             <a:off x="822960" y="1737360"/>
-            <a:ext cx="5897880" cy="2377440"/>
+            <a:ext cx="10694370" cy="2377440"/>
           </a:xfrm>
           <a:prstGeom prst="roundRect">
             <a:avLst>
@@ -8662,42 +9382,7 @@
           <a:lstStyle/>
           <a:p>
             <a:pPr algn="ctr"/>
-            <a:endParaRPr/>
-          </a:p>
-        </p:txBody>
-      </p:sp>
-      <p:sp>
-        <p:nvSpPr>
-          <p:cNvPr id="13" name="TextBox 12"/>
-          <p:cNvSpPr txBox="1"/>
-          <p:nvPr/>
-        </p:nvSpPr>
-        <p:spPr>
-          <a:xfrm>
-            <a:off x="1051560" y="1874519"/>
-            <a:ext cx="5486400" cy="320040"/>
-          </a:xfrm>
-          <a:prstGeom prst="rect">
-            <a:avLst/>
-          </a:prstGeom>
-          <a:noFill/>
-        </p:spPr>
-        <p:txBody>
-          <a:bodyPr wrap="square" lIns="0" tIns="0" rIns="0" bIns="0" anchor="t">
-            <a:spAutoFit/>
-          </a:bodyPr>
-          <a:lstStyle/>
-          <a:p>
-            <a:pPr algn="l"/>
-            <a:r>
-              <a:rPr sz="1000" b="1" i="0">
-                <a:solidFill>
-                  <a:srgbClr val="9FB3C8"/>
-                </a:solidFill>
-                <a:latin typeface="Segoe UI"/>
-              </a:rPr>
-              <a:t>THE STORED KB — every chunk now carries its vector</a:t>
-            </a:r>
+            <a:endParaRPr sz="3600"/>
           </a:p>
         </p:txBody>
       </p:sp>
@@ -8709,8 +9394,8 @@
         </p:nvSpPr>
         <p:spPr>
           <a:xfrm>
-            <a:off x="1051560" y="2482317"/>
-            <a:ext cx="3749039" cy="156005"/>
+            <a:off x="1051560" y="2404315"/>
+            <a:ext cx="7768870" cy="312008"/>
           </a:xfrm>
           <a:prstGeom prst="rect">
             <a:avLst/>
@@ -8729,7 +9414,7 @@
               </a:lnSpc>
             </a:pPr>
             <a:r>
-              <a:rPr sz="1000" b="0" i="0" dirty="0">
+              <a:rPr sz="2000" b="0" i="0" dirty="0">
                 <a:solidFill>
                   <a:srgbClr val="FFFFFF"/>
                 </a:solidFill>
@@ -8738,7 +9423,7 @@
               <a:t>“</a:t>
             </a:r>
             <a:r>
-              <a:rPr sz="1000" b="1" i="0" dirty="0">
+              <a:rPr sz="2000" b="1" i="0" dirty="0">
                 <a:solidFill>
                   <a:schemeClr val="accent6"/>
                 </a:solidFill>
@@ -8747,7 +9432,7 @@
               <a:t>Enrolment</a:t>
             </a:r>
             <a:r>
-              <a:rPr sz="1000" b="0" i="0" dirty="0">
+              <a:rPr sz="2000" b="0" i="0" dirty="0">
                 <a:solidFill>
                   <a:srgbClr val="FFFFFF"/>
                 </a:solidFill>
@@ -8766,8 +9451,8 @@
         </p:nvSpPr>
         <p:spPr>
           <a:xfrm>
-            <a:off x="4892040" y="2286000"/>
-            <a:ext cx="1691640" cy="548640"/>
+            <a:off x="7546435" y="2308146"/>
+            <a:ext cx="2696900" cy="369332"/>
           </a:xfrm>
           <a:prstGeom prst="rect">
             <a:avLst/>
@@ -8782,7 +9467,7 @@
           <a:p>
             <a:pPr algn="l"/>
             <a:r>
-              <a:rPr sz="1050" b="1" i="0">
+              <a:rPr sz="2400" b="1" i="0" dirty="0">
                 <a:solidFill>
                   <a:srgbClr val="2DD4BF"/>
                 </a:solidFill>
@@ -8801,8 +9486,8 @@
         </p:nvSpPr>
         <p:spPr>
           <a:xfrm>
-            <a:off x="1051560" y="2852928"/>
-            <a:ext cx="3749039" cy="548640"/>
+            <a:off x="1051560" y="2971243"/>
+            <a:ext cx="7768870" cy="312008"/>
           </a:xfrm>
           <a:prstGeom prst="rect">
             <a:avLst/>
@@ -8821,7 +9506,7 @@
               </a:lnSpc>
             </a:pPr>
             <a:r>
-              <a:rPr sz="1000" b="0" i="0">
+              <a:rPr sz="2000" b="0" i="0" dirty="0">
                 <a:solidFill>
                   <a:srgbClr val="FFFFFF"/>
                 </a:solidFill>
@@ -8840,8 +9525,8 @@
         </p:nvSpPr>
         <p:spPr>
           <a:xfrm>
-            <a:off x="4892040" y="2852928"/>
-            <a:ext cx="1691640" cy="548640"/>
+            <a:off x="7546435" y="2875074"/>
+            <a:ext cx="2696900" cy="369332"/>
           </a:xfrm>
           <a:prstGeom prst="rect">
             <a:avLst/>
@@ -8856,7 +9541,7 @@
           <a:p>
             <a:pPr algn="l"/>
             <a:r>
-              <a:rPr sz="1050" b="1" i="0">
+              <a:rPr sz="2400" b="1" i="0">
                 <a:solidFill>
                   <a:srgbClr val="9FB3C8"/>
                 </a:solidFill>
@@ -8875,8 +9560,8 @@
         </p:nvSpPr>
         <p:spPr>
           <a:xfrm>
-            <a:off x="1051560" y="3419856"/>
-            <a:ext cx="3749039" cy="548640"/>
+            <a:off x="1051560" y="3538171"/>
+            <a:ext cx="7917779" cy="312008"/>
           </a:xfrm>
           <a:prstGeom prst="rect">
             <a:avLst/>
@@ -8895,7 +9580,7 @@
               </a:lnSpc>
             </a:pPr>
             <a:r>
-              <a:rPr sz="1000" b="0" i="0" dirty="0">
+              <a:rPr sz="2000" b="0" i="0" dirty="0">
                 <a:solidFill>
                   <a:srgbClr val="FFFFFF"/>
                 </a:solidFill>
@@ -8914,8 +9599,8 @@
         </p:nvSpPr>
         <p:spPr>
           <a:xfrm>
-            <a:off x="4892040" y="3419856"/>
-            <a:ext cx="1691640" cy="548640"/>
+            <a:off x="7546435" y="3442002"/>
+            <a:ext cx="2696900" cy="369332"/>
           </a:xfrm>
           <a:prstGeom prst="rect">
             <a:avLst/>
@@ -8930,7 +9615,7 @@
           <a:p>
             <a:pPr algn="l"/>
             <a:r>
-              <a:rPr sz="1050" b="1" i="0">
+              <a:rPr sz="2400" b="1" i="0">
                 <a:solidFill>
                   <a:srgbClr val="9FB3C8"/>
                 </a:solidFill>
@@ -8949,8 +9634,8 @@
         </p:nvSpPr>
         <p:spPr>
           <a:xfrm>
-            <a:off x="822960" y="4434840"/>
-            <a:ext cx="4114800" cy="731520"/>
+            <a:off x="621792" y="4859623"/>
+            <a:ext cx="3611880" cy="1114028"/>
           </a:xfrm>
           <a:prstGeom prst="roundRect">
             <a:avLst>
@@ -8985,7 +9670,7 @@
           <a:lstStyle/>
           <a:p>
             <a:pPr algn="ctr"/>
-            <a:endParaRPr/>
+            <a:endParaRPr sz="3600"/>
           </a:p>
         </p:txBody>
       </p:sp>
@@ -8997,8 +9682,8 @@
         </p:nvSpPr>
         <p:spPr>
           <a:xfrm>
-            <a:off x="1051560" y="4704259"/>
-            <a:ext cx="3657600" cy="192681"/>
+            <a:off x="923490" y="5057836"/>
+            <a:ext cx="3191309" cy="704424"/>
           </a:xfrm>
           <a:prstGeom prst="rect">
             <a:avLst/>
@@ -9017,7 +9702,7 @@
               </a:lnSpc>
             </a:pPr>
             <a:r>
-              <a:rPr sz="1150" b="1" i="1" dirty="0">
+              <a:rPr sz="2000" b="1" i="1" dirty="0">
                 <a:solidFill>
                   <a:srgbClr val="FFFFFF"/>
                 </a:solidFill>
@@ -9026,7 +9711,7 @@
               <a:t>“How do I fix a mistake in my </a:t>
             </a:r>
             <a:r>
-              <a:rPr sz="1150" b="1" i="1" dirty="0">
+              <a:rPr sz="2000" b="1" i="1" dirty="0">
                 <a:solidFill>
                   <a:schemeClr val="accent6"/>
                 </a:solidFill>
@@ -9035,7 +9720,7 @@
               <a:t>registration</a:t>
             </a:r>
             <a:r>
-              <a:rPr sz="1150" b="1" i="1" dirty="0">
+              <a:rPr sz="2000" b="1" i="1" dirty="0">
                 <a:solidFill>
                   <a:srgbClr val="FFFFFF"/>
                 </a:solidFill>
@@ -9054,7 +9739,7 @@
         </p:nvSpPr>
         <p:spPr>
           <a:xfrm>
-            <a:off x="5029200" y="4663440"/>
+            <a:off x="4389119" y="5279477"/>
             <a:ext cx="411480" cy="274320"/>
           </a:xfrm>
           <a:prstGeom prst="rightArrow">
@@ -9086,7 +9771,7 @@
           <a:lstStyle/>
           <a:p>
             <a:pPr algn="ctr"/>
-            <a:endParaRPr/>
+            <a:endParaRPr sz="3600"/>
           </a:p>
         </p:txBody>
       </p:sp>
@@ -9098,8 +9783,8 @@
         </p:nvSpPr>
         <p:spPr>
           <a:xfrm>
-            <a:off x="5532120" y="4434840"/>
-            <a:ext cx="1691640" cy="731520"/>
+            <a:off x="4946849" y="5030740"/>
+            <a:ext cx="2276911" cy="731520"/>
           </a:xfrm>
           <a:prstGeom prst="roundRect">
             <a:avLst>
@@ -9134,7 +9819,7 @@
           <a:lstStyle/>
           <a:p>
             <a:pPr algn="ctr"/>
-            <a:endParaRPr/>
+            <a:endParaRPr sz="3600"/>
           </a:p>
         </p:txBody>
       </p:sp>
@@ -9146,8 +9831,8 @@
         </p:nvSpPr>
         <p:spPr>
           <a:xfrm>
-            <a:off x="5669280" y="4434840"/>
-            <a:ext cx="1417320" cy="731520"/>
+            <a:off x="5017475" y="5242613"/>
+            <a:ext cx="2151475" cy="307777"/>
           </a:xfrm>
           <a:prstGeom prst="rect">
             <a:avLst/>
@@ -9162,7 +9847,7 @@
           <a:p>
             <a:pPr algn="ctr"/>
             <a:r>
-              <a:rPr sz="1100" b="1" i="0">
+              <a:rPr sz="2000" b="1" i="0" dirty="0">
                 <a:solidFill>
                   <a:srgbClr val="F5B342"/>
                 </a:solidFill>
@@ -9181,7 +9866,7 @@
         </p:nvSpPr>
         <p:spPr>
           <a:xfrm>
-            <a:off x="7315200" y="4663440"/>
+            <a:off x="7315200" y="5259340"/>
             <a:ext cx="411480" cy="274320"/>
           </a:xfrm>
           <a:prstGeom prst="rightArrow">
@@ -9213,7 +9898,7 @@
           <a:lstStyle/>
           <a:p>
             <a:pPr algn="ctr"/>
-            <a:endParaRPr/>
+            <a:endParaRPr sz="3600"/>
           </a:p>
         </p:txBody>
       </p:sp>
@@ -9225,8 +9910,8 @@
         </p:nvSpPr>
         <p:spPr>
           <a:xfrm>
-            <a:off x="7818120" y="4343400"/>
-            <a:ext cx="3566160" cy="914400"/>
+            <a:off x="7772399" y="4779945"/>
+            <a:ext cx="3899043" cy="1310514"/>
           </a:xfrm>
           <a:prstGeom prst="roundRect">
             <a:avLst>
@@ -9261,7 +9946,7 @@
           <a:lstStyle/>
           <a:p>
             <a:pPr algn="ctr"/>
-            <a:endParaRPr/>
+            <a:endParaRPr sz="3600"/>
           </a:p>
         </p:txBody>
       </p:sp>
@@ -9273,8 +9958,8 @@
         </p:nvSpPr>
         <p:spPr>
           <a:xfrm>
-            <a:off x="8046720" y="4343400"/>
-            <a:ext cx="3108960" cy="914400"/>
+            <a:off x="8046720" y="5119503"/>
+            <a:ext cx="3108960" cy="553998"/>
           </a:xfrm>
           <a:prstGeom prst="rect">
             <a:avLst/>
@@ -9287,25 +9972,9 @@
           </a:bodyPr>
           <a:lstStyle/>
           <a:p>
-            <a:pPr algn="l">
-              <a:lnSpc>
-                <a:spcPct val="120000"/>
-              </a:lnSpc>
-            </a:pPr>
-            <a:r>
-              <a:rPr sz="1100" b="1" i="0">
-                <a:solidFill>
-                  <a:srgbClr val="FFFFFF"/>
-                </a:solidFill>
-                <a:latin typeface="Segoe UI"/>
-              </a:rPr>
-              <a:t>nearest chunk: “Enrolment corrections…”</a:t>
-            </a:r>
-          </a:p>
-          <a:p>
             <a:pPr algn="l"/>
             <a:r>
-              <a:rPr sz="1050" b="1" i="0">
+              <a:rPr b="1" i="0" dirty="0">
                 <a:solidFill>
                   <a:srgbClr val="2DD4BF"/>
                 </a:solidFill>
@@ -9316,6 +9985,44 @@
           </a:p>
         </p:txBody>
       </p:sp>
+      <p:cxnSp>
+        <p:nvCxnSpPr>
+          <p:cNvPr id="10" name="Straight Connector 9">
+            <a:extLst>
+              <a:ext uri="{FF2B5EF4-FFF2-40B4-BE49-F238E27FC236}">
+                <a16:creationId xmlns:a16="http://schemas.microsoft.com/office/drawing/2014/main" id="{EE2B2394-DD9F-AF53-F463-696459D8D471}"/>
+              </a:ext>
+            </a:extLst>
+          </p:cNvPr>
+          <p:cNvCxnSpPr>
+            <a:cxnSpLocks/>
+          </p:cNvCxnSpPr>
+          <p:nvPr/>
+        </p:nvCxnSpPr>
+        <p:spPr>
+          <a:xfrm flipH="1">
+            <a:off x="6641179" y="2656930"/>
+            <a:ext cx="879761" cy="2585683"/>
+          </a:xfrm>
+          <a:prstGeom prst="line">
+            <a:avLst/>
+          </a:prstGeom>
+        </p:spPr>
+        <p:style>
+          <a:lnRef idx="2">
+            <a:schemeClr val="accent6"/>
+          </a:lnRef>
+          <a:fillRef idx="0">
+            <a:schemeClr val="accent6"/>
+          </a:fillRef>
+          <a:effectRef idx="1">
+            <a:schemeClr val="accent6"/>
+          </a:effectRef>
+          <a:fontRef idx="minor">
+            <a:schemeClr val="tx1"/>
+          </a:fontRef>
+        </p:style>
+      </p:cxnSp>
     </p:spTree>
   </p:cSld>
   <p:clrMapOvr>
@@ -9712,7 +10419,7 @@
         <p:spPr>
           <a:xfrm>
             <a:off x="822960" y="1664208"/>
-            <a:ext cx="5486400" cy="292608"/>
+            <a:ext cx="5486400" cy="215444"/>
           </a:xfrm>
           <a:prstGeom prst="rect">
             <a:avLst/>
@@ -9727,14 +10434,29 @@
           <a:p>
             <a:pPr algn="l"/>
             <a:r>
-              <a:rPr sz="1000" b="1" i="0">
+              <a:rPr sz="1400" b="1" i="0" dirty="0">
                 <a:solidFill>
                   <a:srgbClr val="9FB3C8"/>
                 </a:solidFill>
                 <a:latin typeface="Segoe UI"/>
               </a:rPr>
-              <a:t>BUILT ONCE — BEFORE ANY QUESTION</a:t>
-            </a:r>
+              <a:t>BUILT ONCE — </a:t>
+            </a:r>
+            <a:r>
+              <a:rPr lang="en-AU" sz="1400" b="1" i="0" dirty="0">
+                <a:solidFill>
+                  <a:srgbClr val="9FB3C8"/>
+                </a:solidFill>
+                <a:latin typeface="Segoe UI"/>
+              </a:rPr>
+              <a:t>Building up Knowledge</a:t>
+            </a:r>
+            <a:endParaRPr sz="1400" b="1" i="0" dirty="0">
+              <a:solidFill>
+                <a:srgbClr val="9FB3C8"/>
+              </a:solidFill>
+              <a:latin typeface="Segoe UI"/>
+            </a:endParaRPr>
           </a:p>
         </p:txBody>
       </p:sp>
@@ -9782,7 +10504,7 @@
           <a:lstStyle/>
           <a:p>
             <a:pPr algn="ctr"/>
-            <a:endParaRPr/>
+            <a:endParaRPr sz="3200"/>
           </a:p>
         </p:txBody>
       </p:sp>
@@ -9794,8 +10516,8 @@
         </p:nvSpPr>
         <p:spPr>
           <a:xfrm>
-            <a:off x="896112" y="2011680"/>
-            <a:ext cx="2311146" cy="731520"/>
+            <a:off x="896112" y="2239100"/>
+            <a:ext cx="2311146" cy="276679"/>
           </a:xfrm>
           <a:prstGeom prst="rect">
             <a:avLst/>
@@ -9814,7 +10536,7 @@
               </a:lnSpc>
             </a:pPr>
             <a:r>
-              <a:rPr sz="1100" b="1" i="0">
+              <a:rPr b="1" i="0">
                 <a:solidFill>
                   <a:srgbClr val="FFFFFF"/>
                 </a:solidFill>
@@ -9865,7 +10587,7 @@
           <a:lstStyle/>
           <a:p>
             <a:pPr algn="ctr"/>
-            <a:endParaRPr/>
+            <a:endParaRPr sz="3200"/>
           </a:p>
         </p:txBody>
       </p:sp>
@@ -9913,7 +10635,7 @@
           <a:lstStyle/>
           <a:p>
             <a:pPr algn="ctr"/>
-            <a:endParaRPr/>
+            <a:endParaRPr sz="3200"/>
           </a:p>
         </p:txBody>
       </p:sp>
@@ -9925,8 +10647,8 @@
         </p:nvSpPr>
         <p:spPr>
           <a:xfrm>
-            <a:off x="3591306" y="2011680"/>
-            <a:ext cx="2311146" cy="731520"/>
+            <a:off x="3591306" y="2239100"/>
+            <a:ext cx="2311146" cy="276679"/>
           </a:xfrm>
           <a:prstGeom prst="rect">
             <a:avLst/>
@@ -9945,7 +10667,7 @@
               </a:lnSpc>
             </a:pPr>
             <a:r>
-              <a:rPr sz="1100" b="1" i="0">
+              <a:rPr b="1" i="0">
                 <a:solidFill>
                   <a:srgbClr val="FFFFFF"/>
                 </a:solidFill>
@@ -9996,7 +10718,7 @@
           <a:lstStyle/>
           <a:p>
             <a:pPr algn="ctr"/>
-            <a:endParaRPr/>
+            <a:endParaRPr sz="3200"/>
           </a:p>
         </p:txBody>
       </p:sp>
@@ -10044,7 +10766,7 @@
           <a:lstStyle/>
           <a:p>
             <a:pPr algn="ctr"/>
-            <a:endParaRPr/>
+            <a:endParaRPr sz="3200"/>
           </a:p>
         </p:txBody>
       </p:sp>
@@ -10056,8 +10778,8 @@
         </p:nvSpPr>
         <p:spPr>
           <a:xfrm>
-            <a:off x="6286500" y="2011680"/>
-            <a:ext cx="2311146" cy="731520"/>
+            <a:off x="6286500" y="2239100"/>
+            <a:ext cx="2311146" cy="276679"/>
           </a:xfrm>
           <a:prstGeom prst="rect">
             <a:avLst/>
@@ -10076,7 +10798,7 @@
               </a:lnSpc>
             </a:pPr>
             <a:r>
-              <a:rPr sz="1100" b="1" i="0">
+              <a:rPr b="1" i="0">
                 <a:solidFill>
                   <a:srgbClr val="FFFFFF"/>
                 </a:solidFill>
@@ -10127,7 +10849,7 @@
           <a:lstStyle/>
           <a:p>
             <a:pPr algn="ctr"/>
-            <a:endParaRPr/>
+            <a:endParaRPr sz="3200"/>
           </a:p>
         </p:txBody>
       </p:sp>
@@ -10175,7 +10897,7 @@
           <a:lstStyle/>
           <a:p>
             <a:pPr algn="ctr"/>
-            <a:endParaRPr/>
+            <a:endParaRPr sz="3200"/>
           </a:p>
         </p:txBody>
       </p:sp>
@@ -10187,8 +10909,8 @@
         </p:nvSpPr>
         <p:spPr>
           <a:xfrm>
-            <a:off x="8981694" y="2011680"/>
-            <a:ext cx="2311146" cy="731520"/>
+            <a:off x="8981694" y="2239100"/>
+            <a:ext cx="2311146" cy="276679"/>
           </a:xfrm>
           <a:prstGeom prst="rect">
             <a:avLst/>
@@ -10207,7 +10929,7 @@
               </a:lnSpc>
             </a:pPr>
             <a:r>
-              <a:rPr sz="1100" b="1" i="0">
+              <a:rPr b="1" i="0">
                 <a:solidFill>
                   <a:srgbClr val="FFFFFF"/>
                 </a:solidFill>
@@ -10227,7 +10949,7 @@
         <p:spPr>
           <a:xfrm>
             <a:off x="822960" y="2999232"/>
-            <a:ext cx="5486400" cy="292608"/>
+            <a:ext cx="5486400" cy="215444"/>
           </a:xfrm>
           <a:prstGeom prst="rect">
             <a:avLst/>
@@ -10242,7 +10964,7 @@
           <a:p>
             <a:pPr algn="l"/>
             <a:r>
-              <a:rPr sz="1000" b="1" i="0">
+              <a:rPr sz="1400" b="1" i="0">
                 <a:solidFill>
                   <a:srgbClr val="9FB3C8"/>
                 </a:solidFill>
@@ -10297,7 +11019,7 @@
           <a:lstStyle/>
           <a:p>
             <a:pPr algn="ctr"/>
-            <a:endParaRPr/>
+            <a:endParaRPr sz="3200"/>
           </a:p>
         </p:txBody>
       </p:sp>
@@ -10309,8 +11031,8 @@
         </p:nvSpPr>
         <p:spPr>
           <a:xfrm>
-            <a:off x="896112" y="3310128"/>
-            <a:ext cx="1412748" cy="868680"/>
+            <a:off x="896112" y="3636874"/>
+            <a:ext cx="1412748" cy="215187"/>
           </a:xfrm>
           <a:prstGeom prst="rect">
             <a:avLst/>
@@ -10329,7 +11051,7 @@
               </a:lnSpc>
             </a:pPr>
             <a:r>
-              <a:rPr sz="1000" b="1" i="0">
+              <a:rPr sz="1400" b="1" i="0">
                 <a:solidFill>
                   <a:srgbClr val="FFFFFF"/>
                 </a:solidFill>
@@ -10380,7 +11102,7 @@
           <a:lstStyle/>
           <a:p>
             <a:pPr algn="ctr"/>
-            <a:endParaRPr/>
+            <a:endParaRPr sz="3200"/>
           </a:p>
         </p:txBody>
       </p:sp>
@@ -10428,7 +11150,7 @@
           <a:lstStyle/>
           <a:p>
             <a:pPr algn="ctr"/>
-            <a:endParaRPr/>
+            <a:endParaRPr sz="3200"/>
           </a:p>
         </p:txBody>
       </p:sp>
@@ -10440,8 +11162,8 @@
         </p:nvSpPr>
         <p:spPr>
           <a:xfrm>
-            <a:off x="2692908" y="3310128"/>
-            <a:ext cx="1412748" cy="868680"/>
+            <a:off x="2692908" y="3520528"/>
+            <a:ext cx="1412748" cy="447880"/>
           </a:xfrm>
           <a:prstGeom prst="rect">
             <a:avLst/>
@@ -10460,7 +11182,7 @@
               </a:lnSpc>
             </a:pPr>
             <a:r>
-              <a:rPr sz="1000" b="1" i="0">
+              <a:rPr sz="1400" b="1" i="0">
                 <a:solidFill>
                   <a:srgbClr val="FFFFFF"/>
                 </a:solidFill>
@@ -10511,7 +11233,7 @@
           <a:lstStyle/>
           <a:p>
             <a:pPr algn="ctr"/>
-            <a:endParaRPr/>
+            <a:endParaRPr sz="3200"/>
           </a:p>
         </p:txBody>
       </p:sp>
@@ -10559,7 +11281,7 @@
           <a:lstStyle/>
           <a:p>
             <a:pPr algn="ctr"/>
-            <a:endParaRPr/>
+            <a:endParaRPr sz="3200"/>
           </a:p>
         </p:txBody>
       </p:sp>
@@ -10571,8 +11293,8 @@
         </p:nvSpPr>
         <p:spPr>
           <a:xfrm>
-            <a:off x="4489704" y="3310128"/>
-            <a:ext cx="1412748" cy="868680"/>
+            <a:off x="4489704" y="3520528"/>
+            <a:ext cx="1412748" cy="447880"/>
           </a:xfrm>
           <a:prstGeom prst="rect">
             <a:avLst/>
@@ -10591,7 +11313,7 @@
               </a:lnSpc>
             </a:pPr>
             <a:r>
-              <a:rPr sz="1000" b="1" i="0">
+              <a:rPr sz="1400" b="1" i="0">
                 <a:solidFill>
                   <a:srgbClr val="FFFFFF"/>
                 </a:solidFill>
@@ -10642,7 +11364,7 @@
           <a:lstStyle/>
           <a:p>
             <a:pPr algn="ctr"/>
-            <a:endParaRPr/>
+            <a:endParaRPr sz="3200"/>
           </a:p>
         </p:txBody>
       </p:sp>
@@ -10690,7 +11412,7 @@
           <a:lstStyle/>
           <a:p>
             <a:pPr algn="ctr"/>
-            <a:endParaRPr/>
+            <a:endParaRPr sz="3200"/>
           </a:p>
         </p:txBody>
       </p:sp>
@@ -10702,8 +11424,8 @@
         </p:nvSpPr>
         <p:spPr>
           <a:xfrm>
-            <a:off x="6286500" y="3310128"/>
-            <a:ext cx="1412748" cy="868680"/>
+            <a:off x="6286500" y="3404183"/>
+            <a:ext cx="1412748" cy="680571"/>
           </a:xfrm>
           <a:prstGeom prst="rect">
             <a:avLst/>
@@ -10722,7 +11444,7 @@
               </a:lnSpc>
             </a:pPr>
             <a:r>
-              <a:rPr sz="1000" b="1" i="0">
+              <a:rPr sz="1400" b="1" i="0">
                 <a:solidFill>
                   <a:srgbClr val="FFFFFF"/>
                 </a:solidFill>
@@ -10774,7 +11496,7 @@
           <a:lstStyle/>
           <a:p>
             <a:pPr algn="ctr"/>
-            <a:endParaRPr/>
+            <a:endParaRPr sz="3200"/>
           </a:p>
         </p:txBody>
       </p:sp>
@@ -10822,7 +11544,7 @@
           <a:lstStyle/>
           <a:p>
             <a:pPr algn="ctr"/>
-            <a:endParaRPr/>
+            <a:endParaRPr sz="3200"/>
           </a:p>
         </p:txBody>
       </p:sp>
@@ -10834,8 +11556,8 @@
         </p:nvSpPr>
         <p:spPr>
           <a:xfrm>
-            <a:off x="8083296" y="3310128"/>
-            <a:ext cx="1412748" cy="868680"/>
+            <a:off x="8083296" y="3636874"/>
+            <a:ext cx="1412748" cy="215187"/>
           </a:xfrm>
           <a:prstGeom prst="rect">
             <a:avLst/>
@@ -10854,7 +11576,7 @@
               </a:lnSpc>
             </a:pPr>
             <a:r>
-              <a:rPr sz="1000" b="1" i="0">
+              <a:rPr sz="1400" b="1" i="0">
                 <a:solidFill>
                   <a:srgbClr val="FFFFFF"/>
                 </a:solidFill>
@@ -10905,7 +11627,7 @@
           <a:lstStyle/>
           <a:p>
             <a:pPr algn="ctr"/>
-            <a:endParaRPr/>
+            <a:endParaRPr sz="3200"/>
           </a:p>
         </p:txBody>
       </p:sp>
@@ -10953,7 +11675,7 @@
           <a:lstStyle/>
           <a:p>
             <a:pPr algn="ctr"/>
-            <a:endParaRPr/>
+            <a:endParaRPr sz="3200"/>
           </a:p>
         </p:txBody>
       </p:sp>
@@ -10965,8 +11687,8 @@
         </p:nvSpPr>
         <p:spPr>
           <a:xfrm>
-            <a:off x="9880092" y="3310128"/>
-            <a:ext cx="1412748" cy="868680"/>
+            <a:off x="9880092" y="3636874"/>
+            <a:ext cx="1412748" cy="215187"/>
           </a:xfrm>
           <a:prstGeom prst="rect">
             <a:avLst/>
@@ -10985,7 +11707,7 @@
               </a:lnSpc>
             </a:pPr>
             <a:r>
-              <a:rPr sz="1000" b="1" i="0">
+              <a:rPr sz="1400" b="1" i="0">
                 <a:solidFill>
                   <a:srgbClr val="FFFFFF"/>
                 </a:solidFill>
@@ -11010,21 +11732,17 @@
           <a:prstGeom prst="line">
             <a:avLst/>
           </a:prstGeom>
-          <a:ln w="15875">
-            <a:solidFill>
-              <a:srgbClr val="9FB3C8"/>
-            </a:solidFill>
-          </a:ln>
+          <a:ln/>
         </p:spPr>
         <p:style>
-          <a:lnRef idx="2">
-            <a:schemeClr val="accent1"/>
+          <a:lnRef idx="1">
+            <a:schemeClr val="accent6"/>
           </a:lnRef>
           <a:fillRef idx="0">
-            <a:schemeClr val="accent1"/>
+            <a:schemeClr val="accent6"/>
           </a:fillRef>
-          <a:effectRef idx="1">
-            <a:schemeClr val="accent1"/>
+          <a:effectRef idx="0">
+            <a:schemeClr val="accent6"/>
           </a:effectRef>
           <a:fontRef idx="minor">
             <a:schemeClr val="tx1"/>
@@ -11076,13 +11794,22 @@
           <a:p>
             <a:pPr algn="ctr"/>
             <a:r>
-              <a:rPr sz="850" b="1">
+              <a:rPr lang="en-AU" sz="1100" b="1" dirty="0">
                 <a:solidFill>
                   <a:srgbClr val="0B1B33"/>
                 </a:solidFill>
                 <a:latin typeface="Segoe UI"/>
               </a:rPr>
-              <a:t>the only AI box</a:t>
+              <a:t>The</a:t>
+            </a:r>
+            <a:r>
+              <a:rPr sz="1100" b="1" dirty="0">
+                <a:solidFill>
+                  <a:srgbClr val="0B1B33"/>
+                </a:solidFill>
+                <a:latin typeface="Segoe UI"/>
+              </a:rPr>
+              <a:t> AI box</a:t>
             </a:r>
           </a:p>
         </p:txBody>
@@ -11201,7 +11928,7 @@
         <p:spPr>
           <a:xfrm>
             <a:off x="2619756" y="4754880"/>
-            <a:ext cx="3355848" cy="292608"/>
+            <a:ext cx="3355848" cy="246221"/>
           </a:xfrm>
           <a:prstGeom prst="rect">
             <a:avLst/>
@@ -11216,7 +11943,7 @@
           <a:p>
             <a:pPr algn="ctr"/>
             <a:r>
-              <a:rPr sz="1050" b="1" i="0">
+              <a:rPr sz="1600" b="1" i="0">
                 <a:solidFill>
                   <a:srgbClr val="F5B342"/>
                 </a:solidFill>
@@ -11341,7 +12068,7 @@
         <p:spPr>
           <a:xfrm>
             <a:off x="6213348" y="4754880"/>
-            <a:ext cx="1559052" cy="292608"/>
+            <a:ext cx="1559052" cy="492443"/>
           </a:xfrm>
           <a:prstGeom prst="rect">
             <a:avLst/>
@@ -11356,7 +12083,7 @@
           <a:p>
             <a:pPr algn="ctr"/>
             <a:r>
-              <a:rPr sz="1050" b="1" i="0">
+              <a:rPr sz="1600" b="1" i="0">
                 <a:solidFill>
                   <a:srgbClr val="F5B342"/>
                 </a:solidFill>
@@ -11481,7 +12208,7 @@
         <p:spPr>
           <a:xfrm>
             <a:off x="8010144" y="4754880"/>
-            <a:ext cx="1559052" cy="292608"/>
+            <a:ext cx="1559052" cy="492443"/>
           </a:xfrm>
           <a:prstGeom prst="rect">
             <a:avLst/>
@@ -11496,7 +12223,7 @@
           <a:p>
             <a:pPr algn="ctr"/>
             <a:r>
-              <a:rPr sz="1050" b="1" i="0">
+              <a:rPr sz="1600" b="1" i="0">
                 <a:solidFill>
                   <a:srgbClr val="F5B342"/>
                 </a:solidFill>
@@ -11563,8 +12290,8 @@
         </p:nvSpPr>
         <p:spPr>
           <a:xfrm>
-            <a:off x="1097280" y="5534980"/>
-            <a:ext cx="10058400" cy="268600"/>
+            <a:off x="3249549" y="5419778"/>
+            <a:ext cx="5658993" cy="501419"/>
           </a:xfrm>
           <a:prstGeom prst="rect">
             <a:avLst/>
@@ -11583,32 +12310,126 @@
               </a:lnSpc>
             </a:pPr>
             <a:r>
-              <a:rPr sz="1500" b="1" i="0" dirty="0">
+              <a:rPr sz="2800" b="1" i="0" dirty="0">
                 <a:solidFill>
                   <a:srgbClr val="FFFFFF"/>
                 </a:solidFill>
                 <a:latin typeface="Segoe UI"/>
               </a:rPr>
-              <a:t>This recipe has a name: RAG — Retrieval-Augmented Generation</a:t>
-            </a:r>
-            <a:r>
-              <a:rPr lang="en-AU" sz="1500" b="1" dirty="0">
-                <a:solidFill>
-                  <a:srgbClr val="FFFFFF"/>
-                </a:solidFill>
-                <a:latin typeface="Segoe UI"/>
-              </a:rPr>
-              <a:t>.</a:t>
-            </a:r>
-            <a:endParaRPr sz="1500" b="1" i="0" dirty="0">
+              <a:t>Retrieval-Augmented Generation</a:t>
+            </a:r>
+          </a:p>
+        </p:txBody>
+      </p:sp>
+      <p:sp>
+        <p:nvSpPr>
+          <p:cNvPr id="14" name="Rounded Rectangle 48">
+            <a:extLst>
+              <a:ext uri="{FF2B5EF4-FFF2-40B4-BE49-F238E27FC236}">
+                <a16:creationId xmlns:a16="http://schemas.microsoft.com/office/drawing/2014/main" id="{E2C27067-015B-302B-B942-9A2284DCCDAA}"/>
+              </a:ext>
+            </a:extLst>
+          </p:cNvPr>
+          <p:cNvSpPr/>
+          <p:nvPr/>
+        </p:nvSpPr>
+        <p:spPr>
+          <a:xfrm>
+            <a:off x="6756273" y="1612974"/>
+            <a:ext cx="1371600" cy="292608"/>
+          </a:xfrm>
+          <a:prstGeom prst="roundRect">
+            <a:avLst>
+              <a:gd name="adj" fmla="val 50000"/>
+            </a:avLst>
+          </a:prstGeom>
+          <a:solidFill>
+            <a:srgbClr val="F5B342"/>
+          </a:solidFill>
+          <a:ln w="12700">
+            <a:solidFill>
+              <a:srgbClr val="F5B342"/>
+            </a:solidFill>
+          </a:ln>
+        </p:spPr>
+        <p:style>
+          <a:lnRef idx="1">
+            <a:schemeClr val="accent1"/>
+          </a:lnRef>
+          <a:fillRef idx="3">
+            <a:schemeClr val="accent1"/>
+          </a:fillRef>
+          <a:effectRef idx="2">
+            <a:schemeClr val="accent1"/>
+          </a:effectRef>
+          <a:fontRef idx="minor">
+            <a:schemeClr val="lt1"/>
+          </a:fontRef>
+        </p:style>
+        <p:txBody>
+          <a:bodyPr wrap="square" lIns="0" tIns="0" rIns="0" bIns="0" rtlCol="0" anchor="ctr"/>
+          <a:lstStyle/>
+          <a:p>
+            <a:pPr algn="ctr"/>
+            <a:r>
+              <a:rPr lang="en-AU" sz="1100" b="1" dirty="0">
+                <a:solidFill>
+                  <a:srgbClr val="0B1B33"/>
+                </a:solidFill>
+                <a:latin typeface="Segoe UI"/>
+              </a:rPr>
+              <a:t>AI or Non-AI?</a:t>
+            </a:r>
+            <a:endParaRPr sz="1100" b="1" dirty="0">
               <a:solidFill>
-                <a:srgbClr val="FFFFFF"/>
+                <a:srgbClr val="0B1B33"/>
               </a:solidFill>
               <a:latin typeface="Segoe UI"/>
             </a:endParaRPr>
           </a:p>
         </p:txBody>
       </p:sp>
+      <p:cxnSp>
+        <p:nvCxnSpPr>
+          <p:cNvPr id="15" name="Connector 59">
+            <a:extLst>
+              <a:ext uri="{FF2B5EF4-FFF2-40B4-BE49-F238E27FC236}">
+                <a16:creationId xmlns:a16="http://schemas.microsoft.com/office/drawing/2014/main" id="{CC2D2DA0-E582-F9B1-72EE-A132F034C6D6}"/>
+              </a:ext>
+            </a:extLst>
+          </p:cNvPr>
+          <p:cNvCxnSpPr/>
+          <p:nvPr/>
+        </p:nvCxnSpPr>
+        <p:spPr>
+          <a:xfrm>
+            <a:off x="8049649" y="2033598"/>
+            <a:ext cx="0" cy="128016"/>
+          </a:xfrm>
+          <a:prstGeom prst="line">
+            <a:avLst/>
+          </a:prstGeom>
+          <a:ln w="22225">
+            <a:solidFill>
+              <a:srgbClr val="F5B342"/>
+            </a:solidFill>
+          </a:ln>
+        </p:spPr>
+        <p:style>
+          <a:lnRef idx="2">
+            <a:schemeClr val="accent1"/>
+          </a:lnRef>
+          <a:fillRef idx="0">
+            <a:schemeClr val="accent1"/>
+          </a:fillRef>
+          <a:effectRef idx="1">
+            <a:schemeClr val="accent1"/>
+          </a:effectRef>
+          <a:fontRef idx="minor">
+            <a:schemeClr val="tx1"/>
+          </a:fontRef>
+        </p:style>
+      </p:cxnSp>
     </p:spTree>
   </p:cSld>
   <p:clrMapOvr>
@@ -11618,6 +12439,499 @@
 </file>
 
 <file path=ppt/slides/slide15.xml><?xml version="1.0" encoding="utf-8"?>
+<p:sld xmlns:a="http://schemas.openxmlformats.org/drawingml/2006/main" xmlns:r="http://schemas.openxmlformats.org/officeDocument/2006/relationships" xmlns:p="http://schemas.openxmlformats.org/presentationml/2006/main">
+  <p:cSld>
+    <p:spTree>
+      <p:nvGrpSpPr>
+        <p:cNvPr id="1" name="">
+          <a:extLst>
+            <a:ext uri="{FF2B5EF4-FFF2-40B4-BE49-F238E27FC236}">
+              <a16:creationId xmlns:a16="http://schemas.microsoft.com/office/drawing/2014/main" id="{795CA18B-FA67-37AE-5F33-E4F00D14F203}"/>
+            </a:ext>
+          </a:extLst>
+        </p:cNvPr>
+        <p:cNvGrpSpPr/>
+        <p:nvPr/>
+      </p:nvGrpSpPr>
+      <p:grpSpPr>
+        <a:xfrm>
+          <a:off x="0" y="0"/>
+          <a:ext cx="0" cy="0"/>
+          <a:chOff x="0" y="0"/>
+          <a:chExt cx="0" cy="0"/>
+        </a:xfrm>
+      </p:grpSpPr>
+      <p:sp>
+        <p:nvSpPr>
+          <p:cNvPr id="2" name="Rectangle 1">
+            <a:extLst>
+              <a:ext uri="{FF2B5EF4-FFF2-40B4-BE49-F238E27FC236}">
+                <a16:creationId xmlns:a16="http://schemas.microsoft.com/office/drawing/2014/main" id="{5285EF8D-CFBB-4B03-4F20-068B241398B5}"/>
+              </a:ext>
+            </a:extLst>
+          </p:cNvPr>
+          <p:cNvSpPr/>
+          <p:nvPr/>
+        </p:nvSpPr>
+        <p:spPr>
+          <a:xfrm>
+            <a:off x="0" y="0"/>
+            <a:ext cx="12191695" cy="6858000"/>
+          </a:xfrm>
+          <a:prstGeom prst="rect">
+            <a:avLst/>
+          </a:prstGeom>
+          <a:solidFill>
+            <a:srgbClr val="0B1B33"/>
+          </a:solidFill>
+          <a:ln>
+            <a:noFill/>
+          </a:ln>
+        </p:spPr>
+        <p:style>
+          <a:lnRef idx="1">
+            <a:schemeClr val="accent1"/>
+          </a:lnRef>
+          <a:fillRef idx="3">
+            <a:schemeClr val="accent1"/>
+          </a:fillRef>
+          <a:effectRef idx="2">
+            <a:schemeClr val="accent1"/>
+          </a:effectRef>
+          <a:fontRef idx="minor">
+            <a:schemeClr val="lt1"/>
+          </a:fontRef>
+        </p:style>
+        <p:txBody>
+          <a:bodyPr rtlCol="0" anchor="ctr"/>
+          <a:lstStyle/>
+          <a:p>
+            <a:pPr algn="ctr"/>
+            <a:endParaRPr/>
+          </a:p>
+        </p:txBody>
+      </p:sp>
+      <p:sp>
+        <p:nvSpPr>
+          <p:cNvPr id="3" name="Rectangle 2">
+            <a:extLst>
+              <a:ext uri="{FF2B5EF4-FFF2-40B4-BE49-F238E27FC236}">
+                <a16:creationId xmlns:a16="http://schemas.microsoft.com/office/drawing/2014/main" id="{4298C0DB-259E-D38B-FA15-6A027F4E36BA}"/>
+              </a:ext>
+            </a:extLst>
+          </p:cNvPr>
+          <p:cNvSpPr/>
+          <p:nvPr/>
+        </p:nvSpPr>
+        <p:spPr>
+          <a:xfrm>
+            <a:off x="0" y="0"/>
+            <a:ext cx="146304" cy="6858000"/>
+          </a:xfrm>
+          <a:prstGeom prst="rect">
+            <a:avLst/>
+          </a:prstGeom>
+          <a:solidFill>
+            <a:srgbClr val="2DD4BF"/>
+          </a:solidFill>
+          <a:ln>
+            <a:noFill/>
+          </a:ln>
+        </p:spPr>
+        <p:style>
+          <a:lnRef idx="1">
+            <a:schemeClr val="accent1"/>
+          </a:lnRef>
+          <a:fillRef idx="3">
+            <a:schemeClr val="accent1"/>
+          </a:fillRef>
+          <a:effectRef idx="2">
+            <a:schemeClr val="accent1"/>
+          </a:effectRef>
+          <a:fontRef idx="minor">
+            <a:schemeClr val="lt1"/>
+          </a:fontRef>
+        </p:style>
+        <p:txBody>
+          <a:bodyPr rtlCol="0" anchor="ctr"/>
+          <a:lstStyle/>
+          <a:p>
+            <a:pPr algn="ctr"/>
+            <a:endParaRPr/>
+          </a:p>
+        </p:txBody>
+      </p:sp>
+      <p:sp>
+        <p:nvSpPr>
+          <p:cNvPr id="4" name="TextBox 3">
+            <a:extLst>
+              <a:ext uri="{FF2B5EF4-FFF2-40B4-BE49-F238E27FC236}">
+                <a16:creationId xmlns:a16="http://schemas.microsoft.com/office/drawing/2014/main" id="{AFFEE62F-A9BA-3FB4-6F91-F27EB435B09C}"/>
+              </a:ext>
+            </a:extLst>
+          </p:cNvPr>
+          <p:cNvSpPr txBox="1"/>
+          <p:nvPr/>
+        </p:nvSpPr>
+        <p:spPr>
+          <a:xfrm>
+            <a:off x="594360" y="365760"/>
+            <a:ext cx="8686800" cy="192360"/>
+          </a:xfrm>
+          <a:prstGeom prst="rect">
+            <a:avLst/>
+          </a:prstGeom>
+          <a:noFill/>
+        </p:spPr>
+        <p:txBody>
+          <a:bodyPr wrap="square" lIns="0" tIns="0" rIns="0" bIns="0" anchor="t">
+            <a:spAutoFit/>
+          </a:bodyPr>
+          <a:lstStyle/>
+          <a:p>
+            <a:r>
+              <a:rPr lang="en-AU" sz="1250" b="1" i="0" spc="220" dirty="0">
+                <a:solidFill>
+                  <a:srgbClr val="2DD4BF"/>
+                </a:solidFill>
+                <a:latin typeface="Segoe UI"/>
+              </a:rPr>
+              <a:t>Remaining Issues</a:t>
+            </a:r>
+            <a:endParaRPr sz="1250" b="1" i="0" spc="220" dirty="0">
+              <a:solidFill>
+                <a:srgbClr val="2DD4BF"/>
+              </a:solidFill>
+              <a:latin typeface="Segoe UI"/>
+            </a:endParaRPr>
+          </a:p>
+        </p:txBody>
+      </p:sp>
+      <p:sp>
+        <p:nvSpPr>
+          <p:cNvPr id="5" name="TextBox 4">
+            <a:extLst>
+              <a:ext uri="{FF2B5EF4-FFF2-40B4-BE49-F238E27FC236}">
+                <a16:creationId xmlns:a16="http://schemas.microsoft.com/office/drawing/2014/main" id="{F738C969-332A-B6BC-C30C-C51DA33B8281}"/>
+              </a:ext>
+            </a:extLst>
+          </p:cNvPr>
+          <p:cNvSpPr txBox="1"/>
+          <p:nvPr/>
+        </p:nvSpPr>
+        <p:spPr>
+          <a:xfrm>
+            <a:off x="576072" y="676656"/>
+            <a:ext cx="9692640" cy="461665"/>
+          </a:xfrm>
+          <a:prstGeom prst="rect">
+            <a:avLst/>
+          </a:prstGeom>
+          <a:noFill/>
+        </p:spPr>
+        <p:txBody>
+          <a:bodyPr wrap="square" lIns="0" tIns="0" rIns="0" bIns="0" anchor="t">
+            <a:spAutoFit/>
+          </a:bodyPr>
+          <a:lstStyle/>
+          <a:p>
+            <a:pPr algn="l">
+              <a:lnSpc>
+                <a:spcPct val="100000"/>
+              </a:lnSpc>
+            </a:pPr>
+            <a:r>
+              <a:rPr lang="en-AU" sz="3000" b="1" i="0" dirty="0">
+                <a:solidFill>
+                  <a:srgbClr val="FFFFFF"/>
+                </a:solidFill>
+                <a:latin typeface="Segoe UI"/>
+              </a:rPr>
+              <a:t>Bad Split</a:t>
+            </a:r>
+            <a:endParaRPr sz="3000" b="1" i="0" dirty="0">
+              <a:solidFill>
+                <a:srgbClr val="FFFFFF"/>
+              </a:solidFill>
+              <a:latin typeface="Segoe UI"/>
+            </a:endParaRPr>
+          </a:p>
+        </p:txBody>
+      </p:sp>
+      <p:sp>
+        <p:nvSpPr>
+          <p:cNvPr id="6" name="Rounded Rectangle 5">
+            <a:extLst>
+              <a:ext uri="{FF2B5EF4-FFF2-40B4-BE49-F238E27FC236}">
+                <a16:creationId xmlns:a16="http://schemas.microsoft.com/office/drawing/2014/main" id="{36A5BADB-3880-2713-69E5-651DD997DC67}"/>
+              </a:ext>
+            </a:extLst>
+          </p:cNvPr>
+          <p:cNvSpPr/>
+          <p:nvPr/>
+        </p:nvSpPr>
+        <p:spPr>
+          <a:xfrm>
+            <a:off x="621792" y="1371600"/>
+            <a:ext cx="1188720" cy="54864"/>
+          </a:xfrm>
+          <a:prstGeom prst="roundRect">
+            <a:avLst/>
+          </a:prstGeom>
+          <a:solidFill>
+            <a:srgbClr val="F5B342"/>
+          </a:solidFill>
+          <a:ln>
+            <a:noFill/>
+          </a:ln>
+        </p:spPr>
+        <p:style>
+          <a:lnRef idx="1">
+            <a:schemeClr val="accent1"/>
+          </a:lnRef>
+          <a:fillRef idx="3">
+            <a:schemeClr val="accent1"/>
+          </a:fillRef>
+          <a:effectRef idx="2">
+            <a:schemeClr val="accent1"/>
+          </a:effectRef>
+          <a:fontRef idx="minor">
+            <a:schemeClr val="lt1"/>
+          </a:fontRef>
+        </p:style>
+        <p:txBody>
+          <a:bodyPr rtlCol="0" anchor="ctr"/>
+          <a:lstStyle/>
+          <a:p>
+            <a:pPr algn="ctr"/>
+            <a:endParaRPr/>
+          </a:p>
+        </p:txBody>
+      </p:sp>
+      <p:pic>
+        <p:nvPicPr>
+          <p:cNvPr id="7" name="Picture 6" descr="logo-wimmera-white.png">
+            <a:extLst>
+              <a:ext uri="{FF2B5EF4-FFF2-40B4-BE49-F238E27FC236}">
+                <a16:creationId xmlns:a16="http://schemas.microsoft.com/office/drawing/2014/main" id="{387A0E30-DCAC-71D6-6596-C63BB972A238}"/>
+              </a:ext>
+            </a:extLst>
+          </p:cNvPr>
+          <p:cNvPicPr>
+            <a:picLocks noChangeAspect="1"/>
+          </p:cNvPicPr>
+          <p:nvPr/>
+        </p:nvPicPr>
+        <p:blipFill>
+          <a:blip r:embed="rId3"/>
+          <a:stretch>
+            <a:fillRect/>
+          </a:stretch>
+        </p:blipFill>
+        <p:spPr>
+          <a:xfrm>
+            <a:off x="11155985" y="320040"/>
+            <a:ext cx="624230" cy="457200"/>
+          </a:xfrm>
+          <a:prstGeom prst="rect">
+            <a:avLst/>
+          </a:prstGeom>
+        </p:spPr>
+      </p:pic>
+      <p:sp>
+        <p:nvSpPr>
+          <p:cNvPr id="8" name="Rectangle 7">
+            <a:extLst>
+              <a:ext uri="{FF2B5EF4-FFF2-40B4-BE49-F238E27FC236}">
+                <a16:creationId xmlns:a16="http://schemas.microsoft.com/office/drawing/2014/main" id="{036E7FB0-1BBF-3EE3-7D40-CE781C574E0D}"/>
+              </a:ext>
+            </a:extLst>
+          </p:cNvPr>
+          <p:cNvSpPr/>
+          <p:nvPr/>
+        </p:nvSpPr>
+        <p:spPr>
+          <a:xfrm>
+            <a:off x="0" y="6355080"/>
+            <a:ext cx="12191695" cy="502920"/>
+          </a:xfrm>
+          <a:prstGeom prst="rect">
+            <a:avLst/>
+          </a:prstGeom>
+          <a:solidFill>
+            <a:srgbClr val="0F2240"/>
+          </a:solidFill>
+          <a:ln>
+            <a:noFill/>
+          </a:ln>
+        </p:spPr>
+        <p:style>
+          <a:lnRef idx="1">
+            <a:schemeClr val="accent1"/>
+          </a:lnRef>
+          <a:fillRef idx="3">
+            <a:schemeClr val="accent1"/>
+          </a:fillRef>
+          <a:effectRef idx="2">
+            <a:schemeClr val="accent1"/>
+          </a:effectRef>
+          <a:fontRef idx="minor">
+            <a:schemeClr val="lt1"/>
+          </a:fontRef>
+        </p:style>
+        <p:txBody>
+          <a:bodyPr rtlCol="0" anchor="ctr"/>
+          <a:lstStyle/>
+          <a:p>
+            <a:pPr algn="ctr"/>
+            <a:endParaRPr/>
+          </a:p>
+        </p:txBody>
+      </p:sp>
+      <p:sp>
+        <p:nvSpPr>
+          <p:cNvPr id="9" name="Rectangle 8">
+            <a:extLst>
+              <a:ext uri="{FF2B5EF4-FFF2-40B4-BE49-F238E27FC236}">
+                <a16:creationId xmlns:a16="http://schemas.microsoft.com/office/drawing/2014/main" id="{3BD28C17-1E36-F9C4-6E28-2C996ED9B483}"/>
+              </a:ext>
+            </a:extLst>
+          </p:cNvPr>
+          <p:cNvSpPr/>
+          <p:nvPr/>
+        </p:nvSpPr>
+        <p:spPr>
+          <a:xfrm>
+            <a:off x="0" y="6355080"/>
+            <a:ext cx="12191695" cy="36576"/>
+          </a:xfrm>
+          <a:prstGeom prst="rect">
+            <a:avLst/>
+          </a:prstGeom>
+          <a:solidFill>
+            <a:srgbClr val="2DD4BF"/>
+          </a:solidFill>
+          <a:ln>
+            <a:noFill/>
+          </a:ln>
+        </p:spPr>
+        <p:style>
+          <a:lnRef idx="1">
+            <a:schemeClr val="accent1"/>
+          </a:lnRef>
+          <a:fillRef idx="3">
+            <a:schemeClr val="accent1"/>
+          </a:fillRef>
+          <a:effectRef idx="2">
+            <a:schemeClr val="accent1"/>
+          </a:effectRef>
+          <a:fontRef idx="minor">
+            <a:schemeClr val="lt1"/>
+          </a:fontRef>
+        </p:style>
+        <p:txBody>
+          <a:bodyPr rtlCol="0" anchor="ctr"/>
+          <a:lstStyle/>
+          <a:p>
+            <a:pPr algn="ctr"/>
+            <a:endParaRPr/>
+          </a:p>
+        </p:txBody>
+      </p:sp>
+      <p:sp>
+        <p:nvSpPr>
+          <p:cNvPr id="11" name="TextBox 10">
+            <a:extLst>
+              <a:ext uri="{FF2B5EF4-FFF2-40B4-BE49-F238E27FC236}">
+                <a16:creationId xmlns:a16="http://schemas.microsoft.com/office/drawing/2014/main" id="{F10C0ACA-BCE9-426C-2B87-A147A525737A}"/>
+              </a:ext>
+            </a:extLst>
+          </p:cNvPr>
+          <p:cNvSpPr txBox="1"/>
+          <p:nvPr/>
+        </p:nvSpPr>
+        <p:spPr>
+          <a:xfrm>
+            <a:off x="5303520" y="6355080"/>
+            <a:ext cx="6476695" cy="502920"/>
+          </a:xfrm>
+          <a:prstGeom prst="rect">
+            <a:avLst/>
+          </a:prstGeom>
+          <a:noFill/>
+        </p:spPr>
+        <p:txBody>
+          <a:bodyPr wrap="none" anchor="ctr">
+            <a:spAutoFit/>
+          </a:bodyPr>
+          <a:lstStyle/>
+          <a:p>
+            <a:pPr algn="r"/>
+            <a:r>
+              <a:rPr sz="1050" b="1">
+                <a:solidFill>
+                  <a:srgbClr val="2DD4BF"/>
+                </a:solidFill>
+                <a:latin typeface="Segoe UI"/>
+              </a:rPr>
+              <a:t>Dr Mohammad Arifur Rahman</a:t>
+            </a:r>
+            <a:r>
+              <a:rPr sz="1000">
+                <a:solidFill>
+                  <a:srgbClr val="9FB3C8"/>
+                </a:solidFill>
+                <a:latin typeface="Segoe UI"/>
+              </a:rPr>
+              <a:t>   ·   Analyst Programmer  ·  Wimmera CMA, Victoria</a:t>
+            </a:r>
+          </a:p>
+        </p:txBody>
+      </p:sp>
+      <p:pic>
+        <p:nvPicPr>
+          <p:cNvPr id="37" name="Picture 36">
+            <a:extLst>
+              <a:ext uri="{FF2B5EF4-FFF2-40B4-BE49-F238E27FC236}">
+                <a16:creationId xmlns:a16="http://schemas.microsoft.com/office/drawing/2014/main" id="{97349A2D-9C6D-19F0-2AEC-F03A94CE28ED}"/>
+              </a:ext>
+            </a:extLst>
+          </p:cNvPr>
+          <p:cNvPicPr>
+            <a:picLocks noChangeAspect="1"/>
+          </p:cNvPicPr>
+          <p:nvPr/>
+        </p:nvPicPr>
+        <p:blipFill>
+          <a:blip r:embed="rId4"/>
+          <a:stretch>
+            <a:fillRect/>
+          </a:stretch>
+        </p:blipFill>
+        <p:spPr>
+          <a:xfrm>
+            <a:off x="2032327" y="1585392"/>
+            <a:ext cx="7962958" cy="4481545"/>
+          </a:xfrm>
+          <a:prstGeom prst="rect">
+            <a:avLst/>
+          </a:prstGeom>
+        </p:spPr>
+      </p:pic>
+    </p:spTree>
+    <p:extLst>
+      <p:ext uri="{BB962C8B-B14F-4D97-AF65-F5344CB8AC3E}">
+        <p14:creationId xmlns:p14="http://schemas.microsoft.com/office/powerpoint/2010/main" val="2443482765"/>
+      </p:ext>
+    </p:extLst>
+  </p:cSld>
+  <p:clrMapOvr>
+    <a:masterClrMapping/>
+  </p:clrMapOvr>
+</p:sld>
+</file>
+
+<file path=ppt/slides/slide16.xml><?xml version="1.0" encoding="utf-8"?>
 <p:sld xmlns:a="http://schemas.openxmlformats.org/drawingml/2006/main" xmlns:r="http://schemas.openxmlformats.org/officeDocument/2006/relationships" xmlns:p="http://schemas.openxmlformats.org/presentationml/2006/main">
   <p:cSld>
     <p:spTree>
@@ -11674,7 +12988,7 @@
           <a:lstStyle/>
           <a:p>
             <a:pPr algn="ctr"/>
-            <a:endParaRPr/>
+            <a:endParaRPr dirty="0"/>
           </a:p>
         </p:txBody>
       </p:sp>
@@ -11960,7 +13274,7 @@
         </p:nvSpPr>
         <p:spPr>
           <a:xfrm>
-            <a:off x="822960" y="2331720"/>
+            <a:off x="823265" y="1453896"/>
             <a:ext cx="3362858" cy="1371600"/>
           </a:xfrm>
           <a:prstGeom prst="roundRect">
@@ -11996,7 +13310,7 @@
           <a:lstStyle/>
           <a:p>
             <a:pPr algn="ctr"/>
-            <a:endParaRPr/>
+            <a:endParaRPr sz="3200"/>
           </a:p>
         </p:txBody>
       </p:sp>
@@ -12008,8 +13322,8 @@
         </p:nvSpPr>
         <p:spPr>
           <a:xfrm>
-            <a:off x="1547316" y="2880360"/>
-            <a:ext cx="2960522" cy="365760"/>
+            <a:off x="1138733" y="2014808"/>
+            <a:ext cx="2960522" cy="307777"/>
           </a:xfrm>
           <a:prstGeom prst="rect">
             <a:avLst/>
@@ -12024,7 +13338,7 @@
           <a:p>
             <a:pPr algn="l"/>
             <a:r>
-              <a:rPr sz="1350" b="1" i="0" dirty="0">
+              <a:rPr sz="2000" b="1" i="0" dirty="0">
                 <a:solidFill>
                   <a:srgbClr val="2DD4BF"/>
                 </a:solidFill>
@@ -12043,7 +13357,7 @@
         </p:nvSpPr>
         <p:spPr>
           <a:xfrm>
-            <a:off x="4414418" y="2331720"/>
+            <a:off x="4414723" y="1453896"/>
             <a:ext cx="3362858" cy="1371600"/>
           </a:xfrm>
           <a:prstGeom prst="roundRect">
@@ -12079,7 +13393,7 @@
           <a:lstStyle/>
           <a:p>
             <a:pPr algn="ctr"/>
-            <a:endParaRPr/>
+            <a:endParaRPr sz="3200"/>
           </a:p>
         </p:txBody>
       </p:sp>
@@ -12091,8 +13405,8 @@
         </p:nvSpPr>
         <p:spPr>
           <a:xfrm>
-            <a:off x="5045354" y="2880360"/>
-            <a:ext cx="2960522" cy="365760"/>
+            <a:off x="4615586" y="2002536"/>
+            <a:ext cx="2960522" cy="307777"/>
           </a:xfrm>
           <a:prstGeom prst="rect">
             <a:avLst/>
@@ -12107,7 +13421,7 @@
           <a:p>
             <a:pPr algn="l"/>
             <a:r>
-              <a:rPr sz="1350" b="1" i="0" dirty="0">
+              <a:rPr sz="2000" b="1" i="0" dirty="0">
                 <a:solidFill>
                   <a:srgbClr val="2DD4BF"/>
                 </a:solidFill>
@@ -12126,7 +13440,7 @@
         </p:nvSpPr>
         <p:spPr>
           <a:xfrm>
-            <a:off x="8005876" y="2331720"/>
+            <a:off x="8006181" y="1453896"/>
             <a:ext cx="3362858" cy="1371600"/>
           </a:xfrm>
           <a:prstGeom prst="roundRect">
@@ -12162,7 +13476,7 @@
           <a:lstStyle/>
           <a:p>
             <a:pPr algn="ctr"/>
-            <a:endParaRPr/>
+            <a:endParaRPr sz="3200"/>
           </a:p>
         </p:txBody>
       </p:sp>
@@ -12174,8 +13488,8 @@
         </p:nvSpPr>
         <p:spPr>
           <a:xfrm>
-            <a:off x="9097877" y="2893557"/>
-            <a:ext cx="2960522" cy="365760"/>
+            <a:off x="8788451" y="2015733"/>
+            <a:ext cx="2960522" cy="307777"/>
           </a:xfrm>
           <a:prstGeom prst="rect">
             <a:avLst/>
@@ -12190,7 +13504,7 @@
           <a:p>
             <a:pPr algn="l"/>
             <a:r>
-              <a:rPr sz="1350" b="1" i="0" dirty="0">
+              <a:rPr sz="2000" b="1" i="0" dirty="0">
                 <a:solidFill>
                   <a:srgbClr val="2DD4BF"/>
                 </a:solidFill>
@@ -12209,7 +13523,7 @@
         </p:nvSpPr>
         <p:spPr>
           <a:xfrm>
-            <a:off x="822960" y="3977639"/>
+            <a:off x="823265" y="3099815"/>
             <a:ext cx="3362858" cy="1371600"/>
           </a:xfrm>
           <a:prstGeom prst="roundRect">
@@ -12245,7 +13559,7 @@
           <a:lstStyle/>
           <a:p>
             <a:pPr algn="ctr"/>
-            <a:endParaRPr/>
+            <a:endParaRPr sz="3200"/>
           </a:p>
         </p:txBody>
       </p:sp>
@@ -12257,8 +13571,8 @@
         </p:nvSpPr>
         <p:spPr>
           <a:xfrm>
-            <a:off x="2042223" y="4480560"/>
-            <a:ext cx="2960522" cy="365760"/>
+            <a:off x="2042528" y="3602736"/>
+            <a:ext cx="2960522" cy="307777"/>
           </a:xfrm>
           <a:prstGeom prst="rect">
             <a:avLst/>
@@ -12273,7 +13587,7 @@
           <a:p>
             <a:pPr algn="l"/>
             <a:r>
-              <a:rPr sz="1350" b="1" i="0" dirty="0">
+              <a:rPr sz="2000" b="1" i="0" dirty="0">
                 <a:solidFill>
                   <a:srgbClr val="2DD4BF"/>
                 </a:solidFill>
@@ -12292,7 +13606,7 @@
         </p:nvSpPr>
         <p:spPr>
           <a:xfrm>
-            <a:off x="4414418" y="3977639"/>
+            <a:off x="4414723" y="3099815"/>
             <a:ext cx="3362858" cy="1371600"/>
           </a:xfrm>
           <a:prstGeom prst="roundRect">
@@ -12328,7 +13642,7 @@
           <a:lstStyle/>
           <a:p>
             <a:pPr algn="ctr"/>
-            <a:endParaRPr/>
+            <a:endParaRPr sz="3200"/>
           </a:p>
         </p:txBody>
       </p:sp>
@@ -12340,8 +13654,8 @@
         </p:nvSpPr>
         <p:spPr>
           <a:xfrm>
-            <a:off x="5145938" y="4480560"/>
-            <a:ext cx="2960522" cy="365760"/>
+            <a:off x="4817059" y="3599243"/>
+            <a:ext cx="2960522" cy="307777"/>
           </a:xfrm>
           <a:prstGeom prst="rect">
             <a:avLst/>
@@ -12356,7 +13670,7 @@
           <a:p>
             <a:pPr algn="l"/>
             <a:r>
-              <a:rPr sz="1350" b="1" i="0" dirty="0">
+              <a:rPr sz="2000" b="1" i="0" dirty="0">
                 <a:solidFill>
                   <a:srgbClr val="2DD4BF"/>
                 </a:solidFill>
@@ -12375,7 +13689,7 @@
         </p:nvSpPr>
         <p:spPr>
           <a:xfrm>
-            <a:off x="8005876" y="3977639"/>
+            <a:off x="8006181" y="3099815"/>
             <a:ext cx="3362858" cy="1371600"/>
           </a:xfrm>
           <a:prstGeom prst="roundRect">
@@ -12411,7 +13725,7 @@
           <a:lstStyle/>
           <a:p>
             <a:pPr algn="ctr"/>
-            <a:endParaRPr/>
+            <a:endParaRPr sz="3200"/>
           </a:p>
         </p:txBody>
       </p:sp>
@@ -12423,8 +13737,8 @@
         </p:nvSpPr>
         <p:spPr>
           <a:xfrm>
-            <a:off x="9231173" y="4480559"/>
-            <a:ext cx="2960522" cy="365760"/>
+            <a:off x="8943802" y="3579983"/>
+            <a:ext cx="2960522" cy="307777"/>
           </a:xfrm>
           <a:prstGeom prst="rect">
             <a:avLst/>
@@ -12439,7 +13753,7 @@
           <a:p>
             <a:pPr algn="l"/>
             <a:r>
-              <a:rPr sz="1350" b="1" i="0" dirty="0">
+              <a:rPr sz="2000" b="1" i="0" dirty="0">
                 <a:solidFill>
                   <a:srgbClr val="2DD4BF"/>
                 </a:solidFill>
@@ -12447,6 +13761,111 @@
               </a:rPr>
               <a:t>Verification</a:t>
             </a:r>
+          </a:p>
+        </p:txBody>
+      </p:sp>
+      <p:sp>
+        <p:nvSpPr>
+          <p:cNvPr id="10" name="Rounded Rectangle 61">
+            <a:extLst>
+              <a:ext uri="{FF2B5EF4-FFF2-40B4-BE49-F238E27FC236}">
+                <a16:creationId xmlns:a16="http://schemas.microsoft.com/office/drawing/2014/main" id="{BD5B9513-4D85-280D-E45C-BECE3253C6AE}"/>
+              </a:ext>
+            </a:extLst>
+          </p:cNvPr>
+          <p:cNvSpPr/>
+          <p:nvPr/>
+        </p:nvSpPr>
+        <p:spPr>
+          <a:xfrm>
+            <a:off x="822960" y="5257800"/>
+            <a:ext cx="10561320" cy="822960"/>
+          </a:xfrm>
+          <a:prstGeom prst="roundRect">
+            <a:avLst>
+              <a:gd name="adj" fmla="val 6000"/>
+            </a:avLst>
+          </a:prstGeom>
+          <a:solidFill>
+            <a:srgbClr val="142847"/>
+          </a:solidFill>
+          <a:ln w="12700">
+            <a:solidFill>
+              <a:srgbClr val="2DD4BF"/>
+            </a:solidFill>
+          </a:ln>
+        </p:spPr>
+        <p:style>
+          <a:lnRef idx="1">
+            <a:schemeClr val="accent1"/>
+          </a:lnRef>
+          <a:fillRef idx="3">
+            <a:schemeClr val="accent1"/>
+          </a:fillRef>
+          <a:effectRef idx="2">
+            <a:schemeClr val="accent1"/>
+          </a:effectRef>
+          <a:fontRef idx="minor">
+            <a:schemeClr val="lt1"/>
+          </a:fontRef>
+        </p:style>
+        <p:txBody>
+          <a:bodyPr rtlCol="0" anchor="ctr"/>
+          <a:lstStyle/>
+          <a:p>
+            <a:pPr algn="ctr"/>
+            <a:endParaRPr/>
+          </a:p>
+        </p:txBody>
+      </p:sp>
+      <p:sp>
+        <p:nvSpPr>
+          <p:cNvPr id="15" name="TextBox 14">
+            <a:extLst>
+              <a:ext uri="{FF2B5EF4-FFF2-40B4-BE49-F238E27FC236}">
+                <a16:creationId xmlns:a16="http://schemas.microsoft.com/office/drawing/2014/main" id="{D1577029-5A6F-4018-5AEE-DAF1CFF6425B}"/>
+              </a:ext>
+            </a:extLst>
+          </p:cNvPr>
+          <p:cNvSpPr txBox="1"/>
+          <p:nvPr/>
+        </p:nvSpPr>
+        <p:spPr>
+          <a:xfrm>
+            <a:off x="2599362" y="5311105"/>
+            <a:ext cx="8556318" cy="716350"/>
+          </a:xfrm>
+          <a:prstGeom prst="rect">
+            <a:avLst/>
+          </a:prstGeom>
+          <a:noFill/>
+        </p:spPr>
+        <p:txBody>
+          <a:bodyPr wrap="square" lIns="0" tIns="0" rIns="0" bIns="0" anchor="ctr">
+            <a:spAutoFit/>
+          </a:bodyPr>
+          <a:lstStyle/>
+          <a:p>
+            <a:pPr algn="l">
+              <a:lnSpc>
+                <a:spcPct val="130000"/>
+              </a:lnSpc>
+            </a:pPr>
+            <a:r>
+              <a:rPr lang="en-AU" sz="4000" b="1" i="0" dirty="0">
+                <a:solidFill>
+                  <a:schemeClr val="accent6"/>
+                </a:solidFill>
+                <a:latin typeface="Segoe UI"/>
+              </a:rPr>
+              <a:t>Thank you. Any questions?</a:t>
+            </a:r>
+            <a:endParaRPr sz="4000" b="1" i="0" dirty="0">
+              <a:solidFill>
+                <a:schemeClr val="accent6"/>
+              </a:solidFill>
+              <a:latin typeface="Segoe UI"/>
+            </a:endParaRPr>
           </a:p>
         </p:txBody>
       </p:sp>
@@ -12881,7 +14300,7 @@
           <a:lstStyle/>
           <a:p>
             <a:pPr algn="ctr"/>
-            <a:endParaRPr/>
+            <a:endParaRPr sz="2800"/>
           </a:p>
         </p:txBody>
       </p:sp>
@@ -12929,7 +14348,7 @@
           <a:lstStyle/>
           <a:p>
             <a:pPr algn="ctr"/>
-            <a:endParaRPr/>
+            <a:endParaRPr sz="2800"/>
           </a:p>
         </p:txBody>
       </p:sp>
@@ -12941,8 +14360,8 @@
         </p:nvSpPr>
         <p:spPr>
           <a:xfrm>
-            <a:off x="1005840" y="2194560"/>
-            <a:ext cx="2834640" cy="411480"/>
+            <a:off x="1257300" y="2261801"/>
+            <a:ext cx="2834640" cy="276999"/>
           </a:xfrm>
           <a:prstGeom prst="rect">
             <a:avLst/>
@@ -12957,14 +14376,20 @@
           <a:p>
             <a:pPr algn="l"/>
             <a:r>
-              <a:rPr sz="1250" b="1" i="0">
-                <a:solidFill>
-                  <a:srgbClr val="2DD4BF"/>
-                </a:solidFill>
-                <a:latin typeface="Segoe UI"/>
-              </a:rPr>
-              <a:t>ChatGPT</a:t>
-            </a:r>
+              <a:rPr lang="en-AU" b="1" i="0" dirty="0">
+                <a:solidFill>
+                  <a:schemeClr val="accent6"/>
+                </a:solidFill>
+                <a:latin typeface="Segoe UI"/>
+              </a:rPr>
+              <a:t>ChatGPT application</a:t>
+            </a:r>
+            <a:endParaRPr b="1" i="0" dirty="0">
+              <a:solidFill>
+                <a:schemeClr val="accent6"/>
+              </a:solidFill>
+              <a:latin typeface="Segoe UI"/>
+            </a:endParaRPr>
           </a:p>
         </p:txBody>
       </p:sp>
@@ -12976,8 +14401,8 @@
         </p:nvSpPr>
         <p:spPr>
           <a:xfrm>
-            <a:off x="1051560" y="2788920"/>
-            <a:ext cx="1920240" cy="384048"/>
+            <a:off x="1051559" y="2788920"/>
+            <a:ext cx="2743199" cy="384048"/>
           </a:xfrm>
           <a:prstGeom prst="roundRect">
             <a:avLst>
@@ -13012,7 +14437,7 @@
           <a:lstStyle/>
           <a:p>
             <a:pPr algn="ctr"/>
-            <a:endParaRPr/>
+            <a:endParaRPr sz="2800"/>
           </a:p>
         </p:txBody>
       </p:sp>
@@ -13024,8 +14449,8 @@
         </p:nvSpPr>
         <p:spPr>
           <a:xfrm>
-            <a:off x="1234440" y="2900152"/>
-            <a:ext cx="1645920" cy="161583"/>
+            <a:off x="1234440" y="2873222"/>
+            <a:ext cx="2269048" cy="215444"/>
           </a:xfrm>
           <a:prstGeom prst="rect">
             <a:avLst/>
@@ -13040,7 +14465,7 @@
           <a:p>
             <a:pPr algn="l"/>
             <a:r>
-              <a:rPr sz="1050" b="0" i="0" dirty="0">
+              <a:rPr sz="1400" b="0" i="0" dirty="0">
                 <a:solidFill>
                   <a:srgbClr val="FFFFFF"/>
                 </a:solidFill>
@@ -13049,7 +14474,7 @@
               <a:t>handbook.pdf</a:t>
             </a:r>
             <a:r>
-              <a:rPr lang="en-AU" sz="1050" b="0" i="0">
+              <a:rPr lang="en-AU" sz="1400" b="0" i="0" dirty="0">
                 <a:solidFill>
                   <a:srgbClr val="FFFFFF"/>
                 </a:solidFill>
@@ -13057,7 +14482,7 @@
               </a:rPr>
               <a:t> (200 pages)</a:t>
             </a:r>
-            <a:endParaRPr sz="1050" b="0" i="0">
+            <a:endParaRPr sz="1400" b="0" i="0" dirty="0">
               <a:solidFill>
                 <a:srgbClr val="FFFFFF"/>
               </a:solidFill>
@@ -13110,7 +14535,7 @@
           <a:lstStyle/>
           <a:p>
             <a:pPr algn="ctr"/>
-            <a:endParaRPr/>
+            <a:endParaRPr sz="2800"/>
           </a:p>
         </p:txBody>
       </p:sp>
@@ -13122,8 +14547,8 @@
         </p:nvSpPr>
         <p:spPr>
           <a:xfrm>
-            <a:off x="1234440" y="3337560"/>
-            <a:ext cx="2377440" cy="731520"/>
+            <a:off x="1234440" y="3432316"/>
+            <a:ext cx="2377440" cy="542008"/>
           </a:xfrm>
           <a:prstGeom prst="rect">
             <a:avLst/>
@@ -13142,7 +14567,7 @@
               </a:lnSpc>
             </a:pPr>
             <a:r>
-              <a:rPr sz="1100" b="0" i="0" dirty="0">
+              <a:rPr sz="1600" b="0" i="0" dirty="0">
                 <a:solidFill>
                   <a:srgbClr val="FFFFFF"/>
                 </a:solidFill>
@@ -13197,7 +14622,7 @@
           <a:lstStyle/>
           <a:p>
             <a:pPr algn="ctr"/>
-            <a:endParaRPr/>
+            <a:endParaRPr sz="2800"/>
           </a:p>
         </p:txBody>
       </p:sp>
@@ -13209,8 +14634,8 @@
         </p:nvSpPr>
         <p:spPr>
           <a:xfrm>
-            <a:off x="1234440" y="4206240"/>
-            <a:ext cx="2377440" cy="731520"/>
+            <a:off x="1197864" y="4442573"/>
+            <a:ext cx="2560318" cy="258853"/>
           </a:xfrm>
           <a:prstGeom prst="rect">
             <a:avLst/>
@@ -13229,7 +14654,7 @@
               </a:lnSpc>
             </a:pPr>
             <a:r>
-              <a:rPr sz="1100" b="0" i="0">
+              <a:rPr sz="1600" b="0" i="0" dirty="0">
                 <a:solidFill>
                   <a:srgbClr val="9FB3C8"/>
                 </a:solidFill>
@@ -13242,14 +14667,14 @@
       </p:sp>
       <p:sp>
         <p:nvSpPr>
-          <p:cNvPr id="22" name="TextBox 21"/>
+          <p:cNvPr id="23" name="TextBox 22"/>
           <p:cNvSpPr txBox="1"/>
           <p:nvPr/>
         </p:nvSpPr>
         <p:spPr>
           <a:xfrm>
-            <a:off x="822960" y="5486400"/>
-            <a:ext cx="3200400" cy="365760"/>
+            <a:off x="4023360" y="3264961"/>
+            <a:ext cx="1097280" cy="276999"/>
           </a:xfrm>
           <a:prstGeom prst="rect">
             <a:avLst/>
@@ -13264,27 +14689,27 @@
           <a:p>
             <a:pPr algn="ctr"/>
             <a:r>
-              <a:rPr sz="1100" b="0" i="1">
-                <a:solidFill>
-                  <a:srgbClr val="2DD4BF"/>
-                </a:solidFill>
-                <a:latin typeface="Segoe UI"/>
-              </a:rPr>
-              <a:t>one person, one chat — it works</a:t>
-            </a:r>
-          </a:p>
-        </p:txBody>
-      </p:sp>
-      <p:sp>
-        <p:nvSpPr>
-          <p:cNvPr id="23" name="TextBox 22"/>
+              <a:rPr b="0" i="1" dirty="0">
+                <a:solidFill>
+                  <a:srgbClr val="9FB3C8"/>
+                </a:solidFill>
+                <a:latin typeface="Segoe UI"/>
+              </a:rPr>
+              <a:t>under the</a:t>
+            </a:r>
+          </a:p>
+        </p:txBody>
+      </p:sp>
+      <p:sp>
+        <p:nvSpPr>
+          <p:cNvPr id="24" name="TextBox 23"/>
           <p:cNvSpPr txBox="1"/>
           <p:nvPr/>
         </p:nvSpPr>
         <p:spPr>
           <a:xfrm>
-            <a:off x="4160520" y="3291840"/>
-            <a:ext cx="914400" cy="320040"/>
+            <a:off x="4160520" y="3520440"/>
+            <a:ext cx="914400" cy="276999"/>
           </a:xfrm>
           <a:prstGeom prst="rect">
             <a:avLst/>
@@ -13299,42 +14724,7 @@
           <a:p>
             <a:pPr algn="ctr"/>
             <a:r>
-              <a:rPr sz="1000" b="0" i="1">
-                <a:solidFill>
-                  <a:srgbClr val="9FB3C8"/>
-                </a:solidFill>
-                <a:latin typeface="Segoe UI"/>
-              </a:rPr>
-              <a:t>under the</a:t>
-            </a:r>
-          </a:p>
-        </p:txBody>
-      </p:sp>
-      <p:sp>
-        <p:nvSpPr>
-          <p:cNvPr id="24" name="TextBox 23"/>
-          <p:cNvSpPr txBox="1"/>
-          <p:nvPr/>
-        </p:nvSpPr>
-        <p:spPr>
-          <a:xfrm>
-            <a:off x="4160520" y="3520440"/>
-            <a:ext cx="914400" cy="320040"/>
-          </a:xfrm>
-          <a:prstGeom prst="rect">
-            <a:avLst/>
-          </a:prstGeom>
-          <a:noFill/>
-        </p:spPr>
-        <p:txBody>
-          <a:bodyPr wrap="square" lIns="0" tIns="0" rIns="0" bIns="0" anchor="t">
-            <a:spAutoFit/>
-          </a:bodyPr>
-          <a:lstStyle/>
-          <a:p>
-            <a:pPr algn="ctr"/>
-            <a:r>
-              <a:rPr sz="1000" b="0" i="1">
+              <a:rPr b="0" i="1" dirty="0">
                 <a:solidFill>
                   <a:srgbClr val="9FB3C8"/>
                 </a:solidFill>
@@ -13385,7 +14775,7 @@
           <a:lstStyle/>
           <a:p>
             <a:pPr algn="ctr"/>
-            <a:endParaRPr/>
+            <a:endParaRPr sz="2800"/>
           </a:p>
         </p:txBody>
       </p:sp>
@@ -13433,42 +14823,7 @@
           <a:lstStyle/>
           <a:p>
             <a:pPr algn="ctr"/>
-            <a:endParaRPr/>
-          </a:p>
-        </p:txBody>
-      </p:sp>
-      <p:sp>
-        <p:nvSpPr>
-          <p:cNvPr id="27" name="TextBox 26"/>
-          <p:cNvSpPr txBox="1"/>
-          <p:nvPr/>
-        </p:nvSpPr>
-        <p:spPr>
-          <a:xfrm>
-            <a:off x="5303520" y="2331720"/>
-            <a:ext cx="3200400" cy="365760"/>
-          </a:xfrm>
-          <a:prstGeom prst="rect">
-            <a:avLst/>
-          </a:prstGeom>
-          <a:noFill/>
-        </p:spPr>
-        <p:txBody>
-          <a:bodyPr wrap="square" lIns="0" tIns="0" rIns="0" bIns="0" anchor="t">
-            <a:spAutoFit/>
-          </a:bodyPr>
-          <a:lstStyle/>
-          <a:p>
-            <a:pPr algn="l"/>
-            <a:r>
-              <a:rPr sz="1100" b="1" i="0">
-                <a:solidFill>
-                  <a:srgbClr val="F5B342"/>
-                </a:solidFill>
-                <a:latin typeface="Segoe UI"/>
-              </a:rPr>
-              <a:t>what the model actually receives</a:t>
-            </a:r>
+            <a:endParaRPr sz="2800"/>
           </a:p>
         </p:txBody>
       </p:sp>
@@ -13481,7 +14836,7 @@
         <p:spPr>
           <a:xfrm>
             <a:off x="5303520" y="2788920"/>
-            <a:ext cx="3200400" cy="2194560"/>
+            <a:ext cx="3316498" cy="1888209"/>
           </a:xfrm>
           <a:prstGeom prst="rect">
             <a:avLst/>
@@ -13500,13 +14855,31 @@
               </a:lnSpc>
             </a:pPr>
             <a:r>
-              <a:rPr sz="1150" b="0" i="1">
+              <a:rPr sz="1600" b="0" i="1" dirty="0">
                 <a:solidFill>
                   <a:srgbClr val="9FB3C8"/>
                 </a:solidFill>
                 <a:latin typeface="Consolas"/>
               </a:rPr>
-              <a:t>&lt;entire text of handbook.pdf&gt;</a:t>
+              <a:t>&lt;entire text of</a:t>
+            </a:r>
+            <a:r>
+              <a:rPr lang="en-AU" sz="1600" b="0" i="1" dirty="0">
+                <a:solidFill>
+                  <a:srgbClr val="9FB3C8"/>
+                </a:solidFill>
+                <a:latin typeface="Consolas"/>
+              </a:rPr>
+              <a:t> </a:t>
+            </a:r>
+            <a:r>
+              <a:rPr sz="1600" b="0" i="1" dirty="0">
+                <a:solidFill>
+                  <a:srgbClr val="9FB3C8"/>
+                </a:solidFill>
+                <a:latin typeface="Consolas"/>
+              </a:rPr>
+              <a:t>handbook.pdf&gt;</a:t>
             </a:r>
           </a:p>
           <a:p>
@@ -13515,15 +14888,12 @@
                 <a:spcPct val="125000"/>
               </a:lnSpc>
             </a:pPr>
-            <a:r>
-              <a:rPr sz="1150" b="0" i="1">
-                <a:solidFill>
-                  <a:srgbClr val="9FB3C8"/>
-                </a:solidFill>
-                <a:latin typeface="Consolas"/>
-              </a:rPr>
-              <a:t>… 200 pages of it …</a:t>
-            </a:r>
+            <a:endParaRPr lang="en-AU" b="1" i="0" dirty="0">
+              <a:solidFill>
+                <a:srgbClr val="FFFFFF"/>
+              </a:solidFill>
+              <a:latin typeface="Consolas"/>
+            </a:endParaRPr>
           </a:p>
           <a:p>
             <a:pPr algn="l">
@@ -13532,7 +14902,7 @@
               </a:lnSpc>
             </a:pPr>
             <a:r>
-              <a:rPr sz="1300" b="1" i="0">
+              <a:rPr b="1" i="0" dirty="0">
                 <a:solidFill>
                   <a:srgbClr val="FFFFFF"/>
                 </a:solidFill>
@@ -13540,6 +14910,25 @@
               </a:rPr>
               <a:t>+</a:t>
             </a:r>
+            <a:endParaRPr lang="en-AU" b="1" i="0" dirty="0">
+              <a:solidFill>
+                <a:srgbClr val="FFFFFF"/>
+              </a:solidFill>
+              <a:latin typeface="Consolas"/>
+            </a:endParaRPr>
+          </a:p>
+          <a:p>
+            <a:pPr algn="l">
+              <a:lnSpc>
+                <a:spcPct val="125000"/>
+              </a:lnSpc>
+            </a:pPr>
+            <a:endParaRPr b="1" i="0" dirty="0">
+              <a:solidFill>
+                <a:srgbClr val="FFFFFF"/>
+              </a:solidFill>
+              <a:latin typeface="Consolas"/>
+            </a:endParaRPr>
           </a:p>
           <a:p>
             <a:pPr algn="l">
@@ -13548,7 +14937,7 @@
               </a:lnSpc>
             </a:pPr>
             <a:r>
-              <a:rPr sz="1150" b="0" i="0">
+              <a:rPr sz="1600" b="0" i="0" dirty="0">
                 <a:solidFill>
                   <a:srgbClr val="FFFFFF"/>
                 </a:solidFill>
@@ -13560,7 +14949,7 @@
           <a:p>
             <a:pPr algn="l"/>
             <a:r>
-              <a:rPr sz="1150" b="0" i="0">
+              <a:rPr sz="1600" b="0" i="0" dirty="0">
                 <a:solidFill>
                   <a:srgbClr val="FFFFFF"/>
                 </a:solidFill>
@@ -13579,8 +14968,8 @@
         </p:nvSpPr>
         <p:spPr>
           <a:xfrm>
-            <a:off x="5303520" y="4983480"/>
-            <a:ext cx="3200400" cy="365760"/>
+            <a:off x="5669280" y="1843069"/>
+            <a:ext cx="3200400" cy="276999"/>
           </a:xfrm>
           <a:prstGeom prst="rect">
             <a:avLst/>
@@ -13595,7 +14984,7 @@
           <a:p>
             <a:pPr algn="l"/>
             <a:r>
-              <a:rPr sz="1200" b="1" i="0">
+              <a:rPr b="1" i="0" dirty="0">
                 <a:solidFill>
                   <a:srgbClr val="2DD4BF"/>
                 </a:solidFill>
@@ -13646,7 +15035,7 @@
           <a:lstStyle/>
           <a:p>
             <a:pPr algn="ctr"/>
-            <a:endParaRPr/>
+            <a:endParaRPr sz="2800"/>
           </a:p>
         </p:txBody>
       </p:sp>
@@ -13694,7 +15083,7 @@
           <a:lstStyle/>
           <a:p>
             <a:pPr algn="ctr"/>
-            <a:endParaRPr/>
+            <a:endParaRPr sz="2800"/>
           </a:p>
         </p:txBody>
       </p:sp>
@@ -13707,7 +15096,7 @@
         <p:spPr>
           <a:xfrm>
             <a:off x="9784080" y="3246120"/>
-            <a:ext cx="1691640" cy="365760"/>
+            <a:ext cx="1691640" cy="276999"/>
           </a:xfrm>
           <a:prstGeom prst="rect">
             <a:avLst/>
@@ -13722,14 +15111,20 @@
           <a:p>
             <a:pPr algn="ctr"/>
             <a:r>
-              <a:rPr sz="1300" b="1" i="0">
-                <a:solidFill>
-                  <a:srgbClr val="2DD4BF"/>
-                </a:solidFill>
-                <a:latin typeface="Segoe UI"/>
-              </a:rPr>
-              <a:t>the model</a:t>
-            </a:r>
+              <a:rPr lang="en-AU" b="1" i="0" dirty="0">
+                <a:solidFill>
+                  <a:schemeClr val="accent6"/>
+                </a:solidFill>
+                <a:latin typeface="Segoe UI"/>
+              </a:rPr>
+              <a:t>GPT 5.5</a:t>
+            </a:r>
+            <a:endParaRPr b="1" i="0" dirty="0">
+              <a:solidFill>
+                <a:schemeClr val="accent6"/>
+              </a:solidFill>
+              <a:latin typeface="Segoe UI"/>
+            </a:endParaRPr>
           </a:p>
         </p:txBody>
       </p:sp>
@@ -13742,7 +15137,7 @@
         <p:spPr>
           <a:xfrm>
             <a:off x="9784080" y="3657600"/>
-            <a:ext cx="1691640" cy="822960"/>
+            <a:ext cx="1691640" cy="563552"/>
           </a:xfrm>
           <a:prstGeom prst="rect">
             <a:avLst/>
@@ -13761,7 +15156,7 @@
               </a:lnSpc>
             </a:pPr>
             <a:r>
-              <a:rPr sz="1100" b="0" i="0">
+              <a:rPr sz="1600" b="0" i="0">
                 <a:solidFill>
                   <a:srgbClr val="FFFFFF"/>
                 </a:solidFill>
@@ -14161,48 +15556,13 @@
       </p:sp>
       <p:sp>
         <p:nvSpPr>
-          <p:cNvPr id="12" name="TextBox 11"/>
-          <p:cNvSpPr txBox="1"/>
-          <p:nvPr/>
-        </p:nvSpPr>
-        <p:spPr>
-          <a:xfrm>
-            <a:off x="822960" y="1691640"/>
-            <a:ext cx="10607040" cy="365760"/>
-          </a:xfrm>
-          <a:prstGeom prst="rect">
-            <a:avLst/>
-          </a:prstGeom>
-          <a:noFill/>
-        </p:spPr>
-        <p:txBody>
-          <a:bodyPr wrap="square" lIns="0" tIns="0" rIns="0" bIns="0" anchor="t">
-            <a:spAutoFit/>
-          </a:bodyPr>
-          <a:lstStyle/>
-          <a:p>
-            <a:pPr algn="l"/>
-            <a:r>
-              <a:rPr sz="1350" b="0" i="1">
-                <a:solidFill>
-                  <a:srgbClr val="9FB3C8"/>
-                </a:solidFill>
-                <a:latin typeface="Segoe UI"/>
-              </a:rPr>
-              <a:t>It works for one person. Now give it to 30,000 students.</a:t>
-            </a:r>
-          </a:p>
-        </p:txBody>
-      </p:sp>
-      <p:sp>
-        <p:nvSpPr>
           <p:cNvPr id="13" name="Rounded Rectangle 12"/>
           <p:cNvSpPr/>
           <p:nvPr/>
         </p:nvSpPr>
         <p:spPr>
           <a:xfrm>
-            <a:off x="822960" y="2194560"/>
+            <a:off x="4446422" y="2194560"/>
             <a:ext cx="3362858" cy="2240280"/>
           </a:xfrm>
           <a:prstGeom prst="roundRect">
@@ -14250,7 +15610,7 @@
         </p:nvSpPr>
         <p:spPr>
           <a:xfrm>
-            <a:off x="1005840" y="2377439"/>
+            <a:off x="4729886" y="3100064"/>
             <a:ext cx="402336" cy="402336"/>
           </a:xfrm>
           <a:prstGeom prst="ellipse">
@@ -14283,14 +15643,20 @@
           <a:p>
             <a:pPr algn="ctr"/>
             <a:r>
-              <a:rPr sz="1400" b="1">
+              <a:rPr lang="en-AU" sz="1400" b="1" dirty="0">
                 <a:solidFill>
                   <a:srgbClr val="0B1B33"/>
                 </a:solidFill>
                 <a:latin typeface="Segoe UI"/>
               </a:rPr>
-              <a:t>1</a:t>
-            </a:r>
+              <a:t>2</a:t>
+            </a:r>
+            <a:endParaRPr sz="1400" b="1" dirty="0">
+              <a:solidFill>
+                <a:srgbClr val="0B1B33"/>
+              </a:solidFill>
+              <a:latin typeface="Segoe UI"/>
+            </a:endParaRPr>
           </a:p>
         </p:txBody>
       </p:sp>
@@ -14302,8 +15668,8 @@
         </p:nvSpPr>
         <p:spPr>
           <a:xfrm>
-            <a:off x="1508760" y="2377440"/>
-            <a:ext cx="2494178" cy="685800"/>
+            <a:off x="5251812" y="3158010"/>
+            <a:ext cx="2494178" cy="249620"/>
           </a:xfrm>
           <a:prstGeom prst="rect">
             <a:avLst/>
@@ -14322,53 +15688,20 @@
               </a:lnSpc>
             </a:pPr>
             <a:r>
-              <a:rPr sz="1350" b="1" i="0">
+              <a:rPr lang="en-AU" sz="1600" b="1" i="0" dirty="0">
                 <a:solidFill>
                   <a:srgbClr val="FFFFFF"/>
                 </a:solidFill>
                 <a:latin typeface="Segoe UI"/>
               </a:rPr>
-              <a:t>It's ChatGPT's product</a:t>
-            </a:r>
-          </a:p>
-        </p:txBody>
-      </p:sp>
-      <p:sp>
-        <p:nvSpPr>
-          <p:cNvPr id="16" name="TextBox 15"/>
-          <p:cNvSpPr txBox="1"/>
-          <p:nvPr/>
-        </p:nvSpPr>
-        <p:spPr>
-          <a:xfrm>
-            <a:off x="1051560" y="3154680"/>
-            <a:ext cx="2905658" cy="1188720"/>
-          </a:xfrm>
-          <a:prstGeom prst="rect">
-            <a:avLst/>
-          </a:prstGeom>
-          <a:noFill/>
-        </p:spPr>
-        <p:txBody>
-          <a:bodyPr wrap="square" lIns="0" tIns="0" rIns="0" bIns="0" anchor="t">
-            <a:spAutoFit/>
-          </a:bodyPr>
-          <a:lstStyle/>
-          <a:p>
-            <a:pPr algn="l">
-              <a:lnSpc>
-                <a:spcPct val="125000"/>
-              </a:lnSpc>
-            </a:pPr>
-            <a:r>
-              <a:rPr sz="1100" b="0" i="0">
-                <a:solidFill>
-                  <a:srgbClr val="9FB3C8"/>
-                </a:solidFill>
-                <a:latin typeface="Segoe UI"/>
-              </a:rPr>
-              <a:t>We can't put ChatGPT itself on the university website. Building our own ChatGPT-like product from scratch is a huge job.</a:t>
-            </a:r>
+              <a:t>Costly product</a:t>
+            </a:r>
+            <a:endParaRPr sz="1600" b="1" i="0" dirty="0">
+              <a:solidFill>
+                <a:srgbClr val="FFFFFF"/>
+              </a:solidFill>
+              <a:latin typeface="Segoe UI"/>
+            </a:endParaRPr>
           </a:p>
         </p:txBody>
       </p:sp>
@@ -14380,7 +15713,7 @@
         </p:nvSpPr>
         <p:spPr>
           <a:xfrm>
-            <a:off x="4414418" y="2194560"/>
+            <a:off x="900684" y="2232782"/>
             <a:ext cx="3362858" cy="2240280"/>
           </a:xfrm>
           <a:prstGeom prst="roundRect">
@@ -14428,7 +15761,7 @@
         </p:nvSpPr>
         <p:spPr>
           <a:xfrm>
-            <a:off x="4597298" y="2377439"/>
+            <a:off x="1119178" y="3063240"/>
             <a:ext cx="402336" cy="402336"/>
           </a:xfrm>
           <a:prstGeom prst="ellipse">
@@ -14461,14 +15794,20 @@
           <a:p>
             <a:pPr algn="ctr"/>
             <a:r>
-              <a:rPr sz="1400" b="1">
+              <a:rPr lang="en-AU" sz="1400" b="1" dirty="0">
                 <a:solidFill>
                   <a:srgbClr val="0B1B33"/>
                 </a:solidFill>
                 <a:latin typeface="Segoe UI"/>
               </a:rPr>
-              <a:t>2</a:t>
-            </a:r>
+              <a:t>1</a:t>
+            </a:r>
+            <a:endParaRPr sz="1400" b="1" dirty="0">
+              <a:solidFill>
+                <a:srgbClr val="0B1B33"/>
+              </a:solidFill>
+              <a:latin typeface="Segoe UI"/>
+            </a:endParaRPr>
           </a:p>
         </p:txBody>
       </p:sp>
@@ -14480,8 +15819,8 @@
         </p:nvSpPr>
         <p:spPr>
           <a:xfrm>
-            <a:off x="5100218" y="2377440"/>
-            <a:ext cx="2494178" cy="685800"/>
+            <a:off x="1645439" y="3133660"/>
+            <a:ext cx="2494178" cy="249620"/>
           </a:xfrm>
           <a:prstGeom prst="rect">
             <a:avLst/>
@@ -14500,52 +15839,31 @@
               </a:lnSpc>
             </a:pPr>
             <a:r>
-              <a:rPr sz="1350" b="1" i="0">
+              <a:rPr sz="1600" b="1" i="0" dirty="0">
                 <a:solidFill>
                   <a:srgbClr val="FFFFFF"/>
                 </a:solidFill>
                 <a:latin typeface="Segoe UI"/>
               </a:rPr>
-              <a:t>A paid seat per student</a:t>
-            </a:r>
-          </a:p>
-        </p:txBody>
-      </p:sp>
-      <p:sp>
-        <p:nvSpPr>
-          <p:cNvPr id="20" name="TextBox 19"/>
-          <p:cNvSpPr txBox="1"/>
-          <p:nvPr/>
-        </p:nvSpPr>
-        <p:spPr>
-          <a:xfrm>
-            <a:off x="4643018" y="3154680"/>
-            <a:ext cx="2905658" cy="1188720"/>
-          </a:xfrm>
-          <a:prstGeom prst="rect">
-            <a:avLst/>
-          </a:prstGeom>
-          <a:noFill/>
-        </p:spPr>
-        <p:txBody>
-          <a:bodyPr wrap="square" lIns="0" tIns="0" rIns="0" bIns="0" anchor="t">
-            <a:spAutoFit/>
-          </a:bodyPr>
-          <a:lstStyle/>
-          <a:p>
-            <a:pPr algn="l">
-              <a:lnSpc>
-                <a:spcPct val="125000"/>
-              </a:lnSpc>
-            </a:pPr>
-            <a:r>
-              <a:rPr sz="1100" b="0" i="0">
-                <a:solidFill>
-                  <a:srgbClr val="9FB3C8"/>
-                </a:solidFill>
-                <a:latin typeface="Segoe UI"/>
-              </a:rPr>
-              <a:t>The alternative: every student buys their own subscription — thousands of seats, just to ask about the handbook.</a:t>
+              <a:t>A paid </a:t>
+            </a:r>
+            <a:r>
+              <a:rPr lang="en-AU" sz="1600" b="1" i="0" dirty="0">
+                <a:solidFill>
+                  <a:srgbClr val="FFFFFF"/>
+                </a:solidFill>
+                <a:latin typeface="Segoe UI"/>
+              </a:rPr>
+              <a:t>license</a:t>
+            </a:r>
+            <a:r>
+              <a:rPr sz="1600" b="1" i="0" dirty="0">
+                <a:solidFill>
+                  <a:srgbClr val="FFFFFF"/>
+                </a:solidFill>
+                <a:latin typeface="Segoe UI"/>
+              </a:rPr>
+              <a:t> per student</a:t>
             </a:r>
           </a:p>
         </p:txBody>
@@ -14606,8 +15924,8 @@
         </p:nvSpPr>
         <p:spPr>
           <a:xfrm>
-            <a:off x="8188756" y="2377439"/>
-            <a:ext cx="402336" cy="402336"/>
+            <a:off x="8238567" y="3063240"/>
+            <a:ext cx="396809" cy="402336"/>
           </a:xfrm>
           <a:prstGeom prst="ellipse">
             <a:avLst/>
@@ -14639,7 +15957,7 @@
           <a:p>
             <a:pPr algn="ctr"/>
             <a:r>
-              <a:rPr sz="1400" b="1">
+              <a:rPr lang="en-AU" sz="1400" b="1" dirty="0">
                 <a:solidFill>
                   <a:srgbClr val="0B1B33"/>
                 </a:solidFill>
@@ -14647,6 +15965,12 @@
               </a:rPr>
               <a:t>3</a:t>
             </a:r>
+            <a:endParaRPr sz="1400" b="1" dirty="0">
+              <a:solidFill>
+                <a:srgbClr val="0B1B33"/>
+              </a:solidFill>
+              <a:latin typeface="Segoe UI"/>
+            </a:endParaRPr>
           </a:p>
         </p:txBody>
       </p:sp>
@@ -14658,8 +15982,8 @@
         </p:nvSpPr>
         <p:spPr>
           <a:xfrm>
-            <a:off x="8691676" y="2377440"/>
-            <a:ext cx="2494178" cy="685800"/>
+            <a:off x="8741486" y="3063241"/>
+            <a:ext cx="2642793" cy="520463"/>
           </a:xfrm>
           <a:prstGeom prst="rect">
             <a:avLst/>
@@ -14678,52 +16002,22 @@
               </a:lnSpc>
             </a:pPr>
             <a:r>
-              <a:rPr sz="1350" b="1" i="0">
+              <a:rPr lang="en-AU" sz="1600" b="1" i="0" dirty="0">
                 <a:solidFill>
                   <a:srgbClr val="FFFFFF"/>
                 </a:solidFill>
                 <a:latin typeface="Segoe UI"/>
               </a:rPr>
-              <a:t>Many documents, always changing</a:t>
-            </a:r>
-          </a:p>
-        </p:txBody>
-      </p:sp>
-      <p:sp>
-        <p:nvSpPr>
-          <p:cNvPr id="24" name="TextBox 23"/>
-          <p:cNvSpPr txBox="1"/>
-          <p:nvPr/>
-        </p:nvSpPr>
-        <p:spPr>
-          <a:xfrm>
-            <a:off x="8234476" y="3154680"/>
-            <a:ext cx="2905658" cy="1188720"/>
-          </a:xfrm>
-          <a:prstGeom prst="rect">
-            <a:avLst/>
-          </a:prstGeom>
-          <a:noFill/>
-        </p:spPr>
-        <p:txBody>
-          <a:bodyPr wrap="square" lIns="0" tIns="0" rIns="0" bIns="0" anchor="t">
-            <a:spAutoFit/>
-          </a:bodyPr>
-          <a:lstStyle/>
-          <a:p>
-            <a:pPr algn="l">
-              <a:lnSpc>
-                <a:spcPct val="125000"/>
-              </a:lnSpc>
-            </a:pPr>
-            <a:r>
-              <a:rPr sz="1100" b="0" i="0">
-                <a:solidFill>
-                  <a:srgbClr val="9FB3C8"/>
-                </a:solidFill>
-                <a:latin typeface="Segoe UI"/>
-              </a:rPr>
-              <a:t>One answer may need handbook + library rules + exam procedures. They change all year. Re-uploading the current pile into every chat? Nobody will.</a:t>
+              <a:t>Extensive knowledge base</a:t>
+            </a:r>
+            <a:r>
+              <a:rPr sz="1600" b="1" i="0" dirty="0">
+                <a:solidFill>
+                  <a:srgbClr val="FFFFFF"/>
+                </a:solidFill>
+                <a:latin typeface="Segoe UI"/>
+              </a:rPr>
+              <a:t>, always changing</a:t>
             </a:r>
           </a:p>
         </p:txBody>
@@ -14736,8 +16030,8 @@
         </p:nvSpPr>
         <p:spPr>
           <a:xfrm>
-            <a:off x="822960" y="4709160"/>
-            <a:ext cx="10561320" cy="685800"/>
+            <a:off x="3679175" y="4852739"/>
+            <a:ext cx="4480560" cy="685800"/>
           </a:xfrm>
           <a:prstGeom prst="roundRect">
             <a:avLst>
@@ -14784,8 +16078,8 @@
         </p:nvSpPr>
         <p:spPr>
           <a:xfrm>
-            <a:off x="1005840" y="4953122"/>
-            <a:ext cx="10195560" cy="197875"/>
+            <a:off x="3931552" y="4896199"/>
+            <a:ext cx="4297680" cy="506614"/>
           </a:xfrm>
           <a:prstGeom prst="rect">
             <a:avLst/>
@@ -14804,7 +16098,7 @@
               </a:lnSpc>
             </a:pPr>
             <a:r>
-              <a:rPr sz="1250" b="1" dirty="0">
+              <a:rPr sz="3200" b="1" dirty="0">
                 <a:solidFill>
                   <a:srgbClr val="2DD4BF"/>
                 </a:solidFill>
@@ -14812,15 +16106,12 @@
               </a:rPr>
               <a:t>Knowledge Base (KB)</a:t>
             </a:r>
-            <a:r>
-              <a:rPr sz="1050" dirty="0">
-                <a:solidFill>
-                  <a:srgbClr val="9FB3C8"/>
-                </a:solidFill>
-                <a:latin typeface="Segoe UI"/>
-              </a:rPr>
-              <a:t>  —  the pile of official documents the bot must answer from.</a:t>
-            </a:r>
+            <a:endParaRPr sz="3200" dirty="0">
+              <a:solidFill>
+                <a:srgbClr val="9FB3C8"/>
+              </a:solidFill>
+              <a:latin typeface="Segoe UI"/>
+            </a:endParaRPr>
           </a:p>
         </p:txBody>
       </p:sp>
@@ -14889,7 +16180,19 @@
           <a:lstStyle/>
           <a:p>
             <a:pPr algn="ctr"/>
-            <a:endParaRPr/>
+            <a:endParaRPr dirty="0">
+              <a:ln w="0"/>
+              <a:solidFill>
+                <a:schemeClr val="tx1"/>
+              </a:solidFill>
+              <a:effectLst>
+                <a:outerShdw blurRad="38100" dist="19050" dir="2700000" algn="tl" rotWithShape="0">
+                  <a:schemeClr val="dk1">
+                    <a:alpha val="40000"/>
+                  </a:schemeClr>
+                </a:outerShdw>
+              </a:effectLst>
+            </a:endParaRPr>
           </a:p>
         </p:txBody>
       </p:sp>
@@ -15219,8 +16522,8 @@
         </p:nvSpPr>
         <p:spPr>
           <a:xfrm>
-            <a:off x="896112" y="3086100"/>
-            <a:ext cx="3355848" cy="960120"/>
+            <a:off x="924501" y="3086100"/>
+            <a:ext cx="2422989" cy="960120"/>
           </a:xfrm>
           <a:prstGeom prst="roundRect">
             <a:avLst>
@@ -15255,7 +16558,7 @@
           <a:lstStyle/>
           <a:p>
             <a:pPr algn="ctr"/>
-            <a:endParaRPr/>
+            <a:endParaRPr sz="3200"/>
           </a:p>
         </p:txBody>
       </p:sp>
@@ -15267,8 +16570,8 @@
         </p:nvSpPr>
         <p:spPr>
           <a:xfrm>
-            <a:off x="969264" y="3086100"/>
-            <a:ext cx="3209544" cy="960120"/>
+            <a:off x="976251" y="3246265"/>
+            <a:ext cx="2317355" cy="639791"/>
           </a:xfrm>
           <a:prstGeom prst="rect">
             <a:avLst/>
@@ -15287,7 +16590,7 @@
               </a:lnSpc>
             </a:pPr>
             <a:r>
-              <a:rPr sz="1250" b="1" i="0" dirty="0">
+              <a:rPr sz="2000" b="1" i="0" dirty="0">
                 <a:solidFill>
                   <a:srgbClr val="FFFFFF"/>
                 </a:solidFill>
@@ -15307,8 +16610,8 @@
         </p:nvSpPr>
         <p:spPr>
           <a:xfrm>
-            <a:off x="4270248" y="3483864"/>
-            <a:ext cx="201168" cy="164592"/>
+            <a:off x="3524036" y="3483864"/>
+            <a:ext cx="540623" cy="164592"/>
           </a:xfrm>
           <a:prstGeom prst="rightArrow">
             <a:avLst/>
@@ -15339,7 +16642,7 @@
           <a:lstStyle/>
           <a:p>
             <a:pPr algn="ctr"/>
-            <a:endParaRPr/>
+            <a:endParaRPr sz="3200"/>
           </a:p>
         </p:txBody>
       </p:sp>
@@ -15351,8 +16654,8 @@
         </p:nvSpPr>
         <p:spPr>
           <a:xfrm>
-            <a:off x="4489704" y="3086100"/>
-            <a:ext cx="3355848" cy="960120"/>
+            <a:off x="4152042" y="3086100"/>
+            <a:ext cx="2790493" cy="960120"/>
           </a:xfrm>
           <a:prstGeom prst="roundRect">
             <a:avLst>
@@ -15387,7 +16690,7 @@
           <a:lstStyle/>
           <a:p>
             <a:pPr algn="ctr"/>
-            <a:endParaRPr/>
+            <a:endParaRPr sz="3200"/>
           </a:p>
         </p:txBody>
       </p:sp>
@@ -15399,8 +16702,8 @@
         </p:nvSpPr>
         <p:spPr>
           <a:xfrm>
-            <a:off x="4562856" y="3470108"/>
-            <a:ext cx="3209544" cy="192104"/>
+            <a:off x="4200548" y="3412465"/>
+            <a:ext cx="2668836" cy="307392"/>
           </a:xfrm>
           <a:prstGeom prst="rect">
             <a:avLst/>
@@ -15419,7 +16722,7 @@
               </a:lnSpc>
             </a:pPr>
             <a:r>
-              <a:rPr sz="1250" b="1" i="0" dirty="0">
+              <a:rPr sz="2000" b="1" i="0" dirty="0">
                 <a:solidFill>
                   <a:srgbClr val="FFFFFF"/>
                 </a:solidFill>
@@ -15428,7 +16731,7 @@
               <a:t>Our </a:t>
             </a:r>
             <a:r>
-              <a:rPr lang="en-AU" sz="1250" b="1" i="0" dirty="0">
+              <a:rPr lang="en-AU" sz="2000" b="1" i="0" dirty="0">
                 <a:solidFill>
                   <a:srgbClr val="FFFFFF"/>
                 </a:solidFill>
@@ -15436,7 +16739,7 @@
               </a:rPr>
               <a:t>web application</a:t>
             </a:r>
-            <a:endParaRPr sz="1250" b="1" i="0" dirty="0">
+            <a:endParaRPr sz="2000" b="1" i="0" dirty="0">
               <a:solidFill>
                 <a:srgbClr val="FFFFFF"/>
               </a:solidFill>
@@ -15453,8 +16756,8 @@
         </p:nvSpPr>
         <p:spPr>
           <a:xfrm>
-            <a:off x="7863840" y="3483864"/>
-            <a:ext cx="201168" cy="164592"/>
+            <a:off x="7029918" y="3412465"/>
+            <a:ext cx="1545581" cy="235992"/>
           </a:xfrm>
           <a:prstGeom prst="rightArrow">
             <a:avLst/>
@@ -15485,7 +16788,7 @@
           <a:lstStyle/>
           <a:p>
             <a:pPr algn="ctr"/>
-            <a:endParaRPr/>
+            <a:endParaRPr sz="3200"/>
           </a:p>
         </p:txBody>
       </p:sp>
@@ -15497,8 +16800,8 @@
         </p:nvSpPr>
         <p:spPr>
           <a:xfrm>
-            <a:off x="8083296" y="3086100"/>
-            <a:ext cx="3355848" cy="960120"/>
+            <a:off x="8648650" y="3086100"/>
+            <a:ext cx="2790493" cy="960120"/>
           </a:xfrm>
           <a:prstGeom prst="roundRect">
             <a:avLst>
@@ -15533,7 +16836,7 @@
           <a:lstStyle/>
           <a:p>
             <a:pPr algn="ctr"/>
-            <a:endParaRPr/>
+            <a:endParaRPr sz="3200"/>
           </a:p>
         </p:txBody>
       </p:sp>
@@ -15545,8 +16848,8 @@
         </p:nvSpPr>
         <p:spPr>
           <a:xfrm>
-            <a:off x="8156448" y="3470107"/>
-            <a:ext cx="3209544" cy="192104"/>
+            <a:off x="8697156" y="3412464"/>
+            <a:ext cx="2668836" cy="307392"/>
           </a:xfrm>
           <a:prstGeom prst="rect">
             <a:avLst/>
@@ -15565,14 +16868,118 @@
               </a:lnSpc>
             </a:pPr>
             <a:r>
-              <a:rPr sz="1250" b="1" i="0" dirty="0">
+              <a:rPr lang="en-AU" sz="2000" b="1" i="0" dirty="0">
                 <a:solidFill>
                   <a:srgbClr val="FFFFFF"/>
                 </a:solidFill>
                 <a:latin typeface="Segoe UI"/>
               </a:rPr>
+              <a:t>GPT 5.5</a:t>
+            </a:r>
+            <a:endParaRPr sz="2000" b="1" i="0" dirty="0">
+              <a:solidFill>
+                <a:srgbClr val="FFFFFF"/>
+              </a:solidFill>
+              <a:latin typeface="Segoe UI"/>
+            </a:endParaRPr>
+          </a:p>
+        </p:txBody>
+      </p:sp>
+      <p:sp>
+        <p:nvSpPr>
+          <p:cNvPr id="21" name="TextBox 20">
+            <a:extLst>
+              <a:ext uri="{FF2B5EF4-FFF2-40B4-BE49-F238E27FC236}">
+                <a16:creationId xmlns:a16="http://schemas.microsoft.com/office/drawing/2014/main" id="{A1B1C2B3-5A40-0160-0B0D-D9000B180AA1}"/>
+              </a:ext>
+            </a:extLst>
+          </p:cNvPr>
+          <p:cNvSpPr txBox="1"/>
+          <p:nvPr/>
+        </p:nvSpPr>
+        <p:spPr>
+          <a:xfrm>
+            <a:off x="6912891" y="3086100"/>
+            <a:ext cx="1765404" cy="276999"/>
+          </a:xfrm>
+          <a:prstGeom prst="rect">
+            <a:avLst/>
+          </a:prstGeom>
+          <a:noFill/>
+        </p:spPr>
+        <p:txBody>
+          <a:bodyPr wrap="square" lIns="0" tIns="0" rIns="0" bIns="0" anchor="t">
+            <a:spAutoFit/>
+          </a:bodyPr>
+          <a:lstStyle/>
+          <a:p>
+            <a:pPr algn="ctr"/>
+            <a:r>
+              <a:rPr lang="en-AU" b="1" i="0" dirty="0">
+                <a:solidFill>
+                  <a:schemeClr val="accent6"/>
+                </a:solidFill>
+                <a:latin typeface="Segoe UI"/>
+              </a:rPr>
               <a:t>OpenAI API</a:t>
             </a:r>
+            <a:endParaRPr b="1" i="0" dirty="0">
+              <a:solidFill>
+                <a:schemeClr val="accent6"/>
+              </a:solidFill>
+              <a:latin typeface="Segoe UI"/>
+            </a:endParaRPr>
+          </a:p>
+        </p:txBody>
+      </p:sp>
+      <p:sp>
+        <p:nvSpPr>
+          <p:cNvPr id="25" name="TextBox 24">
+            <a:extLst>
+              <a:ext uri="{FF2B5EF4-FFF2-40B4-BE49-F238E27FC236}">
+                <a16:creationId xmlns:a16="http://schemas.microsoft.com/office/drawing/2014/main" id="{CA76D4EA-CB8F-A2E8-E76F-543B7ECF8155}"/>
+              </a:ext>
+            </a:extLst>
+          </p:cNvPr>
+          <p:cNvSpPr txBox="1"/>
+          <p:nvPr/>
+        </p:nvSpPr>
+        <p:spPr>
+          <a:xfrm>
+            <a:off x="6461175" y="3661628"/>
+            <a:ext cx="2668836" cy="215187"/>
+          </a:xfrm>
+          <a:prstGeom prst="rect">
+            <a:avLst/>
+          </a:prstGeom>
+          <a:noFill/>
+        </p:spPr>
+        <p:txBody>
+          <a:bodyPr wrap="square" lIns="0" tIns="0" rIns="0" bIns="0" anchor="ctr">
+            <a:spAutoFit/>
+          </a:bodyPr>
+          <a:lstStyle/>
+          <a:p>
+            <a:pPr algn="ctr">
+              <a:lnSpc>
+                <a:spcPct val="108000"/>
+              </a:lnSpc>
+            </a:pPr>
+            <a:r>
+              <a:rPr lang="en-AU" sz="1400" b="1" i="0" dirty="0">
+                <a:solidFill>
+                  <a:srgbClr val="FFFFFF"/>
+                </a:solidFill>
+                <a:latin typeface="Segoe UI"/>
+              </a:rPr>
+              <a:t>KB + Question</a:t>
+            </a:r>
+            <a:endParaRPr sz="1400" b="1" i="0" dirty="0">
+              <a:solidFill>
+                <a:srgbClr val="FFFFFF"/>
+              </a:solidFill>
+              <a:latin typeface="Segoe UI"/>
+            </a:endParaRPr>
           </a:p>
         </p:txBody>
       </p:sp>
@@ -15965,14 +17372,20 @@
       </p:sp>
       <p:sp>
         <p:nvSpPr>
-          <p:cNvPr id="12" name="Rounded Rectangle 11"/>
+          <p:cNvPr id="48" name="Rounded Rectangle 11">
+            <a:extLst>
+              <a:ext uri="{FF2B5EF4-FFF2-40B4-BE49-F238E27FC236}">
+                <a16:creationId xmlns:a16="http://schemas.microsoft.com/office/drawing/2014/main" id="{B249E33D-1174-0977-FA78-3AEFAD19223C}"/>
+              </a:ext>
+            </a:extLst>
+          </p:cNvPr>
           <p:cNvSpPr/>
           <p:nvPr/>
         </p:nvSpPr>
         <p:spPr>
           <a:xfrm>
-            <a:off x="1051560" y="2331720"/>
-            <a:ext cx="2011680" cy="914400"/>
+            <a:off x="924501" y="3086100"/>
+            <a:ext cx="2422989" cy="960120"/>
           </a:xfrm>
           <a:prstGeom prst="roundRect">
             <a:avLst>
@@ -16007,20 +17420,26 @@
           <a:lstStyle/>
           <a:p>
             <a:pPr algn="ctr"/>
-            <a:endParaRPr/>
-          </a:p>
-        </p:txBody>
-      </p:sp>
-      <p:sp>
-        <p:nvSpPr>
-          <p:cNvPr id="13" name="TextBox 12"/>
+            <a:endParaRPr sz="3200"/>
+          </a:p>
+        </p:txBody>
+      </p:sp>
+      <p:sp>
+        <p:nvSpPr>
+          <p:cNvPr id="50" name="TextBox 49">
+            <a:extLst>
+              <a:ext uri="{FF2B5EF4-FFF2-40B4-BE49-F238E27FC236}">
+                <a16:creationId xmlns:a16="http://schemas.microsoft.com/office/drawing/2014/main" id="{7846F20B-7792-203F-2F33-1CA6BC2C3ED2}"/>
+              </a:ext>
+            </a:extLst>
+          </p:cNvPr>
           <p:cNvSpPr txBox="1"/>
           <p:nvPr/>
         </p:nvSpPr>
         <p:spPr>
           <a:xfrm>
-            <a:off x="1124712" y="2331720"/>
-            <a:ext cx="1865376" cy="914400"/>
+            <a:off x="976251" y="3246265"/>
+            <a:ext cx="2317355" cy="639791"/>
           </a:xfrm>
           <a:prstGeom prst="rect">
             <a:avLst/>
@@ -16039,27 +17458,34 @@
               </a:lnSpc>
             </a:pPr>
             <a:r>
-              <a:rPr sz="1150" b="1" i="0">
+              <a:rPr sz="2000" b="1" i="0" dirty="0">
                 <a:solidFill>
                   <a:srgbClr val="FFFFFF"/>
                 </a:solidFill>
                 <a:latin typeface="Segoe UI"/>
               </a:rPr>
-              <a:t>Student's browser</a:t>
-            </a:r>
-          </a:p>
-        </p:txBody>
-      </p:sp>
-      <p:sp>
-        <p:nvSpPr>
-          <p:cNvPr id="14" name="Right Arrow 13"/>
+              <a:t>Student's browser
+chat page</a:t>
+            </a:r>
+          </a:p>
+        </p:txBody>
+      </p:sp>
+      <p:sp>
+        <p:nvSpPr>
+          <p:cNvPr id="52" name="Right Arrow 13">
+            <a:extLst>
+              <a:ext uri="{FF2B5EF4-FFF2-40B4-BE49-F238E27FC236}">
+                <a16:creationId xmlns:a16="http://schemas.microsoft.com/office/drawing/2014/main" id="{C78D8B31-3D4A-C582-CB68-26C4958D5344}"/>
+              </a:ext>
+            </a:extLst>
+          </p:cNvPr>
           <p:cNvSpPr/>
           <p:nvPr/>
         </p:nvSpPr>
         <p:spPr>
           <a:xfrm>
-            <a:off x="3127248" y="2706624"/>
-            <a:ext cx="310896" cy="164592"/>
+            <a:off x="3524036" y="3483864"/>
+            <a:ext cx="540623" cy="164592"/>
           </a:xfrm>
           <a:prstGeom prst="rightArrow">
             <a:avLst/>
@@ -16090,20 +17516,26 @@
           <a:lstStyle/>
           <a:p>
             <a:pPr algn="ctr"/>
-            <a:endParaRPr/>
-          </a:p>
-        </p:txBody>
-      </p:sp>
-      <p:sp>
-        <p:nvSpPr>
-          <p:cNvPr id="15" name="Rounded Rectangle 14"/>
+            <a:endParaRPr sz="3200"/>
+          </a:p>
+        </p:txBody>
+      </p:sp>
+      <p:sp>
+        <p:nvSpPr>
+          <p:cNvPr id="54" name="Rounded Rectangle 14">
+            <a:extLst>
+              <a:ext uri="{FF2B5EF4-FFF2-40B4-BE49-F238E27FC236}">
+                <a16:creationId xmlns:a16="http://schemas.microsoft.com/office/drawing/2014/main" id="{A294CCF8-9B1C-3C4B-54AC-F896B68A10BE}"/>
+              </a:ext>
+            </a:extLst>
+          </p:cNvPr>
           <p:cNvSpPr/>
           <p:nvPr/>
         </p:nvSpPr>
         <p:spPr>
           <a:xfrm>
-            <a:off x="3502152" y="2331720"/>
-            <a:ext cx="2011680" cy="914400"/>
+            <a:off x="4152042" y="3086100"/>
+            <a:ext cx="2790493" cy="960120"/>
           </a:xfrm>
           <a:prstGeom prst="roundRect">
             <a:avLst>
@@ -16138,20 +17570,26 @@
           <a:lstStyle/>
           <a:p>
             <a:pPr algn="ctr"/>
-            <a:endParaRPr/>
-          </a:p>
-        </p:txBody>
-      </p:sp>
-      <p:sp>
-        <p:nvSpPr>
-          <p:cNvPr id="16" name="TextBox 15"/>
+            <a:endParaRPr sz="3200"/>
+          </a:p>
+        </p:txBody>
+      </p:sp>
+      <p:sp>
+        <p:nvSpPr>
+          <p:cNvPr id="56" name="TextBox 55">
+            <a:extLst>
+              <a:ext uri="{FF2B5EF4-FFF2-40B4-BE49-F238E27FC236}">
+                <a16:creationId xmlns:a16="http://schemas.microsoft.com/office/drawing/2014/main" id="{4D8BBA36-8D7C-D428-0E6F-5C32D2467A9F}"/>
+              </a:ext>
+            </a:extLst>
+          </p:cNvPr>
           <p:cNvSpPr txBox="1"/>
           <p:nvPr/>
         </p:nvSpPr>
         <p:spPr>
           <a:xfrm>
-            <a:off x="3575304" y="2700530"/>
-            <a:ext cx="1865376" cy="176780"/>
+            <a:off x="4200548" y="3412465"/>
+            <a:ext cx="2668836" cy="307392"/>
           </a:xfrm>
           <a:prstGeom prst="rect">
             <a:avLst/>
@@ -16170,7 +17608,7 @@
               </a:lnSpc>
             </a:pPr>
             <a:r>
-              <a:rPr sz="1150" b="1" i="0" dirty="0">
+              <a:rPr sz="2000" b="1" i="0" dirty="0">
                 <a:solidFill>
                   <a:srgbClr val="FFFFFF"/>
                 </a:solidFill>
@@ -16179,7 +17617,7 @@
               <a:t>Our </a:t>
             </a:r>
             <a:r>
-              <a:rPr lang="en-AU" sz="1150" b="1" i="0" dirty="0">
+              <a:rPr lang="en-AU" sz="2000" b="1" i="0" dirty="0">
                 <a:solidFill>
                   <a:srgbClr val="FFFFFF"/>
                 </a:solidFill>
@@ -16187,7 +17625,7 @@
               </a:rPr>
               <a:t>web application</a:t>
             </a:r>
-            <a:endParaRPr sz="1150" b="1" i="0" dirty="0">
+            <a:endParaRPr sz="2000" b="1" i="0" dirty="0">
               <a:solidFill>
                 <a:srgbClr val="FFFFFF"/>
               </a:solidFill>
@@ -16198,14 +17636,20 @@
       </p:sp>
       <p:sp>
         <p:nvSpPr>
-          <p:cNvPr id="17" name="Right Arrow 16"/>
+          <p:cNvPr id="58" name="Right Arrow 16">
+            <a:extLst>
+              <a:ext uri="{FF2B5EF4-FFF2-40B4-BE49-F238E27FC236}">
+                <a16:creationId xmlns:a16="http://schemas.microsoft.com/office/drawing/2014/main" id="{97D8A931-AE57-15E4-E968-E2810D35F421}"/>
+              </a:ext>
+            </a:extLst>
+          </p:cNvPr>
           <p:cNvSpPr/>
           <p:nvPr/>
         </p:nvSpPr>
         <p:spPr>
           <a:xfrm>
-            <a:off x="5577840" y="2706624"/>
-            <a:ext cx="310896" cy="164592"/>
+            <a:off x="7029918" y="3412465"/>
+            <a:ext cx="1545581" cy="235992"/>
           </a:xfrm>
           <a:prstGeom prst="rightArrow">
             <a:avLst/>
@@ -16236,47 +17680,55 @@
           <a:lstStyle/>
           <a:p>
             <a:pPr algn="ctr"/>
-            <a:endParaRPr/>
-          </a:p>
-        </p:txBody>
-      </p:sp>
-      <p:sp>
-        <p:nvSpPr>
-          <p:cNvPr id="18" name="Rounded Rectangle 17"/>
+            <a:endParaRPr sz="3200"/>
+          </a:p>
+        </p:txBody>
+      </p:sp>
+      <p:sp>
+        <p:nvSpPr>
+          <p:cNvPr id="60" name="Rounded Rectangle 17">
+            <a:extLst>
+              <a:ext uri="{FF2B5EF4-FFF2-40B4-BE49-F238E27FC236}">
+                <a16:creationId xmlns:a16="http://schemas.microsoft.com/office/drawing/2014/main" id="{11D56E37-6765-082C-2366-8CD0883DB643}"/>
+              </a:ext>
+            </a:extLst>
+          </p:cNvPr>
           <p:cNvSpPr/>
           <p:nvPr/>
         </p:nvSpPr>
         <p:spPr>
           <a:xfrm>
-            <a:off x="5952744" y="2331720"/>
-            <a:ext cx="2011680" cy="914400"/>
+            <a:off x="8648650" y="3086100"/>
+            <a:ext cx="2790493" cy="960120"/>
           </a:xfrm>
           <a:prstGeom prst="roundRect">
             <a:avLst>
               <a:gd name="adj" fmla="val 6000"/>
             </a:avLst>
           </a:prstGeom>
-          <a:solidFill>
-            <a:srgbClr val="142847"/>
-          </a:solidFill>
-          <a:ln w="12700">
+          <a:noFill/>
+          <a:ln w="9525" cap="flat" cmpd="sng" algn="ctr">
             <a:solidFill>
-              <a:srgbClr val="253B5E"/>
+              <a:schemeClr val="accent1"/>
             </a:solidFill>
+            <a:prstDash val="solid"/>
+            <a:round/>
+            <a:headEnd type="none" w="med" len="med"/>
+            <a:tailEnd type="none" w="med" len="med"/>
           </a:ln>
         </p:spPr>
         <p:style>
-          <a:lnRef idx="1">
-            <a:schemeClr val="accent1"/>
+          <a:lnRef idx="0">
+            <a:scrgbClr r="0" g="0" b="0"/>
           </a:lnRef>
-          <a:fillRef idx="3">
-            <a:schemeClr val="accent1"/>
+          <a:fillRef idx="0">
+            <a:scrgbClr r="0" g="0" b="0"/>
           </a:fillRef>
-          <a:effectRef idx="2">
-            <a:schemeClr val="accent1"/>
+          <a:effectRef idx="0">
+            <a:scrgbClr r="0" g="0" b="0"/>
           </a:effectRef>
           <a:fontRef idx="minor">
-            <a:schemeClr val="lt1"/>
+            <a:schemeClr val="accent1"/>
           </a:fontRef>
         </p:style>
         <p:txBody>
@@ -16284,20 +17736,26 @@
           <a:lstStyle/>
           <a:p>
             <a:pPr algn="ctr"/>
-            <a:endParaRPr/>
-          </a:p>
-        </p:txBody>
-      </p:sp>
-      <p:sp>
-        <p:nvSpPr>
-          <p:cNvPr id="19" name="TextBox 18"/>
+            <a:endParaRPr sz="3200"/>
+          </a:p>
+        </p:txBody>
+      </p:sp>
+      <p:sp>
+        <p:nvSpPr>
+          <p:cNvPr id="62" name="TextBox 61">
+            <a:extLst>
+              <a:ext uri="{FF2B5EF4-FFF2-40B4-BE49-F238E27FC236}">
+                <a16:creationId xmlns:a16="http://schemas.microsoft.com/office/drawing/2014/main" id="{2208900A-D03A-B9A3-6AB9-EA41898A29B3}"/>
+              </a:ext>
+            </a:extLst>
+          </p:cNvPr>
           <p:cNvSpPr txBox="1"/>
           <p:nvPr/>
         </p:nvSpPr>
         <p:spPr>
           <a:xfrm>
-            <a:off x="6025896" y="2331720"/>
-            <a:ext cx="1865376" cy="914400"/>
+            <a:off x="8697156" y="3412464"/>
+            <a:ext cx="2668836" cy="307392"/>
           </a:xfrm>
           <a:prstGeom prst="rect">
             <a:avLst/>
@@ -16316,119 +17774,86 @@
               </a:lnSpc>
             </a:pPr>
             <a:r>
-              <a:rPr sz="1150" b="1" i="0">
+              <a:rPr lang="en-AU" sz="2000" b="1" i="0" dirty="0">
                 <a:solidFill>
                   <a:srgbClr val="FFFFFF"/>
                 </a:solidFill>
                 <a:latin typeface="Segoe UI"/>
               </a:rPr>
-              <a:t>Glue the big string</a:t>
-            </a:r>
-          </a:p>
-        </p:txBody>
-      </p:sp>
-      <p:sp>
-        <p:nvSpPr>
-          <p:cNvPr id="20" name="Right Arrow 19"/>
-          <p:cNvSpPr/>
-          <p:nvPr/>
-        </p:nvSpPr>
-        <p:spPr>
-          <a:xfrm>
-            <a:off x="8028431" y="2706624"/>
-            <a:ext cx="310896" cy="164592"/>
-          </a:xfrm>
-          <a:prstGeom prst="rightArrow">
-            <a:avLst/>
-          </a:prstGeom>
-          <a:solidFill>
-            <a:srgbClr val="2DD4BF"/>
-          </a:solidFill>
-          <a:ln>
-            <a:noFill/>
-          </a:ln>
-        </p:spPr>
-        <p:style>
-          <a:lnRef idx="1">
-            <a:schemeClr val="accent1"/>
-          </a:lnRef>
-          <a:fillRef idx="3">
-            <a:schemeClr val="accent1"/>
-          </a:fillRef>
-          <a:effectRef idx="2">
-            <a:schemeClr val="accent1"/>
-          </a:effectRef>
-          <a:fontRef idx="minor">
-            <a:schemeClr val="lt1"/>
-          </a:fontRef>
-        </p:style>
-        <p:txBody>
-          <a:bodyPr rtlCol="0" anchor="ctr"/>
+              <a:t>GPT 5.5</a:t>
+            </a:r>
+            <a:endParaRPr sz="2000" b="1" i="0" dirty="0">
+              <a:solidFill>
+                <a:srgbClr val="FFFFFF"/>
+              </a:solidFill>
+              <a:latin typeface="Segoe UI"/>
+            </a:endParaRPr>
+          </a:p>
+        </p:txBody>
+      </p:sp>
+      <p:sp>
+        <p:nvSpPr>
+          <p:cNvPr id="64" name="TextBox 63">
+            <a:extLst>
+              <a:ext uri="{FF2B5EF4-FFF2-40B4-BE49-F238E27FC236}">
+                <a16:creationId xmlns:a16="http://schemas.microsoft.com/office/drawing/2014/main" id="{33178C59-A377-E166-B8F9-A43EB6F76820}"/>
+              </a:ext>
+            </a:extLst>
+          </p:cNvPr>
+          <p:cNvSpPr txBox="1"/>
+          <p:nvPr/>
+        </p:nvSpPr>
+        <p:spPr>
+          <a:xfrm>
+            <a:off x="6912891" y="3086100"/>
+            <a:ext cx="1765404" cy="276999"/>
+          </a:xfrm>
+          <a:prstGeom prst="rect">
+            <a:avLst/>
+          </a:prstGeom>
+          <a:noFill/>
+        </p:spPr>
+        <p:txBody>
+          <a:bodyPr wrap="square" lIns="0" tIns="0" rIns="0" bIns="0" anchor="t">
+            <a:spAutoFit/>
+          </a:bodyPr>
           <a:lstStyle/>
           <a:p>
             <a:pPr algn="ctr"/>
-            <a:endParaRPr/>
-          </a:p>
-        </p:txBody>
-      </p:sp>
-      <p:sp>
-        <p:nvSpPr>
-          <p:cNvPr id="21" name="Rounded Rectangle 20"/>
-          <p:cNvSpPr/>
-          <p:nvPr/>
-        </p:nvSpPr>
-        <p:spPr>
-          <a:xfrm>
-            <a:off x="8823960" y="2331720"/>
-            <a:ext cx="2331720" cy="914400"/>
-          </a:xfrm>
-          <a:prstGeom prst="roundRect">
-            <a:avLst>
-              <a:gd name="adj" fmla="val 6000"/>
-            </a:avLst>
-          </a:prstGeom>
-          <a:solidFill>
-            <a:srgbClr val="142847"/>
-          </a:solidFill>
-          <a:ln w="12700">
-            <a:solidFill>
-              <a:srgbClr val="F5B342"/>
-            </a:solidFill>
-          </a:ln>
-        </p:spPr>
-        <p:style>
-          <a:lnRef idx="1">
-            <a:schemeClr val="accent1"/>
-          </a:lnRef>
-          <a:fillRef idx="3">
-            <a:schemeClr val="accent1"/>
-          </a:fillRef>
-          <a:effectRef idx="2">
-            <a:schemeClr val="accent1"/>
-          </a:effectRef>
-          <a:fontRef idx="minor">
-            <a:schemeClr val="lt1"/>
-          </a:fontRef>
-        </p:style>
-        <p:txBody>
-          <a:bodyPr rtlCol="0" anchor="ctr"/>
-          <a:lstStyle/>
-          <a:p>
-            <a:pPr algn="ctr"/>
-            <a:endParaRPr/>
-          </a:p>
-        </p:txBody>
-      </p:sp>
-      <p:sp>
-        <p:nvSpPr>
-          <p:cNvPr id="22" name="TextBox 21"/>
+            <a:r>
+              <a:rPr lang="en-AU" b="1" i="0" dirty="0">
+                <a:solidFill>
+                  <a:schemeClr val="accent6"/>
+                </a:solidFill>
+                <a:latin typeface="Segoe UI"/>
+              </a:rPr>
+              <a:t>OpenAI API</a:t>
+            </a:r>
+            <a:endParaRPr b="1" i="0" dirty="0">
+              <a:solidFill>
+                <a:schemeClr val="accent6"/>
+              </a:solidFill>
+              <a:latin typeface="Segoe UI"/>
+            </a:endParaRPr>
+          </a:p>
+        </p:txBody>
+      </p:sp>
+      <p:sp>
+        <p:nvSpPr>
+          <p:cNvPr id="66" name="TextBox 65">
+            <a:extLst>
+              <a:ext uri="{FF2B5EF4-FFF2-40B4-BE49-F238E27FC236}">
+                <a16:creationId xmlns:a16="http://schemas.microsoft.com/office/drawing/2014/main" id="{69F49702-A9A2-4685-B436-4B8D4E380DB6}"/>
+              </a:ext>
+            </a:extLst>
+          </p:cNvPr>
           <p:cNvSpPr txBox="1"/>
           <p:nvPr/>
         </p:nvSpPr>
         <p:spPr>
           <a:xfrm>
-            <a:off x="8897112" y="2692868"/>
-            <a:ext cx="2185415" cy="192104"/>
+            <a:off x="6461175" y="3661628"/>
+            <a:ext cx="2668836" cy="215187"/>
           </a:xfrm>
           <a:prstGeom prst="rect">
             <a:avLst/>
@@ -16447,15 +17872,15 @@
               </a:lnSpc>
             </a:pPr>
             <a:r>
-              <a:rPr lang="en-AU" sz="1250" b="1" i="0" dirty="0">
+              <a:rPr lang="en-AU" sz="1400" b="1" i="0" dirty="0">
                 <a:solidFill>
                   <a:srgbClr val="FFFFFF"/>
                 </a:solidFill>
                 <a:latin typeface="Segoe UI"/>
               </a:rPr>
-              <a:t>OpenAI API</a:t>
-            </a:r>
-            <a:endParaRPr sz="1250" b="1" i="0" dirty="0">
+              <a:t>KB + Question</a:t>
+            </a:r>
+            <a:endParaRPr sz="1400" b="1" i="0" dirty="0">
               <a:solidFill>
                 <a:srgbClr val="FFFFFF"/>
               </a:solidFill>
@@ -16466,39 +17891,47 @@
       </p:sp>
       <p:sp>
         <p:nvSpPr>
-          <p:cNvPr id="23" name="Rounded Rectangle 22"/>
+          <p:cNvPr id="69" name="Rectangle: Rounded Corners 68">
+            <a:extLst>
+              <a:ext uri="{FF2B5EF4-FFF2-40B4-BE49-F238E27FC236}">
+                <a16:creationId xmlns:a16="http://schemas.microsoft.com/office/drawing/2014/main" id="{C86C87C5-4473-7E7D-6EF7-07234A6583FA}"/>
+              </a:ext>
+            </a:extLst>
+          </p:cNvPr>
           <p:cNvSpPr/>
           <p:nvPr/>
         </p:nvSpPr>
         <p:spPr>
           <a:xfrm>
-            <a:off x="868680" y="2057400"/>
-            <a:ext cx="7269480" cy="1463040"/>
+            <a:off x="739739" y="2291137"/>
+            <a:ext cx="6290179" cy="2311685"/>
           </a:xfrm>
           <a:prstGeom prst="roundRect">
-            <a:avLst>
-              <a:gd name="adj" fmla="val 8000"/>
-            </a:avLst>
+            <a:avLst/>
           </a:prstGeom>
           <a:noFill/>
-          <a:ln w="22225">
+          <a:ln w="9525" cap="flat" cmpd="sng" algn="ctr">
             <a:solidFill>
-              <a:srgbClr val="2DD4BF"/>
+              <a:schemeClr val="accent5"/>
             </a:solidFill>
+            <a:prstDash val="solid"/>
+            <a:round/>
+            <a:headEnd type="none" w="med" len="med"/>
+            <a:tailEnd type="none" w="med" len="med"/>
           </a:ln>
         </p:spPr>
         <p:style>
-          <a:lnRef idx="1">
-            <a:schemeClr val="accent1"/>
+          <a:lnRef idx="0">
+            <a:scrgbClr r="0" g="0" b="0"/>
           </a:lnRef>
-          <a:fillRef idx="3">
-            <a:schemeClr val="accent1"/>
+          <a:fillRef idx="0">
+            <a:scrgbClr r="0" g="0" b="0"/>
           </a:fillRef>
-          <a:effectRef idx="2">
-            <a:schemeClr val="accent1"/>
+          <a:effectRef idx="0">
+            <a:scrgbClr r="0" g="0" b="0"/>
           </a:effectRef>
           <a:fontRef idx="minor">
-            <a:schemeClr val="lt1"/>
+            <a:schemeClr val="accent5"/>
           </a:fontRef>
         </p:style>
         <p:txBody>
@@ -16506,20 +17939,80 @@
           <a:lstStyle/>
           <a:p>
             <a:pPr algn="ctr"/>
-            <a:endParaRPr/>
-          </a:p>
-        </p:txBody>
-      </p:sp>
-      <p:sp>
-        <p:nvSpPr>
-          <p:cNvPr id="24" name="TextBox 23"/>
+            <a:endParaRPr lang="en-AU"/>
+          </a:p>
+        </p:txBody>
+      </p:sp>
+      <p:sp>
+        <p:nvSpPr>
+          <p:cNvPr id="71" name="Rectangle: Rounded Corners 70">
+            <a:extLst>
+              <a:ext uri="{FF2B5EF4-FFF2-40B4-BE49-F238E27FC236}">
+                <a16:creationId xmlns:a16="http://schemas.microsoft.com/office/drawing/2014/main" id="{740D3628-E651-8DC6-A9B5-1E954DE17056}"/>
+              </a:ext>
+            </a:extLst>
+          </p:cNvPr>
+          <p:cNvSpPr/>
+          <p:nvPr/>
+        </p:nvSpPr>
+        <p:spPr>
+          <a:xfrm>
+            <a:off x="8575499" y="2273157"/>
+            <a:ext cx="2962380" cy="2311685"/>
+          </a:xfrm>
+          <a:prstGeom prst="roundRect">
+            <a:avLst/>
+          </a:prstGeom>
+          <a:noFill/>
+          <a:ln w="9525" cap="flat" cmpd="sng" algn="ctr">
+            <a:solidFill>
+              <a:schemeClr val="accent6"/>
+            </a:solidFill>
+            <a:prstDash val="solid"/>
+            <a:round/>
+            <a:headEnd type="none" w="med" len="med"/>
+            <a:tailEnd type="none" w="med" len="med"/>
+          </a:ln>
+        </p:spPr>
+        <p:style>
+          <a:lnRef idx="0">
+            <a:scrgbClr r="0" g="0" b="0"/>
+          </a:lnRef>
+          <a:fillRef idx="0">
+            <a:scrgbClr r="0" g="0" b="0"/>
+          </a:fillRef>
+          <a:effectRef idx="0">
+            <a:scrgbClr r="0" g="0" b="0"/>
+          </a:effectRef>
+          <a:fontRef idx="minor">
+            <a:schemeClr val="accent6"/>
+          </a:fontRef>
+        </p:style>
+        <p:txBody>
+          <a:bodyPr rtlCol="0" anchor="ctr"/>
+          <a:lstStyle/>
+          <a:p>
+            <a:pPr algn="ctr"/>
+            <a:endParaRPr lang="en-AU"/>
+          </a:p>
+        </p:txBody>
+      </p:sp>
+      <p:sp>
+        <p:nvSpPr>
+          <p:cNvPr id="73" name="TextBox 72">
+            <a:extLst>
+              <a:ext uri="{FF2B5EF4-FFF2-40B4-BE49-F238E27FC236}">
+                <a16:creationId xmlns:a16="http://schemas.microsoft.com/office/drawing/2014/main" id="{C477E622-947B-1FE6-6DEE-389BC522BF4C}"/>
+              </a:ext>
+            </a:extLst>
+          </p:cNvPr>
           <p:cNvSpPr txBox="1"/>
           <p:nvPr/>
         </p:nvSpPr>
         <p:spPr>
           <a:xfrm>
-            <a:off x="868680" y="3611880"/>
-            <a:ext cx="7269480" cy="365760"/>
+            <a:off x="8830695" y="4702203"/>
+            <a:ext cx="2608448" cy="276999"/>
           </a:xfrm>
           <a:prstGeom prst="rect">
             <a:avLst/>
@@ -16534,73 +18027,39 @@
           <a:p>
             <a:pPr algn="ctr"/>
             <a:r>
-              <a:rPr sz="1200" b="1" i="0" dirty="0">
-                <a:solidFill>
-                  <a:srgbClr val="2DD4BF"/>
-                </a:solidFill>
-                <a:latin typeface="Segoe UI"/>
-              </a:rPr>
-              <a:t>ORDINARY CODE — deterministic</a:t>
-            </a:r>
-          </a:p>
-        </p:txBody>
-      </p:sp>
-      <p:sp>
-        <p:nvSpPr>
-          <p:cNvPr id="25" name="Rounded Rectangle 24"/>
-          <p:cNvSpPr/>
-          <p:nvPr/>
-        </p:nvSpPr>
-        <p:spPr>
-          <a:xfrm>
-            <a:off x="8641080" y="2057400"/>
-            <a:ext cx="2697480" cy="1463040"/>
-          </a:xfrm>
-          <a:prstGeom prst="roundRect">
-            <a:avLst>
-              <a:gd name="adj" fmla="val 8000"/>
-            </a:avLst>
-          </a:prstGeom>
-          <a:noFill/>
-          <a:ln w="22225">
-            <a:solidFill>
-              <a:srgbClr val="F5B342"/>
-            </a:solidFill>
-          </a:ln>
-        </p:spPr>
-        <p:style>
-          <a:lnRef idx="1">
-            <a:schemeClr val="accent1"/>
-          </a:lnRef>
-          <a:fillRef idx="3">
-            <a:schemeClr val="accent1"/>
-          </a:fillRef>
-          <a:effectRef idx="2">
-            <a:schemeClr val="accent1"/>
-          </a:effectRef>
-          <a:fontRef idx="minor">
-            <a:schemeClr val="lt1"/>
-          </a:fontRef>
-        </p:style>
-        <p:txBody>
-          <a:bodyPr rtlCol="0" anchor="ctr"/>
-          <a:lstStyle/>
-          <a:p>
-            <a:pPr algn="ctr"/>
-            <a:endParaRPr/>
-          </a:p>
-        </p:txBody>
-      </p:sp>
-      <p:sp>
-        <p:nvSpPr>
-          <p:cNvPr id="26" name="TextBox 25"/>
+              <a:rPr lang="en-AU" b="1" i="0" dirty="0">
+                <a:solidFill>
+                  <a:schemeClr val="accent6"/>
+                </a:solidFill>
+                <a:latin typeface="Segoe UI"/>
+              </a:rPr>
+              <a:t>AI – non-deterministic</a:t>
+            </a:r>
+            <a:endParaRPr b="1" i="0" dirty="0">
+              <a:solidFill>
+                <a:schemeClr val="accent6"/>
+              </a:solidFill>
+              <a:latin typeface="Segoe UI"/>
+            </a:endParaRPr>
+          </a:p>
+        </p:txBody>
+      </p:sp>
+      <p:sp>
+        <p:nvSpPr>
+          <p:cNvPr id="75" name="TextBox 74">
+            <a:extLst>
+              <a:ext uri="{FF2B5EF4-FFF2-40B4-BE49-F238E27FC236}">
+                <a16:creationId xmlns:a16="http://schemas.microsoft.com/office/drawing/2014/main" id="{F636B090-9883-6BC4-3A99-F4CF772A44C1}"/>
+              </a:ext>
+            </a:extLst>
+          </p:cNvPr>
           <p:cNvSpPr txBox="1"/>
           <p:nvPr/>
         </p:nvSpPr>
         <p:spPr>
           <a:xfrm>
-            <a:off x="8641080" y="3611880"/>
-            <a:ext cx="2697480" cy="365760"/>
+            <a:off x="2580604" y="4700449"/>
+            <a:ext cx="2608448" cy="276999"/>
           </a:xfrm>
           <a:prstGeom prst="rect">
             <a:avLst/>
@@ -16615,49 +18074,20 @@
           <a:p>
             <a:pPr algn="ctr"/>
             <a:r>
-              <a:rPr sz="1200" b="1" i="0">
-                <a:solidFill>
-                  <a:srgbClr val="F5B342"/>
-                </a:solidFill>
-                <a:latin typeface="Segoe UI"/>
-              </a:rPr>
-              <a:t>AI — non-deterministic</a:t>
-            </a:r>
-          </a:p>
-        </p:txBody>
-      </p:sp>
-      <p:sp>
-        <p:nvSpPr>
-          <p:cNvPr id="31" name="TextBox 30"/>
-          <p:cNvSpPr txBox="1"/>
-          <p:nvPr/>
-        </p:nvSpPr>
-        <p:spPr>
-          <a:xfrm>
-            <a:off x="822960" y="5394960"/>
-            <a:ext cx="10607040" cy="457200"/>
-          </a:xfrm>
-          <a:prstGeom prst="rect">
-            <a:avLst/>
-          </a:prstGeom>
-          <a:noFill/>
-        </p:spPr>
-        <p:txBody>
-          <a:bodyPr wrap="square" lIns="0" tIns="0" rIns="0" bIns="0" anchor="t">
-            <a:spAutoFit/>
-          </a:bodyPr>
-          <a:lstStyle/>
-          <a:p>
-            <a:pPr algn="l"/>
-            <a:r>
-              <a:rPr sz="1500" b="1" i="0">
-                <a:solidFill>
-                  <a:srgbClr val="F5B342"/>
-                </a:solidFill>
-                <a:latin typeface="Segoe UI"/>
-              </a:rPr>
-              <a:t>An “AI system” is mostly NOT AI — one AI box, surrounded by ordinary software.</a:t>
-            </a:r>
+              <a:rPr lang="en-AU" b="1" i="0" dirty="0">
+                <a:solidFill>
+                  <a:schemeClr val="accent6"/>
+                </a:solidFill>
+                <a:latin typeface="Segoe UI"/>
+              </a:rPr>
+              <a:t>Non-AI –deterministic</a:t>
+            </a:r>
+            <a:endParaRPr b="1" i="0" dirty="0">
+              <a:solidFill>
+                <a:schemeClr val="accent6"/>
+              </a:solidFill>
+              <a:latin typeface="Segoe UI"/>
+            </a:endParaRPr>
           </a:p>
         </p:txBody>
       </p:sp>
@@ -17050,14 +18480,395 @@
       </p:sp>
       <p:sp>
         <p:nvSpPr>
-          <p:cNvPr id="12" name="Rounded Rectangle 11"/>
+          <p:cNvPr id="14" name="Rounded Rectangle 13"/>
           <p:cNvSpPr/>
           <p:nvPr/>
         </p:nvSpPr>
         <p:spPr>
           <a:xfrm>
-            <a:off x="822960" y="1691640"/>
-            <a:ext cx="2926080" cy="475488"/>
+            <a:off x="822960" y="2423160"/>
+            <a:ext cx="3108960" cy="2011680"/>
+          </a:xfrm>
+          <a:prstGeom prst="roundRect">
+            <a:avLst>
+              <a:gd name="adj" fmla="val 6000"/>
+            </a:avLst>
+          </a:prstGeom>
+          <a:solidFill>
+            <a:srgbClr val="142847"/>
+          </a:solidFill>
+          <a:ln w="12700">
+            <a:solidFill>
+              <a:srgbClr val="253B5E"/>
+            </a:solidFill>
+          </a:ln>
+        </p:spPr>
+        <p:style>
+          <a:lnRef idx="1">
+            <a:schemeClr val="accent1"/>
+          </a:lnRef>
+          <a:fillRef idx="3">
+            <a:schemeClr val="accent1"/>
+          </a:fillRef>
+          <a:effectRef idx="2">
+            <a:schemeClr val="accent1"/>
+          </a:effectRef>
+          <a:fontRef idx="minor">
+            <a:schemeClr val="lt1"/>
+          </a:fontRef>
+        </p:style>
+        <p:txBody>
+          <a:bodyPr rtlCol="0" anchor="ctr"/>
+          <a:lstStyle/>
+          <a:p>
+            <a:pPr algn="ctr"/>
+            <a:endParaRPr sz="2800"/>
+          </a:p>
+        </p:txBody>
+      </p:sp>
+      <p:sp>
+        <p:nvSpPr>
+          <p:cNvPr id="15" name="TextBox 14"/>
+          <p:cNvSpPr txBox="1"/>
+          <p:nvPr/>
+        </p:nvSpPr>
+        <p:spPr>
+          <a:xfrm>
+            <a:off x="1783080" y="2553069"/>
+            <a:ext cx="2651760" cy="276999"/>
+          </a:xfrm>
+          <a:prstGeom prst="rect">
+            <a:avLst/>
+          </a:prstGeom>
+          <a:noFill/>
+        </p:spPr>
+        <p:txBody>
+          <a:bodyPr wrap="square" lIns="0" tIns="0" rIns="0" bIns="0" anchor="t">
+            <a:spAutoFit/>
+          </a:bodyPr>
+          <a:lstStyle/>
+          <a:p>
+            <a:pPr algn="l"/>
+            <a:r>
+              <a:rPr b="1" i="0" dirty="0">
+                <a:solidFill>
+                  <a:srgbClr val="9FB3C8"/>
+                </a:solidFill>
+                <a:latin typeface="Segoe UI"/>
+              </a:rPr>
+              <a:t>the KB</a:t>
+            </a:r>
+          </a:p>
+        </p:txBody>
+      </p:sp>
+      <p:sp>
+        <p:nvSpPr>
+          <p:cNvPr id="16" name="TextBox 15"/>
+          <p:cNvSpPr txBox="1"/>
+          <p:nvPr/>
+        </p:nvSpPr>
+        <p:spPr>
+          <a:xfrm>
+            <a:off x="1051560" y="2971800"/>
+            <a:ext cx="2651760" cy="492443"/>
+          </a:xfrm>
+          <a:prstGeom prst="rect">
+            <a:avLst/>
+          </a:prstGeom>
+          <a:noFill/>
+        </p:spPr>
+        <p:txBody>
+          <a:bodyPr wrap="square" lIns="0" tIns="0" rIns="0" bIns="0" anchor="t">
+            <a:spAutoFit/>
+          </a:bodyPr>
+          <a:lstStyle/>
+          <a:p>
+            <a:pPr algn="l"/>
+            <a:r>
+              <a:rPr sz="3200" b="1" i="0">
+                <a:solidFill>
+                  <a:srgbClr val="FFFFFF"/>
+                </a:solidFill>
+                <a:latin typeface="Segoe UI"/>
+              </a:rPr>
+              <a:t>300 PDFs</a:t>
+            </a:r>
+          </a:p>
+        </p:txBody>
+      </p:sp>
+      <p:sp>
+        <p:nvSpPr>
+          <p:cNvPr id="17" name="TextBox 16"/>
+          <p:cNvSpPr txBox="1"/>
+          <p:nvPr/>
+        </p:nvSpPr>
+        <p:spPr>
+          <a:xfrm>
+            <a:off x="1051560" y="3566160"/>
+            <a:ext cx="2651760" cy="307777"/>
+          </a:xfrm>
+          <a:prstGeom prst="rect">
+            <a:avLst/>
+          </a:prstGeom>
+          <a:noFill/>
+        </p:spPr>
+        <p:txBody>
+          <a:bodyPr wrap="square" lIns="0" tIns="0" rIns="0" bIns="0" anchor="t">
+            <a:spAutoFit/>
+          </a:bodyPr>
+          <a:lstStyle/>
+          <a:p>
+            <a:pPr algn="l"/>
+            <a:r>
+              <a:rPr sz="2000" b="1" i="0" dirty="0">
+                <a:solidFill>
+                  <a:srgbClr val="F5B342"/>
+                </a:solidFill>
+                <a:latin typeface="Segoe UI"/>
+              </a:rPr>
+              <a:t>≈ 2</a:t>
+            </a:r>
+            <a:r>
+              <a:rPr lang="en-AU" sz="2000" b="1" i="0" dirty="0">
+                <a:solidFill>
+                  <a:srgbClr val="F5B342"/>
+                </a:solidFill>
+                <a:latin typeface="Segoe UI"/>
+              </a:rPr>
+              <a:t> million</a:t>
+            </a:r>
+            <a:r>
+              <a:rPr sz="2000" b="1" i="0" dirty="0">
+                <a:solidFill>
+                  <a:srgbClr val="F5B342"/>
+                </a:solidFill>
+                <a:latin typeface="Segoe UI"/>
+              </a:rPr>
+              <a:t> words</a:t>
+            </a:r>
+          </a:p>
+        </p:txBody>
+      </p:sp>
+      <p:sp>
+        <p:nvSpPr>
+          <p:cNvPr id="18" name="Right Arrow 17"/>
+          <p:cNvSpPr/>
+          <p:nvPr/>
+        </p:nvSpPr>
+        <p:spPr>
+          <a:xfrm>
+            <a:off x="4069080" y="3291840"/>
+            <a:ext cx="640080" cy="274320"/>
+          </a:xfrm>
+          <a:prstGeom prst="rightArrow">
+            <a:avLst/>
+          </a:prstGeom>
+          <a:solidFill>
+            <a:srgbClr val="2DD4BF"/>
+          </a:solidFill>
+          <a:ln>
+            <a:noFill/>
+          </a:ln>
+        </p:spPr>
+        <p:style>
+          <a:lnRef idx="1">
+            <a:schemeClr val="accent1"/>
+          </a:lnRef>
+          <a:fillRef idx="3">
+            <a:schemeClr val="accent1"/>
+          </a:fillRef>
+          <a:effectRef idx="2">
+            <a:schemeClr val="accent1"/>
+          </a:effectRef>
+          <a:fontRef idx="minor">
+            <a:schemeClr val="lt1"/>
+          </a:fontRef>
+        </p:style>
+        <p:txBody>
+          <a:bodyPr rtlCol="0" anchor="ctr"/>
+          <a:lstStyle/>
+          <a:p>
+            <a:pPr algn="ctr"/>
+            <a:endParaRPr sz="2800"/>
+          </a:p>
+        </p:txBody>
+      </p:sp>
+      <p:sp>
+        <p:nvSpPr>
+          <p:cNvPr id="19" name="Rounded Rectangle 18"/>
+          <p:cNvSpPr/>
+          <p:nvPr/>
+        </p:nvSpPr>
+        <p:spPr>
+          <a:xfrm>
+            <a:off x="4846320" y="2423160"/>
+            <a:ext cx="3108960" cy="2011680"/>
+          </a:xfrm>
+          <a:prstGeom prst="roundRect">
+            <a:avLst>
+              <a:gd name="adj" fmla="val 6000"/>
+            </a:avLst>
+          </a:prstGeom>
+          <a:solidFill>
+            <a:srgbClr val="142847"/>
+          </a:solidFill>
+          <a:ln w="12700">
+            <a:solidFill>
+              <a:srgbClr val="F5B342"/>
+            </a:solidFill>
+          </a:ln>
+        </p:spPr>
+        <p:style>
+          <a:lnRef idx="1">
+            <a:schemeClr val="accent1"/>
+          </a:lnRef>
+          <a:fillRef idx="3">
+            <a:schemeClr val="accent1"/>
+          </a:fillRef>
+          <a:effectRef idx="2">
+            <a:schemeClr val="accent1"/>
+          </a:effectRef>
+          <a:fontRef idx="minor">
+            <a:schemeClr val="lt1"/>
+          </a:fontRef>
+        </p:style>
+        <p:txBody>
+          <a:bodyPr rtlCol="0" anchor="ctr"/>
+          <a:lstStyle/>
+          <a:p>
+            <a:pPr algn="ctr"/>
+            <a:endParaRPr sz="2800"/>
+          </a:p>
+        </p:txBody>
+      </p:sp>
+      <p:sp>
+        <p:nvSpPr>
+          <p:cNvPr id="20" name="TextBox 19"/>
+          <p:cNvSpPr txBox="1"/>
+          <p:nvPr/>
+        </p:nvSpPr>
+        <p:spPr>
+          <a:xfrm>
+            <a:off x="5760720" y="2610664"/>
+            <a:ext cx="2651760" cy="276999"/>
+          </a:xfrm>
+          <a:prstGeom prst="rect">
+            <a:avLst/>
+          </a:prstGeom>
+          <a:noFill/>
+        </p:spPr>
+        <p:txBody>
+          <a:bodyPr wrap="square" lIns="0" tIns="0" rIns="0" bIns="0" anchor="t">
+            <a:spAutoFit/>
+          </a:bodyPr>
+          <a:lstStyle/>
+          <a:p>
+            <a:pPr algn="l"/>
+            <a:r>
+              <a:rPr b="1" i="0" dirty="0">
+                <a:solidFill>
+                  <a:srgbClr val="F5B342"/>
+                </a:solidFill>
+                <a:latin typeface="Segoe UI"/>
+              </a:rPr>
+              <a:t>the prompt</a:t>
+            </a:r>
+          </a:p>
+        </p:txBody>
+      </p:sp>
+      <p:sp>
+        <p:nvSpPr>
+          <p:cNvPr id="21" name="TextBox 20"/>
+          <p:cNvSpPr txBox="1"/>
+          <p:nvPr/>
+        </p:nvSpPr>
+        <p:spPr>
+          <a:xfrm>
+            <a:off x="5866543" y="3330567"/>
+            <a:ext cx="1928459" cy="322332"/>
+          </a:xfrm>
+          <a:prstGeom prst="rect">
+            <a:avLst/>
+          </a:prstGeom>
+          <a:noFill/>
+        </p:spPr>
+        <p:txBody>
+          <a:bodyPr wrap="square" lIns="0" tIns="0" rIns="0" bIns="0" anchor="t">
+            <a:spAutoFit/>
+          </a:bodyPr>
+          <a:lstStyle/>
+          <a:p>
+            <a:pPr algn="l">
+              <a:lnSpc>
+                <a:spcPct val="130000"/>
+              </a:lnSpc>
+            </a:pPr>
+            <a:r>
+              <a:rPr b="1" i="0" dirty="0">
+                <a:solidFill>
+                  <a:srgbClr val="FFFFFF"/>
+                </a:solidFill>
+                <a:latin typeface="Segoe UI"/>
+              </a:rPr>
+              <a:t>ALL of it</a:t>
+            </a:r>
+          </a:p>
+        </p:txBody>
+      </p:sp>
+      <p:sp>
+        <p:nvSpPr>
+          <p:cNvPr id="22" name="Right Arrow 21"/>
+          <p:cNvSpPr/>
+          <p:nvPr/>
+        </p:nvSpPr>
+        <p:spPr>
+          <a:xfrm>
+            <a:off x="8092440" y="3291840"/>
+            <a:ext cx="640080" cy="274320"/>
+          </a:xfrm>
+          <a:prstGeom prst="rightArrow">
+            <a:avLst/>
+          </a:prstGeom>
+          <a:solidFill>
+            <a:srgbClr val="2DD4BF"/>
+          </a:solidFill>
+          <a:ln>
+            <a:noFill/>
+          </a:ln>
+        </p:spPr>
+        <p:style>
+          <a:lnRef idx="1">
+            <a:schemeClr val="accent1"/>
+          </a:lnRef>
+          <a:fillRef idx="3">
+            <a:schemeClr val="accent1"/>
+          </a:fillRef>
+          <a:effectRef idx="2">
+            <a:schemeClr val="accent1"/>
+          </a:effectRef>
+          <a:fontRef idx="minor">
+            <a:schemeClr val="lt1"/>
+          </a:fontRef>
+        </p:style>
+        <p:txBody>
+          <a:bodyPr rtlCol="0" anchor="ctr"/>
+          <a:lstStyle/>
+          <a:p>
+            <a:pPr algn="ctr"/>
+            <a:endParaRPr sz="2800"/>
+          </a:p>
+        </p:txBody>
+      </p:sp>
+      <p:sp>
+        <p:nvSpPr>
+          <p:cNvPr id="23" name="Rounded Rectangle 22"/>
+          <p:cNvSpPr/>
+          <p:nvPr/>
+        </p:nvSpPr>
+        <p:spPr>
+          <a:xfrm>
+            <a:off x="8869680" y="2423160"/>
+            <a:ext cx="2697480" cy="2011680"/>
           </a:xfrm>
           <a:prstGeom prst="roundRect">
             <a:avLst>
@@ -17092,103 +18903,20 @@
           <a:lstStyle/>
           <a:p>
             <a:pPr algn="ctr"/>
-            <a:endParaRPr/>
-          </a:p>
-        </p:txBody>
-      </p:sp>
-      <p:sp>
-        <p:nvSpPr>
-          <p:cNvPr id="13" name="TextBox 12"/>
+            <a:endParaRPr sz="2800"/>
+          </a:p>
+        </p:txBody>
+      </p:sp>
+      <p:sp>
+        <p:nvSpPr>
+          <p:cNvPr id="24" name="TextBox 23"/>
           <p:cNvSpPr txBox="1"/>
           <p:nvPr/>
         </p:nvSpPr>
         <p:spPr>
           <a:xfrm>
-            <a:off x="987552" y="1691640"/>
-            <a:ext cx="2596896" cy="475488"/>
-          </a:xfrm>
-          <a:prstGeom prst="rect">
-            <a:avLst/>
-          </a:prstGeom>
-          <a:noFill/>
-        </p:spPr>
-        <p:txBody>
-          <a:bodyPr wrap="square" lIns="0" tIns="0" rIns="0" bIns="0" anchor="ctr">
-            <a:spAutoFit/>
-          </a:bodyPr>
-          <a:lstStyle/>
-          <a:p>
-            <a:pPr algn="l"/>
-            <a:r>
-              <a:rPr sz="1150" b="1" i="1">
-                <a:solidFill>
-                  <a:srgbClr val="E06C6C"/>
-                </a:solidFill>
-                <a:latin typeface="Segoe UI"/>
-              </a:rPr>
-              <a:t>✗ too slow to be usable</a:t>
-            </a:r>
-          </a:p>
-        </p:txBody>
-      </p:sp>
-      <p:sp>
-        <p:nvSpPr>
-          <p:cNvPr id="14" name="Rounded Rectangle 13"/>
-          <p:cNvSpPr/>
-          <p:nvPr/>
-        </p:nvSpPr>
-        <p:spPr>
-          <a:xfrm>
-            <a:off x="822960" y="2423160"/>
-            <a:ext cx="3108960" cy="2011680"/>
-          </a:xfrm>
-          <a:prstGeom prst="roundRect">
-            <a:avLst>
-              <a:gd name="adj" fmla="val 6000"/>
-            </a:avLst>
-          </a:prstGeom>
-          <a:solidFill>
-            <a:srgbClr val="142847"/>
-          </a:solidFill>
-          <a:ln w="12700">
-            <a:solidFill>
-              <a:srgbClr val="253B5E"/>
-            </a:solidFill>
-          </a:ln>
-        </p:spPr>
-        <p:style>
-          <a:lnRef idx="1">
-            <a:schemeClr val="accent1"/>
-          </a:lnRef>
-          <a:fillRef idx="3">
-            <a:schemeClr val="accent1"/>
-          </a:fillRef>
-          <a:effectRef idx="2">
-            <a:schemeClr val="accent1"/>
-          </a:effectRef>
-          <a:fontRef idx="minor">
-            <a:schemeClr val="lt1"/>
-          </a:fontRef>
-        </p:style>
-        <p:txBody>
-          <a:bodyPr rtlCol="0" anchor="ctr"/>
-          <a:lstStyle/>
-          <a:p>
-            <a:pPr algn="ctr"/>
-            <a:endParaRPr/>
-          </a:p>
-        </p:txBody>
-      </p:sp>
-      <p:sp>
-        <p:nvSpPr>
-          <p:cNvPr id="15" name="TextBox 14"/>
-          <p:cNvSpPr txBox="1"/>
-          <p:nvPr/>
-        </p:nvSpPr>
-        <p:spPr>
-          <a:xfrm>
-            <a:off x="1051560" y="2606040"/>
-            <a:ext cx="2651760" cy="365760"/>
+            <a:off x="9539935" y="2606040"/>
+            <a:ext cx="2240280" cy="276999"/>
           </a:xfrm>
           <a:prstGeom prst="rect">
             <a:avLst/>
@@ -17203,27 +18931,27 @@
           <a:p>
             <a:pPr algn="l"/>
             <a:r>
-              <a:rPr sz="1200" b="1" i="0">
-                <a:solidFill>
-                  <a:srgbClr val="9FB3C8"/>
-                </a:solidFill>
-                <a:latin typeface="Segoe UI"/>
-              </a:rPr>
-              <a:t>the KB</a:t>
-            </a:r>
-          </a:p>
-        </p:txBody>
-      </p:sp>
-      <p:sp>
-        <p:nvSpPr>
-          <p:cNvPr id="16" name="TextBox 15"/>
+              <a:rPr b="1" i="0" dirty="0">
+                <a:solidFill>
+                  <a:srgbClr val="E06C6C"/>
+                </a:solidFill>
+                <a:latin typeface="Segoe UI"/>
+              </a:rPr>
+              <a:t>the result</a:t>
+            </a:r>
+          </a:p>
+        </p:txBody>
+      </p:sp>
+      <p:sp>
+        <p:nvSpPr>
+          <p:cNvPr id="25" name="TextBox 24"/>
           <p:cNvSpPr txBox="1"/>
           <p:nvPr/>
         </p:nvSpPr>
         <p:spPr>
           <a:xfrm>
-            <a:off x="1051560" y="2971800"/>
-            <a:ext cx="2651760" cy="548640"/>
+            <a:off x="9128760" y="3218021"/>
+            <a:ext cx="2240280" cy="492443"/>
           </a:xfrm>
           <a:prstGeom prst="rect">
             <a:avLst/>
@@ -17238,462 +18966,13 @@
           <a:p>
             <a:pPr algn="l"/>
             <a:r>
-              <a:rPr sz="2000" b="1" i="0">
-                <a:solidFill>
-                  <a:srgbClr val="FFFFFF"/>
-                </a:solidFill>
-                <a:latin typeface="Segoe UI"/>
-              </a:rPr>
-              <a:t>300 PDFs</a:t>
-            </a:r>
-          </a:p>
-        </p:txBody>
-      </p:sp>
-      <p:sp>
-        <p:nvSpPr>
-          <p:cNvPr id="17" name="TextBox 16"/>
-          <p:cNvSpPr txBox="1"/>
-          <p:nvPr/>
-        </p:nvSpPr>
-        <p:spPr>
-          <a:xfrm>
-            <a:off x="1051560" y="3566160"/>
-            <a:ext cx="2651760" cy="548640"/>
-          </a:xfrm>
-          <a:prstGeom prst="rect">
-            <a:avLst/>
-          </a:prstGeom>
-          <a:noFill/>
-        </p:spPr>
-        <p:txBody>
-          <a:bodyPr wrap="square" lIns="0" tIns="0" rIns="0" bIns="0" anchor="t">
-            <a:spAutoFit/>
-          </a:bodyPr>
-          <a:lstStyle/>
-          <a:p>
-            <a:pPr algn="l"/>
-            <a:r>
-              <a:rPr sz="1500" b="1" i="0">
-                <a:solidFill>
-                  <a:srgbClr val="F5B342"/>
-                </a:solidFill>
-                <a:latin typeface="Segoe UI"/>
-              </a:rPr>
-              <a:t>≈ 2,000,000 words</a:t>
-            </a:r>
-          </a:p>
-        </p:txBody>
-      </p:sp>
-      <p:sp>
-        <p:nvSpPr>
-          <p:cNvPr id="18" name="Right Arrow 17"/>
-          <p:cNvSpPr/>
-          <p:nvPr/>
-        </p:nvSpPr>
-        <p:spPr>
-          <a:xfrm>
-            <a:off x="4069080" y="3291840"/>
-            <a:ext cx="640080" cy="274320"/>
-          </a:xfrm>
-          <a:prstGeom prst="rightArrow">
-            <a:avLst/>
-          </a:prstGeom>
-          <a:solidFill>
-            <a:srgbClr val="2DD4BF"/>
-          </a:solidFill>
-          <a:ln>
-            <a:noFill/>
-          </a:ln>
-        </p:spPr>
-        <p:style>
-          <a:lnRef idx="1">
-            <a:schemeClr val="accent1"/>
-          </a:lnRef>
-          <a:fillRef idx="3">
-            <a:schemeClr val="accent1"/>
-          </a:fillRef>
-          <a:effectRef idx="2">
-            <a:schemeClr val="accent1"/>
-          </a:effectRef>
-          <a:fontRef idx="minor">
-            <a:schemeClr val="lt1"/>
-          </a:fontRef>
-        </p:style>
-        <p:txBody>
-          <a:bodyPr rtlCol="0" anchor="ctr"/>
-          <a:lstStyle/>
-          <a:p>
-            <a:pPr algn="ctr"/>
-            <a:endParaRPr/>
-          </a:p>
-        </p:txBody>
-      </p:sp>
-      <p:sp>
-        <p:nvSpPr>
-          <p:cNvPr id="19" name="Rounded Rectangle 18"/>
-          <p:cNvSpPr/>
-          <p:nvPr/>
-        </p:nvSpPr>
-        <p:spPr>
-          <a:xfrm>
-            <a:off x="4846320" y="2423160"/>
-            <a:ext cx="3108960" cy="2011680"/>
-          </a:xfrm>
-          <a:prstGeom prst="roundRect">
-            <a:avLst>
-              <a:gd name="adj" fmla="val 6000"/>
-            </a:avLst>
-          </a:prstGeom>
-          <a:solidFill>
-            <a:srgbClr val="142847"/>
-          </a:solidFill>
-          <a:ln w="12700">
-            <a:solidFill>
-              <a:srgbClr val="F5B342"/>
-            </a:solidFill>
-          </a:ln>
-        </p:spPr>
-        <p:style>
-          <a:lnRef idx="1">
-            <a:schemeClr val="accent1"/>
-          </a:lnRef>
-          <a:fillRef idx="3">
-            <a:schemeClr val="accent1"/>
-          </a:fillRef>
-          <a:effectRef idx="2">
-            <a:schemeClr val="accent1"/>
-          </a:effectRef>
-          <a:fontRef idx="minor">
-            <a:schemeClr val="lt1"/>
-          </a:fontRef>
-        </p:style>
-        <p:txBody>
-          <a:bodyPr rtlCol="0" anchor="ctr"/>
-          <a:lstStyle/>
-          <a:p>
-            <a:pPr algn="ctr"/>
-            <a:endParaRPr/>
-          </a:p>
-        </p:txBody>
-      </p:sp>
-      <p:sp>
-        <p:nvSpPr>
-          <p:cNvPr id="20" name="TextBox 19"/>
-          <p:cNvSpPr txBox="1"/>
-          <p:nvPr/>
-        </p:nvSpPr>
-        <p:spPr>
-          <a:xfrm>
-            <a:off x="5074920" y="2606040"/>
-            <a:ext cx="2651760" cy="365760"/>
-          </a:xfrm>
-          <a:prstGeom prst="rect">
-            <a:avLst/>
-          </a:prstGeom>
-          <a:noFill/>
-        </p:spPr>
-        <p:txBody>
-          <a:bodyPr wrap="square" lIns="0" tIns="0" rIns="0" bIns="0" anchor="t">
-            <a:spAutoFit/>
-          </a:bodyPr>
-          <a:lstStyle/>
-          <a:p>
-            <a:pPr algn="l"/>
-            <a:r>
-              <a:rPr sz="1200" b="1" i="0">
-                <a:solidFill>
-                  <a:srgbClr val="F5B342"/>
-                </a:solidFill>
-                <a:latin typeface="Segoe UI"/>
-              </a:rPr>
-              <a:t>the prompt</a:t>
-            </a:r>
-          </a:p>
-        </p:txBody>
-      </p:sp>
-      <p:sp>
-        <p:nvSpPr>
-          <p:cNvPr id="21" name="TextBox 20"/>
-          <p:cNvSpPr txBox="1"/>
-          <p:nvPr/>
-        </p:nvSpPr>
-        <p:spPr>
-          <a:xfrm>
-            <a:off x="5074920" y="2971800"/>
-            <a:ext cx="2651760" cy="1280160"/>
-          </a:xfrm>
-          <a:prstGeom prst="rect">
-            <a:avLst/>
-          </a:prstGeom>
-          <a:noFill/>
-        </p:spPr>
-        <p:txBody>
-          <a:bodyPr wrap="square" lIns="0" tIns="0" rIns="0" bIns="0" anchor="t">
-            <a:spAutoFit/>
-          </a:bodyPr>
-          <a:lstStyle/>
-          <a:p>
-            <a:pPr algn="l">
-              <a:lnSpc>
-                <a:spcPct val="130000"/>
-              </a:lnSpc>
-            </a:pPr>
-            <a:r>
-              <a:rPr sz="1350" b="1" i="0">
-                <a:solidFill>
-                  <a:srgbClr val="FFFFFF"/>
-                </a:solidFill>
-                <a:latin typeface="Segoe UI"/>
-              </a:rPr>
-              <a:t>ALL of it, for EVERY question</a:t>
-            </a:r>
-          </a:p>
-          <a:p>
-            <a:pPr algn="l"/>
-            <a:r>
-              <a:rPr sz="1100" b="0" i="1">
-                <a:solidFill>
-                  <a:srgbClr val="9FB3C8"/>
-                </a:solidFill>
-                <a:latin typeface="Segoe UI"/>
-              </a:rPr>
-              <a:t>even “what are the library hours?”</a:t>
-            </a:r>
-          </a:p>
-        </p:txBody>
-      </p:sp>
-      <p:sp>
-        <p:nvSpPr>
-          <p:cNvPr id="22" name="Right Arrow 21"/>
-          <p:cNvSpPr/>
-          <p:nvPr/>
-        </p:nvSpPr>
-        <p:spPr>
-          <a:xfrm>
-            <a:off x="8092440" y="3291840"/>
-            <a:ext cx="640080" cy="274320"/>
-          </a:xfrm>
-          <a:prstGeom prst="rightArrow">
-            <a:avLst/>
-          </a:prstGeom>
-          <a:solidFill>
-            <a:srgbClr val="2DD4BF"/>
-          </a:solidFill>
-          <a:ln>
-            <a:noFill/>
-          </a:ln>
-        </p:spPr>
-        <p:style>
-          <a:lnRef idx="1">
-            <a:schemeClr val="accent1"/>
-          </a:lnRef>
-          <a:fillRef idx="3">
-            <a:schemeClr val="accent1"/>
-          </a:fillRef>
-          <a:effectRef idx="2">
-            <a:schemeClr val="accent1"/>
-          </a:effectRef>
-          <a:fontRef idx="minor">
-            <a:schemeClr val="lt1"/>
-          </a:fontRef>
-        </p:style>
-        <p:txBody>
-          <a:bodyPr rtlCol="0" anchor="ctr"/>
-          <a:lstStyle/>
-          <a:p>
-            <a:pPr algn="ctr"/>
-            <a:endParaRPr/>
-          </a:p>
-        </p:txBody>
-      </p:sp>
-      <p:sp>
-        <p:nvSpPr>
-          <p:cNvPr id="23" name="Rounded Rectangle 22"/>
-          <p:cNvSpPr/>
-          <p:nvPr/>
-        </p:nvSpPr>
-        <p:spPr>
-          <a:xfrm>
-            <a:off x="8869680" y="2423160"/>
-            <a:ext cx="2697480" cy="2011680"/>
-          </a:xfrm>
-          <a:prstGeom prst="roundRect">
-            <a:avLst>
-              <a:gd name="adj" fmla="val 6000"/>
-            </a:avLst>
-          </a:prstGeom>
-          <a:solidFill>
-            <a:srgbClr val="142847"/>
-          </a:solidFill>
-          <a:ln w="12700">
-            <a:solidFill>
-              <a:srgbClr val="E06C6C"/>
-            </a:solidFill>
-          </a:ln>
-        </p:spPr>
-        <p:style>
-          <a:lnRef idx="1">
-            <a:schemeClr val="accent1"/>
-          </a:lnRef>
-          <a:fillRef idx="3">
-            <a:schemeClr val="accent1"/>
-          </a:fillRef>
-          <a:effectRef idx="2">
-            <a:schemeClr val="accent1"/>
-          </a:effectRef>
-          <a:fontRef idx="minor">
-            <a:schemeClr val="lt1"/>
-          </a:fontRef>
-        </p:style>
-        <p:txBody>
-          <a:bodyPr rtlCol="0" anchor="ctr"/>
-          <a:lstStyle/>
-          <a:p>
-            <a:pPr algn="ctr"/>
-            <a:endParaRPr/>
-          </a:p>
-        </p:txBody>
-      </p:sp>
-      <p:sp>
-        <p:nvSpPr>
-          <p:cNvPr id="24" name="TextBox 23"/>
-          <p:cNvSpPr txBox="1"/>
-          <p:nvPr/>
-        </p:nvSpPr>
-        <p:spPr>
-          <a:xfrm>
-            <a:off x="9098280" y="2606040"/>
-            <a:ext cx="2240280" cy="365760"/>
-          </a:xfrm>
-          <a:prstGeom prst="rect">
-            <a:avLst/>
-          </a:prstGeom>
-          <a:noFill/>
-        </p:spPr>
-        <p:txBody>
-          <a:bodyPr wrap="square" lIns="0" tIns="0" rIns="0" bIns="0" anchor="t">
-            <a:spAutoFit/>
-          </a:bodyPr>
-          <a:lstStyle/>
-          <a:p>
-            <a:pPr algn="l"/>
-            <a:r>
-              <a:rPr sz="1200" b="1" i="0">
+              <a:rPr sz="3200" b="1" i="0" dirty="0">
                 <a:solidFill>
                   <a:srgbClr val="E06C6C"/>
                 </a:solidFill>
                 <a:latin typeface="Segoe UI"/>
               </a:rPr>
-              <a:t>the result</a:t>
-            </a:r>
-          </a:p>
-        </p:txBody>
-      </p:sp>
-      <p:sp>
-        <p:nvSpPr>
-          <p:cNvPr id="25" name="TextBox 24"/>
-          <p:cNvSpPr txBox="1"/>
-          <p:nvPr/>
-        </p:nvSpPr>
-        <p:spPr>
-          <a:xfrm>
-            <a:off x="9098280" y="2971800"/>
-            <a:ext cx="2240280" cy="548640"/>
-          </a:xfrm>
-          <a:prstGeom prst="rect">
-            <a:avLst/>
-          </a:prstGeom>
-          <a:noFill/>
-        </p:spPr>
-        <p:txBody>
-          <a:bodyPr wrap="square" lIns="0" tIns="0" rIns="0" bIns="0" anchor="t">
-            <a:spAutoFit/>
-          </a:bodyPr>
-          <a:lstStyle/>
-          <a:p>
-            <a:pPr algn="l"/>
-            <a:r>
-              <a:rPr sz="2000" b="1" i="0">
-                <a:solidFill>
-                  <a:srgbClr val="E06C6C"/>
-                </a:solidFill>
-                <a:latin typeface="Segoe UI"/>
-              </a:rPr>
               <a:t>~1 minute</a:t>
-            </a:r>
-          </a:p>
-        </p:txBody>
-      </p:sp>
-      <p:sp>
-        <p:nvSpPr>
-          <p:cNvPr id="26" name="TextBox 25"/>
-          <p:cNvSpPr txBox="1"/>
-          <p:nvPr/>
-        </p:nvSpPr>
-        <p:spPr>
-          <a:xfrm>
-            <a:off x="9098280" y="3566160"/>
-            <a:ext cx="2240280" cy="777240"/>
-          </a:xfrm>
-          <a:prstGeom prst="rect">
-            <a:avLst/>
-          </a:prstGeom>
-          <a:noFill/>
-        </p:spPr>
-        <p:txBody>
-          <a:bodyPr wrap="square" lIns="0" tIns="0" rIns="0" bIns="0" anchor="t">
-            <a:spAutoFit/>
-          </a:bodyPr>
-          <a:lstStyle/>
-          <a:p>
-            <a:pPr algn="l">
-              <a:lnSpc>
-                <a:spcPct val="120000"/>
-              </a:lnSpc>
-            </a:pPr>
-            <a:r>
-              <a:rPr sz="1050" b="0" i="1">
-                <a:solidFill>
-                  <a:srgbClr val="9FB3C8"/>
-                </a:solidFill>
-                <a:latin typeface="Segoe UI"/>
-              </a:rPr>
-              <a:t>per answer — my first real bot worked exactly like this</a:t>
-            </a:r>
-          </a:p>
-        </p:txBody>
-      </p:sp>
-      <p:sp>
-        <p:nvSpPr>
-          <p:cNvPr id="27" name="TextBox 26"/>
-          <p:cNvSpPr txBox="1"/>
-          <p:nvPr/>
-        </p:nvSpPr>
-        <p:spPr>
-          <a:xfrm>
-            <a:off x="822960" y="4663440"/>
-            <a:ext cx="10607040" cy="365760"/>
-          </a:xfrm>
-          <a:prstGeom prst="rect">
-            <a:avLst/>
-          </a:prstGeom>
-          <a:noFill/>
-        </p:spPr>
-        <p:txBody>
-          <a:bodyPr wrap="square" lIns="0" tIns="0" rIns="0" bIns="0" anchor="t">
-            <a:spAutoFit/>
-          </a:bodyPr>
-          <a:lstStyle/>
-          <a:p>
-            <a:pPr algn="l"/>
-            <a:r>
-              <a:rPr sz="1250" b="0" i="1">
-                <a:solidFill>
-                  <a:srgbClr val="9FB3C8"/>
-                </a:solidFill>
-                <a:latin typeface="Segoe UI"/>
-              </a:rPr>
-              <a:t>Almost everything we send is irrelevant to the question being asked.</a:t>
             </a:r>
           </a:p>
         </p:txBody>
@@ -17855,7 +19134,7 @@
         <p:spPr>
           <a:xfrm>
             <a:off x="576072" y="676656"/>
-            <a:ext cx="9692640" cy="822960"/>
+            <a:ext cx="9692640" cy="461665"/>
           </a:xfrm>
           <a:prstGeom prst="rect">
             <a:avLst/>
@@ -17874,14 +19153,29 @@
               </a:lnSpc>
             </a:pPr>
             <a:r>
-              <a:rPr sz="3000" b="1" i="0">
+              <a:rPr sz="3000" b="1" i="0" dirty="0">
                 <a:solidFill>
                   <a:srgbClr val="FFFFFF"/>
                 </a:solidFill>
                 <a:latin typeface="Segoe UI"/>
               </a:rPr>
-              <a:t>Send less: pick the right pieces</a:t>
-            </a:r>
+              <a:t>Send less: </a:t>
+            </a:r>
+            <a:r>
+              <a:rPr lang="en-AU" sz="3000" b="1" i="0" dirty="0">
+                <a:solidFill>
+                  <a:srgbClr val="FFFFFF"/>
+                </a:solidFill>
+                <a:latin typeface="Segoe UI"/>
+              </a:rPr>
+              <a:t>Chunking</a:t>
+            </a:r>
+            <a:endParaRPr sz="3000" b="1" i="0" dirty="0">
+              <a:solidFill>
+                <a:srgbClr val="FFFFFF"/>
+              </a:solidFill>
+              <a:latin typeface="Segoe UI"/>
+            </a:endParaRPr>
           </a:p>
         </p:txBody>
       </p:sp>
@@ -18081,41 +19375,6 @@
                 <a:latin typeface="Segoe UI"/>
               </a:rPr>
               <a:t>   ·   Analyst Programmer  ·  Wimmera CMA, Victoria</a:t>
-            </a:r>
-          </a:p>
-        </p:txBody>
-      </p:sp>
-      <p:sp>
-        <p:nvSpPr>
-          <p:cNvPr id="12" name="TextBox 11"/>
-          <p:cNvSpPr txBox="1"/>
-          <p:nvPr/>
-        </p:nvSpPr>
-        <p:spPr>
-          <a:xfrm>
-            <a:off x="822960" y="1691640"/>
-            <a:ext cx="10607040" cy="365760"/>
-          </a:xfrm>
-          <a:prstGeom prst="rect">
-            <a:avLst/>
-          </a:prstGeom>
-          <a:noFill/>
-        </p:spPr>
-        <p:txBody>
-          <a:bodyPr wrap="square" lIns="0" tIns="0" rIns="0" bIns="0" anchor="t">
-            <a:spAutoFit/>
-          </a:bodyPr>
-          <a:lstStyle/>
-          <a:p>
-            <a:pPr algn="l"/>
-            <a:r>
-              <a:rPr sz="1350" b="0" i="1">
-                <a:solidFill>
-                  <a:srgbClr val="9FB3C8"/>
-                </a:solidFill>
-                <a:latin typeface="Segoe UI"/>
-              </a:rPr>
-              <a:t>For any one question, only a few paragraphs of the whole KB matter. Send those.</a:t>
             </a:r>
           </a:p>
         </p:txBody>
@@ -18164,7 +19423,7 @@
           <a:lstStyle/>
           <a:p>
             <a:pPr algn="ctr"/>
-            <a:endParaRPr/>
+            <a:endParaRPr sz="3200"/>
           </a:p>
         </p:txBody>
       </p:sp>
@@ -18176,8 +19435,8 @@
         </p:nvSpPr>
         <p:spPr>
           <a:xfrm>
-            <a:off x="896112" y="2240280"/>
-            <a:ext cx="1412748" cy="914400"/>
+            <a:off x="896112" y="2441545"/>
+            <a:ext cx="1412748" cy="511871"/>
           </a:xfrm>
           <a:prstGeom prst="rect">
             <a:avLst/>
@@ -18196,7 +19455,7 @@
               </a:lnSpc>
             </a:pPr>
             <a:r>
-              <a:rPr sz="1050" b="1" i="0">
+              <a:rPr sz="1600" b="1" i="0">
                 <a:solidFill>
                   <a:srgbClr val="FFFFFF"/>
                 </a:solidFill>
@@ -18248,7 +19507,7 @@
           <a:lstStyle/>
           <a:p>
             <a:pPr algn="ctr"/>
-            <a:endParaRPr/>
+            <a:endParaRPr sz="3200"/>
           </a:p>
         </p:txBody>
       </p:sp>
@@ -18296,7 +19555,7 @@
           <a:lstStyle/>
           <a:p>
             <a:pPr algn="ctr"/>
-            <a:endParaRPr/>
+            <a:endParaRPr sz="3200"/>
           </a:p>
         </p:txBody>
       </p:sp>
@@ -18308,8 +19567,8 @@
         </p:nvSpPr>
         <p:spPr>
           <a:xfrm>
-            <a:off x="2692908" y="2240280"/>
-            <a:ext cx="1412748" cy="914400"/>
+            <a:off x="2692908" y="2441545"/>
+            <a:ext cx="1412748" cy="511871"/>
           </a:xfrm>
           <a:prstGeom prst="rect">
             <a:avLst/>
@@ -18328,14 +19587,23 @@
               </a:lnSpc>
             </a:pPr>
             <a:r>
-              <a:rPr sz="1050" b="1" i="0" dirty="0">
+              <a:rPr sz="1600" b="1" i="0" dirty="0">
                 <a:solidFill>
                   <a:srgbClr val="FFFFFF"/>
                 </a:solidFill>
                 <a:latin typeface="Segoe UI"/>
               </a:rPr>
               <a:t>split into
-chunks</a:t>
+</a:t>
+            </a:r>
+            <a:r>
+              <a:rPr sz="1600" b="1" i="0" dirty="0">
+                <a:solidFill>
+                  <a:schemeClr val="accent6"/>
+                </a:solidFill>
+                <a:latin typeface="Segoe UI"/>
+              </a:rPr>
+              <a:t>chunks</a:t>
             </a:r>
           </a:p>
         </p:txBody>
@@ -18380,7 +19648,7 @@
           <a:lstStyle/>
           <a:p>
             <a:pPr algn="ctr"/>
-            <a:endParaRPr/>
+            <a:endParaRPr sz="3200"/>
           </a:p>
         </p:txBody>
       </p:sp>
@@ -18428,7 +19696,7 @@
           <a:lstStyle/>
           <a:p>
             <a:pPr algn="ctr"/>
-            <a:endParaRPr/>
+            <a:endParaRPr sz="3200"/>
           </a:p>
         </p:txBody>
       </p:sp>
@@ -18440,8 +19708,8 @@
         </p:nvSpPr>
         <p:spPr>
           <a:xfrm>
-            <a:off x="4489704" y="2240280"/>
-            <a:ext cx="1412748" cy="914400"/>
+            <a:off x="4489704" y="2308592"/>
+            <a:ext cx="1412748" cy="777777"/>
           </a:xfrm>
           <a:prstGeom prst="rect">
             <a:avLst/>
@@ -18460,7 +19728,7 @@
               </a:lnSpc>
             </a:pPr>
             <a:r>
-              <a:rPr sz="1050" b="1" i="0">
+              <a:rPr sz="1600" b="1" i="0">
                 <a:solidFill>
                   <a:srgbClr val="FFFFFF"/>
                 </a:solidFill>
@@ -18512,7 +19780,7 @@
           <a:lstStyle/>
           <a:p>
             <a:pPr algn="ctr"/>
-            <a:endParaRPr/>
+            <a:endParaRPr sz="3200"/>
           </a:p>
         </p:txBody>
       </p:sp>
@@ -18560,7 +19828,7 @@
           <a:lstStyle/>
           <a:p>
             <a:pPr algn="ctr"/>
-            <a:endParaRPr/>
+            <a:endParaRPr sz="3200"/>
           </a:p>
         </p:txBody>
       </p:sp>
@@ -18572,8 +19840,8 @@
         </p:nvSpPr>
         <p:spPr>
           <a:xfrm>
-            <a:off x="6286500" y="2240280"/>
-            <a:ext cx="1412748" cy="914400"/>
+            <a:off x="6286500" y="2308591"/>
+            <a:ext cx="1412748" cy="777777"/>
           </a:xfrm>
           <a:prstGeom prst="rect">
             <a:avLst/>
@@ -18592,7 +19860,7 @@
               </a:lnSpc>
             </a:pPr>
             <a:r>
-              <a:rPr sz="1050" b="1" i="0">
+              <a:rPr sz="1600" b="1" i="0">
                 <a:solidFill>
                   <a:srgbClr val="FFFFFF"/>
                 </a:solidFill>
@@ -18644,7 +19912,7 @@
           <a:lstStyle/>
           <a:p>
             <a:pPr algn="ctr"/>
-            <a:endParaRPr/>
+            <a:endParaRPr sz="3200"/>
           </a:p>
         </p:txBody>
       </p:sp>
@@ -18692,7 +19960,7 @@
           <a:lstStyle/>
           <a:p>
             <a:pPr algn="ctr"/>
-            <a:endParaRPr/>
+            <a:endParaRPr sz="3200"/>
           </a:p>
         </p:txBody>
       </p:sp>
@@ -18704,8 +19972,8 @@
         </p:nvSpPr>
         <p:spPr>
           <a:xfrm>
-            <a:off x="8083296" y="2616784"/>
-            <a:ext cx="1412748" cy="161391"/>
+            <a:off x="8083296" y="2574497"/>
+            <a:ext cx="1412748" cy="245965"/>
           </a:xfrm>
           <a:prstGeom prst="rect">
             <a:avLst/>
@@ -18724,15 +19992,15 @@
               </a:lnSpc>
             </a:pPr>
             <a:r>
-              <a:rPr lang="en-AU" sz="1050" b="1" i="0" dirty="0">
+              <a:rPr lang="en-AU" sz="1600" b="1" i="0" dirty="0">
                 <a:solidFill>
                   <a:srgbClr val="FFFFFF"/>
                 </a:solidFill>
                 <a:latin typeface="Segoe UI"/>
               </a:rPr>
-              <a:t>OpenAI API</a:t>
-            </a:r>
-            <a:endParaRPr sz="1050" b="1" i="0" dirty="0">
+              <a:t>GPT 5.5</a:t>
+            </a:r>
+            <a:endParaRPr sz="1600" b="1" i="0" dirty="0">
               <a:solidFill>
                 <a:srgbClr val="FFFFFF"/>
               </a:solidFill>
@@ -18781,7 +20049,7 @@
           <a:lstStyle/>
           <a:p>
             <a:pPr algn="ctr"/>
-            <a:endParaRPr/>
+            <a:endParaRPr sz="3200"/>
           </a:p>
         </p:txBody>
       </p:sp>
@@ -18829,7 +20097,7 @@
           <a:lstStyle/>
           <a:p>
             <a:pPr algn="ctr"/>
-            <a:endParaRPr/>
+            <a:endParaRPr sz="3200"/>
           </a:p>
         </p:txBody>
       </p:sp>
@@ -18841,8 +20109,8 @@
         </p:nvSpPr>
         <p:spPr>
           <a:xfrm>
-            <a:off x="9880092" y="2240280"/>
-            <a:ext cx="1412748" cy="914400"/>
+            <a:off x="9880092" y="2574497"/>
+            <a:ext cx="1412748" cy="245965"/>
           </a:xfrm>
           <a:prstGeom prst="rect">
             <a:avLst/>
@@ -18861,109 +20129,13 @@
               </a:lnSpc>
             </a:pPr>
             <a:r>
-              <a:rPr sz="1050" b="1" i="0">
+              <a:rPr sz="1600" b="1" i="0">
                 <a:solidFill>
                   <a:srgbClr val="FFFFFF"/>
                 </a:solidFill>
                 <a:latin typeface="Segoe UI"/>
               </a:rPr>
               <a:t>answer</a:t>
-            </a:r>
-          </a:p>
-        </p:txBody>
-      </p:sp>
-      <p:sp>
-        <p:nvSpPr>
-          <p:cNvPr id="30" name="Rounded Rectangle 29"/>
-          <p:cNvSpPr/>
-          <p:nvPr/>
-        </p:nvSpPr>
-        <p:spPr>
-          <a:xfrm>
-            <a:off x="822960" y="4807724"/>
-            <a:ext cx="6492240" cy="731520"/>
-          </a:xfrm>
-          <a:prstGeom prst="roundRect">
-            <a:avLst>
-              <a:gd name="adj" fmla="val 6000"/>
-            </a:avLst>
-          </a:prstGeom>
-          <a:solidFill>
-            <a:srgbClr val="142847"/>
-          </a:solidFill>
-          <a:ln w="12700">
-            <a:solidFill>
-              <a:srgbClr val="2DD4BF"/>
-            </a:solidFill>
-          </a:ln>
-        </p:spPr>
-        <p:style>
-          <a:lnRef idx="1">
-            <a:schemeClr val="accent1"/>
-          </a:lnRef>
-          <a:fillRef idx="3">
-            <a:schemeClr val="accent1"/>
-          </a:fillRef>
-          <a:effectRef idx="2">
-            <a:schemeClr val="accent1"/>
-          </a:effectRef>
-          <a:fontRef idx="minor">
-            <a:schemeClr val="lt1"/>
-          </a:fontRef>
-        </p:style>
-        <p:txBody>
-          <a:bodyPr rtlCol="0" anchor="ctr"/>
-          <a:lstStyle/>
-          <a:p>
-            <a:pPr algn="ctr"/>
-            <a:endParaRPr/>
-          </a:p>
-        </p:txBody>
-      </p:sp>
-      <p:sp>
-        <p:nvSpPr>
-          <p:cNvPr id="31" name="TextBox 30"/>
-          <p:cNvSpPr txBox="1"/>
-          <p:nvPr/>
-        </p:nvSpPr>
-        <p:spPr>
-          <a:xfrm>
-            <a:off x="1005840" y="4807724"/>
-            <a:ext cx="6126479" cy="731520"/>
-          </a:xfrm>
-          <a:prstGeom prst="rect">
-            <a:avLst/>
-          </a:prstGeom>
-          <a:noFill/>
-        </p:spPr>
-        <p:txBody>
-          <a:bodyPr wrap="square" lIns="0" tIns="0" rIns="0" bIns="0" anchor="ctr">
-            <a:spAutoFit/>
-          </a:bodyPr>
-          <a:lstStyle/>
-          <a:p>
-            <a:pPr>
-              <a:lnSpc>
-                <a:spcPct val="112000"/>
-              </a:lnSpc>
-            </a:pPr>
-            <a:r>
-              <a:rPr sz="1250" b="1">
-                <a:solidFill>
-                  <a:srgbClr val="2DD4BF"/>
-                </a:solidFill>
-                <a:latin typeface="Segoe UI"/>
-              </a:rPr>
-              <a:t>Chunk</a:t>
-            </a:r>
-            <a:r>
-              <a:rPr sz="1050">
-                <a:solidFill>
-                  <a:srgbClr val="9FB3C8"/>
-                </a:solidFill>
-                <a:latin typeface="Segoe UI"/>
-              </a:rPr>
-              <a:t>  —  a small passage cut from a document — a few paragraphs, ideally one topic.</a:t>
             </a:r>
           </a:p>
         </p:txBody>
@@ -18976,8 +20148,8 @@
         </p:nvSpPr>
         <p:spPr>
           <a:xfrm>
-            <a:off x="7543800" y="4807724"/>
-            <a:ext cx="3840480" cy="731520"/>
+            <a:off x="6811766" y="5029200"/>
+            <a:ext cx="4572514" cy="731520"/>
           </a:xfrm>
           <a:prstGeom prst="roundRect">
             <a:avLst>
@@ -19012,7 +20184,7 @@
           <a:lstStyle/>
           <a:p>
             <a:pPr algn="ctr"/>
-            <a:endParaRPr/>
+            <a:endParaRPr sz="2800"/>
           </a:p>
         </p:txBody>
       </p:sp>
@@ -19024,8 +20196,8 @@
         </p:nvSpPr>
         <p:spPr>
           <a:xfrm>
-            <a:off x="7772400" y="4807724"/>
-            <a:ext cx="3383280" cy="731520"/>
+            <a:off x="7140539" y="5256461"/>
+            <a:ext cx="4015141" cy="276999"/>
           </a:xfrm>
           <a:prstGeom prst="rect">
             <a:avLst/>
@@ -19040,7 +20212,7 @@
           <a:p>
             <a:pPr algn="l"/>
             <a:r>
-              <a:rPr sz="1250" b="1" i="0">
+              <a:rPr b="1" i="0" dirty="0">
                 <a:solidFill>
                   <a:srgbClr val="2DD4BF"/>
                 </a:solidFill>
@@ -19065,8 +20237,8 @@
         </p:nvSpPr>
         <p:spPr>
           <a:xfrm>
-            <a:off x="4668105" y="3657600"/>
-            <a:ext cx="2253573" cy="731520"/>
+            <a:off x="896112" y="5074920"/>
+            <a:ext cx="3100535" cy="731520"/>
           </a:xfrm>
           <a:prstGeom prst="roundRect">
             <a:avLst>
@@ -19101,7 +20273,7 @@
           <a:lstStyle/>
           <a:p>
             <a:pPr algn="ctr"/>
-            <a:endParaRPr/>
+            <a:endParaRPr sz="2800"/>
           </a:p>
         </p:txBody>
       </p:sp>
@@ -19119,8 +20291,8 @@
         </p:nvSpPr>
         <p:spPr>
           <a:xfrm>
-            <a:off x="4896705" y="3927180"/>
-            <a:ext cx="3383280" cy="192360"/>
+            <a:off x="1157139" y="5302181"/>
+            <a:ext cx="3383280" cy="276999"/>
           </a:xfrm>
           <a:prstGeom prst="rect">
             <a:avLst/>
@@ -19135,7 +20307,7 @@
           <a:p>
             <a:pPr algn="l"/>
             <a:r>
-              <a:rPr lang="en-AU" sz="1250" b="1" i="0" dirty="0">
+              <a:rPr lang="en-AU" b="1" i="0" dirty="0">
                 <a:solidFill>
                   <a:srgbClr val="2DD4BF"/>
                 </a:solidFill>
@@ -19143,7 +20315,7 @@
               </a:rPr>
               <a:t>New terminology: chunk</a:t>
             </a:r>
-            <a:endParaRPr sz="1250" b="1" i="0" dirty="0">
+            <a:endParaRPr b="1" i="0" dirty="0">
               <a:solidFill>
                 <a:srgbClr val="2DD4BF"/>
               </a:solidFill>
@@ -19583,7 +20755,7 @@
           <a:lstStyle/>
           <a:p>
             <a:pPr algn="ctr"/>
-            <a:endParaRPr/>
+            <a:endParaRPr sz="2800"/>
           </a:p>
         </p:txBody>
       </p:sp>
@@ -19595,8 +20767,8 @@
         </p:nvSpPr>
         <p:spPr>
           <a:xfrm>
-            <a:off x="1097280" y="1737360"/>
-            <a:ext cx="6400800" cy="548640"/>
+            <a:off x="1097280" y="1873181"/>
+            <a:ext cx="6400800" cy="276999"/>
           </a:xfrm>
           <a:prstGeom prst="rect">
             <a:avLst/>
@@ -19611,7 +20783,7 @@
           <a:p>
             <a:pPr algn="l"/>
             <a:r>
-              <a:rPr sz="1350" b="1" i="1">
+              <a:rPr b="1" i="1">
                 <a:solidFill>
                   <a:srgbClr val="FFFFFF"/>
                 </a:solidFill>
@@ -19631,7 +20803,7 @@
         <p:spPr>
           <a:xfrm>
             <a:off x="822960" y="2468880"/>
-            <a:ext cx="4572000" cy="320040"/>
+            <a:ext cx="4572000" cy="184666"/>
           </a:xfrm>
           <a:prstGeom prst="rect">
             <a:avLst/>
@@ -19646,7 +20818,7 @@
           <a:p>
             <a:pPr algn="l"/>
             <a:r>
-              <a:rPr sz="1000" b="1" i="0">
+              <a:rPr sz="1200" b="1" i="0">
                 <a:solidFill>
                   <a:srgbClr val="9FB3C8"/>
                 </a:solidFill>
@@ -19666,7 +20838,7 @@
         <p:spPr>
           <a:xfrm>
             <a:off x="822960" y="2834640"/>
-            <a:ext cx="7955279" cy="603504"/>
+            <a:ext cx="9860280" cy="603504"/>
           </a:xfrm>
           <a:prstGeom prst="roundRect">
             <a:avLst>
@@ -19701,7 +20873,7 @@
           <a:lstStyle/>
           <a:p>
             <a:pPr algn="ctr"/>
-            <a:endParaRPr/>
+            <a:endParaRPr sz="2800"/>
           </a:p>
         </p:txBody>
       </p:sp>
@@ -19746,7 +20918,7 @@
           <a:p>
             <a:pPr algn="ctr"/>
             <a:r>
-              <a:rPr sz="1200" b="1">
+              <a:rPr b="1">
                 <a:solidFill>
                   <a:srgbClr val="0B1B33"/>
                 </a:solidFill>
@@ -19765,8 +20937,8 @@
         </p:nvSpPr>
         <p:spPr>
           <a:xfrm>
-            <a:off x="1508760" y="2834640"/>
-            <a:ext cx="4160520" cy="603504"/>
+            <a:off x="1508760" y="3027195"/>
+            <a:ext cx="4160520" cy="218393"/>
           </a:xfrm>
           <a:prstGeom prst="rect">
             <a:avLst/>
@@ -19785,13 +20957,67 @@
               </a:lnSpc>
             </a:pPr>
             <a:r>
-              <a:rPr sz="1050" b="0" i="0">
+              <a:rPr sz="1400" b="0" i="0" dirty="0">
                 <a:solidFill>
                   <a:srgbClr val="FFFFFF"/>
                 </a:solidFill>
                 <a:latin typeface="Segoe UI"/>
               </a:rPr>
-              <a:t>“Library opening hours: 8am–10pm on term days.”</a:t>
+              <a:t>“</a:t>
+            </a:r>
+            <a:r>
+              <a:rPr sz="1400" b="0" i="0" dirty="0">
+                <a:solidFill>
+                  <a:schemeClr val="accent6"/>
+                </a:solidFill>
+                <a:latin typeface="Segoe UI"/>
+              </a:rPr>
+              <a:t>Library</a:t>
+            </a:r>
+            <a:r>
+              <a:rPr sz="1400" b="0" i="0" dirty="0">
+                <a:solidFill>
+                  <a:srgbClr val="FFFFFF"/>
+                </a:solidFill>
+                <a:latin typeface="Segoe UI"/>
+              </a:rPr>
+              <a:t> </a:t>
+            </a:r>
+            <a:r>
+              <a:rPr sz="1400" b="0" i="0" dirty="0">
+                <a:solidFill>
+                  <a:schemeClr val="accent6"/>
+                </a:solidFill>
+                <a:latin typeface="Segoe UI"/>
+              </a:rPr>
+              <a:t>opening</a:t>
+            </a:r>
+            <a:r>
+              <a:rPr sz="1400" b="0" i="0" dirty="0">
+                <a:solidFill>
+                  <a:srgbClr val="FFFFFF"/>
+                </a:solidFill>
+                <a:latin typeface="Segoe UI"/>
+              </a:rPr>
+              <a:t> </a:t>
+            </a:r>
+            <a:r>
+              <a:rPr sz="1400" b="0" i="0" dirty="0">
+                <a:solidFill>
+                  <a:schemeClr val="accent6"/>
+                </a:solidFill>
+                <a:latin typeface="Segoe UI"/>
+              </a:rPr>
+              <a:t>hours</a:t>
+            </a:r>
+            <a:r>
+              <a:rPr sz="1400" b="0" i="0" dirty="0">
+                <a:solidFill>
+                  <a:srgbClr val="FFFFFF"/>
+                </a:solidFill>
+                <a:latin typeface="Segoe UI"/>
+              </a:rPr>
+              <a:t>: 8am–10pm on term days.”</a:t>
             </a:r>
           </a:p>
         </p:txBody>
@@ -19804,8 +21030,8 @@
         </p:nvSpPr>
         <p:spPr>
           <a:xfrm>
-            <a:off x="5760720" y="2834640"/>
-            <a:ext cx="1783080" cy="603504"/>
+            <a:off x="5760720" y="3050599"/>
+            <a:ext cx="1783080" cy="171585"/>
           </a:xfrm>
           <a:prstGeom prst="rect">
             <a:avLst/>
@@ -19824,7 +21050,7 @@
               </a:lnSpc>
             </a:pPr>
             <a:r>
-              <a:rPr sz="950" b="0" i="1">
+              <a:rPr sz="1100" b="0" i="1">
                 <a:solidFill>
                   <a:srgbClr val="9FB3C8"/>
                 </a:solidFill>
@@ -19843,8 +21069,8 @@
         </p:nvSpPr>
         <p:spPr>
           <a:xfrm>
-            <a:off x="7635240" y="2834640"/>
-            <a:ext cx="1005840" cy="603504"/>
+            <a:off x="9677400" y="3027195"/>
+            <a:ext cx="1005840" cy="246221"/>
           </a:xfrm>
           <a:prstGeom prst="rect">
             <a:avLst/>
@@ -19859,7 +21085,7 @@
           <a:p>
             <a:pPr algn="l"/>
             <a:r>
-              <a:rPr sz="1100" b="1" i="0">
+              <a:rPr sz="1600" b="1" i="0" dirty="0">
                 <a:solidFill>
                   <a:srgbClr val="2DD4BF"/>
                 </a:solidFill>
@@ -19879,7 +21105,7 @@
         <p:spPr>
           <a:xfrm>
             <a:off x="822960" y="3547872"/>
-            <a:ext cx="7955279" cy="603504"/>
+            <a:ext cx="9860280" cy="603504"/>
           </a:xfrm>
           <a:prstGeom prst="roundRect">
             <a:avLst>
@@ -19914,7 +21140,7 @@
           <a:lstStyle/>
           <a:p>
             <a:pPr algn="ctr"/>
-            <a:endParaRPr/>
+            <a:endParaRPr sz="2800"/>
           </a:p>
         </p:txBody>
       </p:sp>
@@ -19959,7 +21185,7 @@
           <a:p>
             <a:pPr algn="ctr"/>
             <a:r>
-              <a:rPr sz="1200" b="1">
+              <a:rPr b="1">
                 <a:solidFill>
                   <a:srgbClr val="9FB3C8"/>
                 </a:solidFill>
@@ -19978,8 +21204,8 @@
         </p:nvSpPr>
         <p:spPr>
           <a:xfrm>
-            <a:off x="1508760" y="3547872"/>
-            <a:ext cx="4160520" cy="603504"/>
+            <a:off x="1508760" y="3740427"/>
+            <a:ext cx="4160520" cy="218393"/>
           </a:xfrm>
           <a:prstGeom prst="rect">
             <a:avLst/>
@@ -19998,7 +21224,7 @@
               </a:lnSpc>
             </a:pPr>
             <a:r>
-              <a:rPr sz="1050" b="0" i="0">
+              <a:rPr sz="1400" b="0" i="0">
                 <a:solidFill>
                   <a:srgbClr val="FFFFFF"/>
                 </a:solidFill>
@@ -20017,8 +21243,8 @@
         </p:nvSpPr>
         <p:spPr>
           <a:xfrm>
-            <a:off x="5760720" y="3547872"/>
-            <a:ext cx="1783080" cy="603504"/>
+            <a:off x="5760720" y="3763831"/>
+            <a:ext cx="1783080" cy="171585"/>
           </a:xfrm>
           <a:prstGeom prst="rect">
             <a:avLst/>
@@ -20037,7 +21263,7 @@
               </a:lnSpc>
             </a:pPr>
             <a:r>
-              <a:rPr sz="950" b="0" i="1">
+              <a:rPr sz="1100" b="0" i="1">
                 <a:solidFill>
                   <a:srgbClr val="9FB3C8"/>
                 </a:solidFill>
@@ -20056,8 +21282,8 @@
         </p:nvSpPr>
         <p:spPr>
           <a:xfrm>
-            <a:off x="7635240" y="3547872"/>
-            <a:ext cx="1005840" cy="603504"/>
+            <a:off x="9677400" y="3740427"/>
+            <a:ext cx="1005840" cy="246221"/>
           </a:xfrm>
           <a:prstGeom prst="rect">
             <a:avLst/>
@@ -20072,7 +21298,7 @@
           <a:p>
             <a:pPr algn="l"/>
             <a:r>
-              <a:rPr sz="1100" b="1" i="0">
+              <a:rPr sz="1600" b="1" i="0">
                 <a:solidFill>
                   <a:srgbClr val="9FB3C8"/>
                 </a:solidFill>
@@ -20092,7 +21318,7 @@
         <p:spPr>
           <a:xfrm>
             <a:off x="822960" y="4261104"/>
-            <a:ext cx="7955279" cy="603504"/>
+            <a:ext cx="9860280" cy="603504"/>
           </a:xfrm>
           <a:prstGeom prst="roundRect">
             <a:avLst>
@@ -20127,7 +21353,7 @@
           <a:lstStyle/>
           <a:p>
             <a:pPr algn="ctr"/>
-            <a:endParaRPr/>
+            <a:endParaRPr sz="2800"/>
           </a:p>
         </p:txBody>
       </p:sp>
@@ -20172,7 +21398,7 @@
           <a:p>
             <a:pPr algn="ctr"/>
             <a:r>
-              <a:rPr sz="1200" b="1">
+              <a:rPr b="1">
                 <a:solidFill>
                   <a:srgbClr val="9FB3C8"/>
                 </a:solidFill>
@@ -20191,8 +21417,8 @@
         </p:nvSpPr>
         <p:spPr>
           <a:xfrm>
-            <a:off x="1508760" y="4261104"/>
-            <a:ext cx="4160520" cy="603504"/>
+            <a:off x="1508760" y="4335166"/>
+            <a:ext cx="4160520" cy="455381"/>
           </a:xfrm>
           <a:prstGeom prst="rect">
             <a:avLst/>
@@ -20211,13 +21437,31 @@
               </a:lnSpc>
             </a:pPr>
             <a:r>
-              <a:rPr sz="1050" b="0" i="0">
+              <a:rPr sz="1400" b="0" i="0" dirty="0">
                 <a:solidFill>
                   <a:srgbClr val="FFFFFF"/>
                 </a:solidFill>
                 <a:latin typeface="Segoe UI"/>
               </a:rPr>
-              <a:t>“Exam Period Appendix: library access 24/7 during exam period.”</a:t>
+              <a:t>“Exam Period Appendix: </a:t>
+            </a:r>
+            <a:r>
+              <a:rPr sz="1400" b="0" i="0" dirty="0">
+                <a:solidFill>
+                  <a:schemeClr val="accent6"/>
+                </a:solidFill>
+                <a:latin typeface="Segoe UI"/>
+              </a:rPr>
+              <a:t>library</a:t>
+            </a:r>
+            <a:r>
+              <a:rPr sz="1400" b="0" i="0" dirty="0">
+                <a:solidFill>
+                  <a:srgbClr val="FFFFFF"/>
+                </a:solidFill>
+                <a:latin typeface="Segoe UI"/>
+              </a:rPr>
+              <a:t> access 24/7 during exam period.”</a:t>
             </a:r>
           </a:p>
         </p:txBody>
@@ -20230,8 +21474,8 @@
         </p:nvSpPr>
         <p:spPr>
           <a:xfrm>
-            <a:off x="5760720" y="4261104"/>
-            <a:ext cx="1783080" cy="603504"/>
+            <a:off x="5760720" y="4477063"/>
+            <a:ext cx="1783080" cy="171585"/>
           </a:xfrm>
           <a:prstGeom prst="rect">
             <a:avLst/>
@@ -20250,7 +21494,7 @@
               </a:lnSpc>
             </a:pPr>
             <a:r>
-              <a:rPr sz="950" b="0" i="1">
+              <a:rPr sz="1100" b="0" i="1">
                 <a:solidFill>
                   <a:srgbClr val="9FB3C8"/>
                 </a:solidFill>
@@ -20269,8 +21513,8 @@
         </p:nvSpPr>
         <p:spPr>
           <a:xfrm>
-            <a:off x="7635240" y="4261104"/>
-            <a:ext cx="1005840" cy="603504"/>
+            <a:off x="9677400" y="4453659"/>
+            <a:ext cx="1005840" cy="246221"/>
           </a:xfrm>
           <a:prstGeom prst="rect">
             <a:avLst/>
@@ -20285,7 +21529,7 @@
           <a:p>
             <a:pPr algn="l"/>
             <a:r>
-              <a:rPr sz="1100" b="1" i="0">
+              <a:rPr sz="1600" b="1" i="0">
                 <a:solidFill>
                   <a:srgbClr val="9FB3C8"/>
                 </a:solidFill>
@@ -20305,7 +21549,7 @@
         <p:spPr>
           <a:xfrm>
             <a:off x="822960" y="5074920"/>
-            <a:ext cx="2608397" cy="685800"/>
+            <a:ext cx="2999027" cy="685800"/>
           </a:xfrm>
           <a:prstGeom prst="roundRect">
             <a:avLst>
@@ -20340,7 +21584,7 @@
           <a:lstStyle/>
           <a:p>
             <a:pPr algn="ctr"/>
-            <a:endParaRPr/>
+            <a:endParaRPr sz="2800"/>
           </a:p>
         </p:txBody>
       </p:sp>
@@ -20352,8 +21596,8 @@
         </p:nvSpPr>
         <p:spPr>
           <a:xfrm>
-            <a:off x="1005840" y="5318882"/>
-            <a:ext cx="2488471" cy="197875"/>
+            <a:off x="997885" y="5275345"/>
+            <a:ext cx="3102173" cy="284950"/>
           </a:xfrm>
           <a:prstGeom prst="rect">
             <a:avLst/>
@@ -20372,7 +21616,7 @@
               </a:lnSpc>
             </a:pPr>
             <a:r>
-              <a:rPr sz="1250" b="1" dirty="0">
+              <a:rPr b="1" dirty="0">
                 <a:solidFill>
                   <a:srgbClr val="2DD4BF"/>
                 </a:solidFill>
@@ -20380,7 +21624,7 @@
               </a:rPr>
               <a:t>Keyword search (BM25)</a:t>
             </a:r>
-            <a:endParaRPr sz="1050" dirty="0">
+            <a:endParaRPr sz="1400" dirty="0">
               <a:solidFill>
                 <a:srgbClr val="9FB3C8"/>
               </a:solidFill>
@@ -20526,7 +21770,7 @@
           <a:p>
             <a:pPr algn="l"/>
             <a:r>
-              <a:rPr sz="1250" b="1" i="0" spc="220">
+              <a:rPr sz="1250" b="1" i="0" spc="220" dirty="0">
                 <a:solidFill>
                   <a:srgbClr val="2DD4BF"/>
                 </a:solidFill>
@@ -20778,14 +22022,97 @@
       </p:sp>
       <p:sp>
         <p:nvSpPr>
-          <p:cNvPr id="12" name="Rounded Rectangle 11"/>
+          <p:cNvPr id="14" name="Rounded Rectangle 13"/>
           <p:cNvSpPr/>
           <p:nvPr/>
         </p:nvSpPr>
         <p:spPr>
           <a:xfrm>
-            <a:off x="822960" y="1691640"/>
-            <a:ext cx="2651760" cy="475488"/>
+            <a:off x="2354579" y="1712138"/>
+            <a:ext cx="7635240" cy="475488"/>
+          </a:xfrm>
+          <a:prstGeom prst="roundRect">
+            <a:avLst>
+              <a:gd name="adj" fmla="val 30000"/>
+            </a:avLst>
+          </a:prstGeom>
+          <a:solidFill>
+            <a:srgbClr val="142847"/>
+          </a:solidFill>
+          <a:ln w="12700">
+            <a:solidFill>
+              <a:srgbClr val="2DD4BF"/>
+            </a:solidFill>
+          </a:ln>
+        </p:spPr>
+        <p:style>
+          <a:lnRef idx="1">
+            <a:schemeClr val="accent1"/>
+          </a:lnRef>
+          <a:fillRef idx="3">
+            <a:schemeClr val="accent1"/>
+          </a:fillRef>
+          <a:effectRef idx="2">
+            <a:schemeClr val="accent1"/>
+          </a:effectRef>
+          <a:fontRef idx="minor">
+            <a:schemeClr val="lt1"/>
+          </a:fontRef>
+        </p:style>
+        <p:txBody>
+          <a:bodyPr rtlCol="0" anchor="ctr"/>
+          <a:lstStyle/>
+          <a:p>
+            <a:pPr algn="ctr"/>
+            <a:endParaRPr sz="2800"/>
+          </a:p>
+        </p:txBody>
+      </p:sp>
+      <p:sp>
+        <p:nvSpPr>
+          <p:cNvPr id="15" name="TextBox 14"/>
+          <p:cNvSpPr txBox="1"/>
+          <p:nvPr/>
+        </p:nvSpPr>
+        <p:spPr>
+          <a:xfrm>
+            <a:off x="2628900" y="1811383"/>
+            <a:ext cx="7178040" cy="276999"/>
+          </a:xfrm>
+          <a:prstGeom prst="rect">
+            <a:avLst/>
+          </a:prstGeom>
+          <a:noFill/>
+        </p:spPr>
+        <p:txBody>
+          <a:bodyPr wrap="square" lIns="0" tIns="0" rIns="0" bIns="0" anchor="ctr">
+            <a:spAutoFit/>
+          </a:bodyPr>
+          <a:lstStyle/>
+          <a:p>
+            <a:pPr algn="l"/>
+            <a:r>
+              <a:rPr b="1" i="1">
+                <a:solidFill>
+                  <a:srgbClr val="FFFFFF"/>
+                </a:solidFill>
+                <a:latin typeface="Segoe UI"/>
+              </a:rPr>
+              <a:t>Week 3 of term. Student asks: “Can I access the library 24/7?”</a:t>
+            </a:r>
+          </a:p>
+        </p:txBody>
+      </p:sp>
+      <p:sp>
+        <p:nvSpPr>
+          <p:cNvPr id="16" name="Rounded Rectangle 15"/>
+          <p:cNvSpPr/>
+          <p:nvPr/>
+        </p:nvSpPr>
+        <p:spPr>
+          <a:xfrm>
+            <a:off x="822960" y="2468880"/>
+            <a:ext cx="5166360" cy="1828800"/>
           </a:xfrm>
           <a:prstGeom prst="roundRect">
             <a:avLst>
@@ -20820,20 +22147,20 @@
           <a:lstStyle/>
           <a:p>
             <a:pPr algn="ctr"/>
-            <a:endParaRPr/>
-          </a:p>
-        </p:txBody>
-      </p:sp>
-      <p:sp>
-        <p:nvSpPr>
-          <p:cNvPr id="13" name="TextBox 12"/>
+            <a:endParaRPr sz="2800"/>
+          </a:p>
+        </p:txBody>
+      </p:sp>
+      <p:sp>
+        <p:nvSpPr>
+          <p:cNvPr id="17" name="TextBox 16"/>
           <p:cNvSpPr txBox="1"/>
           <p:nvPr/>
         </p:nvSpPr>
         <p:spPr>
           <a:xfrm>
-            <a:off x="987552" y="1691640"/>
-            <a:ext cx="2322576" cy="475488"/>
+            <a:off x="1051560" y="2606040"/>
+            <a:ext cx="4709160" cy="276999"/>
           </a:xfrm>
           <a:prstGeom prst="rect">
             <a:avLst/>
@@ -20841,38 +22168,166 @@
           <a:noFill/>
         </p:spPr>
         <p:txBody>
-          <a:bodyPr wrap="square" lIns="0" tIns="0" rIns="0" bIns="0" anchor="ctr">
+          <a:bodyPr wrap="square" lIns="0" tIns="0" rIns="0" bIns="0" anchor="t">
             <a:spAutoFit/>
           </a:bodyPr>
           <a:lstStyle/>
           <a:p>
             <a:pPr algn="l"/>
             <a:r>
-              <a:rPr sz="1150" b="1" i="1">
+              <a:rPr b="1" i="0">
                 <a:solidFill>
                   <a:srgbClr val="E06C6C"/>
                 </a:solidFill>
                 <a:latin typeface="Segoe UI"/>
               </a:rPr>
-              <a:t>✗ confidently wrong</a:t>
-            </a:r>
-          </a:p>
-        </p:txBody>
-      </p:sp>
-      <p:sp>
-        <p:nvSpPr>
-          <p:cNvPr id="14" name="Rounded Rectangle 13"/>
+              <a:t>Exam Period Appendix</a:t>
+            </a:r>
+          </a:p>
+        </p:txBody>
+      </p:sp>
+      <p:sp>
+        <p:nvSpPr>
+          <p:cNvPr id="18" name="TextBox 17"/>
+          <p:cNvSpPr txBox="1"/>
+          <p:nvPr/>
+        </p:nvSpPr>
+        <p:spPr>
+          <a:xfrm>
+            <a:off x="1051560" y="3017520"/>
+            <a:ext cx="4709160" cy="301557"/>
+          </a:xfrm>
+          <a:prstGeom prst="rect">
+            <a:avLst/>
+          </a:prstGeom>
+          <a:noFill/>
+        </p:spPr>
+        <p:txBody>
+          <a:bodyPr wrap="square" lIns="0" tIns="0" rIns="0" bIns="0" anchor="t">
+            <a:spAutoFit/>
+          </a:bodyPr>
+          <a:lstStyle/>
+          <a:p>
+            <a:pPr algn="l">
+              <a:lnSpc>
+                <a:spcPct val="120000"/>
+              </a:lnSpc>
+            </a:pPr>
+            <a:r>
+              <a:rPr b="0" i="1" dirty="0">
+                <a:solidFill>
+                  <a:srgbClr val="FFFFFF"/>
+                </a:solidFill>
+                <a:latin typeface="Segoe UI"/>
+              </a:rPr>
+              <a:t>“…</a:t>
+            </a:r>
+            <a:r>
+              <a:rPr b="0" i="1" dirty="0">
+                <a:solidFill>
+                  <a:schemeClr val="accent6"/>
+                </a:solidFill>
+                <a:latin typeface="Segoe UI"/>
+              </a:rPr>
+              <a:t>library</a:t>
+            </a:r>
+            <a:r>
+              <a:rPr b="0" i="1" dirty="0">
+                <a:solidFill>
+                  <a:srgbClr val="FFFFFF"/>
+                </a:solidFill>
+                <a:latin typeface="Segoe UI"/>
+              </a:rPr>
+              <a:t> </a:t>
+            </a:r>
+            <a:r>
+              <a:rPr b="0" i="1" dirty="0">
+                <a:solidFill>
+                  <a:schemeClr val="accent6"/>
+                </a:solidFill>
+                <a:latin typeface="Segoe UI"/>
+              </a:rPr>
+              <a:t>access</a:t>
+            </a:r>
+            <a:r>
+              <a:rPr b="0" i="1" dirty="0">
+                <a:solidFill>
+                  <a:srgbClr val="FFFFFF"/>
+                </a:solidFill>
+                <a:latin typeface="Segoe UI"/>
+              </a:rPr>
+              <a:t> </a:t>
+            </a:r>
+            <a:r>
+              <a:rPr b="0" i="1" dirty="0">
+                <a:solidFill>
+                  <a:schemeClr val="accent6"/>
+                </a:solidFill>
+                <a:latin typeface="Segoe UI"/>
+              </a:rPr>
+              <a:t>24/7</a:t>
+            </a:r>
+            <a:r>
+              <a:rPr b="0" i="1" dirty="0">
+                <a:solidFill>
+                  <a:srgbClr val="FFFFFF"/>
+                </a:solidFill>
+                <a:latin typeface="Segoe UI"/>
+              </a:rPr>
+              <a:t> during the exam period…”</a:t>
+            </a:r>
+          </a:p>
+        </p:txBody>
+      </p:sp>
+      <p:sp>
+        <p:nvSpPr>
+          <p:cNvPr id="19" name="TextBox 18"/>
+          <p:cNvSpPr txBox="1"/>
+          <p:nvPr/>
+        </p:nvSpPr>
+        <p:spPr>
+          <a:xfrm>
+            <a:off x="937260" y="3765768"/>
+            <a:ext cx="4937760" cy="246221"/>
+          </a:xfrm>
+          <a:prstGeom prst="rect">
+            <a:avLst/>
+          </a:prstGeom>
+          <a:noFill/>
+        </p:spPr>
+        <p:txBody>
+          <a:bodyPr wrap="square" lIns="0" tIns="0" rIns="0" bIns="0" anchor="t">
+            <a:spAutoFit/>
+          </a:bodyPr>
+          <a:lstStyle/>
+          <a:p>
+            <a:pPr algn="l"/>
+            <a:r>
+              <a:rPr sz="1600" b="1" i="0" dirty="0">
+                <a:solidFill>
+                  <a:srgbClr val="E06C6C"/>
+                </a:solidFill>
+                <a:latin typeface="Segoe UI"/>
+              </a:rPr>
+              <a:t>shares: library · access · 24/7  →  score 3  →  wins</a:t>
+            </a:r>
+          </a:p>
+        </p:txBody>
+      </p:sp>
+      <p:sp>
+        <p:nvSpPr>
+          <p:cNvPr id="20" name="Rounded Rectangle 19"/>
           <p:cNvSpPr/>
           <p:nvPr/>
         </p:nvSpPr>
         <p:spPr>
           <a:xfrm>
-            <a:off x="3749039" y="1691640"/>
-            <a:ext cx="7635240" cy="475488"/>
+            <a:off x="6217920" y="2468880"/>
+            <a:ext cx="5166360" cy="1828800"/>
           </a:xfrm>
           <a:prstGeom prst="roundRect">
             <a:avLst>
-              <a:gd name="adj" fmla="val 30000"/>
+              <a:gd name="adj" fmla="val 6000"/>
             </a:avLst>
           </a:prstGeom>
           <a:solidFill>
@@ -20903,20 +22358,20 @@
           <a:lstStyle/>
           <a:p>
             <a:pPr algn="ctr"/>
-            <a:endParaRPr/>
-          </a:p>
-        </p:txBody>
-      </p:sp>
-      <p:sp>
-        <p:nvSpPr>
-          <p:cNvPr id="15" name="TextBox 14"/>
+            <a:endParaRPr sz="2800"/>
+          </a:p>
+        </p:txBody>
+      </p:sp>
+      <p:sp>
+        <p:nvSpPr>
+          <p:cNvPr id="21" name="TextBox 20"/>
           <p:cNvSpPr txBox="1"/>
           <p:nvPr/>
         </p:nvSpPr>
         <p:spPr>
           <a:xfrm>
-            <a:off x="4023360" y="1691640"/>
-            <a:ext cx="7178040" cy="475488"/>
+            <a:off x="6446520" y="2606040"/>
+            <a:ext cx="4709160" cy="276999"/>
           </a:xfrm>
           <a:prstGeom prst="rect">
             <a:avLst/>
@@ -20924,34 +22379,126 @@
           <a:noFill/>
         </p:spPr>
         <p:txBody>
-          <a:bodyPr wrap="square" lIns="0" tIns="0" rIns="0" bIns="0" anchor="ctr">
+          <a:bodyPr wrap="square" lIns="0" tIns="0" rIns="0" bIns="0" anchor="t">
             <a:spAutoFit/>
           </a:bodyPr>
           <a:lstStyle/>
           <a:p>
             <a:pPr algn="l"/>
             <a:r>
-              <a:rPr sz="1250" b="1" i="1">
+              <a:rPr b="1" i="0">
+                <a:solidFill>
+                  <a:srgbClr val="2DD4BF"/>
+                </a:solidFill>
+                <a:latin typeface="Segoe UI"/>
+              </a:rPr>
+              <a:t>General rule — governs this week</a:t>
+            </a:r>
+          </a:p>
+        </p:txBody>
+      </p:sp>
+      <p:sp>
+        <p:nvSpPr>
+          <p:cNvPr id="22" name="TextBox 21"/>
+          <p:cNvSpPr txBox="1"/>
+          <p:nvPr/>
+        </p:nvSpPr>
+        <p:spPr>
+          <a:xfrm>
+            <a:off x="6376741" y="3017520"/>
+            <a:ext cx="5091359" cy="301557"/>
+          </a:xfrm>
+          <a:prstGeom prst="rect">
+            <a:avLst/>
+          </a:prstGeom>
+          <a:noFill/>
+        </p:spPr>
+        <p:txBody>
+          <a:bodyPr wrap="square" lIns="0" tIns="0" rIns="0" bIns="0" anchor="t">
+            <a:spAutoFit/>
+          </a:bodyPr>
+          <a:lstStyle/>
+          <a:p>
+            <a:pPr algn="l">
+              <a:lnSpc>
+                <a:spcPct val="120000"/>
+              </a:lnSpc>
+            </a:pPr>
+            <a:r>
+              <a:rPr b="0" i="1" dirty="0">
                 <a:solidFill>
                   <a:srgbClr val="FFFFFF"/>
                 </a:solidFill>
                 <a:latin typeface="Segoe UI"/>
               </a:rPr>
-              <a:t>Week 3 of term. Student asks: “Can I access the library 24/7?”</a:t>
-            </a:r>
-          </a:p>
-        </p:txBody>
-      </p:sp>
-      <p:sp>
-        <p:nvSpPr>
-          <p:cNvPr id="16" name="Rounded Rectangle 15"/>
+              <a:t>“</a:t>
+            </a:r>
+            <a:r>
+              <a:rPr b="0" i="1" dirty="0">
+                <a:solidFill>
+                  <a:schemeClr val="accent6"/>
+                </a:solidFill>
+                <a:latin typeface="Segoe UI"/>
+              </a:rPr>
+              <a:t>Library</a:t>
+            </a:r>
+            <a:r>
+              <a:rPr b="0" i="1" dirty="0">
+                <a:solidFill>
+                  <a:srgbClr val="FFFFFF"/>
+                </a:solidFill>
+                <a:latin typeface="Segoe UI"/>
+              </a:rPr>
+              <a:t> opening hours: 8am–10pm on term days.”</a:t>
+            </a:r>
+          </a:p>
+        </p:txBody>
+      </p:sp>
+      <p:sp>
+        <p:nvSpPr>
+          <p:cNvPr id="23" name="TextBox 22"/>
+          <p:cNvSpPr txBox="1"/>
+          <p:nvPr/>
+        </p:nvSpPr>
+        <p:spPr>
+          <a:xfrm>
+            <a:off x="6446520" y="3749039"/>
+            <a:ext cx="4709160" cy="246221"/>
+          </a:xfrm>
+          <a:prstGeom prst="rect">
+            <a:avLst/>
+          </a:prstGeom>
+          <a:noFill/>
+        </p:spPr>
+        <p:txBody>
+          <a:bodyPr wrap="square" lIns="0" tIns="0" rIns="0" bIns="0" anchor="t">
+            <a:spAutoFit/>
+          </a:bodyPr>
+          <a:lstStyle/>
+          <a:p>
+            <a:pPr algn="l"/>
+            <a:r>
+              <a:rPr sz="1600" b="1" i="0">
+                <a:solidFill>
+                  <a:srgbClr val="9FB3C8"/>
+                </a:solidFill>
+                <a:latin typeface="Segoe UI"/>
+              </a:rPr>
+              <a:t>shares: library  →  score 1  →  left behind</a:t>
+            </a:r>
+          </a:p>
+        </p:txBody>
+      </p:sp>
+      <p:sp>
+        <p:nvSpPr>
+          <p:cNvPr id="24" name="Rounded Rectangle 23"/>
           <p:cNvSpPr/>
           <p:nvPr/>
         </p:nvSpPr>
         <p:spPr>
           <a:xfrm>
-            <a:off x="822960" y="2468880"/>
-            <a:ext cx="5166360" cy="1828800"/>
+            <a:off x="822960" y="4572000"/>
+            <a:ext cx="5166360" cy="777240"/>
           </a:xfrm>
           <a:prstGeom prst="roundRect">
             <a:avLst>
@@ -20986,321 +22533,7 @@
           <a:lstStyle/>
           <a:p>
             <a:pPr algn="ctr"/>
-            <a:endParaRPr/>
-          </a:p>
-        </p:txBody>
-      </p:sp>
-      <p:sp>
-        <p:nvSpPr>
-          <p:cNvPr id="17" name="TextBox 16"/>
-          <p:cNvSpPr txBox="1"/>
-          <p:nvPr/>
-        </p:nvSpPr>
-        <p:spPr>
-          <a:xfrm>
-            <a:off x="1051560" y="2606040"/>
-            <a:ext cx="4709160" cy="365760"/>
-          </a:xfrm>
-          <a:prstGeom prst="rect">
-            <a:avLst/>
-          </a:prstGeom>
-          <a:noFill/>
-        </p:spPr>
-        <p:txBody>
-          <a:bodyPr wrap="square" lIns="0" tIns="0" rIns="0" bIns="0" anchor="t">
-            <a:spAutoFit/>
-          </a:bodyPr>
-          <a:lstStyle/>
-          <a:p>
-            <a:pPr algn="l"/>
-            <a:r>
-              <a:rPr sz="1300" b="1" i="0">
-                <a:solidFill>
-                  <a:srgbClr val="E06C6C"/>
-                </a:solidFill>
-                <a:latin typeface="Segoe UI"/>
-              </a:rPr>
-              <a:t>Exam Period Appendix</a:t>
-            </a:r>
-          </a:p>
-        </p:txBody>
-      </p:sp>
-      <p:sp>
-        <p:nvSpPr>
-          <p:cNvPr id="18" name="TextBox 17"/>
-          <p:cNvSpPr txBox="1"/>
-          <p:nvPr/>
-        </p:nvSpPr>
-        <p:spPr>
-          <a:xfrm>
-            <a:off x="1051560" y="3017520"/>
-            <a:ext cx="4709160" cy="548640"/>
-          </a:xfrm>
-          <a:prstGeom prst="rect">
-            <a:avLst/>
-          </a:prstGeom>
-          <a:noFill/>
-        </p:spPr>
-        <p:txBody>
-          <a:bodyPr wrap="square" lIns="0" tIns="0" rIns="0" bIns="0" anchor="t">
-            <a:spAutoFit/>
-          </a:bodyPr>
-          <a:lstStyle/>
-          <a:p>
-            <a:pPr algn="l">
-              <a:lnSpc>
-                <a:spcPct val="120000"/>
-              </a:lnSpc>
-            </a:pPr>
-            <a:r>
-              <a:rPr sz="1200" b="0" i="1">
-                <a:solidFill>
-                  <a:srgbClr val="FFFFFF"/>
-                </a:solidFill>
-                <a:latin typeface="Segoe UI"/>
-              </a:rPr>
-              <a:t>“…library access 24/7 during the exam period…”</a:t>
-            </a:r>
-          </a:p>
-        </p:txBody>
-      </p:sp>
-      <p:sp>
-        <p:nvSpPr>
-          <p:cNvPr id="19" name="TextBox 18"/>
-          <p:cNvSpPr txBox="1"/>
-          <p:nvPr/>
-        </p:nvSpPr>
-        <p:spPr>
-          <a:xfrm>
-            <a:off x="1051560" y="3749039"/>
-            <a:ext cx="4709160" cy="411480"/>
-          </a:xfrm>
-          <a:prstGeom prst="rect">
-            <a:avLst/>
-          </a:prstGeom>
-          <a:noFill/>
-        </p:spPr>
-        <p:txBody>
-          <a:bodyPr wrap="square" lIns="0" tIns="0" rIns="0" bIns="0" anchor="t">
-            <a:spAutoFit/>
-          </a:bodyPr>
-          <a:lstStyle/>
-          <a:p>
-            <a:pPr algn="l"/>
-            <a:r>
-              <a:rPr sz="1100" b="1" i="0">
-                <a:solidFill>
-                  <a:srgbClr val="E06C6C"/>
-                </a:solidFill>
-                <a:latin typeface="Segoe UI"/>
-              </a:rPr>
-              <a:t>shares: library · access · 24/7  →  score 3  →  wins ✗</a:t>
-            </a:r>
-          </a:p>
-        </p:txBody>
-      </p:sp>
-      <p:sp>
-        <p:nvSpPr>
-          <p:cNvPr id="20" name="Rounded Rectangle 19"/>
-          <p:cNvSpPr/>
-          <p:nvPr/>
-        </p:nvSpPr>
-        <p:spPr>
-          <a:xfrm>
-            <a:off x="6217920" y="2468880"/>
-            <a:ext cx="5166360" cy="1828800"/>
-          </a:xfrm>
-          <a:prstGeom prst="roundRect">
-            <a:avLst>
-              <a:gd name="adj" fmla="val 6000"/>
-            </a:avLst>
-          </a:prstGeom>
-          <a:solidFill>
-            <a:srgbClr val="142847"/>
-          </a:solidFill>
-          <a:ln w="12700">
-            <a:solidFill>
-              <a:srgbClr val="2DD4BF"/>
-            </a:solidFill>
-          </a:ln>
-        </p:spPr>
-        <p:style>
-          <a:lnRef idx="1">
-            <a:schemeClr val="accent1"/>
-          </a:lnRef>
-          <a:fillRef idx="3">
-            <a:schemeClr val="accent1"/>
-          </a:fillRef>
-          <a:effectRef idx="2">
-            <a:schemeClr val="accent1"/>
-          </a:effectRef>
-          <a:fontRef idx="minor">
-            <a:schemeClr val="lt1"/>
-          </a:fontRef>
-        </p:style>
-        <p:txBody>
-          <a:bodyPr rtlCol="0" anchor="ctr"/>
-          <a:lstStyle/>
-          <a:p>
-            <a:pPr algn="ctr"/>
-            <a:endParaRPr/>
-          </a:p>
-        </p:txBody>
-      </p:sp>
-      <p:sp>
-        <p:nvSpPr>
-          <p:cNvPr id="21" name="TextBox 20"/>
-          <p:cNvSpPr txBox="1"/>
-          <p:nvPr/>
-        </p:nvSpPr>
-        <p:spPr>
-          <a:xfrm>
-            <a:off x="6446520" y="2606040"/>
-            <a:ext cx="4709160" cy="365760"/>
-          </a:xfrm>
-          <a:prstGeom prst="rect">
-            <a:avLst/>
-          </a:prstGeom>
-          <a:noFill/>
-        </p:spPr>
-        <p:txBody>
-          <a:bodyPr wrap="square" lIns="0" tIns="0" rIns="0" bIns="0" anchor="t">
-            <a:spAutoFit/>
-          </a:bodyPr>
-          <a:lstStyle/>
-          <a:p>
-            <a:pPr algn="l"/>
-            <a:r>
-              <a:rPr sz="1300" b="1" i="0">
-                <a:solidFill>
-                  <a:srgbClr val="2DD4BF"/>
-                </a:solidFill>
-                <a:latin typeface="Segoe UI"/>
-              </a:rPr>
-              <a:t>General rule — governs this week</a:t>
-            </a:r>
-          </a:p>
-        </p:txBody>
-      </p:sp>
-      <p:sp>
-        <p:nvSpPr>
-          <p:cNvPr id="22" name="TextBox 21"/>
-          <p:cNvSpPr txBox="1"/>
-          <p:nvPr/>
-        </p:nvSpPr>
-        <p:spPr>
-          <a:xfrm>
-            <a:off x="6446520" y="3017520"/>
-            <a:ext cx="4709160" cy="548640"/>
-          </a:xfrm>
-          <a:prstGeom prst="rect">
-            <a:avLst/>
-          </a:prstGeom>
-          <a:noFill/>
-        </p:spPr>
-        <p:txBody>
-          <a:bodyPr wrap="square" lIns="0" tIns="0" rIns="0" bIns="0" anchor="t">
-            <a:spAutoFit/>
-          </a:bodyPr>
-          <a:lstStyle/>
-          <a:p>
-            <a:pPr algn="l">
-              <a:lnSpc>
-                <a:spcPct val="120000"/>
-              </a:lnSpc>
-            </a:pPr>
-            <a:r>
-              <a:rPr sz="1200" b="0" i="1">
-                <a:solidFill>
-                  <a:srgbClr val="FFFFFF"/>
-                </a:solidFill>
-                <a:latin typeface="Segoe UI"/>
-              </a:rPr>
-              <a:t>“Library opening hours: 8am–10pm on term days.”</a:t>
-            </a:r>
-          </a:p>
-        </p:txBody>
-      </p:sp>
-      <p:sp>
-        <p:nvSpPr>
-          <p:cNvPr id="23" name="TextBox 22"/>
-          <p:cNvSpPr txBox="1"/>
-          <p:nvPr/>
-        </p:nvSpPr>
-        <p:spPr>
-          <a:xfrm>
-            <a:off x="6446520" y="3749039"/>
-            <a:ext cx="4709160" cy="411480"/>
-          </a:xfrm>
-          <a:prstGeom prst="rect">
-            <a:avLst/>
-          </a:prstGeom>
-          <a:noFill/>
-        </p:spPr>
-        <p:txBody>
-          <a:bodyPr wrap="square" lIns="0" tIns="0" rIns="0" bIns="0" anchor="t">
-            <a:spAutoFit/>
-          </a:bodyPr>
-          <a:lstStyle/>
-          <a:p>
-            <a:pPr algn="l"/>
-            <a:r>
-              <a:rPr sz="1100" b="1" i="0">
-                <a:solidFill>
-                  <a:srgbClr val="9FB3C8"/>
-                </a:solidFill>
-                <a:latin typeface="Segoe UI"/>
-              </a:rPr>
-              <a:t>shares: library  →  score 1  →  left behind</a:t>
-            </a:r>
-          </a:p>
-        </p:txBody>
-      </p:sp>
-      <p:sp>
-        <p:nvSpPr>
-          <p:cNvPr id="24" name="Rounded Rectangle 23"/>
-          <p:cNvSpPr/>
-          <p:nvPr/>
-        </p:nvSpPr>
-        <p:spPr>
-          <a:xfrm>
-            <a:off x="822960" y="4572000"/>
-            <a:ext cx="5166360" cy="777240"/>
-          </a:xfrm>
-          <a:prstGeom prst="roundRect">
-            <a:avLst>
-              <a:gd name="adj" fmla="val 6000"/>
-            </a:avLst>
-          </a:prstGeom>
-          <a:solidFill>
-            <a:srgbClr val="142847"/>
-          </a:solidFill>
-          <a:ln w="12700">
-            <a:solidFill>
-              <a:srgbClr val="E06C6C"/>
-            </a:solidFill>
-          </a:ln>
-        </p:spPr>
-        <p:style>
-          <a:lnRef idx="1">
-            <a:schemeClr val="accent1"/>
-          </a:lnRef>
-          <a:fillRef idx="3">
-            <a:schemeClr val="accent1"/>
-          </a:fillRef>
-          <a:effectRef idx="2">
-            <a:schemeClr val="accent1"/>
-          </a:effectRef>
-          <a:fontRef idx="minor">
-            <a:schemeClr val="lt1"/>
-          </a:fontRef>
-        </p:style>
-        <p:txBody>
-          <a:bodyPr rtlCol="0" anchor="ctr"/>
-          <a:lstStyle/>
-          <a:p>
-            <a:pPr algn="ctr"/>
-            <a:endParaRPr/>
+            <a:endParaRPr sz="2800"/>
           </a:p>
         </p:txBody>
       </p:sp>
@@ -21312,8 +22545,8 @@
         </p:nvSpPr>
         <p:spPr>
           <a:xfrm>
-            <a:off x="1051560" y="4572000"/>
-            <a:ext cx="4709160" cy="777240"/>
+            <a:off x="1051560" y="4679775"/>
+            <a:ext cx="4709160" cy="561692"/>
           </a:xfrm>
           <a:prstGeom prst="rect">
             <a:avLst/>
@@ -21332,25 +22565,34 @@
               </a:lnSpc>
             </a:pPr>
             <a:r>
-              <a:rPr sz="1250" b="1" i="0">
+              <a:rPr b="1" i="0" dirty="0" err="1">
                 <a:solidFill>
                   <a:srgbClr val="FFFFFF"/>
                 </a:solidFill>
                 <a:latin typeface="Segoe UI"/>
               </a:rPr>
-              <a:t>MetMate: “Yes — the library is open 24/7.”</a:t>
+              <a:t>MetMate</a:t>
+            </a:r>
+            <a:r>
+              <a:rPr b="1" i="0" dirty="0">
+                <a:solidFill>
+                  <a:srgbClr val="FFFFFF"/>
+                </a:solidFill>
+                <a:latin typeface="Segoe UI"/>
+              </a:rPr>
+              <a:t>: “Yes — the library is open 24/7.”</a:t>
             </a:r>
           </a:p>
           <a:p>
             <a:pPr algn="l"/>
             <a:r>
-              <a:rPr sz="1050" b="0" i="1">
+              <a:rPr sz="1400" b="0" i="1" dirty="0">
                 <a:solidFill>
                   <a:srgbClr val="E06C6C"/>
                 </a:solidFill>
                 <a:latin typeface="Segoe UI"/>
               </a:rPr>
-              <a:t>Confident. Wrong. Every word from a real document.</a:t>
+              <a:t>Confident. Wrong. </a:t>
             </a:r>
           </a:p>
         </p:txBody>
@@ -21399,7 +22641,7 @@
           <a:lstStyle/>
           <a:p>
             <a:pPr algn="ctr"/>
-            <a:endParaRPr/>
+            <a:endParaRPr sz="2800"/>
           </a:p>
         </p:txBody>
       </p:sp>
@@ -21411,8 +22653,8 @@
         </p:nvSpPr>
         <p:spPr>
           <a:xfrm>
-            <a:off x="6446520" y="4572000"/>
-            <a:ext cx="4709160" cy="777240"/>
+            <a:off x="6446520" y="4821961"/>
+            <a:ext cx="4709160" cy="277320"/>
           </a:xfrm>
           <a:prstGeom prst="rect">
             <a:avLst/>
@@ -21431,26 +22673,20 @@
               </a:lnSpc>
             </a:pPr>
             <a:r>
-              <a:rPr sz="1100" b="0" i="0">
+              <a:rPr lang="en-AU" sz="1600" b="0" i="0" dirty="0">
                 <a:solidFill>
                   <a:srgbClr val="FFFFFF"/>
                 </a:solidFill>
                 <a:latin typeface="Segoe UI"/>
               </a:rPr>
-              <a:t>The quieter failure: “enrolment” scores ZERO against a chunk</a:t>
-            </a:r>
-          </a:p>
-          <a:p>
-            <a:pPr algn="l"/>
-            <a:r>
-              <a:rPr sz="1100" b="0" i="0">
-                <a:solidFill>
-                  <a:srgbClr val="FFFFFF"/>
-                </a:solidFill>
-                <a:latin typeface="Segoe UI"/>
-              </a:rPr>
-              <a:t>that says “registration”. Synonyms are invisible.</a:t>
-            </a:r>
+              <a:t>Failed</a:t>
+            </a:r>
+            <a:endParaRPr sz="1600" b="0" i="0" dirty="0">
+              <a:solidFill>
+                <a:srgbClr val="FFFFFF"/>
+              </a:solidFill>
+              <a:latin typeface="Segoe UI"/>
+            </a:endParaRPr>
           </a:p>
         </p:txBody>
       </p:sp>
@@ -21463,7 +22699,7 @@
         <p:spPr>
           <a:xfrm>
             <a:off x="822960" y="5669280"/>
-            <a:ext cx="10607040" cy="492892"/>
+            <a:ext cx="10607040" cy="682431"/>
           </a:xfrm>
           <a:prstGeom prst="rect">
             <a:avLst/>
@@ -21482,7 +22718,7 @@
               </a:lnSpc>
             </a:pPr>
             <a:r>
-              <a:rPr sz="1300" b="0" i="1" dirty="0">
+              <a:rPr b="0" i="1" dirty="0">
                 <a:solidFill>
                   <a:srgbClr val="F5B342"/>
                 </a:solidFill>
@@ -21491,7 +22727,7 @@
               <a:t>LEXICAL matching</a:t>
             </a:r>
             <a:r>
-              <a:rPr lang="en-AU" sz="1300" b="0" i="1" dirty="0">
+              <a:rPr lang="en-AU" b="0" i="1" dirty="0">
                 <a:solidFill>
                   <a:srgbClr val="F5B342"/>
                 </a:solidFill>
@@ -21507,7 +22743,7 @@
               </a:lnSpc>
             </a:pPr>
             <a:r>
-              <a:rPr sz="1300" b="0" i="1" dirty="0">
+              <a:rPr b="0" i="1" dirty="0">
                 <a:solidFill>
                   <a:srgbClr val="F5B342"/>
                 </a:solidFill>
@@ -21516,7 +22752,7 @@
               <a:t>SEMANTIC matching</a:t>
             </a:r>
             <a:r>
-              <a:rPr lang="en-AU" sz="1300" b="0" i="1" dirty="0">
+              <a:rPr lang="en-AU" b="0" i="1" dirty="0">
                 <a:solidFill>
                   <a:srgbClr val="F5B342"/>
                 </a:solidFill>
@@ -21524,7 +22760,7 @@
               </a:rPr>
               <a:t> - solution</a:t>
             </a:r>
-            <a:endParaRPr sz="1300" b="0" i="1" dirty="0">
+            <a:endParaRPr b="0" i="1" dirty="0">
               <a:solidFill>
                 <a:srgbClr val="F5B342"/>
               </a:solidFill>
